--- a/praksa/RAST/izradaprezentacije/Sigurnost_na_internetu_prezentacija.pptx
+++ b/praksa/RAST/izradaprezentacije/Sigurnost_na_internetu_prezentacija.pptx
@@ -4,27 +4,28 @@
   <p:sldMasterIdLst>
     <p:sldMasterId id="2147483648" r:id="rId1"/>
   </p:sldMasterIdLst>
+  <p:notesMasterIdLst>
+    <p:notesMasterId r:id="rId18"/>
+  </p:notesMasterIdLst>
   <p:sldIdLst>
     <p:sldId id="256" r:id="rId2"/>
     <p:sldId id="257" r:id="rId3"/>
-    <p:sldId id="258" r:id="rId4"/>
-    <p:sldId id="259" r:id="rId5"/>
-    <p:sldId id="260" r:id="rId6"/>
-    <p:sldId id="261" r:id="rId7"/>
-    <p:sldId id="262" r:id="rId8"/>
-    <p:sldId id="263" r:id="rId9"/>
-    <p:sldId id="264" r:id="rId10"/>
-    <p:sldId id="265" r:id="rId11"/>
-    <p:sldId id="266" r:id="rId12"/>
-    <p:sldId id="267" r:id="rId13"/>
-    <p:sldId id="268" r:id="rId14"/>
-    <p:sldId id="269" r:id="rId15"/>
-    <p:sldId id="270" r:id="rId16"/>
+    <p:sldId id="271" r:id="rId4"/>
+    <p:sldId id="258" r:id="rId5"/>
+    <p:sldId id="259" r:id="rId6"/>
+    <p:sldId id="260" r:id="rId7"/>
+    <p:sldId id="261" r:id="rId8"/>
+    <p:sldId id="262" r:id="rId9"/>
+    <p:sldId id="263" r:id="rId10"/>
+    <p:sldId id="264" r:id="rId11"/>
+    <p:sldId id="265" r:id="rId12"/>
+    <p:sldId id="266" r:id="rId13"/>
+    <p:sldId id="267" r:id="rId14"/>
+    <p:sldId id="268" r:id="rId15"/>
+    <p:sldId id="269" r:id="rId16"/>
+    <p:sldId id="270" r:id="rId17"/>
   </p:sldIdLst>
-  <p:notesMasterIdLst>
-    <p:notesMasterId r:id="rId17"/>
-  </p:notesMasterIdLst>
-  <p:sldSz cx="9144000" cy="5143500"/>
+  <p:sldSz cx="9144000" cy="5143500" type="screen16x9"/>
   <p:notesSz cx="5143500" cy="9144000"/>
   <p:defaultTextStyle>
     <a:lvl1pPr marL="0" algn="l" defTabSz="914400" rtl="0" eaLnBrk="1" latinLnBrk="0" hangingPunct="1">
@@ -118,6 +119,11 @@
       </a:defRPr>
     </a:lvl9pPr>
   </p:defaultTextStyle>
+  <p:extLst>
+    <p:ext uri="{EFAFB233-063F-42B5-8137-9DF3F51BA10A}">
+      <p15:sldGuideLst xmlns:p15="http://schemas.microsoft.com/office/powerpoint/2012/main"/>
+    </p:ext>
+  </p:extLst>
 </p:presentation>
 </file>
 
@@ -143,234 +149,10 @@
           <a:chExt cx="0" cy="0"/>
         </a:xfrm>
       </p:grpSpPr>
-      <p:sp>
-        <p:nvSpPr>
-          <p:cNvPr id="2" name="Header Placeholder 1"/>
-          <p:cNvSpPr>
-            <a:spLocks noGrp="1"/>
-          </p:cNvSpPr>
-          <p:nvPr>
-            <p:ph type="hdr" sz="quarter"/>
-          </p:nvPr>
-        </p:nvSpPr>
-        <p:spPr>
-          <a:xfrm>
-            <a:off x="0" y="0"/>
-            <a:ext cx="2971800" cy="458788"/>
-          </a:xfrm>
-          <a:prstGeom prst="rect">
-            <a:avLst/>
-          </a:prstGeom>
-        </p:spPr>
-        <p:txBody>
-          <a:bodyPr vert="horz" lIns="91440" tIns="45720" rIns="91440" bIns="45720" rtlCol="0"/>
-          <a:lstStyle>
-            <a:lvl1pPr algn="l">
-              <a:defRPr sz="1200"/>
-            </a:lvl1pPr>
-          </a:lstStyle>
-          <a:p>
-            <a:endParaRPr lang="en-US"/>
-          </a:p>
-        </p:txBody>
-      </p:sp>
-      <p:sp>
-        <p:nvSpPr>
-          <p:cNvPr id="3" name="Date Placeholder 2"/>
-          <p:cNvSpPr>
-            <a:spLocks noGrp="1"/>
-          </p:cNvSpPr>
-          <p:nvPr>
-            <p:ph type="dt" idx="1"/>
-          </p:nvPr>
-        </p:nvSpPr>
-        <p:spPr>
-          <a:xfrm>
-            <a:off x="3884613" y="0"/>
-            <a:ext cx="2971800" cy="458788"/>
-          </a:xfrm>
-          <a:prstGeom prst="rect">
-            <a:avLst/>
-          </a:prstGeom>
-        </p:spPr>
-        <p:txBody>
-          <a:bodyPr vert="horz" lIns="91440" tIns="45720" rIns="91440" bIns="45720" rtlCol="0"/>
-          <a:lstStyle>
-            <a:lvl1pPr algn="r">
-              <a:defRPr sz="1200"/>
-            </a:lvl1pPr>
-          </a:lstStyle>
-          <a:p>
-            <a:fld id="{5282F153-3F37-0F45-9E97-73ACFA13230C}" type="datetimeFigureOut">
-              <a:rPr lang="en-US"/>
-              <a:t>7/23/19</a:t>
-            </a:fld>
-            <a:endParaRPr lang="en-US"/>
-          </a:p>
-        </p:txBody>
-      </p:sp>
-      <p:sp>
-        <p:nvSpPr>
-          <p:cNvPr id="4" name="Slide Image Placeholder 3"/>
-          <p:cNvSpPr>
-            <a:spLocks noGrp="1" noRot="1" noChangeAspect="1"/>
-          </p:cNvSpPr>
-          <p:nvPr>
-            <p:ph type="sldImg" idx="2"/>
-          </p:nvPr>
-        </p:nvSpPr>
-        <p:spPr>
-          <a:xfrm>
-            <a:off x="685800" y="1143000"/>
-            <a:ext cx="5486400" cy="3086100"/>
-          </a:xfrm>
-          <a:prstGeom prst="rect">
-            <a:avLst/>
-          </a:prstGeom>
-          <a:noFill/>
-          <a:ln w="12700">
-            <a:solidFill>
-              <a:prstClr val="black"/>
-            </a:solidFill>
-          </a:ln>
-        </p:spPr>
-        <p:txBody>
-          <a:bodyPr vert="horz" lIns="91440" tIns="45720" rIns="91440" bIns="45720" rtlCol="0" anchor="ctr"/>
-          <a:lstStyle/>
-          <a:p>
-            <a:endParaRPr lang="en-US"/>
-          </a:p>
-        </p:txBody>
-      </p:sp>
-      <p:sp>
-        <p:nvSpPr>
-          <p:cNvPr id="5" name="Notes Placeholder 4"/>
-          <p:cNvSpPr>
-            <a:spLocks noGrp="1"/>
-          </p:cNvSpPr>
-          <p:nvPr>
-            <p:ph type="body" sz="quarter" idx="3"/>
-          </p:nvPr>
-        </p:nvSpPr>
-        <p:spPr>
-          <a:xfrm>
-            <a:off x="685800" y="4400550"/>
-            <a:ext cx="5486400" cy="3600450"/>
-          </a:xfrm>
-          <a:prstGeom prst="rect">
-            <a:avLst/>
-          </a:prstGeom>
-        </p:spPr>
-        <p:txBody>
-          <a:bodyPr vert="horz" lIns="91440" tIns="45720" rIns="91440" bIns="45720" rtlCol="0"/>
-          <a:lstStyle/>
-          <a:p>
-            <a:pPr lvl="0"/>
-            <a:r>
-              <a:rPr lang="en-US"/>
-              <a:t>Click to edit Master text styles</a:t>
-            </a:r>
-          </a:p>
-          <a:p>
-            <a:pPr lvl="1"/>
-            <a:r>
-              <a:rPr lang="en-US"/>
-              <a:t>Second level</a:t>
-            </a:r>
-          </a:p>
-          <a:p>
-            <a:pPr lvl="2"/>
-            <a:r>
-              <a:rPr lang="en-US"/>
-              <a:t>Third level</a:t>
-            </a:r>
-          </a:p>
-          <a:p>
-            <a:pPr lvl="3"/>
-            <a:r>
-              <a:rPr lang="en-US"/>
-              <a:t>Fourth level</a:t>
-            </a:r>
-          </a:p>
-          <a:p>
-            <a:pPr lvl="4"/>
-            <a:r>
-              <a:rPr lang="en-US"/>
-              <a:t>Fifth level</a:t>
-            </a:r>
-          </a:p>
-        </p:txBody>
-      </p:sp>
-      <p:sp>
-        <p:nvSpPr>
-          <p:cNvPr id="6" name="Footer Placeholder 5"/>
-          <p:cNvSpPr>
-            <a:spLocks noGrp="1"/>
-          </p:cNvSpPr>
-          <p:nvPr>
-            <p:ph type="ftr" sz="quarter" idx="4"/>
-          </p:nvPr>
-        </p:nvSpPr>
-        <p:spPr>
-          <a:xfrm>
-            <a:off x="0" y="8685213"/>
-            <a:ext cx="2971800" cy="458787"/>
-          </a:xfrm>
-          <a:prstGeom prst="rect">
-            <a:avLst/>
-          </a:prstGeom>
-        </p:spPr>
-        <p:txBody>
-          <a:bodyPr vert="horz" lIns="91440" tIns="45720" rIns="91440" bIns="45720" rtlCol="0" anchor="b"/>
-          <a:lstStyle>
-            <a:lvl1pPr algn="l">
-              <a:defRPr sz="1200"/>
-            </a:lvl1pPr>
-          </a:lstStyle>
-          <a:p>
-            <a:endParaRPr lang="en-US"/>
-          </a:p>
-        </p:txBody>
-      </p:sp>
-      <p:sp>
-        <p:nvSpPr>
-          <p:cNvPr id="7" name="Slide Number Placeholder 6"/>
-          <p:cNvSpPr>
-            <a:spLocks noGrp="1"/>
-          </p:cNvSpPr>
-          <p:nvPr>
-            <p:ph type="sldNum" sz="quarter" idx="5"/>
-          </p:nvPr>
-        </p:nvSpPr>
-        <p:spPr>
-          <a:xfrm>
-            <a:off x="3884613" y="8685213"/>
-            <a:ext cx="2971800" cy="458787"/>
-          </a:xfrm>
-          <a:prstGeom prst="rect">
-            <a:avLst/>
-          </a:prstGeom>
-        </p:spPr>
-        <p:txBody>
-          <a:bodyPr vert="horz" lIns="91440" tIns="45720" rIns="91440" bIns="45720" rtlCol="0" anchor="b"/>
-          <a:lstStyle>
-            <a:lvl1pPr algn="r">
-              <a:defRPr sz="1200"/>
-            </a:lvl1pPr>
-          </a:lstStyle>
-          <a:p>
-            <a:fld id="{CE5E9CC1-C706-0F49-92D6-E571CC5EEA8F}" type="slidenum">
-              <a:rPr lang="en-US"/>
-              <a:t>‹#›</a:t>
-            </a:fld>
-            <a:endParaRPr lang="en-US"/>
-          </a:p>
-        </p:txBody>
-      </p:sp>
     </p:spTree>
     <p:extLst>
       <p:ext uri="{BB962C8B-B14F-4D97-AF65-F5344CB8AC3E}">
-        <p14:creationId xmlns:p14="http://schemas.microsoft.com/office/powerpoint/2010/main" val="1024086991"/>
+        <p14:creationId xmlns:p14="http://schemas.microsoft.com/office/powerpoint/2010/main" val="155408040"/>
       </p:ext>
     </p:extLst>
   </p:cSld>
@@ -514,10 +296,6 @@
           <a:bodyPr/>
           <a:lstStyle/>
           <a:p>
-            <a:r>
-              <a:rPr lang="en-US" dirty="0"/>
-              <a:t/>
-            </a:r>
             <a:endParaRPr lang="en-US" dirty="0"/>
           </a:p>
         </p:txBody>
@@ -602,10 +380,6 @@
           <a:bodyPr/>
           <a:lstStyle/>
           <a:p>
-            <a:r>
-              <a:rPr lang="en-US" dirty="0"/>
-              <a:t/>
-            </a:r>
             <a:endParaRPr lang="en-US" dirty="0"/>
           </a:p>
         </p:txBody>
@@ -690,10 +464,6 @@
           <a:bodyPr/>
           <a:lstStyle/>
           <a:p>
-            <a:r>
-              <a:rPr lang="en-US" dirty="0"/>
-              <a:t/>
-            </a:r>
             <a:endParaRPr lang="en-US" dirty="0"/>
           </a:p>
         </p:txBody>
@@ -778,10 +548,6 @@
           <a:bodyPr/>
           <a:lstStyle/>
           <a:p>
-            <a:r>
-              <a:rPr lang="en-US" dirty="0"/>
-              <a:t/>
-            </a:r>
             <a:endParaRPr lang="en-US" dirty="0"/>
           </a:p>
         </p:txBody>
@@ -866,10 +632,6 @@
           <a:bodyPr/>
           <a:lstStyle/>
           <a:p>
-            <a:r>
-              <a:rPr lang="en-US" dirty="0"/>
-              <a:t/>
-            </a:r>
             <a:endParaRPr lang="en-US" dirty="0"/>
           </a:p>
         </p:txBody>
@@ -954,10 +716,6 @@
           <a:bodyPr/>
           <a:lstStyle/>
           <a:p>
-            <a:r>
-              <a:rPr lang="en-US" dirty="0"/>
-              <a:t/>
-            </a:r>
             <a:endParaRPr lang="en-US" dirty="0"/>
           </a:p>
         </p:txBody>
@@ -1042,10 +800,6 @@
           <a:bodyPr/>
           <a:lstStyle/>
           <a:p>
-            <a:r>
-              <a:rPr lang="en-US" dirty="0"/>
-              <a:t/>
-            </a:r>
             <a:endParaRPr lang="en-US" dirty="0"/>
           </a:p>
         </p:txBody>
@@ -1068,6 +822,90 @@
             <a:fld id="{F7021451-1387-4CA6-816F-3879F97B5CBC}" type="slidenum">
               <a:rPr lang="en-US"/>
               <a:t>15</a:t>
+            </a:fld>
+            <a:endParaRPr lang="en-US"/>
+          </a:p>
+        </p:txBody>
+      </p:sp>
+    </p:spTree>
+    <p:extLst>
+      <p:ext uri="{BB962C8B-B14F-4D97-AF65-F5344CB8AC3E}">
+        <p14:creationId xmlns:p14="http://schemas.microsoft.com/office/powerpoint/2010/main" val="1024086991"/>
+      </p:ext>
+    </p:extLst>
+  </p:cSld>
+  <p:clrMapOvr>
+    <a:masterClrMapping/>
+  </p:clrMapOvr>
+</p:notes>
+</file>
+
+<file path=ppt/notesSlides/notesSlide16.xml><?xml version="1.0" encoding="utf-8"?>
+<p:notes xmlns:a="http://schemas.openxmlformats.org/drawingml/2006/main" xmlns:r="http://schemas.openxmlformats.org/officeDocument/2006/relationships" xmlns:p="http://schemas.openxmlformats.org/presentationml/2006/main">
+  <p:cSld>
+    <p:spTree>
+      <p:nvGrpSpPr>
+        <p:cNvPr id="1" name=""/>
+        <p:cNvGrpSpPr/>
+        <p:nvPr/>
+      </p:nvGrpSpPr>
+      <p:grpSpPr>
+        <a:xfrm>
+          <a:off x="0" y="0"/>
+          <a:ext cx="0" cy="0"/>
+          <a:chOff x="0" y="0"/>
+          <a:chExt cx="0" cy="0"/>
+        </a:xfrm>
+      </p:grpSpPr>
+      <p:sp>
+        <p:nvSpPr>
+          <p:cNvPr id="2" name="Slide Image Placeholder 1"/>
+          <p:cNvSpPr>
+            <a:spLocks noGrp="1" noRot="1" noChangeAspect="1"/>
+          </p:cNvSpPr>
+          <p:nvPr>
+            <p:ph type="sldImg"/>
+          </p:nvPr>
+        </p:nvSpPr>
+        <p:spPr/>
+      </p:sp>
+      <p:sp>
+        <p:nvSpPr>
+          <p:cNvPr id="3" name="Notes Placeholder 2"/>
+          <p:cNvSpPr>
+            <a:spLocks noGrp="1"/>
+          </p:cNvSpPr>
+          <p:nvPr>
+            <p:ph type="body" idx="1"/>
+          </p:nvPr>
+        </p:nvSpPr>
+        <p:spPr/>
+        <p:txBody>
+          <a:bodyPr/>
+          <a:lstStyle/>
+          <a:p>
+            <a:endParaRPr lang="en-US" dirty="0"/>
+          </a:p>
+        </p:txBody>
+      </p:sp>
+      <p:sp>
+        <p:nvSpPr>
+          <p:cNvPr id="4" name="Slide Number Placeholder 3"/>
+          <p:cNvSpPr>
+            <a:spLocks noGrp="1"/>
+          </p:cNvSpPr>
+          <p:nvPr>
+            <p:ph type="sldNum" sz="quarter" idx="10"/>
+          </p:nvPr>
+        </p:nvSpPr>
+        <p:spPr/>
+        <p:txBody>
+          <a:bodyPr/>
+          <a:lstStyle/>
+          <a:p>
+            <a:fld id="{F7021451-1387-4CA6-816F-3879F97B5CBC}" type="slidenum">
+              <a:rPr lang="en-US"/>
+              <a:t>16</a:t>
             </a:fld>
             <a:endParaRPr lang="en-US"/>
           </a:p>
@@ -1130,10 +968,6 @@
           <a:bodyPr/>
           <a:lstStyle/>
           <a:p>
-            <a:r>
-              <a:rPr lang="en-US" dirty="0"/>
-              <a:t/>
-            </a:r>
             <a:endParaRPr lang="en-US" dirty="0"/>
           </a:p>
         </p:txBody>
@@ -1179,7 +1013,13 @@
   <p:cSld>
     <p:spTree>
       <p:nvGrpSpPr>
-        <p:cNvPr id="1" name=""/>
+        <p:cNvPr id="1" name="">
+          <a:extLst>
+            <a:ext uri="{FF2B5EF4-FFF2-40B4-BE49-F238E27FC236}">
+              <a16:creationId xmlns:a16="http://schemas.microsoft.com/office/drawing/2014/main" id="{0A7FF8D3-EBBA-86E8-B76F-7A8700F2CDCF}"/>
+            </a:ext>
+          </a:extLst>
+        </p:cNvPr>
         <p:cNvGrpSpPr/>
         <p:nvPr/>
       </p:nvGrpSpPr>
@@ -1193,7 +1033,13 @@
       </p:grpSpPr>
       <p:sp>
         <p:nvSpPr>
-          <p:cNvPr id="2" name="Slide Image Placeholder 1"/>
+          <p:cNvPr id="2" name="Slide Image Placeholder 1">
+            <a:extLst>
+              <a:ext uri="{FF2B5EF4-FFF2-40B4-BE49-F238E27FC236}">
+                <a16:creationId xmlns:a16="http://schemas.microsoft.com/office/drawing/2014/main" id="{E4C30F58-EA98-CDAC-C908-6CEDA88F03FF}"/>
+              </a:ext>
+            </a:extLst>
+          </p:cNvPr>
           <p:cNvSpPr>
             <a:spLocks noGrp="1" noRot="1" noChangeAspect="1"/>
           </p:cNvSpPr>
@@ -1205,7 +1051,13 @@
       </p:sp>
       <p:sp>
         <p:nvSpPr>
-          <p:cNvPr id="3" name="Notes Placeholder 2"/>
+          <p:cNvPr id="3" name="Notes Placeholder 2">
+            <a:extLst>
+              <a:ext uri="{FF2B5EF4-FFF2-40B4-BE49-F238E27FC236}">
+                <a16:creationId xmlns:a16="http://schemas.microsoft.com/office/drawing/2014/main" id="{C4424FCB-8235-1646-5460-89B2467D2CA3}"/>
+              </a:ext>
+            </a:extLst>
+          </p:cNvPr>
           <p:cNvSpPr>
             <a:spLocks noGrp="1"/>
           </p:cNvSpPr>
@@ -1218,17 +1070,19 @@
           <a:bodyPr/>
           <a:lstStyle/>
           <a:p>
-            <a:r>
-              <a:rPr lang="en-US" dirty="0"/>
-              <a:t/>
-            </a:r>
             <a:endParaRPr lang="en-US" dirty="0"/>
           </a:p>
         </p:txBody>
       </p:sp>
       <p:sp>
         <p:nvSpPr>
-          <p:cNvPr id="4" name="Slide Number Placeholder 3"/>
+          <p:cNvPr id="4" name="Slide Number Placeholder 3">
+            <a:extLst>
+              <a:ext uri="{FF2B5EF4-FFF2-40B4-BE49-F238E27FC236}">
+                <a16:creationId xmlns:a16="http://schemas.microsoft.com/office/drawing/2014/main" id="{FC2161E9-75F8-475D-8DC9-8FFBAC4BC552}"/>
+              </a:ext>
+            </a:extLst>
+          </p:cNvPr>
           <p:cNvSpPr>
             <a:spLocks noGrp="1"/>
           </p:cNvSpPr>
@@ -1252,7 +1106,7 @@
     </p:spTree>
     <p:extLst>
       <p:ext uri="{BB962C8B-B14F-4D97-AF65-F5344CB8AC3E}">
-        <p14:creationId xmlns:p14="http://schemas.microsoft.com/office/powerpoint/2010/main" val="1024086991"/>
+        <p14:creationId xmlns:p14="http://schemas.microsoft.com/office/powerpoint/2010/main" val="4289166206"/>
       </p:ext>
     </p:extLst>
   </p:cSld>
@@ -1306,10 +1160,6 @@
           <a:bodyPr/>
           <a:lstStyle/>
           <a:p>
-            <a:r>
-              <a:rPr lang="en-US" dirty="0"/>
-              <a:t/>
-            </a:r>
             <a:endParaRPr lang="en-US" dirty="0"/>
           </a:p>
         </p:txBody>
@@ -1394,10 +1244,6 @@
           <a:bodyPr/>
           <a:lstStyle/>
           <a:p>
-            <a:r>
-              <a:rPr lang="en-US" dirty="0"/>
-              <a:t/>
-            </a:r>
             <a:endParaRPr lang="en-US" dirty="0"/>
           </a:p>
         </p:txBody>
@@ -1482,10 +1328,6 @@
           <a:bodyPr/>
           <a:lstStyle/>
           <a:p>
-            <a:r>
-              <a:rPr lang="en-US" dirty="0"/>
-              <a:t/>
-            </a:r>
             <a:endParaRPr lang="en-US" dirty="0"/>
           </a:p>
         </p:txBody>
@@ -1570,10 +1412,6 @@
           <a:bodyPr/>
           <a:lstStyle/>
           <a:p>
-            <a:r>
-              <a:rPr lang="en-US" dirty="0"/>
-              <a:t/>
-            </a:r>
             <a:endParaRPr lang="en-US" dirty="0"/>
           </a:p>
         </p:txBody>
@@ -1658,10 +1496,6 @@
           <a:bodyPr/>
           <a:lstStyle/>
           <a:p>
-            <a:r>
-              <a:rPr lang="en-US" dirty="0"/>
-              <a:t/>
-            </a:r>
             <a:endParaRPr lang="en-US" dirty="0"/>
           </a:p>
         </p:txBody>
@@ -1746,10 +1580,6 @@
           <a:bodyPr/>
           <a:lstStyle/>
           <a:p>
-            <a:r>
-              <a:rPr lang="en-US" dirty="0"/>
-              <a:t/>
-            </a:r>
             <a:endParaRPr lang="en-US" dirty="0"/>
           </a:p>
         </p:txBody>
@@ -1823,6 +1653,11 @@
 <file path=ppt/slideMasters/slideMaster1.xml><?xml version="1.0" encoding="utf-8"?>
 <p:sldMaster xmlns:a="http://schemas.openxmlformats.org/drawingml/2006/main" xmlns:r="http://schemas.openxmlformats.org/officeDocument/2006/relationships" xmlns:p="http://schemas.openxmlformats.org/presentationml/2006/main">
   <p:cSld>
+    <p:bg>
+      <p:bgRef idx="1001">
+        <a:schemeClr val="bg1"/>
+      </p:bgRef>
+    </p:bg>
     <p:spTree>
       <p:nvGrpSpPr>
         <p:cNvPr id="1" name=""/>
@@ -2105,6 +1940,7 @@
         <a:solidFill>
           <a:srgbClr val="1A1A1A"/>
         </a:solidFill>
+        <a:effectLst/>
       </p:bgPr>
     </p:bg>
     <p:spTree>
@@ -2145,6 +1981,13 @@
             <a:prstDash val="solid"/>
           </a:ln>
         </p:spPr>
+        <p:txBody>
+          <a:bodyPr/>
+          <a:lstStyle/>
+          <a:p>
+            <a:endParaRPr lang="en-US"/>
+          </a:p>
+        </p:txBody>
       </p:sp>
       <p:sp>
         <p:nvSpPr>
@@ -2167,7 +2010,7 @@
           <a:bodyPr wrap="square" rtlCol="0" anchor="t"/>
           <a:lstStyle/>
           <a:p>
-            <a:pPr indent="0" marL="0">
+            <a:pPr marL="0" indent="0">
               <a:buNone/>
             </a:pPr>
             <a:r>
@@ -2181,7 +2024,7 @@
             <a:endParaRPr lang="en-US" sz="4000" dirty="0"/>
           </a:p>
           <a:p>
-            <a:pPr indent="0" marL="0">
+            <a:pPr marL="0" indent="0">
               <a:buNone/>
             </a:pPr>
             <a:r>
@@ -2220,6 +2063,13 @@
             <a:prstDash val="solid"/>
           </a:ln>
         </p:spPr>
+        <p:txBody>
+          <a:bodyPr/>
+          <a:lstStyle/>
+          <a:p>
+            <a:endParaRPr lang="en-US"/>
+          </a:p>
+        </p:txBody>
       </p:sp>
       <p:sp>
         <p:nvSpPr>
@@ -2242,7 +2092,7 @@
           <a:bodyPr wrap="square" lIns="0" tIns="101600" rIns="0" bIns="0" rtlCol="0" anchor="ctr"/>
           <a:lstStyle/>
           <a:p>
-            <a:pPr indent="0" marL="0">
+            <a:pPr marL="0" indent="0">
               <a:buNone/>
             </a:pPr>
             <a:r>
@@ -2278,7 +2128,7 @@
           <a:bodyPr wrap="square" rtlCol="0" anchor="ctr"/>
           <a:lstStyle/>
           <a:p>
-            <a:pPr indent="0" marL="0">
+            <a:pPr marL="0" indent="0">
               <a:buNone/>
             </a:pPr>
             <a:r>
@@ -2314,7 +2164,7 @@
           <a:bodyPr wrap="square" rtlCol="0" anchor="ctr"/>
           <a:lstStyle/>
           <a:p>
-            <a:pPr indent="0" marL="0">
+            <a:pPr marL="0" indent="0">
               <a:buNone/>
             </a:pPr>
             <a:r>
@@ -2331,55 +2181,7 @@
       </p:sp>
       <p:pic>
         <p:nvPicPr>
-          <p:cNvPr id="8" name="Image 0" descr="preencoded.png">    </p:cNvPr>
-          <p:cNvPicPr>
-            <a:picLocks noChangeAspect="1"/>
-          </p:cNvPicPr>
-          <p:nvPr/>
-        </p:nvPicPr>
-        <p:blipFill>
-          <a:blip r:embed="rId1"/>
-          <a:stretch>
-            <a:fillRect/>
-          </a:stretch>
-        </p:blipFill>
-        <p:spPr>
-          <a:xfrm>
-            <a:off x="6126480" y="640080"/>
-            <a:ext cx="2651760" cy="2651760"/>
-          </a:xfrm>
-          <a:prstGeom prst="rect">
-            <a:avLst/>
-          </a:prstGeom>
-        </p:spPr>
-      </p:pic>
-      <p:pic>
-        <p:nvPicPr>
-          <p:cNvPr id="9" name="Image 1" descr="preencoded.png">    </p:cNvPr>
-          <p:cNvPicPr>
-            <a:picLocks noChangeAspect="1"/>
-          </p:cNvPicPr>
-          <p:nvPr/>
-        </p:nvPicPr>
-        <p:blipFill>
-          <a:blip r:embed="rId2"/>
-          <a:stretch>
-            <a:fillRect/>
-          </a:stretch>
-        </p:blipFill>
-        <p:spPr>
-          <a:xfrm>
-            <a:off x="6217920" y="3886200"/>
-            <a:ext cx="658368" cy="658368"/>
-          </a:xfrm>
-          <a:prstGeom prst="rect">
-            <a:avLst/>
-          </a:prstGeom>
-        </p:spPr>
-      </p:pic>
-      <p:pic>
-        <p:nvPicPr>
-          <p:cNvPr id="10" name="Image 2" descr="preencoded.png">    </p:cNvPr>
+          <p:cNvPr id="8" name="Image 0" descr="preencoded.png"/>
           <p:cNvPicPr>
             <a:picLocks noChangeAspect="1"/>
           </p:cNvPicPr>
@@ -2393,8 +2195,8 @@
         </p:blipFill>
         <p:spPr>
           <a:xfrm>
-            <a:off x="7178040" y="3886200"/>
-            <a:ext cx="658368" cy="658368"/>
+            <a:off x="6126480" y="640080"/>
+            <a:ext cx="2651760" cy="2651760"/>
           </a:xfrm>
           <a:prstGeom prst="rect">
             <a:avLst/>
@@ -2403,7 +2205,7 @@
       </p:pic>
       <p:pic>
         <p:nvPicPr>
-          <p:cNvPr id="11" name="Image 3" descr="preencoded.png">    </p:cNvPr>
+          <p:cNvPr id="9" name="Image 1" descr="preencoded.png"/>
           <p:cNvPicPr>
             <a:picLocks noChangeAspect="1"/>
           </p:cNvPicPr>
@@ -2411,6 +2213,54 @@
         </p:nvPicPr>
         <p:blipFill>
           <a:blip r:embed="rId4"/>
+          <a:stretch>
+            <a:fillRect/>
+          </a:stretch>
+        </p:blipFill>
+        <p:spPr>
+          <a:xfrm>
+            <a:off x="6217920" y="3886200"/>
+            <a:ext cx="658368" cy="658368"/>
+          </a:xfrm>
+          <a:prstGeom prst="rect">
+            <a:avLst/>
+          </a:prstGeom>
+        </p:spPr>
+      </p:pic>
+      <p:pic>
+        <p:nvPicPr>
+          <p:cNvPr id="10" name="Image 2" descr="preencoded.png"/>
+          <p:cNvPicPr>
+            <a:picLocks noChangeAspect="1"/>
+          </p:cNvPicPr>
+          <p:nvPr/>
+        </p:nvPicPr>
+        <p:blipFill>
+          <a:blip r:embed="rId5"/>
+          <a:stretch>
+            <a:fillRect/>
+          </a:stretch>
+        </p:blipFill>
+        <p:spPr>
+          <a:xfrm>
+            <a:off x="7178040" y="3886200"/>
+            <a:ext cx="658368" cy="658368"/>
+          </a:xfrm>
+          <a:prstGeom prst="rect">
+            <a:avLst/>
+          </a:prstGeom>
+        </p:spPr>
+      </p:pic>
+      <p:pic>
+        <p:nvPicPr>
+          <p:cNvPr id="11" name="Image 3" descr="preencoded.png"/>
+          <p:cNvPicPr>
+            <a:picLocks noChangeAspect="1"/>
+          </p:cNvPicPr>
+          <p:nvPr/>
+        </p:nvPicPr>
+        <p:blipFill>
+          <a:blip r:embed="rId6"/>
           <a:stretch>
             <a:fillRect/>
           </a:stretch>
@@ -2435,12 +2285,13 @@
 
 <file path=ppt/slides/slide10.xml><?xml version="1.0" encoding="utf-8"?>
 <p:sld xmlns:a="http://schemas.openxmlformats.org/drawingml/2006/main" xmlns:r="http://schemas.openxmlformats.org/officeDocument/2006/relationships" xmlns:p="http://schemas.openxmlformats.org/presentationml/2006/main">
-  <p:cSld name="Slide 10">
+  <p:cSld name="Slide 9">
     <p:bg>
       <p:bgPr>
         <a:solidFill>
           <a:srgbClr val="F5F5F5"/>
         </a:solidFill>
+        <a:effectLst/>
       </p:bgPr>
     </p:bg>
     <p:spTree>
@@ -2481,6 +2332,13 @@
             <a:prstDash val="solid"/>
           </a:ln>
         </p:spPr>
+        <p:txBody>
+          <a:bodyPr/>
+          <a:lstStyle/>
+          <a:p>
+            <a:endParaRPr lang="en-US"/>
+          </a:p>
+        </p:txBody>
       </p:sp>
       <p:sp>
         <p:nvSpPr>
@@ -2503,7 +2361,7 @@
           <a:bodyPr wrap="square" lIns="0" tIns="0" rIns="0" bIns="0" rtlCol="0" anchor="ctr"/>
           <a:lstStyle/>
           <a:p>
-            <a:pPr indent="0" marL="0">
+            <a:pPr marL="0" indent="0">
               <a:buNone/>
             </a:pPr>
             <a:r>
@@ -2512,7 +2370,7 @@
                   <a:srgbClr val="FFFFFF"/>
                 </a:solidFill>
               </a:rPr>
-              <a:t>Nesigurni Wi-Fi i zaštita privatnosti</a:t>
+              <a:t>Praktična zaštita: lozinke, 2FA i ažuriranja</a:t>
             </a:r>
             <a:endParaRPr lang="en-US" sz="2000" dirty="0"/>
           </a:p>
@@ -2527,7 +2385,7 @@
         <p:spPr>
           <a:xfrm>
             <a:off x="274320" y="804672"/>
-            <a:ext cx="4023360" cy="4114800"/>
+            <a:ext cx="4023360" cy="1828800"/>
           </a:xfrm>
           <a:prstGeom prst="rect">
             <a:avLst/>
@@ -2537,13 +2395,20 @@
           </a:solidFill>
           <a:ln/>
           <a:effectLst>
-            <a:outerShdw sx="100000" sy="100000" kx="0" ky="0" algn="bl" rotWithShape="0" blurRad="101600" dist="25400" dir="8100000">
+            <a:outerShdw blurRad="101600" dist="25400" dir="8100000" algn="bl" rotWithShape="0">
               <a:srgbClr val="000000">
                 <a:alpha val="10000"/>
               </a:srgbClr>
             </a:outerShdw>
           </a:effectLst>
         </p:spPr>
+        <p:txBody>
+          <a:bodyPr/>
+          <a:lstStyle/>
+          <a:p>
+            <a:endParaRPr lang="en-US"/>
+          </a:p>
+        </p:txBody>
       </p:sp>
       <p:sp>
         <p:nvSpPr>
@@ -2554,207 +2419,7 @@
         <p:spPr>
           <a:xfrm>
             <a:off x="274320" y="804672"/>
-            <a:ext cx="4023360" cy="384048"/>
-          </a:xfrm>
-          <a:prstGeom prst="rect">
-            <a:avLst/>
-          </a:prstGeom>
-          <a:solidFill>
-            <a:srgbClr val="1A1A1A"/>
-          </a:solidFill>
-          <a:ln w="12700">
-            <a:solidFill>
-              <a:srgbClr val="1A1A1A"/>
-            </a:solidFill>
-            <a:prstDash val="solid"/>
-          </a:ln>
-        </p:spPr>
-      </p:sp>
-      <p:sp>
-        <p:nvSpPr>
-          <p:cNvPr id="6" name="Text 4"/>
-          <p:cNvSpPr/>
-          <p:nvPr/>
-        </p:nvSpPr>
-        <p:spPr>
-          <a:xfrm>
-            <a:off x="274320" y="804672"/>
-            <a:ext cx="4023360" cy="384048"/>
-          </a:xfrm>
-          <a:prstGeom prst="rect">
-            <a:avLst/>
-          </a:prstGeom>
-          <a:noFill/>
-          <a:ln/>
-        </p:spPr>
-        <p:txBody>
-          <a:bodyPr wrap="square" lIns="0" tIns="0" rIns="0" bIns="0" rtlCol="0" anchor="ctr"/>
-          <a:lstStyle/>
-          <a:p>
-            <a:pPr algn="ctr" indent="0" marL="0">
-              <a:buNone/>
-            </a:pPr>
-            <a:r>
-              <a:rPr lang="en-US" sz="1300" b="1" dirty="0">
-                <a:solidFill>
-                  <a:srgbClr val="FFFFFF"/>
-                </a:solidFill>
-              </a:rPr>
-              <a:t>Pravila korištenja Wi-Fija</a:t>
-            </a:r>
-            <a:endParaRPr lang="en-US" sz="1300" dirty="0"/>
-          </a:p>
-        </p:txBody>
-      </p:sp>
-      <p:sp>
-        <p:nvSpPr>
-          <p:cNvPr id="7" name="Text 5"/>
-          <p:cNvSpPr/>
-          <p:nvPr/>
-        </p:nvSpPr>
-        <p:spPr>
-          <a:xfrm>
-            <a:off x="411480" y="1261872"/>
-            <a:ext cx="3749040" cy="3566160"/>
-          </a:xfrm>
-          <a:prstGeom prst="rect">
-            <a:avLst/>
-          </a:prstGeom>
-          <a:noFill/>
-          <a:ln/>
-        </p:spPr>
-        <p:txBody>
-          <a:bodyPr wrap="square" rtlCol="0" anchor="t"/>
-          <a:lstStyle/>
-          <a:p>
-            <a:pPr marL="342900" indent="-342900">
-              <a:spcAft>
-                <a:spcPts val="700"/>
-              </a:spcAft>
-              <a:buSzPct val="100000"/>
-              <a:buChar char="•"/>
-            </a:pPr>
-            <a:r>
-              <a:rPr lang="en-US" sz="1300" dirty="0">
-                <a:solidFill>
-                  <a:srgbClr val="444444"/>
-                </a:solidFill>
-              </a:rPr>
-              <a:t>NIKAD ne provjeravajte bankovni račun na javnom Wi-Fiju (kafić, hotel, bolnica)</a:t>
-            </a:r>
-            <a:endParaRPr lang="en-US" sz="1300" dirty="0"/>
-          </a:p>
-          <a:p>
-            <a:pPr marL="342900" indent="-342900">
-              <a:spcAft>
-                <a:spcPts val="700"/>
-              </a:spcAft>
-              <a:buSzPct val="100000"/>
-              <a:buChar char="•"/>
-            </a:pPr>
-            <a:r>
-              <a:rPr lang="en-US" sz="1300" dirty="0">
-                <a:solidFill>
-                  <a:srgbClr val="444444"/>
-                </a:solidFill>
-              </a:rPr>
-              <a:t>Ne upisujte lozinke dok ste na javnoj mreži</a:t>
-            </a:r>
-            <a:endParaRPr lang="en-US" sz="1300" dirty="0"/>
-          </a:p>
-          <a:p>
-            <a:pPr marL="342900" indent="-342900">
-              <a:spcAft>
-                <a:spcPts val="700"/>
-              </a:spcAft>
-              <a:buSzPct val="100000"/>
-              <a:buChar char="•"/>
-            </a:pPr>
-            <a:r>
-              <a:rPr lang="en-US" sz="1300" dirty="0">
-                <a:solidFill>
-                  <a:srgbClr val="444444"/>
-                </a:solidFill>
-              </a:rPr>
-              <a:t>Isključite 'automatsko spajanje' na otvorene mreže</a:t>
-            </a:r>
-            <a:endParaRPr lang="en-US" sz="1300" dirty="0"/>
-          </a:p>
-          <a:p>
-            <a:pPr marL="342900" indent="-342900">
-              <a:spcAft>
-                <a:spcPts val="700"/>
-              </a:spcAft>
-              <a:buSzPct val="100000"/>
-              <a:buChar char="•"/>
-            </a:pPr>
-            <a:r>
-              <a:rPr lang="en-US" sz="1300" dirty="0">
-                <a:solidFill>
-                  <a:srgbClr val="444444"/>
-                </a:solidFill>
-              </a:rPr>
-              <a:t>Za osjetljive radnje koristite mobilni internet (4G/5G)</a:t>
-            </a:r>
-            <a:endParaRPr lang="en-US" sz="1300" dirty="0"/>
-          </a:p>
-          <a:p>
-            <a:pPr marL="342900" indent="-342900">
-              <a:spcAft>
-                <a:spcPts val="700"/>
-              </a:spcAft>
-              <a:buSzPct val="100000"/>
-              <a:buChar char="•"/>
-            </a:pPr>
-            <a:r>
-              <a:rPr lang="en-US" sz="1300" dirty="0">
-                <a:solidFill>
-                  <a:srgbClr val="444444"/>
-                </a:solidFill>
-              </a:rPr>
-              <a:t>Kod kuće: postavite jaku lozinku za router, promijenite zadanu lozinku!</a:t>
-            </a:r>
-            <a:endParaRPr lang="en-US" sz="1300" dirty="0"/>
-          </a:p>
-        </p:txBody>
-      </p:sp>
-      <p:sp>
-        <p:nvSpPr>
-          <p:cNvPr id="8" name="Shape 6"/>
-          <p:cNvSpPr/>
-          <p:nvPr/>
-        </p:nvSpPr>
-        <p:spPr>
-          <a:xfrm>
-            <a:off x="4846320" y="804672"/>
-            <a:ext cx="4023360" cy="4114800"/>
-          </a:xfrm>
-          <a:prstGeom prst="rect">
-            <a:avLst/>
-          </a:prstGeom>
-          <a:solidFill>
-            <a:srgbClr val="FFFFFF"/>
-          </a:solidFill>
-          <a:ln/>
-          <a:effectLst>
-            <a:outerShdw sx="100000" sy="100000" kx="0" ky="0" algn="bl" rotWithShape="0" blurRad="101600" dist="25400" dir="8100000">
-              <a:srgbClr val="000000">
-                <a:alpha val="10000"/>
-              </a:srgbClr>
-            </a:outerShdw>
-          </a:effectLst>
-        </p:spPr>
-      </p:sp>
-      <p:sp>
-        <p:nvSpPr>
-          <p:cNvPr id="9" name="Shape 7"/>
-          <p:cNvSpPr/>
-          <p:nvPr/>
-        </p:nvSpPr>
-        <p:spPr>
-          <a:xfrm>
-            <a:off x="4846320" y="804672"/>
-            <a:ext cx="4023360" cy="384048"/>
+            <a:ext cx="73152" cy="1828800"/>
           </a:xfrm>
           <a:prstGeom prst="rect">
             <a:avLst/>
@@ -2769,17 +2434,80 @@
             <a:prstDash val="solid"/>
           </a:ln>
         </p:spPr>
-      </p:sp>
-      <p:sp>
-        <p:nvSpPr>
-          <p:cNvPr id="10" name="Text 8"/>
-          <p:cNvSpPr/>
-          <p:nvPr/>
-        </p:nvSpPr>
-        <p:spPr>
-          <a:xfrm>
-            <a:off x="4846320" y="804672"/>
-            <a:ext cx="4023360" cy="384048"/>
+        <p:txBody>
+          <a:bodyPr/>
+          <a:lstStyle/>
+          <a:p>
+            <a:endParaRPr lang="en-US"/>
+          </a:p>
+        </p:txBody>
+      </p:sp>
+      <p:sp>
+        <p:nvSpPr>
+          <p:cNvPr id="6" name="Shape 4"/>
+          <p:cNvSpPr/>
+          <p:nvPr/>
+        </p:nvSpPr>
+        <p:spPr>
+          <a:xfrm>
+            <a:off x="438912" y="1051560"/>
+            <a:ext cx="594360" cy="594360"/>
+          </a:xfrm>
+          <a:prstGeom prst="ellipse">
+            <a:avLst/>
+          </a:prstGeom>
+          <a:solidFill>
+            <a:srgbClr val="CC0000"/>
+          </a:solidFill>
+          <a:ln w="12700">
+            <a:solidFill>
+              <a:srgbClr val="CC0000"/>
+            </a:solidFill>
+            <a:prstDash val="solid"/>
+          </a:ln>
+        </p:spPr>
+        <p:txBody>
+          <a:bodyPr/>
+          <a:lstStyle/>
+          <a:p>
+            <a:endParaRPr lang="en-US"/>
+          </a:p>
+        </p:txBody>
+      </p:sp>
+      <p:pic>
+        <p:nvPicPr>
+          <p:cNvPr id="7" name="Image 0" descr="preencoded.png"/>
+          <p:cNvPicPr>
+            <a:picLocks noChangeAspect="1"/>
+          </p:cNvPicPr>
+          <p:nvPr/>
+        </p:nvPicPr>
+        <p:blipFill>
+          <a:blip r:embed="rId3"/>
+          <a:stretch>
+            <a:fillRect/>
+          </a:stretch>
+        </p:blipFill>
+        <p:spPr>
+          <a:xfrm>
+            <a:off x="493776" y="1106424"/>
+            <a:ext cx="484632" cy="484632"/>
+          </a:xfrm>
+          <a:prstGeom prst="rect">
+            <a:avLst/>
+          </a:prstGeom>
+        </p:spPr>
+      </p:pic>
+      <p:sp>
+        <p:nvSpPr>
+          <p:cNvPr id="8" name="Text 5"/>
+          <p:cNvSpPr/>
+          <p:nvPr/>
+        </p:nvSpPr>
+        <p:spPr>
+          <a:xfrm>
+            <a:off x="1143000" y="950976"/>
+            <a:ext cx="3063240" cy="384048"/>
           </a:xfrm>
           <a:prstGeom prst="rect">
             <a:avLst/>
@@ -2791,31 +2519,31 @@
           <a:bodyPr wrap="square" lIns="0" tIns="0" rIns="0" bIns="0" rtlCol="0" anchor="ctr"/>
           <a:lstStyle/>
           <a:p>
-            <a:pPr algn="ctr" indent="0" marL="0">
+            <a:pPr marL="0" indent="0">
               <a:buNone/>
             </a:pPr>
             <a:r>
-              <a:rPr lang="en-US" sz="1300" b="1" dirty="0">
-                <a:solidFill>
-                  <a:srgbClr val="FFFFFF"/>
-                </a:solidFill>
-              </a:rPr>
-              <a:t>GDPR: vaša prava u EU</a:t>
-            </a:r>
-            <a:endParaRPr lang="en-US" sz="1300" dirty="0"/>
-          </a:p>
-        </p:txBody>
-      </p:sp>
-      <p:sp>
-        <p:nvSpPr>
-          <p:cNvPr id="11" name="Text 9"/>
-          <p:cNvSpPr/>
-          <p:nvPr/>
-        </p:nvSpPr>
-        <p:spPr>
-          <a:xfrm>
-            <a:off x="4983480" y="1261872"/>
-            <a:ext cx="3749040" cy="3566160"/>
+              <a:rPr lang="en-US" sz="1400" b="1" dirty="0">
+                <a:solidFill>
+                  <a:srgbClr val="1A1A1A"/>
+                </a:solidFill>
+              </a:rPr>
+              <a:t>Dobra lozinka</a:t>
+            </a:r>
+            <a:endParaRPr lang="en-US" sz="1400" dirty="0"/>
+          </a:p>
+        </p:txBody>
+      </p:sp>
+      <p:sp>
+        <p:nvSpPr>
+          <p:cNvPr id="9" name="Text 6"/>
+          <p:cNvSpPr/>
+          <p:nvPr/>
+        </p:nvSpPr>
+        <p:spPr>
+          <a:xfrm>
+            <a:off x="1143000" y="1316736"/>
+            <a:ext cx="3063240" cy="1207008"/>
           </a:xfrm>
           <a:prstGeom prst="rect">
             <a:avLst/>
@@ -2827,94 +2555,600 @@
           <a:bodyPr wrap="square" rtlCol="0" anchor="t"/>
           <a:lstStyle/>
           <a:p>
-            <a:pPr marL="342900" indent="-342900">
-              <a:spcAft>
-                <a:spcPts val="700"/>
-              </a:spcAft>
-              <a:buSzPct val="100000"/>
-              <a:buChar char="•"/>
-            </a:pPr>
-            <a:r>
-              <a:rPr lang="en-US" sz="1300" dirty="0">
-                <a:solidFill>
-                  <a:srgbClr val="444444"/>
-                </a:solidFill>
-              </a:rPr>
-              <a:t>Vaši osobni podaci vrijede novac — tvrtke ih kupuju za marketing, kriminalci kradu za prijevare</a:t>
-            </a:r>
-            <a:endParaRPr lang="en-US" sz="1300" dirty="0"/>
-          </a:p>
-          <a:p>
-            <a:pPr marL="342900" indent="-342900">
-              <a:spcAft>
-                <a:spcPts val="700"/>
-              </a:spcAft>
-              <a:buSzPct val="100000"/>
-              <a:buChar char="•"/>
-            </a:pPr>
-            <a:r>
-              <a:rPr lang="en-US" sz="1300" dirty="0">
-                <a:solidFill>
-                  <a:srgbClr val="444444"/>
-                </a:solidFill>
-              </a:rPr>
-              <a:t>Imate pravo znati koje podatke tvrtka prikuplja</a:t>
-            </a:r>
-            <a:endParaRPr lang="en-US" sz="1300" dirty="0"/>
-          </a:p>
-          <a:p>
-            <a:pPr marL="342900" indent="-342900">
-              <a:spcAft>
-                <a:spcPts val="700"/>
-              </a:spcAft>
-              <a:buSzPct val="100000"/>
-              <a:buChar char="•"/>
-            </a:pPr>
-            <a:r>
-              <a:rPr lang="en-US" sz="1300" dirty="0">
-                <a:solidFill>
-                  <a:srgbClr val="444444"/>
-                </a:solidFill>
-              </a:rPr>
-              <a:t>Imate pravo tražiti ispravak ili brisanje podataka ('pravo na zaborav')</a:t>
-            </a:r>
-            <a:endParaRPr lang="en-US" sz="1300" dirty="0"/>
-          </a:p>
-          <a:p>
-            <a:pPr marL="342900" indent="-342900">
-              <a:spcAft>
-                <a:spcPts val="700"/>
-              </a:spcAft>
-              <a:buSzPct val="100000"/>
-              <a:buChar char="•"/>
-            </a:pPr>
-            <a:r>
-              <a:rPr lang="en-US" sz="1300" dirty="0">
-                <a:solidFill>
-                  <a:srgbClr val="444444"/>
-                </a:solidFill>
-              </a:rPr>
-              <a:t>Imate pravo prigovoriti obradi u marketinške svrhe</a:t>
-            </a:r>
-            <a:endParaRPr lang="en-US" sz="1300" dirty="0"/>
-          </a:p>
-          <a:p>
-            <a:pPr marL="342900" indent="-342900">
-              <a:spcAft>
-                <a:spcPts val="700"/>
-              </a:spcAft>
-              <a:buSzPct val="100000"/>
-              <a:buChar char="•"/>
-            </a:pPr>
-            <a:r>
-              <a:rPr lang="en-US" sz="1300" dirty="0">
-                <a:solidFill>
-                  <a:srgbClr val="444444"/>
-                </a:solidFill>
-              </a:rPr>
-              <a:t>Pritužba: AZOP — azop.hr</a:t>
-            </a:r>
-            <a:endParaRPr lang="en-US" sz="1300" dirty="0"/>
+            <a:pPr marL="0" indent="0">
+              <a:buNone/>
+            </a:pPr>
+            <a:r>
+              <a:rPr lang="en-US" sz="1200" dirty="0">
+                <a:solidFill>
+                  <a:srgbClr val="444444"/>
+                </a:solidFill>
+              </a:rPr>
+              <a:t>Dugačka, nasumična, jedinstvena za svaki račun. Rečenica: 'Moja mačka voli ribu 7x!' Upravitelj lozinki: Bitwarden (besplatan).</a:t>
+            </a:r>
+            <a:endParaRPr lang="en-US" sz="1200" dirty="0"/>
+          </a:p>
+        </p:txBody>
+      </p:sp>
+      <p:sp>
+        <p:nvSpPr>
+          <p:cNvPr id="10" name="Shape 7"/>
+          <p:cNvSpPr/>
+          <p:nvPr/>
+        </p:nvSpPr>
+        <p:spPr>
+          <a:xfrm>
+            <a:off x="4754880" y="804672"/>
+            <a:ext cx="4023360" cy="1828800"/>
+          </a:xfrm>
+          <a:prstGeom prst="rect">
+            <a:avLst/>
+          </a:prstGeom>
+          <a:solidFill>
+            <a:srgbClr val="FFFFFF"/>
+          </a:solidFill>
+          <a:ln/>
+          <a:effectLst>
+            <a:outerShdw blurRad="101600" dist="25400" dir="8100000" algn="bl" rotWithShape="0">
+              <a:srgbClr val="000000">
+                <a:alpha val="10000"/>
+              </a:srgbClr>
+            </a:outerShdw>
+          </a:effectLst>
+        </p:spPr>
+        <p:txBody>
+          <a:bodyPr/>
+          <a:lstStyle/>
+          <a:p>
+            <a:endParaRPr lang="en-US"/>
+          </a:p>
+        </p:txBody>
+      </p:sp>
+      <p:sp>
+        <p:nvSpPr>
+          <p:cNvPr id="11" name="Shape 8"/>
+          <p:cNvSpPr/>
+          <p:nvPr/>
+        </p:nvSpPr>
+        <p:spPr>
+          <a:xfrm>
+            <a:off x="4754880" y="804672"/>
+            <a:ext cx="73152" cy="1828800"/>
+          </a:xfrm>
+          <a:prstGeom prst="rect">
+            <a:avLst/>
+          </a:prstGeom>
+          <a:solidFill>
+            <a:srgbClr val="CC0000"/>
+          </a:solidFill>
+          <a:ln w="12700">
+            <a:solidFill>
+              <a:srgbClr val="CC0000"/>
+            </a:solidFill>
+            <a:prstDash val="solid"/>
+          </a:ln>
+        </p:spPr>
+        <p:txBody>
+          <a:bodyPr/>
+          <a:lstStyle/>
+          <a:p>
+            <a:endParaRPr lang="en-US"/>
+          </a:p>
+        </p:txBody>
+      </p:sp>
+      <p:sp>
+        <p:nvSpPr>
+          <p:cNvPr id="12" name="Shape 9"/>
+          <p:cNvSpPr/>
+          <p:nvPr/>
+        </p:nvSpPr>
+        <p:spPr>
+          <a:xfrm>
+            <a:off x="4919472" y="1051560"/>
+            <a:ext cx="594360" cy="594360"/>
+          </a:xfrm>
+          <a:prstGeom prst="ellipse">
+            <a:avLst/>
+          </a:prstGeom>
+          <a:solidFill>
+            <a:srgbClr val="CC0000"/>
+          </a:solidFill>
+          <a:ln w="12700">
+            <a:solidFill>
+              <a:srgbClr val="CC0000"/>
+            </a:solidFill>
+            <a:prstDash val="solid"/>
+          </a:ln>
+        </p:spPr>
+        <p:txBody>
+          <a:bodyPr/>
+          <a:lstStyle/>
+          <a:p>
+            <a:endParaRPr lang="en-US"/>
+          </a:p>
+        </p:txBody>
+      </p:sp>
+      <p:pic>
+        <p:nvPicPr>
+          <p:cNvPr id="13" name="Image 1" descr="preencoded.png"/>
+          <p:cNvPicPr>
+            <a:picLocks noChangeAspect="1"/>
+          </p:cNvPicPr>
+          <p:nvPr/>
+        </p:nvPicPr>
+        <p:blipFill>
+          <a:blip r:embed="rId4"/>
+          <a:stretch>
+            <a:fillRect/>
+          </a:stretch>
+        </p:blipFill>
+        <p:spPr>
+          <a:xfrm>
+            <a:off x="4974336" y="1106424"/>
+            <a:ext cx="484632" cy="484632"/>
+          </a:xfrm>
+          <a:prstGeom prst="rect">
+            <a:avLst/>
+          </a:prstGeom>
+        </p:spPr>
+      </p:pic>
+      <p:sp>
+        <p:nvSpPr>
+          <p:cNvPr id="14" name="Text 10"/>
+          <p:cNvSpPr/>
+          <p:nvPr/>
+        </p:nvSpPr>
+        <p:spPr>
+          <a:xfrm>
+            <a:off x="5623560" y="950976"/>
+            <a:ext cx="3063240" cy="384048"/>
+          </a:xfrm>
+          <a:prstGeom prst="rect">
+            <a:avLst/>
+          </a:prstGeom>
+          <a:noFill/>
+          <a:ln/>
+        </p:spPr>
+        <p:txBody>
+          <a:bodyPr wrap="square" lIns="0" tIns="0" rIns="0" bIns="0" rtlCol="0" anchor="ctr"/>
+          <a:lstStyle/>
+          <a:p>
+            <a:pPr marL="0" indent="0">
+              <a:buNone/>
+            </a:pPr>
+            <a:r>
+              <a:rPr lang="en-US" sz="1400" b="1" dirty="0">
+                <a:solidFill>
+                  <a:srgbClr val="1A1A1A"/>
+                </a:solidFill>
+              </a:rPr>
+              <a:t>Dvofaktorna autentikacija (2FA)</a:t>
+            </a:r>
+            <a:endParaRPr lang="en-US" sz="1400" dirty="0"/>
+          </a:p>
+        </p:txBody>
+      </p:sp>
+      <p:sp>
+        <p:nvSpPr>
+          <p:cNvPr id="15" name="Text 11"/>
+          <p:cNvSpPr/>
+          <p:nvPr/>
+        </p:nvSpPr>
+        <p:spPr>
+          <a:xfrm>
+            <a:off x="5623560" y="1316736"/>
+            <a:ext cx="3063240" cy="1207008"/>
+          </a:xfrm>
+          <a:prstGeom prst="rect">
+            <a:avLst/>
+          </a:prstGeom>
+          <a:noFill/>
+          <a:ln/>
+        </p:spPr>
+        <p:txBody>
+          <a:bodyPr wrap="square" rtlCol="0" anchor="t"/>
+          <a:lstStyle/>
+          <a:p>
+            <a:pPr marL="0" indent="0">
+              <a:buNone/>
+            </a:pPr>
+            <a:r>
+              <a:rPr lang="en-US" sz="1200" dirty="0">
+                <a:solidFill>
+                  <a:srgbClr val="444444"/>
+                </a:solidFill>
+              </a:rPr>
+              <a:t>Drugi sloj zaštite uz lozinku — SMS kod na telefon. Uključite za e-mail, Facebook i bankarstvo.</a:t>
+            </a:r>
+            <a:endParaRPr lang="en-US" sz="1200" dirty="0"/>
+          </a:p>
+        </p:txBody>
+      </p:sp>
+      <p:sp>
+        <p:nvSpPr>
+          <p:cNvPr id="16" name="Shape 12"/>
+          <p:cNvSpPr/>
+          <p:nvPr/>
+        </p:nvSpPr>
+        <p:spPr>
+          <a:xfrm>
+            <a:off x="274320" y="2816352"/>
+            <a:ext cx="4023360" cy="1828800"/>
+          </a:xfrm>
+          <a:prstGeom prst="rect">
+            <a:avLst/>
+          </a:prstGeom>
+          <a:solidFill>
+            <a:srgbClr val="FFFFFF"/>
+          </a:solidFill>
+          <a:ln/>
+          <a:effectLst>
+            <a:outerShdw blurRad="101600" dist="25400" dir="8100000" algn="bl" rotWithShape="0">
+              <a:srgbClr val="000000">
+                <a:alpha val="10000"/>
+              </a:srgbClr>
+            </a:outerShdw>
+          </a:effectLst>
+        </p:spPr>
+        <p:txBody>
+          <a:bodyPr/>
+          <a:lstStyle/>
+          <a:p>
+            <a:endParaRPr lang="en-US"/>
+          </a:p>
+        </p:txBody>
+      </p:sp>
+      <p:sp>
+        <p:nvSpPr>
+          <p:cNvPr id="17" name="Shape 13"/>
+          <p:cNvSpPr/>
+          <p:nvPr/>
+        </p:nvSpPr>
+        <p:spPr>
+          <a:xfrm>
+            <a:off x="274320" y="2816352"/>
+            <a:ext cx="73152" cy="1828800"/>
+          </a:xfrm>
+          <a:prstGeom prst="rect">
+            <a:avLst/>
+          </a:prstGeom>
+          <a:solidFill>
+            <a:srgbClr val="CC0000"/>
+          </a:solidFill>
+          <a:ln w="12700">
+            <a:solidFill>
+              <a:srgbClr val="CC0000"/>
+            </a:solidFill>
+            <a:prstDash val="solid"/>
+          </a:ln>
+        </p:spPr>
+        <p:txBody>
+          <a:bodyPr/>
+          <a:lstStyle/>
+          <a:p>
+            <a:endParaRPr lang="en-US"/>
+          </a:p>
+        </p:txBody>
+      </p:sp>
+      <p:sp>
+        <p:nvSpPr>
+          <p:cNvPr id="18" name="Shape 14"/>
+          <p:cNvSpPr/>
+          <p:nvPr/>
+        </p:nvSpPr>
+        <p:spPr>
+          <a:xfrm>
+            <a:off x="438912" y="3063240"/>
+            <a:ext cx="594360" cy="594360"/>
+          </a:xfrm>
+          <a:prstGeom prst="ellipse">
+            <a:avLst/>
+          </a:prstGeom>
+          <a:solidFill>
+            <a:srgbClr val="CC0000"/>
+          </a:solidFill>
+          <a:ln w="12700">
+            <a:solidFill>
+              <a:srgbClr val="CC0000"/>
+            </a:solidFill>
+            <a:prstDash val="solid"/>
+          </a:ln>
+        </p:spPr>
+        <p:txBody>
+          <a:bodyPr/>
+          <a:lstStyle/>
+          <a:p>
+            <a:endParaRPr lang="en-US"/>
+          </a:p>
+        </p:txBody>
+      </p:sp>
+      <p:pic>
+        <p:nvPicPr>
+          <p:cNvPr id="19" name="Image 2" descr="preencoded.png"/>
+          <p:cNvPicPr>
+            <a:picLocks noChangeAspect="1"/>
+          </p:cNvPicPr>
+          <p:nvPr/>
+        </p:nvPicPr>
+        <p:blipFill>
+          <a:blip r:embed="rId5"/>
+          <a:stretch>
+            <a:fillRect/>
+          </a:stretch>
+        </p:blipFill>
+        <p:spPr>
+          <a:xfrm>
+            <a:off x="493776" y="3118104"/>
+            <a:ext cx="484632" cy="484632"/>
+          </a:xfrm>
+          <a:prstGeom prst="rect">
+            <a:avLst/>
+          </a:prstGeom>
+        </p:spPr>
+      </p:pic>
+      <p:sp>
+        <p:nvSpPr>
+          <p:cNvPr id="20" name="Text 15"/>
+          <p:cNvSpPr/>
+          <p:nvPr/>
+        </p:nvSpPr>
+        <p:spPr>
+          <a:xfrm>
+            <a:off x="1143000" y="2962656"/>
+            <a:ext cx="3063240" cy="384048"/>
+          </a:xfrm>
+          <a:prstGeom prst="rect">
+            <a:avLst/>
+          </a:prstGeom>
+          <a:noFill/>
+          <a:ln/>
+        </p:spPr>
+        <p:txBody>
+          <a:bodyPr wrap="square" lIns="0" tIns="0" rIns="0" bIns="0" rtlCol="0" anchor="ctr"/>
+          <a:lstStyle/>
+          <a:p>
+            <a:pPr marL="0" indent="0">
+              <a:buNone/>
+            </a:pPr>
+            <a:r>
+              <a:rPr lang="en-US" sz="1400" b="1" dirty="0">
+                <a:solidFill>
+                  <a:srgbClr val="1A1A1A"/>
+                </a:solidFill>
+              </a:rPr>
+              <a:t>Ažuriranja sustava</a:t>
+            </a:r>
+            <a:endParaRPr lang="en-US" sz="1400" dirty="0"/>
+          </a:p>
+        </p:txBody>
+      </p:sp>
+      <p:sp>
+        <p:nvSpPr>
+          <p:cNvPr id="21" name="Text 16"/>
+          <p:cNvSpPr/>
+          <p:nvPr/>
+        </p:nvSpPr>
+        <p:spPr>
+          <a:xfrm>
+            <a:off x="1143000" y="3328416"/>
+            <a:ext cx="3063240" cy="1207008"/>
+          </a:xfrm>
+          <a:prstGeom prst="rect">
+            <a:avLst/>
+          </a:prstGeom>
+          <a:noFill/>
+          <a:ln/>
+        </p:spPr>
+        <p:txBody>
+          <a:bodyPr wrap="square" rtlCol="0" anchor="t"/>
+          <a:lstStyle/>
+          <a:p>
+            <a:pPr marL="0" indent="0">
+              <a:buNone/>
+            </a:pPr>
+            <a:r>
+              <a:rPr lang="en-US" sz="1200" dirty="0">
+                <a:solidFill>
+                  <a:srgbClr val="444444"/>
+                </a:solidFill>
+              </a:rPr>
+              <a:t>Redovito ažurirajte Windows, Android i iOS. Ažuriranja krpe sigurnosne rupe koje hakeri aktivno iskorištavaju.</a:t>
+            </a:r>
+            <a:endParaRPr lang="en-US" sz="1200" dirty="0"/>
+          </a:p>
+        </p:txBody>
+      </p:sp>
+      <p:sp>
+        <p:nvSpPr>
+          <p:cNvPr id="22" name="Shape 17"/>
+          <p:cNvSpPr/>
+          <p:nvPr/>
+        </p:nvSpPr>
+        <p:spPr>
+          <a:xfrm>
+            <a:off x="4754880" y="2816352"/>
+            <a:ext cx="4023360" cy="1828800"/>
+          </a:xfrm>
+          <a:prstGeom prst="rect">
+            <a:avLst/>
+          </a:prstGeom>
+          <a:solidFill>
+            <a:srgbClr val="FFFFFF"/>
+          </a:solidFill>
+          <a:ln/>
+          <a:effectLst>
+            <a:outerShdw blurRad="101600" dist="25400" dir="8100000" algn="bl" rotWithShape="0">
+              <a:srgbClr val="000000">
+                <a:alpha val="10000"/>
+              </a:srgbClr>
+            </a:outerShdw>
+          </a:effectLst>
+        </p:spPr>
+        <p:txBody>
+          <a:bodyPr/>
+          <a:lstStyle/>
+          <a:p>
+            <a:endParaRPr lang="en-US"/>
+          </a:p>
+        </p:txBody>
+      </p:sp>
+      <p:sp>
+        <p:nvSpPr>
+          <p:cNvPr id="23" name="Shape 18"/>
+          <p:cNvSpPr/>
+          <p:nvPr/>
+        </p:nvSpPr>
+        <p:spPr>
+          <a:xfrm>
+            <a:off x="4754880" y="2816352"/>
+            <a:ext cx="73152" cy="1828800"/>
+          </a:xfrm>
+          <a:prstGeom prst="rect">
+            <a:avLst/>
+          </a:prstGeom>
+          <a:solidFill>
+            <a:srgbClr val="CC0000"/>
+          </a:solidFill>
+          <a:ln w="12700">
+            <a:solidFill>
+              <a:srgbClr val="CC0000"/>
+            </a:solidFill>
+            <a:prstDash val="solid"/>
+          </a:ln>
+        </p:spPr>
+        <p:txBody>
+          <a:bodyPr/>
+          <a:lstStyle/>
+          <a:p>
+            <a:endParaRPr lang="en-US"/>
+          </a:p>
+        </p:txBody>
+      </p:sp>
+      <p:sp>
+        <p:nvSpPr>
+          <p:cNvPr id="24" name="Shape 19"/>
+          <p:cNvSpPr/>
+          <p:nvPr/>
+        </p:nvSpPr>
+        <p:spPr>
+          <a:xfrm>
+            <a:off x="4919472" y="3063240"/>
+            <a:ext cx="594360" cy="594360"/>
+          </a:xfrm>
+          <a:prstGeom prst="ellipse">
+            <a:avLst/>
+          </a:prstGeom>
+          <a:solidFill>
+            <a:srgbClr val="CC0000"/>
+          </a:solidFill>
+          <a:ln w="12700">
+            <a:solidFill>
+              <a:srgbClr val="CC0000"/>
+            </a:solidFill>
+            <a:prstDash val="solid"/>
+          </a:ln>
+        </p:spPr>
+        <p:txBody>
+          <a:bodyPr/>
+          <a:lstStyle/>
+          <a:p>
+            <a:endParaRPr lang="en-US"/>
+          </a:p>
+        </p:txBody>
+      </p:sp>
+      <p:pic>
+        <p:nvPicPr>
+          <p:cNvPr id="25" name="Image 3" descr="preencoded.png"/>
+          <p:cNvPicPr>
+            <a:picLocks noChangeAspect="1"/>
+          </p:cNvPicPr>
+          <p:nvPr/>
+        </p:nvPicPr>
+        <p:blipFill>
+          <a:blip r:embed="rId6"/>
+          <a:stretch>
+            <a:fillRect/>
+          </a:stretch>
+        </p:blipFill>
+        <p:spPr>
+          <a:xfrm>
+            <a:off x="4974336" y="3118104"/>
+            <a:ext cx="484632" cy="484632"/>
+          </a:xfrm>
+          <a:prstGeom prst="rect">
+            <a:avLst/>
+          </a:prstGeom>
+        </p:spPr>
+      </p:pic>
+      <p:sp>
+        <p:nvSpPr>
+          <p:cNvPr id="26" name="Text 20"/>
+          <p:cNvSpPr/>
+          <p:nvPr/>
+        </p:nvSpPr>
+        <p:spPr>
+          <a:xfrm>
+            <a:off x="5623560" y="2962656"/>
+            <a:ext cx="3063240" cy="384048"/>
+          </a:xfrm>
+          <a:prstGeom prst="rect">
+            <a:avLst/>
+          </a:prstGeom>
+          <a:noFill/>
+          <a:ln/>
+        </p:spPr>
+        <p:txBody>
+          <a:bodyPr wrap="square" lIns="0" tIns="0" rIns="0" bIns="0" rtlCol="0" anchor="ctr"/>
+          <a:lstStyle/>
+          <a:p>
+            <a:pPr marL="0" indent="0">
+              <a:buNone/>
+            </a:pPr>
+            <a:r>
+              <a:rPr lang="en-US" sz="1400" b="1" dirty="0">
+                <a:solidFill>
+                  <a:srgbClr val="1A1A1A"/>
+                </a:solidFill>
+              </a:rPr>
+              <a:t>Sigurnosna kopija (backup)</a:t>
+            </a:r>
+            <a:endParaRPr lang="en-US" sz="1400" dirty="0"/>
+          </a:p>
+        </p:txBody>
+      </p:sp>
+      <p:sp>
+        <p:nvSpPr>
+          <p:cNvPr id="27" name="Text 21"/>
+          <p:cNvSpPr/>
+          <p:nvPr/>
+        </p:nvSpPr>
+        <p:spPr>
+          <a:xfrm>
+            <a:off x="5623560" y="3328416"/>
+            <a:ext cx="3063240" cy="1207008"/>
+          </a:xfrm>
+          <a:prstGeom prst="rect">
+            <a:avLst/>
+          </a:prstGeom>
+          <a:noFill/>
+          <a:ln/>
+        </p:spPr>
+        <p:txBody>
+          <a:bodyPr wrap="square" rtlCol="0" anchor="t"/>
+          <a:lstStyle/>
+          <a:p>
+            <a:pPr marL="0" indent="0">
+              <a:buNone/>
+            </a:pPr>
+            <a:r>
+              <a:rPr lang="en-US" sz="1200" dirty="0">
+                <a:solidFill>
+                  <a:srgbClr val="444444"/>
+                </a:solidFill>
+              </a:rPr>
+              <a:t>Jedina prava zaštita od ransomwarea. Google Photos za slike, vanjski disk za dokumente — jednom tjedno.</a:t>
+            </a:r>
+            <a:endParaRPr lang="en-US" sz="1200" dirty="0"/>
           </a:p>
         </p:txBody>
       </p:sp>
@@ -2928,12 +3162,13 @@
 
 <file path=ppt/slides/slide11.xml><?xml version="1.0" encoding="utf-8"?>
 <p:sld xmlns:a="http://schemas.openxmlformats.org/drawingml/2006/main" xmlns:r="http://schemas.openxmlformats.org/officeDocument/2006/relationships" xmlns:p="http://schemas.openxmlformats.org/presentationml/2006/main">
-  <p:cSld name="Slide 11">
+  <p:cSld name="Slide 10">
     <p:bg>
       <p:bgPr>
         <a:solidFill>
           <a:srgbClr val="F5F5F5"/>
         </a:solidFill>
+        <a:effectLst/>
       </p:bgPr>
     </p:bg>
     <p:spTree>
@@ -2974,6 +3209,13 @@
             <a:prstDash val="solid"/>
           </a:ln>
         </p:spPr>
+        <p:txBody>
+          <a:bodyPr/>
+          <a:lstStyle/>
+          <a:p>
+            <a:endParaRPr lang="en-US"/>
+          </a:p>
+        </p:txBody>
       </p:sp>
       <p:sp>
         <p:nvSpPr>
@@ -2996,7 +3238,7 @@
           <a:bodyPr wrap="square" lIns="0" tIns="0" rIns="0" bIns="0" rtlCol="0" anchor="ctr"/>
           <a:lstStyle/>
           <a:p>
-            <a:pPr indent="0" marL="0">
+            <a:pPr marL="0" indent="0">
               <a:buNone/>
             </a:pPr>
             <a:r>
@@ -3005,7 +3247,7 @@
                   <a:srgbClr val="FFFFFF"/>
                 </a:solidFill>
               </a:rPr>
-              <a:t>Scenariji za prepoznavanje prijevare — vježba u grupi</a:t>
+              <a:t>Nesigurni Wi-Fi i zaštita privatnosti</a:t>
             </a:r>
             <a:endParaRPr lang="en-US" sz="2000" dirty="0"/>
           </a:p>
@@ -3020,7 +3262,7 @@
         <p:spPr>
           <a:xfrm>
             <a:off x="274320" y="804672"/>
-            <a:ext cx="4114800" cy="1920240"/>
+            <a:ext cx="4023360" cy="4114800"/>
           </a:xfrm>
           <a:prstGeom prst="rect">
             <a:avLst/>
@@ -3030,13 +3272,20 @@
           </a:solidFill>
           <a:ln/>
           <a:effectLst>
-            <a:outerShdw sx="100000" sy="100000" kx="0" ky="0" algn="bl" rotWithShape="0" blurRad="76200" dist="25400" dir="8100000">
+            <a:outerShdw blurRad="101600" dist="25400" dir="8100000" algn="bl" rotWithShape="0">
               <a:srgbClr val="000000">
                 <a:alpha val="10000"/>
               </a:srgbClr>
             </a:outerShdw>
           </a:effectLst>
         </p:spPr>
+        <p:txBody>
+          <a:bodyPr/>
+          <a:lstStyle/>
+          <a:p>
+            <a:endParaRPr lang="en-US"/>
+          </a:p>
+        </p:txBody>
       </p:sp>
       <p:sp>
         <p:nvSpPr>
@@ -3047,7 +3296,221 @@
         <p:spPr>
           <a:xfrm>
             <a:off x="274320" y="804672"/>
-            <a:ext cx="4114800" cy="347472"/>
+            <a:ext cx="4023360" cy="384048"/>
+          </a:xfrm>
+          <a:prstGeom prst="rect">
+            <a:avLst/>
+          </a:prstGeom>
+          <a:solidFill>
+            <a:srgbClr val="1A1A1A"/>
+          </a:solidFill>
+          <a:ln w="12700">
+            <a:solidFill>
+              <a:srgbClr val="1A1A1A"/>
+            </a:solidFill>
+            <a:prstDash val="solid"/>
+          </a:ln>
+        </p:spPr>
+        <p:txBody>
+          <a:bodyPr/>
+          <a:lstStyle/>
+          <a:p>
+            <a:endParaRPr lang="en-US"/>
+          </a:p>
+        </p:txBody>
+      </p:sp>
+      <p:sp>
+        <p:nvSpPr>
+          <p:cNvPr id="6" name="Text 4"/>
+          <p:cNvSpPr/>
+          <p:nvPr/>
+        </p:nvSpPr>
+        <p:spPr>
+          <a:xfrm>
+            <a:off x="274320" y="804672"/>
+            <a:ext cx="4023360" cy="384048"/>
+          </a:xfrm>
+          <a:prstGeom prst="rect">
+            <a:avLst/>
+          </a:prstGeom>
+          <a:noFill/>
+          <a:ln/>
+        </p:spPr>
+        <p:txBody>
+          <a:bodyPr wrap="square" lIns="0" tIns="0" rIns="0" bIns="0" rtlCol="0" anchor="ctr"/>
+          <a:lstStyle/>
+          <a:p>
+            <a:pPr marL="0" indent="0" algn="ctr">
+              <a:buNone/>
+            </a:pPr>
+            <a:r>
+              <a:rPr lang="en-US" sz="1300" b="1" dirty="0">
+                <a:solidFill>
+                  <a:srgbClr val="FFFFFF"/>
+                </a:solidFill>
+              </a:rPr>
+              <a:t>Pravila korištenja Wi-Fija</a:t>
+            </a:r>
+            <a:endParaRPr lang="en-US" sz="1300" dirty="0"/>
+          </a:p>
+        </p:txBody>
+      </p:sp>
+      <p:sp>
+        <p:nvSpPr>
+          <p:cNvPr id="7" name="Text 5"/>
+          <p:cNvSpPr/>
+          <p:nvPr/>
+        </p:nvSpPr>
+        <p:spPr>
+          <a:xfrm>
+            <a:off x="411480" y="1261872"/>
+            <a:ext cx="3749040" cy="3566160"/>
+          </a:xfrm>
+          <a:prstGeom prst="rect">
+            <a:avLst/>
+          </a:prstGeom>
+          <a:noFill/>
+          <a:ln/>
+        </p:spPr>
+        <p:txBody>
+          <a:bodyPr wrap="square" rtlCol="0" anchor="t"/>
+          <a:lstStyle/>
+          <a:p>
+            <a:pPr marL="342900" indent="-342900">
+              <a:spcAft>
+                <a:spcPts val="700"/>
+              </a:spcAft>
+              <a:buSzPct val="100000"/>
+              <a:buChar char="•"/>
+            </a:pPr>
+            <a:r>
+              <a:rPr lang="en-US" sz="1300" dirty="0">
+                <a:solidFill>
+                  <a:srgbClr val="444444"/>
+                </a:solidFill>
+              </a:rPr>
+              <a:t>NIKAD ne provjeravajte bankovni račun na javnom Wi-Fiju (kafić, hotel, bolnica)</a:t>
+            </a:r>
+            <a:endParaRPr lang="en-US" sz="1300" dirty="0"/>
+          </a:p>
+          <a:p>
+            <a:pPr marL="342900" indent="-342900">
+              <a:spcAft>
+                <a:spcPts val="700"/>
+              </a:spcAft>
+              <a:buSzPct val="100000"/>
+              <a:buChar char="•"/>
+            </a:pPr>
+            <a:r>
+              <a:rPr lang="en-US" sz="1300" dirty="0">
+                <a:solidFill>
+                  <a:srgbClr val="444444"/>
+                </a:solidFill>
+              </a:rPr>
+              <a:t>Ne upisujte lozinke dok ste na javnoj mreži</a:t>
+            </a:r>
+            <a:endParaRPr lang="en-US" sz="1300" dirty="0"/>
+          </a:p>
+          <a:p>
+            <a:pPr marL="342900" indent="-342900">
+              <a:spcAft>
+                <a:spcPts val="700"/>
+              </a:spcAft>
+              <a:buSzPct val="100000"/>
+              <a:buChar char="•"/>
+            </a:pPr>
+            <a:r>
+              <a:rPr lang="en-US" sz="1300" dirty="0">
+                <a:solidFill>
+                  <a:srgbClr val="444444"/>
+                </a:solidFill>
+              </a:rPr>
+              <a:t>Isključite 'automatsko spajanje' na otvorene mreže</a:t>
+            </a:r>
+            <a:endParaRPr lang="en-US" sz="1300" dirty="0"/>
+          </a:p>
+          <a:p>
+            <a:pPr marL="342900" indent="-342900">
+              <a:spcAft>
+                <a:spcPts val="700"/>
+              </a:spcAft>
+              <a:buSzPct val="100000"/>
+              <a:buChar char="•"/>
+            </a:pPr>
+            <a:r>
+              <a:rPr lang="en-US" sz="1300" dirty="0">
+                <a:solidFill>
+                  <a:srgbClr val="444444"/>
+                </a:solidFill>
+              </a:rPr>
+              <a:t>Za osjetljive radnje koristite mobilni internet (4G/5G)</a:t>
+            </a:r>
+            <a:endParaRPr lang="en-US" sz="1300" dirty="0"/>
+          </a:p>
+          <a:p>
+            <a:pPr marL="342900" indent="-342900">
+              <a:spcAft>
+                <a:spcPts val="700"/>
+              </a:spcAft>
+              <a:buSzPct val="100000"/>
+              <a:buChar char="•"/>
+            </a:pPr>
+            <a:r>
+              <a:rPr lang="en-US" sz="1300" dirty="0">
+                <a:solidFill>
+                  <a:srgbClr val="444444"/>
+                </a:solidFill>
+              </a:rPr>
+              <a:t>Kod kuće: postavite jaku lozinku za router, promijenite zadanu lozinku!</a:t>
+            </a:r>
+            <a:endParaRPr lang="en-US" sz="1300" dirty="0"/>
+          </a:p>
+        </p:txBody>
+      </p:sp>
+      <p:sp>
+        <p:nvSpPr>
+          <p:cNvPr id="8" name="Shape 6"/>
+          <p:cNvSpPr/>
+          <p:nvPr/>
+        </p:nvSpPr>
+        <p:spPr>
+          <a:xfrm>
+            <a:off x="4846320" y="804672"/>
+            <a:ext cx="4023360" cy="4114800"/>
+          </a:xfrm>
+          <a:prstGeom prst="rect">
+            <a:avLst/>
+          </a:prstGeom>
+          <a:solidFill>
+            <a:srgbClr val="FFFFFF"/>
+          </a:solidFill>
+          <a:ln/>
+          <a:effectLst>
+            <a:outerShdw blurRad="101600" dist="25400" dir="8100000" algn="bl" rotWithShape="0">
+              <a:srgbClr val="000000">
+                <a:alpha val="10000"/>
+              </a:srgbClr>
+            </a:outerShdw>
+          </a:effectLst>
+        </p:spPr>
+        <p:txBody>
+          <a:bodyPr/>
+          <a:lstStyle/>
+          <a:p>
+            <a:endParaRPr lang="en-US"/>
+          </a:p>
+        </p:txBody>
+      </p:sp>
+      <p:sp>
+        <p:nvSpPr>
+          <p:cNvPr id="9" name="Shape 7"/>
+          <p:cNvSpPr/>
+          <p:nvPr/>
+        </p:nvSpPr>
+        <p:spPr>
+          <a:xfrm>
+            <a:off x="4846320" y="804672"/>
+            <a:ext cx="4023360" cy="384048"/>
           </a:xfrm>
           <a:prstGeom prst="rect">
             <a:avLst/>
@@ -3062,17 +3525,24 @@
             <a:prstDash val="solid"/>
           </a:ln>
         </p:spPr>
-      </p:sp>
-      <p:sp>
-        <p:nvSpPr>
-          <p:cNvPr id="6" name="Text 4"/>
-          <p:cNvSpPr/>
-          <p:nvPr/>
-        </p:nvSpPr>
-        <p:spPr>
-          <a:xfrm>
-            <a:off x="365760" y="804672"/>
-            <a:ext cx="3931920" cy="347472"/>
+        <p:txBody>
+          <a:bodyPr/>
+          <a:lstStyle/>
+          <a:p>
+            <a:endParaRPr lang="en-US"/>
+          </a:p>
+        </p:txBody>
+      </p:sp>
+      <p:sp>
+        <p:nvSpPr>
+          <p:cNvPr id="10" name="Text 8"/>
+          <p:cNvSpPr/>
+          <p:nvPr/>
+        </p:nvSpPr>
+        <p:spPr>
+          <a:xfrm>
+            <a:off x="4846320" y="804672"/>
+            <a:ext cx="4023360" cy="384048"/>
           </a:xfrm>
           <a:prstGeom prst="rect">
             <a:avLst/>
@@ -3084,31 +3554,31 @@
           <a:bodyPr wrap="square" lIns="0" tIns="0" rIns="0" bIns="0" rtlCol="0" anchor="ctr"/>
           <a:lstStyle/>
           <a:p>
-            <a:pPr indent="0" marL="0">
+            <a:pPr marL="0" indent="0" algn="ctr">
               <a:buNone/>
             </a:pPr>
             <a:r>
-              <a:rPr lang="en-US" sz="1200" b="1" dirty="0">
+              <a:rPr lang="en-US" sz="1300" b="1" dirty="0">
                 <a:solidFill>
                   <a:srgbClr val="FFFFFF"/>
                 </a:solidFill>
               </a:rPr>
-              <a:t>⛔  PRIJEVARA</a:t>
-            </a:r>
-            <a:endParaRPr lang="en-US" sz="1200" dirty="0"/>
-          </a:p>
-        </p:txBody>
-      </p:sp>
-      <p:sp>
-        <p:nvSpPr>
-          <p:cNvPr id="7" name="Text 5"/>
-          <p:cNvSpPr/>
-          <p:nvPr/>
-        </p:nvSpPr>
-        <p:spPr>
-          <a:xfrm>
-            <a:off x="365760" y="1188720"/>
-            <a:ext cx="3931920" cy="347472"/>
+              <a:t>GDPR: vaša prava u EU</a:t>
+            </a:r>
+            <a:endParaRPr lang="en-US" sz="1300" dirty="0"/>
+          </a:p>
+        </p:txBody>
+      </p:sp>
+      <p:sp>
+        <p:nvSpPr>
+          <p:cNvPr id="11" name="Text 9"/>
+          <p:cNvSpPr/>
+          <p:nvPr/>
+        </p:nvSpPr>
+        <p:spPr>
+          <a:xfrm>
+            <a:off x="4983480" y="1261872"/>
+            <a:ext cx="3749040" cy="3566160"/>
           </a:xfrm>
           <a:prstGeom prst="rect">
             <a:avLst/>
@@ -3117,537 +3587,97 @@
           <a:ln/>
         </p:spPr>
         <p:txBody>
-          <a:bodyPr wrap="square" rtlCol="0" anchor="ctr"/>
-          <a:lstStyle/>
-          <a:p>
-            <a:pPr indent="0" marL="0">
-              <a:buNone/>
-            </a:pPr>
-            <a:r>
-              <a:rPr lang="en-US" sz="1200" b="1" dirty="0">
-                <a:solidFill>
-                  <a:srgbClr val="1A1A1A"/>
-                </a:solidFill>
-              </a:rPr>
-              <a:t>SMS: 'HP: paket čeka, platite 1,99 €'</a:t>
-            </a:r>
-            <a:endParaRPr lang="en-US" sz="1200" dirty="0"/>
-          </a:p>
-        </p:txBody>
-      </p:sp>
-      <p:sp>
-        <p:nvSpPr>
-          <p:cNvPr id="8" name="Text 6"/>
-          <p:cNvSpPr/>
-          <p:nvPr/>
-        </p:nvSpPr>
-        <p:spPr>
-          <a:xfrm>
-            <a:off x="365760" y="1536192"/>
-            <a:ext cx="3931920" cy="1143000"/>
-          </a:xfrm>
-          <a:prstGeom prst="rect">
-            <a:avLst/>
-          </a:prstGeom>
-          <a:noFill/>
-          <a:ln/>
-        </p:spPr>
-        <p:txBody>
           <a:bodyPr wrap="square" rtlCol="0" anchor="t"/>
           <a:lstStyle/>
           <a:p>
-            <a:pPr indent="0" marL="0">
-              <a:buNone/>
-            </a:pPr>
-            <a:r>
-              <a:rPr lang="en-US" sz="1200" dirty="0">
-                <a:solidFill>
-                  <a:srgbClr val="444444"/>
-                </a:solidFill>
-              </a:rPr>
-              <a:t>HP nikad ne traži plaćanje putem SMS linka. Ivana nije ništa naručivala — nazovite unuku direktno.</a:t>
-            </a:r>
-            <a:endParaRPr lang="en-US" sz="1200" dirty="0"/>
-          </a:p>
-        </p:txBody>
-      </p:sp>
-      <p:sp>
-        <p:nvSpPr>
-          <p:cNvPr id="9" name="Shape 7"/>
-          <p:cNvSpPr/>
-          <p:nvPr/>
-        </p:nvSpPr>
-        <p:spPr>
-          <a:xfrm>
-            <a:off x="4709160" y="804672"/>
-            <a:ext cx="4114800" cy="1920240"/>
-          </a:xfrm>
-          <a:prstGeom prst="rect">
-            <a:avLst/>
-          </a:prstGeom>
-          <a:solidFill>
-            <a:srgbClr val="FFFFFF"/>
-          </a:solidFill>
-          <a:ln/>
-          <a:effectLst>
-            <a:outerShdw sx="100000" sy="100000" kx="0" ky="0" algn="bl" rotWithShape="0" blurRad="76200" dist="25400" dir="8100000">
-              <a:srgbClr val="000000">
-                <a:alpha val="10000"/>
-              </a:srgbClr>
-            </a:outerShdw>
-          </a:effectLst>
-        </p:spPr>
-      </p:sp>
-      <p:sp>
-        <p:nvSpPr>
-          <p:cNvPr id="10" name="Shape 8"/>
-          <p:cNvSpPr/>
-          <p:nvPr/>
-        </p:nvSpPr>
-        <p:spPr>
-          <a:xfrm>
-            <a:off x="4709160" y="804672"/>
-            <a:ext cx="4114800" cy="347472"/>
-          </a:xfrm>
-          <a:prstGeom prst="rect">
-            <a:avLst/>
-          </a:prstGeom>
-          <a:solidFill>
-            <a:srgbClr val="CC0000"/>
-          </a:solidFill>
-          <a:ln w="12700">
-            <a:solidFill>
-              <a:srgbClr val="CC0000"/>
-            </a:solidFill>
-            <a:prstDash val="solid"/>
-          </a:ln>
-        </p:spPr>
-      </p:sp>
-      <p:sp>
-        <p:nvSpPr>
-          <p:cNvPr id="11" name="Text 9"/>
-          <p:cNvSpPr/>
-          <p:nvPr/>
-        </p:nvSpPr>
-        <p:spPr>
-          <a:xfrm>
-            <a:off x="4800600" y="804672"/>
-            <a:ext cx="3931920" cy="347472"/>
-          </a:xfrm>
-          <a:prstGeom prst="rect">
-            <a:avLst/>
-          </a:prstGeom>
-          <a:noFill/>
-          <a:ln/>
-        </p:spPr>
-        <p:txBody>
-          <a:bodyPr wrap="square" lIns="0" tIns="0" rIns="0" bIns="0" rtlCol="0" anchor="ctr"/>
-          <a:lstStyle/>
-          <a:p>
-            <a:pPr indent="0" marL="0">
-              <a:buNone/>
-            </a:pPr>
-            <a:r>
-              <a:rPr lang="en-US" sz="1200" b="1" dirty="0">
-                <a:solidFill>
-                  <a:srgbClr val="FFFFFF"/>
-                </a:solidFill>
-              </a:rPr>
-              <a:t>⛔  PRIJEVARA</a:t>
-            </a:r>
-            <a:endParaRPr lang="en-US" sz="1200" dirty="0"/>
-          </a:p>
-        </p:txBody>
-      </p:sp>
-      <p:sp>
-        <p:nvSpPr>
-          <p:cNvPr id="12" name="Text 10"/>
-          <p:cNvSpPr/>
-          <p:nvPr/>
-        </p:nvSpPr>
-        <p:spPr>
-          <a:xfrm>
-            <a:off x="4800600" y="1188720"/>
-            <a:ext cx="3931920" cy="347472"/>
-          </a:xfrm>
-          <a:prstGeom prst="rect">
-            <a:avLst/>
-          </a:prstGeom>
-          <a:noFill/>
-          <a:ln/>
-        </p:spPr>
-        <p:txBody>
-          <a:bodyPr wrap="square" rtlCol="0" anchor="ctr"/>
-          <a:lstStyle/>
-          <a:p>
-            <a:pPr indent="0" marL="0">
-              <a:buNone/>
-            </a:pPr>
-            <a:r>
-              <a:rPr lang="en-US" sz="1200" b="1" dirty="0">
-                <a:solidFill>
-                  <a:srgbClr val="1A1A1A"/>
-                </a:solidFill>
-              </a:rPr>
-              <a:t>Poziv od 'Erste banke' traži PIN</a:t>
-            </a:r>
-            <a:endParaRPr lang="en-US" sz="1200" dirty="0"/>
-          </a:p>
-        </p:txBody>
-      </p:sp>
-      <p:sp>
-        <p:nvSpPr>
-          <p:cNvPr id="13" name="Text 11"/>
-          <p:cNvSpPr/>
-          <p:nvPr/>
-        </p:nvSpPr>
-        <p:spPr>
-          <a:xfrm>
-            <a:off x="4800600" y="1536192"/>
-            <a:ext cx="3931920" cy="1143000"/>
-          </a:xfrm>
-          <a:prstGeom prst="rect">
-            <a:avLst/>
-          </a:prstGeom>
-          <a:noFill/>
-          <a:ln/>
-        </p:spPr>
-        <p:txBody>
-          <a:bodyPr wrap="square" rtlCol="0" anchor="t"/>
-          <a:lstStyle/>
-          <a:p>
-            <a:pPr indent="0" marL="0">
-              <a:buNone/>
-            </a:pPr>
-            <a:r>
-              <a:rPr lang="en-US" sz="1200" dirty="0">
-                <a:solidFill>
-                  <a:srgbClr val="444444"/>
-                </a:solidFill>
-              </a:rPr>
-              <a:t>Banka NIKAD ne traži PIN telefonom. Prekinite razgovor i nazovite banku na broj s poleđine kartice.</a:t>
-            </a:r>
-            <a:endParaRPr lang="en-US" sz="1200" dirty="0"/>
-          </a:p>
-        </p:txBody>
-      </p:sp>
-      <p:sp>
-        <p:nvSpPr>
-          <p:cNvPr id="14" name="Shape 12"/>
-          <p:cNvSpPr/>
-          <p:nvPr/>
-        </p:nvSpPr>
-        <p:spPr>
-          <a:xfrm>
-            <a:off x="274320" y="2907792"/>
-            <a:ext cx="4114800" cy="1920240"/>
-          </a:xfrm>
-          <a:prstGeom prst="rect">
-            <a:avLst/>
-          </a:prstGeom>
-          <a:solidFill>
-            <a:srgbClr val="FFFFFF"/>
-          </a:solidFill>
-          <a:ln/>
-          <a:effectLst>
-            <a:outerShdw sx="100000" sy="100000" kx="0" ky="0" algn="bl" rotWithShape="0" blurRad="76200" dist="25400" dir="8100000">
-              <a:srgbClr val="000000">
-                <a:alpha val="10000"/>
-              </a:srgbClr>
-            </a:outerShdw>
-          </a:effectLst>
-        </p:spPr>
-      </p:sp>
-      <p:sp>
-        <p:nvSpPr>
-          <p:cNvPr id="15" name="Shape 13"/>
-          <p:cNvSpPr/>
-          <p:nvPr/>
-        </p:nvSpPr>
-        <p:spPr>
-          <a:xfrm>
-            <a:off x="274320" y="2907792"/>
-            <a:ext cx="4114800" cy="347472"/>
-          </a:xfrm>
-          <a:prstGeom prst="rect">
-            <a:avLst/>
-          </a:prstGeom>
-          <a:solidFill>
-            <a:srgbClr val="CC0000"/>
-          </a:solidFill>
-          <a:ln w="12700">
-            <a:solidFill>
-              <a:srgbClr val="CC0000"/>
-            </a:solidFill>
-            <a:prstDash val="solid"/>
-          </a:ln>
-        </p:spPr>
-      </p:sp>
-      <p:sp>
-        <p:nvSpPr>
-          <p:cNvPr id="16" name="Text 14"/>
-          <p:cNvSpPr/>
-          <p:nvPr/>
-        </p:nvSpPr>
-        <p:spPr>
-          <a:xfrm>
-            <a:off x="365760" y="2907792"/>
-            <a:ext cx="3931920" cy="347472"/>
-          </a:xfrm>
-          <a:prstGeom prst="rect">
-            <a:avLst/>
-          </a:prstGeom>
-          <a:noFill/>
-          <a:ln/>
-        </p:spPr>
-        <p:txBody>
-          <a:bodyPr wrap="square" lIns="0" tIns="0" rIns="0" bIns="0" rtlCol="0" anchor="ctr"/>
-          <a:lstStyle/>
-          <a:p>
-            <a:pPr indent="0" marL="0">
-              <a:buNone/>
-            </a:pPr>
-            <a:r>
-              <a:rPr lang="en-US" sz="1200" b="1" dirty="0">
-                <a:solidFill>
-                  <a:srgbClr val="FFFFFF"/>
-                </a:solidFill>
-              </a:rPr>
-              <a:t>⛔  PRIJEVARA</a:t>
-            </a:r>
-            <a:endParaRPr lang="en-US" sz="1200" dirty="0"/>
-          </a:p>
-        </p:txBody>
-      </p:sp>
-      <p:sp>
-        <p:nvSpPr>
-          <p:cNvPr id="17" name="Text 15"/>
-          <p:cNvSpPr/>
-          <p:nvPr/>
-        </p:nvSpPr>
-        <p:spPr>
-          <a:xfrm>
-            <a:off x="365760" y="3291840"/>
-            <a:ext cx="3931920" cy="347472"/>
-          </a:xfrm>
-          <a:prstGeom prst="rect">
-            <a:avLst/>
-          </a:prstGeom>
-          <a:noFill/>
-          <a:ln/>
-        </p:spPr>
-        <p:txBody>
-          <a:bodyPr wrap="square" rtlCol="0" anchor="ctr"/>
-          <a:lstStyle/>
-          <a:p>
-            <a:pPr indent="0" marL="0">
-              <a:buNone/>
-            </a:pPr>
-            <a:r>
-              <a:rPr lang="en-US" sz="1200" b="1" dirty="0">
-                <a:solidFill>
-                  <a:srgbClr val="1A1A1A"/>
-                </a:solidFill>
-              </a:rPr>
-              <a:t>Tom iz Libanona traži novac za avionsku kartu</a:t>
-            </a:r>
-            <a:endParaRPr lang="en-US" sz="1200" dirty="0"/>
-          </a:p>
-        </p:txBody>
-      </p:sp>
-      <p:sp>
-        <p:nvSpPr>
-          <p:cNvPr id="18" name="Text 16"/>
-          <p:cNvSpPr/>
-          <p:nvPr/>
-        </p:nvSpPr>
-        <p:spPr>
-          <a:xfrm>
-            <a:off x="365760" y="3639312"/>
-            <a:ext cx="3931920" cy="1143000"/>
-          </a:xfrm>
-          <a:prstGeom prst="rect">
-            <a:avLst/>
-          </a:prstGeom>
-          <a:noFill/>
-          <a:ln/>
-        </p:spPr>
-        <p:txBody>
-          <a:bodyPr wrap="square" rtlCol="0" anchor="t"/>
-          <a:lstStyle/>
-          <a:p>
-            <a:pPr indent="0" marL="0">
-              <a:buNone/>
-            </a:pPr>
-            <a:r>
-              <a:rPr lang="en-US" sz="1200" dirty="0">
-                <a:solidFill>
-                  <a:srgbClr val="444444"/>
-                </a:solidFill>
-              </a:rPr>
-              <a:t>Romance scam. Prebrzo ljubav, nema video poziva, traži novac — klasični znakovi prevaranta.</a:t>
-            </a:r>
-            <a:endParaRPr lang="en-US" sz="1200" dirty="0"/>
-          </a:p>
-        </p:txBody>
-      </p:sp>
-      <p:sp>
-        <p:nvSpPr>
-          <p:cNvPr id="19" name="Shape 17"/>
-          <p:cNvSpPr/>
-          <p:nvPr/>
-        </p:nvSpPr>
-        <p:spPr>
-          <a:xfrm>
-            <a:off x="4709160" y="2907792"/>
-            <a:ext cx="4114800" cy="1920240"/>
-          </a:xfrm>
-          <a:prstGeom prst="rect">
-            <a:avLst/>
-          </a:prstGeom>
-          <a:solidFill>
-            <a:srgbClr val="FFFFFF"/>
-          </a:solidFill>
-          <a:ln/>
-          <a:effectLst>
-            <a:outerShdw sx="100000" sy="100000" kx="0" ky="0" algn="bl" rotWithShape="0" blurRad="76200" dist="25400" dir="8100000">
-              <a:srgbClr val="000000">
-                <a:alpha val="10000"/>
-              </a:srgbClr>
-            </a:outerShdw>
-          </a:effectLst>
-        </p:spPr>
-      </p:sp>
-      <p:sp>
-        <p:nvSpPr>
-          <p:cNvPr id="20" name="Shape 18"/>
-          <p:cNvSpPr/>
-          <p:nvPr/>
-        </p:nvSpPr>
-        <p:spPr>
-          <a:xfrm>
-            <a:off x="4709160" y="2907792"/>
-            <a:ext cx="4114800" cy="347472"/>
-          </a:xfrm>
-          <a:prstGeom prst="rect">
-            <a:avLst/>
-          </a:prstGeom>
-          <a:solidFill>
-            <a:srgbClr val="CC0000"/>
-          </a:solidFill>
-          <a:ln w="12700">
-            <a:solidFill>
-              <a:srgbClr val="CC0000"/>
-            </a:solidFill>
-            <a:prstDash val="solid"/>
-          </a:ln>
-        </p:spPr>
-      </p:sp>
-      <p:sp>
-        <p:nvSpPr>
-          <p:cNvPr id="21" name="Text 19"/>
-          <p:cNvSpPr/>
-          <p:nvPr/>
-        </p:nvSpPr>
-        <p:spPr>
-          <a:xfrm>
-            <a:off x="4800600" y="2907792"/>
-            <a:ext cx="3931920" cy="347472"/>
-          </a:xfrm>
-          <a:prstGeom prst="rect">
-            <a:avLst/>
-          </a:prstGeom>
-          <a:noFill/>
-          <a:ln/>
-        </p:spPr>
-        <p:txBody>
-          <a:bodyPr wrap="square" lIns="0" tIns="0" rIns="0" bIns="0" rtlCol="0" anchor="ctr"/>
-          <a:lstStyle/>
-          <a:p>
-            <a:pPr indent="0" marL="0">
-              <a:buNone/>
-            </a:pPr>
-            <a:r>
-              <a:rPr lang="en-US" sz="1200" b="1" dirty="0">
-                <a:solidFill>
-                  <a:srgbClr val="FFFFFF"/>
-                </a:solidFill>
-              </a:rPr>
-              <a:t>⛔  PRIJEVARA</a:t>
-            </a:r>
-            <a:endParaRPr lang="en-US" sz="1200" dirty="0"/>
-          </a:p>
-        </p:txBody>
-      </p:sp>
-      <p:sp>
-        <p:nvSpPr>
-          <p:cNvPr id="22" name="Text 20"/>
-          <p:cNvSpPr/>
-          <p:nvPr/>
-        </p:nvSpPr>
-        <p:spPr>
-          <a:xfrm>
-            <a:off x="4800600" y="3291840"/>
-            <a:ext cx="3931920" cy="347472"/>
-          </a:xfrm>
-          <a:prstGeom prst="rect">
-            <a:avLst/>
-          </a:prstGeom>
-          <a:noFill/>
-          <a:ln/>
-        </p:spPr>
-        <p:txBody>
-          <a:bodyPr wrap="square" rtlCol="0" anchor="ctr"/>
-          <a:lstStyle/>
-          <a:p>
-            <a:pPr indent="0" marL="0">
-              <a:buNone/>
-            </a:pPr>
-            <a:r>
-              <a:rPr lang="en-US" sz="1200" b="1" dirty="0">
-                <a:solidFill>
-                  <a:srgbClr val="1A1A1A"/>
-                </a:solidFill>
-              </a:rPr>
-              <a:t>Kaufland poklanja 100 kartica od 500 €</a:t>
-            </a:r>
-            <a:endParaRPr lang="en-US" sz="1200" dirty="0"/>
-          </a:p>
-        </p:txBody>
-      </p:sp>
-      <p:sp>
-        <p:nvSpPr>
-          <p:cNvPr id="23" name="Text 21"/>
-          <p:cNvSpPr/>
-          <p:nvPr/>
-        </p:nvSpPr>
-        <p:spPr>
-          <a:xfrm>
-            <a:off x="4800600" y="3639312"/>
-            <a:ext cx="3931920" cy="1143000"/>
-          </a:xfrm>
-          <a:prstGeom prst="rect">
-            <a:avLst/>
-          </a:prstGeom>
-          <a:noFill/>
-          <a:ln/>
-        </p:spPr>
-        <p:txBody>
-          <a:bodyPr wrap="square" rtlCol="0" anchor="t"/>
-          <a:lstStyle/>
-          <a:p>
-            <a:pPr indent="0" marL="0">
-              <a:buNone/>
-            </a:pPr>
-            <a:r>
-              <a:rPr lang="en-US" sz="1200" dirty="0">
-                <a:solidFill>
-                  <a:srgbClr val="444444"/>
-                </a:solidFill>
-              </a:rPr>
-              <a:t>Prijevara za prikupljanje podataka. Legitimna nagradna igra ne traži adresu i telefon ovako.</a:t>
-            </a:r>
-            <a:endParaRPr lang="en-US" sz="1200" dirty="0"/>
+            <a:pPr marL="342900" indent="-342900">
+              <a:spcAft>
+                <a:spcPts val="700"/>
+              </a:spcAft>
+              <a:buSzPct val="100000"/>
+              <a:buChar char="•"/>
+            </a:pPr>
+            <a:r>
+              <a:rPr lang="en-US" sz="1300" dirty="0">
+                <a:solidFill>
+                  <a:srgbClr val="444444"/>
+                </a:solidFill>
+              </a:rPr>
+              <a:t>Vaši osobni podaci vrijede novac — tvrtke ih kupuju za marketing, kriminalci kradu za prijevare</a:t>
+            </a:r>
+            <a:endParaRPr lang="en-US" sz="1300" dirty="0"/>
+          </a:p>
+          <a:p>
+            <a:pPr marL="342900" indent="-342900">
+              <a:spcAft>
+                <a:spcPts val="700"/>
+              </a:spcAft>
+              <a:buSzPct val="100000"/>
+              <a:buChar char="•"/>
+            </a:pPr>
+            <a:r>
+              <a:rPr lang="en-US" sz="1300" dirty="0">
+                <a:solidFill>
+                  <a:srgbClr val="444444"/>
+                </a:solidFill>
+              </a:rPr>
+              <a:t>Imate pravo znati koje podatke tvrtka prikuplja</a:t>
+            </a:r>
+            <a:endParaRPr lang="en-US" sz="1300" dirty="0"/>
+          </a:p>
+          <a:p>
+            <a:pPr marL="342900" indent="-342900">
+              <a:spcAft>
+                <a:spcPts val="700"/>
+              </a:spcAft>
+              <a:buSzPct val="100000"/>
+              <a:buChar char="•"/>
+            </a:pPr>
+            <a:r>
+              <a:rPr lang="en-US" sz="1300" dirty="0">
+                <a:solidFill>
+                  <a:srgbClr val="444444"/>
+                </a:solidFill>
+              </a:rPr>
+              <a:t>Imate pravo tražiti ispravak ili brisanje podataka ('pravo na zaborav')</a:t>
+            </a:r>
+            <a:endParaRPr lang="en-US" sz="1300" dirty="0"/>
+          </a:p>
+          <a:p>
+            <a:pPr marL="342900" indent="-342900">
+              <a:spcAft>
+                <a:spcPts val="700"/>
+              </a:spcAft>
+              <a:buSzPct val="100000"/>
+              <a:buChar char="•"/>
+            </a:pPr>
+            <a:r>
+              <a:rPr lang="en-US" sz="1300" dirty="0">
+                <a:solidFill>
+                  <a:srgbClr val="444444"/>
+                </a:solidFill>
+              </a:rPr>
+              <a:t>Imate pravo prigovoriti obradi u marketinške svrhe</a:t>
+            </a:r>
+            <a:endParaRPr lang="en-US" sz="1300" dirty="0"/>
+          </a:p>
+          <a:p>
+            <a:pPr marL="342900" indent="-342900">
+              <a:spcAft>
+                <a:spcPts val="700"/>
+              </a:spcAft>
+              <a:buSzPct val="100000"/>
+              <a:buChar char="•"/>
+            </a:pPr>
+            <a:r>
+              <a:rPr lang="en-US" sz="1300" dirty="0">
+                <a:solidFill>
+                  <a:srgbClr val="444444"/>
+                </a:solidFill>
+              </a:rPr>
+              <a:t>Pritužba: AZOP — azop.hr</a:t>
+            </a:r>
+            <a:endParaRPr lang="en-US" sz="1300" dirty="0"/>
           </a:p>
         </p:txBody>
       </p:sp>
@@ -3661,12 +3691,13 @@
 
 <file path=ppt/slides/slide12.xml><?xml version="1.0" encoding="utf-8"?>
 <p:sld xmlns:a="http://schemas.openxmlformats.org/drawingml/2006/main" xmlns:r="http://schemas.openxmlformats.org/officeDocument/2006/relationships" xmlns:p="http://schemas.openxmlformats.org/presentationml/2006/main">
-  <p:cSld name="Slide 12">
+  <p:cSld name="Slide 11">
     <p:bg>
       <p:bgPr>
         <a:solidFill>
           <a:srgbClr val="F5F5F5"/>
         </a:solidFill>
+        <a:effectLst/>
       </p:bgPr>
     </p:bg>
     <p:spTree>
@@ -3707,6 +3738,13 @@
             <a:prstDash val="solid"/>
           </a:ln>
         </p:spPr>
+        <p:txBody>
+          <a:bodyPr/>
+          <a:lstStyle/>
+          <a:p>
+            <a:endParaRPr lang="en-US"/>
+          </a:p>
+        </p:txBody>
       </p:sp>
       <p:sp>
         <p:nvSpPr>
@@ -3729,7 +3767,7 @@
           <a:bodyPr wrap="square" lIns="0" tIns="0" rIns="0" bIns="0" rtlCol="0" anchor="ctr"/>
           <a:lstStyle/>
           <a:p>
-            <a:pPr indent="0" marL="0">
+            <a:pPr marL="0" indent="0">
               <a:buNone/>
             </a:pPr>
             <a:r>
@@ -3738,7 +3776,7 @@
                   <a:srgbClr val="FFFFFF"/>
                 </a:solidFill>
               </a:rPr>
-              <a:t>Posebne teme: Deepfake, QR kodovi i AI u rukama prevaranata</a:t>
+              <a:t>Scenariji za prepoznavanje prijevare — vježba u grupi</a:t>
             </a:r>
             <a:endParaRPr lang="en-US" sz="2000" dirty="0"/>
           </a:p>
@@ -3753,7 +3791,7 @@
         <p:spPr>
           <a:xfrm>
             <a:off x="274320" y="804672"/>
-            <a:ext cx="4023360" cy="1828800"/>
+            <a:ext cx="4114800" cy="1920240"/>
           </a:xfrm>
           <a:prstGeom prst="rect">
             <a:avLst/>
@@ -3763,13 +3801,20 @@
           </a:solidFill>
           <a:ln/>
           <a:effectLst>
-            <a:outerShdw sx="100000" sy="100000" kx="0" ky="0" algn="bl" rotWithShape="0" blurRad="101600" dist="25400" dir="8100000">
+            <a:outerShdw blurRad="76200" dist="25400" dir="8100000" algn="bl" rotWithShape="0">
               <a:srgbClr val="000000">
                 <a:alpha val="10000"/>
               </a:srgbClr>
             </a:outerShdw>
           </a:effectLst>
         </p:spPr>
+        <p:txBody>
+          <a:bodyPr/>
+          <a:lstStyle/>
+          <a:p>
+            <a:endParaRPr lang="en-US"/>
+          </a:p>
+        </p:txBody>
       </p:sp>
       <p:sp>
         <p:nvSpPr>
@@ -3780,7 +3825,7 @@
         <p:spPr>
           <a:xfrm>
             <a:off x="274320" y="804672"/>
-            <a:ext cx="73152" cy="1828800"/>
+            <a:ext cx="4114800" cy="347472"/>
           </a:xfrm>
           <a:prstGeom prst="rect">
             <a:avLst/>
@@ -3795,19 +3840,168 @@
             <a:prstDash val="solid"/>
           </a:ln>
         </p:spPr>
-      </p:sp>
-      <p:sp>
-        <p:nvSpPr>
-          <p:cNvPr id="6" name="Shape 4"/>
-          <p:cNvSpPr/>
-          <p:nvPr/>
-        </p:nvSpPr>
-        <p:spPr>
-          <a:xfrm>
-            <a:off x="438912" y="1051560"/>
-            <a:ext cx="594360" cy="594360"/>
-          </a:xfrm>
-          <a:prstGeom prst="ellipse">
+        <p:txBody>
+          <a:bodyPr/>
+          <a:lstStyle/>
+          <a:p>
+            <a:endParaRPr lang="en-US"/>
+          </a:p>
+        </p:txBody>
+      </p:sp>
+      <p:sp>
+        <p:nvSpPr>
+          <p:cNvPr id="6" name="Text 4"/>
+          <p:cNvSpPr/>
+          <p:nvPr/>
+        </p:nvSpPr>
+        <p:spPr>
+          <a:xfrm>
+            <a:off x="365760" y="804672"/>
+            <a:ext cx="3931920" cy="347472"/>
+          </a:xfrm>
+          <a:prstGeom prst="rect">
+            <a:avLst/>
+          </a:prstGeom>
+          <a:noFill/>
+          <a:ln/>
+        </p:spPr>
+        <p:txBody>
+          <a:bodyPr wrap="square" lIns="0" tIns="0" rIns="0" bIns="0" rtlCol="0" anchor="ctr"/>
+          <a:lstStyle/>
+          <a:p>
+            <a:pPr marL="0" indent="0">
+              <a:buNone/>
+            </a:pPr>
+            <a:r>
+              <a:rPr lang="en-US" sz="1200" b="1" dirty="0">
+                <a:solidFill>
+                  <a:srgbClr val="FFFFFF"/>
+                </a:solidFill>
+              </a:rPr>
+              <a:t>⛔  PRIJEVARA</a:t>
+            </a:r>
+            <a:endParaRPr lang="en-US" sz="1200" dirty="0"/>
+          </a:p>
+        </p:txBody>
+      </p:sp>
+      <p:sp>
+        <p:nvSpPr>
+          <p:cNvPr id="7" name="Text 5"/>
+          <p:cNvSpPr/>
+          <p:nvPr/>
+        </p:nvSpPr>
+        <p:spPr>
+          <a:xfrm>
+            <a:off x="365760" y="1188720"/>
+            <a:ext cx="3931920" cy="347472"/>
+          </a:xfrm>
+          <a:prstGeom prst="rect">
+            <a:avLst/>
+          </a:prstGeom>
+          <a:noFill/>
+          <a:ln/>
+        </p:spPr>
+        <p:txBody>
+          <a:bodyPr wrap="square" rtlCol="0" anchor="ctr"/>
+          <a:lstStyle/>
+          <a:p>
+            <a:pPr marL="0" indent="0">
+              <a:buNone/>
+            </a:pPr>
+            <a:r>
+              <a:rPr lang="en-US" sz="1200" b="1" dirty="0">
+                <a:solidFill>
+                  <a:srgbClr val="1A1A1A"/>
+                </a:solidFill>
+              </a:rPr>
+              <a:t>SMS: 'HP: paket čeka, platite 1,99 €'</a:t>
+            </a:r>
+            <a:endParaRPr lang="en-US" sz="1200" dirty="0"/>
+          </a:p>
+        </p:txBody>
+      </p:sp>
+      <p:sp>
+        <p:nvSpPr>
+          <p:cNvPr id="8" name="Text 6"/>
+          <p:cNvSpPr/>
+          <p:nvPr/>
+        </p:nvSpPr>
+        <p:spPr>
+          <a:xfrm>
+            <a:off x="365760" y="1536192"/>
+            <a:ext cx="3931920" cy="1143000"/>
+          </a:xfrm>
+          <a:prstGeom prst="rect">
+            <a:avLst/>
+          </a:prstGeom>
+          <a:noFill/>
+          <a:ln/>
+        </p:spPr>
+        <p:txBody>
+          <a:bodyPr wrap="square" rtlCol="0" anchor="t"/>
+          <a:lstStyle/>
+          <a:p>
+            <a:pPr marL="0" indent="0">
+              <a:buNone/>
+            </a:pPr>
+            <a:r>
+              <a:rPr lang="en-US" sz="1200" dirty="0">
+                <a:solidFill>
+                  <a:srgbClr val="444444"/>
+                </a:solidFill>
+              </a:rPr>
+              <a:t>HP nikad ne traži plaćanje putem SMS linka. Ivana nije ništa naručivala — nazovite unuku direktno.</a:t>
+            </a:r>
+            <a:endParaRPr lang="en-US" sz="1200" dirty="0"/>
+          </a:p>
+        </p:txBody>
+      </p:sp>
+      <p:sp>
+        <p:nvSpPr>
+          <p:cNvPr id="9" name="Shape 7"/>
+          <p:cNvSpPr/>
+          <p:nvPr/>
+        </p:nvSpPr>
+        <p:spPr>
+          <a:xfrm>
+            <a:off x="4709160" y="804672"/>
+            <a:ext cx="4114800" cy="1920240"/>
+          </a:xfrm>
+          <a:prstGeom prst="rect">
+            <a:avLst/>
+          </a:prstGeom>
+          <a:solidFill>
+            <a:srgbClr val="FFFFFF"/>
+          </a:solidFill>
+          <a:ln/>
+          <a:effectLst>
+            <a:outerShdw blurRad="76200" dist="25400" dir="8100000" algn="bl" rotWithShape="0">
+              <a:srgbClr val="000000">
+                <a:alpha val="10000"/>
+              </a:srgbClr>
+            </a:outerShdw>
+          </a:effectLst>
+        </p:spPr>
+        <p:txBody>
+          <a:bodyPr/>
+          <a:lstStyle/>
+          <a:p>
+            <a:endParaRPr lang="en-US"/>
+          </a:p>
+        </p:txBody>
+      </p:sp>
+      <p:sp>
+        <p:nvSpPr>
+          <p:cNvPr id="10" name="Shape 8"/>
+          <p:cNvSpPr/>
+          <p:nvPr/>
+        </p:nvSpPr>
+        <p:spPr>
+          <a:xfrm>
+            <a:off x="4709160" y="804672"/>
+            <a:ext cx="4114800" cy="347472"/>
+          </a:xfrm>
+          <a:prstGeom prst="rect">
             <a:avLst/>
           </a:prstGeom>
           <a:solidFill>
@@ -3820,41 +4014,24 @@
             <a:prstDash val="solid"/>
           </a:ln>
         </p:spPr>
-      </p:sp>
-      <p:pic>
-        <p:nvPicPr>
-          <p:cNvPr id="7" name="Image 0" descr="preencoded.png">    </p:cNvPr>
-          <p:cNvPicPr>
-            <a:picLocks noChangeAspect="1"/>
-          </p:cNvPicPr>
-          <p:nvPr/>
-        </p:nvPicPr>
-        <p:blipFill>
-          <a:blip r:embed="rId1"/>
-          <a:stretch>
-            <a:fillRect/>
-          </a:stretch>
-        </p:blipFill>
-        <p:spPr>
-          <a:xfrm>
-            <a:off x="493776" y="1106424"/>
-            <a:ext cx="484632" cy="484632"/>
-          </a:xfrm>
-          <a:prstGeom prst="rect">
-            <a:avLst/>
-          </a:prstGeom>
-        </p:spPr>
-      </p:pic>
-      <p:sp>
-        <p:nvSpPr>
-          <p:cNvPr id="8" name="Text 5"/>
-          <p:cNvSpPr/>
-          <p:nvPr/>
-        </p:nvSpPr>
-        <p:spPr>
-          <a:xfrm>
-            <a:off x="1143000" y="950976"/>
-            <a:ext cx="3063240" cy="384048"/>
+        <p:txBody>
+          <a:bodyPr/>
+          <a:lstStyle/>
+          <a:p>
+            <a:endParaRPr lang="en-US"/>
+          </a:p>
+        </p:txBody>
+      </p:sp>
+      <p:sp>
+        <p:nvSpPr>
+          <p:cNvPr id="11" name="Text 9"/>
+          <p:cNvSpPr/>
+          <p:nvPr/>
+        </p:nvSpPr>
+        <p:spPr>
+          <a:xfrm>
+            <a:off x="4800600" y="804672"/>
+            <a:ext cx="3931920" cy="347472"/>
           </a:xfrm>
           <a:prstGeom prst="rect">
             <a:avLst/>
@@ -3866,31 +4043,31 @@
           <a:bodyPr wrap="square" lIns="0" tIns="0" rIns="0" bIns="0" rtlCol="0" anchor="ctr"/>
           <a:lstStyle/>
           <a:p>
-            <a:pPr indent="0" marL="0">
+            <a:pPr marL="0" indent="0">
               <a:buNone/>
             </a:pPr>
             <a:r>
-              <a:rPr lang="en-US" sz="1400" b="1" dirty="0">
-                <a:solidFill>
-                  <a:srgbClr val="1A1A1A"/>
-                </a:solidFill>
-              </a:rPr>
-              <a:t>Deepfake videozapisi</a:t>
-            </a:r>
-            <a:endParaRPr lang="en-US" sz="1400" dirty="0"/>
-          </a:p>
-        </p:txBody>
-      </p:sp>
-      <p:sp>
-        <p:nvSpPr>
-          <p:cNvPr id="9" name="Text 6"/>
-          <p:cNvSpPr/>
-          <p:nvPr/>
-        </p:nvSpPr>
-        <p:spPr>
-          <a:xfrm>
-            <a:off x="1143000" y="1316736"/>
-            <a:ext cx="3063240" cy="1207008"/>
+              <a:rPr lang="en-US" sz="1200" b="1" dirty="0">
+                <a:solidFill>
+                  <a:srgbClr val="FFFFFF"/>
+                </a:solidFill>
+              </a:rPr>
+              <a:t>⛔  PRIJEVARA</a:t>
+            </a:r>
+            <a:endParaRPr lang="en-US" sz="1200" dirty="0"/>
+          </a:p>
+        </p:txBody>
+      </p:sp>
+      <p:sp>
+        <p:nvSpPr>
+          <p:cNvPr id="12" name="Text 10"/>
+          <p:cNvSpPr/>
+          <p:nvPr/>
+        </p:nvSpPr>
+        <p:spPr>
+          <a:xfrm>
+            <a:off x="4800600" y="1188720"/>
+            <a:ext cx="3931920" cy="347472"/>
           </a:xfrm>
           <a:prstGeom prst="rect">
             <a:avLst/>
@@ -3899,10 +4076,46 @@
           <a:ln/>
         </p:spPr>
         <p:txBody>
+          <a:bodyPr wrap="square" rtlCol="0" anchor="ctr"/>
+          <a:lstStyle/>
+          <a:p>
+            <a:pPr marL="0" indent="0">
+              <a:buNone/>
+            </a:pPr>
+            <a:r>
+              <a:rPr lang="en-US" sz="1200" b="1" dirty="0">
+                <a:solidFill>
+                  <a:srgbClr val="1A1A1A"/>
+                </a:solidFill>
+              </a:rPr>
+              <a:t>Poziv od 'Erste banke' traži PIN</a:t>
+            </a:r>
+            <a:endParaRPr lang="en-US" sz="1200" dirty="0"/>
+          </a:p>
+        </p:txBody>
+      </p:sp>
+      <p:sp>
+        <p:nvSpPr>
+          <p:cNvPr id="13" name="Text 11"/>
+          <p:cNvSpPr/>
+          <p:nvPr/>
+        </p:nvSpPr>
+        <p:spPr>
+          <a:xfrm>
+            <a:off x="4800600" y="1536192"/>
+            <a:ext cx="3931920" cy="1143000"/>
+          </a:xfrm>
+          <a:prstGeom prst="rect">
+            <a:avLst/>
+          </a:prstGeom>
+          <a:noFill/>
+          <a:ln/>
+        </p:spPr>
+        <p:txBody>
           <a:bodyPr wrap="square" rtlCol="0" anchor="t"/>
           <a:lstStyle/>
           <a:p>
-            <a:pPr indent="0" marL="0">
+            <a:pPr marL="0" indent="0">
               <a:buNone/>
             </a:pPr>
             <a:r>
@@ -3911,7 +4124,7 @@
                   <a:srgbClr val="444444"/>
                 </a:solidFill>
               </a:rPr>
-              <a:t>Lažni videozapisi koji izgledaju kao stvarne osobe. Znakovi: usta se ne sinkroniziraju, kosa zamućena.</a:t>
+              <a:t>Banka NIKAD ne traži PIN telefonom. Prekinite razgovor i nazovite banku na broj s poleđine kartice.</a:t>
             </a:r>
             <a:endParaRPr lang="en-US" sz="1200" dirty="0"/>
           </a:p>
@@ -3919,14 +4132,14 @@
       </p:sp>
       <p:sp>
         <p:nvSpPr>
-          <p:cNvPr id="10" name="Shape 7"/>
-          <p:cNvSpPr/>
-          <p:nvPr/>
-        </p:nvSpPr>
-        <p:spPr>
-          <a:xfrm>
-            <a:off x="4754880" y="804672"/>
-            <a:ext cx="4023360" cy="1828800"/>
+          <p:cNvPr id="14" name="Shape 12"/>
+          <p:cNvSpPr/>
+          <p:nvPr/>
+        </p:nvSpPr>
+        <p:spPr>
+          <a:xfrm>
+            <a:off x="274320" y="2907792"/>
+            <a:ext cx="4114800" cy="1920240"/>
           </a:xfrm>
           <a:prstGeom prst="rect">
             <a:avLst/>
@@ -3936,24 +4149,31 @@
           </a:solidFill>
           <a:ln/>
           <a:effectLst>
-            <a:outerShdw sx="100000" sy="100000" kx="0" ky="0" algn="bl" rotWithShape="0" blurRad="101600" dist="25400" dir="8100000">
+            <a:outerShdw blurRad="76200" dist="25400" dir="8100000" algn="bl" rotWithShape="0">
               <a:srgbClr val="000000">
                 <a:alpha val="10000"/>
               </a:srgbClr>
             </a:outerShdw>
           </a:effectLst>
         </p:spPr>
-      </p:sp>
-      <p:sp>
-        <p:nvSpPr>
-          <p:cNvPr id="11" name="Shape 8"/>
-          <p:cNvSpPr/>
-          <p:nvPr/>
-        </p:nvSpPr>
-        <p:spPr>
-          <a:xfrm>
-            <a:off x="4754880" y="804672"/>
-            <a:ext cx="73152" cy="1828800"/>
+        <p:txBody>
+          <a:bodyPr/>
+          <a:lstStyle/>
+          <a:p>
+            <a:endParaRPr lang="en-US"/>
+          </a:p>
+        </p:txBody>
+      </p:sp>
+      <p:sp>
+        <p:nvSpPr>
+          <p:cNvPr id="15" name="Shape 13"/>
+          <p:cNvSpPr/>
+          <p:nvPr/>
+        </p:nvSpPr>
+        <p:spPr>
+          <a:xfrm>
+            <a:off x="274320" y="2907792"/>
+            <a:ext cx="4114800" cy="347472"/>
           </a:xfrm>
           <a:prstGeom prst="rect">
             <a:avLst/>
@@ -3968,19 +4188,168 @@
             <a:prstDash val="solid"/>
           </a:ln>
         </p:spPr>
-      </p:sp>
-      <p:sp>
-        <p:nvSpPr>
-          <p:cNvPr id="12" name="Shape 9"/>
-          <p:cNvSpPr/>
-          <p:nvPr/>
-        </p:nvSpPr>
-        <p:spPr>
-          <a:xfrm>
-            <a:off x="4919472" y="1051560"/>
-            <a:ext cx="594360" cy="594360"/>
-          </a:xfrm>
-          <a:prstGeom prst="ellipse">
+        <p:txBody>
+          <a:bodyPr/>
+          <a:lstStyle/>
+          <a:p>
+            <a:endParaRPr lang="en-US"/>
+          </a:p>
+        </p:txBody>
+      </p:sp>
+      <p:sp>
+        <p:nvSpPr>
+          <p:cNvPr id="16" name="Text 14"/>
+          <p:cNvSpPr/>
+          <p:nvPr/>
+        </p:nvSpPr>
+        <p:spPr>
+          <a:xfrm>
+            <a:off x="365760" y="2907792"/>
+            <a:ext cx="3931920" cy="347472"/>
+          </a:xfrm>
+          <a:prstGeom prst="rect">
+            <a:avLst/>
+          </a:prstGeom>
+          <a:noFill/>
+          <a:ln/>
+        </p:spPr>
+        <p:txBody>
+          <a:bodyPr wrap="square" lIns="0" tIns="0" rIns="0" bIns="0" rtlCol="0" anchor="ctr"/>
+          <a:lstStyle/>
+          <a:p>
+            <a:pPr marL="0" indent="0">
+              <a:buNone/>
+            </a:pPr>
+            <a:r>
+              <a:rPr lang="en-US" sz="1200" b="1" dirty="0">
+                <a:solidFill>
+                  <a:srgbClr val="FFFFFF"/>
+                </a:solidFill>
+              </a:rPr>
+              <a:t>⛔  PRIJEVARA</a:t>
+            </a:r>
+            <a:endParaRPr lang="en-US" sz="1200" dirty="0"/>
+          </a:p>
+        </p:txBody>
+      </p:sp>
+      <p:sp>
+        <p:nvSpPr>
+          <p:cNvPr id="17" name="Text 15"/>
+          <p:cNvSpPr/>
+          <p:nvPr/>
+        </p:nvSpPr>
+        <p:spPr>
+          <a:xfrm>
+            <a:off x="365760" y="3291840"/>
+            <a:ext cx="3931920" cy="347472"/>
+          </a:xfrm>
+          <a:prstGeom prst="rect">
+            <a:avLst/>
+          </a:prstGeom>
+          <a:noFill/>
+          <a:ln/>
+        </p:spPr>
+        <p:txBody>
+          <a:bodyPr wrap="square" rtlCol="0" anchor="ctr"/>
+          <a:lstStyle/>
+          <a:p>
+            <a:pPr marL="0" indent="0">
+              <a:buNone/>
+            </a:pPr>
+            <a:r>
+              <a:rPr lang="en-US" sz="1200" b="1" dirty="0">
+                <a:solidFill>
+                  <a:srgbClr val="1A1A1A"/>
+                </a:solidFill>
+              </a:rPr>
+              <a:t>Tom iz Libanona traži novac za avionsku kartu</a:t>
+            </a:r>
+            <a:endParaRPr lang="en-US" sz="1200" dirty="0"/>
+          </a:p>
+        </p:txBody>
+      </p:sp>
+      <p:sp>
+        <p:nvSpPr>
+          <p:cNvPr id="18" name="Text 16"/>
+          <p:cNvSpPr/>
+          <p:nvPr/>
+        </p:nvSpPr>
+        <p:spPr>
+          <a:xfrm>
+            <a:off x="365760" y="3639312"/>
+            <a:ext cx="3931920" cy="1143000"/>
+          </a:xfrm>
+          <a:prstGeom prst="rect">
+            <a:avLst/>
+          </a:prstGeom>
+          <a:noFill/>
+          <a:ln/>
+        </p:spPr>
+        <p:txBody>
+          <a:bodyPr wrap="square" rtlCol="0" anchor="t"/>
+          <a:lstStyle/>
+          <a:p>
+            <a:pPr marL="0" indent="0">
+              <a:buNone/>
+            </a:pPr>
+            <a:r>
+              <a:rPr lang="en-US" sz="1200" dirty="0">
+                <a:solidFill>
+                  <a:srgbClr val="444444"/>
+                </a:solidFill>
+              </a:rPr>
+              <a:t>Romance scam. Prebrzo ljubav, nema video poziva, traži novac — klasični znakovi prevaranta.</a:t>
+            </a:r>
+            <a:endParaRPr lang="en-US" sz="1200" dirty="0"/>
+          </a:p>
+        </p:txBody>
+      </p:sp>
+      <p:sp>
+        <p:nvSpPr>
+          <p:cNvPr id="19" name="Shape 17"/>
+          <p:cNvSpPr/>
+          <p:nvPr/>
+        </p:nvSpPr>
+        <p:spPr>
+          <a:xfrm>
+            <a:off x="4709160" y="2907792"/>
+            <a:ext cx="4114800" cy="1920240"/>
+          </a:xfrm>
+          <a:prstGeom prst="rect">
+            <a:avLst/>
+          </a:prstGeom>
+          <a:solidFill>
+            <a:srgbClr val="FFFFFF"/>
+          </a:solidFill>
+          <a:ln/>
+          <a:effectLst>
+            <a:outerShdw blurRad="76200" dist="25400" dir="8100000" algn="bl" rotWithShape="0">
+              <a:srgbClr val="000000">
+                <a:alpha val="10000"/>
+              </a:srgbClr>
+            </a:outerShdw>
+          </a:effectLst>
+        </p:spPr>
+        <p:txBody>
+          <a:bodyPr/>
+          <a:lstStyle/>
+          <a:p>
+            <a:endParaRPr lang="en-US"/>
+          </a:p>
+        </p:txBody>
+      </p:sp>
+      <p:sp>
+        <p:nvSpPr>
+          <p:cNvPr id="20" name="Shape 18"/>
+          <p:cNvSpPr/>
+          <p:nvPr/>
+        </p:nvSpPr>
+        <p:spPr>
+          <a:xfrm>
+            <a:off x="4709160" y="2907792"/>
+            <a:ext cx="4114800" cy="347472"/>
+          </a:xfrm>
+          <a:prstGeom prst="rect">
             <a:avLst/>
           </a:prstGeom>
           <a:solidFill>
@@ -3993,41 +4362,24 @@
             <a:prstDash val="solid"/>
           </a:ln>
         </p:spPr>
-      </p:sp>
-      <p:pic>
-        <p:nvPicPr>
-          <p:cNvPr id="13" name="Image 1" descr="preencoded.png">    </p:cNvPr>
-          <p:cNvPicPr>
-            <a:picLocks noChangeAspect="1"/>
-          </p:cNvPicPr>
-          <p:nvPr/>
-        </p:nvPicPr>
-        <p:blipFill>
-          <a:blip r:embed="rId2"/>
-          <a:stretch>
-            <a:fillRect/>
-          </a:stretch>
-        </p:blipFill>
-        <p:spPr>
-          <a:xfrm>
-            <a:off x="4974336" y="1106424"/>
-            <a:ext cx="484632" cy="484632"/>
-          </a:xfrm>
-          <a:prstGeom prst="rect">
-            <a:avLst/>
-          </a:prstGeom>
-        </p:spPr>
-      </p:pic>
-      <p:sp>
-        <p:nvSpPr>
-          <p:cNvPr id="14" name="Text 10"/>
-          <p:cNvSpPr/>
-          <p:nvPr/>
-        </p:nvSpPr>
-        <p:spPr>
-          <a:xfrm>
-            <a:off x="5623560" y="950976"/>
-            <a:ext cx="3063240" cy="384048"/>
+        <p:txBody>
+          <a:bodyPr/>
+          <a:lstStyle/>
+          <a:p>
+            <a:endParaRPr lang="en-US"/>
+          </a:p>
+        </p:txBody>
+      </p:sp>
+      <p:sp>
+        <p:nvSpPr>
+          <p:cNvPr id="21" name="Text 19"/>
+          <p:cNvSpPr/>
+          <p:nvPr/>
+        </p:nvSpPr>
+        <p:spPr>
+          <a:xfrm>
+            <a:off x="4800600" y="2907792"/>
+            <a:ext cx="3931920" cy="347472"/>
           </a:xfrm>
           <a:prstGeom prst="rect">
             <a:avLst/>
@@ -4039,31 +4391,31 @@
           <a:bodyPr wrap="square" lIns="0" tIns="0" rIns="0" bIns="0" rtlCol="0" anchor="ctr"/>
           <a:lstStyle/>
           <a:p>
-            <a:pPr indent="0" marL="0">
+            <a:pPr marL="0" indent="0">
               <a:buNone/>
             </a:pPr>
             <a:r>
-              <a:rPr lang="en-US" sz="1400" b="1" dirty="0">
-                <a:solidFill>
-                  <a:srgbClr val="1A1A1A"/>
-                </a:solidFill>
-              </a:rPr>
-              <a:t>Lažni QR kodovi</a:t>
-            </a:r>
-            <a:endParaRPr lang="en-US" sz="1400" dirty="0"/>
-          </a:p>
-        </p:txBody>
-      </p:sp>
-      <p:sp>
-        <p:nvSpPr>
-          <p:cNvPr id="15" name="Text 11"/>
-          <p:cNvSpPr/>
-          <p:nvPr/>
-        </p:nvSpPr>
-        <p:spPr>
-          <a:xfrm>
-            <a:off x="5623560" y="1316736"/>
-            <a:ext cx="3063240" cy="1207008"/>
+              <a:rPr lang="en-US" sz="1200" b="1" dirty="0">
+                <a:solidFill>
+                  <a:srgbClr val="FFFFFF"/>
+                </a:solidFill>
+              </a:rPr>
+              <a:t>⛔  PRIJEVARA</a:t>
+            </a:r>
+            <a:endParaRPr lang="en-US" sz="1200" dirty="0"/>
+          </a:p>
+        </p:txBody>
+      </p:sp>
+      <p:sp>
+        <p:nvSpPr>
+          <p:cNvPr id="22" name="Text 20"/>
+          <p:cNvSpPr/>
+          <p:nvPr/>
+        </p:nvSpPr>
+        <p:spPr>
+          <a:xfrm>
+            <a:off x="4800600" y="3291840"/>
+            <a:ext cx="3931920" cy="347472"/>
           </a:xfrm>
           <a:prstGeom prst="rect">
             <a:avLst/>
@@ -4072,19 +4424,19 @@
           <a:ln/>
         </p:spPr>
         <p:txBody>
-          <a:bodyPr wrap="square" rtlCol="0" anchor="t"/>
-          <a:lstStyle/>
-          <a:p>
-            <a:pPr indent="0" marL="0">
+          <a:bodyPr wrap="square" rtlCol="0" anchor="ctr"/>
+          <a:lstStyle/>
+          <a:p>
+            <a:pPr marL="0" indent="0">
               <a:buNone/>
             </a:pPr>
             <a:r>
-              <a:rPr lang="en-US" sz="1200" dirty="0">
-                <a:solidFill>
-                  <a:srgbClr val="444444"/>
-                </a:solidFill>
-              </a:rPr>
-              <a:t>Prevaranti lijeplje lažne QR naljepnice na parkomate i bankomate. Uvijek provjerite je li naljepnica originalna.</a:t>
+              <a:rPr lang="en-US" sz="1200" b="1" dirty="0">
+                <a:solidFill>
+                  <a:srgbClr val="1A1A1A"/>
+                </a:solidFill>
+              </a:rPr>
+              <a:t>Kaufland poklanja 100 kartica od 500 €</a:t>
             </a:r>
             <a:endParaRPr lang="en-US" sz="1200" dirty="0"/>
           </a:p>
@@ -4092,115 +4444,14 @@
       </p:sp>
       <p:sp>
         <p:nvSpPr>
-          <p:cNvPr id="16" name="Shape 12"/>
-          <p:cNvSpPr/>
-          <p:nvPr/>
-        </p:nvSpPr>
-        <p:spPr>
-          <a:xfrm>
-            <a:off x="274320" y="2816352"/>
-            <a:ext cx="4023360" cy="1828800"/>
-          </a:xfrm>
-          <a:prstGeom prst="rect">
-            <a:avLst/>
-          </a:prstGeom>
-          <a:solidFill>
-            <a:srgbClr val="FFFFFF"/>
-          </a:solidFill>
-          <a:ln/>
-          <a:effectLst>
-            <a:outerShdw sx="100000" sy="100000" kx="0" ky="0" algn="bl" rotWithShape="0" blurRad="101600" dist="25400" dir="8100000">
-              <a:srgbClr val="000000">
-                <a:alpha val="10000"/>
-              </a:srgbClr>
-            </a:outerShdw>
-          </a:effectLst>
-        </p:spPr>
-      </p:sp>
-      <p:sp>
-        <p:nvSpPr>
-          <p:cNvPr id="17" name="Shape 13"/>
-          <p:cNvSpPr/>
-          <p:nvPr/>
-        </p:nvSpPr>
-        <p:spPr>
-          <a:xfrm>
-            <a:off x="274320" y="2816352"/>
-            <a:ext cx="73152" cy="1828800"/>
-          </a:xfrm>
-          <a:prstGeom prst="rect">
-            <a:avLst/>
-          </a:prstGeom>
-          <a:solidFill>
-            <a:srgbClr val="CC0000"/>
-          </a:solidFill>
-          <a:ln w="12700">
-            <a:solidFill>
-              <a:srgbClr val="CC0000"/>
-            </a:solidFill>
-            <a:prstDash val="solid"/>
-          </a:ln>
-        </p:spPr>
-      </p:sp>
-      <p:sp>
-        <p:nvSpPr>
-          <p:cNvPr id="18" name="Shape 14"/>
-          <p:cNvSpPr/>
-          <p:nvPr/>
-        </p:nvSpPr>
-        <p:spPr>
-          <a:xfrm>
-            <a:off x="438912" y="3063240"/>
-            <a:ext cx="594360" cy="594360"/>
-          </a:xfrm>
-          <a:prstGeom prst="ellipse">
-            <a:avLst/>
-          </a:prstGeom>
-          <a:solidFill>
-            <a:srgbClr val="CC0000"/>
-          </a:solidFill>
-          <a:ln w="12700">
-            <a:solidFill>
-              <a:srgbClr val="CC0000"/>
-            </a:solidFill>
-            <a:prstDash val="solid"/>
-          </a:ln>
-        </p:spPr>
-      </p:sp>
-      <p:pic>
-        <p:nvPicPr>
-          <p:cNvPr id="19" name="Image 2" descr="preencoded.png">    </p:cNvPr>
-          <p:cNvPicPr>
-            <a:picLocks noChangeAspect="1"/>
-          </p:cNvPicPr>
-          <p:nvPr/>
-        </p:nvPicPr>
-        <p:blipFill>
-          <a:blip r:embed="rId3"/>
-          <a:stretch>
-            <a:fillRect/>
-          </a:stretch>
-        </p:blipFill>
-        <p:spPr>
-          <a:xfrm>
-            <a:off x="493776" y="3118104"/>
-            <a:ext cx="484632" cy="484632"/>
-          </a:xfrm>
-          <a:prstGeom prst="rect">
-            <a:avLst/>
-          </a:prstGeom>
-        </p:spPr>
-      </p:pic>
-      <p:sp>
-        <p:nvSpPr>
-          <p:cNvPr id="20" name="Text 15"/>
-          <p:cNvSpPr/>
-          <p:nvPr/>
-        </p:nvSpPr>
-        <p:spPr>
-          <a:xfrm>
-            <a:off x="1143000" y="2962656"/>
-            <a:ext cx="3063240" cy="384048"/>
+          <p:cNvPr id="23" name="Text 21"/>
+          <p:cNvSpPr/>
+          <p:nvPr/>
+        </p:nvSpPr>
+        <p:spPr>
+          <a:xfrm>
+            <a:off x="4800600" y="3639312"/>
+            <a:ext cx="3931920" cy="1143000"/>
           </a:xfrm>
           <a:prstGeom prst="rect">
             <a:avLst/>
@@ -4209,228 +4460,19 @@
           <a:ln/>
         </p:spPr>
         <p:txBody>
-          <a:bodyPr wrap="square" lIns="0" tIns="0" rIns="0" bIns="0" rtlCol="0" anchor="ctr"/>
-          <a:lstStyle/>
-          <a:p>
-            <a:pPr indent="0" marL="0">
+          <a:bodyPr wrap="square" rtlCol="0" anchor="t"/>
+          <a:lstStyle/>
+          <a:p>
+            <a:pPr marL="0" indent="0">
               <a:buNone/>
             </a:pPr>
             <a:r>
-              <a:rPr lang="en-US" sz="1400" b="1" dirty="0">
-                <a:solidFill>
-                  <a:srgbClr val="1A1A1A"/>
-                </a:solidFill>
-              </a:rPr>
-              <a:t>AI pomаže prevarantima</a:t>
-            </a:r>
-            <a:endParaRPr lang="en-US" sz="1400" dirty="0"/>
-          </a:p>
-        </p:txBody>
-      </p:sp>
-      <p:sp>
-        <p:nvSpPr>
-          <p:cNvPr id="21" name="Text 16"/>
-          <p:cNvSpPr/>
-          <p:nvPr/>
-        </p:nvSpPr>
-        <p:spPr>
-          <a:xfrm>
-            <a:off x="1143000" y="3328416"/>
-            <a:ext cx="3063240" cy="1207008"/>
-          </a:xfrm>
-          <a:prstGeom prst="rect">
-            <a:avLst/>
-          </a:prstGeom>
-          <a:noFill/>
-          <a:ln/>
-        </p:spPr>
-        <p:txBody>
-          <a:bodyPr wrap="square" rtlCol="0" anchor="t"/>
-          <a:lstStyle/>
-          <a:p>
-            <a:pPr indent="0" marL="0">
-              <a:buNone/>
-            </a:pPr>
-            <a:r>
               <a:rPr lang="en-US" sz="1200" dirty="0">
                 <a:solidFill>
                   <a:srgbClr val="444444"/>
                 </a:solidFill>
               </a:rPr>
-              <a:t>ChatGPT piše uvjerljive phishing poruke bez grešaka. Stara pravila 'loš pravopis = prijevara' više ne vrijede uvijek.</a:t>
-            </a:r>
-            <a:endParaRPr lang="en-US" sz="1200" dirty="0"/>
-          </a:p>
-        </p:txBody>
-      </p:sp>
-      <p:sp>
-        <p:nvSpPr>
-          <p:cNvPr id="22" name="Shape 17"/>
-          <p:cNvSpPr/>
-          <p:nvPr/>
-        </p:nvSpPr>
-        <p:spPr>
-          <a:xfrm>
-            <a:off x="4754880" y="2816352"/>
-            <a:ext cx="4023360" cy="1828800"/>
-          </a:xfrm>
-          <a:prstGeom prst="rect">
-            <a:avLst/>
-          </a:prstGeom>
-          <a:solidFill>
-            <a:srgbClr val="FFFFFF"/>
-          </a:solidFill>
-          <a:ln/>
-          <a:effectLst>
-            <a:outerShdw sx="100000" sy="100000" kx="0" ky="0" algn="bl" rotWithShape="0" blurRad="101600" dist="25400" dir="8100000">
-              <a:srgbClr val="000000">
-                <a:alpha val="10000"/>
-              </a:srgbClr>
-            </a:outerShdw>
-          </a:effectLst>
-        </p:spPr>
-      </p:sp>
-      <p:sp>
-        <p:nvSpPr>
-          <p:cNvPr id="23" name="Shape 18"/>
-          <p:cNvSpPr/>
-          <p:nvPr/>
-        </p:nvSpPr>
-        <p:spPr>
-          <a:xfrm>
-            <a:off x="4754880" y="2816352"/>
-            <a:ext cx="73152" cy="1828800"/>
-          </a:xfrm>
-          <a:prstGeom prst="rect">
-            <a:avLst/>
-          </a:prstGeom>
-          <a:solidFill>
-            <a:srgbClr val="CC0000"/>
-          </a:solidFill>
-          <a:ln w="12700">
-            <a:solidFill>
-              <a:srgbClr val="CC0000"/>
-            </a:solidFill>
-            <a:prstDash val="solid"/>
-          </a:ln>
-        </p:spPr>
-      </p:sp>
-      <p:sp>
-        <p:nvSpPr>
-          <p:cNvPr id="24" name="Shape 19"/>
-          <p:cNvSpPr/>
-          <p:nvPr/>
-        </p:nvSpPr>
-        <p:spPr>
-          <a:xfrm>
-            <a:off x="4919472" y="3063240"/>
-            <a:ext cx="594360" cy="594360"/>
-          </a:xfrm>
-          <a:prstGeom prst="ellipse">
-            <a:avLst/>
-          </a:prstGeom>
-          <a:solidFill>
-            <a:srgbClr val="CC0000"/>
-          </a:solidFill>
-          <a:ln w="12700">
-            <a:solidFill>
-              <a:srgbClr val="CC0000"/>
-            </a:solidFill>
-            <a:prstDash val="solid"/>
-          </a:ln>
-        </p:spPr>
-      </p:sp>
-      <p:pic>
-        <p:nvPicPr>
-          <p:cNvPr id="25" name="Image 3" descr="preencoded.png">    </p:cNvPr>
-          <p:cNvPicPr>
-            <a:picLocks noChangeAspect="1"/>
-          </p:cNvPicPr>
-          <p:nvPr/>
-        </p:nvPicPr>
-        <p:blipFill>
-          <a:blip r:embed="rId4"/>
-          <a:stretch>
-            <a:fillRect/>
-          </a:stretch>
-        </p:blipFill>
-        <p:spPr>
-          <a:xfrm>
-            <a:off x="4974336" y="3118104"/>
-            <a:ext cx="484632" cy="484632"/>
-          </a:xfrm>
-          <a:prstGeom prst="rect">
-            <a:avLst/>
-          </a:prstGeom>
-        </p:spPr>
-      </p:pic>
-      <p:sp>
-        <p:nvSpPr>
-          <p:cNvPr id="26" name="Text 20"/>
-          <p:cNvSpPr/>
-          <p:nvPr/>
-        </p:nvSpPr>
-        <p:spPr>
-          <a:xfrm>
-            <a:off x="5623560" y="2962656"/>
-            <a:ext cx="3063240" cy="384048"/>
-          </a:xfrm>
-          <a:prstGeom prst="rect">
-            <a:avLst/>
-          </a:prstGeom>
-          <a:noFill/>
-          <a:ln/>
-        </p:spPr>
-        <p:txBody>
-          <a:bodyPr wrap="square" lIns="0" tIns="0" rIns="0" bIns="0" rtlCol="0" anchor="ctr"/>
-          <a:lstStyle/>
-          <a:p>
-            <a:pPr indent="0" marL="0">
-              <a:buNone/>
-            </a:pPr>
-            <a:r>
-              <a:rPr lang="en-US" sz="1400" b="1" dirty="0">
-                <a:solidFill>
-                  <a:srgbClr val="1A1A1A"/>
-                </a:solidFill>
-              </a:rPr>
-              <a:t>Investicijske prijevare</a:t>
-            </a:r>
-            <a:endParaRPr lang="en-US" sz="1400" dirty="0"/>
-          </a:p>
-        </p:txBody>
-      </p:sp>
-      <p:sp>
-        <p:nvSpPr>
-          <p:cNvPr id="27" name="Text 21"/>
-          <p:cNvSpPr/>
-          <p:nvPr/>
-        </p:nvSpPr>
-        <p:spPr>
-          <a:xfrm>
-            <a:off x="5623560" y="3328416"/>
-            <a:ext cx="3063240" cy="1207008"/>
-          </a:xfrm>
-          <a:prstGeom prst="rect">
-            <a:avLst/>
-          </a:prstGeom>
-          <a:noFill/>
-          <a:ln/>
-        </p:spPr>
-        <p:txBody>
-          <a:bodyPr wrap="square" rtlCol="0" anchor="t"/>
-          <a:lstStyle/>
-          <a:p>
-            <a:pPr indent="0" marL="0">
-              <a:buNone/>
-            </a:pPr>
-            <a:r>
-              <a:rPr lang="en-US" sz="1200" dirty="0">
-                <a:solidFill>
-                  <a:srgbClr val="444444"/>
-                </a:solidFill>
-              </a:rPr>
-              <a:t>Lažne zarade na kriptovalutama — lažno pozivanje na EU, HNB ili poznate osobe. Oglasi na društvenim mrežama!</a:t>
+              <a:t>Prijevara za prikupljanje podataka. Legitimna nagradna igra ne traži adresu i telefon ovako.</a:t>
             </a:r>
             <a:endParaRPr lang="en-US" sz="1200" dirty="0"/>
           </a:p>
@@ -4446,12 +4488,13 @@
 
 <file path=ppt/slides/slide13.xml><?xml version="1.0" encoding="utf-8"?>
 <p:sld xmlns:a="http://schemas.openxmlformats.org/drawingml/2006/main" xmlns:r="http://schemas.openxmlformats.org/officeDocument/2006/relationships" xmlns:p="http://schemas.openxmlformats.org/presentationml/2006/main">
-  <p:cSld name="Slide 13">
+  <p:cSld name="Slide 12">
     <p:bg>
       <p:bgPr>
         <a:solidFill>
           <a:srgbClr val="F5F5F5"/>
         </a:solidFill>
+        <a:effectLst/>
       </p:bgPr>
     </p:bg>
     <p:spTree>
@@ -4492,6 +4535,13 @@
             <a:prstDash val="solid"/>
           </a:ln>
         </p:spPr>
+        <p:txBody>
+          <a:bodyPr/>
+          <a:lstStyle/>
+          <a:p>
+            <a:endParaRPr lang="en-US"/>
+          </a:p>
+        </p:txBody>
       </p:sp>
       <p:sp>
         <p:nvSpPr>
@@ -4514,7 +4564,884 @@
           <a:bodyPr wrap="square" lIns="0" tIns="0" rIns="0" bIns="0" rtlCol="0" anchor="ctr"/>
           <a:lstStyle/>
           <a:p>
-            <a:pPr indent="0" marL="0">
+            <a:pPr marL="0" indent="0">
+              <a:buNone/>
+            </a:pPr>
+            <a:r>
+              <a:rPr lang="en-US" sz="2000" b="1" dirty="0">
+                <a:solidFill>
+                  <a:srgbClr val="FFFFFF"/>
+                </a:solidFill>
+              </a:rPr>
+              <a:t>Posebne teme: Deepfake, QR kodovi i AI u rukama prevaranata</a:t>
+            </a:r>
+            <a:endParaRPr lang="en-US" sz="2000" dirty="0"/>
+          </a:p>
+        </p:txBody>
+      </p:sp>
+      <p:sp>
+        <p:nvSpPr>
+          <p:cNvPr id="4" name="Shape 2"/>
+          <p:cNvSpPr/>
+          <p:nvPr/>
+        </p:nvSpPr>
+        <p:spPr>
+          <a:xfrm>
+            <a:off x="274320" y="804672"/>
+            <a:ext cx="4023360" cy="1828800"/>
+          </a:xfrm>
+          <a:prstGeom prst="rect">
+            <a:avLst/>
+          </a:prstGeom>
+          <a:solidFill>
+            <a:srgbClr val="FFFFFF"/>
+          </a:solidFill>
+          <a:ln/>
+          <a:effectLst>
+            <a:outerShdw blurRad="101600" dist="25400" dir="8100000" algn="bl" rotWithShape="0">
+              <a:srgbClr val="000000">
+                <a:alpha val="10000"/>
+              </a:srgbClr>
+            </a:outerShdw>
+          </a:effectLst>
+        </p:spPr>
+        <p:txBody>
+          <a:bodyPr/>
+          <a:lstStyle/>
+          <a:p>
+            <a:endParaRPr lang="en-US"/>
+          </a:p>
+        </p:txBody>
+      </p:sp>
+      <p:sp>
+        <p:nvSpPr>
+          <p:cNvPr id="5" name="Shape 3"/>
+          <p:cNvSpPr/>
+          <p:nvPr/>
+        </p:nvSpPr>
+        <p:spPr>
+          <a:xfrm>
+            <a:off x="274320" y="804672"/>
+            <a:ext cx="73152" cy="1828800"/>
+          </a:xfrm>
+          <a:prstGeom prst="rect">
+            <a:avLst/>
+          </a:prstGeom>
+          <a:solidFill>
+            <a:srgbClr val="CC0000"/>
+          </a:solidFill>
+          <a:ln w="12700">
+            <a:solidFill>
+              <a:srgbClr val="CC0000"/>
+            </a:solidFill>
+            <a:prstDash val="solid"/>
+          </a:ln>
+        </p:spPr>
+        <p:txBody>
+          <a:bodyPr/>
+          <a:lstStyle/>
+          <a:p>
+            <a:endParaRPr lang="en-US"/>
+          </a:p>
+        </p:txBody>
+      </p:sp>
+      <p:sp>
+        <p:nvSpPr>
+          <p:cNvPr id="6" name="Shape 4"/>
+          <p:cNvSpPr/>
+          <p:nvPr/>
+        </p:nvSpPr>
+        <p:spPr>
+          <a:xfrm>
+            <a:off x="438912" y="1051560"/>
+            <a:ext cx="594360" cy="594360"/>
+          </a:xfrm>
+          <a:prstGeom prst="ellipse">
+            <a:avLst/>
+          </a:prstGeom>
+          <a:solidFill>
+            <a:srgbClr val="CC0000"/>
+          </a:solidFill>
+          <a:ln w="12700">
+            <a:solidFill>
+              <a:srgbClr val="CC0000"/>
+            </a:solidFill>
+            <a:prstDash val="solid"/>
+          </a:ln>
+        </p:spPr>
+        <p:txBody>
+          <a:bodyPr/>
+          <a:lstStyle/>
+          <a:p>
+            <a:endParaRPr lang="en-US"/>
+          </a:p>
+        </p:txBody>
+      </p:sp>
+      <p:pic>
+        <p:nvPicPr>
+          <p:cNvPr id="7" name="Image 0" descr="preencoded.png"/>
+          <p:cNvPicPr>
+            <a:picLocks noChangeAspect="1"/>
+          </p:cNvPicPr>
+          <p:nvPr/>
+        </p:nvPicPr>
+        <p:blipFill>
+          <a:blip r:embed="rId3"/>
+          <a:stretch>
+            <a:fillRect/>
+          </a:stretch>
+        </p:blipFill>
+        <p:spPr>
+          <a:xfrm>
+            <a:off x="493776" y="1106424"/>
+            <a:ext cx="484632" cy="484632"/>
+          </a:xfrm>
+          <a:prstGeom prst="rect">
+            <a:avLst/>
+          </a:prstGeom>
+        </p:spPr>
+      </p:pic>
+      <p:sp>
+        <p:nvSpPr>
+          <p:cNvPr id="8" name="Text 5"/>
+          <p:cNvSpPr/>
+          <p:nvPr/>
+        </p:nvSpPr>
+        <p:spPr>
+          <a:xfrm>
+            <a:off x="1143000" y="950976"/>
+            <a:ext cx="3063240" cy="384048"/>
+          </a:xfrm>
+          <a:prstGeom prst="rect">
+            <a:avLst/>
+          </a:prstGeom>
+          <a:noFill/>
+          <a:ln/>
+        </p:spPr>
+        <p:txBody>
+          <a:bodyPr wrap="square" lIns="0" tIns="0" rIns="0" bIns="0" rtlCol="0" anchor="ctr"/>
+          <a:lstStyle/>
+          <a:p>
+            <a:pPr marL="0" indent="0">
+              <a:buNone/>
+            </a:pPr>
+            <a:r>
+              <a:rPr lang="en-US" sz="1400" b="1" dirty="0">
+                <a:solidFill>
+                  <a:srgbClr val="1A1A1A"/>
+                </a:solidFill>
+              </a:rPr>
+              <a:t>Deepfake videozapisi</a:t>
+            </a:r>
+            <a:endParaRPr lang="en-US" sz="1400" dirty="0"/>
+          </a:p>
+        </p:txBody>
+      </p:sp>
+      <p:sp>
+        <p:nvSpPr>
+          <p:cNvPr id="9" name="Text 6"/>
+          <p:cNvSpPr/>
+          <p:nvPr/>
+        </p:nvSpPr>
+        <p:spPr>
+          <a:xfrm>
+            <a:off x="1143000" y="1316736"/>
+            <a:ext cx="3063240" cy="1207008"/>
+          </a:xfrm>
+          <a:prstGeom prst="rect">
+            <a:avLst/>
+          </a:prstGeom>
+          <a:noFill/>
+          <a:ln/>
+        </p:spPr>
+        <p:txBody>
+          <a:bodyPr wrap="square" rtlCol="0" anchor="t"/>
+          <a:lstStyle/>
+          <a:p>
+            <a:pPr marL="0" indent="0">
+              <a:buNone/>
+            </a:pPr>
+            <a:r>
+              <a:rPr lang="en-US" sz="1200" dirty="0">
+                <a:solidFill>
+                  <a:srgbClr val="444444"/>
+                </a:solidFill>
+              </a:rPr>
+              <a:t>Lažni videozapisi koji izgledaju kao stvarne osobe. Znakovi: usta se ne sinkroniziraju, kosa zamućena.</a:t>
+            </a:r>
+            <a:endParaRPr lang="en-US" sz="1200" dirty="0"/>
+          </a:p>
+        </p:txBody>
+      </p:sp>
+      <p:sp>
+        <p:nvSpPr>
+          <p:cNvPr id="10" name="Shape 7"/>
+          <p:cNvSpPr/>
+          <p:nvPr/>
+        </p:nvSpPr>
+        <p:spPr>
+          <a:xfrm>
+            <a:off x="4754880" y="804672"/>
+            <a:ext cx="4023360" cy="1828800"/>
+          </a:xfrm>
+          <a:prstGeom prst="rect">
+            <a:avLst/>
+          </a:prstGeom>
+          <a:solidFill>
+            <a:srgbClr val="FFFFFF"/>
+          </a:solidFill>
+          <a:ln/>
+          <a:effectLst>
+            <a:outerShdw blurRad="101600" dist="25400" dir="8100000" algn="bl" rotWithShape="0">
+              <a:srgbClr val="000000">
+                <a:alpha val="10000"/>
+              </a:srgbClr>
+            </a:outerShdw>
+          </a:effectLst>
+        </p:spPr>
+        <p:txBody>
+          <a:bodyPr/>
+          <a:lstStyle/>
+          <a:p>
+            <a:endParaRPr lang="en-US"/>
+          </a:p>
+        </p:txBody>
+      </p:sp>
+      <p:sp>
+        <p:nvSpPr>
+          <p:cNvPr id="11" name="Shape 8"/>
+          <p:cNvSpPr/>
+          <p:nvPr/>
+        </p:nvSpPr>
+        <p:spPr>
+          <a:xfrm>
+            <a:off x="4754880" y="804672"/>
+            <a:ext cx="73152" cy="1828800"/>
+          </a:xfrm>
+          <a:prstGeom prst="rect">
+            <a:avLst/>
+          </a:prstGeom>
+          <a:solidFill>
+            <a:srgbClr val="CC0000"/>
+          </a:solidFill>
+          <a:ln w="12700">
+            <a:solidFill>
+              <a:srgbClr val="CC0000"/>
+            </a:solidFill>
+            <a:prstDash val="solid"/>
+          </a:ln>
+        </p:spPr>
+        <p:txBody>
+          <a:bodyPr/>
+          <a:lstStyle/>
+          <a:p>
+            <a:endParaRPr lang="en-US"/>
+          </a:p>
+        </p:txBody>
+      </p:sp>
+      <p:sp>
+        <p:nvSpPr>
+          <p:cNvPr id="12" name="Shape 9"/>
+          <p:cNvSpPr/>
+          <p:nvPr/>
+        </p:nvSpPr>
+        <p:spPr>
+          <a:xfrm>
+            <a:off x="4919472" y="1051560"/>
+            <a:ext cx="594360" cy="594360"/>
+          </a:xfrm>
+          <a:prstGeom prst="ellipse">
+            <a:avLst/>
+          </a:prstGeom>
+          <a:solidFill>
+            <a:srgbClr val="CC0000"/>
+          </a:solidFill>
+          <a:ln w="12700">
+            <a:solidFill>
+              <a:srgbClr val="CC0000"/>
+            </a:solidFill>
+            <a:prstDash val="solid"/>
+          </a:ln>
+        </p:spPr>
+        <p:txBody>
+          <a:bodyPr/>
+          <a:lstStyle/>
+          <a:p>
+            <a:endParaRPr lang="en-US"/>
+          </a:p>
+        </p:txBody>
+      </p:sp>
+      <p:pic>
+        <p:nvPicPr>
+          <p:cNvPr id="13" name="Image 1" descr="preencoded.png"/>
+          <p:cNvPicPr>
+            <a:picLocks noChangeAspect="1"/>
+          </p:cNvPicPr>
+          <p:nvPr/>
+        </p:nvPicPr>
+        <p:blipFill>
+          <a:blip r:embed="rId4"/>
+          <a:stretch>
+            <a:fillRect/>
+          </a:stretch>
+        </p:blipFill>
+        <p:spPr>
+          <a:xfrm>
+            <a:off x="4974336" y="1106424"/>
+            <a:ext cx="484632" cy="484632"/>
+          </a:xfrm>
+          <a:prstGeom prst="rect">
+            <a:avLst/>
+          </a:prstGeom>
+        </p:spPr>
+      </p:pic>
+      <p:sp>
+        <p:nvSpPr>
+          <p:cNvPr id="14" name="Text 10"/>
+          <p:cNvSpPr/>
+          <p:nvPr/>
+        </p:nvSpPr>
+        <p:spPr>
+          <a:xfrm>
+            <a:off x="5623560" y="950976"/>
+            <a:ext cx="3063240" cy="384048"/>
+          </a:xfrm>
+          <a:prstGeom prst="rect">
+            <a:avLst/>
+          </a:prstGeom>
+          <a:noFill/>
+          <a:ln/>
+        </p:spPr>
+        <p:txBody>
+          <a:bodyPr wrap="square" lIns="0" tIns="0" rIns="0" bIns="0" rtlCol="0" anchor="ctr"/>
+          <a:lstStyle/>
+          <a:p>
+            <a:pPr marL="0" indent="0">
+              <a:buNone/>
+            </a:pPr>
+            <a:r>
+              <a:rPr lang="en-US" sz="1400" b="1" dirty="0">
+                <a:solidFill>
+                  <a:srgbClr val="1A1A1A"/>
+                </a:solidFill>
+              </a:rPr>
+              <a:t>Lažni QR kodovi</a:t>
+            </a:r>
+            <a:endParaRPr lang="en-US" sz="1400" dirty="0"/>
+          </a:p>
+        </p:txBody>
+      </p:sp>
+      <p:sp>
+        <p:nvSpPr>
+          <p:cNvPr id="15" name="Text 11"/>
+          <p:cNvSpPr/>
+          <p:nvPr/>
+        </p:nvSpPr>
+        <p:spPr>
+          <a:xfrm>
+            <a:off x="5623560" y="1316736"/>
+            <a:ext cx="3063240" cy="1207008"/>
+          </a:xfrm>
+          <a:prstGeom prst="rect">
+            <a:avLst/>
+          </a:prstGeom>
+          <a:noFill/>
+          <a:ln/>
+        </p:spPr>
+        <p:txBody>
+          <a:bodyPr wrap="square" rtlCol="0" anchor="t"/>
+          <a:lstStyle/>
+          <a:p>
+            <a:pPr marL="0" indent="0">
+              <a:buNone/>
+            </a:pPr>
+            <a:r>
+              <a:rPr lang="en-US" sz="1200" dirty="0">
+                <a:solidFill>
+                  <a:srgbClr val="444444"/>
+                </a:solidFill>
+              </a:rPr>
+              <a:t>Prevaranti lijeplje lažne QR naljepnice na parkomate i bankomate. Uvijek provjerite je li naljepnica originalna.</a:t>
+            </a:r>
+            <a:endParaRPr lang="en-US" sz="1200" dirty="0"/>
+          </a:p>
+        </p:txBody>
+      </p:sp>
+      <p:sp>
+        <p:nvSpPr>
+          <p:cNvPr id="16" name="Shape 12"/>
+          <p:cNvSpPr/>
+          <p:nvPr/>
+        </p:nvSpPr>
+        <p:spPr>
+          <a:xfrm>
+            <a:off x="274320" y="2816352"/>
+            <a:ext cx="4023360" cy="1828800"/>
+          </a:xfrm>
+          <a:prstGeom prst="rect">
+            <a:avLst/>
+          </a:prstGeom>
+          <a:solidFill>
+            <a:srgbClr val="FFFFFF"/>
+          </a:solidFill>
+          <a:ln/>
+          <a:effectLst>
+            <a:outerShdw blurRad="101600" dist="25400" dir="8100000" algn="bl" rotWithShape="0">
+              <a:srgbClr val="000000">
+                <a:alpha val="10000"/>
+              </a:srgbClr>
+            </a:outerShdw>
+          </a:effectLst>
+        </p:spPr>
+        <p:txBody>
+          <a:bodyPr/>
+          <a:lstStyle/>
+          <a:p>
+            <a:endParaRPr lang="en-US"/>
+          </a:p>
+        </p:txBody>
+      </p:sp>
+      <p:sp>
+        <p:nvSpPr>
+          <p:cNvPr id="17" name="Shape 13"/>
+          <p:cNvSpPr/>
+          <p:nvPr/>
+        </p:nvSpPr>
+        <p:spPr>
+          <a:xfrm>
+            <a:off x="274320" y="2816352"/>
+            <a:ext cx="73152" cy="1828800"/>
+          </a:xfrm>
+          <a:prstGeom prst="rect">
+            <a:avLst/>
+          </a:prstGeom>
+          <a:solidFill>
+            <a:srgbClr val="CC0000"/>
+          </a:solidFill>
+          <a:ln w="12700">
+            <a:solidFill>
+              <a:srgbClr val="CC0000"/>
+            </a:solidFill>
+            <a:prstDash val="solid"/>
+          </a:ln>
+        </p:spPr>
+        <p:txBody>
+          <a:bodyPr/>
+          <a:lstStyle/>
+          <a:p>
+            <a:endParaRPr lang="en-US"/>
+          </a:p>
+        </p:txBody>
+      </p:sp>
+      <p:sp>
+        <p:nvSpPr>
+          <p:cNvPr id="18" name="Shape 14"/>
+          <p:cNvSpPr/>
+          <p:nvPr/>
+        </p:nvSpPr>
+        <p:spPr>
+          <a:xfrm>
+            <a:off x="438912" y="3063240"/>
+            <a:ext cx="594360" cy="594360"/>
+          </a:xfrm>
+          <a:prstGeom prst="ellipse">
+            <a:avLst/>
+          </a:prstGeom>
+          <a:solidFill>
+            <a:srgbClr val="CC0000"/>
+          </a:solidFill>
+          <a:ln w="12700">
+            <a:solidFill>
+              <a:srgbClr val="CC0000"/>
+            </a:solidFill>
+            <a:prstDash val="solid"/>
+          </a:ln>
+        </p:spPr>
+        <p:txBody>
+          <a:bodyPr/>
+          <a:lstStyle/>
+          <a:p>
+            <a:endParaRPr lang="en-US"/>
+          </a:p>
+        </p:txBody>
+      </p:sp>
+      <p:pic>
+        <p:nvPicPr>
+          <p:cNvPr id="19" name="Image 2" descr="preencoded.png"/>
+          <p:cNvPicPr>
+            <a:picLocks noChangeAspect="1"/>
+          </p:cNvPicPr>
+          <p:nvPr/>
+        </p:nvPicPr>
+        <p:blipFill>
+          <a:blip r:embed="rId5"/>
+          <a:stretch>
+            <a:fillRect/>
+          </a:stretch>
+        </p:blipFill>
+        <p:spPr>
+          <a:xfrm>
+            <a:off x="493776" y="3118104"/>
+            <a:ext cx="484632" cy="484632"/>
+          </a:xfrm>
+          <a:prstGeom prst="rect">
+            <a:avLst/>
+          </a:prstGeom>
+        </p:spPr>
+      </p:pic>
+      <p:sp>
+        <p:nvSpPr>
+          <p:cNvPr id="20" name="Text 15"/>
+          <p:cNvSpPr/>
+          <p:nvPr/>
+        </p:nvSpPr>
+        <p:spPr>
+          <a:xfrm>
+            <a:off x="1143000" y="2962656"/>
+            <a:ext cx="3063240" cy="384048"/>
+          </a:xfrm>
+          <a:prstGeom prst="rect">
+            <a:avLst/>
+          </a:prstGeom>
+          <a:noFill/>
+          <a:ln/>
+        </p:spPr>
+        <p:txBody>
+          <a:bodyPr wrap="square" lIns="0" tIns="0" rIns="0" bIns="0" rtlCol="0" anchor="ctr"/>
+          <a:lstStyle/>
+          <a:p>
+            <a:pPr marL="0" indent="0">
+              <a:buNone/>
+            </a:pPr>
+            <a:r>
+              <a:rPr lang="en-US" sz="1400" b="1" dirty="0">
+                <a:solidFill>
+                  <a:srgbClr val="1A1A1A"/>
+                </a:solidFill>
+              </a:rPr>
+              <a:t>AI pomаže prevarantima</a:t>
+            </a:r>
+            <a:endParaRPr lang="en-US" sz="1400" dirty="0"/>
+          </a:p>
+        </p:txBody>
+      </p:sp>
+      <p:sp>
+        <p:nvSpPr>
+          <p:cNvPr id="21" name="Text 16"/>
+          <p:cNvSpPr/>
+          <p:nvPr/>
+        </p:nvSpPr>
+        <p:spPr>
+          <a:xfrm>
+            <a:off x="1143000" y="3328416"/>
+            <a:ext cx="3063240" cy="1207008"/>
+          </a:xfrm>
+          <a:prstGeom prst="rect">
+            <a:avLst/>
+          </a:prstGeom>
+          <a:noFill/>
+          <a:ln/>
+        </p:spPr>
+        <p:txBody>
+          <a:bodyPr wrap="square" rtlCol="0" anchor="t"/>
+          <a:lstStyle/>
+          <a:p>
+            <a:pPr marL="0" indent="0">
+              <a:buNone/>
+            </a:pPr>
+            <a:r>
+              <a:rPr lang="en-US" sz="1200" dirty="0">
+                <a:solidFill>
+                  <a:srgbClr val="444444"/>
+                </a:solidFill>
+              </a:rPr>
+              <a:t>ChatGPT piše uvjerljive phishing poruke bez grešaka. Stara pravila 'loš pravopis = prijevara' više ne vrijede uvijek.</a:t>
+            </a:r>
+            <a:endParaRPr lang="en-US" sz="1200" dirty="0"/>
+          </a:p>
+        </p:txBody>
+      </p:sp>
+      <p:sp>
+        <p:nvSpPr>
+          <p:cNvPr id="22" name="Shape 17"/>
+          <p:cNvSpPr/>
+          <p:nvPr/>
+        </p:nvSpPr>
+        <p:spPr>
+          <a:xfrm>
+            <a:off x="4754880" y="2816352"/>
+            <a:ext cx="4023360" cy="1828800"/>
+          </a:xfrm>
+          <a:prstGeom prst="rect">
+            <a:avLst/>
+          </a:prstGeom>
+          <a:solidFill>
+            <a:srgbClr val="FFFFFF"/>
+          </a:solidFill>
+          <a:ln/>
+          <a:effectLst>
+            <a:outerShdw blurRad="101600" dist="25400" dir="8100000" algn="bl" rotWithShape="0">
+              <a:srgbClr val="000000">
+                <a:alpha val="10000"/>
+              </a:srgbClr>
+            </a:outerShdw>
+          </a:effectLst>
+        </p:spPr>
+        <p:txBody>
+          <a:bodyPr/>
+          <a:lstStyle/>
+          <a:p>
+            <a:endParaRPr lang="en-US"/>
+          </a:p>
+        </p:txBody>
+      </p:sp>
+      <p:sp>
+        <p:nvSpPr>
+          <p:cNvPr id="23" name="Shape 18"/>
+          <p:cNvSpPr/>
+          <p:nvPr/>
+        </p:nvSpPr>
+        <p:spPr>
+          <a:xfrm>
+            <a:off x="4754880" y="2816352"/>
+            <a:ext cx="73152" cy="1828800"/>
+          </a:xfrm>
+          <a:prstGeom prst="rect">
+            <a:avLst/>
+          </a:prstGeom>
+          <a:solidFill>
+            <a:srgbClr val="CC0000"/>
+          </a:solidFill>
+          <a:ln w="12700">
+            <a:solidFill>
+              <a:srgbClr val="CC0000"/>
+            </a:solidFill>
+            <a:prstDash val="solid"/>
+          </a:ln>
+        </p:spPr>
+        <p:txBody>
+          <a:bodyPr/>
+          <a:lstStyle/>
+          <a:p>
+            <a:endParaRPr lang="en-US"/>
+          </a:p>
+        </p:txBody>
+      </p:sp>
+      <p:sp>
+        <p:nvSpPr>
+          <p:cNvPr id="24" name="Shape 19"/>
+          <p:cNvSpPr/>
+          <p:nvPr/>
+        </p:nvSpPr>
+        <p:spPr>
+          <a:xfrm>
+            <a:off x="4919472" y="3063240"/>
+            <a:ext cx="594360" cy="594360"/>
+          </a:xfrm>
+          <a:prstGeom prst="ellipse">
+            <a:avLst/>
+          </a:prstGeom>
+          <a:solidFill>
+            <a:srgbClr val="CC0000"/>
+          </a:solidFill>
+          <a:ln w="12700">
+            <a:solidFill>
+              <a:srgbClr val="CC0000"/>
+            </a:solidFill>
+            <a:prstDash val="solid"/>
+          </a:ln>
+        </p:spPr>
+        <p:txBody>
+          <a:bodyPr/>
+          <a:lstStyle/>
+          <a:p>
+            <a:endParaRPr lang="en-US"/>
+          </a:p>
+        </p:txBody>
+      </p:sp>
+      <p:pic>
+        <p:nvPicPr>
+          <p:cNvPr id="25" name="Image 3" descr="preencoded.png"/>
+          <p:cNvPicPr>
+            <a:picLocks noChangeAspect="1"/>
+          </p:cNvPicPr>
+          <p:nvPr/>
+        </p:nvPicPr>
+        <p:blipFill>
+          <a:blip r:embed="rId6"/>
+          <a:stretch>
+            <a:fillRect/>
+          </a:stretch>
+        </p:blipFill>
+        <p:spPr>
+          <a:xfrm>
+            <a:off x="4974336" y="3118104"/>
+            <a:ext cx="484632" cy="484632"/>
+          </a:xfrm>
+          <a:prstGeom prst="rect">
+            <a:avLst/>
+          </a:prstGeom>
+        </p:spPr>
+      </p:pic>
+      <p:sp>
+        <p:nvSpPr>
+          <p:cNvPr id="26" name="Text 20"/>
+          <p:cNvSpPr/>
+          <p:nvPr/>
+        </p:nvSpPr>
+        <p:spPr>
+          <a:xfrm>
+            <a:off x="5623560" y="2962656"/>
+            <a:ext cx="3063240" cy="384048"/>
+          </a:xfrm>
+          <a:prstGeom prst="rect">
+            <a:avLst/>
+          </a:prstGeom>
+          <a:noFill/>
+          <a:ln/>
+        </p:spPr>
+        <p:txBody>
+          <a:bodyPr wrap="square" lIns="0" tIns="0" rIns="0" bIns="0" rtlCol="0" anchor="ctr"/>
+          <a:lstStyle/>
+          <a:p>
+            <a:pPr marL="0" indent="0">
+              <a:buNone/>
+            </a:pPr>
+            <a:r>
+              <a:rPr lang="en-US" sz="1400" b="1" dirty="0">
+                <a:solidFill>
+                  <a:srgbClr val="1A1A1A"/>
+                </a:solidFill>
+              </a:rPr>
+              <a:t>Investicijske prijevare</a:t>
+            </a:r>
+            <a:endParaRPr lang="en-US" sz="1400" dirty="0"/>
+          </a:p>
+        </p:txBody>
+      </p:sp>
+      <p:sp>
+        <p:nvSpPr>
+          <p:cNvPr id="27" name="Text 21"/>
+          <p:cNvSpPr/>
+          <p:nvPr/>
+        </p:nvSpPr>
+        <p:spPr>
+          <a:xfrm>
+            <a:off x="5623560" y="3328416"/>
+            <a:ext cx="3063240" cy="1207008"/>
+          </a:xfrm>
+          <a:prstGeom prst="rect">
+            <a:avLst/>
+          </a:prstGeom>
+          <a:noFill/>
+          <a:ln/>
+        </p:spPr>
+        <p:txBody>
+          <a:bodyPr wrap="square" rtlCol="0" anchor="t"/>
+          <a:lstStyle/>
+          <a:p>
+            <a:pPr marL="0" indent="0">
+              <a:buNone/>
+            </a:pPr>
+            <a:r>
+              <a:rPr lang="en-US" sz="1200" dirty="0">
+                <a:solidFill>
+                  <a:srgbClr val="444444"/>
+                </a:solidFill>
+              </a:rPr>
+              <a:t>Lažne zarade na kriptovalutama — lažno pozivanje na EU, HNB ili poznate osobe. Oglasi na društvenim mrežama!</a:t>
+            </a:r>
+            <a:endParaRPr lang="en-US" sz="1200" dirty="0"/>
+          </a:p>
+        </p:txBody>
+      </p:sp>
+    </p:spTree>
+  </p:cSld>
+  <p:clrMapOvr>
+    <a:masterClrMapping/>
+  </p:clrMapOvr>
+</p:sld>
+</file>
+
+<file path=ppt/slides/slide14.xml><?xml version="1.0" encoding="utf-8"?>
+<p:sld xmlns:a="http://schemas.openxmlformats.org/drawingml/2006/main" xmlns:r="http://schemas.openxmlformats.org/officeDocument/2006/relationships" xmlns:p="http://schemas.openxmlformats.org/presentationml/2006/main">
+  <p:cSld name="Slide 13">
+    <p:bg>
+      <p:bgPr>
+        <a:solidFill>
+          <a:srgbClr val="F5F5F5"/>
+        </a:solidFill>
+        <a:effectLst/>
+      </p:bgPr>
+    </p:bg>
+    <p:spTree>
+      <p:nvGrpSpPr>
+        <p:cNvPr id="1" name=""/>
+        <p:cNvGrpSpPr/>
+        <p:nvPr/>
+      </p:nvGrpSpPr>
+      <p:grpSpPr>
+        <a:xfrm>
+          <a:off x="0" y="0"/>
+          <a:ext cx="0" cy="0"/>
+          <a:chOff x="0" y="0"/>
+          <a:chExt cx="0" cy="0"/>
+        </a:xfrm>
+      </p:grpSpPr>
+      <p:sp>
+        <p:nvSpPr>
+          <p:cNvPr id="2" name="Shape 0"/>
+          <p:cNvSpPr/>
+          <p:nvPr/>
+        </p:nvSpPr>
+        <p:spPr>
+          <a:xfrm>
+            <a:off x="0" y="0"/>
+            <a:ext cx="9144000" cy="658368"/>
+          </a:xfrm>
+          <a:prstGeom prst="rect">
+            <a:avLst/>
+          </a:prstGeom>
+          <a:solidFill>
+            <a:srgbClr val="CC0000"/>
+          </a:solidFill>
+          <a:ln w="12700">
+            <a:solidFill>
+              <a:srgbClr val="CC0000"/>
+            </a:solidFill>
+            <a:prstDash val="solid"/>
+          </a:ln>
+        </p:spPr>
+        <p:txBody>
+          <a:bodyPr/>
+          <a:lstStyle/>
+          <a:p>
+            <a:endParaRPr lang="en-US"/>
+          </a:p>
+        </p:txBody>
+      </p:sp>
+      <p:sp>
+        <p:nvSpPr>
+          <p:cNvPr id="3" name="Text 1"/>
+          <p:cNvSpPr/>
+          <p:nvPr/>
+        </p:nvSpPr>
+        <p:spPr>
+          <a:xfrm>
+            <a:off x="320040" y="0"/>
+            <a:ext cx="8503920" cy="658368"/>
+          </a:xfrm>
+          <a:prstGeom prst="rect">
+            <a:avLst/>
+          </a:prstGeom>
+          <a:noFill/>
+          <a:ln/>
+        </p:spPr>
+        <p:txBody>
+          <a:bodyPr wrap="square" lIns="0" tIns="0" rIns="0" bIns="0" rtlCol="0" anchor="ctr"/>
+          <a:lstStyle/>
+          <a:p>
+            <a:pPr marL="0" indent="0">
               <a:buNone/>
             </a:pPr>
             <a:r>
@@ -4552,9 +5479,27 @@
             <a:tbl>
               <a:tblPr/>
               <a:tblGrid>
-                <a:gridCol w="2865120"/>
-                <a:gridCol w="2865120"/>
-                <a:gridCol w="2865120"/>
+                <a:gridCol w="2865120">
+                  <a:extLst>
+                    <a:ext uri="{9D8B030D-6E8A-4147-A177-3AD203B41FA5}">
+                      <a16:colId xmlns:a16="http://schemas.microsoft.com/office/drawing/2014/main" val="20000"/>
+                    </a:ext>
+                  </a:extLst>
+                </a:gridCol>
+                <a:gridCol w="2865120">
+                  <a:extLst>
+                    <a:ext uri="{9D8B030D-6E8A-4147-A177-3AD203B41FA5}">
+                      <a16:colId xmlns:a16="http://schemas.microsoft.com/office/drawing/2014/main" val="20001"/>
+                    </a:ext>
+                  </a:extLst>
+                </a:gridCol>
+                <a:gridCol w="2865120">
+                  <a:extLst>
+                    <a:ext uri="{9D8B030D-6E8A-4147-A177-3AD203B41FA5}">
+                      <a16:colId xmlns:a16="http://schemas.microsoft.com/office/drawing/2014/main" val="20002"/>
+                    </a:ext>
+                  </a:extLst>
+                </a:gridCol>
               </a:tblGrid>
               <a:tr h="548640">
                 <a:tc>
@@ -4562,7 +5507,7 @@
                     <a:bodyPr/>
                     <a:lstStyle/>
                     <a:p>
-                      <a:pPr indent="0" marL="0">
+                      <a:pPr marL="0" indent="0">
                         <a:buNone/>
                       </a:pPr>
                       <a:r>
@@ -4576,7 +5521,7 @@
                       <a:endParaRPr lang="en-US" sz="1300" dirty="0"/>
                     </a:p>
                   </a:txBody>
-                  <a:tcPr marL="91440" marR="91440" marT="45720" marB="45720">
+                  <a:tcPr>
                     <a:lnL w="6350" cap="flat" cmpd="sng" algn="ctr">
                       <a:solidFill>
                         <a:srgbClr val="CCCCCC"/>
@@ -4623,7 +5568,7 @@
                     <a:bodyPr/>
                     <a:lstStyle/>
                     <a:p>
-                      <a:pPr indent="0" marL="0">
+                      <a:pPr marL="0" indent="0">
                         <a:buNone/>
                       </a:pPr>
                       <a:r>
@@ -4637,7 +5582,7 @@
                       <a:endParaRPr lang="en-US" sz="1300" dirty="0"/>
                     </a:p>
                   </a:txBody>
-                  <a:tcPr marL="91440" marR="91440" marT="45720" marB="45720">
+                  <a:tcPr>
                     <a:lnL w="6350" cap="flat" cmpd="sng" algn="ctr">
                       <a:solidFill>
                         <a:srgbClr val="CCCCCC"/>
@@ -4684,7 +5629,7 @@
                     <a:bodyPr/>
                     <a:lstStyle/>
                     <a:p>
-                      <a:pPr indent="0" marL="0">
+                      <a:pPr marL="0" indent="0">
                         <a:buNone/>
                       </a:pPr>
                       <a:r>
@@ -4698,7 +5643,7 @@
                       <a:endParaRPr lang="en-US" sz="1300" dirty="0"/>
                     </a:p>
                   </a:txBody>
-                  <a:tcPr marL="91440" marR="91440" marT="45720" marB="45720">
+                  <a:tcPr>
                     <a:lnL w="6350" cap="flat" cmpd="sng" algn="ctr">
                       <a:solidFill>
                         <a:srgbClr val="CCCCCC"/>
@@ -4740,6 +5685,11 @@
                     </a:solidFill>
                   </a:tcPr>
                 </a:tc>
+                <a:extLst>
+                  <a:ext uri="{0D108BD9-81ED-4DB2-BD59-A6C34878D82A}">
+                    <a16:rowId xmlns:a16="http://schemas.microsoft.com/office/drawing/2014/main" val="10000"/>
+                  </a:ext>
+                </a:extLst>
               </a:tr>
               <a:tr h="548640">
                 <a:tc>
@@ -4747,7 +5697,7 @@
                     <a:bodyPr/>
                     <a:lstStyle/>
                     <a:p>
-                      <a:pPr indent="0" marL="0">
+                      <a:pPr marL="0" indent="0">
                         <a:buNone/>
                       </a:pPr>
                       <a:r>
@@ -4761,7 +5711,7 @@
                       <a:endParaRPr lang="en-US" sz="1200" dirty="0"/>
                     </a:p>
                   </a:txBody>
-                  <a:tcPr marL="91440" marR="91440" marT="45720" marB="45720">
+                  <a:tcPr>
                     <a:lnL w="6350" cap="flat" cmpd="sng" algn="ctr">
                       <a:solidFill>
                         <a:srgbClr val="CCCCCC"/>
@@ -4808,7 +5758,7 @@
                     <a:bodyPr/>
                     <a:lstStyle/>
                     <a:p>
-                      <a:pPr indent="0" marL="0">
+                      <a:pPr marL="0" indent="0">
                         <a:buNone/>
                       </a:pPr>
                       <a:r>
@@ -4822,7 +5772,7 @@
                       <a:endParaRPr lang="en-US" sz="1200" dirty="0"/>
                     </a:p>
                   </a:txBody>
-                  <a:tcPr marL="91440" marR="91440" marT="45720" marB="45720">
+                  <a:tcPr>
                     <a:lnL w="6350" cap="flat" cmpd="sng" algn="ctr">
                       <a:solidFill>
                         <a:srgbClr val="CCCCCC"/>
@@ -4869,7 +5819,7 @@
                     <a:bodyPr/>
                     <a:lstStyle/>
                     <a:p>
-                      <a:pPr indent="0" marL="0">
+                      <a:pPr marL="0" indent="0">
                         <a:buNone/>
                       </a:pPr>
                       <a:r>
@@ -4883,7 +5833,7 @@
                       <a:endParaRPr lang="en-US" sz="1200" dirty="0"/>
                     </a:p>
                   </a:txBody>
-                  <a:tcPr marL="91440" marR="91440" marT="45720" marB="45720">
+                  <a:tcPr>
                     <a:lnL w="6350" cap="flat" cmpd="sng" algn="ctr">
                       <a:solidFill>
                         <a:srgbClr val="CCCCCC"/>
@@ -4925,6 +5875,11 @@
                     </a:solidFill>
                   </a:tcPr>
                 </a:tc>
+                <a:extLst>
+                  <a:ext uri="{0D108BD9-81ED-4DB2-BD59-A6C34878D82A}">
+                    <a16:rowId xmlns:a16="http://schemas.microsoft.com/office/drawing/2014/main" val="10001"/>
+                  </a:ext>
+                </a:extLst>
               </a:tr>
               <a:tr h="548640">
                 <a:tc>
@@ -4932,7 +5887,7 @@
                     <a:bodyPr/>
                     <a:lstStyle/>
                     <a:p>
-                      <a:pPr indent="0" marL="0">
+                      <a:pPr marL="0" indent="0">
                         <a:buNone/>
                       </a:pPr>
                       <a:r>
@@ -4946,7 +5901,7 @@
                       <a:endParaRPr lang="en-US" sz="1200" dirty="0"/>
                     </a:p>
                   </a:txBody>
-                  <a:tcPr marL="91440" marR="91440" marT="45720" marB="45720">
+                  <a:tcPr>
                     <a:lnL w="6350" cap="flat" cmpd="sng" algn="ctr">
                       <a:solidFill>
                         <a:srgbClr val="CCCCCC"/>
@@ -4993,7 +5948,7 @@
                     <a:bodyPr/>
                     <a:lstStyle/>
                     <a:p>
-                      <a:pPr indent="0" marL="0">
+                      <a:pPr marL="0" indent="0">
                         <a:buNone/>
                       </a:pPr>
                       <a:r>
@@ -5007,7 +5962,7 @@
                       <a:endParaRPr lang="en-US" sz="1200" dirty="0"/>
                     </a:p>
                   </a:txBody>
-                  <a:tcPr marL="91440" marR="91440" marT="45720" marB="45720">
+                  <a:tcPr>
                     <a:lnL w="6350" cap="flat" cmpd="sng" algn="ctr">
                       <a:solidFill>
                         <a:srgbClr val="CCCCCC"/>
@@ -5054,7 +6009,7 @@
                     <a:bodyPr/>
                     <a:lstStyle/>
                     <a:p>
-                      <a:pPr indent="0" marL="0">
+                      <a:pPr marL="0" indent="0">
                         <a:buNone/>
                       </a:pPr>
                       <a:r>
@@ -5068,7 +6023,7 @@
                       <a:endParaRPr lang="en-US" sz="1200" dirty="0"/>
                     </a:p>
                   </a:txBody>
-                  <a:tcPr marL="91440" marR="91440" marT="45720" marB="45720">
+                  <a:tcPr>
                     <a:lnL w="6350" cap="flat" cmpd="sng" algn="ctr">
                       <a:solidFill>
                         <a:srgbClr val="CCCCCC"/>
@@ -5110,6 +6065,11 @@
                     </a:solidFill>
                   </a:tcPr>
                 </a:tc>
+                <a:extLst>
+                  <a:ext uri="{0D108BD9-81ED-4DB2-BD59-A6C34878D82A}">
+                    <a16:rowId xmlns:a16="http://schemas.microsoft.com/office/drawing/2014/main" val="10002"/>
+                  </a:ext>
+                </a:extLst>
               </a:tr>
               <a:tr h="548640">
                 <a:tc>
@@ -5117,7 +6077,7 @@
                     <a:bodyPr/>
                     <a:lstStyle/>
                     <a:p>
-                      <a:pPr indent="0" marL="0">
+                      <a:pPr marL="0" indent="0">
                         <a:buNone/>
                       </a:pPr>
                       <a:r>
@@ -5131,7 +6091,7 @@
                       <a:endParaRPr lang="en-US" sz="1200" dirty="0"/>
                     </a:p>
                   </a:txBody>
-                  <a:tcPr marL="91440" marR="91440" marT="45720" marB="45720">
+                  <a:tcPr>
                     <a:lnL w="6350" cap="flat" cmpd="sng" algn="ctr">
                       <a:solidFill>
                         <a:srgbClr val="CCCCCC"/>
@@ -5178,7 +6138,7 @@
                     <a:bodyPr/>
                     <a:lstStyle/>
                     <a:p>
-                      <a:pPr indent="0" marL="0">
+                      <a:pPr marL="0" indent="0">
                         <a:buNone/>
                       </a:pPr>
                       <a:r>
@@ -5192,7 +6152,7 @@
                       <a:endParaRPr lang="en-US" sz="1200" dirty="0"/>
                     </a:p>
                   </a:txBody>
-                  <a:tcPr marL="91440" marR="91440" marT="45720" marB="45720">
+                  <a:tcPr>
                     <a:lnL w="6350" cap="flat" cmpd="sng" algn="ctr">
                       <a:solidFill>
                         <a:srgbClr val="CCCCCC"/>
@@ -5239,7 +6199,7 @@
                     <a:bodyPr/>
                     <a:lstStyle/>
                     <a:p>
-                      <a:pPr indent="0" marL="0">
+                      <a:pPr marL="0" indent="0">
                         <a:buNone/>
                       </a:pPr>
                       <a:r>
@@ -5253,7 +6213,7 @@
                       <a:endParaRPr lang="en-US" sz="1200" dirty="0"/>
                     </a:p>
                   </a:txBody>
-                  <a:tcPr marL="91440" marR="91440" marT="45720" marB="45720">
+                  <a:tcPr>
                     <a:lnL w="6350" cap="flat" cmpd="sng" algn="ctr">
                       <a:solidFill>
                         <a:srgbClr val="CCCCCC"/>
@@ -5295,6 +6255,11 @@
                     </a:solidFill>
                   </a:tcPr>
                 </a:tc>
+                <a:extLst>
+                  <a:ext uri="{0D108BD9-81ED-4DB2-BD59-A6C34878D82A}">
+                    <a16:rowId xmlns:a16="http://schemas.microsoft.com/office/drawing/2014/main" val="10003"/>
+                  </a:ext>
+                </a:extLst>
               </a:tr>
               <a:tr h="548640">
                 <a:tc>
@@ -5302,7 +6267,7 @@
                     <a:bodyPr/>
                     <a:lstStyle/>
                     <a:p>
-                      <a:pPr indent="0" marL="0">
+                      <a:pPr marL="0" indent="0">
                         <a:buNone/>
                       </a:pPr>
                       <a:r>
@@ -5316,7 +6281,7 @@
                       <a:endParaRPr lang="en-US" sz="1200" dirty="0"/>
                     </a:p>
                   </a:txBody>
-                  <a:tcPr marL="91440" marR="91440" marT="45720" marB="45720">
+                  <a:tcPr>
                     <a:lnL w="6350" cap="flat" cmpd="sng" algn="ctr">
                       <a:solidFill>
                         <a:srgbClr val="CCCCCC"/>
@@ -5363,7 +6328,7 @@
                     <a:bodyPr/>
                     <a:lstStyle/>
                     <a:p>
-                      <a:pPr indent="0" marL="0">
+                      <a:pPr marL="0" indent="0">
                         <a:buNone/>
                       </a:pPr>
                       <a:r>
@@ -5377,7 +6342,7 @@
                       <a:endParaRPr lang="en-US" sz="1200" dirty="0"/>
                     </a:p>
                   </a:txBody>
-                  <a:tcPr marL="91440" marR="91440" marT="45720" marB="45720">
+                  <a:tcPr>
                     <a:lnL w="6350" cap="flat" cmpd="sng" algn="ctr">
                       <a:solidFill>
                         <a:srgbClr val="CCCCCC"/>
@@ -5424,7 +6389,7 @@
                     <a:bodyPr/>
                     <a:lstStyle/>
                     <a:p>
-                      <a:pPr indent="0" marL="0">
+                      <a:pPr marL="0" indent="0">
                         <a:buNone/>
                       </a:pPr>
                       <a:r>
@@ -5438,7 +6403,7 @@
                       <a:endParaRPr lang="en-US" sz="1200" dirty="0"/>
                     </a:p>
                   </a:txBody>
-                  <a:tcPr marL="91440" marR="91440" marT="45720" marB="45720">
+                  <a:tcPr>
                     <a:lnL w="6350" cap="flat" cmpd="sng" algn="ctr">
                       <a:solidFill>
                         <a:srgbClr val="CCCCCC"/>
@@ -5480,6 +6445,11 @@
                     </a:solidFill>
                   </a:tcPr>
                 </a:tc>
+                <a:extLst>
+                  <a:ext uri="{0D108BD9-81ED-4DB2-BD59-A6C34878D82A}">
+                    <a16:rowId xmlns:a16="http://schemas.microsoft.com/office/drawing/2014/main" val="10004"/>
+                  </a:ext>
+                </a:extLst>
               </a:tr>
               <a:tr h="548640">
                 <a:tc>
@@ -5487,7 +6457,7 @@
                     <a:bodyPr/>
                     <a:lstStyle/>
                     <a:p>
-                      <a:pPr indent="0" marL="0">
+                      <a:pPr marL="0" indent="0">
                         <a:buNone/>
                       </a:pPr>
                       <a:r>
@@ -5501,7 +6471,7 @@
                       <a:endParaRPr lang="en-US" sz="1200" dirty="0"/>
                     </a:p>
                   </a:txBody>
-                  <a:tcPr marL="91440" marR="91440" marT="45720" marB="45720">
+                  <a:tcPr>
                     <a:lnL w="6350" cap="flat" cmpd="sng" algn="ctr">
                       <a:solidFill>
                         <a:srgbClr val="CCCCCC"/>
@@ -5548,7 +6518,7 @@
                     <a:bodyPr/>
                     <a:lstStyle/>
                     <a:p>
-                      <a:pPr indent="0" marL="0">
+                      <a:pPr marL="0" indent="0">
                         <a:buNone/>
                       </a:pPr>
                       <a:r>
@@ -5562,7 +6532,7 @@
                       <a:endParaRPr lang="en-US" sz="1200" dirty="0"/>
                     </a:p>
                   </a:txBody>
-                  <a:tcPr marL="91440" marR="91440" marT="45720" marB="45720">
+                  <a:tcPr>
                     <a:lnL w="6350" cap="flat" cmpd="sng" algn="ctr">
                       <a:solidFill>
                         <a:srgbClr val="CCCCCC"/>
@@ -5609,7 +6579,7 @@
                     <a:bodyPr/>
                     <a:lstStyle/>
                     <a:p>
-                      <a:pPr indent="0" marL="0">
+                      <a:pPr marL="0" indent="0">
                         <a:buNone/>
                       </a:pPr>
                       <a:r>
@@ -5623,7 +6593,7 @@
                       <a:endParaRPr lang="en-US" sz="1200" dirty="0"/>
                     </a:p>
                   </a:txBody>
-                  <a:tcPr marL="91440" marR="91440" marT="45720" marB="45720">
+                  <a:tcPr>
                     <a:lnL w="6350" cap="flat" cmpd="sng" algn="ctr">
                       <a:solidFill>
                         <a:srgbClr val="CCCCCC"/>
@@ -5665,6 +6635,11 @@
                     </a:solidFill>
                   </a:tcPr>
                 </a:tc>
+                <a:extLst>
+                  <a:ext uri="{0D108BD9-81ED-4DB2-BD59-A6C34878D82A}">
+                    <a16:rowId xmlns:a16="http://schemas.microsoft.com/office/drawing/2014/main" val="10005"/>
+                  </a:ext>
+                </a:extLst>
               </a:tr>
               <a:tr h="548640">
                 <a:tc>
@@ -5672,7 +6647,7 @@
                     <a:bodyPr/>
                     <a:lstStyle/>
                     <a:p>
-                      <a:pPr indent="0" marL="0">
+                      <a:pPr marL="0" indent="0">
                         <a:buNone/>
                       </a:pPr>
                       <a:r>
@@ -5686,7 +6661,7 @@
                       <a:endParaRPr lang="en-US" sz="1200" dirty="0"/>
                     </a:p>
                   </a:txBody>
-                  <a:tcPr marL="91440" marR="91440" marT="45720" marB="45720">
+                  <a:tcPr>
                     <a:lnL w="6350" cap="flat" cmpd="sng" algn="ctr">
                       <a:solidFill>
                         <a:srgbClr val="CCCCCC"/>
@@ -5733,7 +6708,7 @@
                     <a:bodyPr/>
                     <a:lstStyle/>
                     <a:p>
-                      <a:pPr indent="0" marL="0">
+                      <a:pPr marL="0" indent="0">
                         <a:buNone/>
                       </a:pPr>
                       <a:r>
@@ -5747,7 +6722,7 @@
                       <a:endParaRPr lang="en-US" sz="1200" dirty="0"/>
                     </a:p>
                   </a:txBody>
-                  <a:tcPr marL="91440" marR="91440" marT="45720" marB="45720">
+                  <a:tcPr>
                     <a:lnL w="6350" cap="flat" cmpd="sng" algn="ctr">
                       <a:solidFill>
                         <a:srgbClr val="CCCCCC"/>
@@ -5794,7 +6769,7 @@
                     <a:bodyPr/>
                     <a:lstStyle/>
                     <a:p>
-                      <a:pPr indent="0" marL="0">
+                      <a:pPr marL="0" indent="0">
                         <a:buNone/>
                       </a:pPr>
                       <a:r>
@@ -5808,7 +6783,7 @@
                       <a:endParaRPr lang="en-US" sz="1200" dirty="0"/>
                     </a:p>
                   </a:txBody>
-                  <a:tcPr marL="91440" marR="91440" marT="45720" marB="45720">
+                  <a:tcPr>
                     <a:lnL w="6350" cap="flat" cmpd="sng" algn="ctr">
                       <a:solidFill>
                         <a:srgbClr val="CCCCCC"/>
@@ -5850,6 +6825,11 @@
                     </a:solidFill>
                   </a:tcPr>
                 </a:tc>
+                <a:extLst>
+                  <a:ext uri="{0D108BD9-81ED-4DB2-BD59-A6C34878D82A}">
+                    <a16:rowId xmlns:a16="http://schemas.microsoft.com/office/drawing/2014/main" val="10006"/>
+                  </a:ext>
+                </a:extLst>
               </a:tr>
               <a:tr h="548640">
                 <a:tc>
@@ -5857,7 +6837,7 @@
                     <a:bodyPr/>
                     <a:lstStyle/>
                     <a:p>
-                      <a:pPr indent="0" marL="0">
+                      <a:pPr marL="0" indent="0">
                         <a:buNone/>
                       </a:pPr>
                       <a:r>
@@ -5871,7 +6851,7 @@
                       <a:endParaRPr lang="en-US" sz="1200" dirty="0"/>
                     </a:p>
                   </a:txBody>
-                  <a:tcPr marL="91440" marR="91440" marT="45720" marB="45720">
+                  <a:tcPr>
                     <a:lnL w="6350" cap="flat" cmpd="sng" algn="ctr">
                       <a:solidFill>
                         <a:srgbClr val="CCCCCC"/>
@@ -5918,7 +6898,7 @@
                     <a:bodyPr/>
                     <a:lstStyle/>
                     <a:p>
-                      <a:pPr indent="0" marL="0">
+                      <a:pPr marL="0" indent="0">
                         <a:buNone/>
                       </a:pPr>
                       <a:r>
@@ -5932,7 +6912,7 @@
                       <a:endParaRPr lang="en-US" sz="1200" dirty="0"/>
                     </a:p>
                   </a:txBody>
-                  <a:tcPr marL="91440" marR="91440" marT="45720" marB="45720">
+                  <a:tcPr>
                     <a:lnL w="6350" cap="flat" cmpd="sng" algn="ctr">
                       <a:solidFill>
                         <a:srgbClr val="CCCCCC"/>
@@ -5979,7 +6959,7 @@
                     <a:bodyPr/>
                     <a:lstStyle/>
                     <a:p>
-                      <a:pPr indent="0" marL="0">
+                      <a:pPr marL="0" indent="0">
                         <a:buNone/>
                       </a:pPr>
                       <a:r>
@@ -5993,7 +6973,7 @@
                       <a:endParaRPr lang="en-US" sz="1200" dirty="0"/>
                     </a:p>
                   </a:txBody>
-                  <a:tcPr marL="91440" marR="91440" marT="45720" marB="45720">
+                  <a:tcPr>
                     <a:lnL w="6350" cap="flat" cmpd="sng" algn="ctr">
                       <a:solidFill>
                         <a:srgbClr val="CCCCCC"/>
@@ -6035,6 +7015,11 @@
                     </a:solidFill>
                   </a:tcPr>
                 </a:tc>
+                <a:extLst>
+                  <a:ext uri="{0D108BD9-81ED-4DB2-BD59-A6C34878D82A}">
+                    <a16:rowId xmlns:a16="http://schemas.microsoft.com/office/drawing/2014/main" val="10007"/>
+                  </a:ext>
+                </a:extLst>
               </a:tr>
             </a:tbl>
           </a:graphicData>
@@ -6048,7 +7033,7 @@
 </p:sld>
 </file>
 
-<file path=ppt/slides/slide14.xml><?xml version="1.0" encoding="utf-8"?>
+<file path=ppt/slides/slide15.xml><?xml version="1.0" encoding="utf-8"?>
 <p:sld xmlns:a="http://schemas.openxmlformats.org/drawingml/2006/main" xmlns:r="http://schemas.openxmlformats.org/officeDocument/2006/relationships" xmlns:p="http://schemas.openxmlformats.org/presentationml/2006/main">
   <p:cSld name="Slide 14">
     <p:bg>
@@ -6056,6 +7041,7 @@
         <a:solidFill>
           <a:srgbClr val="F5F5F5"/>
         </a:solidFill>
+        <a:effectLst/>
       </p:bgPr>
     </p:bg>
     <p:spTree>
@@ -6096,6 +7082,13 @@
             <a:prstDash val="solid"/>
           </a:ln>
         </p:spPr>
+        <p:txBody>
+          <a:bodyPr/>
+          <a:lstStyle/>
+          <a:p>
+            <a:endParaRPr lang="en-US"/>
+          </a:p>
+        </p:txBody>
       </p:sp>
       <p:sp>
         <p:nvSpPr>
@@ -6118,7 +7111,7 @@
           <a:bodyPr wrap="square" lIns="0" tIns="0" rIns="0" bIns="0" rtlCol="0" anchor="ctr"/>
           <a:lstStyle/>
           <a:p>
-            <a:pPr indent="0" marL="0">
+            <a:pPr marL="0" indent="0">
               <a:buNone/>
             </a:pPr>
             <a:r>
@@ -6152,13 +7145,20 @@
           </a:solidFill>
           <a:ln/>
           <a:effectLst>
-            <a:outerShdw sx="100000" sy="100000" kx="0" ky="0" algn="bl" rotWithShape="0" blurRad="101600" dist="25400" dir="8100000">
+            <a:outerShdw blurRad="101600" dist="25400" dir="8100000" algn="bl" rotWithShape="0">
               <a:srgbClr val="000000">
                 <a:alpha val="10000"/>
               </a:srgbClr>
             </a:outerShdw>
           </a:effectLst>
         </p:spPr>
+        <p:txBody>
+          <a:bodyPr/>
+          <a:lstStyle/>
+          <a:p>
+            <a:endParaRPr lang="en-US"/>
+          </a:p>
+        </p:txBody>
       </p:sp>
       <p:sp>
         <p:nvSpPr>
@@ -6184,6 +7184,13 @@
             <a:prstDash val="solid"/>
           </a:ln>
         </p:spPr>
+        <p:txBody>
+          <a:bodyPr/>
+          <a:lstStyle/>
+          <a:p>
+            <a:endParaRPr lang="en-US"/>
+          </a:p>
+        </p:txBody>
       </p:sp>
       <p:sp>
         <p:nvSpPr>
@@ -6206,7 +7213,7 @@
           <a:bodyPr wrap="square" lIns="0" tIns="0" rIns="0" bIns="0" rtlCol="0" anchor="ctr"/>
           <a:lstStyle/>
           <a:p>
-            <a:pPr algn="ctr" indent="0" marL="0">
+            <a:pPr marL="0" indent="0" algn="ctr">
               <a:buNone/>
             </a:pPr>
             <a:r>
@@ -6352,13 +7359,20 @@
           </a:solidFill>
           <a:ln/>
           <a:effectLst>
-            <a:outerShdw sx="100000" sy="100000" kx="0" ky="0" algn="bl" rotWithShape="0" blurRad="101600" dist="25400" dir="8100000">
+            <a:outerShdw blurRad="101600" dist="25400" dir="8100000" algn="bl" rotWithShape="0">
               <a:srgbClr val="000000">
                 <a:alpha val="10000"/>
               </a:srgbClr>
             </a:outerShdw>
           </a:effectLst>
         </p:spPr>
+        <p:txBody>
+          <a:bodyPr/>
+          <a:lstStyle/>
+          <a:p>
+            <a:endParaRPr lang="en-US"/>
+          </a:p>
+        </p:txBody>
       </p:sp>
       <p:sp>
         <p:nvSpPr>
@@ -6384,6 +7398,13 @@
             <a:prstDash val="solid"/>
           </a:ln>
         </p:spPr>
+        <p:txBody>
+          <a:bodyPr/>
+          <a:lstStyle/>
+          <a:p>
+            <a:endParaRPr lang="en-US"/>
+          </a:p>
+        </p:txBody>
       </p:sp>
       <p:sp>
         <p:nvSpPr>
@@ -6406,7 +7427,7 @@
           <a:bodyPr wrap="square" lIns="0" tIns="0" rIns="0" bIns="0" rtlCol="0" anchor="ctr"/>
           <a:lstStyle/>
           <a:p>
-            <a:pPr algn="ctr" indent="0" marL="0">
+            <a:pPr marL="0" indent="0" algn="ctr">
               <a:buNone/>
             </a:pPr>
             <a:r>
@@ -6559,7 +7580,7 @@
 </p:sld>
 </file>
 
-<file path=ppt/slides/slide15.xml><?xml version="1.0" encoding="utf-8"?>
+<file path=ppt/slides/slide16.xml><?xml version="1.0" encoding="utf-8"?>
 <p:sld xmlns:a="http://schemas.openxmlformats.org/drawingml/2006/main" xmlns:r="http://schemas.openxmlformats.org/officeDocument/2006/relationships" xmlns:p="http://schemas.openxmlformats.org/presentationml/2006/main">
   <p:cSld name="Slide 15">
     <p:bg>
@@ -6567,6 +7588,7 @@
         <a:solidFill>
           <a:srgbClr val="1A1A1A"/>
         </a:solidFill>
+        <a:effectLst/>
       </p:bgPr>
     </p:bg>
     <p:spTree>
@@ -6607,6 +7629,13 @@
             <a:prstDash val="solid"/>
           </a:ln>
         </p:spPr>
+        <p:txBody>
+          <a:bodyPr/>
+          <a:lstStyle/>
+          <a:p>
+            <a:endParaRPr lang="en-US"/>
+          </a:p>
+        </p:txBody>
       </p:sp>
       <p:sp>
         <p:nvSpPr>
@@ -6629,7 +7658,7 @@
           <a:bodyPr wrap="square" rtlCol="0" anchor="ctr"/>
           <a:lstStyle/>
           <a:p>
-            <a:pPr indent="0" marL="0">
+            <a:pPr marL="0" indent="0">
               <a:buNone/>
             </a:pPr>
             <a:r>
@@ -6665,7 +7694,7 @@
           <a:bodyPr wrap="square" rtlCol="0" anchor="t"/>
           <a:lstStyle/>
           <a:p>
-            <a:pPr indent="0" marL="0">
+            <a:pPr marL="0" indent="0">
               <a:spcAft>
                 <a:spcPts val="500"/>
               </a:spcAft>
@@ -6682,7 +7711,7 @@
             <a:endParaRPr lang="en-US" sz="1300" dirty="0"/>
           </a:p>
           <a:p>
-            <a:pPr indent="0" marL="0">
+            <a:pPr marL="0" indent="0">
               <a:spcAft>
                 <a:spcPts val="500"/>
               </a:spcAft>
@@ -6699,7 +7728,7 @@
             <a:endParaRPr lang="en-US" sz="1300" dirty="0"/>
           </a:p>
           <a:p>
-            <a:pPr indent="0" marL="0">
+            <a:pPr marL="0" indent="0">
               <a:spcAft>
                 <a:spcPts val="500"/>
               </a:spcAft>
@@ -6716,7 +7745,7 @@
             <a:endParaRPr lang="en-US" sz="1300" dirty="0"/>
           </a:p>
           <a:p>
-            <a:pPr indent="0" marL="0">
+            <a:pPr marL="0" indent="0">
               <a:spcAft>
                 <a:spcPts val="500"/>
               </a:spcAft>
@@ -6733,7 +7762,7 @@
             <a:endParaRPr lang="en-US" sz="1300" dirty="0"/>
           </a:p>
           <a:p>
-            <a:pPr indent="0" marL="0">
+            <a:pPr marL="0" indent="0">
               <a:spcAft>
                 <a:spcPts val="500"/>
               </a:spcAft>
@@ -6750,7 +7779,7 @@
             <a:endParaRPr lang="en-US" sz="1300" dirty="0"/>
           </a:p>
           <a:p>
-            <a:pPr indent="0" marL="0">
+            <a:pPr marL="0" indent="0">
               <a:spcAft>
                 <a:spcPts val="500"/>
               </a:spcAft>
@@ -6767,7 +7796,7 @@
             <a:endParaRPr lang="en-US" sz="1300" dirty="0"/>
           </a:p>
           <a:p>
-            <a:pPr indent="0" marL="0">
+            <a:pPr marL="0" indent="0">
               <a:spcAft>
                 <a:spcPts val="500"/>
               </a:spcAft>
@@ -6784,7 +7813,7 @@
             <a:endParaRPr lang="en-US" sz="1300" dirty="0"/>
           </a:p>
           <a:p>
-            <a:pPr indent="0" marL="0">
+            <a:pPr marL="0" indent="0">
               <a:spcAft>
                 <a:spcPts val="500"/>
               </a:spcAft>
@@ -6801,7 +7830,7 @@
             <a:endParaRPr lang="en-US" sz="1300" dirty="0"/>
           </a:p>
           <a:p>
-            <a:pPr indent="0" marL="0">
+            <a:pPr marL="0" indent="0">
               <a:spcAft>
                 <a:spcPts val="500"/>
               </a:spcAft>
@@ -6818,7 +7847,7 @@
             <a:endParaRPr lang="en-US" sz="1300" dirty="0"/>
           </a:p>
           <a:p>
-            <a:pPr indent="0" marL="0">
+            <a:pPr marL="0" indent="0">
               <a:spcAft>
                 <a:spcPts val="500"/>
               </a:spcAft>
@@ -6857,7 +7886,7 @@
           <a:bodyPr wrap="square" rtlCol="0" anchor="ctr"/>
           <a:lstStyle/>
           <a:p>
-            <a:pPr indent="0" marL="0">
+            <a:pPr marL="0" indent="0">
               <a:buNone/>
             </a:pPr>
             <a:r>
@@ -6874,14 +7903,14 @@
       </p:sp>
       <p:pic>
         <p:nvPicPr>
-          <p:cNvPr id="6" name="Image 0" descr="preencoded.png">    </p:cNvPr>
+          <p:cNvPr id="6" name="Image 0" descr="preencoded.png"/>
           <p:cNvPicPr>
             <a:picLocks noChangeAspect="1"/>
           </p:cNvPicPr>
           <p:nvPr/>
         </p:nvPicPr>
         <p:blipFill>
-          <a:blip r:embed="rId1"/>
+          <a:blip r:embed="rId3"/>
           <a:stretch>
             <a:fillRect/>
           </a:stretch>
@@ -6917,7 +7946,7 @@
           <a:bodyPr wrap="square" rtlCol="0" anchor="ctr"/>
           <a:lstStyle/>
           <a:p>
-            <a:pPr algn="ctr" indent="0" marL="0">
+            <a:pPr marL="0" indent="0" algn="ctr">
               <a:buNone/>
             </a:pPr>
             <a:r>
@@ -6953,7 +7982,7 @@
           <a:bodyPr wrap="square" rtlCol="0" anchor="ctr"/>
           <a:lstStyle/>
           <a:p>
-            <a:pPr indent="0" marL="0">
+            <a:pPr marL="0" indent="0">
               <a:buNone/>
             </a:pPr>
             <a:r>
@@ -6984,6 +8013,7 @@
         <a:solidFill>
           <a:srgbClr val="F5F5F5"/>
         </a:solidFill>
+        <a:effectLst/>
       </p:bgPr>
     </p:bg>
     <p:spTree>
@@ -7024,6 +8054,13 @@
             <a:prstDash val="solid"/>
           </a:ln>
         </p:spPr>
+        <p:txBody>
+          <a:bodyPr/>
+          <a:lstStyle/>
+          <a:p>
+            <a:endParaRPr lang="en-US"/>
+          </a:p>
+        </p:txBody>
       </p:sp>
       <p:sp>
         <p:nvSpPr>
@@ -7046,7 +8083,7 @@
           <a:bodyPr wrap="square" lIns="0" tIns="0" rIns="0" bIns="0" rtlCol="0" anchor="ctr"/>
           <a:lstStyle/>
           <a:p>
-            <a:pPr indent="0" marL="0">
+            <a:pPr marL="0" indent="0">
               <a:buNone/>
             </a:pPr>
             <a:r>
@@ -7156,13 +8193,20 @@
           </a:solidFill>
           <a:ln/>
           <a:effectLst>
-            <a:outerShdw sx="100000" sy="100000" kx="0" ky="0" algn="bl" rotWithShape="0" blurRad="76200" dist="25400" dir="8100000">
+            <a:outerShdw blurRad="76200" dist="25400" dir="8100000" algn="bl" rotWithShape="0">
               <a:srgbClr val="000000">
                 <a:alpha val="10000"/>
               </a:srgbClr>
             </a:outerShdw>
           </a:effectLst>
         </p:spPr>
+        <p:txBody>
+          <a:bodyPr/>
+          <a:lstStyle/>
+          <a:p>
+            <a:endParaRPr lang="en-US"/>
+          </a:p>
+        </p:txBody>
       </p:sp>
       <p:sp>
         <p:nvSpPr>
@@ -7188,6 +8232,13 @@
             <a:prstDash val="solid"/>
           </a:ln>
         </p:spPr>
+        <p:txBody>
+          <a:bodyPr/>
+          <a:lstStyle/>
+          <a:p>
+            <a:endParaRPr lang="en-US"/>
+          </a:p>
+        </p:txBody>
       </p:sp>
       <p:sp>
         <p:nvSpPr>
@@ -7210,7 +8261,7 @@
           <a:bodyPr wrap="square" lIns="0" tIns="0" rIns="0" bIns="0" rtlCol="0" anchor="ctr"/>
           <a:lstStyle/>
           <a:p>
-            <a:pPr algn="ctr" indent="0" marL="0">
+            <a:pPr marL="0" indent="0" algn="ctr">
               <a:buNone/>
             </a:pPr>
             <a:r>
@@ -7320,24 +8371,31 @@
           </a:solidFill>
           <a:ln/>
           <a:effectLst>
-            <a:outerShdw sx="100000" sy="100000" kx="0" ky="0" algn="bl" rotWithShape="0" blurRad="127000" dist="38100" dir="8100000">
+            <a:outerShdw blurRad="127000" dist="38100" dir="8100000" algn="bl" rotWithShape="0">
               <a:srgbClr val="000000">
                 <a:alpha val="20000"/>
               </a:srgbClr>
             </a:outerShdw>
           </a:effectLst>
         </p:spPr>
+        <p:txBody>
+          <a:bodyPr/>
+          <a:lstStyle/>
+          <a:p>
+            <a:endParaRPr lang="en-US"/>
+          </a:p>
+        </p:txBody>
       </p:sp>
       <p:pic>
         <p:nvPicPr>
-          <p:cNvPr id="10" name="Image 0" descr="preencoded.png">    </p:cNvPr>
+          <p:cNvPr id="10" name="Image 0" descr="preencoded.png"/>
           <p:cNvPicPr>
             <a:picLocks noChangeAspect="1"/>
           </p:cNvPicPr>
           <p:nvPr/>
         </p:nvPicPr>
         <p:blipFill>
-          <a:blip r:embed="rId1"/>
+          <a:blip r:embed="rId3"/>
           <a:stretch>
             <a:fillRect/>
           </a:stretch>
@@ -7373,7 +8431,7 @@
           <a:bodyPr wrap="square" rtlCol="0" anchor="ctr"/>
           <a:lstStyle/>
           <a:p>
-            <a:pPr algn="ctr" indent="0" marL="0">
+            <a:pPr marL="0" indent="0" algn="ctr">
               <a:buNone/>
             </a:pPr>
             <a:r>
@@ -7387,7 +8445,7 @@
             <a:endParaRPr lang="en-US" sz="1800" dirty="0"/>
           </a:p>
           <a:p>
-            <a:pPr algn="ctr" indent="0" marL="0">
+            <a:pPr marL="0" indent="0" algn="ctr">
               <a:buNone/>
             </a:pPr>
             <a:r>
@@ -7412,12 +8470,1060 @@
 
 <file path=ppt/slides/slide3.xml><?xml version="1.0" encoding="utf-8"?>
 <p:sld xmlns:a="http://schemas.openxmlformats.org/drawingml/2006/main" xmlns:r="http://schemas.openxmlformats.org/officeDocument/2006/relationships" xmlns:p="http://schemas.openxmlformats.org/presentationml/2006/main">
+  <p:cSld>
+    <p:spTree>
+      <p:nvGrpSpPr>
+        <p:cNvPr id="1" name="">
+          <a:extLst>
+            <a:ext uri="{FF2B5EF4-FFF2-40B4-BE49-F238E27FC236}">
+              <a16:creationId xmlns:a16="http://schemas.microsoft.com/office/drawing/2014/main" id="{724C1F87-55AF-0A09-B68D-37A44F88357C}"/>
+            </a:ext>
+          </a:extLst>
+        </p:cNvPr>
+        <p:cNvGrpSpPr/>
+        <p:nvPr/>
+      </p:nvGrpSpPr>
+      <p:grpSpPr>
+        <a:xfrm>
+          <a:off x="0" y="0"/>
+          <a:ext cx="0" cy="0"/>
+          <a:chOff x="0" y="0"/>
+          <a:chExt cx="0" cy="0"/>
+        </a:xfrm>
+      </p:grpSpPr>
+      <p:sp>
+        <p:nvSpPr>
+          <p:cNvPr id="2" name="Shape 0">
+            <a:extLst>
+              <a:ext uri="{FF2B5EF4-FFF2-40B4-BE49-F238E27FC236}">
+                <a16:creationId xmlns:a16="http://schemas.microsoft.com/office/drawing/2014/main" id="{3CAC456D-D7B4-A916-E370-07D9438B0F42}"/>
+              </a:ext>
+            </a:extLst>
+          </p:cNvPr>
+          <p:cNvSpPr/>
+          <p:nvPr/>
+        </p:nvSpPr>
+        <p:spPr>
+          <a:xfrm>
+            <a:off x="0" y="0"/>
+            <a:ext cx="9144000" cy="658368"/>
+          </a:xfrm>
+          <a:prstGeom prst="rect">
+            <a:avLst/>
+          </a:prstGeom>
+          <a:solidFill>
+            <a:srgbClr val="CC0000"/>
+          </a:solidFill>
+          <a:ln w="12700">
+            <a:solidFill>
+              <a:srgbClr val="CC0000"/>
+            </a:solidFill>
+            <a:prstDash val="solid"/>
+          </a:ln>
+        </p:spPr>
+        <p:txBody>
+          <a:bodyPr/>
+          <a:lstStyle/>
+          <a:p>
+            <a:endParaRPr lang="en-US"/>
+          </a:p>
+        </p:txBody>
+      </p:sp>
+      <p:sp>
+        <p:nvSpPr>
+          <p:cNvPr id="3" name="Text 1">
+            <a:extLst>
+              <a:ext uri="{FF2B5EF4-FFF2-40B4-BE49-F238E27FC236}">
+                <a16:creationId xmlns:a16="http://schemas.microsoft.com/office/drawing/2014/main" id="{6368C87F-8E08-122C-8D65-D448CA2F6541}"/>
+              </a:ext>
+            </a:extLst>
+          </p:cNvPr>
+          <p:cNvSpPr/>
+          <p:nvPr/>
+        </p:nvSpPr>
+        <p:spPr>
+          <a:xfrm>
+            <a:off x="320040" y="0"/>
+            <a:ext cx="8503920" cy="658368"/>
+          </a:xfrm>
+          <a:prstGeom prst="rect">
+            <a:avLst/>
+          </a:prstGeom>
+          <a:noFill/>
+          <a:ln/>
+        </p:spPr>
+        <p:txBody>
+          <a:bodyPr wrap="square" lIns="0" tIns="0" rIns="0" bIns="0" rtlCol="0" anchor="ctr"/>
+          <a:lstStyle/>
+          <a:p>
+            <a:pPr marL="0" indent="0">
+              <a:buNone/>
+            </a:pPr>
+            <a:r>
+              <a:rPr lang="en-US" sz="2000" b="1" dirty="0" err="1">
+                <a:solidFill>
+                  <a:srgbClr val="FFFFFF"/>
+                </a:solidFill>
+              </a:rPr>
+              <a:t>Što</a:t>
+            </a:r>
+            <a:r>
+              <a:rPr lang="en-US" sz="2000" b="1" dirty="0">
+                <a:solidFill>
+                  <a:srgbClr val="FFFFFF"/>
+                </a:solidFill>
+              </a:rPr>
+              <a:t> je </a:t>
+            </a:r>
+            <a:r>
+              <a:rPr lang="en-US" sz="2000" b="1" dirty="0" err="1">
+                <a:solidFill>
+                  <a:srgbClr val="FFFFFF"/>
+                </a:solidFill>
+              </a:rPr>
+              <a:t>kibernetička</a:t>
+            </a:r>
+            <a:r>
+              <a:rPr lang="en-US" sz="2000" b="1" dirty="0">
+                <a:solidFill>
+                  <a:srgbClr val="FFFFFF"/>
+                </a:solidFill>
+              </a:rPr>
+              <a:t> </a:t>
+            </a:r>
+            <a:r>
+              <a:rPr lang="en-US" sz="2000" b="1" dirty="0" err="1">
+                <a:solidFill>
+                  <a:srgbClr val="FFFFFF"/>
+                </a:solidFill>
+              </a:rPr>
+              <a:t>sigurnost</a:t>
+            </a:r>
+            <a:r>
+              <a:rPr lang="en-US" sz="2000" b="1" dirty="0">
+                <a:solidFill>
+                  <a:srgbClr val="FFFFFF"/>
+                </a:solidFill>
+              </a:rPr>
+              <a:t>?</a:t>
+            </a:r>
+            <a:endParaRPr lang="en-US" sz="2000" dirty="0"/>
+          </a:p>
+        </p:txBody>
+      </p:sp>
+      <p:sp>
+        <p:nvSpPr>
+          <p:cNvPr id="4" name="Text 2">
+            <a:extLst>
+              <a:ext uri="{FF2B5EF4-FFF2-40B4-BE49-F238E27FC236}">
+                <a16:creationId xmlns:a16="http://schemas.microsoft.com/office/drawing/2014/main" id="{2EBD2DCE-D7DF-B126-DE05-0947E171AFDA}"/>
+              </a:ext>
+            </a:extLst>
+          </p:cNvPr>
+          <p:cNvSpPr/>
+          <p:nvPr/>
+        </p:nvSpPr>
+        <p:spPr>
+          <a:xfrm>
+            <a:off x="365759" y="804672"/>
+            <a:ext cx="8311957" cy="2286000"/>
+          </a:xfrm>
+          <a:prstGeom prst="rect">
+            <a:avLst/>
+          </a:prstGeom>
+          <a:noFill/>
+          <a:ln/>
+        </p:spPr>
+        <p:txBody>
+          <a:bodyPr wrap="square" rtlCol="0" anchor="t"/>
+          <a:lstStyle/>
+          <a:p>
+            <a:pPr marL="342900" indent="-342900">
+              <a:spcAft>
+                <a:spcPts val="1000"/>
+              </a:spcAft>
+              <a:buSzPct val="100000"/>
+              <a:buChar char="•"/>
+            </a:pPr>
+            <a:r>
+              <a:rPr lang="en-US" sz="1400" dirty="0" err="1">
+                <a:solidFill>
+                  <a:srgbClr val="444444"/>
+                </a:solidFill>
+              </a:rPr>
+              <a:t>Kibernetička</a:t>
+            </a:r>
+            <a:r>
+              <a:rPr lang="en-US" sz="1400" dirty="0">
+                <a:solidFill>
+                  <a:srgbClr val="444444"/>
+                </a:solidFill>
+              </a:rPr>
+              <a:t> </a:t>
+            </a:r>
+            <a:r>
+              <a:rPr lang="en-US" sz="1400" dirty="0" err="1">
+                <a:solidFill>
+                  <a:srgbClr val="444444"/>
+                </a:solidFill>
+              </a:rPr>
+              <a:t>sigurnost</a:t>
+            </a:r>
+            <a:r>
+              <a:rPr lang="en-US" sz="1400" dirty="0">
+                <a:solidFill>
+                  <a:srgbClr val="444444"/>
+                </a:solidFill>
+              </a:rPr>
+              <a:t> (</a:t>
+            </a:r>
+            <a:r>
+              <a:rPr lang="en-US" sz="1400" dirty="0" err="1">
+                <a:solidFill>
+                  <a:srgbClr val="444444"/>
+                </a:solidFill>
+              </a:rPr>
+              <a:t>ili</a:t>
+            </a:r>
+            <a:r>
+              <a:rPr lang="en-US" sz="1400" dirty="0">
+                <a:solidFill>
+                  <a:srgbClr val="444444"/>
+                </a:solidFill>
+              </a:rPr>
+              <a:t> </a:t>
+            </a:r>
+            <a:r>
+              <a:rPr lang="en-US" sz="1400" dirty="0" err="1">
+                <a:solidFill>
+                  <a:srgbClr val="444444"/>
+                </a:solidFill>
+              </a:rPr>
+              <a:t>sigurnost</a:t>
+            </a:r>
+            <a:r>
+              <a:rPr lang="en-US" sz="1400" dirty="0">
+                <a:solidFill>
+                  <a:srgbClr val="444444"/>
+                </a:solidFill>
+              </a:rPr>
+              <a:t> </a:t>
+            </a:r>
+            <a:r>
+              <a:rPr lang="en-US" sz="1400" dirty="0" err="1">
+                <a:solidFill>
+                  <a:srgbClr val="444444"/>
+                </a:solidFill>
+              </a:rPr>
+              <a:t>na</a:t>
+            </a:r>
+            <a:r>
+              <a:rPr lang="en-US" sz="1400" dirty="0">
+                <a:solidFill>
+                  <a:srgbClr val="444444"/>
+                </a:solidFill>
+              </a:rPr>
+              <a:t> </a:t>
+            </a:r>
+            <a:r>
+              <a:rPr lang="en-US" sz="1400" dirty="0" err="1">
+                <a:solidFill>
+                  <a:srgbClr val="444444"/>
+                </a:solidFill>
+              </a:rPr>
+              <a:t>internetu</a:t>
+            </a:r>
+            <a:r>
+              <a:rPr lang="en-US" sz="1400" dirty="0">
+                <a:solidFill>
+                  <a:srgbClr val="444444"/>
+                </a:solidFill>
+              </a:rPr>
+              <a:t>) </a:t>
+            </a:r>
+            <a:r>
+              <a:rPr lang="en-US" sz="1400" dirty="0" err="1">
+                <a:solidFill>
+                  <a:srgbClr val="444444"/>
+                </a:solidFill>
+              </a:rPr>
+              <a:t>skup</a:t>
+            </a:r>
+            <a:r>
+              <a:rPr lang="en-US" sz="1400" dirty="0">
+                <a:solidFill>
+                  <a:srgbClr val="444444"/>
+                </a:solidFill>
+              </a:rPr>
+              <a:t> je </a:t>
+            </a:r>
+            <a:r>
+              <a:rPr lang="en-US" sz="1400" dirty="0" err="1">
+                <a:solidFill>
+                  <a:srgbClr val="444444"/>
+                </a:solidFill>
+              </a:rPr>
+              <a:t>znanja</a:t>
+            </a:r>
+            <a:r>
+              <a:rPr lang="en-US" sz="1400" dirty="0">
+                <a:solidFill>
+                  <a:srgbClr val="444444"/>
+                </a:solidFill>
+              </a:rPr>
+              <a:t>, </a:t>
+            </a:r>
+            <a:r>
+              <a:rPr lang="en-US" sz="1400" dirty="0" err="1">
+                <a:solidFill>
+                  <a:srgbClr val="444444"/>
+                </a:solidFill>
+              </a:rPr>
+              <a:t>navika</a:t>
+            </a:r>
+            <a:r>
+              <a:rPr lang="en-US" sz="1400" dirty="0">
+                <a:solidFill>
+                  <a:srgbClr val="444444"/>
+                </a:solidFill>
+              </a:rPr>
+              <a:t> </a:t>
+            </a:r>
+            <a:r>
+              <a:rPr lang="en-US" sz="1400" dirty="0" err="1">
+                <a:solidFill>
+                  <a:srgbClr val="444444"/>
+                </a:solidFill>
+              </a:rPr>
+              <a:t>i</a:t>
+            </a:r>
+            <a:r>
+              <a:rPr lang="en-US" sz="1400" dirty="0">
+                <a:solidFill>
+                  <a:srgbClr val="444444"/>
+                </a:solidFill>
+              </a:rPr>
+              <a:t> alata </a:t>
+            </a:r>
+            <a:r>
+              <a:rPr lang="en-US" sz="1400" dirty="0" err="1">
+                <a:solidFill>
+                  <a:srgbClr val="444444"/>
+                </a:solidFill>
+              </a:rPr>
+              <a:t>kojima</a:t>
+            </a:r>
+            <a:r>
+              <a:rPr lang="en-US" sz="1400" dirty="0">
+                <a:solidFill>
+                  <a:srgbClr val="444444"/>
+                </a:solidFill>
+              </a:rPr>
+              <a:t> se </a:t>
+            </a:r>
+            <a:r>
+              <a:rPr lang="en-US" sz="1400" dirty="0" err="1">
+                <a:solidFill>
+                  <a:srgbClr val="444444"/>
+                </a:solidFill>
+              </a:rPr>
+              <a:t>štitimo</a:t>
+            </a:r>
+            <a:r>
+              <a:rPr lang="en-US" sz="1400" dirty="0">
+                <a:solidFill>
+                  <a:srgbClr val="444444"/>
+                </a:solidFill>
+              </a:rPr>
+              <a:t> od </a:t>
+            </a:r>
+            <a:r>
+              <a:rPr lang="en-US" sz="1400" dirty="0" err="1">
+                <a:solidFill>
+                  <a:srgbClr val="444444"/>
+                </a:solidFill>
+              </a:rPr>
+              <a:t>neovlaštenog</a:t>
+            </a:r>
+            <a:r>
+              <a:rPr lang="en-US" sz="1400" dirty="0">
+                <a:solidFill>
+                  <a:srgbClr val="444444"/>
+                </a:solidFill>
+              </a:rPr>
+              <a:t> </a:t>
+            </a:r>
+            <a:r>
+              <a:rPr lang="en-US" sz="1400" dirty="0" err="1">
+                <a:solidFill>
+                  <a:srgbClr val="444444"/>
+                </a:solidFill>
+              </a:rPr>
+              <a:t>pristupa</a:t>
+            </a:r>
+            <a:r>
+              <a:rPr lang="en-US" sz="1400" dirty="0">
+                <a:solidFill>
+                  <a:srgbClr val="444444"/>
+                </a:solidFill>
+              </a:rPr>
+              <a:t> </a:t>
+            </a:r>
+            <a:r>
+              <a:rPr lang="en-US" sz="1400" dirty="0" err="1">
+                <a:solidFill>
+                  <a:srgbClr val="444444"/>
+                </a:solidFill>
+              </a:rPr>
+              <a:t>našim</a:t>
+            </a:r>
+            <a:r>
+              <a:rPr lang="en-US" sz="1400" dirty="0">
+                <a:solidFill>
+                  <a:srgbClr val="444444"/>
+                </a:solidFill>
+              </a:rPr>
+              <a:t> </a:t>
+            </a:r>
+            <a:r>
+              <a:rPr lang="en-US" sz="1400" dirty="0" err="1">
+                <a:solidFill>
+                  <a:srgbClr val="444444"/>
+                </a:solidFill>
+              </a:rPr>
+              <a:t>podacima</a:t>
+            </a:r>
+            <a:r>
+              <a:rPr lang="en-US" sz="1400" dirty="0">
+                <a:solidFill>
+                  <a:srgbClr val="444444"/>
+                </a:solidFill>
+              </a:rPr>
+              <a:t>, </a:t>
+            </a:r>
+            <a:r>
+              <a:rPr lang="en-US" sz="1400" dirty="0" err="1">
+                <a:solidFill>
+                  <a:srgbClr val="444444"/>
+                </a:solidFill>
+              </a:rPr>
+              <a:t>uređajima</a:t>
+            </a:r>
+            <a:r>
+              <a:rPr lang="en-US" sz="1400" dirty="0">
+                <a:solidFill>
+                  <a:srgbClr val="444444"/>
+                </a:solidFill>
+              </a:rPr>
+              <a:t> </a:t>
+            </a:r>
+            <a:r>
+              <a:rPr lang="en-US" sz="1400" dirty="0" err="1">
+                <a:solidFill>
+                  <a:srgbClr val="444444"/>
+                </a:solidFill>
+              </a:rPr>
+              <a:t>i</a:t>
+            </a:r>
+            <a:r>
+              <a:rPr lang="en-US" sz="1400" dirty="0">
+                <a:solidFill>
+                  <a:srgbClr val="444444"/>
+                </a:solidFill>
+              </a:rPr>
+              <a:t> </a:t>
+            </a:r>
+            <a:r>
+              <a:rPr lang="en-US" sz="1400" dirty="0" err="1">
+                <a:solidFill>
+                  <a:srgbClr val="444444"/>
+                </a:solidFill>
+              </a:rPr>
+              <a:t>novcu</a:t>
+            </a:r>
+            <a:r>
+              <a:rPr lang="en-US" sz="1400" dirty="0">
+                <a:solidFill>
+                  <a:srgbClr val="444444"/>
+                </a:solidFill>
+              </a:rPr>
+              <a:t>.</a:t>
+            </a:r>
+          </a:p>
+          <a:p>
+            <a:pPr marL="342900" indent="-342900">
+              <a:spcAft>
+                <a:spcPts val="1000"/>
+              </a:spcAft>
+              <a:buSzPct val="100000"/>
+              <a:buChar char="•"/>
+            </a:pPr>
+            <a:r>
+              <a:rPr lang="en-US" sz="1400" dirty="0" err="1">
+                <a:solidFill>
+                  <a:srgbClr val="444444"/>
+                </a:solidFill>
+              </a:rPr>
+              <a:t>Kriminalci</a:t>
+            </a:r>
+            <a:r>
+              <a:rPr lang="en-US" sz="1400" dirty="0">
+                <a:solidFill>
+                  <a:srgbClr val="444444"/>
+                </a:solidFill>
+              </a:rPr>
+              <a:t> </a:t>
+            </a:r>
+            <a:r>
+              <a:rPr lang="en-US" sz="1400" dirty="0" err="1">
+                <a:solidFill>
+                  <a:srgbClr val="444444"/>
+                </a:solidFill>
+              </a:rPr>
+              <a:t>koriste</a:t>
+            </a:r>
+            <a:r>
+              <a:rPr lang="en-US" sz="1400" dirty="0">
+                <a:solidFill>
+                  <a:srgbClr val="444444"/>
+                </a:solidFill>
+              </a:rPr>
+              <a:t> internet </a:t>
+            </a:r>
+            <a:r>
+              <a:rPr lang="en-US" sz="1400" dirty="0" err="1">
+                <a:solidFill>
+                  <a:srgbClr val="444444"/>
+                </a:solidFill>
+              </a:rPr>
+              <a:t>jednako</a:t>
+            </a:r>
+            <a:r>
+              <a:rPr lang="en-US" sz="1400" dirty="0">
+                <a:solidFill>
+                  <a:srgbClr val="444444"/>
+                </a:solidFill>
+              </a:rPr>
+              <a:t> </a:t>
+            </a:r>
+            <a:r>
+              <a:rPr lang="en-US" sz="1400" dirty="0" err="1">
+                <a:solidFill>
+                  <a:srgbClr val="444444"/>
+                </a:solidFill>
+              </a:rPr>
+              <a:t>kao</a:t>
+            </a:r>
+            <a:r>
+              <a:rPr lang="en-US" sz="1400" dirty="0">
+                <a:solidFill>
+                  <a:srgbClr val="444444"/>
+                </a:solidFill>
+              </a:rPr>
+              <a:t> </a:t>
+            </a:r>
+            <a:r>
+              <a:rPr lang="en-US" sz="1400" dirty="0" err="1">
+                <a:solidFill>
+                  <a:srgbClr val="444444"/>
+                </a:solidFill>
+              </a:rPr>
+              <a:t>što</a:t>
+            </a:r>
+            <a:r>
+              <a:rPr lang="en-US" sz="1400" dirty="0">
+                <a:solidFill>
+                  <a:srgbClr val="444444"/>
+                </a:solidFill>
+              </a:rPr>
+              <a:t> </a:t>
+            </a:r>
+            <a:r>
+              <a:rPr lang="en-US" sz="1400" dirty="0" err="1">
+                <a:solidFill>
+                  <a:srgbClr val="444444"/>
+                </a:solidFill>
+              </a:rPr>
+              <a:t>su</a:t>
+            </a:r>
+            <a:r>
+              <a:rPr lang="en-US" sz="1400" dirty="0">
+                <a:solidFill>
+                  <a:srgbClr val="444444"/>
+                </a:solidFill>
+              </a:rPr>
+              <a:t> </a:t>
+            </a:r>
+            <a:r>
+              <a:rPr lang="en-US" sz="1400" dirty="0" err="1">
+                <a:solidFill>
+                  <a:srgbClr val="444444"/>
+                </a:solidFill>
+              </a:rPr>
+              <a:t>nekad</a:t>
+            </a:r>
+            <a:r>
+              <a:rPr lang="en-US" sz="1400" dirty="0">
+                <a:solidFill>
+                  <a:srgbClr val="444444"/>
+                </a:solidFill>
+              </a:rPr>
+              <a:t> </a:t>
+            </a:r>
+            <a:r>
+              <a:rPr lang="en-US" sz="1400" dirty="0" err="1">
+                <a:solidFill>
+                  <a:srgbClr val="444444"/>
+                </a:solidFill>
+              </a:rPr>
+              <a:t>koristili</a:t>
+            </a:r>
+            <a:r>
+              <a:rPr lang="en-US" sz="1400" dirty="0">
+                <a:solidFill>
+                  <a:srgbClr val="444444"/>
+                </a:solidFill>
+              </a:rPr>
+              <a:t> </a:t>
+            </a:r>
+            <a:r>
+              <a:rPr lang="en-US" sz="1400" dirty="0" err="1">
+                <a:solidFill>
+                  <a:srgbClr val="444444"/>
+                </a:solidFill>
+              </a:rPr>
+              <a:t>telefon</a:t>
+            </a:r>
+            <a:r>
+              <a:rPr lang="en-US" sz="1400" dirty="0">
+                <a:solidFill>
+                  <a:srgbClr val="444444"/>
+                </a:solidFill>
+              </a:rPr>
+              <a:t> </a:t>
+            </a:r>
+            <a:r>
+              <a:rPr lang="en-US" sz="1400" dirty="0" err="1">
+                <a:solidFill>
+                  <a:srgbClr val="444444"/>
+                </a:solidFill>
+              </a:rPr>
+              <a:t>ili</a:t>
+            </a:r>
+            <a:r>
+              <a:rPr lang="en-US" sz="1400" dirty="0">
+                <a:solidFill>
+                  <a:srgbClr val="444444"/>
+                </a:solidFill>
+              </a:rPr>
+              <a:t> </a:t>
+            </a:r>
+            <a:r>
+              <a:rPr lang="en-US" sz="1400" dirty="0" err="1">
+                <a:solidFill>
+                  <a:srgbClr val="444444"/>
+                </a:solidFill>
+              </a:rPr>
+              <a:t>poštu</a:t>
+            </a:r>
+            <a:r>
+              <a:rPr lang="en-US" sz="1400" dirty="0">
+                <a:solidFill>
+                  <a:srgbClr val="444444"/>
+                </a:solidFill>
+              </a:rPr>
+              <a:t> — </a:t>
+            </a:r>
+            <a:r>
+              <a:rPr lang="en-US" sz="1400" dirty="0" err="1">
+                <a:solidFill>
+                  <a:srgbClr val="444444"/>
+                </a:solidFill>
+              </a:rPr>
+              <a:t>samo</a:t>
+            </a:r>
+            <a:r>
+              <a:rPr lang="en-US" sz="1400" dirty="0">
+                <a:solidFill>
+                  <a:srgbClr val="444444"/>
+                </a:solidFill>
+              </a:rPr>
+              <a:t> </a:t>
+            </a:r>
+            <a:r>
+              <a:rPr lang="en-US" sz="1400" dirty="0" err="1">
+                <a:solidFill>
+                  <a:srgbClr val="444444"/>
+                </a:solidFill>
+              </a:rPr>
+              <a:t>su</a:t>
+            </a:r>
+            <a:r>
+              <a:rPr lang="en-US" sz="1400" dirty="0">
+                <a:solidFill>
+                  <a:srgbClr val="444444"/>
+                </a:solidFill>
+              </a:rPr>
+              <a:t> </a:t>
+            </a:r>
+            <a:r>
+              <a:rPr lang="en-US" sz="1400" dirty="0" err="1">
+                <a:solidFill>
+                  <a:srgbClr val="444444"/>
+                </a:solidFill>
+              </a:rPr>
+              <a:t>brži</a:t>
+            </a:r>
+            <a:r>
+              <a:rPr lang="en-US" sz="1400" dirty="0">
+                <a:solidFill>
+                  <a:srgbClr val="444444"/>
+                </a:solidFill>
+              </a:rPr>
+              <a:t> </a:t>
+            </a:r>
+            <a:r>
+              <a:rPr lang="en-US" sz="1400" dirty="0" err="1">
+                <a:solidFill>
+                  <a:srgbClr val="444444"/>
+                </a:solidFill>
+              </a:rPr>
+              <a:t>i</a:t>
+            </a:r>
+            <a:r>
+              <a:rPr lang="en-US" sz="1400" dirty="0">
+                <a:solidFill>
+                  <a:srgbClr val="444444"/>
+                </a:solidFill>
+              </a:rPr>
+              <a:t> </a:t>
+            </a:r>
+            <a:r>
+              <a:rPr lang="en-US" sz="1400" dirty="0" err="1">
+                <a:solidFill>
+                  <a:srgbClr val="444444"/>
+                </a:solidFill>
+              </a:rPr>
+              <a:t>anonimni</a:t>
+            </a:r>
+            <a:r>
+              <a:rPr lang="en-US" sz="1400" dirty="0">
+                <a:solidFill>
+                  <a:srgbClr val="444444"/>
+                </a:solidFill>
+              </a:rPr>
+              <a:t>.</a:t>
+            </a:r>
+            <a:endParaRPr lang="en-US" sz="1400" dirty="0"/>
+          </a:p>
+          <a:p>
+            <a:pPr marL="342900" indent="-342900">
+              <a:spcAft>
+                <a:spcPts val="1000"/>
+              </a:spcAft>
+              <a:buSzPct val="100000"/>
+              <a:buChar char="•"/>
+            </a:pPr>
+            <a:r>
+              <a:rPr lang="en-US" sz="1400" dirty="0" err="1">
+                <a:solidFill>
+                  <a:srgbClr val="444444"/>
+                </a:solidFill>
+              </a:rPr>
+              <a:t>Ključna</a:t>
+            </a:r>
+            <a:r>
+              <a:rPr lang="en-US" sz="1400" dirty="0">
+                <a:solidFill>
+                  <a:srgbClr val="444444"/>
+                </a:solidFill>
+              </a:rPr>
+              <a:t> poruka: nitko nije presmetan da postane žrtva. Znanje je jedina zaštita.</a:t>
+            </a:r>
+            <a:endParaRPr lang="en-US" sz="1400" dirty="0"/>
+          </a:p>
+        </p:txBody>
+      </p:sp>
+      <p:sp>
+        <p:nvSpPr>
+          <p:cNvPr id="5" name="Shape 3">
+            <a:extLst>
+              <a:ext uri="{FF2B5EF4-FFF2-40B4-BE49-F238E27FC236}">
+                <a16:creationId xmlns:a16="http://schemas.microsoft.com/office/drawing/2014/main" id="{FF1CA109-E9DB-6D83-D343-DAFB3343369E}"/>
+              </a:ext>
+            </a:extLst>
+          </p:cNvPr>
+          <p:cNvSpPr/>
+          <p:nvPr/>
+        </p:nvSpPr>
+        <p:spPr>
+          <a:xfrm>
+            <a:off x="274320" y="3154680"/>
+            <a:ext cx="5029200" cy="1737360"/>
+          </a:xfrm>
+          <a:prstGeom prst="rect">
+            <a:avLst/>
+          </a:prstGeom>
+          <a:solidFill>
+            <a:srgbClr val="FFFFFF"/>
+          </a:solidFill>
+          <a:ln/>
+          <a:effectLst>
+            <a:outerShdw blurRad="76200" dist="25400" dir="8100000" algn="bl" rotWithShape="0">
+              <a:srgbClr val="000000">
+                <a:alpha val="10000"/>
+              </a:srgbClr>
+            </a:outerShdw>
+          </a:effectLst>
+        </p:spPr>
+        <p:txBody>
+          <a:bodyPr/>
+          <a:lstStyle/>
+          <a:p>
+            <a:endParaRPr lang="en-US"/>
+          </a:p>
+        </p:txBody>
+      </p:sp>
+      <p:sp>
+        <p:nvSpPr>
+          <p:cNvPr id="6" name="Shape 4">
+            <a:extLst>
+              <a:ext uri="{FF2B5EF4-FFF2-40B4-BE49-F238E27FC236}">
+                <a16:creationId xmlns:a16="http://schemas.microsoft.com/office/drawing/2014/main" id="{4BB7CE43-D9D1-9C36-912A-D97F8246464E}"/>
+              </a:ext>
+            </a:extLst>
+          </p:cNvPr>
+          <p:cNvSpPr/>
+          <p:nvPr/>
+        </p:nvSpPr>
+        <p:spPr>
+          <a:xfrm>
+            <a:off x="274320" y="3154680"/>
+            <a:ext cx="5029200" cy="347472"/>
+          </a:xfrm>
+          <a:prstGeom prst="rect">
+            <a:avLst/>
+          </a:prstGeom>
+          <a:solidFill>
+            <a:srgbClr val="444444"/>
+          </a:solidFill>
+          <a:ln w="12700">
+            <a:solidFill>
+              <a:srgbClr val="444444"/>
+            </a:solidFill>
+            <a:prstDash val="solid"/>
+          </a:ln>
+        </p:spPr>
+        <p:txBody>
+          <a:bodyPr/>
+          <a:lstStyle/>
+          <a:p>
+            <a:endParaRPr lang="en-US"/>
+          </a:p>
+        </p:txBody>
+      </p:sp>
+      <p:sp>
+        <p:nvSpPr>
+          <p:cNvPr id="7" name="Text 5">
+            <a:extLst>
+              <a:ext uri="{FF2B5EF4-FFF2-40B4-BE49-F238E27FC236}">
+                <a16:creationId xmlns:a16="http://schemas.microsoft.com/office/drawing/2014/main" id="{2E8946B1-5FFF-08B6-865C-6AC04A0DDACB}"/>
+              </a:ext>
+            </a:extLst>
+          </p:cNvPr>
+          <p:cNvSpPr/>
+          <p:nvPr/>
+        </p:nvSpPr>
+        <p:spPr>
+          <a:xfrm>
+            <a:off x="274320" y="3154680"/>
+            <a:ext cx="5029200" cy="347472"/>
+          </a:xfrm>
+          <a:prstGeom prst="rect">
+            <a:avLst/>
+          </a:prstGeom>
+          <a:noFill/>
+          <a:ln/>
+        </p:spPr>
+        <p:txBody>
+          <a:bodyPr wrap="square" lIns="0" tIns="0" rIns="0" bIns="0" rtlCol="0" anchor="ctr"/>
+          <a:lstStyle/>
+          <a:p>
+            <a:pPr marL="0" indent="0" algn="ctr">
+              <a:buNone/>
+            </a:pPr>
+            <a:r>
+              <a:rPr lang="en-US" sz="1200" b="1" dirty="0">
+                <a:solidFill>
+                  <a:srgbClr val="FFFFFF"/>
+                </a:solidFill>
+              </a:rPr>
+              <a:t>Hrvatska 2024. — MUPRH</a:t>
+            </a:r>
+            <a:endParaRPr lang="en-US" sz="1200" dirty="0"/>
+          </a:p>
+        </p:txBody>
+      </p:sp>
+      <p:sp>
+        <p:nvSpPr>
+          <p:cNvPr id="8" name="Text 6">
+            <a:extLst>
+              <a:ext uri="{FF2B5EF4-FFF2-40B4-BE49-F238E27FC236}">
+                <a16:creationId xmlns:a16="http://schemas.microsoft.com/office/drawing/2014/main" id="{5EBD2316-BA8F-F3D5-B57D-D1C722768308}"/>
+              </a:ext>
+            </a:extLst>
+          </p:cNvPr>
+          <p:cNvSpPr/>
+          <p:nvPr/>
+        </p:nvSpPr>
+        <p:spPr>
+          <a:xfrm>
+            <a:off x="411480" y="3566160"/>
+            <a:ext cx="4754880" cy="1234440"/>
+          </a:xfrm>
+          <a:prstGeom prst="rect">
+            <a:avLst/>
+          </a:prstGeom>
+          <a:noFill/>
+          <a:ln/>
+        </p:spPr>
+        <p:txBody>
+          <a:bodyPr wrap="square" rtlCol="0" anchor="t"/>
+          <a:lstStyle/>
+          <a:p>
+            <a:pPr marL="342900" indent="-342900">
+              <a:spcAft>
+                <a:spcPts val="500"/>
+              </a:spcAft>
+              <a:buSzPct val="100000"/>
+              <a:buChar char="•"/>
+            </a:pPr>
+            <a:r>
+              <a:rPr lang="en-US" sz="1200" dirty="0">
+                <a:solidFill>
+                  <a:srgbClr val="444444"/>
+                </a:solidFill>
+              </a:rPr>
+              <a:t>2.167 kibernetičkih kaznenih djela — porast 21,7% u godinu dana</a:t>
+            </a:r>
+            <a:endParaRPr lang="en-US" sz="1200" dirty="0"/>
+          </a:p>
+          <a:p>
+            <a:pPr marL="342900" indent="-342900">
+              <a:spcAft>
+                <a:spcPts val="500"/>
+              </a:spcAft>
+              <a:buSzPct val="100000"/>
+              <a:buChar char="•"/>
+            </a:pPr>
+            <a:r>
+              <a:rPr lang="en-US" sz="1200" dirty="0">
+                <a:solidFill>
+                  <a:srgbClr val="444444"/>
+                </a:solidFill>
+              </a:rPr>
+              <a:t>Financijska šteta: s 11,1 na 17 milijuna eura u jednoj godini</a:t>
+            </a:r>
+            <a:endParaRPr lang="en-US" sz="1200" dirty="0"/>
+          </a:p>
+          <a:p>
+            <a:pPr marL="342900" indent="-342900">
+              <a:spcAft>
+                <a:spcPts val="500"/>
+              </a:spcAft>
+              <a:buSzPct val="100000"/>
+              <a:buChar char="•"/>
+            </a:pPr>
+            <a:r>
+              <a:rPr lang="en-US" sz="1200" dirty="0">
+                <a:solidFill>
+                  <a:srgbClr val="444444"/>
+                </a:solidFill>
+              </a:rPr>
+              <a:t>Splitsko-dalmatinska županija: 287 kibernetičkih kaznenih djela, od čega 256 računalnih prijevara</a:t>
+            </a:r>
+            <a:endParaRPr lang="en-US" sz="1200" dirty="0"/>
+          </a:p>
+        </p:txBody>
+      </p:sp>
+      <p:sp>
+        <p:nvSpPr>
+          <p:cNvPr id="11" name="Text 8">
+            <a:extLst>
+              <a:ext uri="{FF2B5EF4-FFF2-40B4-BE49-F238E27FC236}">
+                <a16:creationId xmlns:a16="http://schemas.microsoft.com/office/drawing/2014/main" id="{DC0A5342-5251-2A2C-A9D2-72223813D008}"/>
+              </a:ext>
+            </a:extLst>
+          </p:cNvPr>
+          <p:cNvSpPr/>
+          <p:nvPr/>
+        </p:nvSpPr>
+        <p:spPr>
+          <a:xfrm>
+            <a:off x="5715000" y="3383280"/>
+            <a:ext cx="3108960" cy="1280160"/>
+          </a:xfrm>
+          <a:prstGeom prst="rect">
+            <a:avLst/>
+          </a:prstGeom>
+          <a:noFill/>
+          <a:ln/>
+        </p:spPr>
+        <p:txBody>
+          <a:bodyPr wrap="square" rtlCol="0" anchor="ctr"/>
+          <a:lstStyle/>
+          <a:p>
+            <a:pPr marL="0" indent="0" algn="ctr">
+              <a:buNone/>
+            </a:pPr>
+            <a:r>
+              <a:rPr lang="en-US" sz="1800" b="1" dirty="0">
+                <a:solidFill>
+                  <a:srgbClr val="FFFFFF"/>
+                </a:solidFill>
+              </a:rPr>
+              <a:t>Znanje je</a:t>
+            </a:r>
+            <a:endParaRPr lang="en-US" sz="1800" dirty="0"/>
+          </a:p>
+          <a:p>
+            <a:pPr marL="0" indent="0" algn="ctr">
+              <a:buNone/>
+            </a:pPr>
+            <a:r>
+              <a:rPr lang="en-US" sz="1800" b="1" dirty="0">
+                <a:solidFill>
+                  <a:srgbClr val="FFFFFF"/>
+                </a:solidFill>
+              </a:rPr>
+              <a:t>jedina zaštita.</a:t>
+            </a:r>
+            <a:endParaRPr lang="en-US" sz="1800" dirty="0"/>
+          </a:p>
+        </p:txBody>
+      </p:sp>
+    </p:spTree>
+    <p:extLst>
+      <p:ext uri="{BB962C8B-B14F-4D97-AF65-F5344CB8AC3E}">
+        <p14:creationId xmlns:p14="http://schemas.microsoft.com/office/powerpoint/2010/main" val="4176357116"/>
+      </p:ext>
+    </p:extLst>
+  </p:cSld>
+  <p:clrMapOvr>
+    <a:masterClrMapping/>
+  </p:clrMapOvr>
+</p:sld>
+</file>
+
+<file path=ppt/slides/slide4.xml><?xml version="1.0" encoding="utf-8"?>
+<p:sld xmlns:a="http://schemas.openxmlformats.org/drawingml/2006/main" xmlns:r="http://schemas.openxmlformats.org/officeDocument/2006/relationships" xmlns:p="http://schemas.openxmlformats.org/presentationml/2006/main">
   <p:cSld name="Slide 3">
     <p:bg>
       <p:bgPr>
         <a:solidFill>
           <a:srgbClr val="F5F5F5"/>
         </a:solidFill>
+        <a:effectLst/>
       </p:bgPr>
     </p:bg>
     <p:spTree>
@@ -7458,6 +9564,13 @@
             <a:prstDash val="solid"/>
           </a:ln>
         </p:spPr>
+        <p:txBody>
+          <a:bodyPr/>
+          <a:lstStyle/>
+          <a:p>
+            <a:endParaRPr lang="en-US"/>
+          </a:p>
+        </p:txBody>
       </p:sp>
       <p:sp>
         <p:nvSpPr>
@@ -7480,7 +9593,7 @@
           <a:bodyPr wrap="square" lIns="0" tIns="0" rIns="0" bIns="0" rtlCol="0" anchor="ctr"/>
           <a:lstStyle/>
           <a:p>
-            <a:pPr indent="0" marL="0">
+            <a:pPr marL="0" indent="0">
               <a:buNone/>
             </a:pPr>
             <a:r>
@@ -7511,15 +9624,27 @@
         </p:nvGraphicFramePr>
         <p:xfrm>
           <a:off x="274320" y="804672"/>
-          <a:ext cx="8595360" cy="914400"/>
+          <a:ext cx="8595360" cy="4389120"/>
         </p:xfrm>
         <a:graphic>
           <a:graphicData uri="http://schemas.openxmlformats.org/drawingml/2006/table">
             <a:tbl>
               <a:tblPr/>
               <a:tblGrid>
-                <a:gridCol w="4297680"/>
-                <a:gridCol w="4297680"/>
+                <a:gridCol w="4297680">
+                  <a:extLst>
+                    <a:ext uri="{9D8B030D-6E8A-4147-A177-3AD203B41FA5}">
+                      <a16:colId xmlns:a16="http://schemas.microsoft.com/office/drawing/2014/main" val="20000"/>
+                    </a:ext>
+                  </a:extLst>
+                </a:gridCol>
+                <a:gridCol w="4297680">
+                  <a:extLst>
+                    <a:ext uri="{9D8B030D-6E8A-4147-A177-3AD203B41FA5}">
+                      <a16:colId xmlns:a16="http://schemas.microsoft.com/office/drawing/2014/main" val="20001"/>
+                    </a:ext>
+                  </a:extLst>
+                </a:gridCol>
               </a:tblGrid>
               <a:tr h="548640">
                 <a:tc>
@@ -7527,7 +9652,7 @@
                     <a:bodyPr/>
                     <a:lstStyle/>
                     <a:p>
-                      <a:pPr indent="0" marL="0">
+                      <a:pPr marL="0" indent="0">
                         <a:buNone/>
                       </a:pPr>
                       <a:r>
@@ -7541,7 +9666,7 @@
                       <a:endParaRPr lang="en-US" sz="1300" dirty="0"/>
                     </a:p>
                   </a:txBody>
-                  <a:tcPr marL="91440" marR="91440" marT="45720" marB="45720">
+                  <a:tcPr>
                     <a:lnL w="6350" cap="flat" cmpd="sng" algn="ctr">
                       <a:solidFill>
                         <a:srgbClr val="CCCCCC"/>
@@ -7588,7 +9713,7 @@
                     <a:bodyPr/>
                     <a:lstStyle/>
                     <a:p>
-                      <a:pPr indent="0" marL="0">
+                      <a:pPr marL="0" indent="0">
                         <a:buNone/>
                       </a:pPr>
                       <a:r>
@@ -7602,7 +9727,7 @@
                       <a:endParaRPr lang="en-US" sz="1300" dirty="0"/>
                     </a:p>
                   </a:txBody>
-                  <a:tcPr marL="91440" marR="91440" marT="45720" marB="45720">
+                  <a:tcPr>
                     <a:lnL w="6350" cap="flat" cmpd="sng" algn="ctr">
                       <a:solidFill>
                         <a:srgbClr val="CCCCCC"/>
@@ -7644,6 +9769,11 @@
                     </a:solidFill>
                   </a:tcPr>
                 </a:tc>
+                <a:extLst>
+                  <a:ext uri="{0D108BD9-81ED-4DB2-BD59-A6C34878D82A}">
+                    <a16:rowId xmlns:a16="http://schemas.microsoft.com/office/drawing/2014/main" val="10000"/>
+                  </a:ext>
+                </a:extLst>
               </a:tr>
               <a:tr h="548640">
                 <a:tc>
@@ -7651,7 +9781,7 @@
                     <a:bodyPr/>
                     <a:lstStyle/>
                     <a:p>
-                      <a:pPr indent="0" marL="0">
+                      <a:pPr marL="0" indent="0">
                         <a:buNone/>
                       </a:pPr>
                       <a:r>
@@ -7665,7 +9795,7 @@
                       <a:endParaRPr lang="en-US" sz="1200" dirty="0"/>
                     </a:p>
                   </a:txBody>
-                  <a:tcPr marL="91440" marR="91440" marT="45720" marB="45720">
+                  <a:tcPr>
                     <a:lnL w="6350" cap="flat" cmpd="sng" algn="ctr">
                       <a:solidFill>
                         <a:srgbClr val="CCCCCC"/>
@@ -7712,7 +9842,7 @@
                     <a:bodyPr/>
                     <a:lstStyle/>
                     <a:p>
-                      <a:pPr indent="0" marL="0">
+                      <a:pPr marL="0" indent="0">
                         <a:buNone/>
                       </a:pPr>
                       <a:r>
@@ -7726,7 +9856,7 @@
                       <a:endParaRPr lang="en-US" sz="1200" dirty="0"/>
                     </a:p>
                   </a:txBody>
-                  <a:tcPr marL="91440" marR="91440" marT="45720" marB="45720">
+                  <a:tcPr>
                     <a:lnL w="6350" cap="flat" cmpd="sng" algn="ctr">
                       <a:solidFill>
                         <a:srgbClr val="CCCCCC"/>
@@ -7768,6 +9898,11 @@
                     </a:solidFill>
                   </a:tcPr>
                 </a:tc>
+                <a:extLst>
+                  <a:ext uri="{0D108BD9-81ED-4DB2-BD59-A6C34878D82A}">
+                    <a16:rowId xmlns:a16="http://schemas.microsoft.com/office/drawing/2014/main" val="10001"/>
+                  </a:ext>
+                </a:extLst>
               </a:tr>
               <a:tr h="548640">
                 <a:tc>
@@ -7775,7 +9910,7 @@
                     <a:bodyPr/>
                     <a:lstStyle/>
                     <a:p>
-                      <a:pPr indent="0" marL="0">
+                      <a:pPr marL="0" indent="0">
                         <a:buNone/>
                       </a:pPr>
                       <a:r>
@@ -7789,7 +9924,7 @@
                       <a:endParaRPr lang="en-US" sz="1200" dirty="0"/>
                     </a:p>
                   </a:txBody>
-                  <a:tcPr marL="91440" marR="91440" marT="45720" marB="45720">
+                  <a:tcPr>
                     <a:lnL w="6350" cap="flat" cmpd="sng" algn="ctr">
                       <a:solidFill>
                         <a:srgbClr val="CCCCCC"/>
@@ -7836,7 +9971,7 @@
                     <a:bodyPr/>
                     <a:lstStyle/>
                     <a:p>
-                      <a:pPr indent="0" marL="0">
+                      <a:pPr marL="0" indent="0">
                         <a:buNone/>
                       </a:pPr>
                       <a:r>
@@ -7850,7 +9985,7 @@
                       <a:endParaRPr lang="en-US" sz="1200" dirty="0"/>
                     </a:p>
                   </a:txBody>
-                  <a:tcPr marL="91440" marR="91440" marT="45720" marB="45720">
+                  <a:tcPr>
                     <a:lnL w="6350" cap="flat" cmpd="sng" algn="ctr">
                       <a:solidFill>
                         <a:srgbClr val="CCCCCC"/>
@@ -7892,6 +10027,11 @@
                     </a:solidFill>
                   </a:tcPr>
                 </a:tc>
+                <a:extLst>
+                  <a:ext uri="{0D108BD9-81ED-4DB2-BD59-A6C34878D82A}">
+                    <a16:rowId xmlns:a16="http://schemas.microsoft.com/office/drawing/2014/main" val="10002"/>
+                  </a:ext>
+                </a:extLst>
               </a:tr>
               <a:tr h="548640">
                 <a:tc>
@@ -7899,7 +10039,7 @@
                     <a:bodyPr/>
                     <a:lstStyle/>
                     <a:p>
-                      <a:pPr indent="0" marL="0">
+                      <a:pPr marL="0" indent="0">
                         <a:buNone/>
                       </a:pPr>
                       <a:r>
@@ -7913,7 +10053,7 @@
                       <a:endParaRPr lang="en-US" sz="1200" dirty="0"/>
                     </a:p>
                   </a:txBody>
-                  <a:tcPr marL="91440" marR="91440" marT="45720" marB="45720">
+                  <a:tcPr>
                     <a:lnL w="6350" cap="flat" cmpd="sng" algn="ctr">
                       <a:solidFill>
                         <a:srgbClr val="CCCCCC"/>
@@ -7960,7 +10100,7 @@
                     <a:bodyPr/>
                     <a:lstStyle/>
                     <a:p>
-                      <a:pPr indent="0" marL="0">
+                      <a:pPr marL="0" indent="0">
                         <a:buNone/>
                       </a:pPr>
                       <a:r>
@@ -7974,7 +10114,7 @@
                       <a:endParaRPr lang="en-US" sz="1200" dirty="0"/>
                     </a:p>
                   </a:txBody>
-                  <a:tcPr marL="91440" marR="91440" marT="45720" marB="45720">
+                  <a:tcPr>
                     <a:lnL w="6350" cap="flat" cmpd="sng" algn="ctr">
                       <a:solidFill>
                         <a:srgbClr val="CCCCCC"/>
@@ -8016,6 +10156,11 @@
                     </a:solidFill>
                   </a:tcPr>
                 </a:tc>
+                <a:extLst>
+                  <a:ext uri="{0D108BD9-81ED-4DB2-BD59-A6C34878D82A}">
+                    <a16:rowId xmlns:a16="http://schemas.microsoft.com/office/drawing/2014/main" val="10003"/>
+                  </a:ext>
+                </a:extLst>
               </a:tr>
               <a:tr h="548640">
                 <a:tc>
@@ -8023,7 +10168,7 @@
                     <a:bodyPr/>
                     <a:lstStyle/>
                     <a:p>
-                      <a:pPr indent="0" marL="0">
+                      <a:pPr marL="0" indent="0">
                         <a:buNone/>
                       </a:pPr>
                       <a:r>
@@ -8037,7 +10182,7 @@
                       <a:endParaRPr lang="en-US" sz="1200" dirty="0"/>
                     </a:p>
                   </a:txBody>
-                  <a:tcPr marL="91440" marR="91440" marT="45720" marB="45720">
+                  <a:tcPr>
                     <a:lnL w="6350" cap="flat" cmpd="sng" algn="ctr">
                       <a:solidFill>
                         <a:srgbClr val="CCCCCC"/>
@@ -8084,7 +10229,7 @@
                     <a:bodyPr/>
                     <a:lstStyle/>
                     <a:p>
-                      <a:pPr indent="0" marL="0">
+                      <a:pPr marL="0" indent="0">
                         <a:buNone/>
                       </a:pPr>
                       <a:r>
@@ -8098,7 +10243,7 @@
                       <a:endParaRPr lang="en-US" sz="1200" dirty="0"/>
                     </a:p>
                   </a:txBody>
-                  <a:tcPr marL="91440" marR="91440" marT="45720" marB="45720">
+                  <a:tcPr>
                     <a:lnL w="6350" cap="flat" cmpd="sng" algn="ctr">
                       <a:solidFill>
                         <a:srgbClr val="CCCCCC"/>
@@ -8140,6 +10285,11 @@
                     </a:solidFill>
                   </a:tcPr>
                 </a:tc>
+                <a:extLst>
+                  <a:ext uri="{0D108BD9-81ED-4DB2-BD59-A6C34878D82A}">
+                    <a16:rowId xmlns:a16="http://schemas.microsoft.com/office/drawing/2014/main" val="10004"/>
+                  </a:ext>
+                </a:extLst>
               </a:tr>
               <a:tr h="548640">
                 <a:tc>
@@ -8147,7 +10297,7 @@
                     <a:bodyPr/>
                     <a:lstStyle/>
                     <a:p>
-                      <a:pPr indent="0" marL="0">
+                      <a:pPr marL="0" indent="0">
                         <a:buNone/>
                       </a:pPr>
                       <a:r>
@@ -8161,7 +10311,7 @@
                       <a:endParaRPr lang="en-US" sz="1200" dirty="0"/>
                     </a:p>
                   </a:txBody>
-                  <a:tcPr marL="91440" marR="91440" marT="45720" marB="45720">
+                  <a:tcPr>
                     <a:lnL w="6350" cap="flat" cmpd="sng" algn="ctr">
                       <a:solidFill>
                         <a:srgbClr val="CCCCCC"/>
@@ -8208,7 +10358,7 @@
                     <a:bodyPr/>
                     <a:lstStyle/>
                     <a:p>
-                      <a:pPr indent="0" marL="0">
+                      <a:pPr marL="0" indent="0">
                         <a:buNone/>
                       </a:pPr>
                       <a:r>
@@ -8222,7 +10372,7 @@
                       <a:endParaRPr lang="en-US" sz="1200" dirty="0"/>
                     </a:p>
                   </a:txBody>
-                  <a:tcPr marL="91440" marR="91440" marT="45720" marB="45720">
+                  <a:tcPr>
                     <a:lnL w="6350" cap="flat" cmpd="sng" algn="ctr">
                       <a:solidFill>
                         <a:srgbClr val="CCCCCC"/>
@@ -8264,6 +10414,11 @@
                     </a:solidFill>
                   </a:tcPr>
                 </a:tc>
+                <a:extLst>
+                  <a:ext uri="{0D108BD9-81ED-4DB2-BD59-A6C34878D82A}">
+                    <a16:rowId xmlns:a16="http://schemas.microsoft.com/office/drawing/2014/main" val="10005"/>
+                  </a:ext>
+                </a:extLst>
               </a:tr>
               <a:tr h="548640">
                 <a:tc>
@@ -8271,7 +10426,7 @@
                     <a:bodyPr/>
                     <a:lstStyle/>
                     <a:p>
-                      <a:pPr indent="0" marL="0">
+                      <a:pPr marL="0" indent="0">
                         <a:buNone/>
                       </a:pPr>
                       <a:r>
@@ -8285,7 +10440,7 @@
                       <a:endParaRPr lang="en-US" sz="1200" dirty="0"/>
                     </a:p>
                   </a:txBody>
-                  <a:tcPr marL="91440" marR="91440" marT="45720" marB="45720">
+                  <a:tcPr>
                     <a:lnL w="6350" cap="flat" cmpd="sng" algn="ctr">
                       <a:solidFill>
                         <a:srgbClr val="CCCCCC"/>
@@ -8332,7 +10487,7 @@
                     <a:bodyPr/>
                     <a:lstStyle/>
                     <a:p>
-                      <a:pPr indent="0" marL="0">
+                      <a:pPr marL="0" indent="0">
                         <a:buNone/>
                       </a:pPr>
                       <a:r>
@@ -8346,7 +10501,7 @@
                       <a:endParaRPr lang="en-US" sz="1200" dirty="0"/>
                     </a:p>
                   </a:txBody>
-                  <a:tcPr marL="91440" marR="91440" marT="45720" marB="45720">
+                  <a:tcPr>
                     <a:lnL w="6350" cap="flat" cmpd="sng" algn="ctr">
                       <a:solidFill>
                         <a:srgbClr val="CCCCCC"/>
@@ -8388,6 +10543,11 @@
                     </a:solidFill>
                   </a:tcPr>
                 </a:tc>
+                <a:extLst>
+                  <a:ext uri="{0D108BD9-81ED-4DB2-BD59-A6C34878D82A}">
+                    <a16:rowId xmlns:a16="http://schemas.microsoft.com/office/drawing/2014/main" val="10006"/>
+                  </a:ext>
+                </a:extLst>
               </a:tr>
               <a:tr h="548640">
                 <a:tc>
@@ -8395,7 +10555,7 @@
                     <a:bodyPr/>
                     <a:lstStyle/>
                     <a:p>
-                      <a:pPr indent="0" marL="0">
+                      <a:pPr marL="0" indent="0">
                         <a:buNone/>
                       </a:pPr>
                       <a:r>
@@ -8409,7 +10569,7 @@
                       <a:endParaRPr lang="en-US" sz="1200" dirty="0"/>
                     </a:p>
                   </a:txBody>
-                  <a:tcPr marL="91440" marR="91440" marT="45720" marB="45720">
+                  <a:tcPr>
                     <a:lnL w="6350" cap="flat" cmpd="sng" algn="ctr">
                       <a:solidFill>
                         <a:srgbClr val="CCCCCC"/>
@@ -8456,7 +10616,7 @@
                     <a:bodyPr/>
                     <a:lstStyle/>
                     <a:p>
-                      <a:pPr indent="0" marL="0">
+                      <a:pPr marL="0" indent="0">
                         <a:buNone/>
                       </a:pPr>
                       <a:r>
@@ -8470,7 +10630,7 @@
                       <a:endParaRPr lang="en-US" sz="1200" dirty="0"/>
                     </a:p>
                   </a:txBody>
-                  <a:tcPr marL="91440" marR="91440" marT="45720" marB="45720">
+                  <a:tcPr>
                     <a:lnL w="6350" cap="flat" cmpd="sng" algn="ctr">
                       <a:solidFill>
                         <a:srgbClr val="CCCCCC"/>
@@ -8512,6 +10672,11 @@
                     </a:solidFill>
                   </a:tcPr>
                 </a:tc>
+                <a:extLst>
+                  <a:ext uri="{0D108BD9-81ED-4DB2-BD59-A6C34878D82A}">
+                    <a16:rowId xmlns:a16="http://schemas.microsoft.com/office/drawing/2014/main" val="10007"/>
+                  </a:ext>
+                </a:extLst>
               </a:tr>
             </a:tbl>
           </a:graphicData>
@@ -8525,7 +10690,7 @@
 </p:sld>
 </file>
 
-<file path=ppt/slides/slide4.xml><?xml version="1.0" encoding="utf-8"?>
+<file path=ppt/slides/slide5.xml><?xml version="1.0" encoding="utf-8"?>
 <p:sld xmlns:a="http://schemas.openxmlformats.org/drawingml/2006/main" xmlns:r="http://schemas.openxmlformats.org/officeDocument/2006/relationships" xmlns:p="http://schemas.openxmlformats.org/presentationml/2006/main">
   <p:cSld name="Slide 4">
     <p:bg>
@@ -8533,6 +10698,7 @@
         <a:solidFill>
           <a:srgbClr val="F5F5F5"/>
         </a:solidFill>
+        <a:effectLst/>
       </p:bgPr>
     </p:bg>
     <p:spTree>
@@ -8573,6 +10739,13 @@
             <a:prstDash val="solid"/>
           </a:ln>
         </p:spPr>
+        <p:txBody>
+          <a:bodyPr/>
+          <a:lstStyle/>
+          <a:p>
+            <a:endParaRPr lang="en-US"/>
+          </a:p>
+        </p:txBody>
       </p:sp>
       <p:sp>
         <p:nvSpPr>
@@ -8595,7 +10768,7 @@
           <a:bodyPr wrap="square" lIns="0" tIns="0" rIns="0" bIns="0" rtlCol="0" anchor="ctr"/>
           <a:lstStyle/>
           <a:p>
-            <a:pPr indent="0" marL="0">
+            <a:pPr marL="0" indent="0">
               <a:buNone/>
             </a:pPr>
             <a:r>
@@ -8629,13 +10802,20 @@
           </a:solidFill>
           <a:ln/>
           <a:effectLst>
-            <a:outerShdw sx="100000" sy="100000" kx="0" ky="0" algn="bl" rotWithShape="0" blurRad="101600" dist="25400" dir="8100000">
+            <a:outerShdw blurRad="101600" dist="25400" dir="8100000" algn="bl" rotWithShape="0">
               <a:srgbClr val="000000">
                 <a:alpha val="10000"/>
               </a:srgbClr>
             </a:outerShdw>
           </a:effectLst>
         </p:spPr>
+        <p:txBody>
+          <a:bodyPr/>
+          <a:lstStyle/>
+          <a:p>
+            <a:endParaRPr lang="en-US"/>
+          </a:p>
+        </p:txBody>
       </p:sp>
       <p:sp>
         <p:nvSpPr>
@@ -8661,6 +10841,13 @@
             <a:prstDash val="solid"/>
           </a:ln>
         </p:spPr>
+        <p:txBody>
+          <a:bodyPr/>
+          <a:lstStyle/>
+          <a:p>
+            <a:endParaRPr lang="en-US"/>
+          </a:p>
+        </p:txBody>
       </p:sp>
       <p:sp>
         <p:nvSpPr>
@@ -8683,7 +10870,7 @@
           <a:bodyPr wrap="square" lIns="0" tIns="0" rIns="0" bIns="0" rtlCol="0" anchor="ctr"/>
           <a:lstStyle/>
           <a:p>
-            <a:pPr algn="ctr" indent="0" marL="0">
+            <a:pPr marL="0" indent="0" algn="ctr">
               <a:buNone/>
             </a:pPr>
             <a:r>
@@ -8829,13 +11016,20 @@
           </a:solidFill>
           <a:ln/>
           <a:effectLst>
-            <a:outerShdw sx="100000" sy="100000" kx="0" ky="0" algn="bl" rotWithShape="0" blurRad="101600" dist="25400" dir="8100000">
+            <a:outerShdw blurRad="101600" dist="25400" dir="8100000" algn="bl" rotWithShape="0">
               <a:srgbClr val="000000">
                 <a:alpha val="15000"/>
               </a:srgbClr>
             </a:outerShdw>
           </a:effectLst>
         </p:spPr>
+        <p:txBody>
+          <a:bodyPr/>
+          <a:lstStyle/>
+          <a:p>
+            <a:endParaRPr lang="en-US"/>
+          </a:p>
+        </p:txBody>
       </p:sp>
       <p:sp>
         <p:nvSpPr>
@@ -8861,6 +11055,13 @@
             <a:prstDash val="solid"/>
           </a:ln>
         </p:spPr>
+        <p:txBody>
+          <a:bodyPr/>
+          <a:lstStyle/>
+          <a:p>
+            <a:endParaRPr lang="en-US"/>
+          </a:p>
+        </p:txBody>
       </p:sp>
       <p:sp>
         <p:nvSpPr>
@@ -8883,7 +11084,7 @@
           <a:bodyPr wrap="square" lIns="0" tIns="0" rIns="0" bIns="0" rtlCol="0" anchor="ctr"/>
           <a:lstStyle/>
           <a:p>
-            <a:pPr algn="ctr" indent="0" marL="0">
+            <a:pPr marL="0" indent="0" algn="ctr">
               <a:buNone/>
             </a:pPr>
             <a:r>
@@ -8919,7 +11120,7 @@
           <a:bodyPr wrap="square" rtlCol="0" anchor="t"/>
           <a:lstStyle/>
           <a:p>
-            <a:pPr indent="0" marL="0">
+            <a:pPr marL="0" indent="0">
               <a:buNone/>
             </a:pPr>
             <a:r>
@@ -8930,9 +11131,6 @@
               </a:rPr>
               <a:t>Umirovljenica je primila SMS navodno od banke da joj račun treba hitnu provjeru. Link je izgledao </a:t>
             </a:r>
-            <a:pPr indent="0" marL="0">
-              <a:buNone/>
-            </a:pPr>
             <a:r>
               <a:rPr lang="en-US" sz="1300" b="1" dirty="0">
                 <a:solidFill>
@@ -8944,7 +11142,7 @@
             <a:endParaRPr lang="en-US" sz="1300" dirty="0"/>
           </a:p>
           <a:p>
-            <a:pPr indent="0" marL="0">
+            <a:pPr marL="0" indent="0">
               <a:buNone/>
             </a:pPr>
             <a:r>
@@ -8955,46 +11153,32 @@
               </a:rPr>
               <a:t>
 Upisala je podatke i PIN.
-</a:t>
-            </a:r>
-            <a:pPr indent="0" marL="0">
+Napadač je unutar sat vremena podignuo </a:t>
+            </a:r>
+            <a:r>
+              <a:rPr lang="en-US" sz="1400" b="1" dirty="0">
+                <a:solidFill>
+                  <a:srgbClr val="FFFFFF"/>
+                </a:solidFill>
+              </a:rPr>
+              <a:t>8.000 € ušteđevine.</a:t>
+            </a:r>
+            <a:endParaRPr lang="en-US" sz="1300" dirty="0"/>
+          </a:p>
+          <a:p>
+            <a:pPr marL="0" indent="0">
               <a:buNone/>
             </a:pPr>
-            <a:r>
-              <a:rPr lang="en-US" sz="1300" dirty="0">
-                <a:solidFill>
-                  <a:srgbClr val="CCCCCC"/>
-                </a:solidFill>
-              </a:rPr>
-              <a:t>Napadač je unutar sat vremena podignuo </a:t>
-            </a:r>
-            <a:pPr indent="0" marL="0">
+            <a:endParaRPr lang="en-US" sz="1300" dirty="0"/>
+          </a:p>
+          <a:p>
+            <a:pPr marL="0" indent="0">
               <a:buNone/>
             </a:pPr>
-            <a:r>
-              <a:rPr lang="en-US" sz="1400" b="1" dirty="0">
-                <a:solidFill>
-                  <a:srgbClr val="FFFFFF"/>
-                </a:solidFill>
-              </a:rPr>
-              <a:t>8.000 € ušteđevine.</a:t>
-            </a:r>
             <a:endParaRPr lang="en-US" sz="1300" dirty="0"/>
           </a:p>
           <a:p>
-            <a:pPr indent="0" marL="0">
-              <a:buNone/>
-            </a:pPr>
-            <a:endParaRPr lang="en-US" sz="1300" dirty="0"/>
-          </a:p>
-          <a:p>
-            <a:pPr indent="0" marL="0">
-              <a:buNone/>
-            </a:pPr>
-            <a:endParaRPr lang="en-US" sz="1300" dirty="0"/>
-          </a:p>
-          <a:p>
-            <a:pPr indent="0" marL="0">
+            <a:pPr marL="0" indent="0">
               <a:buNone/>
             </a:pPr>
             <a:r>
@@ -9017,7 +11201,7 @@
 </p:sld>
 </file>
 
-<file path=ppt/slides/slide5.xml><?xml version="1.0" encoding="utf-8"?>
+<file path=ppt/slides/slide6.xml><?xml version="1.0" encoding="utf-8"?>
 <p:sld xmlns:a="http://schemas.openxmlformats.org/drawingml/2006/main" xmlns:r="http://schemas.openxmlformats.org/officeDocument/2006/relationships" xmlns:p="http://schemas.openxmlformats.org/presentationml/2006/main">
   <p:cSld name="Slide 5">
     <p:bg>
@@ -9025,6 +11209,7 @@
         <a:solidFill>
           <a:srgbClr val="F5F5F5"/>
         </a:solidFill>
+        <a:effectLst/>
       </p:bgPr>
     </p:bg>
     <p:spTree>
@@ -9065,6 +11250,13 @@
             <a:prstDash val="solid"/>
           </a:ln>
         </p:spPr>
+        <p:txBody>
+          <a:bodyPr/>
+          <a:lstStyle/>
+          <a:p>
+            <a:endParaRPr lang="en-US"/>
+          </a:p>
+        </p:txBody>
       </p:sp>
       <p:sp>
         <p:nvSpPr>
@@ -9087,7 +11279,7 @@
           <a:bodyPr wrap="square" lIns="0" tIns="0" rIns="0" bIns="0" rtlCol="0" anchor="ctr"/>
           <a:lstStyle/>
           <a:p>
-            <a:pPr indent="0" marL="0">
+            <a:pPr marL="0" indent="0">
               <a:buNone/>
             </a:pPr>
             <a:r>
@@ -9121,13 +11313,20 @@
           </a:solidFill>
           <a:ln/>
           <a:effectLst>
-            <a:outerShdw sx="100000" sy="100000" kx="0" ky="0" algn="bl" rotWithShape="0" blurRad="101600" dist="25400" dir="8100000">
+            <a:outerShdw blurRad="101600" dist="25400" dir="8100000" algn="bl" rotWithShape="0">
               <a:srgbClr val="000000">
                 <a:alpha val="10000"/>
               </a:srgbClr>
             </a:outerShdw>
           </a:effectLst>
         </p:spPr>
+        <p:txBody>
+          <a:bodyPr/>
+          <a:lstStyle/>
+          <a:p>
+            <a:endParaRPr lang="en-US"/>
+          </a:p>
+        </p:txBody>
       </p:sp>
       <p:sp>
         <p:nvSpPr>
@@ -9153,6 +11352,13 @@
             <a:prstDash val="solid"/>
           </a:ln>
         </p:spPr>
+        <p:txBody>
+          <a:bodyPr/>
+          <a:lstStyle/>
+          <a:p>
+            <a:endParaRPr lang="en-US"/>
+          </a:p>
+        </p:txBody>
       </p:sp>
       <p:sp>
         <p:nvSpPr>
@@ -9175,7 +11381,7 @@
           <a:bodyPr wrap="square" lIns="0" tIns="0" rIns="0" bIns="0" rtlCol="0" anchor="ctr"/>
           <a:lstStyle/>
           <a:p>
-            <a:pPr algn="ctr" indent="0" marL="0">
+            <a:pPr marL="0" indent="0" algn="ctr">
               <a:buNone/>
             </a:pPr>
             <a:r>
@@ -9321,13 +11527,20 @@
           </a:solidFill>
           <a:ln/>
           <a:effectLst>
-            <a:outerShdw sx="100000" sy="100000" kx="0" ky="0" algn="bl" rotWithShape="0" blurRad="101600" dist="25400" dir="8100000">
+            <a:outerShdw blurRad="101600" dist="25400" dir="8100000" algn="bl" rotWithShape="0">
               <a:srgbClr val="000000">
                 <a:alpha val="10000"/>
               </a:srgbClr>
             </a:outerShdw>
           </a:effectLst>
         </p:spPr>
+        <p:txBody>
+          <a:bodyPr/>
+          <a:lstStyle/>
+          <a:p>
+            <a:endParaRPr lang="en-US"/>
+          </a:p>
+        </p:txBody>
       </p:sp>
       <p:sp>
         <p:nvSpPr>
@@ -9353,6 +11566,13 @@
             <a:prstDash val="solid"/>
           </a:ln>
         </p:spPr>
+        <p:txBody>
+          <a:bodyPr/>
+          <a:lstStyle/>
+          <a:p>
+            <a:endParaRPr lang="en-US"/>
+          </a:p>
+        </p:txBody>
       </p:sp>
       <p:sp>
         <p:nvSpPr>
@@ -9375,7 +11595,7 @@
           <a:bodyPr wrap="square" lIns="0" tIns="0" rIns="0" bIns="0" rtlCol="0" anchor="ctr"/>
           <a:lstStyle/>
           <a:p>
-            <a:pPr algn="ctr" indent="0" marL="0">
+            <a:pPr marL="0" indent="0" algn="ctr">
               <a:buNone/>
             </a:pPr>
             <a:r>
@@ -9492,7 +11712,7 @@
 </p:sld>
 </file>
 
-<file path=ppt/slides/slide6.xml><?xml version="1.0" encoding="utf-8"?>
+<file path=ppt/slides/slide7.xml><?xml version="1.0" encoding="utf-8"?>
 <p:sld xmlns:a="http://schemas.openxmlformats.org/drawingml/2006/main" xmlns:r="http://schemas.openxmlformats.org/officeDocument/2006/relationships" xmlns:p="http://schemas.openxmlformats.org/presentationml/2006/main">
   <p:cSld name="Slide 6">
     <p:bg>
@@ -9500,6 +11720,7 @@
         <a:solidFill>
           <a:srgbClr val="F5F5F5"/>
         </a:solidFill>
+        <a:effectLst/>
       </p:bgPr>
     </p:bg>
     <p:spTree>
@@ -9540,6 +11761,13 @@
             <a:prstDash val="solid"/>
           </a:ln>
         </p:spPr>
+        <p:txBody>
+          <a:bodyPr/>
+          <a:lstStyle/>
+          <a:p>
+            <a:endParaRPr lang="en-US"/>
+          </a:p>
+        </p:txBody>
       </p:sp>
       <p:sp>
         <p:nvSpPr>
@@ -9562,7 +11790,7 @@
           <a:bodyPr wrap="square" lIns="0" tIns="0" rIns="0" bIns="0" rtlCol="0" anchor="ctr"/>
           <a:lstStyle/>
           <a:p>
-            <a:pPr indent="0" marL="0">
+            <a:pPr marL="0" indent="0">
               <a:buNone/>
             </a:pPr>
             <a:r>
@@ -9596,13 +11824,20 @@
           </a:solidFill>
           <a:ln/>
           <a:effectLst>
-            <a:outerShdw sx="100000" sy="100000" kx="0" ky="0" algn="bl" rotWithShape="0" blurRad="101600" dist="25400" dir="8100000">
+            <a:outerShdw blurRad="101600" dist="25400" dir="8100000" algn="bl" rotWithShape="0">
               <a:srgbClr val="000000">
                 <a:alpha val="10000"/>
               </a:srgbClr>
             </a:outerShdw>
           </a:effectLst>
         </p:spPr>
+        <p:txBody>
+          <a:bodyPr/>
+          <a:lstStyle/>
+          <a:p>
+            <a:endParaRPr lang="en-US"/>
+          </a:p>
+        </p:txBody>
       </p:sp>
       <p:sp>
         <p:nvSpPr>
@@ -9628,6 +11863,13 @@
             <a:prstDash val="solid"/>
           </a:ln>
         </p:spPr>
+        <p:txBody>
+          <a:bodyPr/>
+          <a:lstStyle/>
+          <a:p>
+            <a:endParaRPr lang="en-US"/>
+          </a:p>
+        </p:txBody>
       </p:sp>
       <p:sp>
         <p:nvSpPr>
@@ -9650,7 +11892,7 @@
           <a:bodyPr wrap="square" lIns="0" tIns="0" rIns="0" bIns="0" rtlCol="0" anchor="ctr"/>
           <a:lstStyle/>
           <a:p>
-            <a:pPr algn="ctr" indent="0" marL="0">
+            <a:pPr marL="0" indent="0" algn="ctr">
               <a:buNone/>
             </a:pPr>
             <a:r>
@@ -9796,13 +12038,20 @@
           </a:solidFill>
           <a:ln/>
           <a:effectLst>
-            <a:outerShdw sx="100000" sy="100000" kx="0" ky="0" algn="bl" rotWithShape="0" blurRad="101600" dist="25400" dir="8100000">
+            <a:outerShdw blurRad="101600" dist="25400" dir="8100000" algn="bl" rotWithShape="0">
               <a:srgbClr val="000000">
                 <a:alpha val="15000"/>
               </a:srgbClr>
             </a:outerShdw>
           </a:effectLst>
         </p:spPr>
+        <p:txBody>
+          <a:bodyPr/>
+          <a:lstStyle/>
+          <a:p>
+            <a:endParaRPr lang="en-US"/>
+          </a:p>
+        </p:txBody>
       </p:sp>
       <p:sp>
         <p:nvSpPr>
@@ -9828,6 +12077,13 @@
             <a:prstDash val="solid"/>
           </a:ln>
         </p:spPr>
+        <p:txBody>
+          <a:bodyPr/>
+          <a:lstStyle/>
+          <a:p>
+            <a:endParaRPr lang="en-US"/>
+          </a:p>
+        </p:txBody>
       </p:sp>
       <p:sp>
         <p:nvSpPr>
@@ -9850,7 +12106,7 @@
           <a:bodyPr wrap="square" lIns="0" tIns="0" rIns="0" bIns="0" rtlCol="0" anchor="ctr"/>
           <a:lstStyle/>
           <a:p>
-            <a:pPr algn="ctr" indent="0" marL="0">
+            <a:pPr marL="0" indent="0" algn="ctr">
               <a:buNone/>
             </a:pPr>
             <a:r>
@@ -9886,7 +12142,7 @@
           <a:bodyPr wrap="square" rtlCol="0" anchor="t"/>
           <a:lstStyle/>
           <a:p>
-            <a:pPr indent="0" marL="0">
+            <a:pPr marL="0" indent="0">
               <a:buNone/>
             </a:pPr>
             <a:r>
@@ -9898,9 +12154,6 @@
               <a:t>Tipični znakovi prevaranta:
 </a:t>
             </a:r>
-            <a:pPr indent="0" marL="0">
-              <a:buNone/>
-            </a:pPr>
             <a:r>
               <a:rPr lang="en-US" sz="1300" dirty="0">
                 <a:solidFill>
@@ -9910,9 +12163,6 @@
               <a:t>→ Jako brzo proglasi ljubav ili privrženost
 </a:t>
             </a:r>
-            <a:pPr indent="0" marL="0">
-              <a:buNone/>
-            </a:pPr>
             <a:r>
               <a:rPr lang="en-US" sz="1300" dirty="0">
                 <a:solidFill>
@@ -9922,9 +12172,6 @@
               <a:t>→ Uvijek ima razlog zašto se ne može sresti u živo
 </a:t>
             </a:r>
-            <a:pPr indent="0" marL="0">
-              <a:buNone/>
-            </a:pPr>
             <a:r>
               <a:rPr lang="en-US" sz="1300" dirty="0">
                 <a:solidFill>
@@ -9934,9 +12181,6 @@
               <a:t>→ Traži novac za 'nužnu situaciju'
 </a:t>
             </a:r>
-            <a:pPr indent="0" marL="0">
-              <a:buNone/>
-            </a:pPr>
             <a:r>
               <a:rPr lang="en-US" sz="1300" dirty="0">
                 <a:solidFill>
@@ -9944,23 +12188,9 @@
                 </a:solidFill>
               </a:rPr>
               <a:t>→ Profil izgleda savršeno: privlačna fotografija, uspješan posao
+→ Uvijek 'vojnik u misiji' ili 'kirurg u Africi'
 </a:t>
             </a:r>
-            <a:pPr indent="0" marL="0">
-              <a:buNone/>
-            </a:pPr>
-            <a:r>
-              <a:rPr lang="en-US" sz="1300" dirty="0">
-                <a:solidFill>
-                  <a:srgbClr val="CCCCCC"/>
-                </a:solidFill>
-              </a:rPr>
-              <a:t>→ Uvijek 'vojnik u misiji' ili 'kirurg u Africi'
-</a:t>
-            </a:r>
-            <a:pPr indent="0" marL="0">
-              <a:buNone/>
-            </a:pPr>
             <a:r>
               <a:rPr lang="en-US" sz="1200" i="1" dirty="0">
                 <a:solidFill>
@@ -9981,7 +12211,7 @@
 </p:sld>
 </file>
 
-<file path=ppt/slides/slide7.xml><?xml version="1.0" encoding="utf-8"?>
+<file path=ppt/slides/slide8.xml><?xml version="1.0" encoding="utf-8"?>
 <p:sld xmlns:a="http://schemas.openxmlformats.org/drawingml/2006/main" xmlns:r="http://schemas.openxmlformats.org/officeDocument/2006/relationships" xmlns:p="http://schemas.openxmlformats.org/presentationml/2006/main">
   <p:cSld name="Slide 7">
     <p:bg>
@@ -9989,6 +12219,7 @@
         <a:solidFill>
           <a:srgbClr val="F5F5F5"/>
         </a:solidFill>
+        <a:effectLst/>
       </p:bgPr>
     </p:bg>
     <p:spTree>
@@ -10029,6 +12260,13 @@
             <a:prstDash val="solid"/>
           </a:ln>
         </p:spPr>
+        <p:txBody>
+          <a:bodyPr/>
+          <a:lstStyle/>
+          <a:p>
+            <a:endParaRPr lang="en-US"/>
+          </a:p>
+        </p:txBody>
       </p:sp>
       <p:sp>
         <p:nvSpPr>
@@ -10051,7 +12289,7 @@
           <a:bodyPr wrap="square" lIns="0" tIns="0" rIns="0" bIns="0" rtlCol="0" anchor="ctr"/>
           <a:lstStyle/>
           <a:p>
-            <a:pPr indent="0" marL="0">
+            <a:pPr marL="0" indent="0">
               <a:buNone/>
             </a:pPr>
             <a:r>
@@ -10085,13 +12323,20 @@
           </a:solidFill>
           <a:ln/>
           <a:effectLst>
-            <a:outerShdw sx="100000" sy="100000" kx="0" ky="0" algn="bl" rotWithShape="0" blurRad="101600" dist="25400" dir="8100000">
+            <a:outerShdw blurRad="101600" dist="25400" dir="8100000" algn="bl" rotWithShape="0">
               <a:srgbClr val="000000">
                 <a:alpha val="10000"/>
               </a:srgbClr>
             </a:outerShdw>
           </a:effectLst>
         </p:spPr>
+        <p:txBody>
+          <a:bodyPr/>
+          <a:lstStyle/>
+          <a:p>
+            <a:endParaRPr lang="en-US"/>
+          </a:p>
+        </p:txBody>
       </p:sp>
       <p:sp>
         <p:nvSpPr>
@@ -10117,6 +12362,13 @@
             <a:prstDash val="solid"/>
           </a:ln>
         </p:spPr>
+        <p:txBody>
+          <a:bodyPr/>
+          <a:lstStyle/>
+          <a:p>
+            <a:endParaRPr lang="en-US"/>
+          </a:p>
+        </p:txBody>
       </p:sp>
       <p:sp>
         <p:nvSpPr>
@@ -10139,7 +12391,7 @@
           <a:bodyPr wrap="square" lIns="0" tIns="0" rIns="0" bIns="0" rtlCol="0" anchor="ctr"/>
           <a:lstStyle/>
           <a:p>
-            <a:pPr algn="ctr" indent="0" marL="0">
+            <a:pPr marL="0" indent="0" algn="ctr">
               <a:buNone/>
             </a:pPr>
             <a:r>
@@ -10285,13 +12537,20 @@
           </a:solidFill>
           <a:ln/>
           <a:effectLst>
-            <a:outerShdw sx="100000" sy="100000" kx="0" ky="0" algn="bl" rotWithShape="0" blurRad="101600" dist="25400" dir="8100000">
+            <a:outerShdw blurRad="101600" dist="25400" dir="8100000" algn="bl" rotWithShape="0">
               <a:srgbClr val="000000">
                 <a:alpha val="10000"/>
               </a:srgbClr>
             </a:outerShdw>
           </a:effectLst>
         </p:spPr>
+        <p:txBody>
+          <a:bodyPr/>
+          <a:lstStyle/>
+          <a:p>
+            <a:endParaRPr lang="en-US"/>
+          </a:p>
+        </p:txBody>
       </p:sp>
       <p:sp>
         <p:nvSpPr>
@@ -10317,6 +12576,13 @@
             <a:prstDash val="solid"/>
           </a:ln>
         </p:spPr>
+        <p:txBody>
+          <a:bodyPr/>
+          <a:lstStyle/>
+          <a:p>
+            <a:endParaRPr lang="en-US"/>
+          </a:p>
+        </p:txBody>
       </p:sp>
       <p:sp>
         <p:nvSpPr>
@@ -10339,7 +12605,7 @@
           <a:bodyPr wrap="square" lIns="0" tIns="0" rIns="0" bIns="0" rtlCol="0" anchor="ctr"/>
           <a:lstStyle/>
           <a:p>
-            <a:pPr algn="ctr" indent="0" marL="0">
+            <a:pPr marL="0" indent="0" algn="ctr">
               <a:buNone/>
             </a:pPr>
             <a:r>
@@ -10474,7 +12740,7 @@
 </p:sld>
 </file>
 
-<file path=ppt/slides/slide8.xml><?xml version="1.0" encoding="utf-8"?>
+<file path=ppt/slides/slide9.xml><?xml version="1.0" encoding="utf-8"?>
 <p:sld xmlns:a="http://schemas.openxmlformats.org/drawingml/2006/main" xmlns:r="http://schemas.openxmlformats.org/officeDocument/2006/relationships" xmlns:p="http://schemas.openxmlformats.org/presentationml/2006/main">
   <p:cSld name="Slide 8">
     <p:bg>
@@ -10482,6 +12748,7 @@
         <a:solidFill>
           <a:srgbClr val="F5F5F5"/>
         </a:solidFill>
+        <a:effectLst/>
       </p:bgPr>
     </p:bg>
     <p:spTree>
@@ -10522,6 +12789,13 @@
             <a:prstDash val="solid"/>
           </a:ln>
         </p:spPr>
+        <p:txBody>
+          <a:bodyPr/>
+          <a:lstStyle/>
+          <a:p>
+            <a:endParaRPr lang="en-US"/>
+          </a:p>
+        </p:txBody>
       </p:sp>
       <p:sp>
         <p:nvSpPr>
@@ -10544,7 +12818,7 @@
           <a:bodyPr wrap="square" lIns="0" tIns="0" rIns="0" bIns="0" rtlCol="0" anchor="ctr"/>
           <a:lstStyle/>
           <a:p>
-            <a:pPr indent="0" marL="0">
+            <a:pPr marL="0" indent="0">
               <a:buNone/>
             </a:pPr>
             <a:r>
@@ -10708,13 +12982,20 @@
           </a:solidFill>
           <a:ln/>
           <a:effectLst>
-            <a:outerShdw sx="100000" sy="100000" kx="0" ky="0" algn="bl" rotWithShape="0" blurRad="127000" dist="38100" dir="8100000">
+            <a:outerShdw blurRad="127000" dist="38100" dir="8100000" algn="bl" rotWithShape="0">
               <a:srgbClr val="000000">
                 <a:alpha val="20000"/>
               </a:srgbClr>
             </a:outerShdw>
           </a:effectLst>
         </p:spPr>
+        <p:txBody>
+          <a:bodyPr/>
+          <a:lstStyle/>
+          <a:p>
+            <a:endParaRPr lang="en-US"/>
+          </a:p>
+        </p:txBody>
       </p:sp>
       <p:sp>
         <p:nvSpPr>
@@ -10740,6 +13021,13 @@
             <a:prstDash val="solid"/>
           </a:ln>
         </p:spPr>
+        <p:txBody>
+          <a:bodyPr/>
+          <a:lstStyle/>
+          <a:p>
+            <a:endParaRPr lang="en-US"/>
+          </a:p>
+        </p:txBody>
       </p:sp>
       <p:sp>
         <p:nvSpPr>
@@ -10762,7 +13050,7 @@
           <a:bodyPr wrap="square" lIns="0" tIns="0" rIns="0" bIns="0" rtlCol="0" anchor="ctr"/>
           <a:lstStyle/>
           <a:p>
-            <a:pPr algn="ctr" indent="0" marL="0">
+            <a:pPr marL="0" indent="0" algn="ctr">
               <a:buNone/>
             </a:pPr>
             <a:r>
@@ -10798,7 +13086,7 @@
           <a:bodyPr wrap="square" rtlCol="0" anchor="t"/>
           <a:lstStyle/>
           <a:p>
-            <a:pPr indent="0" marL="0">
+            <a:pPr marL="0" indent="0">
               <a:buNone/>
             </a:pPr>
             <a:r>
@@ -10809,9 +13097,6 @@
               </a:rPr>
               <a:t>✓ </a:t>
             </a:r>
-            <a:pPr indent="0" marL="0">
-              <a:buNone/>
-            </a:pPr>
             <a:r>
               <a:rPr lang="en-US" sz="1300" dirty="0">
                 <a:solidFill>
@@ -10821,9 +13106,6 @@
               <a:t>Lokot 🔒 u adresnoj traci
 </a:t>
             </a:r>
-            <a:pPr indent="0" marL="0">
-              <a:buNone/>
-            </a:pPr>
             <a:r>
               <a:rPr lang="en-US" sz="1400" dirty="0">
                 <a:solidFill>
@@ -10832,9 +13114,6 @@
               </a:rPr>
               <a:t>✓ </a:t>
             </a:r>
-            <a:pPr indent="0" marL="0">
-              <a:buNone/>
-            </a:pPr>
             <a:r>
               <a:rPr lang="en-US" sz="1300" dirty="0">
                 <a:solidFill>
@@ -10844,9 +13123,6 @@
               <a:t>Adresa počinje s https://
 </a:t>
             </a:r>
-            <a:pPr indent="0" marL="0">
-              <a:buNone/>
-            </a:pPr>
             <a:r>
               <a:rPr lang="en-US" sz="1400" dirty="0">
                 <a:solidFill>
@@ -10855,9 +13131,6 @@
               </a:rPr>
               <a:t>✓ </a:t>
             </a:r>
-            <a:pPr indent="0" marL="0">
-              <a:buNone/>
-            </a:pPr>
             <a:r>
               <a:rPr lang="en-US" sz="1300" dirty="0">
                 <a:solidFill>
@@ -10867,9 +13140,6 @@
               <a:t>Domena je točna:
 </a:t>
             </a:r>
-            <a:pPr indent="0" marL="0">
-              <a:buNone/>
-            </a:pPr>
             <a:r>
               <a:rPr lang="en-US" sz="1300" b="1" dirty="0">
                 <a:solidFill>
@@ -10879,9 +13149,6 @@
               <a:t>hpb.hr
 </a:t>
             </a:r>
-            <a:pPr indent="0" marL="0">
-              <a:buNone/>
-            </a:pPr>
             <a:r>
               <a:rPr lang="en-US" sz="1400" dirty="0">
                 <a:solidFill>
@@ -10890,9 +13157,6 @@
               </a:rPr>
               <a:t>✗ </a:t>
             </a:r>
-            <a:pPr indent="0" marL="0">
-              <a:buNone/>
-            </a:pPr>
             <a:r>
               <a:rPr lang="en-US" sz="1300" dirty="0">
                 <a:solidFill>
@@ -10902,9 +13166,6 @@
               <a:t>NE: hpb-banka.com
 </a:t>
             </a:r>
-            <a:pPr indent="0" marL="0">
-              <a:buNone/>
-            </a:pPr>
             <a:r>
               <a:rPr lang="en-US" sz="1400" dirty="0">
                 <a:solidFill>
@@ -10913,9 +13174,6 @@
               </a:rPr>
               <a:t>✗ </a:t>
             </a:r>
-            <a:pPr indent="0" marL="0">
-              <a:buNone/>
-            </a:pPr>
             <a:r>
               <a:rPr lang="en-US" sz="1300" dirty="0">
                 <a:solidFill>
@@ -10925,791 +13183,6 @@
               <a:t>NE: hpb.hr.support.net</a:t>
             </a:r>
             <a:endParaRPr lang="en-US" sz="1400" dirty="0"/>
-          </a:p>
-        </p:txBody>
-      </p:sp>
-    </p:spTree>
-  </p:cSld>
-  <p:clrMapOvr>
-    <a:masterClrMapping/>
-  </p:clrMapOvr>
-</p:sld>
-</file>
-
-<file path=ppt/slides/slide9.xml><?xml version="1.0" encoding="utf-8"?>
-<p:sld xmlns:a="http://schemas.openxmlformats.org/drawingml/2006/main" xmlns:r="http://schemas.openxmlformats.org/officeDocument/2006/relationships" xmlns:p="http://schemas.openxmlformats.org/presentationml/2006/main">
-  <p:cSld name="Slide 9">
-    <p:bg>
-      <p:bgPr>
-        <a:solidFill>
-          <a:srgbClr val="F5F5F5"/>
-        </a:solidFill>
-      </p:bgPr>
-    </p:bg>
-    <p:spTree>
-      <p:nvGrpSpPr>
-        <p:cNvPr id="1" name=""/>
-        <p:cNvGrpSpPr/>
-        <p:nvPr/>
-      </p:nvGrpSpPr>
-      <p:grpSpPr>
-        <a:xfrm>
-          <a:off x="0" y="0"/>
-          <a:ext cx="0" cy="0"/>
-          <a:chOff x="0" y="0"/>
-          <a:chExt cx="0" cy="0"/>
-        </a:xfrm>
-      </p:grpSpPr>
-      <p:sp>
-        <p:nvSpPr>
-          <p:cNvPr id="2" name="Shape 0"/>
-          <p:cNvSpPr/>
-          <p:nvPr/>
-        </p:nvSpPr>
-        <p:spPr>
-          <a:xfrm>
-            <a:off x="0" y="0"/>
-            <a:ext cx="9144000" cy="658368"/>
-          </a:xfrm>
-          <a:prstGeom prst="rect">
-            <a:avLst/>
-          </a:prstGeom>
-          <a:solidFill>
-            <a:srgbClr val="CC0000"/>
-          </a:solidFill>
-          <a:ln w="12700">
-            <a:solidFill>
-              <a:srgbClr val="CC0000"/>
-            </a:solidFill>
-            <a:prstDash val="solid"/>
-          </a:ln>
-        </p:spPr>
-      </p:sp>
-      <p:sp>
-        <p:nvSpPr>
-          <p:cNvPr id="3" name="Text 1"/>
-          <p:cNvSpPr/>
-          <p:nvPr/>
-        </p:nvSpPr>
-        <p:spPr>
-          <a:xfrm>
-            <a:off x="320040" y="0"/>
-            <a:ext cx="8503920" cy="658368"/>
-          </a:xfrm>
-          <a:prstGeom prst="rect">
-            <a:avLst/>
-          </a:prstGeom>
-          <a:noFill/>
-          <a:ln/>
-        </p:spPr>
-        <p:txBody>
-          <a:bodyPr wrap="square" lIns="0" tIns="0" rIns="0" bIns="0" rtlCol="0" anchor="ctr"/>
-          <a:lstStyle/>
-          <a:p>
-            <a:pPr indent="0" marL="0">
-              <a:buNone/>
-            </a:pPr>
-            <a:r>
-              <a:rPr lang="en-US" sz="2000" b="1" dirty="0">
-                <a:solidFill>
-                  <a:srgbClr val="FFFFFF"/>
-                </a:solidFill>
-              </a:rPr>
-              <a:t>Praktična zaštita: lozinke, 2FA i ažuriranja</a:t>
-            </a:r>
-            <a:endParaRPr lang="en-US" sz="2000" dirty="0"/>
-          </a:p>
-        </p:txBody>
-      </p:sp>
-      <p:sp>
-        <p:nvSpPr>
-          <p:cNvPr id="4" name="Shape 2"/>
-          <p:cNvSpPr/>
-          <p:nvPr/>
-        </p:nvSpPr>
-        <p:spPr>
-          <a:xfrm>
-            <a:off x="274320" y="804672"/>
-            <a:ext cx="4023360" cy="1828800"/>
-          </a:xfrm>
-          <a:prstGeom prst="rect">
-            <a:avLst/>
-          </a:prstGeom>
-          <a:solidFill>
-            <a:srgbClr val="FFFFFF"/>
-          </a:solidFill>
-          <a:ln/>
-          <a:effectLst>
-            <a:outerShdw sx="100000" sy="100000" kx="0" ky="0" algn="bl" rotWithShape="0" blurRad="101600" dist="25400" dir="8100000">
-              <a:srgbClr val="000000">
-                <a:alpha val="10000"/>
-              </a:srgbClr>
-            </a:outerShdw>
-          </a:effectLst>
-        </p:spPr>
-      </p:sp>
-      <p:sp>
-        <p:nvSpPr>
-          <p:cNvPr id="5" name="Shape 3"/>
-          <p:cNvSpPr/>
-          <p:nvPr/>
-        </p:nvSpPr>
-        <p:spPr>
-          <a:xfrm>
-            <a:off x="274320" y="804672"/>
-            <a:ext cx="73152" cy="1828800"/>
-          </a:xfrm>
-          <a:prstGeom prst="rect">
-            <a:avLst/>
-          </a:prstGeom>
-          <a:solidFill>
-            <a:srgbClr val="CC0000"/>
-          </a:solidFill>
-          <a:ln w="12700">
-            <a:solidFill>
-              <a:srgbClr val="CC0000"/>
-            </a:solidFill>
-            <a:prstDash val="solid"/>
-          </a:ln>
-        </p:spPr>
-      </p:sp>
-      <p:sp>
-        <p:nvSpPr>
-          <p:cNvPr id="6" name="Shape 4"/>
-          <p:cNvSpPr/>
-          <p:nvPr/>
-        </p:nvSpPr>
-        <p:spPr>
-          <a:xfrm>
-            <a:off x="438912" y="1051560"/>
-            <a:ext cx="594360" cy="594360"/>
-          </a:xfrm>
-          <a:prstGeom prst="ellipse">
-            <a:avLst/>
-          </a:prstGeom>
-          <a:solidFill>
-            <a:srgbClr val="CC0000"/>
-          </a:solidFill>
-          <a:ln w="12700">
-            <a:solidFill>
-              <a:srgbClr val="CC0000"/>
-            </a:solidFill>
-            <a:prstDash val="solid"/>
-          </a:ln>
-        </p:spPr>
-      </p:sp>
-      <p:pic>
-        <p:nvPicPr>
-          <p:cNvPr id="7" name="Image 0" descr="preencoded.png">    </p:cNvPr>
-          <p:cNvPicPr>
-            <a:picLocks noChangeAspect="1"/>
-          </p:cNvPicPr>
-          <p:nvPr/>
-        </p:nvPicPr>
-        <p:blipFill>
-          <a:blip r:embed="rId1"/>
-          <a:stretch>
-            <a:fillRect/>
-          </a:stretch>
-        </p:blipFill>
-        <p:spPr>
-          <a:xfrm>
-            <a:off x="493776" y="1106424"/>
-            <a:ext cx="484632" cy="484632"/>
-          </a:xfrm>
-          <a:prstGeom prst="rect">
-            <a:avLst/>
-          </a:prstGeom>
-        </p:spPr>
-      </p:pic>
-      <p:sp>
-        <p:nvSpPr>
-          <p:cNvPr id="8" name="Text 5"/>
-          <p:cNvSpPr/>
-          <p:nvPr/>
-        </p:nvSpPr>
-        <p:spPr>
-          <a:xfrm>
-            <a:off x="1143000" y="950976"/>
-            <a:ext cx="3063240" cy="384048"/>
-          </a:xfrm>
-          <a:prstGeom prst="rect">
-            <a:avLst/>
-          </a:prstGeom>
-          <a:noFill/>
-          <a:ln/>
-        </p:spPr>
-        <p:txBody>
-          <a:bodyPr wrap="square" lIns="0" tIns="0" rIns="0" bIns="0" rtlCol="0" anchor="ctr"/>
-          <a:lstStyle/>
-          <a:p>
-            <a:pPr indent="0" marL="0">
-              <a:buNone/>
-            </a:pPr>
-            <a:r>
-              <a:rPr lang="en-US" sz="1400" b="1" dirty="0">
-                <a:solidFill>
-                  <a:srgbClr val="1A1A1A"/>
-                </a:solidFill>
-              </a:rPr>
-              <a:t>Dobra lozinka</a:t>
-            </a:r>
-            <a:endParaRPr lang="en-US" sz="1400" dirty="0"/>
-          </a:p>
-        </p:txBody>
-      </p:sp>
-      <p:sp>
-        <p:nvSpPr>
-          <p:cNvPr id="9" name="Text 6"/>
-          <p:cNvSpPr/>
-          <p:nvPr/>
-        </p:nvSpPr>
-        <p:spPr>
-          <a:xfrm>
-            <a:off x="1143000" y="1316736"/>
-            <a:ext cx="3063240" cy="1207008"/>
-          </a:xfrm>
-          <a:prstGeom prst="rect">
-            <a:avLst/>
-          </a:prstGeom>
-          <a:noFill/>
-          <a:ln/>
-        </p:spPr>
-        <p:txBody>
-          <a:bodyPr wrap="square" rtlCol="0" anchor="t"/>
-          <a:lstStyle/>
-          <a:p>
-            <a:pPr indent="0" marL="0">
-              <a:buNone/>
-            </a:pPr>
-            <a:r>
-              <a:rPr lang="en-US" sz="1200" dirty="0">
-                <a:solidFill>
-                  <a:srgbClr val="444444"/>
-                </a:solidFill>
-              </a:rPr>
-              <a:t>Dugačka, nasumična, jedinstvena za svaki račun. Rečenica: 'Moja mačka voli ribu 7x!' Upravitelj lozinki: Bitwarden (besplatan).</a:t>
-            </a:r>
-            <a:endParaRPr lang="en-US" sz="1200" dirty="0"/>
-          </a:p>
-        </p:txBody>
-      </p:sp>
-      <p:sp>
-        <p:nvSpPr>
-          <p:cNvPr id="10" name="Shape 7"/>
-          <p:cNvSpPr/>
-          <p:nvPr/>
-        </p:nvSpPr>
-        <p:spPr>
-          <a:xfrm>
-            <a:off x="4754880" y="804672"/>
-            <a:ext cx="4023360" cy="1828800"/>
-          </a:xfrm>
-          <a:prstGeom prst="rect">
-            <a:avLst/>
-          </a:prstGeom>
-          <a:solidFill>
-            <a:srgbClr val="FFFFFF"/>
-          </a:solidFill>
-          <a:ln/>
-          <a:effectLst>
-            <a:outerShdw sx="100000" sy="100000" kx="0" ky="0" algn="bl" rotWithShape="0" blurRad="101600" dist="25400" dir="8100000">
-              <a:srgbClr val="000000">
-                <a:alpha val="10000"/>
-              </a:srgbClr>
-            </a:outerShdw>
-          </a:effectLst>
-        </p:spPr>
-      </p:sp>
-      <p:sp>
-        <p:nvSpPr>
-          <p:cNvPr id="11" name="Shape 8"/>
-          <p:cNvSpPr/>
-          <p:nvPr/>
-        </p:nvSpPr>
-        <p:spPr>
-          <a:xfrm>
-            <a:off x="4754880" y="804672"/>
-            <a:ext cx="73152" cy="1828800"/>
-          </a:xfrm>
-          <a:prstGeom prst="rect">
-            <a:avLst/>
-          </a:prstGeom>
-          <a:solidFill>
-            <a:srgbClr val="CC0000"/>
-          </a:solidFill>
-          <a:ln w="12700">
-            <a:solidFill>
-              <a:srgbClr val="CC0000"/>
-            </a:solidFill>
-            <a:prstDash val="solid"/>
-          </a:ln>
-        </p:spPr>
-      </p:sp>
-      <p:sp>
-        <p:nvSpPr>
-          <p:cNvPr id="12" name="Shape 9"/>
-          <p:cNvSpPr/>
-          <p:nvPr/>
-        </p:nvSpPr>
-        <p:spPr>
-          <a:xfrm>
-            <a:off x="4919472" y="1051560"/>
-            <a:ext cx="594360" cy="594360"/>
-          </a:xfrm>
-          <a:prstGeom prst="ellipse">
-            <a:avLst/>
-          </a:prstGeom>
-          <a:solidFill>
-            <a:srgbClr val="CC0000"/>
-          </a:solidFill>
-          <a:ln w="12700">
-            <a:solidFill>
-              <a:srgbClr val="CC0000"/>
-            </a:solidFill>
-            <a:prstDash val="solid"/>
-          </a:ln>
-        </p:spPr>
-      </p:sp>
-      <p:pic>
-        <p:nvPicPr>
-          <p:cNvPr id="13" name="Image 1" descr="preencoded.png">    </p:cNvPr>
-          <p:cNvPicPr>
-            <a:picLocks noChangeAspect="1"/>
-          </p:cNvPicPr>
-          <p:nvPr/>
-        </p:nvPicPr>
-        <p:blipFill>
-          <a:blip r:embed="rId2"/>
-          <a:stretch>
-            <a:fillRect/>
-          </a:stretch>
-        </p:blipFill>
-        <p:spPr>
-          <a:xfrm>
-            <a:off x="4974336" y="1106424"/>
-            <a:ext cx="484632" cy="484632"/>
-          </a:xfrm>
-          <a:prstGeom prst="rect">
-            <a:avLst/>
-          </a:prstGeom>
-        </p:spPr>
-      </p:pic>
-      <p:sp>
-        <p:nvSpPr>
-          <p:cNvPr id="14" name="Text 10"/>
-          <p:cNvSpPr/>
-          <p:nvPr/>
-        </p:nvSpPr>
-        <p:spPr>
-          <a:xfrm>
-            <a:off x="5623560" y="950976"/>
-            <a:ext cx="3063240" cy="384048"/>
-          </a:xfrm>
-          <a:prstGeom prst="rect">
-            <a:avLst/>
-          </a:prstGeom>
-          <a:noFill/>
-          <a:ln/>
-        </p:spPr>
-        <p:txBody>
-          <a:bodyPr wrap="square" lIns="0" tIns="0" rIns="0" bIns="0" rtlCol="0" anchor="ctr"/>
-          <a:lstStyle/>
-          <a:p>
-            <a:pPr indent="0" marL="0">
-              <a:buNone/>
-            </a:pPr>
-            <a:r>
-              <a:rPr lang="en-US" sz="1400" b="1" dirty="0">
-                <a:solidFill>
-                  <a:srgbClr val="1A1A1A"/>
-                </a:solidFill>
-              </a:rPr>
-              <a:t>Dvofaktorna autentikacija (2FA)</a:t>
-            </a:r>
-            <a:endParaRPr lang="en-US" sz="1400" dirty="0"/>
-          </a:p>
-        </p:txBody>
-      </p:sp>
-      <p:sp>
-        <p:nvSpPr>
-          <p:cNvPr id="15" name="Text 11"/>
-          <p:cNvSpPr/>
-          <p:nvPr/>
-        </p:nvSpPr>
-        <p:spPr>
-          <a:xfrm>
-            <a:off x="5623560" y="1316736"/>
-            <a:ext cx="3063240" cy="1207008"/>
-          </a:xfrm>
-          <a:prstGeom prst="rect">
-            <a:avLst/>
-          </a:prstGeom>
-          <a:noFill/>
-          <a:ln/>
-        </p:spPr>
-        <p:txBody>
-          <a:bodyPr wrap="square" rtlCol="0" anchor="t"/>
-          <a:lstStyle/>
-          <a:p>
-            <a:pPr indent="0" marL="0">
-              <a:buNone/>
-            </a:pPr>
-            <a:r>
-              <a:rPr lang="en-US" sz="1200" dirty="0">
-                <a:solidFill>
-                  <a:srgbClr val="444444"/>
-                </a:solidFill>
-              </a:rPr>
-              <a:t>Drugi sloj zaštite uz lozinku — SMS kod na telefon. Uključite za e-mail, Facebook i bankarstvo.</a:t>
-            </a:r>
-            <a:endParaRPr lang="en-US" sz="1200" dirty="0"/>
-          </a:p>
-        </p:txBody>
-      </p:sp>
-      <p:sp>
-        <p:nvSpPr>
-          <p:cNvPr id="16" name="Shape 12"/>
-          <p:cNvSpPr/>
-          <p:nvPr/>
-        </p:nvSpPr>
-        <p:spPr>
-          <a:xfrm>
-            <a:off x="274320" y="2816352"/>
-            <a:ext cx="4023360" cy="1828800"/>
-          </a:xfrm>
-          <a:prstGeom prst="rect">
-            <a:avLst/>
-          </a:prstGeom>
-          <a:solidFill>
-            <a:srgbClr val="FFFFFF"/>
-          </a:solidFill>
-          <a:ln/>
-          <a:effectLst>
-            <a:outerShdw sx="100000" sy="100000" kx="0" ky="0" algn="bl" rotWithShape="0" blurRad="101600" dist="25400" dir="8100000">
-              <a:srgbClr val="000000">
-                <a:alpha val="10000"/>
-              </a:srgbClr>
-            </a:outerShdw>
-          </a:effectLst>
-        </p:spPr>
-      </p:sp>
-      <p:sp>
-        <p:nvSpPr>
-          <p:cNvPr id="17" name="Shape 13"/>
-          <p:cNvSpPr/>
-          <p:nvPr/>
-        </p:nvSpPr>
-        <p:spPr>
-          <a:xfrm>
-            <a:off x="274320" y="2816352"/>
-            <a:ext cx="73152" cy="1828800"/>
-          </a:xfrm>
-          <a:prstGeom prst="rect">
-            <a:avLst/>
-          </a:prstGeom>
-          <a:solidFill>
-            <a:srgbClr val="CC0000"/>
-          </a:solidFill>
-          <a:ln w="12700">
-            <a:solidFill>
-              <a:srgbClr val="CC0000"/>
-            </a:solidFill>
-            <a:prstDash val="solid"/>
-          </a:ln>
-        </p:spPr>
-      </p:sp>
-      <p:sp>
-        <p:nvSpPr>
-          <p:cNvPr id="18" name="Shape 14"/>
-          <p:cNvSpPr/>
-          <p:nvPr/>
-        </p:nvSpPr>
-        <p:spPr>
-          <a:xfrm>
-            <a:off x="438912" y="3063240"/>
-            <a:ext cx="594360" cy="594360"/>
-          </a:xfrm>
-          <a:prstGeom prst="ellipse">
-            <a:avLst/>
-          </a:prstGeom>
-          <a:solidFill>
-            <a:srgbClr val="CC0000"/>
-          </a:solidFill>
-          <a:ln w="12700">
-            <a:solidFill>
-              <a:srgbClr val="CC0000"/>
-            </a:solidFill>
-            <a:prstDash val="solid"/>
-          </a:ln>
-        </p:spPr>
-      </p:sp>
-      <p:pic>
-        <p:nvPicPr>
-          <p:cNvPr id="19" name="Image 2" descr="preencoded.png">    </p:cNvPr>
-          <p:cNvPicPr>
-            <a:picLocks noChangeAspect="1"/>
-          </p:cNvPicPr>
-          <p:nvPr/>
-        </p:nvPicPr>
-        <p:blipFill>
-          <a:blip r:embed="rId3"/>
-          <a:stretch>
-            <a:fillRect/>
-          </a:stretch>
-        </p:blipFill>
-        <p:spPr>
-          <a:xfrm>
-            <a:off x="493776" y="3118104"/>
-            <a:ext cx="484632" cy="484632"/>
-          </a:xfrm>
-          <a:prstGeom prst="rect">
-            <a:avLst/>
-          </a:prstGeom>
-        </p:spPr>
-      </p:pic>
-      <p:sp>
-        <p:nvSpPr>
-          <p:cNvPr id="20" name="Text 15"/>
-          <p:cNvSpPr/>
-          <p:nvPr/>
-        </p:nvSpPr>
-        <p:spPr>
-          <a:xfrm>
-            <a:off x="1143000" y="2962656"/>
-            <a:ext cx="3063240" cy="384048"/>
-          </a:xfrm>
-          <a:prstGeom prst="rect">
-            <a:avLst/>
-          </a:prstGeom>
-          <a:noFill/>
-          <a:ln/>
-        </p:spPr>
-        <p:txBody>
-          <a:bodyPr wrap="square" lIns="0" tIns="0" rIns="0" bIns="0" rtlCol="0" anchor="ctr"/>
-          <a:lstStyle/>
-          <a:p>
-            <a:pPr indent="0" marL="0">
-              <a:buNone/>
-            </a:pPr>
-            <a:r>
-              <a:rPr lang="en-US" sz="1400" b="1" dirty="0">
-                <a:solidFill>
-                  <a:srgbClr val="1A1A1A"/>
-                </a:solidFill>
-              </a:rPr>
-              <a:t>Ažuriranja sustava</a:t>
-            </a:r>
-            <a:endParaRPr lang="en-US" sz="1400" dirty="0"/>
-          </a:p>
-        </p:txBody>
-      </p:sp>
-      <p:sp>
-        <p:nvSpPr>
-          <p:cNvPr id="21" name="Text 16"/>
-          <p:cNvSpPr/>
-          <p:nvPr/>
-        </p:nvSpPr>
-        <p:spPr>
-          <a:xfrm>
-            <a:off x="1143000" y="3328416"/>
-            <a:ext cx="3063240" cy="1207008"/>
-          </a:xfrm>
-          <a:prstGeom prst="rect">
-            <a:avLst/>
-          </a:prstGeom>
-          <a:noFill/>
-          <a:ln/>
-        </p:spPr>
-        <p:txBody>
-          <a:bodyPr wrap="square" rtlCol="0" anchor="t"/>
-          <a:lstStyle/>
-          <a:p>
-            <a:pPr indent="0" marL="0">
-              <a:buNone/>
-            </a:pPr>
-            <a:r>
-              <a:rPr lang="en-US" sz="1200" dirty="0">
-                <a:solidFill>
-                  <a:srgbClr val="444444"/>
-                </a:solidFill>
-              </a:rPr>
-              <a:t>Redovito ažurirajte Windows, Android i iOS. Ažuriranja krpe sigurnosne rupe koje hakeri aktivno iskorištavaju.</a:t>
-            </a:r>
-            <a:endParaRPr lang="en-US" sz="1200" dirty="0"/>
-          </a:p>
-        </p:txBody>
-      </p:sp>
-      <p:sp>
-        <p:nvSpPr>
-          <p:cNvPr id="22" name="Shape 17"/>
-          <p:cNvSpPr/>
-          <p:nvPr/>
-        </p:nvSpPr>
-        <p:spPr>
-          <a:xfrm>
-            <a:off x="4754880" y="2816352"/>
-            <a:ext cx="4023360" cy="1828800"/>
-          </a:xfrm>
-          <a:prstGeom prst="rect">
-            <a:avLst/>
-          </a:prstGeom>
-          <a:solidFill>
-            <a:srgbClr val="FFFFFF"/>
-          </a:solidFill>
-          <a:ln/>
-          <a:effectLst>
-            <a:outerShdw sx="100000" sy="100000" kx="0" ky="0" algn="bl" rotWithShape="0" blurRad="101600" dist="25400" dir="8100000">
-              <a:srgbClr val="000000">
-                <a:alpha val="10000"/>
-              </a:srgbClr>
-            </a:outerShdw>
-          </a:effectLst>
-        </p:spPr>
-      </p:sp>
-      <p:sp>
-        <p:nvSpPr>
-          <p:cNvPr id="23" name="Shape 18"/>
-          <p:cNvSpPr/>
-          <p:nvPr/>
-        </p:nvSpPr>
-        <p:spPr>
-          <a:xfrm>
-            <a:off x="4754880" y="2816352"/>
-            <a:ext cx="73152" cy="1828800"/>
-          </a:xfrm>
-          <a:prstGeom prst="rect">
-            <a:avLst/>
-          </a:prstGeom>
-          <a:solidFill>
-            <a:srgbClr val="CC0000"/>
-          </a:solidFill>
-          <a:ln w="12700">
-            <a:solidFill>
-              <a:srgbClr val="CC0000"/>
-            </a:solidFill>
-            <a:prstDash val="solid"/>
-          </a:ln>
-        </p:spPr>
-      </p:sp>
-      <p:sp>
-        <p:nvSpPr>
-          <p:cNvPr id="24" name="Shape 19"/>
-          <p:cNvSpPr/>
-          <p:nvPr/>
-        </p:nvSpPr>
-        <p:spPr>
-          <a:xfrm>
-            <a:off x="4919472" y="3063240"/>
-            <a:ext cx="594360" cy="594360"/>
-          </a:xfrm>
-          <a:prstGeom prst="ellipse">
-            <a:avLst/>
-          </a:prstGeom>
-          <a:solidFill>
-            <a:srgbClr val="CC0000"/>
-          </a:solidFill>
-          <a:ln w="12700">
-            <a:solidFill>
-              <a:srgbClr val="CC0000"/>
-            </a:solidFill>
-            <a:prstDash val="solid"/>
-          </a:ln>
-        </p:spPr>
-      </p:sp>
-      <p:pic>
-        <p:nvPicPr>
-          <p:cNvPr id="25" name="Image 3" descr="preencoded.png">    </p:cNvPr>
-          <p:cNvPicPr>
-            <a:picLocks noChangeAspect="1"/>
-          </p:cNvPicPr>
-          <p:nvPr/>
-        </p:nvPicPr>
-        <p:blipFill>
-          <a:blip r:embed="rId4"/>
-          <a:stretch>
-            <a:fillRect/>
-          </a:stretch>
-        </p:blipFill>
-        <p:spPr>
-          <a:xfrm>
-            <a:off x="4974336" y="3118104"/>
-            <a:ext cx="484632" cy="484632"/>
-          </a:xfrm>
-          <a:prstGeom prst="rect">
-            <a:avLst/>
-          </a:prstGeom>
-        </p:spPr>
-      </p:pic>
-      <p:sp>
-        <p:nvSpPr>
-          <p:cNvPr id="26" name="Text 20"/>
-          <p:cNvSpPr/>
-          <p:nvPr/>
-        </p:nvSpPr>
-        <p:spPr>
-          <a:xfrm>
-            <a:off x="5623560" y="2962656"/>
-            <a:ext cx="3063240" cy="384048"/>
-          </a:xfrm>
-          <a:prstGeom prst="rect">
-            <a:avLst/>
-          </a:prstGeom>
-          <a:noFill/>
-          <a:ln/>
-        </p:spPr>
-        <p:txBody>
-          <a:bodyPr wrap="square" lIns="0" tIns="0" rIns="0" bIns="0" rtlCol="0" anchor="ctr"/>
-          <a:lstStyle/>
-          <a:p>
-            <a:pPr indent="0" marL="0">
-              <a:buNone/>
-            </a:pPr>
-            <a:r>
-              <a:rPr lang="en-US" sz="1400" b="1" dirty="0">
-                <a:solidFill>
-                  <a:srgbClr val="1A1A1A"/>
-                </a:solidFill>
-              </a:rPr>
-              <a:t>Sigurnosna kopija (backup)</a:t>
-            </a:r>
-            <a:endParaRPr lang="en-US" sz="1400" dirty="0"/>
-          </a:p>
-        </p:txBody>
-      </p:sp>
-      <p:sp>
-        <p:nvSpPr>
-          <p:cNvPr id="27" name="Text 21"/>
-          <p:cNvSpPr/>
-          <p:nvPr/>
-        </p:nvSpPr>
-        <p:spPr>
-          <a:xfrm>
-            <a:off x="5623560" y="3328416"/>
-            <a:ext cx="3063240" cy="1207008"/>
-          </a:xfrm>
-          <a:prstGeom prst="rect">
-            <a:avLst/>
-          </a:prstGeom>
-          <a:noFill/>
-          <a:ln/>
-        </p:spPr>
-        <p:txBody>
-          <a:bodyPr wrap="square" rtlCol="0" anchor="t"/>
-          <a:lstStyle/>
-          <a:p>
-            <a:pPr indent="0" marL="0">
-              <a:buNone/>
-            </a:pPr>
-            <a:r>
-              <a:rPr lang="en-US" sz="1200" dirty="0">
-                <a:solidFill>
-                  <a:srgbClr val="444444"/>
-                </a:solidFill>
-              </a:rPr>
-              <a:t>Jedina prava zaštita od ransomwarea. Google Photos za slike, vanjski disk za dokumente — jednom tjedno.</a:t>
-            </a:r>
-            <a:endParaRPr lang="en-US" sz="1200" dirty="0"/>
           </a:p>
         </p:txBody>
       </p:sp>
@@ -12014,4 +13487,319 @@
     </a:ext>
   </a:extLst>
 </a:theme>
+</file>
+
+<file path=ppt/theme/theme2.xml><?xml version="1.0" encoding="utf-8"?>
+<a:theme xmlns:a="http://schemas.openxmlformats.org/drawingml/2006/main" name="Office Theme">
+  <a:themeElements>
+    <a:clrScheme name="Office">
+      <a:dk1>
+        <a:sysClr val="windowText" lastClr="000000"/>
+      </a:dk1>
+      <a:lt1>
+        <a:sysClr val="window" lastClr="FFFFFF"/>
+      </a:lt1>
+      <a:dk2>
+        <a:srgbClr val="0E2841"/>
+      </a:dk2>
+      <a:lt2>
+        <a:srgbClr val="E8E8E8"/>
+      </a:lt2>
+      <a:accent1>
+        <a:srgbClr val="156082"/>
+      </a:accent1>
+      <a:accent2>
+        <a:srgbClr val="E97132"/>
+      </a:accent2>
+      <a:accent3>
+        <a:srgbClr val="196B24"/>
+      </a:accent3>
+      <a:accent4>
+        <a:srgbClr val="0F9ED5"/>
+      </a:accent4>
+      <a:accent5>
+        <a:srgbClr val="A02B93"/>
+      </a:accent5>
+      <a:accent6>
+        <a:srgbClr val="4EA72E"/>
+      </a:accent6>
+      <a:hlink>
+        <a:srgbClr val="467886"/>
+      </a:hlink>
+      <a:folHlink>
+        <a:srgbClr val="96607D"/>
+      </a:folHlink>
+    </a:clrScheme>
+    <a:fontScheme name="Office">
+      <a:majorFont>
+        <a:latin typeface="Aptos Display" panose="02110004020202020204"/>
+        <a:ea typeface=""/>
+        <a:cs typeface=""/>
+        <a:font script="Jpan" typeface="游ゴシック Light"/>
+        <a:font script="Hang" typeface="맑은 고딕"/>
+        <a:font script="Hans" typeface="等线 Light"/>
+        <a:font script="Hant" typeface="新細明體"/>
+        <a:font script="Arab" typeface="Times New Roman"/>
+        <a:font script="Hebr" typeface="Times New Roman"/>
+        <a:font script="Thai" typeface="Angsana New"/>
+        <a:font script="Ethi" typeface="Nyala"/>
+        <a:font script="Beng" typeface="Vrinda"/>
+        <a:font script="Gujr" typeface="Shruti"/>
+        <a:font script="Khmr" typeface="MoolBoran"/>
+        <a:font script="Knda" typeface="Tunga"/>
+        <a:font script="Guru" typeface="Raavi"/>
+        <a:font script="Cans" typeface="Euphemia"/>
+        <a:font script="Cher" typeface="Plantagenet Cherokee"/>
+        <a:font script="Yiii" typeface="Microsoft Yi Baiti"/>
+        <a:font script="Tibt" typeface="Microsoft Himalaya"/>
+        <a:font script="Thaa" typeface="MV Boli"/>
+        <a:font script="Deva" typeface="Mangal"/>
+        <a:font script="Telu" typeface="Gautami"/>
+        <a:font script="Taml" typeface="Latha"/>
+        <a:font script="Syrc" typeface="Estrangelo Edessa"/>
+        <a:font script="Orya" typeface="Kalinga"/>
+        <a:font script="Mlym" typeface="Kartika"/>
+        <a:font script="Laoo" typeface="DokChampa"/>
+        <a:font script="Sinh" typeface="Iskoola Pota"/>
+        <a:font script="Mong" typeface="Mongolian Baiti"/>
+        <a:font script="Viet" typeface="Times New Roman"/>
+        <a:font script="Uigh" typeface="Microsoft Uighur"/>
+        <a:font script="Geor" typeface="Sylfaen"/>
+        <a:font script="Armn" typeface="Arial"/>
+        <a:font script="Bugi" typeface="Leelawadee UI"/>
+        <a:font script="Bopo" typeface="Microsoft JhengHei"/>
+        <a:font script="Java" typeface="Javanese Text"/>
+        <a:font script="Lisu" typeface="Segoe UI"/>
+        <a:font script="Mymr" typeface="Myanmar Text"/>
+        <a:font script="Nkoo" typeface="Ebrima"/>
+        <a:font script="Olck" typeface="Nirmala UI"/>
+        <a:font script="Osma" typeface="Ebrima"/>
+        <a:font script="Phag" typeface="Phagspa"/>
+        <a:font script="Syrn" typeface="Estrangelo Edessa"/>
+        <a:font script="Syrj" typeface="Estrangelo Edessa"/>
+        <a:font script="Syre" typeface="Estrangelo Edessa"/>
+        <a:font script="Sora" typeface="Nirmala UI"/>
+        <a:font script="Tale" typeface="Microsoft Tai Le"/>
+        <a:font script="Talu" typeface="Microsoft New Tai Lue"/>
+        <a:font script="Tfng" typeface="Ebrima"/>
+      </a:majorFont>
+      <a:minorFont>
+        <a:latin typeface="Aptos" panose="02110004020202020204"/>
+        <a:ea typeface=""/>
+        <a:cs typeface=""/>
+        <a:font script="Jpan" typeface="游ゴシック"/>
+        <a:font script="Hang" typeface="맑은 고딕"/>
+        <a:font script="Hans" typeface="等线"/>
+        <a:font script="Hant" typeface="新細明體"/>
+        <a:font script="Arab" typeface="Arial"/>
+        <a:font script="Hebr" typeface="Arial"/>
+        <a:font script="Thai" typeface="Cordia New"/>
+        <a:font script="Ethi" typeface="Nyala"/>
+        <a:font script="Beng" typeface="Vrinda"/>
+        <a:font script="Gujr" typeface="Shruti"/>
+        <a:font script="Khmr" typeface="DaunPenh"/>
+        <a:font script="Knda" typeface="Tunga"/>
+        <a:font script="Guru" typeface="Raavi"/>
+        <a:font script="Cans" typeface="Euphemia"/>
+        <a:font script="Cher" typeface="Plantagenet Cherokee"/>
+        <a:font script="Yiii" typeface="Microsoft Yi Baiti"/>
+        <a:font script="Tibt" typeface="Microsoft Himalaya"/>
+        <a:font script="Thaa" typeface="MV Boli"/>
+        <a:font script="Deva" typeface="Mangal"/>
+        <a:font script="Telu" typeface="Gautami"/>
+        <a:font script="Taml" typeface="Latha"/>
+        <a:font script="Syrc" typeface="Estrangelo Edessa"/>
+        <a:font script="Orya" typeface="Kalinga"/>
+        <a:font script="Mlym" typeface="Kartika"/>
+        <a:font script="Laoo" typeface="DokChampa"/>
+        <a:font script="Sinh" typeface="Iskoola Pota"/>
+        <a:font script="Mong" typeface="Mongolian Baiti"/>
+        <a:font script="Viet" typeface="Arial"/>
+        <a:font script="Uigh" typeface="Microsoft Uighur"/>
+        <a:font script="Geor" typeface="Sylfaen"/>
+        <a:font script="Armn" typeface="Arial"/>
+        <a:font script="Bugi" typeface="Leelawadee UI"/>
+        <a:font script="Bopo" typeface="Microsoft JhengHei"/>
+        <a:font script="Java" typeface="Javanese Text"/>
+        <a:font script="Lisu" typeface="Segoe UI"/>
+        <a:font script="Mymr" typeface="Myanmar Text"/>
+        <a:font script="Nkoo" typeface="Ebrima"/>
+        <a:font script="Olck" typeface="Nirmala UI"/>
+        <a:font script="Osma" typeface="Ebrima"/>
+        <a:font script="Phag" typeface="Phagspa"/>
+        <a:font script="Syrn" typeface="Estrangelo Edessa"/>
+        <a:font script="Syrj" typeface="Estrangelo Edessa"/>
+        <a:font script="Syre" typeface="Estrangelo Edessa"/>
+        <a:font script="Sora" typeface="Nirmala UI"/>
+        <a:font script="Tale" typeface="Microsoft Tai Le"/>
+        <a:font script="Talu" typeface="Microsoft New Tai Lue"/>
+        <a:font script="Tfng" typeface="Ebrima"/>
+      </a:minorFont>
+    </a:fontScheme>
+    <a:fmtScheme name="Office">
+      <a:fillStyleLst>
+        <a:solidFill>
+          <a:schemeClr val="phClr"/>
+        </a:solidFill>
+        <a:gradFill rotWithShape="1">
+          <a:gsLst>
+            <a:gs pos="0">
+              <a:schemeClr val="phClr">
+                <a:lumMod val="110000"/>
+                <a:satMod val="105000"/>
+                <a:tint val="67000"/>
+              </a:schemeClr>
+            </a:gs>
+            <a:gs pos="50000">
+              <a:schemeClr val="phClr">
+                <a:lumMod val="105000"/>
+                <a:satMod val="103000"/>
+                <a:tint val="73000"/>
+              </a:schemeClr>
+            </a:gs>
+            <a:gs pos="100000">
+              <a:schemeClr val="phClr">
+                <a:lumMod val="105000"/>
+                <a:satMod val="109000"/>
+                <a:tint val="81000"/>
+              </a:schemeClr>
+            </a:gs>
+          </a:gsLst>
+          <a:lin ang="5400000" scaled="0"/>
+        </a:gradFill>
+        <a:gradFill rotWithShape="1">
+          <a:gsLst>
+            <a:gs pos="0">
+              <a:schemeClr val="phClr">
+                <a:satMod val="103000"/>
+                <a:lumMod val="102000"/>
+                <a:tint val="94000"/>
+              </a:schemeClr>
+            </a:gs>
+            <a:gs pos="50000">
+              <a:schemeClr val="phClr">
+                <a:satMod val="110000"/>
+                <a:lumMod val="100000"/>
+                <a:shade val="100000"/>
+              </a:schemeClr>
+            </a:gs>
+            <a:gs pos="100000">
+              <a:schemeClr val="phClr">
+                <a:lumMod val="99000"/>
+                <a:satMod val="120000"/>
+                <a:shade val="78000"/>
+              </a:schemeClr>
+            </a:gs>
+          </a:gsLst>
+          <a:lin ang="5400000" scaled="0"/>
+        </a:gradFill>
+      </a:fillStyleLst>
+      <a:lnStyleLst>
+        <a:ln w="12700" cap="flat" cmpd="sng" algn="ctr">
+          <a:solidFill>
+            <a:schemeClr val="phClr"/>
+          </a:solidFill>
+          <a:prstDash val="solid"/>
+          <a:miter lim="800000"/>
+        </a:ln>
+        <a:ln w="19050" cap="flat" cmpd="sng" algn="ctr">
+          <a:solidFill>
+            <a:schemeClr val="phClr"/>
+          </a:solidFill>
+          <a:prstDash val="solid"/>
+          <a:miter lim="800000"/>
+        </a:ln>
+        <a:ln w="25400" cap="flat" cmpd="sng" algn="ctr">
+          <a:solidFill>
+            <a:schemeClr val="phClr"/>
+          </a:solidFill>
+          <a:prstDash val="solid"/>
+          <a:miter lim="800000"/>
+        </a:ln>
+      </a:lnStyleLst>
+      <a:effectStyleLst>
+        <a:effectStyle>
+          <a:effectLst/>
+        </a:effectStyle>
+        <a:effectStyle>
+          <a:effectLst/>
+        </a:effectStyle>
+        <a:effectStyle>
+          <a:effectLst>
+            <a:outerShdw blurRad="57150" dist="19050" dir="5400000" algn="ctr" rotWithShape="0">
+              <a:srgbClr val="000000">
+                <a:alpha val="63000"/>
+              </a:srgbClr>
+            </a:outerShdw>
+          </a:effectLst>
+        </a:effectStyle>
+      </a:effectStyleLst>
+      <a:bgFillStyleLst>
+        <a:solidFill>
+          <a:schemeClr val="phClr"/>
+        </a:solidFill>
+        <a:solidFill>
+          <a:schemeClr val="phClr">
+            <a:tint val="95000"/>
+            <a:satMod val="170000"/>
+          </a:schemeClr>
+        </a:solidFill>
+        <a:gradFill rotWithShape="1">
+          <a:gsLst>
+            <a:gs pos="0">
+              <a:schemeClr val="phClr">
+                <a:tint val="93000"/>
+                <a:satMod val="150000"/>
+                <a:shade val="98000"/>
+                <a:lumMod val="102000"/>
+              </a:schemeClr>
+            </a:gs>
+            <a:gs pos="50000">
+              <a:schemeClr val="phClr">
+                <a:tint val="98000"/>
+                <a:satMod val="130000"/>
+                <a:shade val="90000"/>
+                <a:lumMod val="103000"/>
+              </a:schemeClr>
+            </a:gs>
+            <a:gs pos="100000">
+              <a:schemeClr val="phClr">
+                <a:shade val="63000"/>
+                <a:satMod val="120000"/>
+              </a:schemeClr>
+            </a:gs>
+          </a:gsLst>
+          <a:lin ang="5400000" scaled="0"/>
+        </a:gradFill>
+      </a:bgFillStyleLst>
+    </a:fmtScheme>
+  </a:themeElements>
+  <a:objectDefaults>
+    <a:lnDef>
+      <a:spPr/>
+      <a:bodyPr/>
+      <a:lstStyle/>
+      <a:style>
+        <a:lnRef idx="2">
+          <a:schemeClr val="accent1"/>
+        </a:lnRef>
+        <a:fillRef idx="0">
+          <a:schemeClr val="accent1"/>
+        </a:fillRef>
+        <a:effectRef idx="1">
+          <a:schemeClr val="accent1"/>
+        </a:effectRef>
+        <a:fontRef idx="minor">
+          <a:schemeClr val="tx1"/>
+        </a:fontRef>
+      </a:style>
+    </a:lnDef>
+  </a:objectDefaults>
+  <a:extraClrSchemeLst/>
+  <a:extLst>
+    <a:ext uri="{05A4C25C-085E-4340-85A3-A5531E510DB2}">
+      <thm15:themeFamily xmlns:thm15="http://schemas.microsoft.com/office/thememl/2012/main" name="Office Theme" id="{2E142A2C-CD16-42D6-873A-C26D2A0506FA}" vid="{1BDDFF52-6CD6-40A5-AB3C-68EB2F1E4D0A}"/>
+    </a:ext>
+  </a:extLst>
+</a:theme>
 </file>
--- a/praksa/RAST/izradaprezentacije/Sigurnost_na_internetu_prezentacija.pptx
+++ b/praksa/RAST/izradaprezentacije/Sigurnost_na_internetu_prezentacija.pptx
@@ -8493,6 +8493,48 @@
       </p:grpSpPr>
       <p:sp>
         <p:nvSpPr>
+          <p:cNvPr id="13" name="Rectangle 12">
+            <a:extLst>
+              <a:ext uri="{FF2B5EF4-FFF2-40B4-BE49-F238E27FC236}">
+                <a16:creationId xmlns:a16="http://schemas.microsoft.com/office/drawing/2014/main" id="{64FE57BA-4028-EA00-B056-EEB207710DBB}"/>
+              </a:ext>
+            </a:extLst>
+          </p:cNvPr>
+          <p:cNvSpPr/>
+          <p:nvPr/>
+        </p:nvSpPr>
+        <p:spPr>
+          <a:xfrm>
+            <a:off x="617674" y="3155270"/>
+            <a:ext cx="7908651" cy="1183558"/>
+          </a:xfrm>
+          <a:prstGeom prst="rect">
+            <a:avLst/>
+          </a:prstGeom>
+          <a:solidFill>
+            <a:srgbClr val="444444"/>
+          </a:solidFill>
+          <a:ln w="12700">
+            <a:solidFill>
+              <a:srgbClr val="444444"/>
+            </a:solidFill>
+            <a:prstDash val="solid"/>
+          </a:ln>
+        </p:spPr>
+        <p:txBody>
+          <a:bodyPr/>
+          <a:lstStyle/>
+          <a:p>
+            <a:endParaRPr lang="en-US">
+              <a:solidFill>
+                <a:schemeClr val="tx1"/>
+              </a:solidFill>
+            </a:endParaRPr>
+          </a:p>
+        </p:txBody>
+      </p:sp>
+      <p:sp>
+        <p:nvSpPr>
           <p:cNvPr id="2" name="Shape 0">
             <a:extLst>
               <a:ext uri="{FF2B5EF4-FFF2-40B4-BE49-F238E27FC236}">
@@ -8646,7 +8688,7 @@
               <a:buChar char="•"/>
             </a:pPr>
             <a:r>
-              <a:rPr lang="en-US" sz="1400" dirty="0" err="1">
+              <a:rPr lang="en-US" dirty="0" err="1">
                 <a:solidFill>
                   <a:srgbClr val="444444"/>
                 </a:solidFill>
@@ -8654,7 +8696,7 @@
               <a:t>Kibernetička</a:t>
             </a:r>
             <a:r>
-              <a:rPr lang="en-US" sz="1400" dirty="0">
+              <a:rPr lang="en-US" dirty="0">
                 <a:solidFill>
                   <a:srgbClr val="444444"/>
                 </a:solidFill>
@@ -8662,7 +8704,7 @@
               <a:t> </a:t>
             </a:r>
             <a:r>
-              <a:rPr lang="en-US" sz="1400" dirty="0" err="1">
+              <a:rPr lang="en-US" dirty="0" err="1">
                 <a:solidFill>
                   <a:srgbClr val="444444"/>
                 </a:solidFill>
@@ -8670,7 +8712,7 @@
               <a:t>sigurnost</a:t>
             </a:r>
             <a:r>
-              <a:rPr lang="en-US" sz="1400" dirty="0">
+              <a:rPr lang="en-US" dirty="0">
                 <a:solidFill>
                   <a:srgbClr val="444444"/>
                 </a:solidFill>
@@ -8678,7 +8720,7 @@
               <a:t> (</a:t>
             </a:r>
             <a:r>
-              <a:rPr lang="en-US" sz="1400" dirty="0" err="1">
+              <a:rPr lang="en-US" dirty="0" err="1">
                 <a:solidFill>
                   <a:srgbClr val="444444"/>
                 </a:solidFill>
@@ -8686,7 +8728,7 @@
               <a:t>ili</a:t>
             </a:r>
             <a:r>
-              <a:rPr lang="en-US" sz="1400" dirty="0">
+              <a:rPr lang="en-US" dirty="0">
                 <a:solidFill>
                   <a:srgbClr val="444444"/>
                 </a:solidFill>
@@ -8694,7 +8736,7 @@
               <a:t> </a:t>
             </a:r>
             <a:r>
-              <a:rPr lang="en-US" sz="1400" dirty="0" err="1">
+              <a:rPr lang="en-US" dirty="0" err="1">
                 <a:solidFill>
                   <a:srgbClr val="444444"/>
                 </a:solidFill>
@@ -8702,7 +8744,7 @@
               <a:t>sigurnost</a:t>
             </a:r>
             <a:r>
-              <a:rPr lang="en-US" sz="1400" dirty="0">
+              <a:rPr lang="en-US" dirty="0">
                 <a:solidFill>
                   <a:srgbClr val="444444"/>
                 </a:solidFill>
@@ -8710,7 +8752,7 @@
               <a:t> </a:t>
             </a:r>
             <a:r>
-              <a:rPr lang="en-US" sz="1400" dirty="0" err="1">
+              <a:rPr lang="en-US" dirty="0" err="1">
                 <a:solidFill>
                   <a:srgbClr val="444444"/>
                 </a:solidFill>
@@ -8718,7 +8760,7 @@
               <a:t>na</a:t>
             </a:r>
             <a:r>
-              <a:rPr lang="en-US" sz="1400" dirty="0">
+              <a:rPr lang="en-US" dirty="0">
                 <a:solidFill>
                   <a:srgbClr val="444444"/>
                 </a:solidFill>
@@ -8726,7 +8768,7 @@
               <a:t> </a:t>
             </a:r>
             <a:r>
-              <a:rPr lang="en-US" sz="1400" dirty="0" err="1">
+              <a:rPr lang="en-US" dirty="0" err="1">
                 <a:solidFill>
                   <a:srgbClr val="444444"/>
                 </a:solidFill>
@@ -8734,7 +8776,7 @@
               <a:t>internetu</a:t>
             </a:r>
             <a:r>
-              <a:rPr lang="en-US" sz="1400" dirty="0">
+              <a:rPr lang="en-US" dirty="0">
                 <a:solidFill>
                   <a:srgbClr val="444444"/>
                 </a:solidFill>
@@ -8742,7 +8784,7 @@
               <a:t>) </a:t>
             </a:r>
             <a:r>
-              <a:rPr lang="en-US" sz="1400" dirty="0" err="1">
+              <a:rPr lang="en-US" dirty="0" err="1">
                 <a:solidFill>
                   <a:srgbClr val="444444"/>
                 </a:solidFill>
@@ -8750,7 +8792,7 @@
               <a:t>skup</a:t>
             </a:r>
             <a:r>
-              <a:rPr lang="en-US" sz="1400" dirty="0">
+              <a:rPr lang="en-US" dirty="0">
                 <a:solidFill>
                   <a:srgbClr val="444444"/>
                 </a:solidFill>
@@ -8758,7 +8800,7 @@
               <a:t> je </a:t>
             </a:r>
             <a:r>
-              <a:rPr lang="en-US" sz="1400" dirty="0" err="1">
+              <a:rPr lang="en-US" dirty="0" err="1">
                 <a:solidFill>
                   <a:srgbClr val="444444"/>
                 </a:solidFill>
@@ -8766,7 +8808,7 @@
               <a:t>znanja</a:t>
             </a:r>
             <a:r>
-              <a:rPr lang="en-US" sz="1400" dirty="0">
+              <a:rPr lang="en-US" dirty="0">
                 <a:solidFill>
                   <a:srgbClr val="444444"/>
                 </a:solidFill>
@@ -8774,7 +8816,7 @@
               <a:t>, </a:t>
             </a:r>
             <a:r>
-              <a:rPr lang="en-US" sz="1400" dirty="0" err="1">
+              <a:rPr lang="en-US" dirty="0" err="1">
                 <a:solidFill>
                   <a:srgbClr val="444444"/>
                 </a:solidFill>
@@ -8782,7 +8824,7 @@
               <a:t>navika</a:t>
             </a:r>
             <a:r>
-              <a:rPr lang="en-US" sz="1400" dirty="0">
+              <a:rPr lang="en-US" dirty="0">
                 <a:solidFill>
                   <a:srgbClr val="444444"/>
                 </a:solidFill>
@@ -8790,7 +8832,7 @@
               <a:t> </a:t>
             </a:r>
             <a:r>
-              <a:rPr lang="en-US" sz="1400" dirty="0" err="1">
+              <a:rPr lang="en-US" dirty="0" err="1">
                 <a:solidFill>
                   <a:srgbClr val="444444"/>
                 </a:solidFill>
@@ -8798,7 +8840,7 @@
               <a:t>i</a:t>
             </a:r>
             <a:r>
-              <a:rPr lang="en-US" sz="1400" dirty="0">
+              <a:rPr lang="en-US" dirty="0">
                 <a:solidFill>
                   <a:srgbClr val="444444"/>
                 </a:solidFill>
@@ -8806,7 +8848,7 @@
               <a:t> alata </a:t>
             </a:r>
             <a:r>
-              <a:rPr lang="en-US" sz="1400" dirty="0" err="1">
+              <a:rPr lang="en-US" dirty="0" err="1">
                 <a:solidFill>
                   <a:srgbClr val="444444"/>
                 </a:solidFill>
@@ -8814,7 +8856,7 @@
               <a:t>kojima</a:t>
             </a:r>
             <a:r>
-              <a:rPr lang="en-US" sz="1400" dirty="0">
+              <a:rPr lang="en-US" dirty="0">
                 <a:solidFill>
                   <a:srgbClr val="444444"/>
                 </a:solidFill>
@@ -8822,7 +8864,7 @@
               <a:t> se </a:t>
             </a:r>
             <a:r>
-              <a:rPr lang="en-US" sz="1400" dirty="0" err="1">
+              <a:rPr lang="en-US" dirty="0" err="1">
                 <a:solidFill>
                   <a:srgbClr val="444444"/>
                 </a:solidFill>
@@ -8830,7 +8872,7 @@
               <a:t>štitimo</a:t>
             </a:r>
             <a:r>
-              <a:rPr lang="en-US" sz="1400" dirty="0">
+              <a:rPr lang="en-US" dirty="0">
                 <a:solidFill>
                   <a:srgbClr val="444444"/>
                 </a:solidFill>
@@ -8838,7 +8880,7 @@
               <a:t> od </a:t>
             </a:r>
             <a:r>
-              <a:rPr lang="en-US" sz="1400" dirty="0" err="1">
+              <a:rPr lang="en-US" dirty="0" err="1">
                 <a:solidFill>
                   <a:srgbClr val="444444"/>
                 </a:solidFill>
@@ -8846,7 +8888,7 @@
               <a:t>neovlaštenog</a:t>
             </a:r>
             <a:r>
-              <a:rPr lang="en-US" sz="1400" dirty="0">
+              <a:rPr lang="en-US" dirty="0">
                 <a:solidFill>
                   <a:srgbClr val="444444"/>
                 </a:solidFill>
@@ -8854,7 +8896,7 @@
               <a:t> </a:t>
             </a:r>
             <a:r>
-              <a:rPr lang="en-US" sz="1400" dirty="0" err="1">
+              <a:rPr lang="en-US" dirty="0" err="1">
                 <a:solidFill>
                   <a:srgbClr val="444444"/>
                 </a:solidFill>
@@ -8862,7 +8904,7 @@
               <a:t>pristupa</a:t>
             </a:r>
             <a:r>
-              <a:rPr lang="en-US" sz="1400" dirty="0">
+              <a:rPr lang="en-US" dirty="0">
                 <a:solidFill>
                   <a:srgbClr val="444444"/>
                 </a:solidFill>
@@ -8870,7 +8912,7 @@
               <a:t> </a:t>
             </a:r>
             <a:r>
-              <a:rPr lang="en-US" sz="1400" dirty="0" err="1">
+              <a:rPr lang="en-US" dirty="0" err="1">
                 <a:solidFill>
                   <a:srgbClr val="444444"/>
                 </a:solidFill>
@@ -8878,7 +8920,7 @@
               <a:t>našim</a:t>
             </a:r>
             <a:r>
-              <a:rPr lang="en-US" sz="1400" dirty="0">
+              <a:rPr lang="en-US" dirty="0">
                 <a:solidFill>
                   <a:srgbClr val="444444"/>
                 </a:solidFill>
@@ -8886,7 +8928,7 @@
               <a:t> </a:t>
             </a:r>
             <a:r>
-              <a:rPr lang="en-US" sz="1400" dirty="0" err="1">
+              <a:rPr lang="en-US" dirty="0" err="1">
                 <a:solidFill>
                   <a:srgbClr val="444444"/>
                 </a:solidFill>
@@ -8894,7 +8936,7 @@
               <a:t>podacima</a:t>
             </a:r>
             <a:r>
-              <a:rPr lang="en-US" sz="1400" dirty="0">
+              <a:rPr lang="en-US" dirty="0">
                 <a:solidFill>
                   <a:srgbClr val="444444"/>
                 </a:solidFill>
@@ -8902,7 +8944,7 @@
               <a:t>, </a:t>
             </a:r>
             <a:r>
-              <a:rPr lang="en-US" sz="1400" dirty="0" err="1">
+              <a:rPr lang="en-US" dirty="0" err="1">
                 <a:solidFill>
                   <a:srgbClr val="444444"/>
                 </a:solidFill>
@@ -8910,7 +8952,7 @@
               <a:t>uređajima</a:t>
             </a:r>
             <a:r>
-              <a:rPr lang="en-US" sz="1400" dirty="0">
+              <a:rPr lang="en-US" dirty="0">
                 <a:solidFill>
                   <a:srgbClr val="444444"/>
                 </a:solidFill>
@@ -8918,7 +8960,7 @@
               <a:t> </a:t>
             </a:r>
             <a:r>
-              <a:rPr lang="en-US" sz="1400" dirty="0" err="1">
+              <a:rPr lang="en-US" dirty="0" err="1">
                 <a:solidFill>
                   <a:srgbClr val="444444"/>
                 </a:solidFill>
@@ -8926,7 +8968,7 @@
               <a:t>i</a:t>
             </a:r>
             <a:r>
-              <a:rPr lang="en-US" sz="1400" dirty="0">
+              <a:rPr lang="en-US" dirty="0">
                 <a:solidFill>
                   <a:srgbClr val="444444"/>
                 </a:solidFill>
@@ -8934,7 +8976,7 @@
               <a:t> </a:t>
             </a:r>
             <a:r>
-              <a:rPr lang="en-US" sz="1400" dirty="0" err="1">
+              <a:rPr lang="en-US" dirty="0" err="1">
                 <a:solidFill>
                   <a:srgbClr val="444444"/>
                 </a:solidFill>
@@ -8942,7 +8984,7 @@
               <a:t>novcu</a:t>
             </a:r>
             <a:r>
-              <a:rPr lang="en-US" sz="1400" dirty="0">
+              <a:rPr lang="en-US" dirty="0">
                 <a:solidFill>
                   <a:srgbClr val="444444"/>
                 </a:solidFill>
@@ -8959,7 +9001,7 @@
               <a:buChar char="•"/>
             </a:pPr>
             <a:r>
-              <a:rPr lang="en-US" sz="1400" dirty="0" err="1">
+              <a:rPr lang="en-US" dirty="0" err="1">
                 <a:solidFill>
                   <a:srgbClr val="444444"/>
                 </a:solidFill>
@@ -8967,7 +9009,7 @@
               <a:t>Kriminalci</a:t>
             </a:r>
             <a:r>
-              <a:rPr lang="en-US" sz="1400" dirty="0">
+              <a:rPr lang="en-US" dirty="0">
                 <a:solidFill>
                   <a:srgbClr val="444444"/>
                 </a:solidFill>
@@ -8975,7 +9017,7 @@
               <a:t> </a:t>
             </a:r>
             <a:r>
-              <a:rPr lang="en-US" sz="1400" dirty="0" err="1">
+              <a:rPr lang="en-US" dirty="0" err="1">
                 <a:solidFill>
                   <a:srgbClr val="444444"/>
                 </a:solidFill>
@@ -8983,7 +9025,7 @@
               <a:t>koriste</a:t>
             </a:r>
             <a:r>
-              <a:rPr lang="en-US" sz="1400" dirty="0">
+              <a:rPr lang="en-US" dirty="0">
                 <a:solidFill>
                   <a:srgbClr val="444444"/>
                 </a:solidFill>
@@ -8991,7 +9033,7 @@
               <a:t> internet </a:t>
             </a:r>
             <a:r>
-              <a:rPr lang="en-US" sz="1400" dirty="0" err="1">
+              <a:rPr lang="en-US" dirty="0" err="1">
                 <a:solidFill>
                   <a:srgbClr val="444444"/>
                 </a:solidFill>
@@ -8999,7 +9041,7 @@
               <a:t>jednako</a:t>
             </a:r>
             <a:r>
-              <a:rPr lang="en-US" sz="1400" dirty="0">
+              <a:rPr lang="en-US" dirty="0">
                 <a:solidFill>
                   <a:srgbClr val="444444"/>
                 </a:solidFill>
@@ -9007,7 +9049,7 @@
               <a:t> </a:t>
             </a:r>
             <a:r>
-              <a:rPr lang="en-US" sz="1400" dirty="0" err="1">
+              <a:rPr lang="en-US" dirty="0" err="1">
                 <a:solidFill>
                   <a:srgbClr val="444444"/>
                 </a:solidFill>
@@ -9015,7 +9057,7 @@
               <a:t>kao</a:t>
             </a:r>
             <a:r>
-              <a:rPr lang="en-US" sz="1400" dirty="0">
+              <a:rPr lang="en-US" dirty="0">
                 <a:solidFill>
                   <a:srgbClr val="444444"/>
                 </a:solidFill>
@@ -9023,7 +9065,7 @@
               <a:t> </a:t>
             </a:r>
             <a:r>
-              <a:rPr lang="en-US" sz="1400" dirty="0" err="1">
+              <a:rPr lang="en-US" dirty="0" err="1">
                 <a:solidFill>
                   <a:srgbClr val="444444"/>
                 </a:solidFill>
@@ -9031,7 +9073,7 @@
               <a:t>što</a:t>
             </a:r>
             <a:r>
-              <a:rPr lang="en-US" sz="1400" dirty="0">
+              <a:rPr lang="en-US" dirty="0">
                 <a:solidFill>
                   <a:srgbClr val="444444"/>
                 </a:solidFill>
@@ -9039,7 +9081,7 @@
               <a:t> </a:t>
             </a:r>
             <a:r>
-              <a:rPr lang="en-US" sz="1400" dirty="0" err="1">
+              <a:rPr lang="en-US" dirty="0" err="1">
                 <a:solidFill>
                   <a:srgbClr val="444444"/>
                 </a:solidFill>
@@ -9047,7 +9089,7 @@
               <a:t>su</a:t>
             </a:r>
             <a:r>
-              <a:rPr lang="en-US" sz="1400" dirty="0">
+              <a:rPr lang="en-US" dirty="0">
                 <a:solidFill>
                   <a:srgbClr val="444444"/>
                 </a:solidFill>
@@ -9055,7 +9097,7 @@
               <a:t> </a:t>
             </a:r>
             <a:r>
-              <a:rPr lang="en-US" sz="1400" dirty="0" err="1">
+              <a:rPr lang="en-US" dirty="0" err="1">
                 <a:solidFill>
                   <a:srgbClr val="444444"/>
                 </a:solidFill>
@@ -9063,7 +9105,7 @@
               <a:t>nekad</a:t>
             </a:r>
             <a:r>
-              <a:rPr lang="en-US" sz="1400" dirty="0">
+              <a:rPr lang="en-US" dirty="0">
                 <a:solidFill>
                   <a:srgbClr val="444444"/>
                 </a:solidFill>
@@ -9071,7 +9113,7 @@
               <a:t> </a:t>
             </a:r>
             <a:r>
-              <a:rPr lang="en-US" sz="1400" dirty="0" err="1">
+              <a:rPr lang="en-US" dirty="0" err="1">
                 <a:solidFill>
                   <a:srgbClr val="444444"/>
                 </a:solidFill>
@@ -9079,7 +9121,7 @@
               <a:t>koristili</a:t>
             </a:r>
             <a:r>
-              <a:rPr lang="en-US" sz="1400" dirty="0">
+              <a:rPr lang="en-US" dirty="0">
                 <a:solidFill>
                   <a:srgbClr val="444444"/>
                 </a:solidFill>
@@ -9087,7 +9129,7 @@
               <a:t> </a:t>
             </a:r>
             <a:r>
-              <a:rPr lang="en-US" sz="1400" dirty="0" err="1">
+              <a:rPr lang="en-US" dirty="0" err="1">
                 <a:solidFill>
                   <a:srgbClr val="444444"/>
                 </a:solidFill>
@@ -9095,7 +9137,7 @@
               <a:t>telefon</a:t>
             </a:r>
             <a:r>
-              <a:rPr lang="en-US" sz="1400" dirty="0">
+              <a:rPr lang="en-US" dirty="0">
                 <a:solidFill>
                   <a:srgbClr val="444444"/>
                 </a:solidFill>
@@ -9103,7 +9145,7 @@
               <a:t> </a:t>
             </a:r>
             <a:r>
-              <a:rPr lang="en-US" sz="1400" dirty="0" err="1">
+              <a:rPr lang="en-US" dirty="0" err="1">
                 <a:solidFill>
                   <a:srgbClr val="444444"/>
                 </a:solidFill>
@@ -9111,7 +9153,7 @@
               <a:t>ili</a:t>
             </a:r>
             <a:r>
-              <a:rPr lang="en-US" sz="1400" dirty="0">
+              <a:rPr lang="en-US" dirty="0">
                 <a:solidFill>
                   <a:srgbClr val="444444"/>
                 </a:solidFill>
@@ -9119,7 +9161,7 @@
               <a:t> </a:t>
             </a:r>
             <a:r>
-              <a:rPr lang="en-US" sz="1400" dirty="0" err="1">
+              <a:rPr lang="en-US" dirty="0" err="1">
                 <a:solidFill>
                   <a:srgbClr val="444444"/>
                 </a:solidFill>
@@ -9127,7 +9169,7 @@
               <a:t>poštu</a:t>
             </a:r>
             <a:r>
-              <a:rPr lang="en-US" sz="1400" dirty="0">
+              <a:rPr lang="en-US" dirty="0">
                 <a:solidFill>
                   <a:srgbClr val="444444"/>
                 </a:solidFill>
@@ -9135,7 +9177,7 @@
               <a:t> — </a:t>
             </a:r>
             <a:r>
-              <a:rPr lang="en-US" sz="1400" dirty="0" err="1">
+              <a:rPr lang="en-US" dirty="0" err="1">
                 <a:solidFill>
                   <a:srgbClr val="444444"/>
                 </a:solidFill>
@@ -9143,7 +9185,7 @@
               <a:t>samo</a:t>
             </a:r>
             <a:r>
-              <a:rPr lang="en-US" sz="1400" dirty="0">
+              <a:rPr lang="en-US" dirty="0">
                 <a:solidFill>
                   <a:srgbClr val="444444"/>
                 </a:solidFill>
@@ -9151,7 +9193,7 @@
               <a:t> </a:t>
             </a:r>
             <a:r>
-              <a:rPr lang="en-US" sz="1400" dirty="0" err="1">
+              <a:rPr lang="en-US" dirty="0" err="1">
                 <a:solidFill>
                   <a:srgbClr val="444444"/>
                 </a:solidFill>
@@ -9159,7 +9201,7 @@
               <a:t>su</a:t>
             </a:r>
             <a:r>
-              <a:rPr lang="en-US" sz="1400" dirty="0">
+              <a:rPr lang="en-US" dirty="0">
                 <a:solidFill>
                   <a:srgbClr val="444444"/>
                 </a:solidFill>
@@ -9167,7 +9209,7 @@
               <a:t> </a:t>
             </a:r>
             <a:r>
-              <a:rPr lang="en-US" sz="1400" dirty="0" err="1">
+              <a:rPr lang="en-US" dirty="0" err="1">
                 <a:solidFill>
                   <a:srgbClr val="444444"/>
                 </a:solidFill>
@@ -9175,7 +9217,7 @@
               <a:t>brži</a:t>
             </a:r>
             <a:r>
-              <a:rPr lang="en-US" sz="1400" dirty="0">
+              <a:rPr lang="en-US" dirty="0">
                 <a:solidFill>
                   <a:srgbClr val="444444"/>
                 </a:solidFill>
@@ -9183,7 +9225,7 @@
               <a:t> </a:t>
             </a:r>
             <a:r>
-              <a:rPr lang="en-US" sz="1400" dirty="0" err="1">
+              <a:rPr lang="en-US" dirty="0" err="1">
                 <a:solidFill>
                   <a:srgbClr val="444444"/>
                 </a:solidFill>
@@ -9191,7 +9233,7 @@
               <a:t>i</a:t>
             </a:r>
             <a:r>
-              <a:rPr lang="en-US" sz="1400" dirty="0">
+              <a:rPr lang="en-US" dirty="0">
                 <a:solidFill>
                   <a:srgbClr val="444444"/>
                 </a:solidFill>
@@ -9199,7 +9241,7 @@
               <a:t> </a:t>
             </a:r>
             <a:r>
-              <a:rPr lang="en-US" sz="1400" dirty="0" err="1">
+              <a:rPr lang="en-US" dirty="0" err="1">
                 <a:solidFill>
                   <a:srgbClr val="444444"/>
                 </a:solidFill>
@@ -9207,14 +9249,14 @@
               <a:t>anonimni</a:t>
             </a:r>
             <a:r>
-              <a:rPr lang="en-US" sz="1400" dirty="0">
+              <a:rPr lang="en-US" dirty="0">
                 <a:solidFill>
                   <a:srgbClr val="444444"/>
                 </a:solidFill>
               </a:rPr>
               <a:t>.</a:t>
             </a:r>
-            <a:endParaRPr lang="en-US" sz="1400" dirty="0"/>
+            <a:endParaRPr lang="en-US" dirty="0"/>
           </a:p>
           <a:p>
             <a:pPr marL="342900" indent="-342900">
@@ -9225,7 +9267,7 @@
               <a:buChar char="•"/>
             </a:pPr>
             <a:r>
-              <a:rPr lang="en-US" sz="1400" dirty="0" err="1">
+              <a:rPr lang="en-US" dirty="0" err="1">
                 <a:solidFill>
                   <a:srgbClr val="444444"/>
                 </a:solidFill>
@@ -9233,134 +9275,14 @@
               <a:t>Ključna</a:t>
             </a:r>
             <a:r>
-              <a:rPr lang="en-US" sz="1400" dirty="0">
+              <a:rPr lang="en-US" dirty="0">
                 <a:solidFill>
                   <a:srgbClr val="444444"/>
                 </a:solidFill>
               </a:rPr>
               <a:t> poruka: nitko nije presmetan da postane žrtva. Znanje je jedina zaštita.</a:t>
             </a:r>
-            <a:endParaRPr lang="en-US" sz="1400" dirty="0"/>
-          </a:p>
-        </p:txBody>
-      </p:sp>
-      <p:sp>
-        <p:nvSpPr>
-          <p:cNvPr id="5" name="Shape 3">
-            <a:extLst>
-              <a:ext uri="{FF2B5EF4-FFF2-40B4-BE49-F238E27FC236}">
-                <a16:creationId xmlns:a16="http://schemas.microsoft.com/office/drawing/2014/main" id="{FF1CA109-E9DB-6D83-D343-DAFB3343369E}"/>
-              </a:ext>
-            </a:extLst>
-          </p:cNvPr>
-          <p:cNvSpPr/>
-          <p:nvPr/>
-        </p:nvSpPr>
-        <p:spPr>
-          <a:xfrm>
-            <a:off x="274320" y="3154680"/>
-            <a:ext cx="5029200" cy="1737360"/>
-          </a:xfrm>
-          <a:prstGeom prst="rect">
-            <a:avLst/>
-          </a:prstGeom>
-          <a:solidFill>
-            <a:srgbClr val="FFFFFF"/>
-          </a:solidFill>
-          <a:ln/>
-          <a:effectLst>
-            <a:outerShdw blurRad="76200" dist="25400" dir="8100000" algn="bl" rotWithShape="0">
-              <a:srgbClr val="000000">
-                <a:alpha val="10000"/>
-              </a:srgbClr>
-            </a:outerShdw>
-          </a:effectLst>
-        </p:spPr>
-        <p:txBody>
-          <a:bodyPr/>
-          <a:lstStyle/>
-          <a:p>
-            <a:endParaRPr lang="en-US"/>
-          </a:p>
-        </p:txBody>
-      </p:sp>
-      <p:sp>
-        <p:nvSpPr>
-          <p:cNvPr id="6" name="Shape 4">
-            <a:extLst>
-              <a:ext uri="{FF2B5EF4-FFF2-40B4-BE49-F238E27FC236}">
-                <a16:creationId xmlns:a16="http://schemas.microsoft.com/office/drawing/2014/main" id="{4BB7CE43-D9D1-9C36-912A-D97F8246464E}"/>
-              </a:ext>
-            </a:extLst>
-          </p:cNvPr>
-          <p:cNvSpPr/>
-          <p:nvPr/>
-        </p:nvSpPr>
-        <p:spPr>
-          <a:xfrm>
-            <a:off x="274320" y="3154680"/>
-            <a:ext cx="5029200" cy="347472"/>
-          </a:xfrm>
-          <a:prstGeom prst="rect">
-            <a:avLst/>
-          </a:prstGeom>
-          <a:solidFill>
-            <a:srgbClr val="444444"/>
-          </a:solidFill>
-          <a:ln w="12700">
-            <a:solidFill>
-              <a:srgbClr val="444444"/>
-            </a:solidFill>
-            <a:prstDash val="solid"/>
-          </a:ln>
-        </p:spPr>
-        <p:txBody>
-          <a:bodyPr/>
-          <a:lstStyle/>
-          <a:p>
-            <a:endParaRPr lang="en-US"/>
-          </a:p>
-        </p:txBody>
-      </p:sp>
-      <p:sp>
-        <p:nvSpPr>
-          <p:cNvPr id="7" name="Text 5">
-            <a:extLst>
-              <a:ext uri="{FF2B5EF4-FFF2-40B4-BE49-F238E27FC236}">
-                <a16:creationId xmlns:a16="http://schemas.microsoft.com/office/drawing/2014/main" id="{2E8946B1-5FFF-08B6-865C-6AC04A0DDACB}"/>
-              </a:ext>
-            </a:extLst>
-          </p:cNvPr>
-          <p:cNvSpPr/>
-          <p:nvPr/>
-        </p:nvSpPr>
-        <p:spPr>
-          <a:xfrm>
-            <a:off x="274320" y="3154680"/>
-            <a:ext cx="5029200" cy="347472"/>
-          </a:xfrm>
-          <a:prstGeom prst="rect">
-            <a:avLst/>
-          </a:prstGeom>
-          <a:noFill/>
-          <a:ln/>
-        </p:spPr>
-        <p:txBody>
-          <a:bodyPr wrap="square" lIns="0" tIns="0" rIns="0" bIns="0" rtlCol="0" anchor="ctr"/>
-          <a:lstStyle/>
-          <a:p>
-            <a:pPr marL="0" indent="0" algn="ctr">
-              <a:buNone/>
-            </a:pPr>
-            <a:r>
-              <a:rPr lang="en-US" sz="1200" b="1" dirty="0">
-                <a:solidFill>
-                  <a:srgbClr val="FFFFFF"/>
-                </a:solidFill>
-              </a:rPr>
-              <a:t>Hrvatska 2024. — MUPRH</a:t>
-            </a:r>
-            <a:endParaRPr lang="en-US" sz="1200" dirty="0"/>
+            <a:endParaRPr lang="en-US" dirty="0"/>
           </a:p>
         </p:txBody>
       </p:sp>
@@ -9378,8 +9300,8 @@
         </p:nvSpPr>
         <p:spPr>
           <a:xfrm>
-            <a:off x="411480" y="3566160"/>
-            <a:ext cx="4754880" cy="1234440"/>
+            <a:off x="716986" y="3260517"/>
+            <a:ext cx="8311957" cy="1293315"/>
           </a:xfrm>
           <a:prstGeom prst="rect">
             <a:avLst/>
@@ -9399,14 +9321,138 @@
               <a:buChar char="•"/>
             </a:pPr>
             <a:r>
-              <a:rPr lang="en-US" sz="1200" dirty="0">
-                <a:solidFill>
-                  <a:srgbClr val="444444"/>
-                </a:solidFill>
-              </a:rPr>
-              <a:t>2.167 kibernetičkih kaznenih djela — porast 21,7% u godinu dana</a:t>
-            </a:r>
-            <a:endParaRPr lang="en-US" sz="1200" dirty="0"/>
+              <a:rPr lang="en-US" sz="1600" b="1" dirty="0" err="1">
+                <a:solidFill>
+                  <a:srgbClr val="FF9999"/>
+                </a:solidFill>
+              </a:rPr>
+              <a:t>Zaštita</a:t>
+            </a:r>
+            <a:r>
+              <a:rPr lang="en-US" sz="1600" b="1" dirty="0">
+                <a:solidFill>
+                  <a:schemeClr val="bg1"/>
+                </a:solidFill>
+              </a:rPr>
+              <a:t> </a:t>
+            </a:r>
+            <a:r>
+              <a:rPr lang="en-US" sz="1600" b="1" dirty="0" err="1">
+                <a:solidFill>
+                  <a:srgbClr val="FF9999"/>
+                </a:solidFill>
+              </a:rPr>
+              <a:t>podataka</a:t>
+            </a:r>
+            <a:r>
+              <a:rPr lang="en-US" sz="1600" b="1" dirty="0">
+                <a:solidFill>
+                  <a:schemeClr val="bg1"/>
+                </a:solidFill>
+              </a:rPr>
+              <a:t> </a:t>
+            </a:r>
+            <a:r>
+              <a:rPr lang="en-US" sz="1600" dirty="0">
+                <a:solidFill>
+                  <a:schemeClr val="bg1"/>
+                </a:solidFill>
+              </a:rPr>
+              <a:t>- </a:t>
+            </a:r>
+            <a:r>
+              <a:rPr lang="en-US" sz="1600" dirty="0" err="1">
+                <a:solidFill>
+                  <a:schemeClr val="bg1"/>
+                </a:solidFill>
+              </a:rPr>
+              <a:t>osobnih</a:t>
+            </a:r>
+            <a:r>
+              <a:rPr lang="en-US" sz="1600" dirty="0">
+                <a:solidFill>
+                  <a:schemeClr val="bg1"/>
+                </a:solidFill>
+              </a:rPr>
+              <a:t> </a:t>
+            </a:r>
+            <a:r>
+              <a:rPr lang="en-US" sz="1600" dirty="0" err="1">
+                <a:solidFill>
+                  <a:schemeClr val="bg1"/>
+                </a:solidFill>
+              </a:rPr>
+              <a:t>informacija</a:t>
+            </a:r>
+            <a:r>
+              <a:rPr lang="en-US" sz="1600" dirty="0">
+                <a:solidFill>
+                  <a:schemeClr val="bg1"/>
+                </a:solidFill>
+              </a:rPr>
+              <a:t>, </a:t>
+            </a:r>
+            <a:r>
+              <a:rPr lang="en-US" sz="1600" dirty="0" err="1">
+                <a:solidFill>
+                  <a:schemeClr val="bg1"/>
+                </a:solidFill>
+              </a:rPr>
+              <a:t>lozinki</a:t>
+            </a:r>
+            <a:r>
+              <a:rPr lang="en-US" sz="1600" dirty="0">
+                <a:solidFill>
+                  <a:schemeClr val="bg1"/>
+                </a:solidFill>
+              </a:rPr>
+              <a:t> </a:t>
+            </a:r>
+            <a:r>
+              <a:rPr lang="en-US" sz="1600" dirty="0" err="1">
+                <a:solidFill>
+                  <a:schemeClr val="bg1"/>
+                </a:solidFill>
+              </a:rPr>
+              <a:t>i</a:t>
+            </a:r>
+            <a:r>
+              <a:rPr lang="en-US" sz="1600" dirty="0">
+                <a:solidFill>
+                  <a:schemeClr val="bg1"/>
+                </a:solidFill>
+              </a:rPr>
+              <a:t> </a:t>
+            </a:r>
+            <a:r>
+              <a:rPr lang="en-US" sz="1600" dirty="0" err="1">
+                <a:solidFill>
+                  <a:schemeClr val="bg1"/>
+                </a:solidFill>
+              </a:rPr>
+              <a:t>financijskih</a:t>
+            </a:r>
+            <a:r>
+              <a:rPr lang="en-US" sz="1600" dirty="0">
+                <a:solidFill>
+                  <a:schemeClr val="bg1"/>
+                </a:solidFill>
+              </a:rPr>
+              <a:t> </a:t>
+            </a:r>
+            <a:r>
+              <a:rPr lang="en-US" sz="1600" dirty="0" err="1">
+                <a:solidFill>
+                  <a:schemeClr val="bg1"/>
+                </a:solidFill>
+              </a:rPr>
+              <a:t>podataka</a:t>
+            </a:r>
+            <a:endParaRPr lang="en-US" sz="1600" dirty="0">
+              <a:solidFill>
+                <a:schemeClr val="bg1"/>
+              </a:solidFill>
+            </a:endParaRPr>
           </a:p>
           <a:p>
             <a:pPr marL="342900" indent="-342900">
@@ -9417,14 +9463,138 @@
               <a:buChar char="•"/>
             </a:pPr>
             <a:r>
-              <a:rPr lang="en-US" sz="1200" dirty="0">
-                <a:solidFill>
-                  <a:srgbClr val="444444"/>
-                </a:solidFill>
-              </a:rPr>
-              <a:t>Financijska šteta: s 11,1 na 17 milijuna eura u jednoj godini</a:t>
-            </a:r>
-            <a:endParaRPr lang="en-US" sz="1200" dirty="0"/>
+              <a:rPr lang="en-US" sz="1600" b="1" dirty="0" err="1">
+                <a:solidFill>
+                  <a:srgbClr val="FF9999"/>
+                </a:solidFill>
+              </a:rPr>
+              <a:t>Zaštita</a:t>
+            </a:r>
+            <a:r>
+              <a:rPr lang="en-US" sz="1600" b="1" dirty="0">
+                <a:solidFill>
+                  <a:srgbClr val="FF9999"/>
+                </a:solidFill>
+              </a:rPr>
+              <a:t> </a:t>
+            </a:r>
+            <a:r>
+              <a:rPr lang="en-US" sz="1600" b="1" dirty="0" err="1">
+                <a:solidFill>
+                  <a:srgbClr val="FF9999"/>
+                </a:solidFill>
+              </a:rPr>
+              <a:t>uređaja</a:t>
+            </a:r>
+            <a:r>
+              <a:rPr lang="en-US" sz="1600" b="1" dirty="0">
+                <a:solidFill>
+                  <a:srgbClr val="FF9999"/>
+                </a:solidFill>
+              </a:rPr>
+              <a:t> </a:t>
+            </a:r>
+            <a:r>
+              <a:rPr lang="en-US" sz="1600" dirty="0">
+                <a:solidFill>
+                  <a:schemeClr val="bg1"/>
+                </a:solidFill>
+              </a:rPr>
+              <a:t>- </a:t>
+            </a:r>
+            <a:r>
+              <a:rPr lang="en-US" sz="1600" dirty="0" err="1">
+                <a:solidFill>
+                  <a:schemeClr val="bg1"/>
+                </a:solidFill>
+              </a:rPr>
+              <a:t>računala</a:t>
+            </a:r>
+            <a:r>
+              <a:rPr lang="en-US" sz="1600" dirty="0">
+                <a:solidFill>
+                  <a:schemeClr val="bg1"/>
+                </a:solidFill>
+              </a:rPr>
+              <a:t>, </a:t>
+            </a:r>
+            <a:r>
+              <a:rPr lang="en-US" sz="1600" dirty="0" err="1">
+                <a:solidFill>
+                  <a:schemeClr val="bg1"/>
+                </a:solidFill>
+              </a:rPr>
+              <a:t>mobitela</a:t>
+            </a:r>
+            <a:r>
+              <a:rPr lang="en-US" sz="1600" dirty="0">
+                <a:solidFill>
+                  <a:schemeClr val="bg1"/>
+                </a:solidFill>
+              </a:rPr>
+              <a:t> </a:t>
+            </a:r>
+            <a:r>
+              <a:rPr lang="en-US" sz="1600" dirty="0" err="1">
+                <a:solidFill>
+                  <a:schemeClr val="bg1"/>
+                </a:solidFill>
+              </a:rPr>
+              <a:t>i</a:t>
+            </a:r>
+            <a:r>
+              <a:rPr lang="en-US" sz="1600" dirty="0">
+                <a:solidFill>
+                  <a:schemeClr val="bg1"/>
+                </a:solidFill>
+              </a:rPr>
+              <a:t> </a:t>
+            </a:r>
+            <a:r>
+              <a:rPr lang="en-US" sz="1600" dirty="0" err="1">
+                <a:solidFill>
+                  <a:schemeClr val="bg1"/>
+                </a:solidFill>
+              </a:rPr>
+              <a:t>tableta</a:t>
+            </a:r>
+            <a:r>
+              <a:rPr lang="en-US" sz="1600" dirty="0">
+                <a:solidFill>
+                  <a:schemeClr val="bg1"/>
+                </a:solidFill>
+              </a:rPr>
+              <a:t> od </a:t>
+            </a:r>
+            <a:r>
+              <a:rPr lang="en-US" sz="1600" dirty="0" err="1">
+                <a:solidFill>
+                  <a:schemeClr val="bg1"/>
+                </a:solidFill>
+              </a:rPr>
+              <a:t>zlonamjernih</a:t>
+            </a:r>
+            <a:r>
+              <a:rPr lang="en-US" sz="1600" dirty="0">
+                <a:solidFill>
+                  <a:schemeClr val="bg1"/>
+                </a:solidFill>
+              </a:rPr>
+              <a:t> </a:t>
+            </a:r>
+            <a:r>
+              <a:rPr lang="en-US" sz="1600" dirty="0" err="1">
+                <a:solidFill>
+                  <a:schemeClr val="bg1"/>
+                </a:solidFill>
+              </a:rPr>
+              <a:t>programa</a:t>
+            </a:r>
+            <a:endParaRPr lang="en-US" sz="1600" dirty="0">
+              <a:solidFill>
+                <a:schemeClr val="bg1"/>
+              </a:solidFill>
+            </a:endParaRPr>
           </a:p>
           <a:p>
             <a:pPr marL="342900" indent="-342900">
@@ -9435,70 +9605,224 @@
               <a:buChar char="•"/>
             </a:pPr>
             <a:r>
-              <a:rPr lang="en-US" sz="1200" dirty="0">
-                <a:solidFill>
-                  <a:srgbClr val="444444"/>
-                </a:solidFill>
-              </a:rPr>
-              <a:t>Splitsko-dalmatinska županija: 287 kibernetičkih kaznenih djela, od čega 256 računalnih prijevara</a:t>
-            </a:r>
-            <a:endParaRPr lang="en-US" sz="1200" dirty="0"/>
-          </a:p>
-        </p:txBody>
-      </p:sp>
-      <p:sp>
-        <p:nvSpPr>
-          <p:cNvPr id="11" name="Text 8">
+              <a:rPr lang="en-US" sz="1600" b="1" dirty="0" err="1">
+                <a:solidFill>
+                  <a:srgbClr val="FF9999"/>
+                </a:solidFill>
+              </a:rPr>
+              <a:t>Zaštita</a:t>
+            </a:r>
+            <a:r>
+              <a:rPr lang="en-US" sz="1600" b="1" dirty="0">
+                <a:solidFill>
+                  <a:srgbClr val="FF9999"/>
+                </a:solidFill>
+              </a:rPr>
+              <a:t> </a:t>
+            </a:r>
+            <a:r>
+              <a:rPr lang="en-US" sz="1600" b="1" dirty="0" err="1">
+                <a:solidFill>
+                  <a:srgbClr val="FF9999"/>
+                </a:solidFill>
+              </a:rPr>
+              <a:t>identiteta</a:t>
+            </a:r>
+            <a:r>
+              <a:rPr lang="en-US" sz="1600" b="1" dirty="0">
+                <a:solidFill>
+                  <a:srgbClr val="FF9999"/>
+                </a:solidFill>
+              </a:rPr>
+              <a:t> </a:t>
+            </a:r>
+            <a:r>
+              <a:rPr lang="en-US" sz="1600" dirty="0">
+                <a:solidFill>
+                  <a:schemeClr val="bg1"/>
+                </a:solidFill>
+              </a:rPr>
+              <a:t>- </a:t>
+            </a:r>
+            <a:r>
+              <a:rPr lang="en-US" sz="1600" dirty="0" err="1">
+                <a:solidFill>
+                  <a:schemeClr val="bg1"/>
+                </a:solidFill>
+              </a:rPr>
+              <a:t>sprječavanje</a:t>
+            </a:r>
+            <a:r>
+              <a:rPr lang="en-US" sz="1600" dirty="0">
+                <a:solidFill>
+                  <a:schemeClr val="bg1"/>
+                </a:solidFill>
+              </a:rPr>
+              <a:t> da </a:t>
+            </a:r>
+            <a:r>
+              <a:rPr lang="en-US" sz="1600" dirty="0" err="1">
+                <a:solidFill>
+                  <a:schemeClr val="bg1"/>
+                </a:solidFill>
+              </a:rPr>
+              <a:t>netko</a:t>
+            </a:r>
+            <a:r>
+              <a:rPr lang="en-US" sz="1600" dirty="0">
+                <a:solidFill>
+                  <a:schemeClr val="bg1"/>
+                </a:solidFill>
+              </a:rPr>
+              <a:t> </a:t>
+            </a:r>
+            <a:r>
+              <a:rPr lang="en-US" sz="1600" dirty="0" err="1">
+                <a:solidFill>
+                  <a:schemeClr val="bg1"/>
+                </a:solidFill>
+              </a:rPr>
+              <a:t>preuzme</a:t>
+            </a:r>
+            <a:r>
+              <a:rPr lang="en-US" sz="1600" dirty="0">
+                <a:solidFill>
+                  <a:schemeClr val="bg1"/>
+                </a:solidFill>
+              </a:rPr>
+              <a:t> </a:t>
+            </a:r>
+            <a:r>
+              <a:rPr lang="en-US" sz="1600" dirty="0" err="1">
+                <a:solidFill>
+                  <a:schemeClr val="bg1"/>
+                </a:solidFill>
+              </a:rPr>
+              <a:t>naš</a:t>
+            </a:r>
+            <a:r>
+              <a:rPr lang="en-US" sz="1600" dirty="0">
+                <a:solidFill>
+                  <a:schemeClr val="bg1"/>
+                </a:solidFill>
+              </a:rPr>
+              <a:t> </a:t>
+            </a:r>
+            <a:r>
+              <a:rPr lang="en-US" sz="1600" dirty="0" err="1">
+                <a:solidFill>
+                  <a:schemeClr val="bg1"/>
+                </a:solidFill>
+              </a:rPr>
+              <a:t>digitalni</a:t>
+            </a:r>
+            <a:r>
+              <a:rPr lang="en-US" sz="1600" dirty="0">
+                <a:solidFill>
+                  <a:schemeClr val="bg1"/>
+                </a:solidFill>
+              </a:rPr>
+              <a:t> </a:t>
+            </a:r>
+            <a:r>
+              <a:rPr lang="en-US" sz="1600" dirty="0" err="1">
+                <a:solidFill>
+                  <a:schemeClr val="bg1"/>
+                </a:solidFill>
+              </a:rPr>
+              <a:t>identitet</a:t>
+            </a:r>
+            <a:r>
+              <a:rPr lang="en-US" sz="1600" dirty="0">
+                <a:solidFill>
+                  <a:schemeClr val="bg1"/>
+                </a:solidFill>
+              </a:rPr>
+              <a:t> </a:t>
+            </a:r>
+            <a:r>
+              <a:rPr lang="en-US" sz="1600" dirty="0" err="1">
+                <a:solidFill>
+                  <a:schemeClr val="bg1"/>
+                </a:solidFill>
+              </a:rPr>
+              <a:t>i</a:t>
+            </a:r>
+            <a:r>
+              <a:rPr lang="en-US" sz="1600" dirty="0">
+                <a:solidFill>
+                  <a:schemeClr val="bg1"/>
+                </a:solidFill>
+              </a:rPr>
+              <a:t> </a:t>
+            </a:r>
+            <a:r>
+              <a:rPr lang="en-US" sz="1600" dirty="0" err="1">
+                <a:solidFill>
+                  <a:schemeClr val="bg1"/>
+                </a:solidFill>
+              </a:rPr>
+              <a:t>zloupotrijebi</a:t>
+            </a:r>
+            <a:r>
+              <a:rPr lang="en-US" sz="1600" dirty="0">
+                <a:solidFill>
+                  <a:schemeClr val="bg1"/>
+                </a:solidFill>
+              </a:rPr>
+              <a:t> ga</a:t>
+            </a:r>
+          </a:p>
+        </p:txBody>
+      </p:sp>
+      <p:sp>
+        <p:nvSpPr>
+          <p:cNvPr id="12" name="TextBox 11">
             <a:extLst>
               <a:ext uri="{FF2B5EF4-FFF2-40B4-BE49-F238E27FC236}">
-                <a16:creationId xmlns:a16="http://schemas.microsoft.com/office/drawing/2014/main" id="{DC0A5342-5251-2A2C-A9D2-72223813D008}"/>
+                <a16:creationId xmlns:a16="http://schemas.microsoft.com/office/drawing/2014/main" id="{FFE39474-BCBF-A575-EC57-6048F54F2025}"/>
               </a:ext>
             </a:extLst>
           </p:cNvPr>
-          <p:cNvSpPr/>
-          <p:nvPr/>
-        </p:nvSpPr>
-        <p:spPr>
-          <a:xfrm>
-            <a:off x="5715000" y="3383280"/>
-            <a:ext cx="3108960" cy="1280160"/>
+          <p:cNvSpPr txBox="1"/>
+          <p:nvPr/>
+        </p:nvSpPr>
+        <p:spPr>
+          <a:xfrm>
+            <a:off x="320040" y="2585315"/>
+            <a:ext cx="2217723" cy="400110"/>
           </a:xfrm>
           <a:prstGeom prst="rect">
             <a:avLst/>
           </a:prstGeom>
           <a:noFill/>
-          <a:ln/>
-        </p:spPr>
-        <p:txBody>
-          <a:bodyPr wrap="square" rtlCol="0" anchor="ctr"/>
-          <a:lstStyle/>
-          <a:p>
-            <a:pPr marL="0" indent="0" algn="ctr">
-              <a:buNone/>
-            </a:pPr>
-            <a:r>
-              <a:rPr lang="en-US" sz="1800" b="1" dirty="0">
-                <a:solidFill>
-                  <a:srgbClr val="FFFFFF"/>
-                </a:solidFill>
-              </a:rPr>
-              <a:t>Znanje je</a:t>
-            </a:r>
-            <a:endParaRPr lang="en-US" sz="1800" dirty="0"/>
-          </a:p>
-          <a:p>
-            <a:pPr marL="0" indent="0" algn="ctr">
-              <a:buNone/>
-            </a:pPr>
-            <a:r>
-              <a:rPr lang="en-US" sz="1800" b="1" dirty="0">
-                <a:solidFill>
-                  <a:srgbClr val="FFFFFF"/>
-                </a:solidFill>
-              </a:rPr>
-              <a:t>jedina zaštita.</a:t>
-            </a:r>
-            <a:endParaRPr lang="en-US" sz="1800" dirty="0"/>
+        </p:spPr>
+        <p:txBody>
+          <a:bodyPr wrap="none" rtlCol="0">
+            <a:spAutoFit/>
+          </a:bodyPr>
+          <a:lstStyle/>
+          <a:p>
+            <a:r>
+              <a:rPr lang="en-US" sz="2000" b="1" u="sng" dirty="0">
+                <a:solidFill>
+                  <a:srgbClr val="444444"/>
+                </a:solidFill>
+              </a:rPr>
+              <a:t>TEMELJNI</a:t>
+            </a:r>
+            <a:r>
+              <a:rPr lang="en-US" sz="2000" b="1" u="sng" dirty="0"/>
+              <a:t> </a:t>
+            </a:r>
+            <a:r>
+              <a:rPr lang="en-US" sz="2000" b="1" u="sng" dirty="0">
+                <a:solidFill>
+                  <a:srgbClr val="444444"/>
+                </a:solidFill>
+              </a:rPr>
+              <a:t>STUPOVI</a:t>
+            </a:r>
           </a:p>
         </p:txBody>
       </p:sp>

--- a/praksa/RAST/izradaprezentacije/Sigurnost_na_internetu_prezentacija.pptx
+++ b/praksa/RAST/izradaprezentacije/Sigurnost_na_internetu_prezentacija.pptx
@@ -11211,118 +11211,6 @@
       </p:sp>
       <p:sp>
         <p:nvSpPr>
-          <p:cNvPr id="7" name="Text 5"/>
-          <p:cNvSpPr/>
-          <p:nvPr/>
-        </p:nvSpPr>
-        <p:spPr>
-          <a:xfrm>
-            <a:off x="411480" y="1261872"/>
-            <a:ext cx="3749040" cy="3566160"/>
-          </a:xfrm>
-          <a:prstGeom prst="rect">
-            <a:avLst/>
-          </a:prstGeom>
-          <a:noFill/>
-          <a:ln/>
-        </p:spPr>
-        <p:txBody>
-          <a:bodyPr wrap="square" rtlCol="0" anchor="t"/>
-          <a:lstStyle/>
-          <a:p>
-            <a:pPr marL="342900" indent="-342900">
-              <a:spcAft>
-                <a:spcPts val="700"/>
-              </a:spcAft>
-              <a:buSzPct val="100000"/>
-              <a:buChar char="•"/>
-            </a:pPr>
-            <a:r>
-              <a:rPr lang="en-US" sz="1300" dirty="0">
-                <a:solidFill>
-                  <a:srgbClr val="444444"/>
-                </a:solidFill>
-              </a:rPr>
-              <a:t>Hitnost i strah: 'Vaš račun će biti zatvoren za 24h!'</a:t>
-            </a:r>
-            <a:endParaRPr lang="en-US" sz="1300" dirty="0"/>
-          </a:p>
-          <a:p>
-            <a:pPr marL="342900" indent="-342900">
-              <a:spcAft>
-                <a:spcPts val="700"/>
-              </a:spcAft>
-              <a:buSzPct val="100000"/>
-              <a:buChar char="•"/>
-            </a:pPr>
-            <a:r>
-              <a:rPr lang="en-US" sz="1300" dirty="0">
-                <a:solidFill>
-                  <a:srgbClr val="444444"/>
-                </a:solidFill>
-              </a:rPr>
-              <a:t>Nepoznati pošiljatelj: adresa ne odgovara instituciji (npr. banka@gmail.com)</a:t>
-            </a:r>
-            <a:endParaRPr lang="en-US" sz="1300" dirty="0"/>
-          </a:p>
-          <a:p>
-            <a:pPr marL="342900" indent="-342900">
-              <a:spcAft>
-                <a:spcPts val="700"/>
-              </a:spcAft>
-              <a:buSzPct val="100000"/>
-              <a:buChar char="•"/>
-            </a:pPr>
-            <a:r>
-              <a:rPr lang="en-US" sz="1300" dirty="0">
-                <a:solidFill>
-                  <a:srgbClr val="444444"/>
-                </a:solidFill>
-              </a:rPr>
-              <a:t>Sumnjiv link: adresa slična pravoj, ali nije ista (npr. hpb-banka.com umjesto hpb.hr)</a:t>
-            </a:r>
-            <a:endParaRPr lang="en-US" sz="1300" dirty="0"/>
-          </a:p>
-          <a:p>
-            <a:pPr marL="342900" indent="-342900">
-              <a:spcAft>
-                <a:spcPts val="700"/>
-              </a:spcAft>
-              <a:buSzPct val="100000"/>
-              <a:buChar char="•"/>
-            </a:pPr>
-            <a:r>
-              <a:rPr lang="en-US" sz="1300" dirty="0">
-                <a:solidFill>
-                  <a:srgbClr val="444444"/>
-                </a:solidFill>
-              </a:rPr>
-              <a:t>Traži osjetljive podatke: prava banka NIKADA ne traži PIN putem e-maila</a:t>
-            </a:r>
-            <a:endParaRPr lang="en-US" sz="1300" dirty="0"/>
-          </a:p>
-          <a:p>
-            <a:pPr marL="342900" indent="-342900">
-              <a:spcAft>
-                <a:spcPts val="700"/>
-              </a:spcAft>
-              <a:buSzPct val="100000"/>
-              <a:buChar char="•"/>
-            </a:pPr>
-            <a:r>
-              <a:rPr lang="en-US" sz="1300" dirty="0">
-                <a:solidFill>
-                  <a:srgbClr val="444444"/>
-                </a:solidFill>
-              </a:rPr>
-              <a:t>Gramatičke greške: neobična formulacija ili pogreške u pravopisu</a:t>
-            </a:r>
-            <a:endParaRPr lang="en-US" sz="1300" dirty="0"/>
-          </a:p>
-        </p:txBody>
-      </p:sp>
-      <p:sp>
-        <p:nvSpPr>
           <p:cNvPr id="8" name="Shape 6"/>
           <p:cNvSpPr/>
           <p:nvPr/>
@@ -11514,6 +11402,199 @@
               <a:t>→ Nikad ne klikajte na linkove u porukama banke — sami upišite adresu!</a:t>
             </a:r>
             <a:endParaRPr lang="en-US" sz="1300" dirty="0"/>
+          </a:p>
+        </p:txBody>
+      </p:sp>
+      <p:sp>
+        <p:nvSpPr>
+          <p:cNvPr id="7" name="Text 5"/>
+          <p:cNvSpPr/>
+          <p:nvPr/>
+        </p:nvSpPr>
+        <p:spPr>
+          <a:xfrm>
+            <a:off x="411480" y="1261872"/>
+            <a:ext cx="3749040" cy="3566160"/>
+          </a:xfrm>
+          <a:prstGeom prst="rect">
+            <a:avLst/>
+          </a:prstGeom>
+          <a:noFill/>
+          <a:ln/>
+        </p:spPr>
+        <p:txBody>
+          <a:bodyPr wrap="square" rtlCol="0" anchor="t"/>
+          <a:lstStyle/>
+          <a:p>
+            <a:pPr marL="342900" indent="-342900">
+              <a:spcAft>
+                <a:spcPts val="700"/>
+              </a:spcAft>
+              <a:buSzPct val="100000"/>
+              <a:buChar char="•"/>
+            </a:pPr>
+            <a:r>
+              <a:rPr lang="en-US" sz="1300" dirty="0">
+                <a:solidFill>
+                  <a:srgbClr val="444444"/>
+                </a:solidFill>
+              </a:rPr>
+              <a:t>Hitnost i strah: 'Vaš račun će biti zatvoren za 24h!'</a:t>
+            </a:r>
+            <a:endParaRPr lang="en-US" sz="1300" dirty="0"/>
+          </a:p>
+          <a:p>
+            <a:pPr marL="342900" indent="-342900">
+              <a:spcAft>
+                <a:spcPts val="700"/>
+              </a:spcAft>
+              <a:buSzPct val="100000"/>
+              <a:buChar char="•"/>
+            </a:pPr>
+            <a:r>
+              <a:rPr lang="en-US" sz="1300" dirty="0">
+                <a:solidFill>
+                  <a:srgbClr val="444444"/>
+                </a:solidFill>
+              </a:rPr>
+              <a:t>Nepoznati pošiljatelj: adresa ne odgovara instituciji (npr. banka@gmail.com)</a:t>
+            </a:r>
+            <a:endParaRPr lang="en-US" sz="1300" dirty="0"/>
+          </a:p>
+          <a:p>
+            <a:pPr marL="342900" indent="-342900">
+              <a:spcAft>
+                <a:spcPts val="700"/>
+              </a:spcAft>
+              <a:buSzPct val="100000"/>
+              <a:buChar char="•"/>
+            </a:pPr>
+            <a:r>
+              <a:rPr lang="en-US" sz="1300" dirty="0">
+                <a:solidFill>
+                  <a:srgbClr val="444444"/>
+                </a:solidFill>
+              </a:rPr>
+              <a:t>Sumnjiv link: adresa slična pravoj, ali nije ista (npr. hpb-banka.com umjesto hpb.hr)</a:t>
+            </a:r>
+            <a:endParaRPr lang="en-US" sz="1300" dirty="0"/>
+          </a:p>
+          <a:p>
+            <a:pPr marL="342900" indent="-342900">
+              <a:spcAft>
+                <a:spcPts val="700"/>
+              </a:spcAft>
+              <a:buSzPct val="100000"/>
+              <a:buChar char="•"/>
+            </a:pPr>
+            <a:r>
+              <a:rPr lang="en-US" sz="1300" dirty="0">
+                <a:solidFill>
+                  <a:srgbClr val="444444"/>
+                </a:solidFill>
+              </a:rPr>
+              <a:t>Traži osjetljive podatke: prava banka NIKADA ne traži PIN putem e-maila</a:t>
+            </a:r>
+            <a:endParaRPr lang="en-US" sz="1300" dirty="0"/>
+          </a:p>
+          <a:p>
+            <a:pPr marL="342900" indent="-342900">
+              <a:spcAft>
+                <a:spcPts val="700"/>
+              </a:spcAft>
+              <a:buSzPct val="100000"/>
+              <a:buChar char="•"/>
+            </a:pPr>
+            <a:r>
+              <a:rPr lang="en-US" sz="1300" dirty="0">
+                <a:solidFill>
+                  <a:srgbClr val="444444"/>
+                </a:solidFill>
+              </a:rPr>
+              <a:t>Gramatičke greške: neobična formulacija ili pogreške u pravopisu</a:t>
+            </a:r>
+            <a:endParaRPr lang="en-US" sz="1300" dirty="0"/>
+          </a:p>
+        </p:txBody>
+      </p:sp>
+      <p:pic>
+        <p:nvPicPr>
+          <p:cNvPr id="17" name="Picture 16">
+            <a:extLst>
+              <a:ext uri="{FF2B5EF4-FFF2-40B4-BE49-F238E27FC236}">
+                <a16:creationId xmlns:a16="http://schemas.microsoft.com/office/drawing/2014/main" id="{28242863-2843-1B73-B28D-FB235ECB8982}"/>
+              </a:ext>
+            </a:extLst>
+          </p:cNvPr>
+          <p:cNvPicPr>
+            <a:picLocks noChangeAspect="1"/>
+          </p:cNvPicPr>
+          <p:nvPr/>
+        </p:nvPicPr>
+        <p:blipFill>
+          <a:blip r:embed="rId3"/>
+          <a:stretch>
+            <a:fillRect/>
+          </a:stretch>
+        </p:blipFill>
+        <p:spPr>
+          <a:xfrm>
+            <a:off x="2358832" y="3853613"/>
+            <a:ext cx="2259494" cy="1010995"/>
+          </a:xfrm>
+          <a:prstGeom prst="rect">
+            <a:avLst/>
+          </a:prstGeom>
+        </p:spPr>
+      </p:pic>
+      <p:sp>
+        <p:nvSpPr>
+          <p:cNvPr id="18" name="Rectangle 17">
+            <a:extLst>
+              <a:ext uri="{FF2B5EF4-FFF2-40B4-BE49-F238E27FC236}">
+                <a16:creationId xmlns:a16="http://schemas.microsoft.com/office/drawing/2014/main" id="{2132AAE4-3789-F84C-79AF-480CB25DFA59}"/>
+              </a:ext>
+            </a:extLst>
+          </p:cNvPr>
+          <p:cNvSpPr/>
+          <p:nvPr/>
+        </p:nvSpPr>
+        <p:spPr>
+          <a:xfrm>
+            <a:off x="1810983" y="3853613"/>
+            <a:ext cx="410689" cy="923330"/>
+          </a:xfrm>
+          <a:prstGeom prst="rect">
+            <a:avLst/>
+          </a:prstGeom>
+          <a:noFill/>
+        </p:spPr>
+        <p:txBody>
+          <a:bodyPr wrap="none" lIns="91440" tIns="45720" rIns="91440" bIns="45720">
+            <a:spAutoFit/>
+          </a:bodyPr>
+          <a:lstStyle/>
+          <a:p>
+            <a:pPr algn="ctr"/>
+            <a:r>
+              <a:rPr lang="en-US" sz="5400" b="1" cap="none" spc="0" dirty="0">
+                <a:ln w="6600">
+                  <a:solidFill>
+                    <a:schemeClr val="accent2"/>
+                  </a:solidFill>
+                  <a:prstDash val="solid"/>
+                </a:ln>
+                <a:solidFill>
+                  <a:srgbClr val="C00000"/>
+                </a:solidFill>
+                <a:effectLst>
+                  <a:outerShdw dist="38100" dir="2700000" algn="tl" rotWithShape="0">
+                    <a:schemeClr val="accent2"/>
+                  </a:outerShdw>
+                </a:effectLst>
+              </a:rPr>
+              <a:t>!</a:t>
+            </a:r>
           </a:p>
         </p:txBody>
       </p:sp>

--- a/praksa/RAST/izradaprezentacije/Sigurnost_na_internetu_prezentacija.pptx
+++ b/praksa/RAST/izradaprezentacije/Sigurnost_na_internetu_prezentacija.pptx
@@ -9941,13 +9941,13 @@
           <p:nvPr>
             <p:extLst>
               <p:ext uri="{D42A27DB-BD31-4B8C-83A1-F6EECF244321}">
-                <p14:modId xmlns:p14="http://schemas.microsoft.com/office/powerpoint/2010/main" val="1579011935"/>
+                <p14:modId xmlns:p14="http://schemas.microsoft.com/office/powerpoint/2010/main" val="4201530273"/>
               </p:ext>
             </p:extLst>
           </p:nvPr>
         </p:nvGraphicFramePr>
         <p:xfrm>
-          <a:off x="274320" y="804672"/>
+          <a:off x="228600" y="804672"/>
           <a:ext cx="8595360" cy="4389120"/>
         </p:xfrm>
         <a:graphic>
@@ -11006,6 +11006,256 @@
           </a:graphicData>
         </a:graphic>
       </p:graphicFrame>
+      <p:pic>
+        <p:nvPicPr>
+          <p:cNvPr id="6" name="Graphic 5" descr="Speaker phone with solid fill">
+            <a:extLst>
+              <a:ext uri="{FF2B5EF4-FFF2-40B4-BE49-F238E27FC236}">
+                <a16:creationId xmlns:a16="http://schemas.microsoft.com/office/drawing/2014/main" id="{621FE143-32DB-7D9E-C949-7B6F8594A815}"/>
+              </a:ext>
+            </a:extLst>
+          </p:cNvPr>
+          <p:cNvPicPr>
+            <a:picLocks noChangeAspect="1"/>
+          </p:cNvPicPr>
+          <p:nvPr/>
+        </p:nvPicPr>
+        <p:blipFill>
+          <a:blip>
+            <a:extLst>
+              <a:ext uri="{96DAC541-7B7A-43D3-8B79-37D633B846F1}">
+                <asvg:svgBlip xmlns:asvg="http://schemas.microsoft.com/office/drawing/2016/SVG/main" r:embed="rId3"/>
+              </a:ext>
+            </a:extLst>
+          </a:blip>
+          <a:stretch>
+            <a:fillRect/>
+          </a:stretch>
+        </p:blipFill>
+        <p:spPr>
+          <a:xfrm>
+            <a:off x="3999579" y="3630021"/>
+            <a:ext cx="542145" cy="542145"/>
+          </a:xfrm>
+          <a:prstGeom prst="rect">
+            <a:avLst/>
+          </a:prstGeom>
+        </p:spPr>
+      </p:pic>
+      <p:pic>
+        <p:nvPicPr>
+          <p:cNvPr id="8" name="Graphic 7" descr="Employee badge with solid fill">
+            <a:extLst>
+              <a:ext uri="{FF2B5EF4-FFF2-40B4-BE49-F238E27FC236}">
+                <a16:creationId xmlns:a16="http://schemas.microsoft.com/office/drawing/2014/main" id="{3AC38BE4-0CF2-F281-CD0B-4DB6FC8241B8}"/>
+              </a:ext>
+            </a:extLst>
+          </p:cNvPr>
+          <p:cNvPicPr>
+            <a:picLocks noChangeAspect="1"/>
+          </p:cNvPicPr>
+          <p:nvPr/>
+        </p:nvPicPr>
+        <p:blipFill>
+          <a:blip>
+            <a:extLst>
+              <a:ext uri="{96DAC541-7B7A-43D3-8B79-37D633B846F1}">
+                <asvg:svgBlip xmlns:asvg="http://schemas.microsoft.com/office/drawing/2016/SVG/main" r:embed="rId4"/>
+              </a:ext>
+            </a:extLst>
+          </a:blip>
+          <a:srcRect/>
+          <a:stretch/>
+        </p:blipFill>
+        <p:spPr>
+          <a:xfrm>
+            <a:off x="3954161" y="3033728"/>
+            <a:ext cx="542145" cy="542145"/>
+          </a:xfrm>
+          <a:prstGeom prst="rect">
+            <a:avLst/>
+          </a:prstGeom>
+        </p:spPr>
+      </p:pic>
+      <p:pic>
+        <p:nvPicPr>
+          <p:cNvPr id="10" name="Graphic 9" descr="Lock with solid fill">
+            <a:extLst>
+              <a:ext uri="{FF2B5EF4-FFF2-40B4-BE49-F238E27FC236}">
+                <a16:creationId xmlns:a16="http://schemas.microsoft.com/office/drawing/2014/main" id="{A020C237-4922-E0CD-22F8-AF3939D3877A}"/>
+              </a:ext>
+            </a:extLst>
+          </p:cNvPr>
+          <p:cNvPicPr>
+            <a:picLocks noChangeAspect="1"/>
+          </p:cNvPicPr>
+          <p:nvPr/>
+        </p:nvPicPr>
+        <p:blipFill>
+          <a:blip>
+            <a:extLst>
+              <a:ext uri="{96DAC541-7B7A-43D3-8B79-37D633B846F1}">
+                <asvg:svgBlip xmlns:asvg="http://schemas.microsoft.com/office/drawing/2016/SVG/main" r:embed="rId5"/>
+              </a:ext>
+            </a:extLst>
+          </a:blip>
+          <a:stretch>
+            <a:fillRect/>
+          </a:stretch>
+        </p:blipFill>
+        <p:spPr>
+          <a:xfrm>
+            <a:off x="3999578" y="2528270"/>
+            <a:ext cx="451310" cy="451310"/>
+          </a:xfrm>
+          <a:prstGeom prst="rect">
+            <a:avLst/>
+          </a:prstGeom>
+        </p:spPr>
+      </p:pic>
+      <p:pic>
+        <p:nvPicPr>
+          <p:cNvPr id="12" name="Graphic 11" descr="Internet with solid fill">
+            <a:extLst>
+              <a:ext uri="{FF2B5EF4-FFF2-40B4-BE49-F238E27FC236}">
+                <a16:creationId xmlns:a16="http://schemas.microsoft.com/office/drawing/2014/main" id="{64572AD6-EADE-DF6B-3AF9-417D6E788F71}"/>
+              </a:ext>
+            </a:extLst>
+          </p:cNvPr>
+          <p:cNvPicPr>
+            <a:picLocks noChangeAspect="1"/>
+          </p:cNvPicPr>
+          <p:nvPr/>
+        </p:nvPicPr>
+        <p:blipFill>
+          <a:blip>
+            <a:extLst>
+              <a:ext uri="{96DAC541-7B7A-43D3-8B79-37D633B846F1}">
+                <asvg:svgBlip xmlns:asvg="http://schemas.microsoft.com/office/drawing/2016/SVG/main" r:embed="rId6"/>
+              </a:ext>
+            </a:extLst>
+          </a:blip>
+          <a:stretch>
+            <a:fillRect/>
+          </a:stretch>
+        </p:blipFill>
+        <p:spPr>
+          <a:xfrm>
+            <a:off x="3999578" y="1967143"/>
+            <a:ext cx="451310" cy="451310"/>
+          </a:xfrm>
+          <a:prstGeom prst="rect">
+            <a:avLst/>
+          </a:prstGeom>
+        </p:spPr>
+      </p:pic>
+      <p:pic>
+        <p:nvPicPr>
+          <p:cNvPr id="14" name="Graphic 13" descr="Fishing with solid fill">
+            <a:extLst>
+              <a:ext uri="{FF2B5EF4-FFF2-40B4-BE49-F238E27FC236}">
+                <a16:creationId xmlns:a16="http://schemas.microsoft.com/office/drawing/2014/main" id="{75AC0BEF-0C2A-855E-519F-ABF6AF0B8D8C}"/>
+              </a:ext>
+            </a:extLst>
+          </p:cNvPr>
+          <p:cNvPicPr>
+            <a:picLocks noChangeAspect="1"/>
+          </p:cNvPicPr>
+          <p:nvPr/>
+        </p:nvPicPr>
+        <p:blipFill>
+          <a:blip>
+            <a:extLst>
+              <a:ext uri="{96DAC541-7B7A-43D3-8B79-37D633B846F1}">
+                <asvg:svgBlip xmlns:asvg="http://schemas.microsoft.com/office/drawing/2016/SVG/main" r:embed="rId7"/>
+              </a:ext>
+            </a:extLst>
+          </a:blip>
+          <a:stretch>
+            <a:fillRect/>
+          </a:stretch>
+        </p:blipFill>
+        <p:spPr>
+          <a:xfrm>
+            <a:off x="4005637" y="1304573"/>
+            <a:ext cx="574383" cy="574383"/>
+          </a:xfrm>
+          <a:prstGeom prst="rect">
+            <a:avLst/>
+          </a:prstGeom>
+        </p:spPr>
+      </p:pic>
+      <p:pic>
+        <p:nvPicPr>
+          <p:cNvPr id="16" name="Graphic 15" descr="Chat bubble with solid fill">
+            <a:extLst>
+              <a:ext uri="{FF2B5EF4-FFF2-40B4-BE49-F238E27FC236}">
+                <a16:creationId xmlns:a16="http://schemas.microsoft.com/office/drawing/2014/main" id="{BD664F30-39E8-CF7A-A471-9938CE3FBEDE}"/>
+              </a:ext>
+            </a:extLst>
+          </p:cNvPr>
+          <p:cNvPicPr>
+            <a:picLocks noChangeAspect="1"/>
+          </p:cNvPicPr>
+          <p:nvPr/>
+        </p:nvPicPr>
+        <p:blipFill>
+          <a:blip>
+            <a:extLst>
+              <a:ext uri="{96DAC541-7B7A-43D3-8B79-37D633B846F1}">
+                <asvg:svgBlip xmlns:asvg="http://schemas.microsoft.com/office/drawing/2016/SVG/main" r:embed="rId8"/>
+              </a:ext>
+            </a:extLst>
+          </a:blip>
+          <a:stretch>
+            <a:fillRect/>
+          </a:stretch>
+        </p:blipFill>
+        <p:spPr>
+          <a:xfrm>
+            <a:off x="3999579" y="4156828"/>
+            <a:ext cx="493895" cy="493895"/>
+          </a:xfrm>
+          <a:prstGeom prst="rect">
+            <a:avLst/>
+          </a:prstGeom>
+        </p:spPr>
+      </p:pic>
+      <p:sp>
+        <p:nvSpPr>
+          <p:cNvPr id="19" name="TextBox 18">
+            <a:extLst>
+              <a:ext uri="{FF2B5EF4-FFF2-40B4-BE49-F238E27FC236}">
+                <a16:creationId xmlns:a16="http://schemas.microsoft.com/office/drawing/2014/main" id="{C7BA9CF3-5F95-8FF0-9183-97DC38E2AF6F}"/>
+              </a:ext>
+            </a:extLst>
+          </p:cNvPr>
+          <p:cNvSpPr txBox="1"/>
+          <p:nvPr/>
+        </p:nvSpPr>
+        <p:spPr>
+          <a:xfrm>
+            <a:off x="3798313" y="4724166"/>
+            <a:ext cx="944676" cy="338554"/>
+          </a:xfrm>
+          <a:prstGeom prst="rect">
+            <a:avLst/>
+          </a:prstGeom>
+          <a:noFill/>
+        </p:spPr>
+        <p:txBody>
+          <a:bodyPr wrap="square" rtlCol="0">
+            <a:spAutoFit/>
+          </a:bodyPr>
+          <a:lstStyle/>
+          <a:p>
+            <a:r>
+              <a:rPr lang="en-US" sz="1600" b="1" dirty="0"/>
+              <a:t>998-226</a:t>
+            </a:r>
+          </a:p>
+        </p:txBody>
+      </p:sp>
     </p:spTree>
   </p:cSld>
   <p:clrMapOvr>

--- a/praksa/RAST/izradaprezentacije/Sigurnost_na_internetu_prezentacija.pptx
+++ b/praksa/RAST/izradaprezentacije/Sigurnost_na_internetu_prezentacija.pptx
@@ -11979,7 +11979,7 @@
           <a:bodyPr/>
           <a:lstStyle/>
           <a:p>
-            <a:endParaRPr lang="en-US"/>
+            <a:endParaRPr lang="en-US" dirty="0"/>
           </a:p>
         </p:txBody>
       </p:sp>
@@ -12356,6 +12356,62 @@
               <a:t>Zaštita: koristite Windows Defender (besplatan), redovito ažurirajte sustav, napravite sigurnosnu kopiju!</a:t>
             </a:r>
             <a:endParaRPr lang="en-US" sz="1300" dirty="0"/>
+          </a:p>
+        </p:txBody>
+      </p:sp>
+      <p:sp>
+        <p:nvSpPr>
+          <p:cNvPr id="12" name="TextBox 11">
+            <a:extLst>
+              <a:ext uri="{FF2B5EF4-FFF2-40B4-BE49-F238E27FC236}">
+                <a16:creationId xmlns:a16="http://schemas.microsoft.com/office/drawing/2014/main" id="{FD160693-3E68-C898-49D3-8402AA273E25}"/>
+              </a:ext>
+            </a:extLst>
+          </p:cNvPr>
+          <p:cNvSpPr txBox="1"/>
+          <p:nvPr/>
+        </p:nvSpPr>
+        <p:spPr>
+          <a:xfrm>
+            <a:off x="2522777" y="4087548"/>
+            <a:ext cx="1322547" cy="408623"/>
+          </a:xfrm>
+          <a:prstGeom prst="roundRect">
+            <a:avLst/>
+          </a:prstGeom>
+          <a:solidFill>
+            <a:srgbClr val="C00000"/>
+          </a:solidFill>
+          <a:ln>
+            <a:solidFill>
+              <a:schemeClr val="bg1">
+                <a:lumMod val="95000"/>
+              </a:schemeClr>
+            </a:solidFill>
+          </a:ln>
+          <a:effectLst>
+            <a:outerShdw blurRad="50800" dist="38100" dir="13500000" algn="br" rotWithShape="0">
+              <a:prstClr val="black">
+                <a:alpha val="40000"/>
+              </a:prstClr>
+            </a:outerShdw>
+          </a:effectLst>
+        </p:spPr>
+        <p:txBody>
+          <a:bodyPr wrap="square" rtlCol="0">
+            <a:spAutoFit/>
+          </a:bodyPr>
+          <a:lstStyle/>
+          <a:p>
+            <a:pPr algn="ctr"/>
+            <a:r>
+              <a:rPr lang="en-US" dirty="0">
+                <a:solidFill>
+                  <a:schemeClr val="bg1"/>
+                </a:solidFill>
+              </a:rPr>
+              <a:t>PREUZMITE</a:t>
+            </a:r>
           </a:p>
         </p:txBody>
       </p:sp>

--- a/praksa/RAST/izradaprezentacije/Sigurnost_na_internetu_prezentacija.pptx
+++ b/praksa/RAST/izradaprezentacije/Sigurnost_na_internetu_prezentacija.pptx
@@ -12670,9 +12670,37 @@
                   <a:srgbClr val="444444"/>
                 </a:solidFill>
               </a:rPr>
-              <a:t>Nema izvora ili autora — legitimni medij uvijek potpisuje tekst</a:t>
-            </a:r>
-            <a:endParaRPr lang="en-US" sz="1300" dirty="0"/>
+              <a:t>Nema izvora ili autora — legitimni medij uvijek </a:t>
+            </a:r>
+            <a:r>
+              <a:rPr lang="en-US" sz="1300" dirty="0" err="1">
+                <a:solidFill>
+                  <a:srgbClr val="444444"/>
+                </a:solidFill>
+              </a:rPr>
+              <a:t>potpisuje</a:t>
+            </a:r>
+            <a:r>
+              <a:rPr lang="en-US" sz="1300" dirty="0">
+                <a:solidFill>
+                  <a:srgbClr val="444444"/>
+                </a:solidFill>
+              </a:rPr>
+              <a:t> </a:t>
+            </a:r>
+            <a:r>
+              <a:rPr lang="en-US" sz="1300" dirty="0" err="1">
+                <a:solidFill>
+                  <a:srgbClr val="444444"/>
+                </a:solidFill>
+              </a:rPr>
+              <a:t>tekst</a:t>
+            </a:r>
+            <a:endParaRPr lang="en-US" sz="1300" dirty="0">
+              <a:solidFill>
+                <a:srgbClr val="444444"/>
+              </a:solidFill>
+            </a:endParaRPr>
           </a:p>
           <a:p>
             <a:pPr marL="342900" indent="-342900">
@@ -12683,12 +12711,132 @@
               <a:buChar char="•"/>
             </a:pPr>
             <a:r>
+              <a:rPr lang="en-US" sz="1300" dirty="0" err="1">
+                <a:solidFill>
+                  <a:srgbClr val="444444"/>
+                </a:solidFill>
+              </a:rPr>
+              <a:t>Lažni</a:t>
+            </a:r>
+            <a:r>
               <a:rPr lang="en-US" sz="1300" dirty="0">
                 <a:solidFill>
                   <a:srgbClr val="444444"/>
                 </a:solidFill>
               </a:rPr>
-              <a:t>Svi vam šalju istu poruku — viralni sadržaj traži dvostruku provjeru</a:t>
+              <a:t> </a:t>
+            </a:r>
+            <a:r>
+              <a:rPr lang="en-US" sz="1300" dirty="0" err="1">
+                <a:solidFill>
+                  <a:srgbClr val="444444"/>
+                </a:solidFill>
+              </a:rPr>
+              <a:t>logotipovi</a:t>
+            </a:r>
+            <a:r>
+              <a:rPr lang="en-US" sz="1300" dirty="0">
+                <a:solidFill>
+                  <a:srgbClr val="444444"/>
+                </a:solidFill>
+              </a:rPr>
+              <a:t> – </a:t>
+            </a:r>
+            <a:r>
+              <a:rPr lang="en-US" sz="1300" dirty="0" err="1">
+                <a:solidFill>
+                  <a:srgbClr val="444444"/>
+                </a:solidFill>
+              </a:rPr>
+              <a:t>uvijek</a:t>
+            </a:r>
+            <a:r>
+              <a:rPr lang="en-US" sz="1300" dirty="0">
+                <a:solidFill>
+                  <a:srgbClr val="444444"/>
+                </a:solidFill>
+              </a:rPr>
+              <a:t> </a:t>
+            </a:r>
+            <a:r>
+              <a:rPr lang="en-US" sz="1300" dirty="0" err="1">
+                <a:solidFill>
+                  <a:srgbClr val="444444"/>
+                </a:solidFill>
+              </a:rPr>
+              <a:t>provjeriti</a:t>
+            </a:r>
+            <a:r>
+              <a:rPr lang="en-US" sz="1300" dirty="0">
+                <a:solidFill>
+                  <a:srgbClr val="444444"/>
+                </a:solidFill>
+              </a:rPr>
+              <a:t> </a:t>
+            </a:r>
+            <a:r>
+              <a:rPr lang="en-US" sz="1300" dirty="0" err="1">
+                <a:solidFill>
+                  <a:srgbClr val="444444"/>
+                </a:solidFill>
+              </a:rPr>
+              <a:t>adresu</a:t>
+            </a:r>
+            <a:r>
+              <a:rPr lang="en-US" sz="1300" dirty="0">
+                <a:solidFill>
+                  <a:srgbClr val="444444"/>
+                </a:solidFill>
+              </a:rPr>
+              <a:t> u </a:t>
+            </a:r>
+            <a:r>
+              <a:rPr lang="en-US" sz="1300" dirty="0" err="1">
+                <a:solidFill>
+                  <a:srgbClr val="444444"/>
+                </a:solidFill>
+              </a:rPr>
+              <a:t>pregledniku</a:t>
+            </a:r>
+            <a:r>
+              <a:rPr lang="en-US" sz="1300" dirty="0">
+                <a:solidFill>
+                  <a:srgbClr val="444444"/>
+                </a:solidFill>
+              </a:rPr>
+              <a:t> (da </a:t>
+            </a:r>
+            <a:r>
+              <a:rPr lang="en-US" sz="1300" dirty="0" err="1">
+                <a:solidFill>
+                  <a:srgbClr val="444444"/>
+                </a:solidFill>
+              </a:rPr>
+              <a:t>nije</a:t>
+            </a:r>
+            <a:r>
+              <a:rPr lang="en-US" sz="1300" dirty="0">
+                <a:solidFill>
+                  <a:srgbClr val="444444"/>
+                </a:solidFill>
+              </a:rPr>
+              <a:t> </a:t>
+            </a:r>
+            <a:r>
+              <a:rPr lang="en-US" sz="1300" dirty="0" err="1">
+                <a:solidFill>
+                  <a:srgbClr val="444444"/>
+                </a:solidFill>
+              </a:rPr>
+              <a:t>npr</a:t>
+            </a:r>
+            <a:r>
+              <a:rPr lang="en-US" sz="1300" dirty="0">
+                <a:solidFill>
+                  <a:srgbClr val="444444"/>
+                </a:solidFill>
+              </a:rPr>
+              <a:t>. n12.hr)</a:t>
             </a:r>
             <a:endParaRPr lang="en-US" sz="1300" dirty="0"/>
           </a:p>
@@ -12706,7 +12854,7 @@
                   <a:srgbClr val="444444"/>
                 </a:solidFill>
               </a:rPr>
-              <a:t>Provjerite na Faktograf.hr — jedini hrvatski fact-checking portal</a:t>
+              <a:t>Svi vam šalju istu poruku — viralni sadržaj traži dvostruku provjeru</a:t>
             </a:r>
             <a:endParaRPr lang="en-US" sz="1300" dirty="0"/>
           </a:p>
@@ -12724,7 +12872,57 @@
                   <a:srgbClr val="444444"/>
                 </a:solidFill>
               </a:rPr>
-              <a:t>Ako niste sigurni — NE DIJELITE dalje!</a:t>
+              <a:t>Provjerite na Faktograf.hr — jedini hrvatski fact-checking portal</a:t>
+            </a:r>
+            <a:endParaRPr lang="en-US" sz="1300" dirty="0"/>
+          </a:p>
+          <a:p>
+            <a:pPr marL="342900" indent="-342900">
+              <a:spcAft>
+                <a:spcPts val="700"/>
+              </a:spcAft>
+              <a:buSzPct val="100000"/>
+              <a:buChar char="•"/>
+            </a:pPr>
+            <a:r>
+              <a:rPr lang="en-US" sz="1300" dirty="0">
+                <a:solidFill>
+                  <a:srgbClr val="444444"/>
+                </a:solidFill>
+              </a:rPr>
+              <a:t>Ako niste </a:t>
+            </a:r>
+            <a:r>
+              <a:rPr lang="en-US" sz="1300" dirty="0" err="1">
+                <a:solidFill>
+                  <a:srgbClr val="444444"/>
+                </a:solidFill>
+              </a:rPr>
+              <a:t>sigurni</a:t>
+            </a:r>
+            <a:r>
+              <a:rPr lang="en-US" sz="1300" dirty="0">
+                <a:solidFill>
+                  <a:srgbClr val="444444"/>
+                </a:solidFill>
+              </a:rPr>
+              <a:t> </a:t>
+            </a:r>
+          </a:p>
+          <a:p>
+            <a:pPr>
+              <a:spcAft>
+                <a:spcPts val="700"/>
+              </a:spcAft>
+              <a:buSzPct val="100000"/>
+            </a:pPr>
+            <a:r>
+              <a:rPr lang="en-US" sz="1300" dirty="0">
+                <a:solidFill>
+                  <a:srgbClr val="444444"/>
+                </a:solidFill>
+              </a:rPr>
+              <a:t> NE DIJELITE dalje!</a:t>
             </a:r>
             <a:endParaRPr lang="en-US" sz="1300" dirty="0"/>
           </a:p>
@@ -12914,6 +13112,53 @@
           </a:p>
         </p:txBody>
       </p:sp>
+      <p:pic>
+        <p:nvPicPr>
+          <p:cNvPr id="1028" name="Picture 4" descr="Upozorenje građanima! Na društvenim mrežama su se pojavili plaćeni oglasi  koji pozivaju građane na lažne investicije! - CERT.hr">
+            <a:extLst>
+              <a:ext uri="{FF2B5EF4-FFF2-40B4-BE49-F238E27FC236}">
+                <a16:creationId xmlns:a16="http://schemas.microsoft.com/office/drawing/2014/main" id="{1E4082D7-8D57-C635-DA4C-9241F0E37C87}"/>
+              </a:ext>
+            </a:extLst>
+          </p:cNvPr>
+          <p:cNvPicPr>
+            <a:picLocks noChangeAspect="1" noChangeArrowheads="1"/>
+          </p:cNvPicPr>
+          <p:nvPr/>
+        </p:nvPicPr>
+        <p:blipFill>
+          <a:blip r:embed="rId3">
+            <a:extLst>
+              <a:ext uri="{28A0092B-C50C-407E-A947-70E740481C1C}">
+                <a14:useLocalDpi xmlns:a14="http://schemas.microsoft.com/office/drawing/2010/main" val="0"/>
+              </a:ext>
+            </a:extLst>
+          </a:blip>
+          <a:srcRect/>
+          <a:stretch>
+            <a:fillRect/>
+          </a:stretch>
+        </p:blipFill>
+        <p:spPr bwMode="auto">
+          <a:xfrm>
+            <a:off x="2353539" y="3305120"/>
+            <a:ext cx="2629941" cy="1522912"/>
+          </a:xfrm>
+          <a:prstGeom prst="rect">
+            <a:avLst/>
+          </a:prstGeom>
+          <a:noFill/>
+          <a:extLst>
+            <a:ext uri="{909E8E84-426E-40DD-AFC4-6F175D3DCCD1}">
+              <a14:hiddenFill xmlns:a14="http://schemas.microsoft.com/office/drawing/2010/main">
+                <a:solidFill>
+                  <a:srgbClr val="FFFFFF"/>
+                </a:solidFill>
+              </a14:hiddenFill>
+            </a:ext>
+          </a:extLst>
+        </p:spPr>
+      </p:pic>
     </p:spTree>
   </p:cSld>
   <p:clrMapOvr>

--- a/praksa/RAST/izradaprezentacije/Sigurnost_na_internetu_prezentacija.pptx
+++ b/praksa/RAST/izradaprezentacije/Sigurnost_na_internetu_prezentacija.pptx
@@ -13504,7 +13504,7 @@
           <a:bodyPr/>
           <a:lstStyle/>
           <a:p>
-            <a:endParaRPr lang="en-US"/>
+            <a:endParaRPr lang="en-US" dirty="0"/>
           </a:p>
         </p:txBody>
       </p:sp>
@@ -13685,6 +13685,147 @@
               <a:t>Poruke koje traže prosljeđivanje — bez provjere nikad ne proslijedite!</a:t>
             </a:r>
             <a:endParaRPr lang="en-US" sz="1300" dirty="0"/>
+          </a:p>
+        </p:txBody>
+      </p:sp>
+      <p:pic>
+        <p:nvPicPr>
+          <p:cNvPr id="2050" name="Picture 2" descr="Navigating the Social Media Landscape | Adllins Media">
+            <a:extLst>
+              <a:ext uri="{FF2B5EF4-FFF2-40B4-BE49-F238E27FC236}">
+                <a16:creationId xmlns:a16="http://schemas.microsoft.com/office/drawing/2014/main" id="{9A9CD57D-7940-8F00-3869-A551E072F49F}"/>
+              </a:ext>
+            </a:extLst>
+          </p:cNvPr>
+          <p:cNvPicPr>
+            <a:picLocks noChangeAspect="1" noChangeArrowheads="1"/>
+          </p:cNvPicPr>
+          <p:nvPr/>
+        </p:nvPicPr>
+        <p:blipFill>
+          <a:blip r:embed="rId3">
+            <a:extLst>
+              <a:ext uri="{28A0092B-C50C-407E-A947-70E740481C1C}">
+                <a14:useLocalDpi xmlns:a14="http://schemas.microsoft.com/office/drawing/2010/main" val="0"/>
+              </a:ext>
+            </a:extLst>
+          </a:blip>
+          <a:srcRect/>
+          <a:stretch>
+            <a:fillRect/>
+          </a:stretch>
+        </p:blipFill>
+        <p:spPr bwMode="auto">
+          <a:xfrm>
+            <a:off x="394895" y="3451945"/>
+            <a:ext cx="2670435" cy="1513247"/>
+          </a:xfrm>
+          <a:prstGeom prst="rect">
+            <a:avLst/>
+          </a:prstGeom>
+          <a:noFill/>
+          <a:extLst>
+            <a:ext uri="{909E8E84-426E-40DD-AFC4-6F175D3DCCD1}">
+              <a14:hiddenFill xmlns:a14="http://schemas.microsoft.com/office/drawing/2010/main">
+                <a:solidFill>
+                  <a:srgbClr val="FFFFFF"/>
+                </a:solidFill>
+              </a14:hiddenFill>
+            </a:ext>
+          </a:extLst>
+        </p:spPr>
+      </p:pic>
+      <p:pic>
+        <p:nvPicPr>
+          <p:cNvPr id="13" name="Picture 12">
+            <a:extLst>
+              <a:ext uri="{FF2B5EF4-FFF2-40B4-BE49-F238E27FC236}">
+                <a16:creationId xmlns:a16="http://schemas.microsoft.com/office/drawing/2014/main" id="{6E2F7F61-CB83-6F93-ECEC-1F0411370813}"/>
+              </a:ext>
+            </a:extLst>
+          </p:cNvPr>
+          <p:cNvPicPr>
+            <a:picLocks noChangeAspect="1"/>
+          </p:cNvPicPr>
+          <p:nvPr/>
+        </p:nvPicPr>
+        <p:blipFill>
+          <a:blip r:embed="rId4"/>
+          <a:stretch>
+            <a:fillRect/>
+          </a:stretch>
+        </p:blipFill>
+        <p:spPr>
+          <a:xfrm>
+            <a:off x="3469491" y="3350522"/>
+            <a:ext cx="1415227" cy="1614670"/>
+          </a:xfrm>
+          <a:prstGeom prst="rect">
+            <a:avLst/>
+          </a:prstGeom>
+        </p:spPr>
+      </p:pic>
+      <p:sp>
+        <p:nvSpPr>
+          <p:cNvPr id="14" name="TextBox 13">
+            <a:extLst>
+              <a:ext uri="{FF2B5EF4-FFF2-40B4-BE49-F238E27FC236}">
+                <a16:creationId xmlns:a16="http://schemas.microsoft.com/office/drawing/2014/main" id="{A22AEA94-E84F-DA9E-CB01-FC8AD0C358B1}"/>
+              </a:ext>
+            </a:extLst>
+          </p:cNvPr>
+          <p:cNvSpPr txBox="1"/>
+          <p:nvPr/>
+        </p:nvSpPr>
+        <p:spPr>
+          <a:xfrm>
+            <a:off x="4979241" y="4154162"/>
+            <a:ext cx="3837910" cy="369332"/>
+          </a:xfrm>
+          <a:prstGeom prst="rect">
+            <a:avLst/>
+          </a:prstGeom>
+          <a:noFill/>
+        </p:spPr>
+        <p:txBody>
+          <a:bodyPr wrap="none" rtlCol="0">
+            <a:spAutoFit/>
+          </a:bodyPr>
+          <a:lstStyle/>
+          <a:p>
+            <a:r>
+              <a:rPr lang="en-US" dirty="0"/>
+              <a:t>&lt;- spam </a:t>
+            </a:r>
+            <a:r>
+              <a:rPr lang="en-US" dirty="0" err="1"/>
+              <a:t>poruke</a:t>
+            </a:r>
+            <a:r>
+              <a:rPr lang="en-US" dirty="0"/>
+              <a:t> </a:t>
+            </a:r>
+            <a:r>
+              <a:rPr lang="en-US" dirty="0" err="1"/>
+              <a:t>prijevare</a:t>
+            </a:r>
+            <a:r>
+              <a:rPr lang="en-US" dirty="0"/>
+              <a:t> </a:t>
+            </a:r>
+            <a:r>
+              <a:rPr lang="en-US" dirty="0" err="1"/>
+              <a:t>na</a:t>
+            </a:r>
+            <a:r>
+              <a:rPr lang="en-US" dirty="0"/>
+              <a:t> </a:t>
+            </a:r>
+            <a:r>
+              <a:rPr lang="en-US" dirty="0" err="1"/>
+              <a:t>facebooku</a:t>
+            </a:r>
+            <a:endParaRPr lang="en-US" dirty="0"/>
           </a:p>
         </p:txBody>
       </p:sp>

--- a/praksa/RAST/izradaprezentacije/Sigurnost_na_internetu_prezentacija.pptx
+++ b/praksa/RAST/izradaprezentacije/Sigurnost_na_internetu_prezentacija.pptx
@@ -5,7 +5,7 @@
     <p:sldMasterId id="2147483648" r:id="rId1"/>
   </p:sldMasterIdLst>
   <p:notesMasterIdLst>
-    <p:notesMasterId r:id="rId18"/>
+    <p:notesMasterId r:id="rId19"/>
   </p:notesMasterIdLst>
   <p:sldIdLst>
     <p:sldId id="256" r:id="rId2"/>
@@ -17,13 +17,14 @@
     <p:sldId id="261" r:id="rId8"/>
     <p:sldId id="262" r:id="rId9"/>
     <p:sldId id="263" r:id="rId10"/>
-    <p:sldId id="264" r:id="rId11"/>
-    <p:sldId id="265" r:id="rId12"/>
-    <p:sldId id="266" r:id="rId13"/>
-    <p:sldId id="267" r:id="rId14"/>
-    <p:sldId id="268" r:id="rId15"/>
-    <p:sldId id="269" r:id="rId16"/>
-    <p:sldId id="270" r:id="rId17"/>
+    <p:sldId id="276" r:id="rId11"/>
+    <p:sldId id="264" r:id="rId12"/>
+    <p:sldId id="265" r:id="rId13"/>
+    <p:sldId id="266" r:id="rId14"/>
+    <p:sldId id="267" r:id="rId15"/>
+    <p:sldId id="268" r:id="rId16"/>
+    <p:sldId id="269" r:id="rId17"/>
+    <p:sldId id="270" r:id="rId18"/>
   </p:sldIdLst>
   <p:sldSz cx="9144000" cy="5143500" type="screen16x9"/>
   <p:notesSz cx="5143500" cy="9144000"/>
@@ -401,7 +402,7 @@
           <a:p>
             <a:fld id="{F7021451-1387-4CA6-816F-3879F97B5CBC}" type="slidenum">
               <a:rPr lang="en-US"/>
-              <a:t>10</a:t>
+              <a:t>11</a:t>
             </a:fld>
             <a:endParaRPr lang="en-US"/>
           </a:p>
@@ -485,7 +486,7 @@
           <a:p>
             <a:fld id="{F7021451-1387-4CA6-816F-3879F97B5CBC}" type="slidenum">
               <a:rPr lang="en-US"/>
-              <a:t>11</a:t>
+              <a:t>12</a:t>
             </a:fld>
             <a:endParaRPr lang="en-US"/>
           </a:p>
@@ -569,7 +570,7 @@
           <a:p>
             <a:fld id="{F7021451-1387-4CA6-816F-3879F97B5CBC}" type="slidenum">
               <a:rPr lang="en-US"/>
-              <a:t>12</a:t>
+              <a:t>13</a:t>
             </a:fld>
             <a:endParaRPr lang="en-US"/>
           </a:p>
@@ -653,7 +654,7 @@
           <a:p>
             <a:fld id="{F7021451-1387-4CA6-816F-3879F97B5CBC}" type="slidenum">
               <a:rPr lang="en-US"/>
-              <a:t>13</a:t>
+              <a:t>14</a:t>
             </a:fld>
             <a:endParaRPr lang="en-US"/>
           </a:p>
@@ -737,7 +738,7 @@
           <a:p>
             <a:fld id="{F7021451-1387-4CA6-816F-3879F97B5CBC}" type="slidenum">
               <a:rPr lang="en-US"/>
-              <a:t>14</a:t>
+              <a:t>15</a:t>
             </a:fld>
             <a:endParaRPr lang="en-US"/>
           </a:p>
@@ -821,7 +822,7 @@
           <a:p>
             <a:fld id="{F7021451-1387-4CA6-816F-3879F97B5CBC}" type="slidenum">
               <a:rPr lang="en-US"/>
-              <a:t>15</a:t>
+              <a:t>16</a:t>
             </a:fld>
             <a:endParaRPr lang="en-US"/>
           </a:p>
@@ -905,7 +906,7 @@
           <a:p>
             <a:fld id="{F7021451-1387-4CA6-816F-3879F97B5CBC}" type="slidenum">
               <a:rPr lang="en-US"/>
-              <a:t>16</a:t>
+              <a:t>17</a:t>
             </a:fld>
             <a:endParaRPr lang="en-US"/>
           </a:p>
@@ -2047,7 +2048,7 @@
         </p:nvSpPr>
         <p:spPr>
           <a:xfrm>
-            <a:off x="457200" y="2926080"/>
+            <a:off x="365760" y="3008376"/>
             <a:ext cx="5212080" cy="402336"/>
           </a:xfrm>
           <a:prstGeom prst="rect">
@@ -2067,7 +2068,7 @@
           <a:bodyPr/>
           <a:lstStyle/>
           <a:p>
-            <a:endParaRPr lang="en-US"/>
+            <a:endParaRPr lang="en-US" dirty="0"/>
           </a:p>
         </p:txBody>
       </p:sp>
@@ -2096,50 +2097,13 @@
               <a:buNone/>
             </a:pPr>
             <a:r>
-              <a:rPr lang="en-US" sz="1400" dirty="0">
+              <a:rPr lang="it-IT" sz="1400" dirty="0">
                 <a:solidFill>
                   <a:srgbClr val="FFFFFF"/>
                 </a:solidFill>
               </a:rPr>
-              <a:t>Za odrasle i osobe starije životne dobi</a:t>
-            </a:r>
-            <a:endParaRPr lang="en-US" sz="1400" dirty="0"/>
-          </a:p>
-        </p:txBody>
-      </p:sp>
-      <p:sp>
-        <p:nvSpPr>
-          <p:cNvPr id="6" name="Text 4"/>
-          <p:cNvSpPr/>
-          <p:nvPr/>
-        </p:nvSpPr>
-        <p:spPr>
-          <a:xfrm>
-            <a:off x="457200" y="3456432"/>
-            <a:ext cx="5212080" cy="411480"/>
-          </a:xfrm>
-          <a:prstGeom prst="rect">
-            <a:avLst/>
-          </a:prstGeom>
-          <a:noFill/>
-          <a:ln/>
-        </p:spPr>
-        <p:txBody>
-          <a:bodyPr wrap="square" rtlCol="0" anchor="ctr"/>
-          <a:lstStyle/>
-          <a:p>
-            <a:pPr marL="0" indent="0">
-              <a:buNone/>
-            </a:pPr>
-            <a:r>
-              <a:rPr lang="en-US" sz="1100" i="1" dirty="0">
-                <a:solidFill>
-                  <a:srgbClr val="888888"/>
-                </a:solidFill>
-              </a:rPr>
               <a:t>Prepoznajte prijevaru · Zaštitite podatke · Budite sigurni online</a:t>
             </a:r>
-            <a:endParaRPr lang="en-US" sz="1100" dirty="0"/>
           </a:p>
         </p:txBody>
       </p:sp>
@@ -2284,6 +2248,184 @@
 </file>
 
 <file path=ppt/slides/slide10.xml><?xml version="1.0" encoding="utf-8"?>
+<p:sld xmlns:a="http://schemas.openxmlformats.org/drawingml/2006/main" xmlns:r="http://schemas.openxmlformats.org/officeDocument/2006/relationships" xmlns:p="http://schemas.openxmlformats.org/presentationml/2006/main">
+  <p:cSld>
+    <p:spTree>
+      <p:nvGrpSpPr>
+        <p:cNvPr id="1" name=""/>
+        <p:cNvGrpSpPr/>
+        <p:nvPr/>
+      </p:nvGrpSpPr>
+      <p:grpSpPr>
+        <a:xfrm>
+          <a:off x="0" y="0"/>
+          <a:ext cx="0" cy="0"/>
+          <a:chOff x="0" y="0"/>
+          <a:chExt cx="0" cy="0"/>
+        </a:xfrm>
+      </p:grpSpPr>
+      <p:pic>
+        <p:nvPicPr>
+          <p:cNvPr id="3" name="Picture 2">
+            <a:extLst>
+              <a:ext uri="{FF2B5EF4-FFF2-40B4-BE49-F238E27FC236}">
+                <a16:creationId xmlns:a16="http://schemas.microsoft.com/office/drawing/2014/main" id="{D06BF0CA-184E-648D-E3FD-594980805770}"/>
+              </a:ext>
+            </a:extLst>
+          </p:cNvPr>
+          <p:cNvPicPr>
+            <a:picLocks noChangeAspect="1"/>
+          </p:cNvPicPr>
+          <p:nvPr/>
+        </p:nvPicPr>
+        <p:blipFill>
+          <a:blip r:embed="rId2"/>
+          <a:stretch>
+            <a:fillRect/>
+          </a:stretch>
+        </p:blipFill>
+        <p:spPr>
+          <a:xfrm>
+            <a:off x="0" y="0"/>
+            <a:ext cx="9144000" cy="5143500"/>
+          </a:xfrm>
+          <a:prstGeom prst="rect">
+            <a:avLst/>
+          </a:prstGeom>
+        </p:spPr>
+      </p:pic>
+      <p:pic>
+        <p:nvPicPr>
+          <p:cNvPr id="6" name="Picture 5">
+            <a:extLst>
+              <a:ext uri="{FF2B5EF4-FFF2-40B4-BE49-F238E27FC236}">
+                <a16:creationId xmlns:a16="http://schemas.microsoft.com/office/drawing/2014/main" id="{B4255DF2-EF8B-D9CC-AAE1-CEB6D83CB1E4}"/>
+              </a:ext>
+            </a:extLst>
+          </p:cNvPr>
+          <p:cNvPicPr>
+            <a:picLocks noChangeAspect="1"/>
+          </p:cNvPicPr>
+          <p:nvPr/>
+        </p:nvPicPr>
+        <p:blipFill>
+          <a:blip r:embed="rId3"/>
+          <a:stretch>
+            <a:fillRect/>
+          </a:stretch>
+        </p:blipFill>
+        <p:spPr>
+          <a:xfrm>
+            <a:off x="265314" y="3838308"/>
+            <a:ext cx="5003084" cy="441266"/>
+          </a:xfrm>
+          <a:prstGeom prst="rect">
+            <a:avLst/>
+          </a:prstGeom>
+        </p:spPr>
+      </p:pic>
+      <p:sp>
+        <p:nvSpPr>
+          <p:cNvPr id="7" name="TextBox 6">
+            <a:extLst>
+              <a:ext uri="{FF2B5EF4-FFF2-40B4-BE49-F238E27FC236}">
+                <a16:creationId xmlns:a16="http://schemas.microsoft.com/office/drawing/2014/main" id="{D67787A6-13EB-6ACD-DCC4-56AEA9CAEB36}"/>
+              </a:ext>
+            </a:extLst>
+          </p:cNvPr>
+          <p:cNvSpPr txBox="1"/>
+          <p:nvPr/>
+        </p:nvSpPr>
+        <p:spPr>
+          <a:xfrm>
+            <a:off x="3778713" y="4650722"/>
+            <a:ext cx="2701765" cy="307777"/>
+          </a:xfrm>
+          <a:prstGeom prst="rect">
+            <a:avLst/>
+          </a:prstGeom>
+          <a:noFill/>
+        </p:spPr>
+        <p:txBody>
+          <a:bodyPr wrap="none" rtlCol="0">
+            <a:spAutoFit/>
+          </a:bodyPr>
+          <a:lstStyle/>
+          <a:p>
+            <a:r>
+              <a:rPr lang="en-US" sz="1400" i="1" dirty="0" err="1">
+                <a:solidFill>
+                  <a:schemeClr val="bg2">
+                    <a:lumMod val="25000"/>
+                  </a:schemeClr>
+                </a:solidFill>
+              </a:rPr>
+              <a:t>Preporučeno</a:t>
+            </a:r>
+            <a:r>
+              <a:rPr lang="en-US" sz="1400" i="1" dirty="0">
+                <a:solidFill>
+                  <a:schemeClr val="bg2">
+                    <a:lumMod val="25000"/>
+                  </a:schemeClr>
+                </a:solidFill>
+              </a:rPr>
+              <a:t> je </a:t>
+            </a:r>
+            <a:r>
+              <a:rPr lang="en-US" sz="1400" i="1" dirty="0" err="1">
+                <a:solidFill>
+                  <a:schemeClr val="bg2">
+                    <a:lumMod val="25000"/>
+                  </a:schemeClr>
+                </a:solidFill>
+              </a:rPr>
+              <a:t>plaćanje</a:t>
+            </a:r>
+            <a:r>
+              <a:rPr lang="en-US" sz="1400" i="1" dirty="0">
+                <a:solidFill>
+                  <a:schemeClr val="bg2">
+                    <a:lumMod val="25000"/>
+                  </a:schemeClr>
+                </a:solidFill>
+              </a:rPr>
+              <a:t> </a:t>
+            </a:r>
+            <a:r>
+              <a:rPr lang="en-US" sz="1400" i="1" dirty="0" err="1">
+                <a:solidFill>
+                  <a:schemeClr val="bg2">
+                    <a:lumMod val="25000"/>
+                  </a:schemeClr>
+                </a:solidFill>
+              </a:rPr>
+              <a:t>pouzećem</a:t>
+            </a:r>
+            <a:endParaRPr lang="en-US" sz="1400" i="1" dirty="0">
+              <a:solidFill>
+                <a:schemeClr val="bg2">
+                  <a:lumMod val="25000"/>
+                </a:schemeClr>
+              </a:solidFill>
+            </a:endParaRPr>
+          </a:p>
+        </p:txBody>
+      </p:sp>
+    </p:spTree>
+    <p:extLst>
+      <p:ext uri="{BB962C8B-B14F-4D97-AF65-F5344CB8AC3E}">
+        <p14:creationId xmlns:p14="http://schemas.microsoft.com/office/powerpoint/2010/main" val="1874175030"/>
+      </p:ext>
+    </p:extLst>
+  </p:cSld>
+  <p:clrMapOvr>
+    <a:masterClrMapping/>
+  </p:clrMapOvr>
+</p:sld>
+</file>
+
+<file path=ppt/slides/slide11.xml><?xml version="1.0" encoding="utf-8"?>
 <p:sld xmlns:a="http://schemas.openxmlformats.org/drawingml/2006/main" xmlns:r="http://schemas.openxmlformats.org/officeDocument/2006/relationships" xmlns:p="http://schemas.openxmlformats.org/presentationml/2006/main">
   <p:cSld name="Slide 9">
     <p:bg>
@@ -3160,7 +3302,7 @@
 </p:sld>
 </file>
 
-<file path=ppt/slides/slide11.xml><?xml version="1.0" encoding="utf-8"?>
+<file path=ppt/slides/slide12.xml><?xml version="1.0" encoding="utf-8"?>
 <p:sld xmlns:a="http://schemas.openxmlformats.org/drawingml/2006/main" xmlns:r="http://schemas.openxmlformats.org/officeDocument/2006/relationships" xmlns:p="http://schemas.openxmlformats.org/presentationml/2006/main">
   <p:cSld name="Slide 10">
     <p:bg>
@@ -3689,7 +3831,7 @@
 </p:sld>
 </file>
 
-<file path=ppt/slides/slide12.xml><?xml version="1.0" encoding="utf-8"?>
+<file path=ppt/slides/slide13.xml><?xml version="1.0" encoding="utf-8"?>
 <p:sld xmlns:a="http://schemas.openxmlformats.org/drawingml/2006/main" xmlns:r="http://schemas.openxmlformats.org/officeDocument/2006/relationships" xmlns:p="http://schemas.openxmlformats.org/presentationml/2006/main">
   <p:cSld name="Slide 11">
     <p:bg>
@@ -4486,7 +4628,7 @@
 </p:sld>
 </file>
 
-<file path=ppt/slides/slide13.xml><?xml version="1.0" encoding="utf-8"?>
+<file path=ppt/slides/slide14.xml><?xml version="1.0" encoding="utf-8"?>
 <p:sld xmlns:a="http://schemas.openxmlformats.org/drawingml/2006/main" xmlns:r="http://schemas.openxmlformats.org/officeDocument/2006/relationships" xmlns:p="http://schemas.openxmlformats.org/presentationml/2006/main">
   <p:cSld name="Slide 12">
     <p:bg>
@@ -5363,7 +5505,7 @@
 </p:sld>
 </file>
 
-<file path=ppt/slides/slide14.xml><?xml version="1.0" encoding="utf-8"?>
+<file path=ppt/slides/slide15.xml><?xml version="1.0" encoding="utf-8"?>
 <p:sld xmlns:a="http://schemas.openxmlformats.org/drawingml/2006/main" xmlns:r="http://schemas.openxmlformats.org/officeDocument/2006/relationships" xmlns:p="http://schemas.openxmlformats.org/presentationml/2006/main">
   <p:cSld name="Slide 13">
     <p:bg>
@@ -5472,7 +5614,7 @@
         </p:nvGraphicFramePr>
         <p:xfrm>
           <a:off x="274320" y="804672"/>
-          <a:ext cx="8595360" cy="914400"/>
+          <a:ext cx="8595360" cy="4389120"/>
         </p:xfrm>
         <a:graphic>
           <a:graphicData uri="http://schemas.openxmlformats.org/drawingml/2006/table">
@@ -7033,7 +7175,7 @@
 </p:sld>
 </file>
 
-<file path=ppt/slides/slide15.xml><?xml version="1.0" encoding="utf-8"?>
+<file path=ppt/slides/slide16.xml><?xml version="1.0" encoding="utf-8"?>
 <p:sld xmlns:a="http://schemas.openxmlformats.org/drawingml/2006/main" xmlns:r="http://schemas.openxmlformats.org/officeDocument/2006/relationships" xmlns:p="http://schemas.openxmlformats.org/presentationml/2006/main">
   <p:cSld name="Slide 14">
     <p:bg>
@@ -7580,7 +7722,7 @@
 </p:sld>
 </file>
 
-<file path=ppt/slides/slide16.xml><?xml version="1.0" encoding="utf-8"?>
+<file path=ppt/slides/slide17.xml><?xml version="1.0" encoding="utf-8"?>
 <p:sld xmlns:a="http://schemas.openxmlformats.org/drawingml/2006/main" xmlns:r="http://schemas.openxmlformats.org/officeDocument/2006/relationships" xmlns:p="http://schemas.openxmlformats.org/presentationml/2006/main">
   <p:cSld name="Slide 15">
     <p:bg>
@@ -7873,7 +8015,7 @@
         </p:nvSpPr>
         <p:spPr>
           <a:xfrm>
-            <a:off x="457200" y="4736592"/>
+            <a:off x="457200" y="4521708"/>
             <a:ext cx="5486400" cy="274320"/>
           </a:xfrm>
           <a:prstGeom prst="rect">
@@ -9280,7 +9422,39 @@
                   <a:srgbClr val="444444"/>
                 </a:solidFill>
               </a:rPr>
-              <a:t> poruka: nitko nije presmetan da postane žrtva. Znanje je jedina zaštita.</a:t>
+              <a:t> poruka: nitko </a:t>
+            </a:r>
+            <a:r>
+              <a:rPr lang="en-US" dirty="0" err="1">
+                <a:solidFill>
+                  <a:srgbClr val="444444"/>
+                </a:solidFill>
+              </a:rPr>
+              <a:t>nije</a:t>
+            </a:r>
+            <a:r>
+              <a:rPr lang="en-US" dirty="0">
+                <a:solidFill>
+                  <a:srgbClr val="444444"/>
+                </a:solidFill>
+              </a:rPr>
+              <a:t> </a:t>
+            </a:r>
+            <a:r>
+              <a:rPr lang="en-US" dirty="0" err="1">
+                <a:solidFill>
+                  <a:srgbClr val="444444"/>
+                </a:solidFill>
+              </a:rPr>
+              <a:t>prepametan</a:t>
+            </a:r>
+            <a:r>
+              <a:rPr lang="en-US" dirty="0">
+                <a:solidFill>
+                  <a:srgbClr val="444444"/>
+                </a:solidFill>
+              </a:rPr>
+              <a:t> da postane žrtva. Znanje je jedina zaštita.</a:t>
             </a:r>
             <a:endParaRPr lang="en-US" dirty="0"/>
           </a:p>

--- a/praksa/RAST/izradaprezentacije/Sigurnost_na_internetu_prezentacija.pptx
+++ b/praksa/RAST/izradaprezentacije/Sigurnost_na_internetu_prezentacija.pptx
@@ -5,7 +5,7 @@
     <p:sldMasterId id="2147483648" r:id="rId1"/>
   </p:sldMasterIdLst>
   <p:notesMasterIdLst>
-    <p:notesMasterId r:id="rId19"/>
+    <p:notesMasterId r:id="rId20"/>
   </p:notesMasterIdLst>
   <p:sldIdLst>
     <p:sldId id="256" r:id="rId2"/>
@@ -17,14 +17,15 @@
     <p:sldId id="261" r:id="rId8"/>
     <p:sldId id="262" r:id="rId9"/>
     <p:sldId id="263" r:id="rId10"/>
-    <p:sldId id="276" r:id="rId11"/>
-    <p:sldId id="264" r:id="rId12"/>
-    <p:sldId id="265" r:id="rId13"/>
-    <p:sldId id="266" r:id="rId14"/>
-    <p:sldId id="267" r:id="rId15"/>
-    <p:sldId id="268" r:id="rId16"/>
-    <p:sldId id="269" r:id="rId17"/>
-    <p:sldId id="270" r:id="rId18"/>
+    <p:sldId id="278" r:id="rId11"/>
+    <p:sldId id="279" r:id="rId12"/>
+    <p:sldId id="264" r:id="rId13"/>
+    <p:sldId id="265" r:id="rId14"/>
+    <p:sldId id="266" r:id="rId15"/>
+    <p:sldId id="267" r:id="rId16"/>
+    <p:sldId id="268" r:id="rId17"/>
+    <p:sldId id="269" r:id="rId18"/>
+    <p:sldId id="270" r:id="rId19"/>
   </p:sldIdLst>
   <p:sldSz cx="9144000" cy="5143500" type="screen16x9"/>
   <p:notesSz cx="5143500" cy="9144000"/>
@@ -342,7 +343,13 @@
   <p:cSld>
     <p:spTree>
       <p:nvGrpSpPr>
-        <p:cNvPr id="1" name=""/>
+        <p:cNvPr id="1" name="">
+          <a:extLst>
+            <a:ext uri="{FF2B5EF4-FFF2-40B4-BE49-F238E27FC236}">
+              <a16:creationId xmlns:a16="http://schemas.microsoft.com/office/drawing/2014/main" id="{5C589540-DC23-3454-5D8E-477127E17E71}"/>
+            </a:ext>
+          </a:extLst>
+        </p:cNvPr>
         <p:cNvGrpSpPr/>
         <p:nvPr/>
       </p:nvGrpSpPr>
@@ -356,7 +363,13 @@
       </p:grpSpPr>
       <p:sp>
         <p:nvSpPr>
-          <p:cNvPr id="2" name="Slide Image Placeholder 1"/>
+          <p:cNvPr id="2" name="Slide Image Placeholder 1">
+            <a:extLst>
+              <a:ext uri="{FF2B5EF4-FFF2-40B4-BE49-F238E27FC236}">
+                <a16:creationId xmlns:a16="http://schemas.microsoft.com/office/drawing/2014/main" id="{391A67C8-97D1-279B-3931-7A584C5643AC}"/>
+              </a:ext>
+            </a:extLst>
+          </p:cNvPr>
           <p:cNvSpPr>
             <a:spLocks noGrp="1" noRot="1" noChangeAspect="1"/>
           </p:cNvSpPr>
@@ -368,7 +381,13 @@
       </p:sp>
       <p:sp>
         <p:nvSpPr>
-          <p:cNvPr id="3" name="Notes Placeholder 2"/>
+          <p:cNvPr id="3" name="Notes Placeholder 2">
+            <a:extLst>
+              <a:ext uri="{FF2B5EF4-FFF2-40B4-BE49-F238E27FC236}">
+                <a16:creationId xmlns:a16="http://schemas.microsoft.com/office/drawing/2014/main" id="{6D85B80C-651E-620F-5F79-208A424F950D}"/>
+              </a:ext>
+            </a:extLst>
+          </p:cNvPr>
           <p:cNvSpPr>
             <a:spLocks noGrp="1"/>
           </p:cNvSpPr>
@@ -387,7 +406,13 @@
       </p:sp>
       <p:sp>
         <p:nvSpPr>
-          <p:cNvPr id="4" name="Slide Number Placeholder 3"/>
+          <p:cNvPr id="4" name="Slide Number Placeholder 3">
+            <a:extLst>
+              <a:ext uri="{FF2B5EF4-FFF2-40B4-BE49-F238E27FC236}">
+                <a16:creationId xmlns:a16="http://schemas.microsoft.com/office/drawing/2014/main" id="{4B45664B-0E8C-C467-5D38-80940DC1A6CB}"/>
+              </a:ext>
+            </a:extLst>
+          </p:cNvPr>
           <p:cNvSpPr>
             <a:spLocks noGrp="1"/>
           </p:cNvSpPr>
@@ -402,7 +427,7 @@
           <a:p>
             <a:fld id="{F7021451-1387-4CA6-816F-3879F97B5CBC}" type="slidenum">
               <a:rPr lang="en-US"/>
-              <a:t>11</a:t>
+              <a:t>10</a:t>
             </a:fld>
             <a:endParaRPr lang="en-US"/>
           </a:p>
@@ -411,7 +436,7 @@
     </p:spTree>
     <p:extLst>
       <p:ext uri="{BB962C8B-B14F-4D97-AF65-F5344CB8AC3E}">
-        <p14:creationId xmlns:p14="http://schemas.microsoft.com/office/powerpoint/2010/main" val="1024086991"/>
+        <p14:creationId xmlns:p14="http://schemas.microsoft.com/office/powerpoint/2010/main" val="1923249617"/>
       </p:ext>
     </p:extLst>
   </p:cSld>
@@ -426,7 +451,13 @@
   <p:cSld>
     <p:spTree>
       <p:nvGrpSpPr>
-        <p:cNvPr id="1" name=""/>
+        <p:cNvPr id="1" name="">
+          <a:extLst>
+            <a:ext uri="{FF2B5EF4-FFF2-40B4-BE49-F238E27FC236}">
+              <a16:creationId xmlns:a16="http://schemas.microsoft.com/office/drawing/2014/main" id="{CE68EC04-DE99-39FE-D08A-3D5B9F3EB617}"/>
+            </a:ext>
+          </a:extLst>
+        </p:cNvPr>
         <p:cNvGrpSpPr/>
         <p:nvPr/>
       </p:nvGrpSpPr>
@@ -440,7 +471,13 @@
       </p:grpSpPr>
       <p:sp>
         <p:nvSpPr>
-          <p:cNvPr id="2" name="Slide Image Placeholder 1"/>
+          <p:cNvPr id="2" name="Slide Image Placeholder 1">
+            <a:extLst>
+              <a:ext uri="{FF2B5EF4-FFF2-40B4-BE49-F238E27FC236}">
+                <a16:creationId xmlns:a16="http://schemas.microsoft.com/office/drawing/2014/main" id="{F27EABEF-0BB6-A7EC-837C-B5E9A39D080E}"/>
+              </a:ext>
+            </a:extLst>
+          </p:cNvPr>
           <p:cNvSpPr>
             <a:spLocks noGrp="1" noRot="1" noChangeAspect="1"/>
           </p:cNvSpPr>
@@ -452,7 +489,13 @@
       </p:sp>
       <p:sp>
         <p:nvSpPr>
-          <p:cNvPr id="3" name="Notes Placeholder 2"/>
+          <p:cNvPr id="3" name="Notes Placeholder 2">
+            <a:extLst>
+              <a:ext uri="{FF2B5EF4-FFF2-40B4-BE49-F238E27FC236}">
+                <a16:creationId xmlns:a16="http://schemas.microsoft.com/office/drawing/2014/main" id="{40FF391C-D5A5-2168-68CD-80F5EFAB92B6}"/>
+              </a:ext>
+            </a:extLst>
+          </p:cNvPr>
           <p:cNvSpPr>
             <a:spLocks noGrp="1"/>
           </p:cNvSpPr>
@@ -471,7 +514,13 @@
       </p:sp>
       <p:sp>
         <p:nvSpPr>
-          <p:cNvPr id="4" name="Slide Number Placeholder 3"/>
+          <p:cNvPr id="4" name="Slide Number Placeholder 3">
+            <a:extLst>
+              <a:ext uri="{FF2B5EF4-FFF2-40B4-BE49-F238E27FC236}">
+                <a16:creationId xmlns:a16="http://schemas.microsoft.com/office/drawing/2014/main" id="{7D35CAA2-9244-B860-250C-AD44CD8B2CDF}"/>
+              </a:ext>
+            </a:extLst>
+          </p:cNvPr>
           <p:cNvSpPr>
             <a:spLocks noGrp="1"/>
           </p:cNvSpPr>
@@ -486,7 +535,7 @@
           <a:p>
             <a:fld id="{F7021451-1387-4CA6-816F-3879F97B5CBC}" type="slidenum">
               <a:rPr lang="en-US"/>
-              <a:t>12</a:t>
+              <a:t>11</a:t>
             </a:fld>
             <a:endParaRPr lang="en-US"/>
           </a:p>
@@ -495,7 +544,7 @@
     </p:spTree>
     <p:extLst>
       <p:ext uri="{BB962C8B-B14F-4D97-AF65-F5344CB8AC3E}">
-        <p14:creationId xmlns:p14="http://schemas.microsoft.com/office/powerpoint/2010/main" val="1024086991"/>
+        <p14:creationId xmlns:p14="http://schemas.microsoft.com/office/powerpoint/2010/main" val="465230290"/>
       </p:ext>
     </p:extLst>
   </p:cSld>
@@ -570,7 +619,7 @@
           <a:p>
             <a:fld id="{F7021451-1387-4CA6-816F-3879F97B5CBC}" type="slidenum">
               <a:rPr lang="en-US"/>
-              <a:t>13</a:t>
+              <a:t>12</a:t>
             </a:fld>
             <a:endParaRPr lang="en-US"/>
           </a:p>
@@ -654,7 +703,7 @@
           <a:p>
             <a:fld id="{F7021451-1387-4CA6-816F-3879F97B5CBC}" type="slidenum">
               <a:rPr lang="en-US"/>
-              <a:t>14</a:t>
+              <a:t>13</a:t>
             </a:fld>
             <a:endParaRPr lang="en-US"/>
           </a:p>
@@ -738,7 +787,7 @@
           <a:p>
             <a:fld id="{F7021451-1387-4CA6-816F-3879F97B5CBC}" type="slidenum">
               <a:rPr lang="en-US"/>
-              <a:t>15</a:t>
+              <a:t>14</a:t>
             </a:fld>
             <a:endParaRPr lang="en-US"/>
           </a:p>
@@ -822,7 +871,7 @@
           <a:p>
             <a:fld id="{F7021451-1387-4CA6-816F-3879F97B5CBC}" type="slidenum">
               <a:rPr lang="en-US"/>
-              <a:t>16</a:t>
+              <a:t>15</a:t>
             </a:fld>
             <a:endParaRPr lang="en-US"/>
           </a:p>
@@ -906,7 +955,175 @@
           <a:p>
             <a:fld id="{F7021451-1387-4CA6-816F-3879F97B5CBC}" type="slidenum">
               <a:rPr lang="en-US"/>
+              <a:t>16</a:t>
+            </a:fld>
+            <a:endParaRPr lang="en-US"/>
+          </a:p>
+        </p:txBody>
+      </p:sp>
+    </p:spTree>
+    <p:extLst>
+      <p:ext uri="{BB962C8B-B14F-4D97-AF65-F5344CB8AC3E}">
+        <p14:creationId xmlns:p14="http://schemas.microsoft.com/office/powerpoint/2010/main" val="1024086991"/>
+      </p:ext>
+    </p:extLst>
+  </p:cSld>
+  <p:clrMapOvr>
+    <a:masterClrMapping/>
+  </p:clrMapOvr>
+</p:notes>
+</file>
+
+<file path=ppt/notesSlides/notesSlide17.xml><?xml version="1.0" encoding="utf-8"?>
+<p:notes xmlns:a="http://schemas.openxmlformats.org/drawingml/2006/main" xmlns:r="http://schemas.openxmlformats.org/officeDocument/2006/relationships" xmlns:p="http://schemas.openxmlformats.org/presentationml/2006/main">
+  <p:cSld>
+    <p:spTree>
+      <p:nvGrpSpPr>
+        <p:cNvPr id="1" name=""/>
+        <p:cNvGrpSpPr/>
+        <p:nvPr/>
+      </p:nvGrpSpPr>
+      <p:grpSpPr>
+        <a:xfrm>
+          <a:off x="0" y="0"/>
+          <a:ext cx="0" cy="0"/>
+          <a:chOff x="0" y="0"/>
+          <a:chExt cx="0" cy="0"/>
+        </a:xfrm>
+      </p:grpSpPr>
+      <p:sp>
+        <p:nvSpPr>
+          <p:cNvPr id="2" name="Slide Image Placeholder 1"/>
+          <p:cNvSpPr>
+            <a:spLocks noGrp="1" noRot="1" noChangeAspect="1"/>
+          </p:cNvSpPr>
+          <p:nvPr>
+            <p:ph type="sldImg"/>
+          </p:nvPr>
+        </p:nvSpPr>
+        <p:spPr/>
+      </p:sp>
+      <p:sp>
+        <p:nvSpPr>
+          <p:cNvPr id="3" name="Notes Placeholder 2"/>
+          <p:cNvSpPr>
+            <a:spLocks noGrp="1"/>
+          </p:cNvSpPr>
+          <p:nvPr>
+            <p:ph type="body" idx="1"/>
+          </p:nvPr>
+        </p:nvSpPr>
+        <p:spPr/>
+        <p:txBody>
+          <a:bodyPr/>
+          <a:lstStyle/>
+          <a:p>
+            <a:endParaRPr lang="en-US" dirty="0"/>
+          </a:p>
+        </p:txBody>
+      </p:sp>
+      <p:sp>
+        <p:nvSpPr>
+          <p:cNvPr id="4" name="Slide Number Placeholder 3"/>
+          <p:cNvSpPr>
+            <a:spLocks noGrp="1"/>
+          </p:cNvSpPr>
+          <p:nvPr>
+            <p:ph type="sldNum" sz="quarter" idx="10"/>
+          </p:nvPr>
+        </p:nvSpPr>
+        <p:spPr/>
+        <p:txBody>
+          <a:bodyPr/>
+          <a:lstStyle/>
+          <a:p>
+            <a:fld id="{F7021451-1387-4CA6-816F-3879F97B5CBC}" type="slidenum">
+              <a:rPr lang="en-US"/>
               <a:t>17</a:t>
+            </a:fld>
+            <a:endParaRPr lang="en-US"/>
+          </a:p>
+        </p:txBody>
+      </p:sp>
+    </p:spTree>
+    <p:extLst>
+      <p:ext uri="{BB962C8B-B14F-4D97-AF65-F5344CB8AC3E}">
+        <p14:creationId xmlns:p14="http://schemas.microsoft.com/office/powerpoint/2010/main" val="1024086991"/>
+      </p:ext>
+    </p:extLst>
+  </p:cSld>
+  <p:clrMapOvr>
+    <a:masterClrMapping/>
+  </p:clrMapOvr>
+</p:notes>
+</file>
+
+<file path=ppt/notesSlides/notesSlide18.xml><?xml version="1.0" encoding="utf-8"?>
+<p:notes xmlns:a="http://schemas.openxmlformats.org/drawingml/2006/main" xmlns:r="http://schemas.openxmlformats.org/officeDocument/2006/relationships" xmlns:p="http://schemas.openxmlformats.org/presentationml/2006/main">
+  <p:cSld>
+    <p:spTree>
+      <p:nvGrpSpPr>
+        <p:cNvPr id="1" name=""/>
+        <p:cNvGrpSpPr/>
+        <p:nvPr/>
+      </p:nvGrpSpPr>
+      <p:grpSpPr>
+        <a:xfrm>
+          <a:off x="0" y="0"/>
+          <a:ext cx="0" cy="0"/>
+          <a:chOff x="0" y="0"/>
+          <a:chExt cx="0" cy="0"/>
+        </a:xfrm>
+      </p:grpSpPr>
+      <p:sp>
+        <p:nvSpPr>
+          <p:cNvPr id="2" name="Slide Image Placeholder 1"/>
+          <p:cNvSpPr>
+            <a:spLocks noGrp="1" noRot="1" noChangeAspect="1"/>
+          </p:cNvSpPr>
+          <p:nvPr>
+            <p:ph type="sldImg"/>
+          </p:nvPr>
+        </p:nvSpPr>
+        <p:spPr/>
+      </p:sp>
+      <p:sp>
+        <p:nvSpPr>
+          <p:cNvPr id="3" name="Notes Placeholder 2"/>
+          <p:cNvSpPr>
+            <a:spLocks noGrp="1"/>
+          </p:cNvSpPr>
+          <p:nvPr>
+            <p:ph type="body" idx="1"/>
+          </p:nvPr>
+        </p:nvSpPr>
+        <p:spPr/>
+        <p:txBody>
+          <a:bodyPr/>
+          <a:lstStyle/>
+          <a:p>
+            <a:endParaRPr lang="en-US" dirty="0"/>
+          </a:p>
+        </p:txBody>
+      </p:sp>
+      <p:sp>
+        <p:nvSpPr>
+          <p:cNvPr id="4" name="Slide Number Placeholder 3"/>
+          <p:cNvSpPr>
+            <a:spLocks noGrp="1"/>
+          </p:cNvSpPr>
+          <p:nvPr>
+            <p:ph type="sldNum" sz="quarter" idx="10"/>
+          </p:nvPr>
+        </p:nvSpPr>
+        <p:spPr/>
+        <p:txBody>
+          <a:bodyPr/>
+          <a:lstStyle/>
+          <a:p>
+            <a:fld id="{F7021451-1387-4CA6-816F-3879F97B5CBC}" type="slidenum">
+              <a:rPr lang="en-US"/>
+              <a:t>18</a:t>
             </a:fld>
             <a:endParaRPr lang="en-US"/>
           </a:p>
@@ -1986,7 +2203,7 @@
           <a:bodyPr/>
           <a:lstStyle/>
           <a:p>
-            <a:endParaRPr lang="en-US"/>
+            <a:endParaRPr lang="hr-HR" noProof="0" dirty="0"/>
           </a:p>
         </p:txBody>
       </p:sp>
@@ -2015,28 +2232,28 @@
               <a:buNone/>
             </a:pPr>
             <a:r>
-              <a:rPr lang="en-US" sz="4000" b="1" dirty="0">
+              <a:rPr lang="hr-HR" sz="4000" b="1" noProof="0" dirty="0">
                 <a:solidFill>
                   <a:srgbClr val="FFFFFF"/>
                 </a:solidFill>
               </a:rPr>
               <a:t>SIGURNOST</a:t>
             </a:r>
-            <a:endParaRPr lang="en-US" sz="4000" dirty="0"/>
+            <a:endParaRPr lang="hr-HR" sz="4000" noProof="0" dirty="0"/>
           </a:p>
           <a:p>
             <a:pPr marL="0" indent="0">
               <a:buNone/>
             </a:pPr>
             <a:r>
-              <a:rPr lang="en-US" sz="4000" b="1" dirty="0">
+              <a:rPr lang="hr-HR" sz="4000" b="1" noProof="0" dirty="0">
                 <a:solidFill>
                   <a:srgbClr val="FFFFFF"/>
                 </a:solidFill>
               </a:rPr>
               <a:t>NA INTERNETU</a:t>
             </a:r>
-            <a:endParaRPr lang="en-US" sz="4000" dirty="0"/>
+            <a:endParaRPr lang="hr-HR" sz="4000" noProof="0" dirty="0"/>
           </a:p>
         </p:txBody>
       </p:sp>
@@ -2068,7 +2285,7 @@
           <a:bodyPr/>
           <a:lstStyle/>
           <a:p>
-            <a:endParaRPr lang="en-US" dirty="0"/>
+            <a:endParaRPr lang="hr-HR" noProof="0" dirty="0"/>
           </a:p>
         </p:txBody>
       </p:sp>
@@ -2097,7 +2314,7 @@
               <a:buNone/>
             </a:pPr>
             <a:r>
-              <a:rPr lang="it-IT" sz="1400" dirty="0">
+              <a:rPr lang="hr-HR" sz="1400" noProof="0" dirty="0">
                 <a:solidFill>
                   <a:srgbClr val="FFFFFF"/>
                 </a:solidFill>
@@ -2132,14 +2349,14 @@
               <a:buNone/>
             </a:pPr>
             <a:r>
-              <a:rPr lang="en-US" sz="1000" dirty="0">
+              <a:rPr lang="hr-HR" sz="1000" noProof="0" dirty="0">
                 <a:solidFill>
                   <a:srgbClr val="888888"/>
                 </a:solidFill>
               </a:rPr>
               <a:t>Razvojna agencija Split – RaST | SMART CITY LAB  ·  Veljača 2026.</a:t>
             </a:r>
-            <a:endParaRPr lang="en-US" sz="1000" dirty="0"/>
+            <a:endParaRPr lang="hr-HR" sz="1000" noProof="0" dirty="0"/>
           </a:p>
         </p:txBody>
       </p:sp>
@@ -2252,7 +2469,13 @@
   <p:cSld>
     <p:spTree>
       <p:nvGrpSpPr>
-        <p:cNvPr id="1" name=""/>
+        <p:cNvPr id="1" name="">
+          <a:extLst>
+            <a:ext uri="{FF2B5EF4-FFF2-40B4-BE49-F238E27FC236}">
+              <a16:creationId xmlns:a16="http://schemas.microsoft.com/office/drawing/2014/main" id="{13FCC3E5-74D9-DCC0-B302-CE5DEDA276E5}"/>
+            </a:ext>
+          </a:extLst>
+        </p:cNvPr>
         <p:cNvGrpSpPr/>
         <p:nvPr/>
       </p:nvGrpSpPr>
@@ -2264,42 +2487,704 @@
           <a:chExt cx="0" cy="0"/>
         </a:xfrm>
       </p:grpSpPr>
-      <p:pic>
-        <p:nvPicPr>
-          <p:cNvPr id="3" name="Picture 2">
+      <p:sp>
+        <p:nvSpPr>
+          <p:cNvPr id="2" name="Shape 0">
             <a:extLst>
               <a:ext uri="{FF2B5EF4-FFF2-40B4-BE49-F238E27FC236}">
-                <a16:creationId xmlns:a16="http://schemas.microsoft.com/office/drawing/2014/main" id="{D06BF0CA-184E-648D-E3FD-594980805770}"/>
+                <a16:creationId xmlns:a16="http://schemas.microsoft.com/office/drawing/2014/main" id="{4B78C3C5-C8EA-E210-3C48-658B0EEDE382}"/>
               </a:ext>
             </a:extLst>
           </p:cNvPr>
-          <p:cNvPicPr>
-            <a:picLocks noChangeAspect="1"/>
-          </p:cNvPicPr>
-          <p:nvPr/>
-        </p:nvPicPr>
-        <p:blipFill>
-          <a:blip r:embed="rId2"/>
-          <a:stretch>
-            <a:fillRect/>
-          </a:stretch>
-        </p:blipFill>
+          <p:cNvSpPr/>
+          <p:nvPr/>
+        </p:nvSpPr>
         <p:spPr>
           <a:xfrm>
             <a:off x="0" y="0"/>
-            <a:ext cx="9144000" cy="5143500"/>
-          </a:xfrm>
-          <a:prstGeom prst="rect">
-            <a:avLst/>
-          </a:prstGeom>
-        </p:spPr>
-      </p:pic>
+            <a:ext cx="9144000" cy="658368"/>
+          </a:xfrm>
+          <a:prstGeom prst="rect">
+            <a:avLst/>
+          </a:prstGeom>
+          <a:solidFill>
+            <a:srgbClr val="CC0000"/>
+          </a:solidFill>
+          <a:ln w="12700">
+            <a:solidFill>
+              <a:srgbClr val="CC0000"/>
+            </a:solidFill>
+            <a:prstDash val="solid"/>
+          </a:ln>
+        </p:spPr>
+        <p:txBody>
+          <a:bodyPr/>
+          <a:lstStyle/>
+          <a:p>
+            <a:endParaRPr lang="hr-HR" noProof="0" dirty="0"/>
+          </a:p>
+        </p:txBody>
+      </p:sp>
+      <p:sp>
+        <p:nvSpPr>
+          <p:cNvPr id="3" name="Text 1">
+            <a:extLst>
+              <a:ext uri="{FF2B5EF4-FFF2-40B4-BE49-F238E27FC236}">
+                <a16:creationId xmlns:a16="http://schemas.microsoft.com/office/drawing/2014/main" id="{BE07A929-0E7C-250C-0931-CCE3C357A29B}"/>
+              </a:ext>
+            </a:extLst>
+          </p:cNvPr>
+          <p:cNvSpPr/>
+          <p:nvPr/>
+        </p:nvSpPr>
+        <p:spPr>
+          <a:xfrm>
+            <a:off x="320040" y="0"/>
+            <a:ext cx="8503920" cy="658368"/>
+          </a:xfrm>
+          <a:prstGeom prst="rect">
+            <a:avLst/>
+          </a:prstGeom>
+          <a:noFill/>
+          <a:ln/>
+        </p:spPr>
+        <p:txBody>
+          <a:bodyPr wrap="square" lIns="0" tIns="0" rIns="0" bIns="0" rtlCol="0" anchor="ctr"/>
+          <a:lstStyle/>
+          <a:p>
+            <a:pPr marL="0" indent="0">
+              <a:buNone/>
+            </a:pPr>
+            <a:r>
+              <a:rPr lang="hr-HR" sz="2000" b="1" noProof="0" dirty="0">
+                <a:solidFill>
+                  <a:srgbClr val="FFFFFF"/>
+                </a:solidFill>
+              </a:rPr>
+              <a:t>Što se traži kod kartičnog plaćanja</a:t>
+            </a:r>
+            <a:endParaRPr lang="hr-HR" sz="2000" noProof="0" dirty="0"/>
+          </a:p>
+        </p:txBody>
+      </p:sp>
+      <p:sp>
+        <p:nvSpPr>
+          <p:cNvPr id="4" name="Text 2">
+            <a:extLst>
+              <a:ext uri="{FF2B5EF4-FFF2-40B4-BE49-F238E27FC236}">
+                <a16:creationId xmlns:a16="http://schemas.microsoft.com/office/drawing/2014/main" id="{B411F5FD-3D31-E62E-7748-0FB61E882729}"/>
+              </a:ext>
+            </a:extLst>
+          </p:cNvPr>
+          <p:cNvSpPr/>
+          <p:nvPr/>
+        </p:nvSpPr>
+        <p:spPr>
+          <a:xfrm>
+            <a:off x="365760" y="804672"/>
+            <a:ext cx="5303520" cy="4114800"/>
+          </a:xfrm>
+          <a:prstGeom prst="rect">
+            <a:avLst/>
+          </a:prstGeom>
+          <a:noFill/>
+          <a:ln/>
+        </p:spPr>
+        <p:txBody>
+          <a:bodyPr wrap="square" rtlCol="0" anchor="t"/>
+          <a:lstStyle/>
+          <a:p>
+            <a:pPr marL="342900" indent="-342900">
+              <a:spcAft>
+                <a:spcPts val="900"/>
+              </a:spcAft>
+              <a:buSzPct val="100000"/>
+              <a:buChar char="•"/>
+            </a:pPr>
+            <a:r>
+              <a:rPr lang="hr-HR" sz="1400" noProof="0" dirty="0">
+                <a:solidFill>
+                  <a:srgbClr val="444444"/>
+                </a:solidFill>
+              </a:rPr>
+              <a:t>Odaberite proizvode u web shopu</a:t>
+            </a:r>
+            <a:endParaRPr lang="hr-HR" sz="1400" noProof="0" dirty="0"/>
+          </a:p>
+          <a:p>
+            <a:pPr marL="342900" indent="-342900">
+              <a:spcAft>
+                <a:spcPts val="900"/>
+              </a:spcAft>
+              <a:buSzPct val="100000"/>
+              <a:buChar char="•"/>
+            </a:pPr>
+            <a:r>
+              <a:rPr lang="hr-HR" sz="1400" noProof="0" dirty="0">
+                <a:solidFill>
+                  <a:srgbClr val="444444"/>
+                </a:solidFill>
+              </a:rPr>
+              <a:t>Otiđite na košaricu i kliknete naruči</a:t>
+            </a:r>
+            <a:endParaRPr lang="hr-HR" sz="1400" noProof="0" dirty="0"/>
+          </a:p>
+          <a:p>
+            <a:pPr marL="342900" indent="-342900">
+              <a:spcAft>
+                <a:spcPts val="900"/>
+              </a:spcAft>
+              <a:buSzPct val="100000"/>
+              <a:buChar char="•"/>
+            </a:pPr>
+            <a:r>
+              <a:rPr lang="en-US" sz="1400" noProof="0" dirty="0" err="1">
+                <a:solidFill>
+                  <a:srgbClr val="444444"/>
+                </a:solidFill>
+              </a:rPr>
+              <a:t>Unesite</a:t>
+            </a:r>
+            <a:r>
+              <a:rPr lang="en-US" sz="1400" noProof="0" dirty="0">
+                <a:solidFill>
+                  <a:srgbClr val="444444"/>
+                </a:solidFill>
+              </a:rPr>
+              <a:t> </a:t>
+            </a:r>
+            <a:r>
+              <a:rPr lang="en-US" sz="1400" noProof="0" dirty="0" err="1">
+                <a:solidFill>
+                  <a:srgbClr val="444444"/>
+                </a:solidFill>
+              </a:rPr>
+              <a:t>adresu</a:t>
+            </a:r>
+            <a:r>
+              <a:rPr lang="en-US" sz="1400" noProof="0" dirty="0">
+                <a:solidFill>
+                  <a:srgbClr val="444444"/>
+                </a:solidFill>
+              </a:rPr>
+              <a:t> </a:t>
+            </a:r>
+            <a:r>
+              <a:rPr lang="en-US" sz="1400" noProof="0" dirty="0" err="1">
+                <a:solidFill>
+                  <a:srgbClr val="444444"/>
+                </a:solidFill>
+              </a:rPr>
+              <a:t>dostave</a:t>
+            </a:r>
+            <a:r>
+              <a:rPr lang="en-US" sz="1400" noProof="0" dirty="0">
+                <a:solidFill>
+                  <a:srgbClr val="444444"/>
+                </a:solidFill>
+              </a:rPr>
+              <a:t> </a:t>
+            </a:r>
+            <a:r>
+              <a:rPr lang="en-US" sz="1400" noProof="0" dirty="0" err="1">
+                <a:solidFill>
+                  <a:srgbClr val="444444"/>
+                </a:solidFill>
+              </a:rPr>
+              <a:t>i</a:t>
+            </a:r>
+            <a:r>
+              <a:rPr lang="en-US" sz="1400" noProof="0" dirty="0">
+                <a:solidFill>
+                  <a:srgbClr val="444444"/>
+                </a:solidFill>
+              </a:rPr>
+              <a:t> </a:t>
+            </a:r>
+            <a:r>
+              <a:rPr lang="en-US" sz="1400" noProof="0" dirty="0" err="1">
+                <a:solidFill>
+                  <a:srgbClr val="444444"/>
+                </a:solidFill>
+              </a:rPr>
+              <a:t>idite</a:t>
+            </a:r>
+            <a:r>
+              <a:rPr lang="en-US" sz="1400" noProof="0" dirty="0">
+                <a:solidFill>
+                  <a:srgbClr val="444444"/>
+                </a:solidFill>
+              </a:rPr>
+              <a:t> </a:t>
+            </a:r>
+            <a:r>
+              <a:rPr lang="en-US" sz="1400" noProof="0" dirty="0" err="1">
+                <a:solidFill>
+                  <a:srgbClr val="444444"/>
+                </a:solidFill>
+              </a:rPr>
+              <a:t>na</a:t>
+            </a:r>
+            <a:r>
+              <a:rPr lang="en-US" sz="1400" noProof="0" dirty="0">
+                <a:solidFill>
+                  <a:srgbClr val="444444"/>
+                </a:solidFill>
+              </a:rPr>
+              <a:t> </a:t>
+            </a:r>
+            <a:r>
+              <a:rPr lang="en-US" sz="1400" noProof="0" dirty="0" err="1">
+                <a:solidFill>
+                  <a:srgbClr val="444444"/>
+                </a:solidFill>
+              </a:rPr>
+              <a:t>plaćanje</a:t>
+            </a:r>
+            <a:r>
+              <a:rPr lang="en-US" sz="1400" noProof="0" dirty="0">
+                <a:solidFill>
+                  <a:srgbClr val="444444"/>
+                </a:solidFill>
+              </a:rPr>
+              <a:t>, </a:t>
+            </a:r>
+            <a:r>
+              <a:rPr lang="en-US" sz="1400" noProof="0" dirty="0" err="1">
+                <a:solidFill>
+                  <a:srgbClr val="444444"/>
+                </a:solidFill>
+              </a:rPr>
+              <a:t>odaberite</a:t>
+            </a:r>
+            <a:r>
+              <a:rPr lang="en-US" sz="1400" noProof="0" dirty="0">
+                <a:solidFill>
+                  <a:srgbClr val="444444"/>
+                </a:solidFill>
+              </a:rPr>
+              <a:t> </a:t>
+            </a:r>
+            <a:r>
+              <a:rPr lang="en-US" sz="1400" noProof="0" dirty="0" err="1">
+                <a:solidFill>
+                  <a:srgbClr val="444444"/>
+                </a:solidFill>
+              </a:rPr>
+              <a:t>način</a:t>
+            </a:r>
+            <a:r>
+              <a:rPr lang="en-US" sz="1400" noProof="0" dirty="0">
+                <a:solidFill>
+                  <a:srgbClr val="444444"/>
+                </a:solidFill>
+              </a:rPr>
+              <a:t> </a:t>
+            </a:r>
+            <a:r>
+              <a:rPr lang="en-US" sz="1400" noProof="0" dirty="0" err="1">
+                <a:solidFill>
+                  <a:srgbClr val="444444"/>
+                </a:solidFill>
+              </a:rPr>
+              <a:t>plaćanja</a:t>
+            </a:r>
+            <a:r>
+              <a:rPr lang="en-US" sz="1400" noProof="0" dirty="0">
+                <a:solidFill>
+                  <a:srgbClr val="444444"/>
+                </a:solidFill>
+              </a:rPr>
+              <a:t> </a:t>
+            </a:r>
+            <a:r>
+              <a:rPr lang="en-US" sz="1400" noProof="0" dirty="0" err="1">
+                <a:solidFill>
+                  <a:srgbClr val="444444"/>
+                </a:solidFill>
+              </a:rPr>
+              <a:t>karticom</a:t>
+            </a:r>
+            <a:endParaRPr lang="hr-HR" sz="1400" noProof="0" dirty="0"/>
+          </a:p>
+          <a:p>
+            <a:pPr marL="342900" indent="-342900">
+              <a:spcAft>
+                <a:spcPts val="900"/>
+              </a:spcAft>
+              <a:buSzPct val="100000"/>
+              <a:buChar char="•"/>
+            </a:pPr>
+            <a:r>
+              <a:rPr lang="en-US" sz="1400" noProof="0" dirty="0" err="1">
+                <a:solidFill>
+                  <a:srgbClr val="444444"/>
+                </a:solidFill>
+              </a:rPr>
+              <a:t>Webshop</a:t>
+            </a:r>
+            <a:r>
+              <a:rPr lang="hr-HR" sz="1400" noProof="0" dirty="0">
+                <a:solidFill>
+                  <a:srgbClr val="444444"/>
+                </a:solidFill>
+              </a:rPr>
+              <a:t> NIKADA neće tražiti vaš PIN </a:t>
+            </a:r>
+            <a:endParaRPr lang="en-US" sz="1400" noProof="0" dirty="0">
+              <a:solidFill>
+                <a:srgbClr val="444444"/>
+              </a:solidFill>
+            </a:endParaRPr>
+          </a:p>
+          <a:p>
+            <a:pPr marL="342900" indent="-342900">
+              <a:spcAft>
+                <a:spcPts val="900"/>
+              </a:spcAft>
+              <a:buSzPct val="100000"/>
+              <a:buChar char="•"/>
+            </a:pPr>
+            <a:r>
+              <a:rPr lang="en-US" sz="1400" noProof="0" dirty="0" err="1">
+                <a:solidFill>
+                  <a:srgbClr val="444444"/>
+                </a:solidFill>
+              </a:rPr>
+              <a:t>Unesite</a:t>
+            </a:r>
+            <a:r>
+              <a:rPr lang="en-US" sz="1400" dirty="0">
+                <a:solidFill>
+                  <a:srgbClr val="444444"/>
+                </a:solidFill>
+              </a:rPr>
+              <a:t> </a:t>
+            </a:r>
+            <a:r>
+              <a:rPr lang="en-US" sz="1400" dirty="0" err="1">
+                <a:solidFill>
+                  <a:srgbClr val="444444"/>
+                </a:solidFill>
+              </a:rPr>
+              <a:t>podatke</a:t>
+            </a:r>
+            <a:r>
+              <a:rPr lang="en-US" sz="1400" dirty="0">
+                <a:solidFill>
+                  <a:srgbClr val="444444"/>
+                </a:solidFill>
+              </a:rPr>
+              <a:t> </a:t>
+            </a:r>
+            <a:r>
+              <a:rPr lang="en-US" sz="1400" dirty="0" err="1">
+                <a:solidFill>
+                  <a:srgbClr val="444444"/>
+                </a:solidFill>
+              </a:rPr>
+              <a:t>sa</a:t>
+            </a:r>
+            <a:r>
+              <a:rPr lang="en-US" sz="1400" dirty="0">
+                <a:solidFill>
+                  <a:srgbClr val="444444"/>
+                </a:solidFill>
+              </a:rPr>
+              <a:t> </a:t>
+            </a:r>
+            <a:r>
+              <a:rPr lang="en-US" sz="1400" dirty="0" err="1">
+                <a:solidFill>
+                  <a:srgbClr val="444444"/>
+                </a:solidFill>
+              </a:rPr>
+              <a:t>kartice</a:t>
+            </a:r>
+            <a:r>
+              <a:rPr lang="en-US" sz="1400" dirty="0">
+                <a:solidFill>
+                  <a:srgbClr val="444444"/>
+                </a:solidFill>
+              </a:rPr>
+              <a:t> </a:t>
+            </a:r>
+            <a:r>
+              <a:rPr lang="en-US" sz="1400" i="1" dirty="0">
+                <a:solidFill>
+                  <a:schemeClr val="tx1">
+                    <a:lumMod val="50000"/>
+                    <a:lumOff val="50000"/>
+                  </a:schemeClr>
+                </a:solidFill>
+              </a:rPr>
+              <a:t>(</a:t>
+            </a:r>
+            <a:r>
+              <a:rPr lang="en-US" sz="1400" i="1" dirty="0" err="1">
+                <a:solidFill>
+                  <a:schemeClr val="tx1">
+                    <a:lumMod val="50000"/>
+                    <a:lumOff val="50000"/>
+                  </a:schemeClr>
+                </a:solidFill>
+              </a:rPr>
+              <a:t>podaci</a:t>
+            </a:r>
+            <a:r>
+              <a:rPr lang="en-US" sz="1400" i="1" dirty="0">
+                <a:solidFill>
+                  <a:schemeClr val="tx1">
+                    <a:lumMod val="50000"/>
+                    <a:lumOff val="50000"/>
+                  </a:schemeClr>
+                </a:solidFill>
+              </a:rPr>
+              <a:t> </a:t>
+            </a:r>
+            <a:r>
+              <a:rPr lang="en-US" sz="1400" i="1" dirty="0" err="1">
+                <a:solidFill>
+                  <a:schemeClr val="tx1">
+                    <a:lumMod val="50000"/>
+                    <a:lumOff val="50000"/>
+                  </a:schemeClr>
+                </a:solidFill>
+              </a:rPr>
+              <a:t>vlasnika</a:t>
+            </a:r>
+            <a:r>
+              <a:rPr lang="en-US" sz="1400" i="1" dirty="0">
+                <a:solidFill>
+                  <a:schemeClr val="tx1">
+                    <a:lumMod val="50000"/>
+                    <a:lumOff val="50000"/>
+                  </a:schemeClr>
+                </a:solidFill>
+              </a:rPr>
+              <a:t>, </a:t>
+            </a:r>
+            <a:r>
+              <a:rPr lang="en-US" sz="1400" i="1" dirty="0" err="1">
+                <a:solidFill>
+                  <a:schemeClr val="tx1">
+                    <a:lumMod val="50000"/>
+                    <a:lumOff val="50000"/>
+                  </a:schemeClr>
+                </a:solidFill>
+              </a:rPr>
+              <a:t>broj</a:t>
+            </a:r>
+            <a:r>
+              <a:rPr lang="en-US" sz="1400" i="1" dirty="0">
+                <a:solidFill>
+                  <a:schemeClr val="tx1">
+                    <a:lumMod val="50000"/>
+                    <a:lumOff val="50000"/>
+                  </a:schemeClr>
+                </a:solidFill>
+              </a:rPr>
+              <a:t>, datum </a:t>
+            </a:r>
+            <a:r>
+              <a:rPr lang="en-US" sz="1400" i="1" dirty="0" err="1">
+                <a:solidFill>
+                  <a:schemeClr val="tx1">
+                    <a:lumMod val="50000"/>
+                    <a:lumOff val="50000"/>
+                  </a:schemeClr>
+                </a:solidFill>
+              </a:rPr>
+              <a:t>isteka</a:t>
+            </a:r>
+            <a:r>
+              <a:rPr lang="en-US" sz="1400" i="1" dirty="0">
+                <a:solidFill>
+                  <a:schemeClr val="tx1">
+                    <a:lumMod val="50000"/>
+                    <a:lumOff val="50000"/>
+                  </a:schemeClr>
+                </a:solidFill>
+              </a:rPr>
+              <a:t>, </a:t>
+            </a:r>
+            <a:r>
+              <a:rPr lang="en-US" sz="1400" i="1" dirty="0" err="1">
+                <a:solidFill>
+                  <a:schemeClr val="tx1">
+                    <a:lumMod val="50000"/>
+                    <a:lumOff val="50000"/>
+                  </a:schemeClr>
+                </a:solidFill>
+              </a:rPr>
+              <a:t>cvc</a:t>
+            </a:r>
+            <a:r>
+              <a:rPr lang="en-US" sz="1400" i="1" dirty="0">
+                <a:solidFill>
+                  <a:schemeClr val="tx1">
+                    <a:lumMod val="50000"/>
+                    <a:lumOff val="50000"/>
+                  </a:schemeClr>
+                </a:solidFill>
+              </a:rPr>
+              <a:t>) </a:t>
+            </a:r>
+            <a:r>
+              <a:rPr lang="en-US" sz="1400" dirty="0" err="1">
+                <a:solidFill>
+                  <a:srgbClr val="444444"/>
+                </a:solidFill>
+              </a:rPr>
+              <a:t>i</a:t>
+            </a:r>
+            <a:r>
+              <a:rPr lang="en-US" sz="1400" dirty="0">
+                <a:solidFill>
+                  <a:srgbClr val="444444"/>
+                </a:solidFill>
+              </a:rPr>
+              <a:t> </a:t>
+            </a:r>
+            <a:r>
+              <a:rPr lang="en-US" sz="1400" dirty="0" err="1">
+                <a:solidFill>
+                  <a:srgbClr val="444444"/>
+                </a:solidFill>
+              </a:rPr>
+              <a:t>kliknete</a:t>
+            </a:r>
+            <a:r>
+              <a:rPr lang="en-US" sz="1400" dirty="0">
+                <a:solidFill>
+                  <a:srgbClr val="444444"/>
+                </a:solidFill>
+              </a:rPr>
+              <a:t> “</a:t>
+            </a:r>
+            <a:r>
+              <a:rPr lang="en-US" sz="1400" dirty="0" err="1">
+                <a:solidFill>
+                  <a:srgbClr val="444444"/>
+                </a:solidFill>
+              </a:rPr>
+              <a:t>plati</a:t>
+            </a:r>
+            <a:r>
+              <a:rPr lang="en-US" sz="1400" dirty="0">
+                <a:solidFill>
+                  <a:srgbClr val="444444"/>
+                </a:solidFill>
+              </a:rPr>
+              <a:t>”</a:t>
+            </a:r>
+            <a:endParaRPr lang="hr-HR" sz="1400" noProof="0" dirty="0">
+              <a:solidFill>
+                <a:schemeClr val="tx1">
+                  <a:lumMod val="50000"/>
+                  <a:lumOff val="50000"/>
+                </a:schemeClr>
+              </a:solidFill>
+            </a:endParaRPr>
+          </a:p>
+          <a:p>
+            <a:pPr marL="342900" indent="-342900">
+              <a:spcAft>
+                <a:spcPts val="900"/>
+              </a:spcAft>
+              <a:buSzPct val="100000"/>
+              <a:buChar char="•"/>
+            </a:pPr>
+            <a:r>
+              <a:rPr lang="en-US" sz="1400" noProof="0" dirty="0">
+                <a:solidFill>
+                  <a:srgbClr val="444444"/>
+                </a:solidFill>
+              </a:rPr>
+              <a:t>U </a:t>
+            </a:r>
+            <a:r>
+              <a:rPr lang="en-US" sz="1400" noProof="0" dirty="0" err="1">
+                <a:solidFill>
+                  <a:srgbClr val="444444"/>
+                </a:solidFill>
+              </a:rPr>
+              <a:t>aplikaciji</a:t>
+            </a:r>
+            <a:r>
+              <a:rPr lang="en-US" sz="1400" noProof="0" dirty="0">
+                <a:solidFill>
+                  <a:srgbClr val="444444"/>
+                </a:solidFill>
+              </a:rPr>
+              <a:t> </a:t>
+            </a:r>
+            <a:r>
+              <a:rPr lang="en-US" sz="1400" noProof="0" dirty="0" err="1">
+                <a:solidFill>
+                  <a:srgbClr val="444444"/>
+                </a:solidFill>
+              </a:rPr>
+              <a:t>mobilnog</a:t>
+            </a:r>
+            <a:r>
+              <a:rPr lang="en-US" sz="1400" noProof="0" dirty="0">
+                <a:solidFill>
+                  <a:srgbClr val="444444"/>
+                </a:solidFill>
+              </a:rPr>
+              <a:t> </a:t>
+            </a:r>
+            <a:r>
+              <a:rPr lang="en-US" sz="1400" noProof="0" dirty="0" err="1">
+                <a:solidFill>
+                  <a:srgbClr val="444444"/>
+                </a:solidFill>
+              </a:rPr>
+              <a:t>bankarstva</a:t>
+            </a:r>
+            <a:r>
+              <a:rPr lang="en-US" sz="1400" noProof="0" dirty="0">
+                <a:solidFill>
+                  <a:srgbClr val="444444"/>
+                </a:solidFill>
+              </a:rPr>
+              <a:t> </a:t>
+            </a:r>
+            <a:r>
+              <a:rPr lang="en-US" sz="1400" noProof="0" dirty="0" err="1">
+                <a:solidFill>
+                  <a:srgbClr val="444444"/>
+                </a:solidFill>
+              </a:rPr>
+              <a:t>potvrdite</a:t>
+            </a:r>
+            <a:r>
+              <a:rPr lang="en-US" sz="1400" noProof="0" dirty="0">
+                <a:solidFill>
+                  <a:srgbClr val="444444"/>
+                </a:solidFill>
+              </a:rPr>
+              <a:t> </a:t>
+            </a:r>
+            <a:r>
+              <a:rPr lang="en-US" sz="1400" noProof="0" dirty="0" err="1">
+                <a:solidFill>
+                  <a:srgbClr val="444444"/>
+                </a:solidFill>
+              </a:rPr>
+              <a:t>transakciju</a:t>
+            </a:r>
+            <a:endParaRPr lang="hr-HR" sz="1400" noProof="0" dirty="0"/>
+          </a:p>
+        </p:txBody>
+      </p:sp>
       <p:pic>
         <p:nvPicPr>
-          <p:cNvPr id="6" name="Picture 5">
+          <p:cNvPr id="13" name="Picture 12">
             <a:extLst>
               <a:ext uri="{FF2B5EF4-FFF2-40B4-BE49-F238E27FC236}">
-                <a16:creationId xmlns:a16="http://schemas.microsoft.com/office/drawing/2014/main" id="{B4255DF2-EF8B-D9CC-AAE1-CEB6D83CB1E4}"/>
+                <a16:creationId xmlns:a16="http://schemas.microsoft.com/office/drawing/2014/main" id="{4BBA50C6-1858-CE9D-502A-012B94020A92}"/>
               </a:ext>
             </a:extLst>
           </p:cNvPr>
@@ -2316,106 +3201,48 @@
         </p:blipFill>
         <p:spPr>
           <a:xfrm>
-            <a:off x="265314" y="3838308"/>
-            <a:ext cx="5003084" cy="441266"/>
+            <a:off x="5377606" y="3056934"/>
+            <a:ext cx="3546590" cy="1378588"/>
           </a:xfrm>
           <a:prstGeom prst="rect">
             <a:avLst/>
           </a:prstGeom>
         </p:spPr>
       </p:pic>
-      <p:sp>
-        <p:nvSpPr>
-          <p:cNvPr id="7" name="TextBox 6">
+      <p:pic>
+        <p:nvPicPr>
+          <p:cNvPr id="14" name="Picture 13" descr="Plaćanje karticama | Gama Shop">
             <a:extLst>
               <a:ext uri="{FF2B5EF4-FFF2-40B4-BE49-F238E27FC236}">
-                <a16:creationId xmlns:a16="http://schemas.microsoft.com/office/drawing/2014/main" id="{D67787A6-13EB-6ACD-DCC4-56AEA9CAEB36}"/>
+                <a16:creationId xmlns:a16="http://schemas.microsoft.com/office/drawing/2014/main" id="{C6EC2E8C-806A-5227-393A-D09F03191759}"/>
               </a:ext>
             </a:extLst>
           </p:cNvPr>
-          <p:cNvSpPr txBox="1"/>
-          <p:nvPr/>
-        </p:nvSpPr>
-        <p:spPr>
-          <a:xfrm>
-            <a:off x="3778713" y="4650722"/>
-            <a:ext cx="2701765" cy="307777"/>
-          </a:xfrm>
-          <a:prstGeom prst="rect">
-            <a:avLst/>
-          </a:prstGeom>
-          <a:noFill/>
-        </p:spPr>
-        <p:txBody>
-          <a:bodyPr wrap="none" rtlCol="0">
-            <a:spAutoFit/>
-          </a:bodyPr>
-          <a:lstStyle/>
-          <a:p>
-            <a:r>
-              <a:rPr lang="en-US" sz="1400" i="1" dirty="0" err="1">
-                <a:solidFill>
-                  <a:schemeClr val="bg2">
-                    <a:lumMod val="25000"/>
-                  </a:schemeClr>
-                </a:solidFill>
-              </a:rPr>
-              <a:t>Preporučeno</a:t>
-            </a:r>
-            <a:r>
-              <a:rPr lang="en-US" sz="1400" i="1" dirty="0">
-                <a:solidFill>
-                  <a:schemeClr val="bg2">
-                    <a:lumMod val="25000"/>
-                  </a:schemeClr>
-                </a:solidFill>
-              </a:rPr>
-              <a:t> je </a:t>
-            </a:r>
-            <a:r>
-              <a:rPr lang="en-US" sz="1400" i="1" dirty="0" err="1">
-                <a:solidFill>
-                  <a:schemeClr val="bg2">
-                    <a:lumMod val="25000"/>
-                  </a:schemeClr>
-                </a:solidFill>
-              </a:rPr>
-              <a:t>plaćanje</a:t>
-            </a:r>
-            <a:r>
-              <a:rPr lang="en-US" sz="1400" i="1" dirty="0">
-                <a:solidFill>
-                  <a:schemeClr val="bg2">
-                    <a:lumMod val="25000"/>
-                  </a:schemeClr>
-                </a:solidFill>
-              </a:rPr>
-              <a:t> </a:t>
-            </a:r>
-            <a:r>
-              <a:rPr lang="en-US" sz="1400" i="1" dirty="0" err="1">
-                <a:solidFill>
-                  <a:schemeClr val="bg2">
-                    <a:lumMod val="25000"/>
-                  </a:schemeClr>
-                </a:solidFill>
-              </a:rPr>
-              <a:t>pouzećem</a:t>
-            </a:r>
-            <a:endParaRPr lang="en-US" sz="1400" i="1" dirty="0">
-              <a:solidFill>
-                <a:schemeClr val="bg2">
-                  <a:lumMod val="25000"/>
-                </a:schemeClr>
-              </a:solidFill>
-            </a:endParaRPr>
-          </a:p>
-        </p:txBody>
-      </p:sp>
+          <p:cNvPicPr>
+            <a:picLocks noChangeAspect="1"/>
+          </p:cNvPicPr>
+          <p:nvPr/>
+        </p:nvPicPr>
+        <p:blipFill>
+          <a:blip r:embed="rId4"/>
+          <a:stretch>
+            <a:fillRect/>
+          </a:stretch>
+        </p:blipFill>
+        <p:spPr>
+          <a:xfrm>
+            <a:off x="5371674" y="804672"/>
+            <a:ext cx="3708998" cy="1874020"/>
+          </a:xfrm>
+          <a:prstGeom prst="rect">
+            <a:avLst/>
+          </a:prstGeom>
+        </p:spPr>
+      </p:pic>
     </p:spTree>
     <p:extLst>
       <p:ext uri="{BB962C8B-B14F-4D97-AF65-F5344CB8AC3E}">
-        <p14:creationId xmlns:p14="http://schemas.microsoft.com/office/powerpoint/2010/main" val="1874175030"/>
+        <p14:creationId xmlns:p14="http://schemas.microsoft.com/office/powerpoint/2010/main" val="4175569007"/>
       </p:ext>
     </p:extLst>
   </p:cSld>
@@ -2426,6 +3253,1310 @@
 </file>
 
 <file path=ppt/slides/slide11.xml><?xml version="1.0" encoding="utf-8"?>
+<p:sld xmlns:a="http://schemas.openxmlformats.org/drawingml/2006/main" xmlns:r="http://schemas.openxmlformats.org/officeDocument/2006/relationships" xmlns:p="http://schemas.openxmlformats.org/presentationml/2006/main">
+  <p:cSld>
+    <p:spTree>
+      <p:nvGrpSpPr>
+        <p:cNvPr id="1" name="">
+          <a:extLst>
+            <a:ext uri="{FF2B5EF4-FFF2-40B4-BE49-F238E27FC236}">
+              <a16:creationId xmlns:a16="http://schemas.microsoft.com/office/drawing/2014/main" id="{42985A3B-933D-C21F-7E14-09096BB3C13F}"/>
+            </a:ext>
+          </a:extLst>
+        </p:cNvPr>
+        <p:cNvGrpSpPr/>
+        <p:nvPr/>
+      </p:nvGrpSpPr>
+      <p:grpSpPr>
+        <a:xfrm>
+          <a:off x="0" y="0"/>
+          <a:ext cx="0" cy="0"/>
+          <a:chOff x="0" y="0"/>
+          <a:chExt cx="0" cy="0"/>
+        </a:xfrm>
+      </p:grpSpPr>
+      <p:sp>
+        <p:nvSpPr>
+          <p:cNvPr id="2" name="Shape 0">
+            <a:extLst>
+              <a:ext uri="{FF2B5EF4-FFF2-40B4-BE49-F238E27FC236}">
+                <a16:creationId xmlns:a16="http://schemas.microsoft.com/office/drawing/2014/main" id="{75C37F7C-D6EB-A371-3462-A655ACF97084}"/>
+              </a:ext>
+            </a:extLst>
+          </p:cNvPr>
+          <p:cNvSpPr/>
+          <p:nvPr/>
+        </p:nvSpPr>
+        <p:spPr>
+          <a:xfrm>
+            <a:off x="0" y="0"/>
+            <a:ext cx="9144000" cy="658368"/>
+          </a:xfrm>
+          <a:prstGeom prst="rect">
+            <a:avLst/>
+          </a:prstGeom>
+          <a:solidFill>
+            <a:srgbClr val="CC0000"/>
+          </a:solidFill>
+          <a:ln w="12700">
+            <a:solidFill>
+              <a:srgbClr val="CC0000"/>
+            </a:solidFill>
+            <a:prstDash val="solid"/>
+          </a:ln>
+        </p:spPr>
+        <p:txBody>
+          <a:bodyPr/>
+          <a:lstStyle/>
+          <a:p>
+            <a:endParaRPr lang="hr-HR" noProof="0" dirty="0"/>
+          </a:p>
+        </p:txBody>
+      </p:sp>
+      <p:sp>
+        <p:nvSpPr>
+          <p:cNvPr id="3" name="Text 1">
+            <a:extLst>
+              <a:ext uri="{FF2B5EF4-FFF2-40B4-BE49-F238E27FC236}">
+                <a16:creationId xmlns:a16="http://schemas.microsoft.com/office/drawing/2014/main" id="{D7533EBE-D935-B8C1-F456-0627C20E9B33}"/>
+              </a:ext>
+            </a:extLst>
+          </p:cNvPr>
+          <p:cNvSpPr/>
+          <p:nvPr/>
+        </p:nvSpPr>
+        <p:spPr>
+          <a:xfrm>
+            <a:off x="320040" y="0"/>
+            <a:ext cx="8503920" cy="658368"/>
+          </a:xfrm>
+          <a:prstGeom prst="rect">
+            <a:avLst/>
+          </a:prstGeom>
+          <a:noFill/>
+          <a:ln/>
+        </p:spPr>
+        <p:txBody>
+          <a:bodyPr wrap="square" lIns="0" tIns="0" rIns="0" bIns="0" rtlCol="0" anchor="ctr"/>
+          <a:lstStyle/>
+          <a:p>
+            <a:pPr marL="0" indent="0">
+              <a:buNone/>
+            </a:pPr>
+            <a:r>
+              <a:rPr lang="en-US" sz="2000" i="1" noProof="0" dirty="0">
+                <a:solidFill>
+                  <a:schemeClr val="bg1"/>
+                </a:solidFill>
+              </a:rPr>
+              <a:t>“Pre paid” </a:t>
+            </a:r>
+            <a:r>
+              <a:rPr lang="en-US" sz="2000" noProof="0" dirty="0" err="1">
+                <a:solidFill>
+                  <a:schemeClr val="bg1"/>
+                </a:solidFill>
+              </a:rPr>
+              <a:t>kartice</a:t>
+            </a:r>
+            <a:r>
+              <a:rPr lang="en-US" sz="2000" noProof="0" dirty="0">
+                <a:solidFill>
+                  <a:schemeClr val="bg1"/>
+                </a:solidFill>
+              </a:rPr>
+              <a:t> - </a:t>
+            </a:r>
+            <a:r>
+              <a:rPr lang="en-US" sz="2000" b="1" noProof="0" dirty="0">
+                <a:solidFill>
+                  <a:schemeClr val="bg1"/>
+                </a:solidFill>
+              </a:rPr>
+              <a:t>Revolut </a:t>
+            </a:r>
+            <a:endParaRPr lang="hr-HR" sz="2000" b="1" i="1" noProof="0" dirty="0">
+              <a:solidFill>
+                <a:schemeClr val="bg1"/>
+              </a:solidFill>
+            </a:endParaRPr>
+          </a:p>
+        </p:txBody>
+      </p:sp>
+      <p:sp>
+        <p:nvSpPr>
+          <p:cNvPr id="4" name="Text 2">
+            <a:extLst>
+              <a:ext uri="{FF2B5EF4-FFF2-40B4-BE49-F238E27FC236}">
+                <a16:creationId xmlns:a16="http://schemas.microsoft.com/office/drawing/2014/main" id="{85D9A5A5-4F75-25DC-A413-9879F4624985}"/>
+              </a:ext>
+            </a:extLst>
+          </p:cNvPr>
+          <p:cNvSpPr/>
+          <p:nvPr/>
+        </p:nvSpPr>
+        <p:spPr>
+          <a:xfrm>
+            <a:off x="365760" y="804672"/>
+            <a:ext cx="5303520" cy="4114800"/>
+          </a:xfrm>
+          <a:prstGeom prst="rect">
+            <a:avLst/>
+          </a:prstGeom>
+          <a:noFill/>
+          <a:ln/>
+        </p:spPr>
+        <p:txBody>
+          <a:bodyPr wrap="square" rtlCol="0" anchor="t"/>
+          <a:lstStyle/>
+          <a:p>
+            <a:pPr marL="342900" indent="-342900">
+              <a:spcAft>
+                <a:spcPts val="900"/>
+              </a:spcAft>
+              <a:buSzPct val="100000"/>
+              <a:buChar char="•"/>
+            </a:pPr>
+            <a:r>
+              <a:rPr lang="en-US" sz="1400" i="1" dirty="0">
+                <a:solidFill>
+                  <a:srgbClr val="444444"/>
+                </a:solidFill>
+              </a:rPr>
+              <a:t>“Pre paid” – “Pred </a:t>
+            </a:r>
+            <a:r>
+              <a:rPr lang="en-US" sz="1400" i="1" dirty="0" err="1">
+                <a:solidFill>
+                  <a:srgbClr val="444444"/>
+                </a:solidFill>
+              </a:rPr>
+              <a:t>plaćena</a:t>
+            </a:r>
+            <a:r>
+              <a:rPr lang="en-US" sz="1400" i="1" dirty="0">
+                <a:solidFill>
+                  <a:srgbClr val="444444"/>
+                </a:solidFill>
+              </a:rPr>
+              <a:t>” </a:t>
+            </a:r>
+            <a:endParaRPr lang="hr-HR" sz="1400" i="1" noProof="0" dirty="0"/>
+          </a:p>
+          <a:p>
+            <a:pPr marL="342900" indent="-342900">
+              <a:spcAft>
+                <a:spcPts val="900"/>
+              </a:spcAft>
+              <a:buSzPct val="100000"/>
+              <a:buChar char="•"/>
+            </a:pPr>
+            <a:r>
+              <a:rPr lang="en-US" sz="1400" noProof="0" dirty="0" err="1">
+                <a:solidFill>
+                  <a:srgbClr val="444444"/>
+                </a:solidFill>
+              </a:rPr>
+              <a:t>Aplikacije</a:t>
+            </a:r>
+            <a:r>
+              <a:rPr lang="en-US" sz="1400" noProof="0" dirty="0">
+                <a:solidFill>
+                  <a:srgbClr val="444444"/>
+                </a:solidFill>
+              </a:rPr>
+              <a:t> Revolut, </a:t>
+            </a:r>
+            <a:r>
+              <a:rPr lang="en-US" sz="1400" noProof="0" dirty="0" err="1">
+                <a:solidFill>
+                  <a:srgbClr val="444444"/>
+                </a:solidFill>
+              </a:rPr>
+              <a:t>KeksPay</a:t>
+            </a:r>
+            <a:r>
+              <a:rPr lang="en-US" sz="1400" noProof="0" dirty="0">
+                <a:solidFill>
+                  <a:srgbClr val="444444"/>
+                </a:solidFill>
+              </a:rPr>
+              <a:t>, </a:t>
+            </a:r>
+            <a:r>
+              <a:rPr lang="en-US" sz="1400" noProof="0" dirty="0" err="1">
+                <a:solidFill>
+                  <a:srgbClr val="444444"/>
+                </a:solidFill>
+              </a:rPr>
+              <a:t>AirCash</a:t>
+            </a:r>
+            <a:r>
+              <a:rPr lang="en-US" sz="1400" noProof="0" dirty="0">
+                <a:solidFill>
+                  <a:srgbClr val="444444"/>
+                </a:solidFill>
+              </a:rPr>
+              <a:t>…</a:t>
+            </a:r>
+            <a:endParaRPr lang="hr-HR" sz="1400" noProof="0" dirty="0"/>
+          </a:p>
+          <a:p>
+            <a:pPr marL="342900" indent="-342900">
+              <a:spcAft>
+                <a:spcPts val="900"/>
+              </a:spcAft>
+              <a:buSzPct val="100000"/>
+              <a:buChar char="•"/>
+            </a:pPr>
+            <a:r>
+              <a:rPr lang="en-US" sz="1400" noProof="0" dirty="0">
+                <a:solidFill>
+                  <a:srgbClr val="444444"/>
+                </a:solidFill>
+              </a:rPr>
+              <a:t>Revolut </a:t>
+            </a:r>
+            <a:r>
+              <a:rPr lang="en-US" sz="1400" noProof="0" dirty="0" err="1">
+                <a:solidFill>
+                  <a:srgbClr val="444444"/>
+                </a:solidFill>
+              </a:rPr>
+              <a:t>nudi</a:t>
+            </a:r>
+            <a:r>
+              <a:rPr lang="en-US" sz="1400" noProof="0" dirty="0">
+                <a:solidFill>
+                  <a:srgbClr val="444444"/>
+                </a:solidFill>
+              </a:rPr>
+              <a:t> </a:t>
+            </a:r>
+            <a:r>
+              <a:rPr lang="en-US" sz="1400" noProof="0" dirty="0" err="1">
+                <a:solidFill>
+                  <a:srgbClr val="444444"/>
+                </a:solidFill>
+              </a:rPr>
+              <a:t>opciju</a:t>
+            </a:r>
+            <a:r>
+              <a:rPr lang="en-US" sz="1400" noProof="0" dirty="0">
+                <a:solidFill>
+                  <a:srgbClr val="444444"/>
+                </a:solidFill>
+              </a:rPr>
+              <a:t> </a:t>
+            </a:r>
+            <a:r>
+              <a:rPr lang="en-US" sz="1400" noProof="0" dirty="0" err="1">
+                <a:solidFill>
+                  <a:srgbClr val="444444"/>
+                </a:solidFill>
+              </a:rPr>
+              <a:t>podizanja</a:t>
+            </a:r>
+            <a:r>
+              <a:rPr lang="en-US" sz="1400" noProof="0" dirty="0">
+                <a:solidFill>
+                  <a:srgbClr val="444444"/>
+                </a:solidFill>
+              </a:rPr>
+              <a:t> </a:t>
+            </a:r>
+            <a:r>
+              <a:rPr lang="en-US" sz="1400" noProof="0" dirty="0" err="1">
+                <a:solidFill>
+                  <a:srgbClr val="444444"/>
+                </a:solidFill>
+              </a:rPr>
+              <a:t>gotovine</a:t>
+            </a:r>
+            <a:r>
+              <a:rPr lang="en-US" sz="1400" noProof="0" dirty="0">
+                <a:solidFill>
+                  <a:srgbClr val="444444"/>
+                </a:solidFill>
+              </a:rPr>
+              <a:t> </a:t>
+            </a:r>
+            <a:r>
+              <a:rPr lang="en-US" sz="1400" noProof="0" dirty="0" err="1">
+                <a:solidFill>
+                  <a:srgbClr val="444444"/>
+                </a:solidFill>
+              </a:rPr>
+              <a:t>na</a:t>
+            </a:r>
+            <a:r>
+              <a:rPr lang="en-US" sz="1400" noProof="0" dirty="0">
+                <a:solidFill>
+                  <a:srgbClr val="444444"/>
+                </a:solidFill>
+              </a:rPr>
+              <a:t> </a:t>
+            </a:r>
+            <a:r>
+              <a:rPr lang="en-US" sz="1400" noProof="0" dirty="0" err="1">
+                <a:solidFill>
+                  <a:srgbClr val="444444"/>
+                </a:solidFill>
+              </a:rPr>
+              <a:t>bilo</a:t>
+            </a:r>
+            <a:r>
+              <a:rPr lang="en-US" sz="1400" noProof="0" dirty="0">
+                <a:solidFill>
+                  <a:srgbClr val="444444"/>
+                </a:solidFill>
+              </a:rPr>
+              <a:t> </a:t>
+            </a:r>
+            <a:r>
+              <a:rPr lang="en-US" sz="1400" noProof="0" dirty="0" err="1">
+                <a:solidFill>
+                  <a:srgbClr val="444444"/>
+                </a:solidFill>
+              </a:rPr>
+              <a:t>kojem</a:t>
+            </a:r>
+            <a:r>
+              <a:rPr lang="en-US" sz="1400" noProof="0" dirty="0">
+                <a:solidFill>
+                  <a:srgbClr val="444444"/>
+                </a:solidFill>
+              </a:rPr>
+              <a:t> </a:t>
+            </a:r>
+            <a:r>
+              <a:rPr lang="en-US" sz="1400" noProof="0" dirty="0" err="1">
+                <a:solidFill>
+                  <a:srgbClr val="444444"/>
+                </a:solidFill>
+              </a:rPr>
+              <a:t>bankomatu</a:t>
+            </a:r>
+            <a:r>
+              <a:rPr lang="en-US" sz="1400" noProof="0" dirty="0">
+                <a:solidFill>
+                  <a:srgbClr val="444444"/>
+                </a:solidFill>
+              </a:rPr>
+              <a:t> bez </a:t>
+            </a:r>
+            <a:r>
+              <a:rPr lang="en-US" sz="1400" noProof="0" dirty="0" err="1">
+                <a:solidFill>
+                  <a:srgbClr val="444444"/>
+                </a:solidFill>
+              </a:rPr>
+              <a:t>naknade</a:t>
+            </a:r>
+            <a:r>
+              <a:rPr lang="en-US" sz="1400" noProof="0" dirty="0">
+                <a:solidFill>
+                  <a:srgbClr val="444444"/>
+                </a:solidFill>
+              </a:rPr>
+              <a:t> </a:t>
+            </a:r>
+            <a:r>
+              <a:rPr lang="en-US" sz="1400" i="1" dirty="0">
+                <a:solidFill>
+                  <a:schemeClr val="tx1">
+                    <a:lumMod val="50000"/>
+                    <a:lumOff val="50000"/>
+                  </a:schemeClr>
+                </a:solidFill>
+              </a:rPr>
+              <a:t>(</a:t>
+            </a:r>
+            <a:r>
+              <a:rPr lang="en-US" sz="1400" i="1" dirty="0" err="1">
+                <a:solidFill>
+                  <a:schemeClr val="tx1">
+                    <a:lumMod val="50000"/>
+                    <a:lumOff val="50000"/>
+                  </a:schemeClr>
+                </a:solidFill>
+              </a:rPr>
+              <a:t>ograničenje</a:t>
+            </a:r>
+            <a:r>
+              <a:rPr lang="en-US" sz="1400" i="1" dirty="0">
+                <a:solidFill>
+                  <a:schemeClr val="tx1">
+                    <a:lumMod val="50000"/>
+                    <a:lumOff val="50000"/>
+                  </a:schemeClr>
+                </a:solidFill>
+              </a:rPr>
+              <a:t> do 5 puta </a:t>
+            </a:r>
+            <a:r>
+              <a:rPr lang="en-US" sz="1400" i="1" dirty="0" err="1">
+                <a:solidFill>
+                  <a:schemeClr val="tx1">
+                    <a:lumMod val="50000"/>
+                    <a:lumOff val="50000"/>
+                  </a:schemeClr>
+                </a:solidFill>
+              </a:rPr>
+              <a:t>mjesečno</a:t>
+            </a:r>
+            <a:r>
+              <a:rPr lang="en-US" sz="1400" i="1" dirty="0">
+                <a:solidFill>
+                  <a:schemeClr val="tx1">
+                    <a:lumMod val="50000"/>
+                    <a:lumOff val="50000"/>
+                  </a:schemeClr>
+                </a:solidFill>
+              </a:rPr>
+              <a:t> </a:t>
+            </a:r>
+            <a:r>
+              <a:rPr lang="en-US" sz="1400" i="1" dirty="0" err="1">
+                <a:solidFill>
+                  <a:schemeClr val="tx1">
+                    <a:lumMod val="50000"/>
+                    <a:lumOff val="50000"/>
+                  </a:schemeClr>
+                </a:solidFill>
+              </a:rPr>
+              <a:t>i</a:t>
+            </a:r>
+            <a:r>
+              <a:rPr lang="en-US" sz="1400" i="1" dirty="0">
+                <a:solidFill>
+                  <a:schemeClr val="tx1">
+                    <a:lumMod val="50000"/>
+                    <a:lumOff val="50000"/>
+                  </a:schemeClr>
+                </a:solidFill>
+              </a:rPr>
+              <a:t> do 200€)</a:t>
+            </a:r>
+            <a:endParaRPr lang="hr-HR" sz="1400" i="1" dirty="0">
+              <a:solidFill>
+                <a:schemeClr val="tx1">
+                  <a:lumMod val="50000"/>
+                  <a:lumOff val="50000"/>
+                </a:schemeClr>
+              </a:solidFill>
+            </a:endParaRPr>
+          </a:p>
+          <a:p>
+            <a:pPr marL="342900" indent="-342900">
+              <a:spcAft>
+                <a:spcPts val="900"/>
+              </a:spcAft>
+              <a:buSzPct val="100000"/>
+              <a:buChar char="•"/>
+            </a:pPr>
+            <a:r>
+              <a:rPr lang="en-US" sz="1400" noProof="0" dirty="0">
+                <a:solidFill>
+                  <a:srgbClr val="444444"/>
+                </a:solidFill>
+              </a:rPr>
+              <a:t>U </a:t>
+            </a:r>
+            <a:r>
+              <a:rPr lang="en-US" sz="1400" noProof="0" dirty="0" err="1">
+                <a:solidFill>
+                  <a:srgbClr val="444444"/>
+                </a:solidFill>
+              </a:rPr>
+              <a:t>trgovini</a:t>
+            </a:r>
+            <a:r>
+              <a:rPr lang="en-US" sz="1400" noProof="0" dirty="0">
+                <a:solidFill>
+                  <a:srgbClr val="444444"/>
+                </a:solidFill>
+              </a:rPr>
+              <a:t> </a:t>
+            </a:r>
+            <a:r>
+              <a:rPr lang="en-US" sz="1400" noProof="0" dirty="0" err="1">
+                <a:solidFill>
+                  <a:srgbClr val="444444"/>
+                </a:solidFill>
+              </a:rPr>
+              <a:t>instalirajte</a:t>
+            </a:r>
+            <a:r>
+              <a:rPr lang="en-US" sz="1400" noProof="0" dirty="0">
+                <a:solidFill>
+                  <a:srgbClr val="444444"/>
+                </a:solidFill>
+              </a:rPr>
+              <a:t> Revolut </a:t>
+            </a:r>
+            <a:r>
+              <a:rPr lang="en-US" sz="1400" noProof="0" dirty="0" err="1">
+                <a:solidFill>
+                  <a:srgbClr val="444444"/>
+                </a:solidFill>
+              </a:rPr>
+              <a:t>aplikaciju</a:t>
+            </a:r>
+            <a:r>
+              <a:rPr lang="en-US" sz="1400" noProof="0" dirty="0">
+                <a:solidFill>
+                  <a:srgbClr val="444444"/>
+                </a:solidFill>
+              </a:rPr>
+              <a:t>, </a:t>
+            </a:r>
+            <a:r>
+              <a:rPr lang="en-US" sz="1400" noProof="0" dirty="0" err="1">
+                <a:solidFill>
+                  <a:srgbClr val="444444"/>
+                </a:solidFill>
+              </a:rPr>
+              <a:t>te</a:t>
+            </a:r>
+            <a:r>
+              <a:rPr lang="en-US" sz="1400" noProof="0" dirty="0">
+                <a:solidFill>
+                  <a:srgbClr val="444444"/>
+                </a:solidFill>
+              </a:rPr>
+              <a:t> </a:t>
+            </a:r>
+            <a:r>
+              <a:rPr lang="en-US" sz="1400" noProof="0" dirty="0" err="1">
+                <a:solidFill>
+                  <a:srgbClr val="444444"/>
+                </a:solidFill>
+              </a:rPr>
+              <a:t>unesite</a:t>
+            </a:r>
+            <a:r>
+              <a:rPr lang="en-US" sz="1400" noProof="0" dirty="0">
+                <a:solidFill>
+                  <a:srgbClr val="444444"/>
+                </a:solidFill>
+              </a:rPr>
+              <a:t> </a:t>
+            </a:r>
+            <a:r>
+              <a:rPr lang="en-US" sz="1400" noProof="0" dirty="0" err="1">
+                <a:solidFill>
+                  <a:srgbClr val="444444"/>
+                </a:solidFill>
+              </a:rPr>
+              <a:t>svoje</a:t>
+            </a:r>
+            <a:r>
+              <a:rPr lang="en-US" sz="1400" noProof="0" dirty="0">
+                <a:solidFill>
+                  <a:srgbClr val="444444"/>
+                </a:solidFill>
+              </a:rPr>
+              <a:t> </a:t>
+            </a:r>
+            <a:r>
+              <a:rPr lang="en-US" sz="1400" noProof="0" dirty="0" err="1">
+                <a:solidFill>
+                  <a:srgbClr val="444444"/>
+                </a:solidFill>
+              </a:rPr>
+              <a:t>podatke</a:t>
+            </a:r>
+            <a:r>
+              <a:rPr lang="en-US" sz="1400" noProof="0" dirty="0">
+                <a:solidFill>
+                  <a:srgbClr val="444444"/>
+                </a:solidFill>
+              </a:rPr>
+              <a:t> u </a:t>
+            </a:r>
+            <a:r>
+              <a:rPr lang="en-US" sz="1400" noProof="0" dirty="0" err="1">
+                <a:solidFill>
+                  <a:srgbClr val="444444"/>
+                </a:solidFill>
+              </a:rPr>
+              <a:t>aplikaciju</a:t>
+            </a:r>
+            <a:endParaRPr lang="en-US" sz="1400" noProof="0" dirty="0">
+              <a:solidFill>
+                <a:srgbClr val="444444"/>
+              </a:solidFill>
+            </a:endParaRPr>
+          </a:p>
+          <a:p>
+            <a:pPr marL="342900" indent="-342900">
+              <a:spcAft>
+                <a:spcPts val="900"/>
+              </a:spcAft>
+              <a:buSzPct val="100000"/>
+              <a:buChar char="•"/>
+            </a:pPr>
+            <a:r>
+              <a:rPr lang="en-US" sz="1400" dirty="0" err="1">
+                <a:solidFill>
+                  <a:srgbClr val="444444"/>
+                </a:solidFill>
+              </a:rPr>
+              <a:t>Kliknite</a:t>
+            </a:r>
+            <a:r>
+              <a:rPr lang="en-US" sz="1400" dirty="0">
+                <a:solidFill>
+                  <a:srgbClr val="444444"/>
+                </a:solidFill>
+              </a:rPr>
+              <a:t> </a:t>
+            </a:r>
+            <a:r>
+              <a:rPr lang="en-US" sz="1400" dirty="0" err="1">
+                <a:solidFill>
+                  <a:srgbClr val="444444"/>
+                </a:solidFill>
+              </a:rPr>
+              <a:t>na</a:t>
+            </a:r>
+            <a:r>
+              <a:rPr lang="en-US" sz="1400" dirty="0">
+                <a:solidFill>
+                  <a:srgbClr val="444444"/>
+                </a:solidFill>
+              </a:rPr>
+              <a:t> “</a:t>
+            </a:r>
+            <a:r>
+              <a:rPr lang="en-US" sz="1400" dirty="0" err="1">
+                <a:solidFill>
+                  <a:srgbClr val="444444"/>
+                </a:solidFill>
+              </a:rPr>
+              <a:t>dodavanje</a:t>
+            </a:r>
+            <a:r>
+              <a:rPr lang="en-US" sz="1400" dirty="0">
+                <a:solidFill>
+                  <a:srgbClr val="444444"/>
+                </a:solidFill>
+              </a:rPr>
+              <a:t> </a:t>
+            </a:r>
+            <a:r>
+              <a:rPr lang="en-US" sz="1400" dirty="0" err="1">
+                <a:solidFill>
+                  <a:srgbClr val="444444"/>
+                </a:solidFill>
+              </a:rPr>
+              <a:t>novca</a:t>
+            </a:r>
+            <a:r>
+              <a:rPr lang="en-US" sz="1400" dirty="0">
+                <a:solidFill>
+                  <a:srgbClr val="444444"/>
+                </a:solidFill>
+              </a:rPr>
+              <a:t>” u </a:t>
+            </a:r>
+            <a:r>
+              <a:rPr lang="en-US" sz="1400" dirty="0" err="1">
+                <a:solidFill>
+                  <a:srgbClr val="444444"/>
+                </a:solidFill>
+              </a:rPr>
+              <a:t>donjem</a:t>
+            </a:r>
+            <a:r>
+              <a:rPr lang="en-US" sz="1400" dirty="0">
+                <a:solidFill>
+                  <a:srgbClr val="444444"/>
+                </a:solidFill>
+              </a:rPr>
+              <a:t> </a:t>
+            </a:r>
+            <a:r>
+              <a:rPr lang="en-US" sz="1400" dirty="0" err="1">
+                <a:solidFill>
+                  <a:srgbClr val="444444"/>
+                </a:solidFill>
+              </a:rPr>
+              <a:t>izborniku</a:t>
+            </a:r>
+            <a:r>
+              <a:rPr lang="en-US" sz="1400" dirty="0">
+                <a:solidFill>
+                  <a:srgbClr val="444444"/>
+                </a:solidFill>
+              </a:rPr>
+              <a:t> </a:t>
+            </a:r>
+            <a:r>
+              <a:rPr lang="en-US" sz="1400" dirty="0" err="1">
+                <a:solidFill>
+                  <a:srgbClr val="444444"/>
+                </a:solidFill>
+              </a:rPr>
+              <a:t>te</a:t>
+            </a:r>
+            <a:r>
+              <a:rPr lang="en-US" sz="1400" dirty="0">
+                <a:solidFill>
+                  <a:srgbClr val="444444"/>
+                </a:solidFill>
+              </a:rPr>
+              <a:t> </a:t>
+            </a:r>
+            <a:r>
+              <a:rPr lang="en-US" sz="1400" dirty="0" err="1">
+                <a:solidFill>
+                  <a:srgbClr val="444444"/>
+                </a:solidFill>
+              </a:rPr>
+              <a:t>uplatite</a:t>
+            </a:r>
+            <a:r>
+              <a:rPr lang="en-US" sz="1400" dirty="0">
+                <a:solidFill>
+                  <a:srgbClr val="444444"/>
+                </a:solidFill>
+              </a:rPr>
+              <a:t> </a:t>
+            </a:r>
+            <a:r>
+              <a:rPr lang="en-US" sz="1400" dirty="0" err="1">
+                <a:solidFill>
+                  <a:srgbClr val="444444"/>
+                </a:solidFill>
+              </a:rPr>
+              <a:t>novac</a:t>
+            </a:r>
+            <a:r>
+              <a:rPr lang="en-US" sz="1400" dirty="0">
+                <a:solidFill>
+                  <a:srgbClr val="444444"/>
+                </a:solidFill>
+              </a:rPr>
+              <a:t> </a:t>
+            </a:r>
+            <a:r>
+              <a:rPr lang="en-US" sz="1400" dirty="0" err="1">
+                <a:solidFill>
+                  <a:srgbClr val="444444"/>
+                </a:solidFill>
+              </a:rPr>
+              <a:t>karticom</a:t>
+            </a:r>
+            <a:r>
+              <a:rPr lang="en-US" sz="1400" dirty="0">
+                <a:solidFill>
+                  <a:srgbClr val="444444"/>
+                </a:solidFill>
+              </a:rPr>
+              <a:t> </a:t>
+            </a:r>
+            <a:r>
+              <a:rPr lang="en-US" sz="1400" dirty="0" err="1">
+                <a:solidFill>
+                  <a:srgbClr val="444444"/>
+                </a:solidFill>
+              </a:rPr>
+              <a:t>prateći</a:t>
+            </a:r>
+            <a:r>
+              <a:rPr lang="en-US" sz="1400" dirty="0">
+                <a:solidFill>
+                  <a:srgbClr val="444444"/>
+                </a:solidFill>
+              </a:rPr>
+              <a:t> </a:t>
+            </a:r>
+            <a:r>
+              <a:rPr lang="en-US" sz="1400" dirty="0" err="1">
+                <a:solidFill>
+                  <a:srgbClr val="444444"/>
+                </a:solidFill>
+              </a:rPr>
+              <a:t>način</a:t>
+            </a:r>
+            <a:r>
+              <a:rPr lang="en-US" sz="1400" dirty="0">
+                <a:solidFill>
+                  <a:srgbClr val="444444"/>
+                </a:solidFill>
+              </a:rPr>
+              <a:t> </a:t>
+            </a:r>
+            <a:r>
+              <a:rPr lang="en-US" sz="1400" dirty="0" err="1">
+                <a:solidFill>
+                  <a:srgbClr val="444444"/>
+                </a:solidFill>
+              </a:rPr>
+              <a:t>plaćanja</a:t>
+            </a:r>
+            <a:r>
+              <a:rPr lang="en-US" sz="1400" dirty="0">
+                <a:solidFill>
+                  <a:srgbClr val="444444"/>
+                </a:solidFill>
+              </a:rPr>
+              <a:t> </a:t>
+            </a:r>
+            <a:r>
+              <a:rPr lang="en-US" sz="1400" dirty="0" err="1">
+                <a:solidFill>
+                  <a:srgbClr val="444444"/>
+                </a:solidFill>
+              </a:rPr>
+              <a:t>karticom</a:t>
+            </a:r>
+            <a:endParaRPr lang="en-US" sz="1400" dirty="0">
+              <a:solidFill>
+                <a:srgbClr val="444444"/>
+              </a:solidFill>
+            </a:endParaRPr>
+          </a:p>
+          <a:p>
+            <a:pPr marL="342900" indent="-342900">
+              <a:spcAft>
+                <a:spcPts val="900"/>
+              </a:spcAft>
+              <a:buSzPct val="100000"/>
+              <a:buChar char="•"/>
+            </a:pPr>
+            <a:r>
+              <a:rPr lang="en-US" sz="1400" noProof="0" dirty="0" err="1">
+                <a:solidFill>
+                  <a:srgbClr val="444444"/>
+                </a:solidFill>
+              </a:rPr>
+              <a:t>Kliknete</a:t>
+            </a:r>
+            <a:r>
+              <a:rPr lang="en-US" sz="1400" noProof="0" dirty="0">
+                <a:solidFill>
+                  <a:srgbClr val="444444"/>
+                </a:solidFill>
+              </a:rPr>
+              <a:t> </a:t>
+            </a:r>
+            <a:r>
+              <a:rPr lang="en-US" sz="1400" noProof="0" dirty="0" err="1">
+                <a:solidFill>
+                  <a:srgbClr val="444444"/>
+                </a:solidFill>
+              </a:rPr>
+              <a:t>na</a:t>
+            </a:r>
+            <a:r>
+              <a:rPr lang="en-US" sz="1400" noProof="0" dirty="0">
+                <a:solidFill>
+                  <a:srgbClr val="444444"/>
+                </a:solidFill>
+              </a:rPr>
+              <a:t> </a:t>
+            </a:r>
+            <a:r>
+              <a:rPr lang="en-US" sz="1400" noProof="0" dirty="0" err="1">
+                <a:solidFill>
+                  <a:srgbClr val="444444"/>
+                </a:solidFill>
+              </a:rPr>
+              <a:t>ikonu</a:t>
+            </a:r>
+            <a:r>
+              <a:rPr lang="en-US" sz="1400" noProof="0" dirty="0">
+                <a:solidFill>
+                  <a:srgbClr val="444444"/>
+                </a:solidFill>
+              </a:rPr>
+              <a:t> </a:t>
+            </a:r>
+            <a:r>
+              <a:rPr lang="en-US" sz="1400" noProof="0" dirty="0" err="1">
+                <a:solidFill>
+                  <a:srgbClr val="444444"/>
+                </a:solidFill>
+              </a:rPr>
+              <a:t>kartice</a:t>
+            </a:r>
+            <a:r>
+              <a:rPr lang="en-US" sz="1400" noProof="0" dirty="0">
+                <a:solidFill>
+                  <a:srgbClr val="444444"/>
+                </a:solidFill>
+              </a:rPr>
+              <a:t> </a:t>
+            </a:r>
+            <a:r>
+              <a:rPr lang="en-US" sz="1400" dirty="0">
+                <a:solidFill>
+                  <a:srgbClr val="444444"/>
+                </a:solidFill>
+              </a:rPr>
+              <a:t>💳, </a:t>
+            </a:r>
+            <a:r>
+              <a:rPr lang="en-US" sz="1400" dirty="0" err="1">
+                <a:solidFill>
+                  <a:srgbClr val="444444"/>
+                </a:solidFill>
+              </a:rPr>
+              <a:t>naručite</a:t>
+            </a:r>
+            <a:r>
+              <a:rPr lang="en-US" sz="1400" dirty="0">
+                <a:solidFill>
+                  <a:srgbClr val="444444"/>
+                </a:solidFill>
+              </a:rPr>
+              <a:t> </a:t>
+            </a:r>
+            <a:r>
+              <a:rPr lang="en-US" sz="1400" dirty="0" err="1">
+                <a:solidFill>
+                  <a:srgbClr val="444444"/>
+                </a:solidFill>
+              </a:rPr>
+              <a:t>fizičku</a:t>
+            </a:r>
+            <a:r>
+              <a:rPr lang="en-US" sz="1400" dirty="0">
+                <a:solidFill>
+                  <a:srgbClr val="444444"/>
+                </a:solidFill>
+              </a:rPr>
+              <a:t> </a:t>
+            </a:r>
+            <a:r>
+              <a:rPr lang="en-US" sz="1400" dirty="0" err="1">
+                <a:solidFill>
+                  <a:srgbClr val="444444"/>
+                </a:solidFill>
+              </a:rPr>
+              <a:t>karticu</a:t>
+            </a:r>
+            <a:r>
+              <a:rPr lang="en-US" sz="1400" dirty="0">
+                <a:solidFill>
+                  <a:srgbClr val="444444"/>
+                </a:solidFill>
+              </a:rPr>
+              <a:t>, </a:t>
+            </a:r>
+            <a:r>
+              <a:rPr lang="en-US" sz="1400" dirty="0" err="1">
+                <a:solidFill>
+                  <a:srgbClr val="444444"/>
+                </a:solidFill>
+              </a:rPr>
+              <a:t>odaberite</a:t>
+            </a:r>
+            <a:r>
+              <a:rPr lang="en-US" sz="1400" dirty="0">
+                <a:solidFill>
+                  <a:srgbClr val="444444"/>
+                </a:solidFill>
+              </a:rPr>
+              <a:t> </a:t>
+            </a:r>
+            <a:r>
+              <a:rPr lang="en-US" sz="1400" dirty="0" err="1">
+                <a:solidFill>
+                  <a:srgbClr val="444444"/>
+                </a:solidFill>
+              </a:rPr>
+              <a:t>dizajn</a:t>
+            </a:r>
+            <a:r>
+              <a:rPr lang="en-US" sz="1400" dirty="0">
+                <a:solidFill>
+                  <a:srgbClr val="444444"/>
+                </a:solidFill>
+              </a:rPr>
+              <a:t> </a:t>
+            </a:r>
+            <a:r>
+              <a:rPr lang="en-US" sz="1400" dirty="0" err="1">
+                <a:solidFill>
+                  <a:srgbClr val="444444"/>
+                </a:solidFill>
+              </a:rPr>
+              <a:t>kartice</a:t>
+            </a:r>
+            <a:r>
+              <a:rPr lang="en-US" sz="1400" dirty="0">
+                <a:solidFill>
+                  <a:srgbClr val="444444"/>
+                </a:solidFill>
+              </a:rPr>
+              <a:t> </a:t>
+            </a:r>
+            <a:r>
+              <a:rPr lang="en-US" sz="1400" dirty="0" err="1">
+                <a:solidFill>
+                  <a:srgbClr val="444444"/>
+                </a:solidFill>
+              </a:rPr>
+              <a:t>i</a:t>
+            </a:r>
+            <a:r>
+              <a:rPr lang="en-US" sz="1400" dirty="0">
+                <a:solidFill>
+                  <a:srgbClr val="444444"/>
+                </a:solidFill>
+              </a:rPr>
+              <a:t> </a:t>
+            </a:r>
+            <a:r>
+              <a:rPr lang="en-US" sz="1400" dirty="0" err="1">
+                <a:solidFill>
+                  <a:srgbClr val="444444"/>
+                </a:solidFill>
+              </a:rPr>
+              <a:t>slijedite</a:t>
+            </a:r>
+            <a:r>
+              <a:rPr lang="en-US" sz="1400" dirty="0">
+                <a:solidFill>
+                  <a:srgbClr val="444444"/>
+                </a:solidFill>
+              </a:rPr>
+              <a:t> </a:t>
+            </a:r>
+            <a:r>
+              <a:rPr lang="en-US" sz="1400" dirty="0" err="1">
+                <a:solidFill>
+                  <a:srgbClr val="444444"/>
+                </a:solidFill>
+              </a:rPr>
+              <a:t>daljnje</a:t>
+            </a:r>
+            <a:r>
+              <a:rPr lang="en-US" sz="1400" dirty="0">
+                <a:solidFill>
+                  <a:srgbClr val="444444"/>
+                </a:solidFill>
+              </a:rPr>
+              <a:t> </a:t>
+            </a:r>
+            <a:r>
+              <a:rPr lang="en-US" sz="1400" dirty="0" err="1">
+                <a:solidFill>
+                  <a:srgbClr val="444444"/>
+                </a:solidFill>
+              </a:rPr>
+              <a:t>upute</a:t>
+            </a:r>
+            <a:r>
+              <a:rPr lang="en-US" sz="1400" dirty="0">
+                <a:solidFill>
+                  <a:srgbClr val="444444"/>
+                </a:solidFill>
+              </a:rPr>
+              <a:t> </a:t>
+            </a:r>
+            <a:r>
+              <a:rPr lang="en-US" sz="1400" i="1" dirty="0">
+                <a:solidFill>
+                  <a:schemeClr val="tx1">
+                    <a:lumMod val="50000"/>
+                    <a:lumOff val="50000"/>
+                  </a:schemeClr>
+                </a:solidFill>
+              </a:rPr>
+              <a:t>(</a:t>
+            </a:r>
+            <a:r>
+              <a:rPr lang="en-US" sz="1400" i="1" dirty="0" err="1">
+                <a:solidFill>
+                  <a:schemeClr val="tx1">
+                    <a:lumMod val="50000"/>
+                    <a:lumOff val="50000"/>
+                  </a:schemeClr>
+                </a:solidFill>
+              </a:rPr>
+              <a:t>prva</a:t>
+            </a:r>
+            <a:r>
+              <a:rPr lang="en-US" sz="1400" i="1" dirty="0">
+                <a:solidFill>
+                  <a:schemeClr val="tx1">
+                    <a:lumMod val="50000"/>
+                    <a:lumOff val="50000"/>
+                  </a:schemeClr>
+                </a:solidFill>
+              </a:rPr>
+              <a:t> </a:t>
+            </a:r>
+            <a:r>
+              <a:rPr lang="en-US" sz="1400" i="1" dirty="0" err="1">
+                <a:solidFill>
+                  <a:schemeClr val="tx1">
+                    <a:lumMod val="50000"/>
+                    <a:lumOff val="50000"/>
+                  </a:schemeClr>
+                </a:solidFill>
+              </a:rPr>
+              <a:t>kartica</a:t>
+            </a:r>
+            <a:r>
+              <a:rPr lang="en-US" sz="1400" i="1" dirty="0">
+                <a:solidFill>
+                  <a:schemeClr val="tx1">
+                    <a:lumMod val="50000"/>
+                    <a:lumOff val="50000"/>
+                  </a:schemeClr>
+                </a:solidFill>
+              </a:rPr>
+              <a:t> je </a:t>
+            </a:r>
+            <a:r>
+              <a:rPr lang="en-US" sz="1400" i="1" dirty="0" err="1">
+                <a:solidFill>
+                  <a:schemeClr val="tx1">
+                    <a:lumMod val="50000"/>
+                    <a:lumOff val="50000"/>
+                  </a:schemeClr>
+                </a:solidFill>
+              </a:rPr>
+              <a:t>besplatna</a:t>
+            </a:r>
+            <a:r>
+              <a:rPr lang="en-US" sz="1400" i="1" dirty="0">
+                <a:solidFill>
+                  <a:schemeClr val="tx1">
+                    <a:lumMod val="50000"/>
+                    <a:lumOff val="50000"/>
+                  </a:schemeClr>
+                </a:solidFill>
+              </a:rPr>
+              <a:t>, </a:t>
+            </a:r>
+            <a:r>
+              <a:rPr lang="en-US" sz="1400" i="1" dirty="0" err="1">
+                <a:solidFill>
+                  <a:schemeClr val="tx1">
+                    <a:lumMod val="50000"/>
+                    <a:lumOff val="50000"/>
+                  </a:schemeClr>
+                </a:solidFill>
+              </a:rPr>
+              <a:t>ali</a:t>
+            </a:r>
+            <a:r>
+              <a:rPr lang="en-US" sz="1400" i="1" dirty="0">
+                <a:solidFill>
+                  <a:schemeClr val="tx1">
+                    <a:lumMod val="50000"/>
+                    <a:lumOff val="50000"/>
+                  </a:schemeClr>
+                </a:solidFill>
+              </a:rPr>
+              <a:t> se </a:t>
+            </a:r>
+            <a:r>
+              <a:rPr lang="en-US" sz="1400" i="1" dirty="0" err="1">
+                <a:solidFill>
+                  <a:schemeClr val="tx1">
+                    <a:lumMod val="50000"/>
+                    <a:lumOff val="50000"/>
+                  </a:schemeClr>
+                </a:solidFill>
+              </a:rPr>
+              <a:t>plaća</a:t>
+            </a:r>
+            <a:r>
+              <a:rPr lang="en-US" sz="1400" i="1" dirty="0">
+                <a:solidFill>
+                  <a:schemeClr val="tx1">
+                    <a:lumMod val="50000"/>
+                    <a:lumOff val="50000"/>
+                  </a:schemeClr>
+                </a:solidFill>
+              </a:rPr>
+              <a:t> </a:t>
+            </a:r>
+            <a:r>
+              <a:rPr lang="en-US" sz="1400" i="1" dirty="0" err="1">
+                <a:solidFill>
+                  <a:schemeClr val="tx1">
+                    <a:lumMod val="50000"/>
+                    <a:lumOff val="50000"/>
+                  </a:schemeClr>
+                </a:solidFill>
+              </a:rPr>
+              <a:t>dostava</a:t>
+            </a:r>
+            <a:r>
+              <a:rPr lang="en-US" sz="1400" i="1" dirty="0">
+                <a:solidFill>
+                  <a:schemeClr val="tx1">
+                    <a:lumMod val="50000"/>
+                    <a:lumOff val="50000"/>
+                  </a:schemeClr>
+                </a:solidFill>
+              </a:rPr>
+              <a:t>)</a:t>
+            </a:r>
+            <a:endParaRPr lang="hr-HR" sz="1400" i="1" dirty="0">
+              <a:solidFill>
+                <a:schemeClr val="tx1">
+                  <a:lumMod val="50000"/>
+                  <a:lumOff val="50000"/>
+                </a:schemeClr>
+              </a:solidFill>
+            </a:endParaRPr>
+          </a:p>
+        </p:txBody>
+      </p:sp>
+      <p:pic>
+        <p:nvPicPr>
+          <p:cNvPr id="5" name="Picture 4" descr="Revolut kartica: Detaljan vodič kroz cijene, aktivaciju i korištenje |  Telegram.hr">
+            <a:extLst>
+              <a:ext uri="{FF2B5EF4-FFF2-40B4-BE49-F238E27FC236}">
+                <a16:creationId xmlns:a16="http://schemas.microsoft.com/office/drawing/2014/main" id="{53AB8CF2-C514-3DEF-0CD9-88D4DF0EC7AA}"/>
+              </a:ext>
+            </a:extLst>
+          </p:cNvPr>
+          <p:cNvPicPr>
+            <a:picLocks noChangeAspect="1"/>
+          </p:cNvPicPr>
+          <p:nvPr/>
+        </p:nvPicPr>
+        <p:blipFill>
+          <a:blip r:embed="rId3"/>
+          <a:stretch>
+            <a:fillRect/>
+          </a:stretch>
+        </p:blipFill>
+        <p:spPr>
+          <a:xfrm>
+            <a:off x="5720046" y="1551842"/>
+            <a:ext cx="3058194" cy="2039815"/>
+          </a:xfrm>
+          <a:prstGeom prst="rect">
+            <a:avLst/>
+          </a:prstGeom>
+        </p:spPr>
+      </p:pic>
+    </p:spTree>
+    <p:extLst>
+      <p:ext uri="{BB962C8B-B14F-4D97-AF65-F5344CB8AC3E}">
+        <p14:creationId xmlns:p14="http://schemas.microsoft.com/office/powerpoint/2010/main" val="345172130"/>
+      </p:ext>
+    </p:extLst>
+  </p:cSld>
+  <p:clrMapOvr>
+    <a:masterClrMapping/>
+  </p:clrMapOvr>
+</p:sld>
+</file>
+
+<file path=ppt/slides/slide12.xml><?xml version="1.0" encoding="utf-8"?>
 <p:sld xmlns:a="http://schemas.openxmlformats.org/drawingml/2006/main" xmlns:r="http://schemas.openxmlformats.org/officeDocument/2006/relationships" xmlns:p="http://schemas.openxmlformats.org/presentationml/2006/main">
   <p:cSld name="Slide 9">
     <p:bg>
@@ -2478,7 +4609,7 @@
           <a:bodyPr/>
           <a:lstStyle/>
           <a:p>
-            <a:endParaRPr lang="en-US"/>
+            <a:endParaRPr lang="hr-HR" noProof="0" dirty="0"/>
           </a:p>
         </p:txBody>
       </p:sp>
@@ -2507,14 +4638,14 @@
               <a:buNone/>
             </a:pPr>
             <a:r>
-              <a:rPr lang="en-US" sz="2000" b="1" dirty="0">
+              <a:rPr lang="hr-HR" sz="2000" b="1" noProof="0" dirty="0">
                 <a:solidFill>
                   <a:srgbClr val="FFFFFF"/>
                 </a:solidFill>
               </a:rPr>
               <a:t>Praktična zaštita: lozinke, 2FA i ažuriranja</a:t>
             </a:r>
-            <a:endParaRPr lang="en-US" sz="2000" dirty="0"/>
+            <a:endParaRPr lang="hr-HR" sz="2000" noProof="0" dirty="0"/>
           </a:p>
         </p:txBody>
       </p:sp>
@@ -2548,7 +4679,7 @@
           <a:bodyPr/>
           <a:lstStyle/>
           <a:p>
-            <a:endParaRPr lang="en-US"/>
+            <a:endParaRPr lang="hr-HR" noProof="0" dirty="0"/>
           </a:p>
         </p:txBody>
       </p:sp>
@@ -2580,7 +4711,7 @@
           <a:bodyPr/>
           <a:lstStyle/>
           <a:p>
-            <a:endParaRPr lang="en-US"/>
+            <a:endParaRPr lang="hr-HR" noProof="0" dirty="0"/>
           </a:p>
         </p:txBody>
       </p:sp>
@@ -2612,7 +4743,7 @@
           <a:bodyPr/>
           <a:lstStyle/>
           <a:p>
-            <a:endParaRPr lang="en-US"/>
+            <a:endParaRPr lang="hr-HR" noProof="0" dirty="0"/>
           </a:p>
         </p:txBody>
       </p:sp>
@@ -2665,14 +4796,14 @@
               <a:buNone/>
             </a:pPr>
             <a:r>
-              <a:rPr lang="en-US" sz="1400" b="1" dirty="0">
+              <a:rPr lang="hr-HR" sz="1400" b="1" noProof="0" dirty="0">
                 <a:solidFill>
                   <a:srgbClr val="1A1A1A"/>
                 </a:solidFill>
               </a:rPr>
               <a:t>Dobra lozinka</a:t>
             </a:r>
-            <a:endParaRPr lang="en-US" sz="1400" dirty="0"/>
+            <a:endParaRPr lang="hr-HR" sz="1400" noProof="0" dirty="0"/>
           </a:p>
         </p:txBody>
       </p:sp>
@@ -2697,18 +4828,135 @@
           <a:bodyPr wrap="square" rtlCol="0" anchor="t"/>
           <a:lstStyle/>
           <a:p>
-            <a:pPr marL="0" indent="0">
-              <a:buNone/>
-            </a:pPr>
+            <a:r>
+              <a:rPr lang="hr-HR" sz="1200" noProof="0" dirty="0">
+                <a:solidFill>
+                  <a:srgbClr val="444444"/>
+                </a:solidFill>
+              </a:rPr>
+              <a:t>Dugačka, nasumična, jedinstvena za svaki račun. Upravitelj lozinki: Goole Password Manager</a:t>
+            </a:r>
+            <a:r>
+              <a:rPr lang="en-US" sz="1200" noProof="0" dirty="0">
+                <a:solidFill>
+                  <a:srgbClr val="444444"/>
+                </a:solidFill>
+              </a:rPr>
+              <a:t>, </a:t>
+            </a:r>
+            <a:r>
+              <a:rPr lang="hr-HR" sz="1200" dirty="0">
+                <a:solidFill>
+                  <a:srgbClr val="444444"/>
+                </a:solidFill>
+              </a:rPr>
+              <a:t>Bitwarde</a:t>
+            </a:r>
             <a:r>
               <a:rPr lang="en-US" sz="1200" dirty="0">
                 <a:solidFill>
                   <a:srgbClr val="444444"/>
                 </a:solidFill>
               </a:rPr>
-              <a:t>Dugačka, nasumična, jedinstvena za svaki račun. Rečenica: 'Moja mačka voli ribu 7x!' Upravitelj lozinki: Bitwarden (besplatan).</a:t>
-            </a:r>
-            <a:endParaRPr lang="en-US" sz="1200" dirty="0"/>
+              <a:t>n, …</a:t>
+            </a:r>
+            <a:r>
+              <a:rPr lang="hr-HR" sz="1200" noProof="0" dirty="0">
+                <a:solidFill>
+                  <a:srgbClr val="444444"/>
+                </a:solidFill>
+              </a:rPr>
+              <a:t> (besplatni).</a:t>
+            </a:r>
+            <a:r>
+              <a:rPr lang="en-US" sz="1200" noProof="0" dirty="0">
+                <a:solidFill>
+                  <a:srgbClr val="444444"/>
+                </a:solidFill>
+              </a:rPr>
+              <a:t> Nude </a:t>
+            </a:r>
+            <a:r>
+              <a:rPr lang="en-US" sz="1200" noProof="0" dirty="0" err="1">
+                <a:solidFill>
+                  <a:srgbClr val="444444"/>
+                </a:solidFill>
+              </a:rPr>
+              <a:t>opciju</a:t>
+            </a:r>
+            <a:r>
+              <a:rPr lang="en-US" sz="1200" noProof="0" dirty="0">
+                <a:solidFill>
+                  <a:srgbClr val="444444"/>
+                </a:solidFill>
+              </a:rPr>
+              <a:t> </a:t>
+            </a:r>
+            <a:r>
+              <a:rPr lang="en-US" sz="1200" noProof="0" dirty="0" err="1">
+                <a:solidFill>
+                  <a:srgbClr val="444444"/>
+                </a:solidFill>
+              </a:rPr>
+              <a:t>generiranja</a:t>
+            </a:r>
+            <a:r>
+              <a:rPr lang="en-US" sz="1200" noProof="0" dirty="0">
+                <a:solidFill>
+                  <a:srgbClr val="444444"/>
+                </a:solidFill>
+              </a:rPr>
+              <a:t> </a:t>
+            </a:r>
+            <a:r>
+              <a:rPr lang="en-US" sz="1200" noProof="0" dirty="0" err="1">
+                <a:solidFill>
+                  <a:srgbClr val="444444"/>
+                </a:solidFill>
+              </a:rPr>
+              <a:t>i</a:t>
+            </a:r>
+            <a:r>
+              <a:rPr lang="en-US" sz="1200" noProof="0" dirty="0">
+                <a:solidFill>
+                  <a:srgbClr val="444444"/>
+                </a:solidFill>
+              </a:rPr>
+              <a:t> </a:t>
+            </a:r>
+            <a:r>
+              <a:rPr lang="en-US" sz="1200" noProof="0" dirty="0" err="1">
+                <a:solidFill>
+                  <a:srgbClr val="444444"/>
+                </a:solidFill>
+              </a:rPr>
+              <a:t>spremanja</a:t>
+            </a:r>
+            <a:r>
+              <a:rPr lang="en-US" sz="1200" noProof="0" dirty="0">
+                <a:solidFill>
+                  <a:srgbClr val="444444"/>
+                </a:solidFill>
+              </a:rPr>
+              <a:t> </a:t>
+            </a:r>
+            <a:r>
+              <a:rPr lang="en-US" sz="1200" noProof="0" dirty="0" err="1">
+                <a:solidFill>
+                  <a:srgbClr val="444444"/>
+                </a:solidFill>
+              </a:rPr>
+              <a:t>lozinki</a:t>
+            </a:r>
+            <a:r>
+              <a:rPr lang="en-US" sz="1200" noProof="0" dirty="0">
+                <a:solidFill>
+                  <a:srgbClr val="444444"/>
+                </a:solidFill>
+              </a:rPr>
+              <a:t>.</a:t>
+            </a:r>
+            <a:endParaRPr lang="hr-HR" sz="1200" noProof="0" dirty="0"/>
           </a:p>
         </p:txBody>
       </p:sp>
@@ -2742,7 +4990,7 @@
           <a:bodyPr/>
           <a:lstStyle/>
           <a:p>
-            <a:endParaRPr lang="en-US"/>
+            <a:endParaRPr lang="hr-HR" noProof="0" dirty="0"/>
           </a:p>
         </p:txBody>
       </p:sp>
@@ -2774,7 +5022,7 @@
           <a:bodyPr/>
           <a:lstStyle/>
           <a:p>
-            <a:endParaRPr lang="en-US"/>
+            <a:endParaRPr lang="hr-HR" noProof="0" dirty="0"/>
           </a:p>
         </p:txBody>
       </p:sp>
@@ -2806,7 +5054,7 @@
           <a:bodyPr/>
           <a:lstStyle/>
           <a:p>
-            <a:endParaRPr lang="en-US"/>
+            <a:endParaRPr lang="hr-HR" noProof="0" dirty="0"/>
           </a:p>
         </p:txBody>
       </p:sp>
@@ -2859,14 +5107,14 @@
               <a:buNone/>
             </a:pPr>
             <a:r>
-              <a:rPr lang="en-US" sz="1400" b="1" dirty="0">
+              <a:rPr lang="hr-HR" sz="1400" b="1" noProof="0" dirty="0">
                 <a:solidFill>
                   <a:srgbClr val="1A1A1A"/>
                 </a:solidFill>
               </a:rPr>
               <a:t>Dvofaktorna autentikacija (2FA)</a:t>
             </a:r>
-            <a:endParaRPr lang="en-US" sz="1400" dirty="0"/>
+            <a:endParaRPr lang="hr-HR" sz="1400" noProof="0" dirty="0"/>
           </a:p>
         </p:txBody>
       </p:sp>
@@ -2895,14 +5143,14 @@
               <a:buNone/>
             </a:pPr>
             <a:r>
-              <a:rPr lang="en-US" sz="1200" dirty="0">
-                <a:solidFill>
-                  <a:srgbClr val="444444"/>
-                </a:solidFill>
-              </a:rPr>
-              <a:t>Drugi sloj zaštite uz lozinku — SMS kod na telefon. Uključite za e-mail, Facebook i bankarstvo.</a:t>
-            </a:r>
-            <a:endParaRPr lang="en-US" sz="1200" dirty="0"/>
+              <a:rPr lang="hr-HR" sz="1200" noProof="0" dirty="0">
+                <a:solidFill>
+                  <a:srgbClr val="444444"/>
+                </a:solidFill>
+              </a:rPr>
+              <a:t>Drugi sloj zaštite uz lozinku — SMS kod na telefon.</a:t>
+            </a:r>
+            <a:endParaRPr lang="hr-HR" sz="1200" noProof="0" dirty="0"/>
           </a:p>
         </p:txBody>
       </p:sp>
@@ -2936,7 +5184,7 @@
           <a:bodyPr/>
           <a:lstStyle/>
           <a:p>
-            <a:endParaRPr lang="en-US"/>
+            <a:endParaRPr lang="hr-HR" noProof="0" dirty="0"/>
           </a:p>
         </p:txBody>
       </p:sp>
@@ -2968,7 +5216,7 @@
           <a:bodyPr/>
           <a:lstStyle/>
           <a:p>
-            <a:endParaRPr lang="en-US"/>
+            <a:endParaRPr lang="hr-HR" noProof="0" dirty="0"/>
           </a:p>
         </p:txBody>
       </p:sp>
@@ -3000,7 +5248,7 @@
           <a:bodyPr/>
           <a:lstStyle/>
           <a:p>
-            <a:endParaRPr lang="en-US"/>
+            <a:endParaRPr lang="hr-HR" noProof="0" dirty="0"/>
           </a:p>
         </p:txBody>
       </p:sp>
@@ -3053,14 +5301,14 @@
               <a:buNone/>
             </a:pPr>
             <a:r>
-              <a:rPr lang="en-US" sz="1400" b="1" dirty="0">
+              <a:rPr lang="hr-HR" sz="1400" b="1" noProof="0" dirty="0">
                 <a:solidFill>
                   <a:srgbClr val="1A1A1A"/>
                 </a:solidFill>
               </a:rPr>
               <a:t>Ažuriranja sustava</a:t>
             </a:r>
-            <a:endParaRPr lang="en-US" sz="1400" dirty="0"/>
+            <a:endParaRPr lang="hr-HR" sz="1400" noProof="0" dirty="0"/>
           </a:p>
         </p:txBody>
       </p:sp>
@@ -3089,14 +5337,70 @@
               <a:buNone/>
             </a:pPr>
             <a:r>
-              <a:rPr lang="en-US" sz="1200" dirty="0">
-                <a:solidFill>
-                  <a:srgbClr val="444444"/>
-                </a:solidFill>
-              </a:rPr>
-              <a:t>Redovito ažurirajte Windows, Android i iOS. Ažuriranja krpe sigurnosne rupe koje hakeri aktivno iskorištavaju.</a:t>
-            </a:r>
-            <a:endParaRPr lang="en-US" sz="1200" dirty="0"/>
+              <a:rPr lang="hr-HR" sz="1200" noProof="0" dirty="0">
+                <a:solidFill>
+                  <a:srgbClr val="444444"/>
+                </a:solidFill>
+              </a:rPr>
+              <a:t>Redovito ažurirajte Windows, Android</a:t>
+            </a:r>
+            <a:r>
+              <a:rPr lang="en-US" sz="1200" noProof="0" dirty="0">
+                <a:solidFill>
+                  <a:srgbClr val="444444"/>
+                </a:solidFill>
+              </a:rPr>
+              <a:t>,</a:t>
+            </a:r>
+            <a:r>
+              <a:rPr lang="hr-HR" sz="1200" noProof="0" dirty="0">
+                <a:solidFill>
+                  <a:srgbClr val="444444"/>
+                </a:solidFill>
+              </a:rPr>
+              <a:t> iOS</a:t>
+            </a:r>
+            <a:r>
+              <a:rPr lang="en-US" sz="1200" noProof="0" dirty="0">
+                <a:solidFill>
+                  <a:srgbClr val="444444"/>
+                </a:solidFill>
+              </a:rPr>
+              <a:t> </a:t>
+            </a:r>
+            <a:r>
+              <a:rPr lang="en-US" sz="1200" noProof="0" dirty="0" err="1">
+                <a:solidFill>
+                  <a:srgbClr val="444444"/>
+                </a:solidFill>
+              </a:rPr>
+              <a:t>i</a:t>
+            </a:r>
+            <a:r>
+              <a:rPr lang="en-US" sz="1200" noProof="0" dirty="0">
+                <a:solidFill>
+                  <a:srgbClr val="444444"/>
+                </a:solidFill>
+              </a:rPr>
+              <a:t> </a:t>
+            </a:r>
+            <a:r>
+              <a:rPr lang="en-US" sz="1200" noProof="0" dirty="0" err="1">
+                <a:solidFill>
+                  <a:srgbClr val="444444"/>
+                </a:solidFill>
+              </a:rPr>
+              <a:t>aplikacije</a:t>
+            </a:r>
+            <a:r>
+              <a:rPr lang="hr-HR" sz="1200" noProof="0" dirty="0">
+                <a:solidFill>
+                  <a:srgbClr val="444444"/>
+                </a:solidFill>
+              </a:rPr>
+              <a:t>. Ažuriranja krpe sigurnosne rupe koje hakeri aktivno iskorištavaju.</a:t>
+            </a:r>
+            <a:endParaRPr lang="hr-HR" sz="1200" noProof="0" dirty="0"/>
           </a:p>
         </p:txBody>
       </p:sp>
@@ -3130,7 +5434,7 @@
           <a:bodyPr/>
           <a:lstStyle/>
           <a:p>
-            <a:endParaRPr lang="en-US"/>
+            <a:endParaRPr lang="hr-HR" noProof="0" dirty="0"/>
           </a:p>
         </p:txBody>
       </p:sp>
@@ -3162,7 +5466,7 @@
           <a:bodyPr/>
           <a:lstStyle/>
           <a:p>
-            <a:endParaRPr lang="en-US"/>
+            <a:endParaRPr lang="hr-HR" noProof="0" dirty="0"/>
           </a:p>
         </p:txBody>
       </p:sp>
@@ -3194,7 +5498,7 @@
           <a:bodyPr/>
           <a:lstStyle/>
           <a:p>
-            <a:endParaRPr lang="en-US"/>
+            <a:endParaRPr lang="hr-HR" noProof="0" dirty="0"/>
           </a:p>
         </p:txBody>
       </p:sp>
@@ -3247,14 +5551,14 @@
               <a:buNone/>
             </a:pPr>
             <a:r>
-              <a:rPr lang="en-US" sz="1400" b="1" dirty="0">
+              <a:rPr lang="hr-HR" sz="1400" b="1" noProof="0" dirty="0">
                 <a:solidFill>
                   <a:srgbClr val="1A1A1A"/>
                 </a:solidFill>
               </a:rPr>
               <a:t>Sigurnosna kopija (backup)</a:t>
             </a:r>
-            <a:endParaRPr lang="en-US" sz="1400" dirty="0"/>
+            <a:endParaRPr lang="hr-HR" sz="1400" noProof="0" dirty="0"/>
           </a:p>
         </p:txBody>
       </p:sp>
@@ -3283,14 +5587,62 @@
               <a:buNone/>
             </a:pPr>
             <a:r>
-              <a:rPr lang="en-US" sz="1200" dirty="0">
-                <a:solidFill>
-                  <a:srgbClr val="444444"/>
-                </a:solidFill>
-              </a:rPr>
-              <a:t>Jedina prava zaštita od ransomwarea. Google Photos za slike, vanjski disk za dokumente — jednom tjedno.</a:t>
-            </a:r>
-            <a:endParaRPr lang="en-US" sz="1200" dirty="0"/>
+              <a:rPr lang="hr-HR" sz="1200" noProof="0" dirty="0">
+                <a:solidFill>
+                  <a:srgbClr val="444444"/>
+                </a:solidFill>
+              </a:rPr>
+              <a:t>Jedina prava zaštita od ransomwarea. Google Photos za slike, </a:t>
+            </a:r>
+            <a:r>
+              <a:rPr lang="en-US" sz="1200" noProof="0" dirty="0">
+                <a:solidFill>
+                  <a:srgbClr val="444444"/>
+                </a:solidFill>
+              </a:rPr>
+              <a:t>Google cloud </a:t>
+            </a:r>
+            <a:r>
+              <a:rPr lang="en-US" sz="1200" noProof="0" dirty="0" err="1">
+                <a:solidFill>
+                  <a:srgbClr val="444444"/>
+                </a:solidFill>
+              </a:rPr>
+              <a:t>ili</a:t>
+            </a:r>
+            <a:r>
+              <a:rPr lang="en-US" sz="1200" noProof="0" dirty="0">
+                <a:solidFill>
+                  <a:srgbClr val="444444"/>
+                </a:solidFill>
+              </a:rPr>
+              <a:t> </a:t>
+            </a:r>
+            <a:r>
+              <a:rPr lang="en-US" sz="1200" noProof="0" dirty="0" err="1">
+                <a:solidFill>
+                  <a:srgbClr val="444444"/>
+                </a:solidFill>
+              </a:rPr>
+              <a:t>vanjski</a:t>
+            </a:r>
+            <a:r>
+              <a:rPr lang="en-US" sz="1200" noProof="0" dirty="0">
+                <a:solidFill>
+                  <a:srgbClr val="444444"/>
+                </a:solidFill>
+              </a:rPr>
+              <a:t> disk za </a:t>
+            </a:r>
+            <a:r>
+              <a:rPr lang="en-US" sz="1200" noProof="0" dirty="0" err="1">
+                <a:solidFill>
+                  <a:srgbClr val="444444"/>
+                </a:solidFill>
+              </a:rPr>
+              <a:t>dokumente</a:t>
+            </a:r>
+            <a:endParaRPr lang="hr-HR" sz="1200" noProof="0" dirty="0"/>
           </a:p>
         </p:txBody>
       </p:sp>
@@ -3302,7 +5654,7 @@
 </p:sld>
 </file>
 
-<file path=ppt/slides/slide12.xml><?xml version="1.0" encoding="utf-8"?>
+<file path=ppt/slides/slide13.xml><?xml version="1.0" encoding="utf-8"?>
 <p:sld xmlns:a="http://schemas.openxmlformats.org/drawingml/2006/main" xmlns:r="http://schemas.openxmlformats.org/officeDocument/2006/relationships" xmlns:p="http://schemas.openxmlformats.org/presentationml/2006/main">
   <p:cSld name="Slide 10">
     <p:bg>
@@ -3355,7 +5707,7 @@
           <a:bodyPr/>
           <a:lstStyle/>
           <a:p>
-            <a:endParaRPr lang="en-US"/>
+            <a:endParaRPr lang="hr-HR" noProof="0" dirty="0"/>
           </a:p>
         </p:txBody>
       </p:sp>
@@ -3384,14 +5736,14 @@
               <a:buNone/>
             </a:pPr>
             <a:r>
-              <a:rPr lang="en-US" sz="2000" b="1" dirty="0">
+              <a:rPr lang="hr-HR" sz="2000" b="1" noProof="0" dirty="0">
                 <a:solidFill>
                   <a:srgbClr val="FFFFFF"/>
                 </a:solidFill>
               </a:rPr>
               <a:t>Nesigurni Wi-Fi i zaštita privatnosti</a:t>
             </a:r>
-            <a:endParaRPr lang="en-US" sz="2000" dirty="0"/>
+            <a:endParaRPr lang="hr-HR" sz="2000" noProof="0" dirty="0"/>
           </a:p>
         </p:txBody>
       </p:sp>
@@ -3425,7 +5777,7 @@
           <a:bodyPr/>
           <a:lstStyle/>
           <a:p>
-            <a:endParaRPr lang="en-US"/>
+            <a:endParaRPr lang="hr-HR" noProof="0" dirty="0"/>
           </a:p>
         </p:txBody>
       </p:sp>
@@ -3457,7 +5809,7 @@
           <a:bodyPr/>
           <a:lstStyle/>
           <a:p>
-            <a:endParaRPr lang="en-US"/>
+            <a:endParaRPr lang="hr-HR" noProof="0" dirty="0"/>
           </a:p>
         </p:txBody>
       </p:sp>
@@ -3486,14 +5838,14 @@
               <a:buNone/>
             </a:pPr>
             <a:r>
-              <a:rPr lang="en-US" sz="1300" b="1" dirty="0">
+              <a:rPr lang="hr-HR" sz="1300" b="1" noProof="0" dirty="0">
                 <a:solidFill>
                   <a:srgbClr val="FFFFFF"/>
                 </a:solidFill>
               </a:rPr>
               <a:t>Pravila korištenja Wi-Fija</a:t>
             </a:r>
-            <a:endParaRPr lang="en-US" sz="1300" dirty="0"/>
+            <a:endParaRPr lang="hr-HR" sz="1300" noProof="0" dirty="0"/>
           </a:p>
         </p:txBody>
       </p:sp>
@@ -3526,14 +5878,14 @@
               <a:buChar char="•"/>
             </a:pPr>
             <a:r>
-              <a:rPr lang="en-US" sz="1300" dirty="0">
+              <a:rPr lang="hr-HR" sz="1300" noProof="0" dirty="0">
                 <a:solidFill>
                   <a:srgbClr val="444444"/>
                 </a:solidFill>
               </a:rPr>
               <a:t>NIKAD ne provjeravajte bankovni račun na javnom Wi-Fiju (kafić, hotel, bolnica)</a:t>
             </a:r>
-            <a:endParaRPr lang="en-US" sz="1300" dirty="0"/>
+            <a:endParaRPr lang="hr-HR" sz="1300" noProof="0" dirty="0"/>
           </a:p>
           <a:p>
             <a:pPr marL="342900" indent="-342900">
@@ -3544,14 +5896,14 @@
               <a:buChar char="•"/>
             </a:pPr>
             <a:r>
-              <a:rPr lang="en-US" sz="1300" dirty="0">
+              <a:rPr lang="hr-HR" sz="1300" noProof="0" dirty="0">
                 <a:solidFill>
                   <a:srgbClr val="444444"/>
                 </a:solidFill>
               </a:rPr>
               <a:t>Ne upisujte lozinke dok ste na javnoj mreži</a:t>
             </a:r>
-            <a:endParaRPr lang="en-US" sz="1300" dirty="0"/>
+            <a:endParaRPr lang="hr-HR" sz="1300" noProof="0" dirty="0"/>
           </a:p>
           <a:p>
             <a:pPr marL="342900" indent="-342900">
@@ -3562,14 +5914,14 @@
               <a:buChar char="•"/>
             </a:pPr>
             <a:r>
-              <a:rPr lang="en-US" sz="1300" dirty="0">
+              <a:rPr lang="hr-HR" sz="1300" noProof="0" dirty="0">
                 <a:solidFill>
                   <a:srgbClr val="444444"/>
                 </a:solidFill>
               </a:rPr>
               <a:t>Isključite 'automatsko spajanje' na otvorene mreže</a:t>
             </a:r>
-            <a:endParaRPr lang="en-US" sz="1300" dirty="0"/>
+            <a:endParaRPr lang="hr-HR" sz="1300" noProof="0" dirty="0"/>
           </a:p>
           <a:p>
             <a:pPr marL="342900" indent="-342900">
@@ -3580,14 +5932,14 @@
               <a:buChar char="•"/>
             </a:pPr>
             <a:r>
-              <a:rPr lang="en-US" sz="1300" dirty="0">
+              <a:rPr lang="hr-HR" sz="1300" noProof="0" dirty="0">
                 <a:solidFill>
                   <a:srgbClr val="444444"/>
                 </a:solidFill>
               </a:rPr>
               <a:t>Za osjetljive radnje koristite mobilni internet (4G/5G)</a:t>
             </a:r>
-            <a:endParaRPr lang="en-US" sz="1300" dirty="0"/>
+            <a:endParaRPr lang="hr-HR" sz="1300" noProof="0" dirty="0"/>
           </a:p>
           <a:p>
             <a:pPr marL="342900" indent="-342900">
@@ -3598,14 +5950,14 @@
               <a:buChar char="•"/>
             </a:pPr>
             <a:r>
-              <a:rPr lang="en-US" sz="1300" dirty="0">
+              <a:rPr lang="hr-HR" sz="1300" noProof="0" dirty="0">
                 <a:solidFill>
                   <a:srgbClr val="444444"/>
                 </a:solidFill>
               </a:rPr>
               <a:t>Kod kuće: postavite jaku lozinku za router, promijenite zadanu lozinku!</a:t>
             </a:r>
-            <a:endParaRPr lang="en-US" sz="1300" dirty="0"/>
+            <a:endParaRPr lang="hr-HR" sz="1300" noProof="0" dirty="0"/>
           </a:p>
         </p:txBody>
       </p:sp>
@@ -3639,7 +5991,7 @@
           <a:bodyPr/>
           <a:lstStyle/>
           <a:p>
-            <a:endParaRPr lang="en-US"/>
+            <a:endParaRPr lang="hr-HR" noProof="0" dirty="0"/>
           </a:p>
         </p:txBody>
       </p:sp>
@@ -3671,7 +6023,7 @@
           <a:bodyPr/>
           <a:lstStyle/>
           <a:p>
-            <a:endParaRPr lang="en-US"/>
+            <a:endParaRPr lang="hr-HR" noProof="0" dirty="0"/>
           </a:p>
         </p:txBody>
       </p:sp>
@@ -3700,14 +6052,14 @@
               <a:buNone/>
             </a:pPr>
             <a:r>
-              <a:rPr lang="en-US" sz="1300" b="1" dirty="0">
+              <a:rPr lang="hr-HR" sz="1300" b="1" noProof="0" dirty="0">
                 <a:solidFill>
                   <a:srgbClr val="FFFFFF"/>
                 </a:solidFill>
               </a:rPr>
               <a:t>GDPR: vaša prava u EU</a:t>
             </a:r>
-            <a:endParaRPr lang="en-US" sz="1300" dirty="0"/>
+            <a:endParaRPr lang="hr-HR" sz="1300" noProof="0" dirty="0"/>
           </a:p>
         </p:txBody>
       </p:sp>
@@ -3740,14 +6092,14 @@
               <a:buChar char="•"/>
             </a:pPr>
             <a:r>
-              <a:rPr lang="en-US" sz="1300" dirty="0">
+              <a:rPr lang="hr-HR" sz="1300" noProof="0" dirty="0">
                 <a:solidFill>
                   <a:srgbClr val="444444"/>
                 </a:solidFill>
               </a:rPr>
               <a:t>Vaši osobni podaci vrijede novac — tvrtke ih kupuju za marketing, kriminalci kradu za prijevare</a:t>
             </a:r>
-            <a:endParaRPr lang="en-US" sz="1300" dirty="0"/>
+            <a:endParaRPr lang="hr-HR" sz="1300" noProof="0" dirty="0"/>
           </a:p>
           <a:p>
             <a:pPr marL="342900" indent="-342900">
@@ -3758,14 +6110,14 @@
               <a:buChar char="•"/>
             </a:pPr>
             <a:r>
-              <a:rPr lang="en-US" sz="1300" dirty="0">
+              <a:rPr lang="hr-HR" sz="1300" noProof="0" dirty="0">
                 <a:solidFill>
                   <a:srgbClr val="444444"/>
                 </a:solidFill>
               </a:rPr>
               <a:t>Imate pravo znati koje podatke tvrtka prikuplja</a:t>
             </a:r>
-            <a:endParaRPr lang="en-US" sz="1300" dirty="0"/>
+            <a:endParaRPr lang="hr-HR" sz="1300" noProof="0" dirty="0"/>
           </a:p>
           <a:p>
             <a:pPr marL="342900" indent="-342900">
@@ -3776,14 +6128,14 @@
               <a:buChar char="•"/>
             </a:pPr>
             <a:r>
-              <a:rPr lang="en-US" sz="1300" dirty="0">
+              <a:rPr lang="hr-HR" sz="1300" noProof="0" dirty="0">
                 <a:solidFill>
                   <a:srgbClr val="444444"/>
                 </a:solidFill>
               </a:rPr>
               <a:t>Imate pravo tražiti ispravak ili brisanje podataka ('pravo na zaborav')</a:t>
             </a:r>
-            <a:endParaRPr lang="en-US" sz="1300" dirty="0"/>
+            <a:endParaRPr lang="hr-HR" sz="1300" noProof="0" dirty="0"/>
           </a:p>
           <a:p>
             <a:pPr marL="342900" indent="-342900">
@@ -3794,14 +6146,14 @@
               <a:buChar char="•"/>
             </a:pPr>
             <a:r>
-              <a:rPr lang="en-US" sz="1300" dirty="0">
+              <a:rPr lang="hr-HR" sz="1300" noProof="0" dirty="0">
                 <a:solidFill>
                   <a:srgbClr val="444444"/>
                 </a:solidFill>
               </a:rPr>
               <a:t>Imate pravo prigovoriti obradi u marketinške svrhe</a:t>
             </a:r>
-            <a:endParaRPr lang="en-US" sz="1300" dirty="0"/>
+            <a:endParaRPr lang="hr-HR" sz="1300" noProof="0" dirty="0"/>
           </a:p>
           <a:p>
             <a:pPr marL="342900" indent="-342900">
@@ -3812,14 +6164,14 @@
               <a:buChar char="•"/>
             </a:pPr>
             <a:r>
-              <a:rPr lang="en-US" sz="1300" dirty="0">
+              <a:rPr lang="hr-HR" sz="1300" noProof="0" dirty="0">
                 <a:solidFill>
                   <a:srgbClr val="444444"/>
                 </a:solidFill>
               </a:rPr>
               <a:t>Pritužba: AZOP — azop.hr</a:t>
             </a:r>
-            <a:endParaRPr lang="en-US" sz="1300" dirty="0"/>
+            <a:endParaRPr lang="hr-HR" sz="1300" noProof="0" dirty="0"/>
           </a:p>
         </p:txBody>
       </p:sp>
@@ -3831,7 +6183,7 @@
 </p:sld>
 </file>
 
-<file path=ppt/slides/slide13.xml><?xml version="1.0" encoding="utf-8"?>
+<file path=ppt/slides/slide14.xml><?xml version="1.0" encoding="utf-8"?>
 <p:sld xmlns:a="http://schemas.openxmlformats.org/drawingml/2006/main" xmlns:r="http://schemas.openxmlformats.org/officeDocument/2006/relationships" xmlns:p="http://schemas.openxmlformats.org/presentationml/2006/main">
   <p:cSld name="Slide 11">
     <p:bg>
@@ -3884,7 +6236,7 @@
           <a:bodyPr/>
           <a:lstStyle/>
           <a:p>
-            <a:endParaRPr lang="en-US"/>
+            <a:endParaRPr lang="hr-HR" noProof="0" dirty="0"/>
           </a:p>
         </p:txBody>
       </p:sp>
@@ -3913,14 +6265,14 @@
               <a:buNone/>
             </a:pPr>
             <a:r>
-              <a:rPr lang="en-US" sz="2000" b="1" dirty="0">
+              <a:rPr lang="hr-HR" sz="2000" b="1" noProof="0" dirty="0">
                 <a:solidFill>
                   <a:srgbClr val="FFFFFF"/>
                 </a:solidFill>
               </a:rPr>
               <a:t>Scenariji za prepoznavanje prijevare — vježba u grupi</a:t>
             </a:r>
-            <a:endParaRPr lang="en-US" sz="2000" dirty="0"/>
+            <a:endParaRPr lang="hr-HR" sz="2000" noProof="0" dirty="0"/>
           </a:p>
         </p:txBody>
       </p:sp>
@@ -3954,7 +6306,7 @@
           <a:bodyPr/>
           <a:lstStyle/>
           <a:p>
-            <a:endParaRPr lang="en-US"/>
+            <a:endParaRPr lang="hr-HR" noProof="0" dirty="0"/>
           </a:p>
         </p:txBody>
       </p:sp>
@@ -3986,7 +6338,7 @@
           <a:bodyPr/>
           <a:lstStyle/>
           <a:p>
-            <a:endParaRPr lang="en-US"/>
+            <a:endParaRPr lang="hr-HR" noProof="0" dirty="0"/>
           </a:p>
         </p:txBody>
       </p:sp>
@@ -4015,14 +6367,14 @@
               <a:buNone/>
             </a:pPr>
             <a:r>
-              <a:rPr lang="en-US" sz="1200" b="1" dirty="0">
+              <a:rPr lang="hr-HR" sz="1200" b="1" noProof="0" dirty="0">
                 <a:solidFill>
                   <a:srgbClr val="FFFFFF"/>
                 </a:solidFill>
               </a:rPr>
               <a:t>⛔  PRIJEVARA</a:t>
             </a:r>
-            <a:endParaRPr lang="en-US" sz="1200" dirty="0"/>
+            <a:endParaRPr lang="hr-HR" sz="1200" noProof="0" dirty="0"/>
           </a:p>
         </p:txBody>
       </p:sp>
@@ -4051,14 +6403,14 @@
               <a:buNone/>
             </a:pPr>
             <a:r>
-              <a:rPr lang="en-US" sz="1200" b="1" dirty="0">
+              <a:rPr lang="hr-HR" sz="1200" b="1" noProof="0" dirty="0">
                 <a:solidFill>
                   <a:srgbClr val="1A1A1A"/>
                 </a:solidFill>
               </a:rPr>
               <a:t>SMS: 'HP: paket čeka, platite 1,99 €'</a:t>
             </a:r>
-            <a:endParaRPr lang="en-US" sz="1200" dirty="0"/>
+            <a:endParaRPr lang="hr-HR" sz="1200" noProof="0" dirty="0"/>
           </a:p>
         </p:txBody>
       </p:sp>
@@ -4087,14 +6439,14 @@
               <a:buNone/>
             </a:pPr>
             <a:r>
-              <a:rPr lang="en-US" sz="1200" dirty="0">
+              <a:rPr lang="hr-HR" sz="1200" noProof="0" dirty="0">
                 <a:solidFill>
                   <a:srgbClr val="444444"/>
                 </a:solidFill>
               </a:rPr>
               <a:t>HP nikad ne traži plaćanje putem SMS linka. Ivana nije ništa naručivala — nazovite unuku direktno.</a:t>
             </a:r>
-            <a:endParaRPr lang="en-US" sz="1200" dirty="0"/>
+            <a:endParaRPr lang="hr-HR" sz="1200" noProof="0" dirty="0"/>
           </a:p>
         </p:txBody>
       </p:sp>
@@ -4128,7 +6480,7 @@
           <a:bodyPr/>
           <a:lstStyle/>
           <a:p>
-            <a:endParaRPr lang="en-US"/>
+            <a:endParaRPr lang="hr-HR" noProof="0" dirty="0"/>
           </a:p>
         </p:txBody>
       </p:sp>
@@ -4160,7 +6512,7 @@
           <a:bodyPr/>
           <a:lstStyle/>
           <a:p>
-            <a:endParaRPr lang="en-US"/>
+            <a:endParaRPr lang="hr-HR" noProof="0" dirty="0"/>
           </a:p>
         </p:txBody>
       </p:sp>
@@ -4189,14 +6541,14 @@
               <a:buNone/>
             </a:pPr>
             <a:r>
-              <a:rPr lang="en-US" sz="1200" b="1" dirty="0">
+              <a:rPr lang="hr-HR" sz="1200" b="1" noProof="0" dirty="0">
                 <a:solidFill>
                   <a:srgbClr val="FFFFFF"/>
                 </a:solidFill>
               </a:rPr>
               <a:t>⛔  PRIJEVARA</a:t>
             </a:r>
-            <a:endParaRPr lang="en-US" sz="1200" dirty="0"/>
+            <a:endParaRPr lang="hr-HR" sz="1200" noProof="0" dirty="0"/>
           </a:p>
         </p:txBody>
       </p:sp>
@@ -4225,14 +6577,14 @@
               <a:buNone/>
             </a:pPr>
             <a:r>
-              <a:rPr lang="en-US" sz="1200" b="1" dirty="0">
+              <a:rPr lang="hr-HR" sz="1200" b="1" noProof="0" dirty="0">
                 <a:solidFill>
                   <a:srgbClr val="1A1A1A"/>
                 </a:solidFill>
               </a:rPr>
               <a:t>Poziv od 'Erste banke' traži PIN</a:t>
             </a:r>
-            <a:endParaRPr lang="en-US" sz="1200" dirty="0"/>
+            <a:endParaRPr lang="hr-HR" sz="1200" noProof="0" dirty="0"/>
           </a:p>
         </p:txBody>
       </p:sp>
@@ -4261,14 +6613,14 @@
               <a:buNone/>
             </a:pPr>
             <a:r>
-              <a:rPr lang="en-US" sz="1200" dirty="0">
+              <a:rPr lang="hr-HR" sz="1200" noProof="0" dirty="0">
                 <a:solidFill>
                   <a:srgbClr val="444444"/>
                 </a:solidFill>
               </a:rPr>
               <a:t>Banka NIKAD ne traži PIN telefonom. Prekinite razgovor i nazovite banku na broj s poleđine kartice.</a:t>
             </a:r>
-            <a:endParaRPr lang="en-US" sz="1200" dirty="0"/>
+            <a:endParaRPr lang="hr-HR" sz="1200" noProof="0" dirty="0"/>
           </a:p>
         </p:txBody>
       </p:sp>
@@ -4302,7 +6654,7 @@
           <a:bodyPr/>
           <a:lstStyle/>
           <a:p>
-            <a:endParaRPr lang="en-US"/>
+            <a:endParaRPr lang="hr-HR" noProof="0" dirty="0"/>
           </a:p>
         </p:txBody>
       </p:sp>
@@ -4334,7 +6686,7 @@
           <a:bodyPr/>
           <a:lstStyle/>
           <a:p>
-            <a:endParaRPr lang="en-US"/>
+            <a:endParaRPr lang="hr-HR" noProof="0" dirty="0"/>
           </a:p>
         </p:txBody>
       </p:sp>
@@ -4363,14 +6715,14 @@
               <a:buNone/>
             </a:pPr>
             <a:r>
-              <a:rPr lang="en-US" sz="1200" b="1" dirty="0">
+              <a:rPr lang="hr-HR" sz="1200" b="1" noProof="0" dirty="0">
                 <a:solidFill>
                   <a:srgbClr val="FFFFFF"/>
                 </a:solidFill>
               </a:rPr>
               <a:t>⛔  PRIJEVARA</a:t>
             </a:r>
-            <a:endParaRPr lang="en-US" sz="1200" dirty="0"/>
+            <a:endParaRPr lang="hr-HR" sz="1200" noProof="0" dirty="0"/>
           </a:p>
         </p:txBody>
       </p:sp>
@@ -4399,14 +6751,14 @@
               <a:buNone/>
             </a:pPr>
             <a:r>
-              <a:rPr lang="en-US" sz="1200" b="1" dirty="0">
+              <a:rPr lang="hr-HR" sz="1200" b="1" noProof="0" dirty="0">
                 <a:solidFill>
                   <a:srgbClr val="1A1A1A"/>
                 </a:solidFill>
               </a:rPr>
               <a:t>Tom iz Libanona traži novac za avionsku kartu</a:t>
             </a:r>
-            <a:endParaRPr lang="en-US" sz="1200" dirty="0"/>
+            <a:endParaRPr lang="hr-HR" sz="1200" noProof="0" dirty="0"/>
           </a:p>
         </p:txBody>
       </p:sp>
@@ -4435,14 +6787,14 @@
               <a:buNone/>
             </a:pPr>
             <a:r>
-              <a:rPr lang="en-US" sz="1200" dirty="0">
+              <a:rPr lang="hr-HR" sz="1200" noProof="0" dirty="0">
                 <a:solidFill>
                   <a:srgbClr val="444444"/>
                 </a:solidFill>
               </a:rPr>
               <a:t>Romance scam. Prebrzo ljubav, nema video poziva, traži novac — klasični znakovi prevaranta.</a:t>
             </a:r>
-            <a:endParaRPr lang="en-US" sz="1200" dirty="0"/>
+            <a:endParaRPr lang="hr-HR" sz="1200" noProof="0" dirty="0"/>
           </a:p>
         </p:txBody>
       </p:sp>
@@ -4476,7 +6828,7 @@
           <a:bodyPr/>
           <a:lstStyle/>
           <a:p>
-            <a:endParaRPr lang="en-US"/>
+            <a:endParaRPr lang="hr-HR" noProof="0" dirty="0"/>
           </a:p>
         </p:txBody>
       </p:sp>
@@ -4508,7 +6860,7 @@
           <a:bodyPr/>
           <a:lstStyle/>
           <a:p>
-            <a:endParaRPr lang="en-US"/>
+            <a:endParaRPr lang="hr-HR" noProof="0" dirty="0"/>
           </a:p>
         </p:txBody>
       </p:sp>
@@ -4537,14 +6889,14 @@
               <a:buNone/>
             </a:pPr>
             <a:r>
-              <a:rPr lang="en-US" sz="1200" b="1" dirty="0">
+              <a:rPr lang="hr-HR" sz="1200" b="1" noProof="0" dirty="0">
                 <a:solidFill>
                   <a:srgbClr val="FFFFFF"/>
                 </a:solidFill>
               </a:rPr>
               <a:t>⛔  PRIJEVARA</a:t>
             </a:r>
-            <a:endParaRPr lang="en-US" sz="1200" dirty="0"/>
+            <a:endParaRPr lang="hr-HR" sz="1200" noProof="0" dirty="0"/>
           </a:p>
         </p:txBody>
       </p:sp>
@@ -4573,14 +6925,14 @@
               <a:buNone/>
             </a:pPr>
             <a:r>
-              <a:rPr lang="en-US" sz="1200" b="1" dirty="0">
+              <a:rPr lang="hr-HR" sz="1200" b="1" noProof="0" dirty="0">
                 <a:solidFill>
                   <a:srgbClr val="1A1A1A"/>
                 </a:solidFill>
               </a:rPr>
               <a:t>Kaufland poklanja 100 kartica od 500 €</a:t>
             </a:r>
-            <a:endParaRPr lang="en-US" sz="1200" dirty="0"/>
+            <a:endParaRPr lang="hr-HR" sz="1200" noProof="0" dirty="0"/>
           </a:p>
         </p:txBody>
       </p:sp>
@@ -4609,14 +6961,14 @@
               <a:buNone/>
             </a:pPr>
             <a:r>
-              <a:rPr lang="en-US" sz="1200" dirty="0">
+              <a:rPr lang="hr-HR" sz="1200" noProof="0" dirty="0">
                 <a:solidFill>
                   <a:srgbClr val="444444"/>
                 </a:solidFill>
               </a:rPr>
               <a:t>Prijevara za prikupljanje podataka. Legitimna nagradna igra ne traži adresu i telefon ovako.</a:t>
             </a:r>
-            <a:endParaRPr lang="en-US" sz="1200" dirty="0"/>
+            <a:endParaRPr lang="hr-HR" sz="1200" noProof="0" dirty="0"/>
           </a:p>
         </p:txBody>
       </p:sp>
@@ -4628,7 +6980,7 @@
 </p:sld>
 </file>
 
-<file path=ppt/slides/slide14.xml><?xml version="1.0" encoding="utf-8"?>
+<file path=ppt/slides/slide15.xml><?xml version="1.0" encoding="utf-8"?>
 <p:sld xmlns:a="http://schemas.openxmlformats.org/drawingml/2006/main" xmlns:r="http://schemas.openxmlformats.org/officeDocument/2006/relationships" xmlns:p="http://schemas.openxmlformats.org/presentationml/2006/main">
   <p:cSld name="Slide 12">
     <p:bg>
@@ -4681,7 +7033,7 @@
           <a:bodyPr/>
           <a:lstStyle/>
           <a:p>
-            <a:endParaRPr lang="en-US"/>
+            <a:endParaRPr lang="hr-HR" noProof="0" dirty="0"/>
           </a:p>
         </p:txBody>
       </p:sp>
@@ -4710,14 +7062,14 @@
               <a:buNone/>
             </a:pPr>
             <a:r>
-              <a:rPr lang="en-US" sz="2000" b="1" dirty="0">
+              <a:rPr lang="hr-HR" sz="2000" b="1" noProof="0" dirty="0">
                 <a:solidFill>
                   <a:srgbClr val="FFFFFF"/>
                 </a:solidFill>
               </a:rPr>
               <a:t>Posebne teme: Deepfake, QR kodovi i AI u rukama prevaranata</a:t>
             </a:r>
-            <a:endParaRPr lang="en-US" sz="2000" dirty="0"/>
+            <a:endParaRPr lang="hr-HR" sz="2000" noProof="0" dirty="0"/>
           </a:p>
         </p:txBody>
       </p:sp>
@@ -4751,7 +7103,7 @@
           <a:bodyPr/>
           <a:lstStyle/>
           <a:p>
-            <a:endParaRPr lang="en-US"/>
+            <a:endParaRPr lang="hr-HR" noProof="0" dirty="0"/>
           </a:p>
         </p:txBody>
       </p:sp>
@@ -4783,7 +7135,7 @@
           <a:bodyPr/>
           <a:lstStyle/>
           <a:p>
-            <a:endParaRPr lang="en-US"/>
+            <a:endParaRPr lang="hr-HR" noProof="0" dirty="0"/>
           </a:p>
         </p:txBody>
       </p:sp>
@@ -4815,7 +7167,7 @@
           <a:bodyPr/>
           <a:lstStyle/>
           <a:p>
-            <a:endParaRPr lang="en-US"/>
+            <a:endParaRPr lang="hr-HR" noProof="0" dirty="0"/>
           </a:p>
         </p:txBody>
       </p:sp>
@@ -4868,14 +7220,14 @@
               <a:buNone/>
             </a:pPr>
             <a:r>
-              <a:rPr lang="en-US" sz="1400" b="1" dirty="0">
+              <a:rPr lang="hr-HR" sz="1400" b="1" noProof="0" dirty="0">
                 <a:solidFill>
                   <a:srgbClr val="1A1A1A"/>
                 </a:solidFill>
               </a:rPr>
               <a:t>Deepfake videozapisi</a:t>
             </a:r>
-            <a:endParaRPr lang="en-US" sz="1400" dirty="0"/>
+            <a:endParaRPr lang="hr-HR" sz="1400" noProof="0" dirty="0"/>
           </a:p>
         </p:txBody>
       </p:sp>
@@ -4904,14 +7256,54 @@
               <a:buNone/>
             </a:pPr>
             <a:r>
-              <a:rPr lang="en-US" sz="1200" dirty="0">
-                <a:solidFill>
-                  <a:srgbClr val="444444"/>
-                </a:solidFill>
-              </a:rPr>
-              <a:t>Lažni videozapisi koji izgledaju kao stvarne osobe. Znakovi: usta se ne sinkroniziraju, kosa zamućena.</a:t>
-            </a:r>
-            <a:endParaRPr lang="en-US" sz="1200" dirty="0"/>
+              <a:rPr lang="hr-HR" sz="1200" noProof="0" dirty="0">
+                <a:solidFill>
+                  <a:srgbClr val="444444"/>
+                </a:solidFill>
+              </a:rPr>
+              <a:t>Lažni videozapisi koji izgledaju kao stvarne osobe. Znakovi: usta se ne sinkroniziraju, kosa zamućena</a:t>
+            </a:r>
+            <a:r>
+              <a:rPr lang="en-US" sz="1200" noProof="0" dirty="0">
+                <a:solidFill>
+                  <a:srgbClr val="444444"/>
+                </a:solidFill>
+              </a:rPr>
+              <a:t>, </a:t>
+            </a:r>
+            <a:r>
+              <a:rPr lang="en-US" sz="1200" noProof="0" dirty="0" err="1">
+                <a:solidFill>
+                  <a:srgbClr val="444444"/>
+                </a:solidFill>
+              </a:rPr>
+              <a:t>nepravilni</a:t>
+            </a:r>
+            <a:r>
+              <a:rPr lang="en-US" sz="1200" noProof="0" dirty="0">
+                <a:solidFill>
+                  <a:srgbClr val="444444"/>
+                </a:solidFill>
+              </a:rPr>
+              <a:t> </a:t>
+            </a:r>
+            <a:r>
+              <a:rPr lang="en-US" sz="1200" noProof="0" dirty="0" err="1">
+                <a:solidFill>
+                  <a:srgbClr val="444444"/>
+                </a:solidFill>
+              </a:rPr>
+              <a:t>prsti</a:t>
+            </a:r>
+            <a:r>
+              <a:rPr lang="hr-HR" sz="1200" noProof="0" dirty="0">
+                <a:solidFill>
+                  <a:srgbClr val="444444"/>
+                </a:solidFill>
+              </a:rPr>
+              <a:t>.</a:t>
+            </a:r>
+            <a:endParaRPr lang="hr-HR" sz="1200" noProof="0" dirty="0"/>
           </a:p>
         </p:txBody>
       </p:sp>
@@ -4945,7 +7337,7 @@
           <a:bodyPr/>
           <a:lstStyle/>
           <a:p>
-            <a:endParaRPr lang="en-US"/>
+            <a:endParaRPr lang="hr-HR" noProof="0" dirty="0"/>
           </a:p>
         </p:txBody>
       </p:sp>
@@ -4977,7 +7369,7 @@
           <a:bodyPr/>
           <a:lstStyle/>
           <a:p>
-            <a:endParaRPr lang="en-US"/>
+            <a:endParaRPr lang="hr-HR" noProof="0" dirty="0"/>
           </a:p>
         </p:txBody>
       </p:sp>
@@ -5009,7 +7401,7 @@
           <a:bodyPr/>
           <a:lstStyle/>
           <a:p>
-            <a:endParaRPr lang="en-US"/>
+            <a:endParaRPr lang="hr-HR" noProof="0" dirty="0"/>
           </a:p>
         </p:txBody>
       </p:sp>
@@ -5062,14 +7454,14 @@
               <a:buNone/>
             </a:pPr>
             <a:r>
-              <a:rPr lang="en-US" sz="1400" b="1" dirty="0">
+              <a:rPr lang="hr-HR" sz="1400" b="1" noProof="0" dirty="0">
                 <a:solidFill>
                   <a:srgbClr val="1A1A1A"/>
                 </a:solidFill>
               </a:rPr>
               <a:t>Lažni QR kodovi</a:t>
             </a:r>
-            <a:endParaRPr lang="en-US" sz="1400" dirty="0"/>
+            <a:endParaRPr lang="hr-HR" sz="1400" noProof="0" dirty="0"/>
           </a:p>
         </p:txBody>
       </p:sp>
@@ -5098,14 +7490,110 @@
               <a:buNone/>
             </a:pPr>
             <a:r>
-              <a:rPr lang="en-US" sz="1200" dirty="0">
-                <a:solidFill>
-                  <a:srgbClr val="444444"/>
-                </a:solidFill>
-              </a:rPr>
-              <a:t>Prevaranti lijeplje lažne QR naljepnice na parkomate i bankomate. Uvijek provjerite je li naljepnica originalna.</a:t>
-            </a:r>
-            <a:endParaRPr lang="en-US" sz="1200" dirty="0"/>
+              <a:rPr lang="hr-HR" sz="1200" noProof="0" dirty="0">
+                <a:solidFill>
+                  <a:srgbClr val="444444"/>
+                </a:solidFill>
+              </a:rPr>
+              <a:t>Prevaranti lijeplje lažne QR naljepnice na parkomate i bankomate. </a:t>
+            </a:r>
+            <a:r>
+              <a:rPr lang="en-US" sz="1200" noProof="0" dirty="0" err="1">
+                <a:solidFill>
+                  <a:srgbClr val="444444"/>
+                </a:solidFill>
+              </a:rPr>
+              <a:t>Skenirajte</a:t>
+            </a:r>
+            <a:r>
+              <a:rPr lang="en-US" sz="1200" noProof="0" dirty="0">
+                <a:solidFill>
+                  <a:srgbClr val="444444"/>
+                </a:solidFill>
+              </a:rPr>
+              <a:t> QR </a:t>
+            </a:r>
+            <a:r>
+              <a:rPr lang="en-US" sz="1200" noProof="0" dirty="0" err="1">
+                <a:solidFill>
+                  <a:srgbClr val="444444"/>
+                </a:solidFill>
+              </a:rPr>
+              <a:t>kodove</a:t>
+            </a:r>
+            <a:r>
+              <a:rPr lang="en-US" sz="1200" noProof="0" dirty="0">
+                <a:solidFill>
+                  <a:srgbClr val="444444"/>
+                </a:solidFill>
+              </a:rPr>
+              <a:t> </a:t>
+            </a:r>
+            <a:r>
+              <a:rPr lang="en-US" sz="1200" noProof="0" dirty="0" err="1">
+                <a:solidFill>
+                  <a:srgbClr val="444444"/>
+                </a:solidFill>
+              </a:rPr>
+              <a:t>samo</a:t>
+            </a:r>
+            <a:r>
+              <a:rPr lang="en-US" sz="1200" noProof="0" dirty="0">
+                <a:solidFill>
+                  <a:srgbClr val="444444"/>
+                </a:solidFill>
+              </a:rPr>
+              <a:t> </a:t>
+            </a:r>
+            <a:r>
+              <a:rPr lang="en-US" sz="1200" noProof="0" dirty="0" err="1">
+                <a:solidFill>
+                  <a:srgbClr val="444444"/>
+                </a:solidFill>
+              </a:rPr>
+              <a:t>iz</a:t>
+            </a:r>
+            <a:r>
+              <a:rPr lang="en-US" sz="1200" noProof="0" dirty="0">
+                <a:solidFill>
+                  <a:srgbClr val="444444"/>
+                </a:solidFill>
+              </a:rPr>
+              <a:t> </a:t>
+            </a:r>
+            <a:r>
+              <a:rPr lang="en-US" sz="1200" noProof="0" dirty="0" err="1">
+                <a:solidFill>
+                  <a:srgbClr val="444444"/>
+                </a:solidFill>
+              </a:rPr>
+              <a:t>pouzdanih</a:t>
+            </a:r>
+            <a:r>
+              <a:rPr lang="en-US" sz="1200" noProof="0" dirty="0">
+                <a:solidFill>
+                  <a:srgbClr val="444444"/>
+                </a:solidFill>
+              </a:rPr>
+              <a:t> </a:t>
+            </a:r>
+            <a:r>
+              <a:rPr lang="en-US" sz="1200" noProof="0" dirty="0" err="1">
+                <a:solidFill>
+                  <a:srgbClr val="444444"/>
+                </a:solidFill>
+              </a:rPr>
+              <a:t>izvora</a:t>
+            </a:r>
+            <a:r>
+              <a:rPr lang="en-US" sz="1200" noProof="0" dirty="0">
+                <a:solidFill>
+                  <a:srgbClr val="444444"/>
+                </a:solidFill>
+              </a:rPr>
+              <a:t>.</a:t>
+            </a:r>
+            <a:endParaRPr lang="hr-HR" sz="1200" noProof="0" dirty="0"/>
           </a:p>
         </p:txBody>
       </p:sp>
@@ -5139,7 +7627,7 @@
           <a:bodyPr/>
           <a:lstStyle/>
           <a:p>
-            <a:endParaRPr lang="en-US"/>
+            <a:endParaRPr lang="hr-HR" noProof="0" dirty="0"/>
           </a:p>
         </p:txBody>
       </p:sp>
@@ -5171,7 +7659,7 @@
           <a:bodyPr/>
           <a:lstStyle/>
           <a:p>
-            <a:endParaRPr lang="en-US"/>
+            <a:endParaRPr lang="hr-HR" noProof="0" dirty="0"/>
           </a:p>
         </p:txBody>
       </p:sp>
@@ -5203,7 +7691,7 @@
           <a:bodyPr/>
           <a:lstStyle/>
           <a:p>
-            <a:endParaRPr lang="en-US"/>
+            <a:endParaRPr lang="hr-HR" noProof="0" dirty="0"/>
           </a:p>
         </p:txBody>
       </p:sp>
@@ -5256,14 +7744,14 @@
               <a:buNone/>
             </a:pPr>
             <a:r>
-              <a:rPr lang="en-US" sz="1400" b="1" dirty="0">
+              <a:rPr lang="hr-HR" sz="1400" b="1" noProof="0" dirty="0">
                 <a:solidFill>
                   <a:srgbClr val="1A1A1A"/>
                 </a:solidFill>
               </a:rPr>
               <a:t>AI pomаže prevarantima</a:t>
             </a:r>
-            <a:endParaRPr lang="en-US" sz="1400" dirty="0"/>
+            <a:endParaRPr lang="hr-HR" sz="1400" noProof="0" dirty="0"/>
           </a:p>
         </p:txBody>
       </p:sp>
@@ -5292,14 +7780,102 @@
               <a:buNone/>
             </a:pPr>
             <a:r>
-              <a:rPr lang="en-US" sz="1200" dirty="0">
-                <a:solidFill>
-                  <a:srgbClr val="444444"/>
-                </a:solidFill>
-              </a:rPr>
-              <a:t>ChatGPT piše uvjerljive phishing poruke bez grešaka. Stara pravila 'loš pravopis = prijevara' više ne vrijede uvijek.</a:t>
-            </a:r>
-            <a:endParaRPr lang="en-US" sz="1200" dirty="0"/>
+              <a:rPr lang="hr-HR" sz="1200" noProof="0" dirty="0">
+                <a:solidFill>
+                  <a:srgbClr val="444444"/>
+                </a:solidFill>
+              </a:rPr>
+              <a:t>ChatGPT</a:t>
+            </a:r>
+            <a:r>
+              <a:rPr lang="en-US" sz="1200" noProof="0" dirty="0">
+                <a:solidFill>
+                  <a:srgbClr val="444444"/>
+                </a:solidFill>
+              </a:rPr>
+              <a:t> </a:t>
+            </a:r>
+            <a:r>
+              <a:rPr lang="en-US" sz="1200" noProof="0" dirty="0" err="1">
+                <a:solidFill>
+                  <a:srgbClr val="444444"/>
+                </a:solidFill>
+              </a:rPr>
+              <a:t>ili</a:t>
+            </a:r>
+            <a:r>
+              <a:rPr lang="en-US" sz="1200" noProof="0" dirty="0">
+                <a:solidFill>
+                  <a:srgbClr val="444444"/>
+                </a:solidFill>
+              </a:rPr>
+              <a:t> </a:t>
+            </a:r>
+            <a:r>
+              <a:rPr lang="en-US" sz="1200" noProof="0" dirty="0" err="1">
+                <a:solidFill>
+                  <a:srgbClr val="444444"/>
+                </a:solidFill>
+              </a:rPr>
+              <a:t>drugi</a:t>
+            </a:r>
+            <a:r>
+              <a:rPr lang="en-US" sz="1200" noProof="0" dirty="0">
+                <a:solidFill>
+                  <a:srgbClr val="444444"/>
+                </a:solidFill>
+              </a:rPr>
+              <a:t> AI </a:t>
+            </a:r>
+            <a:r>
+              <a:rPr lang="en-US" sz="1200" noProof="0" dirty="0" err="1">
+                <a:solidFill>
+                  <a:srgbClr val="444444"/>
+                </a:solidFill>
+              </a:rPr>
+              <a:t>jezični</a:t>
+            </a:r>
+            <a:r>
+              <a:rPr lang="en-US" sz="1200" noProof="0" dirty="0">
+                <a:solidFill>
+                  <a:srgbClr val="444444"/>
+                </a:solidFill>
+              </a:rPr>
+              <a:t> </a:t>
+            </a:r>
+            <a:r>
+              <a:rPr lang="en-US" sz="1200" noProof="0" dirty="0" err="1">
+                <a:solidFill>
+                  <a:srgbClr val="444444"/>
+                </a:solidFill>
+              </a:rPr>
+              <a:t>modeli</a:t>
+            </a:r>
+            <a:r>
+              <a:rPr lang="hr-HR" sz="1200" noProof="0" dirty="0">
+                <a:solidFill>
+                  <a:srgbClr val="444444"/>
+                </a:solidFill>
+              </a:rPr>
+              <a:t> pi</a:t>
+            </a:r>
+            <a:r>
+              <a:rPr lang="en-US" sz="1200" dirty="0" err="1">
+                <a:solidFill>
+                  <a:srgbClr val="444444"/>
+                </a:solidFill>
+              </a:rPr>
+              <a:t>šu</a:t>
+            </a:r>
+            <a:r>
+              <a:rPr lang="hr-HR" sz="1200" noProof="0" dirty="0">
+                <a:solidFill>
+                  <a:srgbClr val="444444"/>
+                </a:solidFill>
+              </a:rPr>
+              <a:t> uvjerljive phishing poruke bez grešaka. Stara pravila 'loš pravopis = prijevara' više ne vrijede uvijek.</a:t>
+            </a:r>
+            <a:endParaRPr lang="hr-HR" sz="1200" noProof="0" dirty="0"/>
           </a:p>
         </p:txBody>
       </p:sp>
@@ -5333,7 +7909,7 @@
           <a:bodyPr/>
           <a:lstStyle/>
           <a:p>
-            <a:endParaRPr lang="en-US"/>
+            <a:endParaRPr lang="hr-HR" noProof="0" dirty="0"/>
           </a:p>
         </p:txBody>
       </p:sp>
@@ -5365,7 +7941,7 @@
           <a:bodyPr/>
           <a:lstStyle/>
           <a:p>
-            <a:endParaRPr lang="en-US"/>
+            <a:endParaRPr lang="hr-HR" noProof="0" dirty="0"/>
           </a:p>
         </p:txBody>
       </p:sp>
@@ -5397,7 +7973,7 @@
           <a:bodyPr/>
           <a:lstStyle/>
           <a:p>
-            <a:endParaRPr lang="en-US"/>
+            <a:endParaRPr lang="hr-HR" noProof="0" dirty="0"/>
           </a:p>
         </p:txBody>
       </p:sp>
@@ -5450,14 +8026,14 @@
               <a:buNone/>
             </a:pPr>
             <a:r>
-              <a:rPr lang="en-US" sz="1400" b="1" dirty="0">
+              <a:rPr lang="hr-HR" sz="1400" b="1" noProof="0" dirty="0">
                 <a:solidFill>
                   <a:srgbClr val="1A1A1A"/>
                 </a:solidFill>
               </a:rPr>
               <a:t>Investicijske prijevare</a:t>
             </a:r>
-            <a:endParaRPr lang="en-US" sz="1400" dirty="0"/>
+            <a:endParaRPr lang="hr-HR" sz="1400" noProof="0" dirty="0"/>
           </a:p>
         </p:txBody>
       </p:sp>
@@ -5486,14 +8062,54 @@
               <a:buNone/>
             </a:pPr>
             <a:r>
-              <a:rPr lang="en-US" sz="1200" dirty="0">
-                <a:solidFill>
-                  <a:srgbClr val="444444"/>
-                </a:solidFill>
-              </a:rPr>
-              <a:t>Lažne zarade na kriptovalutama — lažno pozivanje na EU, HNB ili poznate osobe. Oglasi na društvenim mrežama!</a:t>
-            </a:r>
-            <a:endParaRPr lang="en-US" sz="1200" dirty="0"/>
+              <a:rPr lang="hr-HR" sz="1200" noProof="0" dirty="0">
+                <a:solidFill>
+                  <a:srgbClr val="444444"/>
+                </a:solidFill>
+              </a:rPr>
+              <a:t>Lažne zarade na kriptovalutama</a:t>
+            </a:r>
+            <a:r>
+              <a:rPr lang="en-US" sz="1200" noProof="0" dirty="0">
+                <a:solidFill>
+                  <a:srgbClr val="444444"/>
+                </a:solidFill>
+              </a:rPr>
+              <a:t> </a:t>
+            </a:r>
+            <a:r>
+              <a:rPr lang="en-US" sz="1200" noProof="0" dirty="0" err="1">
+                <a:solidFill>
+                  <a:srgbClr val="444444"/>
+                </a:solidFill>
+              </a:rPr>
+              <a:t>ili</a:t>
+            </a:r>
+            <a:r>
+              <a:rPr lang="en-US" sz="1200" noProof="0" dirty="0">
+                <a:solidFill>
+                  <a:srgbClr val="444444"/>
+                </a:solidFill>
+              </a:rPr>
+              <a:t> </a:t>
+            </a:r>
+            <a:r>
+              <a:rPr lang="en-US" sz="1200" noProof="0" dirty="0" err="1">
+                <a:solidFill>
+                  <a:srgbClr val="444444"/>
+                </a:solidFill>
+              </a:rPr>
+              <a:t>dionicama</a:t>
+            </a:r>
+            <a:r>
+              <a:rPr lang="hr-HR" sz="1200" noProof="0" dirty="0">
+                <a:solidFill>
+                  <a:srgbClr val="444444"/>
+                </a:solidFill>
+              </a:rPr>
+              <a:t> — lažno pozivanje na EU, HNB ili poznate osobe. Oglasi na društvenim mrežama!</a:t>
+            </a:r>
+            <a:endParaRPr lang="hr-HR" sz="1200" noProof="0" dirty="0"/>
           </a:p>
         </p:txBody>
       </p:sp>
@@ -5505,7 +8121,7 @@
 </p:sld>
 </file>
 
-<file path=ppt/slides/slide15.xml><?xml version="1.0" encoding="utf-8"?>
+<file path=ppt/slides/slide16.xml><?xml version="1.0" encoding="utf-8"?>
 <p:sld xmlns:a="http://schemas.openxmlformats.org/drawingml/2006/main" xmlns:r="http://schemas.openxmlformats.org/officeDocument/2006/relationships" xmlns:p="http://schemas.openxmlformats.org/presentationml/2006/main">
   <p:cSld name="Slide 13">
     <p:bg>
@@ -5558,7 +8174,7 @@
           <a:bodyPr/>
           <a:lstStyle/>
           <a:p>
-            <a:endParaRPr lang="en-US"/>
+            <a:endParaRPr lang="hr-HR" noProof="0" dirty="0"/>
           </a:p>
         </p:txBody>
       </p:sp>
@@ -5587,14 +8203,14 @@
               <a:buNone/>
             </a:pPr>
             <a:r>
-              <a:rPr lang="en-US" sz="2000" b="1" dirty="0">
+              <a:rPr lang="hr-HR" sz="2000" b="1" noProof="0" dirty="0">
                 <a:solidFill>
                   <a:srgbClr val="FFFFFF"/>
                 </a:solidFill>
               </a:rPr>
               <a:t>Kome se javiti u slučaju prijevare?</a:t>
             </a:r>
-            <a:endParaRPr lang="en-US" sz="2000" dirty="0"/>
+            <a:endParaRPr lang="hr-HR" sz="2000" noProof="0" dirty="0"/>
           </a:p>
         </p:txBody>
       </p:sp>
@@ -5607,7 +8223,7 @@
           <p:nvPr>
             <p:extLst>
               <p:ext uri="{D42A27DB-BD31-4B8C-83A1-F6EECF244321}">
-                <p14:modId xmlns:p14="http://schemas.microsoft.com/office/powerpoint/2010/main" val="1579011935"/>
+                <p14:modId xmlns:p14="http://schemas.microsoft.com/office/powerpoint/2010/main" val="775423889"/>
               </p:ext>
             </p:extLst>
           </p:nvPr>
@@ -5653,14 +8269,14 @@
                         <a:buNone/>
                       </a:pPr>
                       <a:r>
-                        <a:rPr lang="en-US" sz="1300" b="1" dirty="0">
+                        <a:rPr lang="hr-HR" sz="1300" b="1" noProof="0" dirty="0">
                           <a:solidFill>
                             <a:srgbClr val="FFFFFF"/>
                           </a:solidFill>
                         </a:rPr>
                         <a:t>Kontakt</a:t>
                       </a:r>
-                      <a:endParaRPr lang="en-US" sz="1300" dirty="0"/>
+                      <a:endParaRPr lang="hr-HR" sz="1300" noProof="0" dirty="0"/>
                     </a:p>
                   </a:txBody>
                   <a:tcPr>
@@ -5714,14 +8330,14 @@
                         <a:buNone/>
                       </a:pPr>
                       <a:r>
-                        <a:rPr lang="en-US" sz="1300" b="1" dirty="0">
+                        <a:rPr lang="hr-HR" sz="1300" b="1" noProof="0" dirty="0">
                           <a:solidFill>
                             <a:srgbClr val="FFFFFF"/>
                           </a:solidFill>
                         </a:rPr>
                         <a:t>Kada se javiti</a:t>
                       </a:r>
-                      <a:endParaRPr lang="en-US" sz="1300" dirty="0"/>
+                      <a:endParaRPr lang="hr-HR" sz="1300" noProof="0" dirty="0"/>
                     </a:p>
                   </a:txBody>
                   <a:tcPr>
@@ -5775,14 +8391,14 @@
                         <a:buNone/>
                       </a:pPr>
                       <a:r>
-                        <a:rPr lang="en-US" sz="1300" b="1" dirty="0">
+                        <a:rPr lang="hr-HR" sz="1300" b="1" noProof="0" dirty="0">
                           <a:solidFill>
                             <a:srgbClr val="FFFFFF"/>
                           </a:solidFill>
                         </a:rPr>
                         <a:t>Gdje</a:t>
                       </a:r>
-                      <a:endParaRPr lang="en-US" sz="1300" dirty="0"/>
+                      <a:endParaRPr lang="hr-HR" sz="1300" noProof="0" dirty="0"/>
                     </a:p>
                   </a:txBody>
                   <a:tcPr>
@@ -5843,14 +8459,14 @@
                         <a:buNone/>
                       </a:pPr>
                       <a:r>
-                        <a:rPr lang="en-US" sz="1200" dirty="0">
+                        <a:rPr lang="hr-HR" sz="1200" noProof="0" dirty="0">
                           <a:solidFill>
                             <a:srgbClr val="444444"/>
                           </a:solidFill>
                         </a:rPr>
                         <a:t>Policija (hitno)</a:t>
                       </a:r>
-                      <a:endParaRPr lang="en-US" sz="1200" dirty="0"/>
+                      <a:endParaRPr lang="hr-HR" sz="1200" noProof="0" dirty="0"/>
                     </a:p>
                   </a:txBody>
                   <a:tcPr>
@@ -5904,14 +8520,14 @@
                         <a:buNone/>
                       </a:pPr>
                       <a:r>
-                        <a:rPr lang="en-US" sz="1200" dirty="0">
+                        <a:rPr lang="hr-HR" sz="1200" noProof="0" dirty="0">
                           <a:solidFill>
                             <a:srgbClr val="444444"/>
                           </a:solidFill>
                         </a:rPr>
                         <a:t>Svaka prijevara, odmah</a:t>
                       </a:r>
-                      <a:endParaRPr lang="en-US" sz="1200" dirty="0"/>
+                      <a:endParaRPr lang="hr-HR" sz="1200" noProof="0" dirty="0"/>
                     </a:p>
                   </a:txBody>
                   <a:tcPr>
@@ -5965,14 +8581,14 @@
                         <a:buNone/>
                       </a:pPr>
                       <a:r>
-                        <a:rPr lang="en-US" sz="1200" dirty="0">
+                        <a:rPr lang="hr-HR" sz="1200" noProof="0" dirty="0">
                           <a:solidFill>
                             <a:srgbClr val="444444"/>
                           </a:solidFill>
                         </a:rPr>
                         <a:t>112 ili najbliža policijska postaja</a:t>
                       </a:r>
-                      <a:endParaRPr lang="en-US" sz="1200" dirty="0"/>
+                      <a:endParaRPr lang="hr-HR" sz="1200" noProof="0" dirty="0"/>
                     </a:p>
                   </a:txBody>
                   <a:tcPr>
@@ -6033,14 +8649,14 @@
                         <a:buNone/>
                       </a:pPr>
                       <a:r>
-                        <a:rPr lang="en-US" sz="1200" dirty="0">
+                        <a:rPr lang="hr-HR" sz="1200" noProof="0" dirty="0">
                           <a:solidFill>
                             <a:srgbClr val="444444"/>
                           </a:solidFill>
                         </a:rPr>
                         <a:t>MUP RH — online</a:t>
                       </a:r>
-                      <a:endParaRPr lang="en-US" sz="1200" dirty="0"/>
+                      <a:endParaRPr lang="hr-HR" sz="1200" noProof="0" dirty="0"/>
                     </a:p>
                   </a:txBody>
                   <a:tcPr>
@@ -6094,14 +8710,14 @@
                         <a:buNone/>
                       </a:pPr>
                       <a:r>
-                        <a:rPr lang="en-US" sz="1200" dirty="0">
+                        <a:rPr lang="hr-HR" sz="1200" noProof="0" dirty="0">
                           <a:solidFill>
                             <a:srgbClr val="444444"/>
                           </a:solidFill>
                         </a:rPr>
                         <a:t>Prijava računalne prijevare</a:t>
                       </a:r>
-                      <a:endParaRPr lang="en-US" sz="1200" dirty="0"/>
+                      <a:endParaRPr lang="hr-HR" sz="1200" noProof="0" dirty="0"/>
                     </a:p>
                   </a:txBody>
                   <a:tcPr>
@@ -6155,14 +8771,14 @@
                         <a:buNone/>
                       </a:pPr>
                       <a:r>
-                        <a:rPr lang="en-US" sz="1200" dirty="0">
+                        <a:rPr lang="hr-HR" sz="1200" noProof="0" dirty="0">
                           <a:solidFill>
                             <a:srgbClr val="444444"/>
                           </a:solidFill>
                         </a:rPr>
                         <a:t>policija.gov.hr</a:t>
                       </a:r>
-                      <a:endParaRPr lang="en-US" sz="1200" dirty="0"/>
+                      <a:endParaRPr lang="hr-HR" sz="1200" noProof="0" dirty="0"/>
                     </a:p>
                   </a:txBody>
                   <a:tcPr>
@@ -6223,14 +8839,14 @@
                         <a:buNone/>
                       </a:pPr>
                       <a:r>
-                        <a:rPr lang="en-US" sz="1200" dirty="0">
+                        <a:rPr lang="hr-HR" sz="1200" noProof="0" dirty="0">
                           <a:solidFill>
                             <a:srgbClr val="444444"/>
                           </a:solidFill>
                         </a:rPr>
                         <a:t>Nacionalni CERT</a:t>
                       </a:r>
-                      <a:endParaRPr lang="en-US" sz="1200" dirty="0"/>
+                      <a:endParaRPr lang="hr-HR" sz="1200" noProof="0" dirty="0"/>
                     </a:p>
                   </a:txBody>
                   <a:tcPr>
@@ -6284,14 +8900,14 @@
                         <a:buNone/>
                       </a:pPr>
                       <a:r>
-                        <a:rPr lang="en-US" sz="1200" dirty="0">
+                        <a:rPr lang="hr-HR" sz="1200" noProof="0" dirty="0">
                           <a:solidFill>
                             <a:srgbClr val="444444"/>
                           </a:solidFill>
                         </a:rPr>
                         <a:t>Tehnička sigurnost, napadi na uređaje</a:t>
                       </a:r>
-                      <a:endParaRPr lang="en-US" sz="1200" dirty="0"/>
+                      <a:endParaRPr lang="hr-HR" sz="1200" noProof="0" dirty="0"/>
                     </a:p>
                   </a:txBody>
                   <a:tcPr>
@@ -6345,14 +8961,14 @@
                         <a:buNone/>
                       </a:pPr>
                       <a:r>
-                        <a:rPr lang="en-US" sz="1200" dirty="0">
+                        <a:rPr lang="hr-HR" sz="1200" noProof="0" dirty="0">
                           <a:solidFill>
                             <a:srgbClr val="444444"/>
                           </a:solidFill>
                         </a:rPr>
                         <a:t>cert.hr</a:t>
                       </a:r>
-                      <a:endParaRPr lang="en-US" sz="1200" dirty="0"/>
+                      <a:endParaRPr lang="hr-HR" sz="1200" noProof="0" dirty="0"/>
                     </a:p>
                   </a:txBody>
                   <a:tcPr>
@@ -6413,14 +9029,14 @@
                         <a:buNone/>
                       </a:pPr>
                       <a:r>
-                        <a:rPr lang="en-US" sz="1200" dirty="0">
+                        <a:rPr lang="hr-HR" sz="1200" noProof="0" dirty="0">
                           <a:solidFill>
                             <a:srgbClr val="444444"/>
                           </a:solidFill>
                         </a:rPr>
                         <a:t>AZOP</a:t>
                       </a:r>
-                      <a:endParaRPr lang="en-US" sz="1200" dirty="0"/>
+                      <a:endParaRPr lang="hr-HR" sz="1200" noProof="0" dirty="0"/>
                     </a:p>
                   </a:txBody>
                   <a:tcPr>
@@ -6474,14 +9090,14 @@
                         <a:buNone/>
                       </a:pPr>
                       <a:r>
-                        <a:rPr lang="en-US" sz="1200" dirty="0">
+                        <a:rPr lang="hr-HR" sz="1200" noProof="0" dirty="0">
                           <a:solidFill>
                             <a:srgbClr val="444444"/>
                           </a:solidFill>
                         </a:rPr>
                         <a:t>Zlouporaba osobnih podataka</a:t>
                       </a:r>
-                      <a:endParaRPr lang="en-US" sz="1200" dirty="0"/>
+                      <a:endParaRPr lang="hr-HR" sz="1200" noProof="0" dirty="0"/>
                     </a:p>
                   </a:txBody>
                   <a:tcPr>
@@ -6535,14 +9151,14 @@
                         <a:buNone/>
                       </a:pPr>
                       <a:r>
-                        <a:rPr lang="en-US" sz="1200" dirty="0">
+                        <a:rPr lang="hr-HR" sz="1200" noProof="0" dirty="0">
                           <a:solidFill>
                             <a:srgbClr val="444444"/>
                           </a:solidFill>
                         </a:rPr>
                         <a:t>azop.hr</a:t>
                       </a:r>
-                      <a:endParaRPr lang="en-US" sz="1200" dirty="0"/>
+                      <a:endParaRPr lang="hr-HR" sz="1200" noProof="0" dirty="0"/>
                     </a:p>
                   </a:txBody>
                   <a:tcPr>
@@ -6603,14 +9219,14 @@
                         <a:buNone/>
                       </a:pPr>
                       <a:r>
-                        <a:rPr lang="en-US" sz="1200" dirty="0">
+                        <a:rPr lang="hr-HR" sz="1200" noProof="0" dirty="0">
                           <a:solidFill>
                             <a:srgbClr val="444444"/>
                           </a:solidFill>
                         </a:rPr>
                         <a:t>Vaša banka</a:t>
                       </a:r>
-                      <a:endParaRPr lang="en-US" sz="1200" dirty="0"/>
+                      <a:endParaRPr lang="hr-HR" sz="1200" noProof="0" dirty="0"/>
                     </a:p>
                   </a:txBody>
                   <a:tcPr>
@@ -6664,14 +9280,14 @@
                         <a:buNone/>
                       </a:pPr>
                       <a:r>
-                        <a:rPr lang="en-US" sz="1200" dirty="0">
+                        <a:rPr lang="hr-HR" sz="1200" noProof="0" dirty="0">
                           <a:solidFill>
                             <a:srgbClr val="444444"/>
                           </a:solidFill>
                         </a:rPr>
                         <a:t>Sumnjive transakcije, zamrzavanje kartice</a:t>
                       </a:r>
-                      <a:endParaRPr lang="en-US" sz="1200" dirty="0"/>
+                      <a:endParaRPr lang="hr-HR" sz="1200" noProof="0" dirty="0"/>
                     </a:p>
                   </a:txBody>
                   <a:tcPr>
@@ -6725,14 +9341,14 @@
                         <a:buNone/>
                       </a:pPr>
                       <a:r>
-                        <a:rPr lang="en-US" sz="1200" dirty="0">
+                        <a:rPr lang="hr-HR" sz="1200" noProof="0" dirty="0">
                           <a:solidFill>
                             <a:srgbClr val="444444"/>
                           </a:solidFill>
                         </a:rPr>
                         <a:t>Broj s poleđine kartice</a:t>
                       </a:r>
-                      <a:endParaRPr lang="en-US" sz="1200" dirty="0"/>
+                      <a:endParaRPr lang="hr-HR" sz="1200" noProof="0" dirty="0"/>
                     </a:p>
                   </a:txBody>
                   <a:tcPr>
@@ -6793,14 +9409,14 @@
                         <a:buNone/>
                       </a:pPr>
                       <a:r>
-                        <a:rPr lang="en-US" sz="1200" dirty="0">
+                        <a:rPr lang="hr-HR" sz="1200" noProof="0" dirty="0">
                           <a:solidFill>
                             <a:srgbClr val="444444"/>
                           </a:solidFill>
                         </a:rPr>
                         <a:t>Faktograf.hr</a:t>
                       </a:r>
-                      <a:endParaRPr lang="en-US" sz="1200" dirty="0"/>
+                      <a:endParaRPr lang="hr-HR" sz="1200" noProof="0" dirty="0"/>
                     </a:p>
                   </a:txBody>
                   <a:tcPr>
@@ -6854,14 +9470,14 @@
                         <a:buNone/>
                       </a:pPr>
                       <a:r>
-                        <a:rPr lang="en-US" sz="1200" dirty="0">
+                        <a:rPr lang="hr-HR" sz="1200" noProof="0" dirty="0">
                           <a:solidFill>
                             <a:srgbClr val="444444"/>
                           </a:solidFill>
                         </a:rPr>
                         <a:t>Provjera lažnih vijesti</a:t>
                       </a:r>
-                      <a:endParaRPr lang="en-US" sz="1200" dirty="0"/>
+                      <a:endParaRPr lang="hr-HR" sz="1200" noProof="0" dirty="0"/>
                     </a:p>
                   </a:txBody>
                   <a:tcPr>
@@ -6915,14 +9531,14 @@
                         <a:buNone/>
                       </a:pPr>
                       <a:r>
-                        <a:rPr lang="en-US" sz="1200" dirty="0">
+                        <a:rPr lang="hr-HR" sz="1200" noProof="0" dirty="0">
                           <a:solidFill>
                             <a:srgbClr val="444444"/>
                           </a:solidFill>
                         </a:rPr>
                         <a:t>faktograf.hr</a:t>
                       </a:r>
-                      <a:endParaRPr lang="en-US" sz="1200" dirty="0"/>
+                      <a:endParaRPr lang="hr-HR" sz="1200" noProof="0" dirty="0"/>
                     </a:p>
                   </a:txBody>
                   <a:tcPr>
@@ -6983,14 +9599,14 @@
                         <a:buNone/>
                       </a:pPr>
                       <a:r>
-                        <a:rPr lang="en-US" sz="1200" dirty="0">
+                        <a:rPr lang="hr-HR" sz="1200" noProof="0" dirty="0">
                           <a:solidFill>
                             <a:srgbClr val="444444"/>
                           </a:solidFill>
                         </a:rPr>
                         <a:t>Sigurniji internet</a:t>
                       </a:r>
-                      <a:endParaRPr lang="en-US" sz="1200" dirty="0"/>
+                      <a:endParaRPr lang="hr-HR" sz="1200" noProof="0" dirty="0"/>
                     </a:p>
                   </a:txBody>
                   <a:tcPr>
@@ -7044,14 +9660,14 @@
                         <a:buNone/>
                       </a:pPr>
                       <a:r>
-                        <a:rPr lang="en-US" sz="1200" dirty="0">
+                        <a:rPr lang="hr-HR" sz="1200" noProof="0" dirty="0">
                           <a:solidFill>
                             <a:srgbClr val="444444"/>
                           </a:solidFill>
                         </a:rPr>
                         <a:t>Savjeti za zaštitu, posebno za starije i djecu</a:t>
                       </a:r>
-                      <a:endParaRPr lang="en-US" sz="1200" dirty="0"/>
+                      <a:endParaRPr lang="hr-HR" sz="1200" noProof="0" dirty="0"/>
                     </a:p>
                   </a:txBody>
                   <a:tcPr>
@@ -7105,14 +9721,14 @@
                         <a:buNone/>
                       </a:pPr>
                       <a:r>
-                        <a:rPr lang="en-US" sz="1200" dirty="0">
+                        <a:rPr lang="hr-HR" sz="1200" noProof="0" dirty="0">
                           <a:solidFill>
                             <a:srgbClr val="444444"/>
                           </a:solidFill>
                         </a:rPr>
                         <a:t>sigurnijiinternet.hr</a:t>
                       </a:r>
-                      <a:endParaRPr lang="en-US" sz="1200" dirty="0"/>
+                      <a:endParaRPr lang="hr-HR" sz="1200" noProof="0" dirty="0"/>
                     </a:p>
                   </a:txBody>
                   <a:tcPr>
@@ -7175,7 +9791,7 @@
 </p:sld>
 </file>
 
-<file path=ppt/slides/slide16.xml><?xml version="1.0" encoding="utf-8"?>
+<file path=ppt/slides/slide17.xml><?xml version="1.0" encoding="utf-8"?>
 <p:sld xmlns:a="http://schemas.openxmlformats.org/drawingml/2006/main" xmlns:r="http://schemas.openxmlformats.org/officeDocument/2006/relationships" xmlns:p="http://schemas.openxmlformats.org/presentationml/2006/main">
   <p:cSld name="Slide 14">
     <p:bg>
@@ -7228,7 +9844,7 @@
           <a:bodyPr/>
           <a:lstStyle/>
           <a:p>
-            <a:endParaRPr lang="en-US"/>
+            <a:endParaRPr lang="hr-HR" noProof="0" dirty="0"/>
           </a:p>
         </p:txBody>
       </p:sp>
@@ -7257,14 +9873,14 @@
               <a:buNone/>
             </a:pPr>
             <a:r>
-              <a:rPr lang="en-US" sz="2000" b="1" dirty="0">
+              <a:rPr lang="hr-HR" sz="2000" b="1" noProof="0" dirty="0">
                 <a:solidFill>
                   <a:srgbClr val="FFFFFF"/>
                 </a:solidFill>
               </a:rPr>
               <a:t>Moja digitalna sigurnost — Checklista za ponijeti kući</a:t>
             </a:r>
-            <a:endParaRPr lang="en-US" sz="2000" dirty="0"/>
+            <a:endParaRPr lang="hr-HR" sz="2000" noProof="0" dirty="0"/>
           </a:p>
         </p:txBody>
       </p:sp>
@@ -7298,7 +9914,7 @@
           <a:bodyPr/>
           <a:lstStyle/>
           <a:p>
-            <a:endParaRPr lang="en-US"/>
+            <a:endParaRPr lang="hr-HR" noProof="0" dirty="0"/>
           </a:p>
         </p:txBody>
       </p:sp>
@@ -7330,7 +9946,7 @@
           <a:bodyPr/>
           <a:lstStyle/>
           <a:p>
-            <a:endParaRPr lang="en-US"/>
+            <a:endParaRPr lang="hr-HR" noProof="0" dirty="0"/>
           </a:p>
         </p:txBody>
       </p:sp>
@@ -7359,14 +9975,14 @@
               <a:buNone/>
             </a:pPr>
             <a:r>
-              <a:rPr lang="en-US" sz="1300" b="1" dirty="0">
+              <a:rPr lang="hr-HR" sz="1300" b="1" noProof="0" dirty="0">
                 <a:solidFill>
                   <a:srgbClr val="FFFFFF"/>
                 </a:solidFill>
               </a:rPr>
               <a:t>Tjedni pregled</a:t>
             </a:r>
-            <a:endParaRPr lang="en-US" sz="1300" dirty="0"/>
+            <a:endParaRPr lang="hr-HR" sz="1300" noProof="0" dirty="0"/>
           </a:p>
         </p:txBody>
       </p:sp>
@@ -7399,14 +10015,14 @@
               <a:buChar char="•"/>
             </a:pPr>
             <a:r>
-              <a:rPr lang="en-US" sz="1300" dirty="0">
+              <a:rPr lang="hr-HR" sz="1300" noProof="0" dirty="0">
                 <a:solidFill>
                   <a:srgbClr val="444444"/>
                 </a:solidFill>
               </a:rPr>
               <a:t>☐  Provjerio/la sam transakcije na bankovnom računu</a:t>
             </a:r>
-            <a:endParaRPr lang="en-US" sz="1300" dirty="0"/>
+            <a:endParaRPr lang="hr-HR" sz="1300" noProof="0" dirty="0"/>
           </a:p>
           <a:p>
             <a:pPr marL="342900" indent="-342900">
@@ -7417,14 +10033,14 @@
               <a:buChar char="•"/>
             </a:pPr>
             <a:r>
-              <a:rPr lang="en-US" sz="1300" dirty="0">
+              <a:rPr lang="hr-HR" sz="1300" noProof="0" dirty="0">
                 <a:solidFill>
                   <a:srgbClr val="444444"/>
                 </a:solidFill>
               </a:rPr>
               <a:t>☐  Nisam kliknuo/la na sumnjive linkove u porukama</a:t>
             </a:r>
-            <a:endParaRPr lang="en-US" sz="1300" dirty="0"/>
+            <a:endParaRPr lang="hr-HR" sz="1300" noProof="0" dirty="0"/>
           </a:p>
           <a:p>
             <a:pPr marL="342900" indent="-342900">
@@ -7435,14 +10051,14 @@
               <a:buChar char="•"/>
             </a:pPr>
             <a:r>
-              <a:rPr lang="en-US" sz="1300" dirty="0">
+              <a:rPr lang="hr-HR" sz="1300" noProof="0" dirty="0">
                 <a:solidFill>
                   <a:srgbClr val="444444"/>
                 </a:solidFill>
               </a:rPr>
               <a:t>☐  Nisam dijelio/la osobne podatke s nepoznatima</a:t>
             </a:r>
-            <a:endParaRPr lang="en-US" sz="1300" dirty="0"/>
+            <a:endParaRPr lang="hr-HR" sz="1300" noProof="0" dirty="0"/>
           </a:p>
           <a:p>
             <a:pPr marL="342900" indent="-342900">
@@ -7453,14 +10069,14 @@
               <a:buChar char="•"/>
             </a:pPr>
             <a:r>
-              <a:rPr lang="en-US" sz="1300" dirty="0">
+              <a:rPr lang="hr-HR" sz="1300" noProof="0" dirty="0">
                 <a:solidFill>
                   <a:srgbClr val="444444"/>
                 </a:solidFill>
               </a:rPr>
               <a:t>☐  Nisam prosljeđivao/la poruke bez provjere</a:t>
             </a:r>
-            <a:endParaRPr lang="en-US" sz="1300" dirty="0"/>
+            <a:endParaRPr lang="hr-HR" sz="1300" noProof="0" dirty="0"/>
           </a:p>
           <a:p>
             <a:pPr marL="342900" indent="-342900">
@@ -7471,14 +10087,14 @@
               <a:buChar char="•"/>
             </a:pPr>
             <a:r>
-              <a:rPr lang="en-US" sz="1300" dirty="0">
-                <a:solidFill>
-                  <a:srgbClr val="444444"/>
-                </a:solidFill>
-              </a:rPr>
-              <a:t>☐  Na telefonu imam zaključani zaslon (PIN ili otisak)</a:t>
-            </a:r>
-            <a:endParaRPr lang="en-US" sz="1300" dirty="0"/>
+              <a:rPr lang="hr-HR" sz="1300" noProof="0" dirty="0">
+                <a:solidFill>
+                  <a:srgbClr val="444444"/>
+                </a:solidFill>
+              </a:rPr>
+              <a:t>☐  Na telefonu imam zaključani zaslon</a:t>
+            </a:r>
+            <a:endParaRPr lang="hr-HR" sz="1300" noProof="0" dirty="0"/>
           </a:p>
         </p:txBody>
       </p:sp>
@@ -7512,7 +10128,7 @@
           <a:bodyPr/>
           <a:lstStyle/>
           <a:p>
-            <a:endParaRPr lang="en-US"/>
+            <a:endParaRPr lang="hr-HR" noProof="0" dirty="0"/>
           </a:p>
         </p:txBody>
       </p:sp>
@@ -7544,7 +10160,7 @@
           <a:bodyPr/>
           <a:lstStyle/>
           <a:p>
-            <a:endParaRPr lang="en-US"/>
+            <a:endParaRPr lang="hr-HR" noProof="0" dirty="0"/>
           </a:p>
         </p:txBody>
       </p:sp>
@@ -7573,14 +10189,14 @@
               <a:buNone/>
             </a:pPr>
             <a:r>
-              <a:rPr lang="en-US" sz="1300" b="1" dirty="0">
+              <a:rPr lang="hr-HR" sz="1300" b="1" noProof="0" dirty="0">
                 <a:solidFill>
                   <a:srgbClr val="FFFFFF"/>
                 </a:solidFill>
               </a:rPr>
               <a:t>Jednokratna provjera: imam li osnove?</a:t>
             </a:r>
-            <a:endParaRPr lang="en-US" sz="1300" dirty="0"/>
+            <a:endParaRPr lang="hr-HR" sz="1300" noProof="0" dirty="0"/>
           </a:p>
         </p:txBody>
       </p:sp>
@@ -7613,14 +10229,14 @@
               <a:buChar char="•"/>
             </a:pPr>
             <a:r>
-              <a:rPr lang="en-US" sz="1300" dirty="0">
+              <a:rPr lang="hr-HR" sz="1300" noProof="0" dirty="0">
                 <a:solidFill>
                   <a:srgbClr val="444444"/>
                 </a:solidFill>
               </a:rPr>
               <a:t>☐  Imam instaliran antivirusni program (Windows Defender ili drugi)</a:t>
             </a:r>
-            <a:endParaRPr lang="en-US" sz="1300" dirty="0"/>
+            <a:endParaRPr lang="hr-HR" sz="1300" noProof="0" dirty="0"/>
           </a:p>
           <a:p>
             <a:pPr marL="342900" indent="-342900">
@@ -7631,14 +10247,14 @@
               <a:buChar char="•"/>
             </a:pPr>
             <a:r>
-              <a:rPr lang="en-US" sz="1300" dirty="0">
+              <a:rPr lang="hr-HR" sz="1300" noProof="0" dirty="0">
                 <a:solidFill>
                   <a:srgbClr val="444444"/>
                 </a:solidFill>
               </a:rPr>
               <a:t>☐  Imam sigurnosnu kopiju fotografija i dokumenata</a:t>
             </a:r>
-            <a:endParaRPr lang="en-US" sz="1300" dirty="0"/>
+            <a:endParaRPr lang="hr-HR" sz="1300" noProof="0" dirty="0"/>
           </a:p>
           <a:p>
             <a:pPr marL="342900" indent="-342900">
@@ -7649,14 +10265,14 @@
               <a:buChar char="•"/>
             </a:pPr>
             <a:r>
-              <a:rPr lang="en-US" sz="1300" dirty="0">
+              <a:rPr lang="hr-HR" sz="1300" noProof="0" dirty="0">
                 <a:solidFill>
                   <a:srgbClr val="444444"/>
                 </a:solidFill>
               </a:rPr>
               <a:t>☐  Koristim 2FA za e-mail i bankovni račun</a:t>
             </a:r>
-            <a:endParaRPr lang="en-US" sz="1300" dirty="0"/>
+            <a:endParaRPr lang="hr-HR" sz="1300" noProof="0" dirty="0"/>
           </a:p>
           <a:p>
             <a:pPr marL="342900" indent="-342900">
@@ -7667,14 +10283,14 @@
               <a:buChar char="•"/>
             </a:pPr>
             <a:r>
-              <a:rPr lang="en-US" sz="1300" dirty="0">
+              <a:rPr lang="hr-HR" sz="1300" noProof="0" dirty="0">
                 <a:solidFill>
                   <a:srgbClr val="444444"/>
                 </a:solidFill>
               </a:rPr>
               <a:t>☐  Lozinka na kućnom Wi-Fiju nije zadana ('admin' ili '12345678')</a:t>
             </a:r>
-            <a:endParaRPr lang="en-US" sz="1300" dirty="0"/>
+            <a:endParaRPr lang="hr-HR" sz="1300" noProof="0" dirty="0"/>
           </a:p>
           <a:p>
             <a:pPr marL="342900" indent="-342900">
@@ -7685,14 +10301,14 @@
               <a:buChar char="•"/>
             </a:pPr>
             <a:r>
-              <a:rPr lang="en-US" sz="1300" dirty="0">
+              <a:rPr lang="hr-HR" sz="1300" noProof="0" dirty="0">
                 <a:solidFill>
                   <a:srgbClr val="444444"/>
                 </a:solidFill>
               </a:rPr>
               <a:t>☐  Profil na Facebooku postavljen je na 'Samo prijatelji'</a:t>
             </a:r>
-            <a:endParaRPr lang="en-US" sz="1300" dirty="0"/>
+            <a:endParaRPr lang="hr-HR" sz="1300" noProof="0" dirty="0"/>
           </a:p>
           <a:p>
             <a:pPr marL="342900" indent="-342900">
@@ -7703,14 +10319,14 @@
               <a:buChar char="•"/>
             </a:pPr>
             <a:r>
-              <a:rPr lang="en-US" sz="1300" dirty="0">
+              <a:rPr lang="hr-HR" sz="1300" noProof="0" dirty="0">
                 <a:solidFill>
                   <a:srgbClr val="444444"/>
                 </a:solidFill>
               </a:rPr>
               <a:t>☐  Znam broj za prijavu prevare: 112 i broj banke s kartice</a:t>
             </a:r>
-            <a:endParaRPr lang="en-US" sz="1300" dirty="0"/>
+            <a:endParaRPr lang="hr-HR" sz="1300" noProof="0" dirty="0"/>
           </a:p>
         </p:txBody>
       </p:sp>
@@ -7722,7 +10338,7 @@
 </p:sld>
 </file>
 
-<file path=ppt/slides/slide17.xml><?xml version="1.0" encoding="utf-8"?>
+<file path=ppt/slides/slide18.xml><?xml version="1.0" encoding="utf-8"?>
 <p:sld xmlns:a="http://schemas.openxmlformats.org/drawingml/2006/main" xmlns:r="http://schemas.openxmlformats.org/officeDocument/2006/relationships" xmlns:p="http://schemas.openxmlformats.org/presentationml/2006/main">
   <p:cSld name="Slide 15">
     <p:bg>
@@ -7775,7 +10391,7 @@
           <a:bodyPr/>
           <a:lstStyle/>
           <a:p>
-            <a:endParaRPr lang="en-US"/>
+            <a:endParaRPr lang="hr-HR" noProof="0" dirty="0"/>
           </a:p>
         </p:txBody>
       </p:sp>
@@ -7804,14 +10420,14 @@
               <a:buNone/>
             </a:pPr>
             <a:r>
-              <a:rPr lang="en-US" sz="2600" b="1" dirty="0">
+              <a:rPr lang="hr-HR" sz="2600" b="1" noProof="0" dirty="0">
                 <a:solidFill>
                   <a:srgbClr val="CC0000"/>
                 </a:solidFill>
               </a:rPr>
               <a:t>10 pravila digitalne higijene</a:t>
             </a:r>
-            <a:endParaRPr lang="en-US" sz="2600" dirty="0"/>
+            <a:endParaRPr lang="hr-HR" sz="2600" noProof="0" dirty="0"/>
           </a:p>
         </p:txBody>
       </p:sp>
@@ -7843,14 +10459,14 @@
               <a:buNone/>
             </a:pPr>
             <a:r>
-              <a:rPr lang="en-US" sz="1300" dirty="0">
+              <a:rPr lang="hr-HR" sz="1300" noProof="0" dirty="0">
                 <a:solidFill>
                   <a:srgbClr val="DDDDDD"/>
                 </a:solidFill>
               </a:rPr>
               <a:t>1.  Nikad ne klikam na linkove u sumnjivim porukama.</a:t>
             </a:r>
-            <a:endParaRPr lang="en-US" sz="1300" dirty="0"/>
+            <a:endParaRPr lang="hr-HR" sz="1300" noProof="0" dirty="0"/>
           </a:p>
           <a:p>
             <a:pPr marL="0" indent="0">
@@ -7860,14 +10476,14 @@
               <a:buNone/>
             </a:pPr>
             <a:r>
-              <a:rPr lang="en-US" sz="1300" dirty="0">
+              <a:rPr lang="hr-HR" sz="1300" noProof="0" dirty="0">
                 <a:solidFill>
                   <a:srgbClr val="DDDDDD"/>
                 </a:solidFill>
               </a:rPr>
               <a:t>2.  Banka me nikad ne traži PIN, lozinku ni cijeli broj kartice.</a:t>
             </a:r>
-            <a:endParaRPr lang="en-US" sz="1300" dirty="0"/>
+            <a:endParaRPr lang="hr-HR" sz="1300" noProof="0" dirty="0"/>
           </a:p>
           <a:p>
             <a:pPr marL="0" indent="0">
@@ -7877,14 +10493,14 @@
               <a:buNone/>
             </a:pPr>
             <a:r>
-              <a:rPr lang="en-US" sz="1300" dirty="0">
+              <a:rPr lang="hr-HR" sz="1300" noProof="0" dirty="0">
                 <a:solidFill>
                   <a:srgbClr val="DDDDDD"/>
                 </a:solidFill>
               </a:rPr>
               <a:t>3.  Svaki račun ima svoju lozinku.</a:t>
             </a:r>
-            <a:endParaRPr lang="en-US" sz="1300" dirty="0"/>
+            <a:endParaRPr lang="hr-HR" sz="1300" noProof="0" dirty="0"/>
           </a:p>
           <a:p>
             <a:pPr marL="0" indent="0">
@@ -7894,14 +10510,14 @@
               <a:buNone/>
             </a:pPr>
             <a:r>
-              <a:rPr lang="en-US" sz="1300" dirty="0">
+              <a:rPr lang="hr-HR" sz="1300" noProof="0" dirty="0">
                 <a:solidFill>
                   <a:srgbClr val="DDDDDD"/>
                 </a:solidFill>
               </a:rPr>
               <a:t>4.  Na javnom Wi-Fiju ne provjeravam bankovni račun.</a:t>
             </a:r>
-            <a:endParaRPr lang="en-US" sz="1300" dirty="0"/>
+            <a:endParaRPr lang="hr-HR" sz="1300" noProof="0" dirty="0"/>
           </a:p>
           <a:p>
             <a:pPr marL="0" indent="0">
@@ -7911,14 +10527,14 @@
               <a:buNone/>
             </a:pPr>
             <a:r>
-              <a:rPr lang="en-US" sz="1300" dirty="0">
+              <a:rPr lang="hr-HR" sz="1300" noProof="0" dirty="0">
                 <a:solidFill>
                   <a:srgbClr val="DDDDDD"/>
                 </a:solidFill>
               </a:rPr>
               <a:t>5.  Ažuriranja instaliram redovito.</a:t>
             </a:r>
-            <a:endParaRPr lang="en-US" sz="1300" dirty="0"/>
+            <a:endParaRPr lang="hr-HR" sz="1300" noProof="0" dirty="0"/>
           </a:p>
           <a:p>
             <a:pPr marL="0" indent="0">
@@ -7928,14 +10544,14 @@
               <a:buNone/>
             </a:pPr>
             <a:r>
-              <a:rPr lang="en-US" sz="1300" dirty="0">
+              <a:rPr lang="hr-HR" sz="1300" noProof="0" dirty="0">
                 <a:solidFill>
                   <a:srgbClr val="DDDDDD"/>
                 </a:solidFill>
               </a:rPr>
               <a:t>6.  Sigurnosnu kopiju fotografija radim barem jednom tjedno.</a:t>
             </a:r>
-            <a:endParaRPr lang="en-US" sz="1300" dirty="0"/>
+            <a:endParaRPr lang="hr-HR" sz="1300" noProof="0" dirty="0"/>
           </a:p>
           <a:p>
             <a:pPr marL="0" indent="0">
@@ -7945,14 +10561,14 @@
               <a:buNone/>
             </a:pPr>
             <a:r>
-              <a:rPr lang="en-US" sz="1300" dirty="0">
+              <a:rPr lang="hr-HR" sz="1300" noProof="0" dirty="0">
                 <a:solidFill>
                   <a:srgbClr val="DDDDDD"/>
                 </a:solidFill>
               </a:rPr>
               <a:t>7.  Dvofaktornu autentikaciju koristim gdje god je moguće.</a:t>
             </a:r>
-            <a:endParaRPr lang="en-US" sz="1300" dirty="0"/>
+            <a:endParaRPr lang="hr-HR" sz="1300" noProof="0" dirty="0"/>
           </a:p>
           <a:p>
             <a:pPr marL="0" indent="0">
@@ -7962,14 +10578,14 @@
               <a:buNone/>
             </a:pPr>
             <a:r>
-              <a:rPr lang="en-US" sz="1300" dirty="0">
+              <a:rPr lang="hr-HR" sz="1300" noProof="0" dirty="0">
                 <a:solidFill>
                   <a:srgbClr val="DDDDDD"/>
                 </a:solidFill>
               </a:rPr>
               <a:t>8.  Neočekivanu 'nagradu' odmah sumnjičim.</a:t>
             </a:r>
-            <a:endParaRPr lang="en-US" sz="1300" dirty="0"/>
+            <a:endParaRPr lang="hr-HR" sz="1300" noProof="0" dirty="0"/>
           </a:p>
           <a:p>
             <a:pPr marL="0" indent="0">
@@ -7979,14 +10595,14 @@
               <a:buNone/>
             </a:pPr>
             <a:r>
-              <a:rPr lang="en-US" sz="1300" dirty="0">
+              <a:rPr lang="hr-HR" sz="1300" noProof="0" dirty="0">
                 <a:solidFill>
                   <a:srgbClr val="DDDDDD"/>
                 </a:solidFill>
               </a:rPr>
               <a:t>9.  Strancu na internetu ne dajem OIB, broj kartice ni adresu.</a:t>
             </a:r>
-            <a:endParaRPr lang="en-US" sz="1300" dirty="0"/>
+            <a:endParaRPr lang="hr-HR" sz="1300" noProof="0" dirty="0"/>
           </a:p>
           <a:p>
             <a:pPr marL="0" indent="0">
@@ -7996,14 +10612,14 @@
               <a:buNone/>
             </a:pPr>
             <a:r>
-              <a:rPr lang="en-US" sz="1300" dirty="0">
+              <a:rPr lang="hr-HR" sz="1300" noProof="0" dirty="0">
                 <a:solidFill>
                   <a:srgbClr val="DDDDDD"/>
                 </a:solidFill>
               </a:rPr>
               <a:t>10. U slučaju sumnje: zatvaram, zovem banku ili policiju.</a:t>
             </a:r>
-            <a:endParaRPr lang="en-US" sz="1300" dirty="0"/>
+            <a:endParaRPr lang="hr-HR" sz="1300" noProof="0" dirty="0"/>
           </a:p>
         </p:txBody>
       </p:sp>
@@ -8032,14 +10648,14 @@
               <a:buNone/>
             </a:pPr>
             <a:r>
-              <a:rPr lang="en-US" sz="1100" i="1" dirty="0">
+              <a:rPr lang="hr-HR" sz="1100" i="1" noProof="0" dirty="0">
                 <a:solidFill>
                   <a:srgbClr val="888888"/>
                 </a:solidFill>
               </a:rPr>
               <a:t>Znanje je najjača lozinka.</a:t>
             </a:r>
-            <a:endParaRPr lang="en-US" sz="1100" dirty="0"/>
+            <a:endParaRPr lang="hr-HR" sz="1100" noProof="0" dirty="0"/>
           </a:p>
         </p:txBody>
       </p:sp>
@@ -8092,14 +10708,14 @@
               <a:buNone/>
             </a:pPr>
             <a:r>
-              <a:rPr lang="en-US" sz="2800" b="1" dirty="0">
+              <a:rPr lang="hr-HR" sz="2800" b="1" noProof="0" dirty="0">
                 <a:solidFill>
                   <a:srgbClr val="FFFFFF"/>
                 </a:solidFill>
               </a:rPr>
               <a:t>Pitanja?</a:t>
             </a:r>
-            <a:endParaRPr lang="en-US" sz="2800" dirty="0"/>
+            <a:endParaRPr lang="hr-HR" sz="2800" noProof="0" dirty="0"/>
           </a:p>
         </p:txBody>
       </p:sp>
@@ -8128,14 +10744,14 @@
               <a:buNone/>
             </a:pPr>
             <a:r>
-              <a:rPr lang="en-US" sz="900" dirty="0">
+              <a:rPr lang="hr-HR" sz="900" noProof="0" dirty="0">
                 <a:solidFill>
                   <a:srgbClr val="555555"/>
                 </a:solidFill>
               </a:rPr>
               <a:t>cert.hr  ·  policija.gov.hr  ·  azop.hr  ·  faktograf.hr  ·  sigurnijiinternet.hr</a:t>
             </a:r>
-            <a:endParaRPr lang="en-US" sz="900" dirty="0"/>
+            <a:endParaRPr lang="hr-HR" sz="900" noProof="0" dirty="0"/>
           </a:p>
         </p:txBody>
       </p:sp>
@@ -8200,7 +10816,7 @@
           <a:bodyPr/>
           <a:lstStyle/>
           <a:p>
-            <a:endParaRPr lang="en-US"/>
+            <a:endParaRPr lang="hr-HR" noProof="0" dirty="0"/>
           </a:p>
         </p:txBody>
       </p:sp>
@@ -8229,14 +10845,14 @@
               <a:buNone/>
             </a:pPr>
             <a:r>
-              <a:rPr lang="en-US" sz="2000" b="1" dirty="0">
+              <a:rPr lang="hr-HR" sz="2000" b="1" noProof="0" dirty="0">
                 <a:solidFill>
                   <a:srgbClr val="FFFFFF"/>
                 </a:solidFill>
               </a:rPr>
               <a:t>Zašto je kibernetička sigurnost hitna tema?</a:t>
             </a:r>
-            <a:endParaRPr lang="en-US" sz="2000" dirty="0"/>
+            <a:endParaRPr lang="hr-HR" sz="2000" noProof="0" dirty="0"/>
           </a:p>
         </p:txBody>
       </p:sp>
@@ -8269,14 +10885,14 @@
               <a:buChar char="•"/>
             </a:pPr>
             <a:r>
-              <a:rPr lang="en-US" sz="1400" dirty="0">
+              <a:rPr lang="hr-HR" sz="1400" noProof="0" dirty="0">
                 <a:solidFill>
                   <a:srgbClr val="444444"/>
                 </a:solidFill>
               </a:rPr>
               <a:t>Internet je sastavni dio svakodnevnog života — plaćamo račune, komuniciramo s liječnicima, razgovaramo s djecom.</a:t>
             </a:r>
-            <a:endParaRPr lang="en-US" sz="1400" dirty="0"/>
+            <a:endParaRPr lang="hr-HR" sz="1400" noProof="0" dirty="0"/>
           </a:p>
           <a:p>
             <a:pPr marL="342900" indent="-342900">
@@ -8287,14 +10903,14 @@
               <a:buChar char="•"/>
             </a:pPr>
             <a:r>
-              <a:rPr lang="en-US" sz="1400" dirty="0">
+              <a:rPr lang="hr-HR" sz="1400" noProof="0" dirty="0">
                 <a:solidFill>
                   <a:srgbClr val="444444"/>
                 </a:solidFill>
               </a:rPr>
               <a:t>Kriminalci koriste internet jednako kao što su nekad koristili telefon ili poštu — samo su brži i anonimni.</a:t>
             </a:r>
-            <a:endParaRPr lang="en-US" sz="1400" dirty="0"/>
+            <a:endParaRPr lang="hr-HR" sz="1400" noProof="0" dirty="0"/>
           </a:p>
           <a:p>
             <a:pPr marL="342900" indent="-342900">
@@ -8305,14 +10921,14 @@
               <a:buChar char="•"/>
             </a:pPr>
             <a:r>
-              <a:rPr lang="en-US" sz="1400" dirty="0">
+              <a:rPr lang="hr-HR" sz="1400" noProof="0" dirty="0">
                 <a:solidFill>
                   <a:srgbClr val="444444"/>
                 </a:solidFill>
               </a:rPr>
               <a:t>Ključna poruka: nitko nije presmetan da postane žrtva. Znanje je jedina zaštita.</a:t>
             </a:r>
-            <a:endParaRPr lang="en-US" sz="1400" dirty="0"/>
+            <a:endParaRPr lang="hr-HR" sz="1400" noProof="0" dirty="0"/>
           </a:p>
         </p:txBody>
       </p:sp>
@@ -8346,7 +10962,7 @@
           <a:bodyPr/>
           <a:lstStyle/>
           <a:p>
-            <a:endParaRPr lang="en-US"/>
+            <a:endParaRPr lang="hr-HR" noProof="0" dirty="0"/>
           </a:p>
         </p:txBody>
       </p:sp>
@@ -8378,7 +10994,7 @@
           <a:bodyPr/>
           <a:lstStyle/>
           <a:p>
-            <a:endParaRPr lang="en-US"/>
+            <a:endParaRPr lang="hr-HR" noProof="0" dirty="0"/>
           </a:p>
         </p:txBody>
       </p:sp>
@@ -8407,14 +11023,14 @@
               <a:buNone/>
             </a:pPr>
             <a:r>
-              <a:rPr lang="en-US" sz="1200" b="1" dirty="0">
+              <a:rPr lang="hr-HR" sz="1200" b="1" noProof="0" dirty="0">
                 <a:solidFill>
                   <a:srgbClr val="FFFFFF"/>
                 </a:solidFill>
               </a:rPr>
               <a:t>Hrvatska 2024. — MUP RH</a:t>
             </a:r>
-            <a:endParaRPr lang="en-US" sz="1200" dirty="0"/>
+            <a:endParaRPr lang="hr-HR" sz="1200" noProof="0" dirty="0"/>
           </a:p>
         </p:txBody>
       </p:sp>
@@ -8447,14 +11063,14 @@
               <a:buChar char="•"/>
             </a:pPr>
             <a:r>
-              <a:rPr lang="en-US" sz="1200" dirty="0">
+              <a:rPr lang="hr-HR" sz="1200" noProof="0" dirty="0">
                 <a:solidFill>
                   <a:srgbClr val="444444"/>
                 </a:solidFill>
               </a:rPr>
               <a:t>2.167 kibernetičkih kaznenih djela — porast 21,7% u godinu dana</a:t>
             </a:r>
-            <a:endParaRPr lang="en-US" sz="1200" dirty="0"/>
+            <a:endParaRPr lang="hr-HR" sz="1200" noProof="0" dirty="0"/>
           </a:p>
           <a:p>
             <a:pPr marL="342900" indent="-342900">
@@ -8465,14 +11081,14 @@
               <a:buChar char="•"/>
             </a:pPr>
             <a:r>
-              <a:rPr lang="en-US" sz="1200" dirty="0">
+              <a:rPr lang="hr-HR" sz="1200" noProof="0" dirty="0">
                 <a:solidFill>
                   <a:srgbClr val="444444"/>
                 </a:solidFill>
               </a:rPr>
               <a:t>Financijska šteta: s 11,1 na 17 milijuna eura u jednoj godini</a:t>
             </a:r>
-            <a:endParaRPr lang="en-US" sz="1200" dirty="0"/>
+            <a:endParaRPr lang="hr-HR" sz="1200" noProof="0" dirty="0"/>
           </a:p>
           <a:p>
             <a:pPr marL="342900" indent="-342900">
@@ -8483,14 +11099,14 @@
               <a:buChar char="•"/>
             </a:pPr>
             <a:r>
-              <a:rPr lang="en-US" sz="1200" dirty="0">
+              <a:rPr lang="hr-HR" sz="1200" noProof="0" dirty="0">
                 <a:solidFill>
                   <a:srgbClr val="444444"/>
                 </a:solidFill>
               </a:rPr>
               <a:t>Splitsko-dalmatinska županija: 287 kibernetičkih kaznenih djela, od čega 256 računalnih prijevara</a:t>
             </a:r>
-            <a:endParaRPr lang="en-US" sz="1200" dirty="0"/>
+            <a:endParaRPr lang="hr-HR" sz="1200" noProof="0" dirty="0"/>
           </a:p>
         </p:txBody>
       </p:sp>
@@ -8524,7 +11140,7 @@
           <a:bodyPr/>
           <a:lstStyle/>
           <a:p>
-            <a:endParaRPr lang="en-US"/>
+            <a:endParaRPr lang="hr-HR" noProof="0" dirty="0"/>
           </a:p>
         </p:txBody>
       </p:sp>
@@ -8577,28 +11193,28 @@
               <a:buNone/>
             </a:pPr>
             <a:r>
-              <a:rPr lang="en-US" sz="1800" b="1" dirty="0">
+              <a:rPr lang="hr-HR" sz="1800" b="1" noProof="0" dirty="0">
                 <a:solidFill>
                   <a:srgbClr val="FFFFFF"/>
                 </a:solidFill>
               </a:rPr>
               <a:t>Znanje je</a:t>
             </a:r>
-            <a:endParaRPr lang="en-US" sz="1800" dirty="0"/>
+            <a:endParaRPr lang="hr-HR" sz="1800" noProof="0" dirty="0"/>
           </a:p>
           <a:p>
             <a:pPr marL="0" indent="0" algn="ctr">
               <a:buNone/>
             </a:pPr>
             <a:r>
-              <a:rPr lang="en-US" sz="1800" b="1" dirty="0">
+              <a:rPr lang="hr-HR" sz="1800" b="1" noProof="0" dirty="0">
                 <a:solidFill>
                   <a:srgbClr val="FFFFFF"/>
                 </a:solidFill>
               </a:rPr>
               <a:t>jedina zaštita.</a:t>
             </a:r>
-            <a:endParaRPr lang="en-US" sz="1800" dirty="0"/>
+            <a:endParaRPr lang="hr-HR" sz="1800" noProof="0" dirty="0"/>
           </a:p>
         </p:txBody>
       </p:sp>
@@ -8647,8 +11263,8 @@
         </p:nvSpPr>
         <p:spPr>
           <a:xfrm>
-            <a:off x="617674" y="3155270"/>
-            <a:ext cx="7908651" cy="1183558"/>
+            <a:off x="320040" y="1863897"/>
+            <a:ext cx="8503920" cy="1466158"/>
           </a:xfrm>
           <a:prstGeom prst="rect">
             <a:avLst/>
@@ -8667,7 +11283,7 @@
           <a:bodyPr/>
           <a:lstStyle/>
           <a:p>
-            <a:endParaRPr lang="en-US">
+            <a:endParaRPr lang="hr-HR" noProof="0" dirty="0">
               <a:solidFill>
                 <a:schemeClr val="tx1"/>
               </a:solidFill>
@@ -8709,7 +11325,7 @@
           <a:bodyPr/>
           <a:lstStyle/>
           <a:p>
-            <a:endParaRPr lang="en-US"/>
+            <a:endParaRPr lang="hr-HR" noProof="0" dirty="0"/>
           </a:p>
         </p:txBody>
       </p:sp>
@@ -8744,54 +11360,14 @@
               <a:buNone/>
             </a:pPr>
             <a:r>
-              <a:rPr lang="en-US" sz="2000" b="1" dirty="0" err="1">
+              <a:rPr lang="hr-HR" sz="2000" b="1" noProof="0" dirty="0">
                 <a:solidFill>
                   <a:srgbClr val="FFFFFF"/>
                 </a:solidFill>
               </a:rPr>
-              <a:t>Što</a:t>
-            </a:r>
-            <a:r>
-              <a:rPr lang="en-US" sz="2000" b="1" dirty="0">
-                <a:solidFill>
-                  <a:srgbClr val="FFFFFF"/>
-                </a:solidFill>
-              </a:rPr>
-              <a:t> je </a:t>
-            </a:r>
-            <a:r>
-              <a:rPr lang="en-US" sz="2000" b="1" dirty="0" err="1">
-                <a:solidFill>
-                  <a:srgbClr val="FFFFFF"/>
-                </a:solidFill>
-              </a:rPr>
-              <a:t>kibernetička</a:t>
-            </a:r>
-            <a:r>
-              <a:rPr lang="en-US" sz="2000" b="1" dirty="0">
-                <a:solidFill>
-                  <a:srgbClr val="FFFFFF"/>
-                </a:solidFill>
-              </a:rPr>
-              <a:t> </a:t>
-            </a:r>
-            <a:r>
-              <a:rPr lang="en-US" sz="2000" b="1" dirty="0" err="1">
-                <a:solidFill>
-                  <a:srgbClr val="FFFFFF"/>
-                </a:solidFill>
-              </a:rPr>
-              <a:t>sigurnost</a:t>
-            </a:r>
-            <a:r>
-              <a:rPr lang="en-US" sz="2000" b="1" dirty="0">
-                <a:solidFill>
-                  <a:srgbClr val="FFFFFF"/>
-                </a:solidFill>
-              </a:rPr>
-              <a:t>?</a:t>
-            </a:r>
-            <a:endParaRPr lang="en-US" sz="2000" dirty="0"/>
+              <a:t>Temeljni stupovi kibernetičke sigurnosti</a:t>
+            </a:r>
+            <a:endParaRPr lang="hr-HR" sz="2000" noProof="0" dirty="0"/>
           </a:p>
         </p:txBody>
       </p:sp>
@@ -8830,633 +11406,14 @@
               <a:buChar char="•"/>
             </a:pPr>
             <a:r>
-              <a:rPr lang="en-US" dirty="0" err="1">
-                <a:solidFill>
-                  <a:srgbClr val="444444"/>
-                </a:solidFill>
-              </a:rPr>
-              <a:t>Kibernetička</a:t>
-            </a:r>
-            <a:r>
-              <a:rPr lang="en-US" dirty="0">
-                <a:solidFill>
-                  <a:srgbClr val="444444"/>
-                </a:solidFill>
-              </a:rPr>
-              <a:t> </a:t>
-            </a:r>
-            <a:r>
-              <a:rPr lang="en-US" dirty="0" err="1">
-                <a:solidFill>
-                  <a:srgbClr val="444444"/>
-                </a:solidFill>
-              </a:rPr>
-              <a:t>sigurnost</a:t>
-            </a:r>
-            <a:r>
-              <a:rPr lang="en-US" dirty="0">
-                <a:solidFill>
-                  <a:srgbClr val="444444"/>
-                </a:solidFill>
-              </a:rPr>
-              <a:t> (</a:t>
-            </a:r>
-            <a:r>
-              <a:rPr lang="en-US" dirty="0" err="1">
-                <a:solidFill>
-                  <a:srgbClr val="444444"/>
-                </a:solidFill>
-              </a:rPr>
-              <a:t>ili</a:t>
-            </a:r>
-            <a:r>
-              <a:rPr lang="en-US" dirty="0">
-                <a:solidFill>
-                  <a:srgbClr val="444444"/>
-                </a:solidFill>
-              </a:rPr>
-              <a:t> </a:t>
-            </a:r>
-            <a:r>
-              <a:rPr lang="en-US" dirty="0" err="1">
-                <a:solidFill>
-                  <a:srgbClr val="444444"/>
-                </a:solidFill>
-              </a:rPr>
-              <a:t>sigurnost</a:t>
-            </a:r>
-            <a:r>
-              <a:rPr lang="en-US" dirty="0">
-                <a:solidFill>
-                  <a:srgbClr val="444444"/>
-                </a:solidFill>
-              </a:rPr>
-              <a:t> </a:t>
-            </a:r>
-            <a:r>
-              <a:rPr lang="en-US" dirty="0" err="1">
-                <a:solidFill>
-                  <a:srgbClr val="444444"/>
-                </a:solidFill>
-              </a:rPr>
-              <a:t>na</a:t>
-            </a:r>
-            <a:r>
-              <a:rPr lang="en-US" dirty="0">
-                <a:solidFill>
-                  <a:srgbClr val="444444"/>
-                </a:solidFill>
-              </a:rPr>
-              <a:t> </a:t>
-            </a:r>
-            <a:r>
-              <a:rPr lang="en-US" dirty="0" err="1">
-                <a:solidFill>
-                  <a:srgbClr val="444444"/>
-                </a:solidFill>
-              </a:rPr>
-              <a:t>internetu</a:t>
-            </a:r>
-            <a:r>
-              <a:rPr lang="en-US" dirty="0">
-                <a:solidFill>
-                  <a:srgbClr val="444444"/>
-                </a:solidFill>
-              </a:rPr>
-              <a:t>) </a:t>
-            </a:r>
-            <a:r>
-              <a:rPr lang="en-US" dirty="0" err="1">
-                <a:solidFill>
-                  <a:srgbClr val="444444"/>
-                </a:solidFill>
-              </a:rPr>
-              <a:t>skup</a:t>
-            </a:r>
-            <a:r>
-              <a:rPr lang="en-US" dirty="0">
-                <a:solidFill>
-                  <a:srgbClr val="444444"/>
-                </a:solidFill>
-              </a:rPr>
-              <a:t> je </a:t>
-            </a:r>
-            <a:r>
-              <a:rPr lang="en-US" dirty="0" err="1">
-                <a:solidFill>
-                  <a:srgbClr val="444444"/>
-                </a:solidFill>
-              </a:rPr>
-              <a:t>znanja</a:t>
-            </a:r>
-            <a:r>
-              <a:rPr lang="en-US" dirty="0">
-                <a:solidFill>
-                  <a:srgbClr val="444444"/>
-                </a:solidFill>
-              </a:rPr>
-              <a:t>, </a:t>
-            </a:r>
-            <a:r>
-              <a:rPr lang="en-US" dirty="0" err="1">
-                <a:solidFill>
-                  <a:srgbClr val="444444"/>
-                </a:solidFill>
-              </a:rPr>
-              <a:t>navika</a:t>
-            </a:r>
-            <a:r>
-              <a:rPr lang="en-US" dirty="0">
-                <a:solidFill>
-                  <a:srgbClr val="444444"/>
-                </a:solidFill>
-              </a:rPr>
-              <a:t> </a:t>
-            </a:r>
-            <a:r>
-              <a:rPr lang="en-US" dirty="0" err="1">
-                <a:solidFill>
-                  <a:srgbClr val="444444"/>
-                </a:solidFill>
-              </a:rPr>
-              <a:t>i</a:t>
-            </a:r>
-            <a:r>
-              <a:rPr lang="en-US" dirty="0">
-                <a:solidFill>
-                  <a:srgbClr val="444444"/>
-                </a:solidFill>
-              </a:rPr>
-              <a:t> alata </a:t>
-            </a:r>
-            <a:r>
-              <a:rPr lang="en-US" dirty="0" err="1">
-                <a:solidFill>
-                  <a:srgbClr val="444444"/>
-                </a:solidFill>
-              </a:rPr>
-              <a:t>kojima</a:t>
-            </a:r>
-            <a:r>
-              <a:rPr lang="en-US" dirty="0">
-                <a:solidFill>
-                  <a:srgbClr val="444444"/>
-                </a:solidFill>
-              </a:rPr>
-              <a:t> se </a:t>
-            </a:r>
-            <a:r>
-              <a:rPr lang="en-US" dirty="0" err="1">
-                <a:solidFill>
-                  <a:srgbClr val="444444"/>
-                </a:solidFill>
-              </a:rPr>
-              <a:t>štitimo</a:t>
-            </a:r>
-            <a:r>
-              <a:rPr lang="en-US" dirty="0">
-                <a:solidFill>
-                  <a:srgbClr val="444444"/>
-                </a:solidFill>
-              </a:rPr>
-              <a:t> od </a:t>
-            </a:r>
-            <a:r>
-              <a:rPr lang="en-US" dirty="0" err="1">
-                <a:solidFill>
-                  <a:srgbClr val="444444"/>
-                </a:solidFill>
-              </a:rPr>
-              <a:t>neovlaštenog</a:t>
-            </a:r>
-            <a:r>
-              <a:rPr lang="en-US" dirty="0">
-                <a:solidFill>
-                  <a:srgbClr val="444444"/>
-                </a:solidFill>
-              </a:rPr>
-              <a:t> </a:t>
-            </a:r>
-            <a:r>
-              <a:rPr lang="en-US" dirty="0" err="1">
-                <a:solidFill>
-                  <a:srgbClr val="444444"/>
-                </a:solidFill>
-              </a:rPr>
-              <a:t>pristupa</a:t>
-            </a:r>
-            <a:r>
-              <a:rPr lang="en-US" dirty="0">
-                <a:solidFill>
-                  <a:srgbClr val="444444"/>
-                </a:solidFill>
-              </a:rPr>
-              <a:t> </a:t>
-            </a:r>
-            <a:r>
-              <a:rPr lang="en-US" dirty="0" err="1">
-                <a:solidFill>
-                  <a:srgbClr val="444444"/>
-                </a:solidFill>
-              </a:rPr>
-              <a:t>našim</a:t>
-            </a:r>
-            <a:r>
-              <a:rPr lang="en-US" dirty="0">
-                <a:solidFill>
-                  <a:srgbClr val="444444"/>
-                </a:solidFill>
-              </a:rPr>
-              <a:t> </a:t>
-            </a:r>
-            <a:r>
-              <a:rPr lang="en-US" dirty="0" err="1">
-                <a:solidFill>
-                  <a:srgbClr val="444444"/>
-                </a:solidFill>
-              </a:rPr>
-              <a:t>podacima</a:t>
-            </a:r>
-            <a:r>
-              <a:rPr lang="en-US" dirty="0">
-                <a:solidFill>
-                  <a:srgbClr val="444444"/>
-                </a:solidFill>
-              </a:rPr>
-              <a:t>, </a:t>
-            </a:r>
-            <a:r>
-              <a:rPr lang="en-US" dirty="0" err="1">
-                <a:solidFill>
-                  <a:srgbClr val="444444"/>
-                </a:solidFill>
-              </a:rPr>
-              <a:t>uređajima</a:t>
-            </a:r>
-            <a:r>
-              <a:rPr lang="en-US" dirty="0">
-                <a:solidFill>
-                  <a:srgbClr val="444444"/>
-                </a:solidFill>
-              </a:rPr>
-              <a:t> </a:t>
-            </a:r>
-            <a:r>
-              <a:rPr lang="en-US" dirty="0" err="1">
-                <a:solidFill>
-                  <a:srgbClr val="444444"/>
-                </a:solidFill>
-              </a:rPr>
-              <a:t>i</a:t>
-            </a:r>
-            <a:r>
-              <a:rPr lang="en-US" dirty="0">
-                <a:solidFill>
-                  <a:srgbClr val="444444"/>
-                </a:solidFill>
-              </a:rPr>
-              <a:t> </a:t>
-            </a:r>
-            <a:r>
-              <a:rPr lang="en-US" dirty="0" err="1">
-                <a:solidFill>
-                  <a:srgbClr val="444444"/>
-                </a:solidFill>
-              </a:rPr>
-              <a:t>novcu</a:t>
-            </a:r>
-            <a:r>
-              <a:rPr lang="en-US" dirty="0">
-                <a:solidFill>
-                  <a:srgbClr val="444444"/>
-                </a:solidFill>
-              </a:rPr>
-              <a:t>.</a:t>
-            </a:r>
-          </a:p>
-          <a:p>
-            <a:pPr marL="342900" indent="-342900">
-              <a:spcAft>
-                <a:spcPts val="1000"/>
-              </a:spcAft>
-              <a:buSzPct val="100000"/>
-              <a:buChar char="•"/>
-            </a:pPr>
-            <a:r>
-              <a:rPr lang="en-US" dirty="0" err="1">
-                <a:solidFill>
-                  <a:srgbClr val="444444"/>
-                </a:solidFill>
-              </a:rPr>
-              <a:t>Kriminalci</a:t>
-            </a:r>
-            <a:r>
-              <a:rPr lang="en-US" dirty="0">
-                <a:solidFill>
-                  <a:srgbClr val="444444"/>
-                </a:solidFill>
-              </a:rPr>
-              <a:t> </a:t>
-            </a:r>
-            <a:r>
-              <a:rPr lang="en-US" dirty="0" err="1">
-                <a:solidFill>
-                  <a:srgbClr val="444444"/>
-                </a:solidFill>
-              </a:rPr>
-              <a:t>koriste</a:t>
-            </a:r>
-            <a:r>
-              <a:rPr lang="en-US" dirty="0">
-                <a:solidFill>
-                  <a:srgbClr val="444444"/>
-                </a:solidFill>
-              </a:rPr>
-              <a:t> internet </a:t>
-            </a:r>
-            <a:r>
-              <a:rPr lang="en-US" dirty="0" err="1">
-                <a:solidFill>
-                  <a:srgbClr val="444444"/>
-                </a:solidFill>
-              </a:rPr>
-              <a:t>jednako</a:t>
-            </a:r>
-            <a:r>
-              <a:rPr lang="en-US" dirty="0">
-                <a:solidFill>
-                  <a:srgbClr val="444444"/>
-                </a:solidFill>
-              </a:rPr>
-              <a:t> </a:t>
-            </a:r>
-            <a:r>
-              <a:rPr lang="en-US" dirty="0" err="1">
-                <a:solidFill>
-                  <a:srgbClr val="444444"/>
-                </a:solidFill>
-              </a:rPr>
-              <a:t>kao</a:t>
-            </a:r>
-            <a:r>
-              <a:rPr lang="en-US" dirty="0">
-                <a:solidFill>
-                  <a:srgbClr val="444444"/>
-                </a:solidFill>
-              </a:rPr>
-              <a:t> </a:t>
-            </a:r>
-            <a:r>
-              <a:rPr lang="en-US" dirty="0" err="1">
-                <a:solidFill>
-                  <a:srgbClr val="444444"/>
-                </a:solidFill>
-              </a:rPr>
-              <a:t>što</a:t>
-            </a:r>
-            <a:r>
-              <a:rPr lang="en-US" dirty="0">
-                <a:solidFill>
-                  <a:srgbClr val="444444"/>
-                </a:solidFill>
-              </a:rPr>
-              <a:t> </a:t>
-            </a:r>
-            <a:r>
-              <a:rPr lang="en-US" dirty="0" err="1">
-                <a:solidFill>
-                  <a:srgbClr val="444444"/>
-                </a:solidFill>
-              </a:rPr>
-              <a:t>su</a:t>
-            </a:r>
-            <a:r>
-              <a:rPr lang="en-US" dirty="0">
-                <a:solidFill>
-                  <a:srgbClr val="444444"/>
-                </a:solidFill>
-              </a:rPr>
-              <a:t> </a:t>
-            </a:r>
-            <a:r>
-              <a:rPr lang="en-US" dirty="0" err="1">
-                <a:solidFill>
-                  <a:srgbClr val="444444"/>
-                </a:solidFill>
-              </a:rPr>
-              <a:t>nekad</a:t>
-            </a:r>
-            <a:r>
-              <a:rPr lang="en-US" dirty="0">
-                <a:solidFill>
-                  <a:srgbClr val="444444"/>
-                </a:solidFill>
-              </a:rPr>
-              <a:t> </a:t>
-            </a:r>
-            <a:r>
-              <a:rPr lang="en-US" dirty="0" err="1">
-                <a:solidFill>
-                  <a:srgbClr val="444444"/>
-                </a:solidFill>
-              </a:rPr>
-              <a:t>koristili</a:t>
-            </a:r>
-            <a:r>
-              <a:rPr lang="en-US" dirty="0">
-                <a:solidFill>
-                  <a:srgbClr val="444444"/>
-                </a:solidFill>
-              </a:rPr>
-              <a:t> </a:t>
-            </a:r>
-            <a:r>
-              <a:rPr lang="en-US" dirty="0" err="1">
-                <a:solidFill>
-                  <a:srgbClr val="444444"/>
-                </a:solidFill>
-              </a:rPr>
-              <a:t>telefon</a:t>
-            </a:r>
-            <a:r>
-              <a:rPr lang="en-US" dirty="0">
-                <a:solidFill>
-                  <a:srgbClr val="444444"/>
-                </a:solidFill>
-              </a:rPr>
-              <a:t> </a:t>
-            </a:r>
-            <a:r>
-              <a:rPr lang="en-US" dirty="0" err="1">
-                <a:solidFill>
-                  <a:srgbClr val="444444"/>
-                </a:solidFill>
-              </a:rPr>
-              <a:t>ili</a:t>
-            </a:r>
-            <a:r>
-              <a:rPr lang="en-US" dirty="0">
-                <a:solidFill>
-                  <a:srgbClr val="444444"/>
-                </a:solidFill>
-              </a:rPr>
-              <a:t> </a:t>
-            </a:r>
-            <a:r>
-              <a:rPr lang="en-US" dirty="0" err="1">
-                <a:solidFill>
-                  <a:srgbClr val="444444"/>
-                </a:solidFill>
-              </a:rPr>
-              <a:t>poštu</a:t>
-            </a:r>
-            <a:r>
-              <a:rPr lang="en-US" dirty="0">
-                <a:solidFill>
-                  <a:srgbClr val="444444"/>
-                </a:solidFill>
-              </a:rPr>
-              <a:t> — </a:t>
-            </a:r>
-            <a:r>
-              <a:rPr lang="en-US" dirty="0" err="1">
-                <a:solidFill>
-                  <a:srgbClr val="444444"/>
-                </a:solidFill>
-              </a:rPr>
-              <a:t>samo</a:t>
-            </a:r>
-            <a:r>
-              <a:rPr lang="en-US" dirty="0">
-                <a:solidFill>
-                  <a:srgbClr val="444444"/>
-                </a:solidFill>
-              </a:rPr>
-              <a:t> </a:t>
-            </a:r>
-            <a:r>
-              <a:rPr lang="en-US" dirty="0" err="1">
-                <a:solidFill>
-                  <a:srgbClr val="444444"/>
-                </a:solidFill>
-              </a:rPr>
-              <a:t>su</a:t>
-            </a:r>
-            <a:r>
-              <a:rPr lang="en-US" dirty="0">
-                <a:solidFill>
-                  <a:srgbClr val="444444"/>
-                </a:solidFill>
-              </a:rPr>
-              <a:t> </a:t>
-            </a:r>
-            <a:r>
-              <a:rPr lang="en-US" dirty="0" err="1">
-                <a:solidFill>
-                  <a:srgbClr val="444444"/>
-                </a:solidFill>
-              </a:rPr>
-              <a:t>brži</a:t>
-            </a:r>
-            <a:r>
-              <a:rPr lang="en-US" dirty="0">
-                <a:solidFill>
-                  <a:srgbClr val="444444"/>
-                </a:solidFill>
-              </a:rPr>
-              <a:t> </a:t>
-            </a:r>
-            <a:r>
-              <a:rPr lang="en-US" dirty="0" err="1">
-                <a:solidFill>
-                  <a:srgbClr val="444444"/>
-                </a:solidFill>
-              </a:rPr>
-              <a:t>i</a:t>
-            </a:r>
-            <a:r>
-              <a:rPr lang="en-US" dirty="0">
-                <a:solidFill>
-                  <a:srgbClr val="444444"/>
-                </a:solidFill>
-              </a:rPr>
-              <a:t> </a:t>
-            </a:r>
-            <a:r>
-              <a:rPr lang="en-US" dirty="0" err="1">
-                <a:solidFill>
-                  <a:srgbClr val="444444"/>
-                </a:solidFill>
-              </a:rPr>
-              <a:t>anonimni</a:t>
-            </a:r>
-            <a:r>
-              <a:rPr lang="en-US" dirty="0">
-                <a:solidFill>
-                  <a:srgbClr val="444444"/>
-                </a:solidFill>
-              </a:rPr>
-              <a:t>.</a:t>
-            </a:r>
-            <a:endParaRPr lang="en-US" dirty="0"/>
-          </a:p>
-          <a:p>
-            <a:pPr marL="342900" indent="-342900">
-              <a:spcAft>
-                <a:spcPts val="1000"/>
-              </a:spcAft>
-              <a:buSzPct val="100000"/>
-              <a:buChar char="•"/>
-            </a:pPr>
-            <a:r>
-              <a:rPr lang="en-US" dirty="0" err="1">
-                <a:solidFill>
-                  <a:srgbClr val="444444"/>
-                </a:solidFill>
-              </a:rPr>
-              <a:t>Ključna</a:t>
-            </a:r>
-            <a:r>
-              <a:rPr lang="en-US" dirty="0">
-                <a:solidFill>
-                  <a:srgbClr val="444444"/>
-                </a:solidFill>
-              </a:rPr>
-              <a:t> poruka: nitko </a:t>
-            </a:r>
-            <a:r>
-              <a:rPr lang="en-US" dirty="0" err="1">
-                <a:solidFill>
-                  <a:srgbClr val="444444"/>
-                </a:solidFill>
-              </a:rPr>
-              <a:t>nije</a:t>
-            </a:r>
-            <a:r>
-              <a:rPr lang="en-US" dirty="0">
-                <a:solidFill>
-                  <a:srgbClr val="444444"/>
-                </a:solidFill>
-              </a:rPr>
-              <a:t> </a:t>
-            </a:r>
-            <a:r>
-              <a:rPr lang="en-US" dirty="0" err="1">
-                <a:solidFill>
-                  <a:srgbClr val="444444"/>
-                </a:solidFill>
-              </a:rPr>
-              <a:t>prepametan</a:t>
-            </a:r>
-            <a:r>
-              <a:rPr lang="en-US" dirty="0">
-                <a:solidFill>
-                  <a:srgbClr val="444444"/>
-                </a:solidFill>
-              </a:rPr>
-              <a:t> da postane žrtva. Znanje je jedina zaštita.</a:t>
-            </a:r>
-            <a:endParaRPr lang="en-US" dirty="0"/>
+              <a:rPr lang="hr-HR" noProof="0" dirty="0">
+                <a:solidFill>
+                  <a:srgbClr val="444444"/>
+                </a:solidFill>
+              </a:rPr>
+              <a:t>Kibernetička sigurnost (ili sigurnost na internetu) skup je znanja, navika i alata kojima se štitimo od neovlaštenog pristupa našim podacima, uređajima i novcu.</a:t>
+            </a:r>
+            <a:endParaRPr lang="hr-HR" noProof="0" dirty="0"/>
           </a:p>
         </p:txBody>
       </p:sp>
@@ -9474,8 +11431,8 @@
         </p:nvSpPr>
         <p:spPr>
           <a:xfrm>
-            <a:off x="716986" y="3260517"/>
-            <a:ext cx="8311957" cy="1293315"/>
+            <a:off x="466284" y="2036768"/>
+            <a:ext cx="8624059" cy="1466157"/>
           </a:xfrm>
           <a:prstGeom prst="rect">
             <a:avLst/>
@@ -9495,7 +11452,7 @@
               <a:buChar char="•"/>
             </a:pPr>
             <a:r>
-              <a:rPr lang="en-US" sz="1600" b="1" dirty="0" err="1">
+              <a:rPr lang="hr-HR" b="1" noProof="0" dirty="0">
                 <a:solidFill>
                   <a:srgbClr val="FF9999"/>
                 </a:solidFill>
@@ -9503,7 +11460,7 @@
               <a:t>Zaštita</a:t>
             </a:r>
             <a:r>
-              <a:rPr lang="en-US" sz="1600" b="1" dirty="0">
+              <a:rPr lang="hr-HR" b="1" noProof="0" dirty="0">
                 <a:solidFill>
                   <a:schemeClr val="bg1"/>
                 </a:solidFill>
@@ -9511,7 +11468,7 @@
               <a:t> </a:t>
             </a:r>
             <a:r>
-              <a:rPr lang="en-US" sz="1600" b="1" dirty="0" err="1">
+              <a:rPr lang="hr-HR" b="1" noProof="0" dirty="0">
                 <a:solidFill>
                   <a:srgbClr val="FF9999"/>
                 </a:solidFill>
@@ -9519,7 +11476,7 @@
               <a:t>podataka</a:t>
             </a:r>
             <a:r>
-              <a:rPr lang="en-US" sz="1600" b="1" dirty="0">
+              <a:rPr lang="hr-HR" b="1" noProof="0" dirty="0">
                 <a:solidFill>
                   <a:schemeClr val="bg1"/>
                 </a:solidFill>
@@ -9527,106 +11484,13 @@
               <a:t> </a:t>
             </a:r>
             <a:r>
-              <a:rPr lang="en-US" sz="1600" dirty="0">
+              <a:rPr lang="hr-HR" noProof="0" dirty="0">
                 <a:solidFill>
                   <a:schemeClr val="bg1"/>
                 </a:solidFill>
               </a:rPr>
-              <a:t>- </a:t>
-            </a:r>
-            <a:r>
-              <a:rPr lang="en-US" sz="1600" dirty="0" err="1">
-                <a:solidFill>
-                  <a:schemeClr val="bg1"/>
-                </a:solidFill>
-              </a:rPr>
-              <a:t>osobnih</a:t>
-            </a:r>
-            <a:r>
-              <a:rPr lang="en-US" sz="1600" dirty="0">
-                <a:solidFill>
-                  <a:schemeClr val="bg1"/>
-                </a:solidFill>
-              </a:rPr>
-              <a:t> </a:t>
-            </a:r>
-            <a:r>
-              <a:rPr lang="en-US" sz="1600" dirty="0" err="1">
-                <a:solidFill>
-                  <a:schemeClr val="bg1"/>
-                </a:solidFill>
-              </a:rPr>
-              <a:t>informacija</a:t>
-            </a:r>
-            <a:r>
-              <a:rPr lang="en-US" sz="1600" dirty="0">
-                <a:solidFill>
-                  <a:schemeClr val="bg1"/>
-                </a:solidFill>
-              </a:rPr>
-              <a:t>, </a:t>
-            </a:r>
-            <a:r>
-              <a:rPr lang="en-US" sz="1600" dirty="0" err="1">
-                <a:solidFill>
-                  <a:schemeClr val="bg1"/>
-                </a:solidFill>
-              </a:rPr>
-              <a:t>lozinki</a:t>
-            </a:r>
-            <a:r>
-              <a:rPr lang="en-US" sz="1600" dirty="0">
-                <a:solidFill>
-                  <a:schemeClr val="bg1"/>
-                </a:solidFill>
-              </a:rPr>
-              <a:t> </a:t>
-            </a:r>
-            <a:r>
-              <a:rPr lang="en-US" sz="1600" dirty="0" err="1">
-                <a:solidFill>
-                  <a:schemeClr val="bg1"/>
-                </a:solidFill>
-              </a:rPr>
-              <a:t>i</a:t>
-            </a:r>
-            <a:r>
-              <a:rPr lang="en-US" sz="1600" dirty="0">
-                <a:solidFill>
-                  <a:schemeClr val="bg1"/>
-                </a:solidFill>
-              </a:rPr>
-              <a:t> </a:t>
-            </a:r>
-            <a:r>
-              <a:rPr lang="en-US" sz="1600" dirty="0" err="1">
-                <a:solidFill>
-                  <a:schemeClr val="bg1"/>
-                </a:solidFill>
-              </a:rPr>
-              <a:t>financijskih</a:t>
-            </a:r>
-            <a:r>
-              <a:rPr lang="en-US" sz="1600" dirty="0">
-                <a:solidFill>
-                  <a:schemeClr val="bg1"/>
-                </a:solidFill>
-              </a:rPr>
-              <a:t> </a:t>
-            </a:r>
-            <a:r>
-              <a:rPr lang="en-US" sz="1600" dirty="0" err="1">
-                <a:solidFill>
-                  <a:schemeClr val="bg1"/>
-                </a:solidFill>
-              </a:rPr>
-              <a:t>podataka</a:t>
-            </a:r>
-            <a:endParaRPr lang="en-US" sz="1600" dirty="0">
-              <a:solidFill>
-                <a:schemeClr val="bg1"/>
-              </a:solidFill>
-            </a:endParaRPr>
+              <a:t>- osobnih informacija, lozinki i financijskih podataka</a:t>
+            </a:r>
           </a:p>
           <a:p>
             <a:pPr marL="342900" indent="-342900">
@@ -9637,138 +11501,21 @@
               <a:buChar char="•"/>
             </a:pPr>
             <a:r>
-              <a:rPr lang="en-US" sz="1600" b="1" dirty="0" err="1">
+              <a:rPr lang="hr-HR" b="1" noProof="0" dirty="0">
                 <a:solidFill>
                   <a:srgbClr val="FF9999"/>
                 </a:solidFill>
               </a:rPr>
-              <a:t>Zaštita</a:t>
-            </a:r>
-            <a:r>
-              <a:rPr lang="en-US" sz="1600" b="1" dirty="0">
-                <a:solidFill>
-                  <a:srgbClr val="FF9999"/>
-                </a:solidFill>
-              </a:rPr>
-              <a:t> </a:t>
-            </a:r>
-            <a:r>
-              <a:rPr lang="en-US" sz="1600" b="1" dirty="0" err="1">
-                <a:solidFill>
-                  <a:srgbClr val="FF9999"/>
-                </a:solidFill>
-              </a:rPr>
-              <a:t>uređaja</a:t>
-            </a:r>
-            <a:r>
-              <a:rPr lang="en-US" sz="1600" b="1" dirty="0">
-                <a:solidFill>
-                  <a:srgbClr val="FF9999"/>
-                </a:solidFill>
-              </a:rPr>
-              <a:t> </a:t>
-            </a:r>
-            <a:r>
-              <a:rPr lang="en-US" sz="1600" dirty="0">
+              <a:t>Zaštita uređaja </a:t>
+            </a:r>
+            <a:r>
+              <a:rPr lang="hr-HR" noProof="0" dirty="0">
                 <a:solidFill>
                   <a:schemeClr val="bg1"/>
                 </a:solidFill>
               </a:rPr>
-              <a:t>- </a:t>
-            </a:r>
-            <a:r>
-              <a:rPr lang="en-US" sz="1600" dirty="0" err="1">
-                <a:solidFill>
-                  <a:schemeClr val="bg1"/>
-                </a:solidFill>
-              </a:rPr>
-              <a:t>računala</a:t>
-            </a:r>
-            <a:r>
-              <a:rPr lang="en-US" sz="1600" dirty="0">
-                <a:solidFill>
-                  <a:schemeClr val="bg1"/>
-                </a:solidFill>
-              </a:rPr>
-              <a:t>, </a:t>
-            </a:r>
-            <a:r>
-              <a:rPr lang="en-US" sz="1600" dirty="0" err="1">
-                <a:solidFill>
-                  <a:schemeClr val="bg1"/>
-                </a:solidFill>
-              </a:rPr>
-              <a:t>mobitela</a:t>
-            </a:r>
-            <a:r>
-              <a:rPr lang="en-US" sz="1600" dirty="0">
-                <a:solidFill>
-                  <a:schemeClr val="bg1"/>
-                </a:solidFill>
-              </a:rPr>
-              <a:t> </a:t>
-            </a:r>
-            <a:r>
-              <a:rPr lang="en-US" sz="1600" dirty="0" err="1">
-                <a:solidFill>
-                  <a:schemeClr val="bg1"/>
-                </a:solidFill>
-              </a:rPr>
-              <a:t>i</a:t>
-            </a:r>
-            <a:r>
-              <a:rPr lang="en-US" sz="1600" dirty="0">
-                <a:solidFill>
-                  <a:schemeClr val="bg1"/>
-                </a:solidFill>
-              </a:rPr>
-              <a:t> </a:t>
-            </a:r>
-            <a:r>
-              <a:rPr lang="en-US" sz="1600" dirty="0" err="1">
-                <a:solidFill>
-                  <a:schemeClr val="bg1"/>
-                </a:solidFill>
-              </a:rPr>
-              <a:t>tableta</a:t>
-            </a:r>
-            <a:r>
-              <a:rPr lang="en-US" sz="1600" dirty="0">
-                <a:solidFill>
-                  <a:schemeClr val="bg1"/>
-                </a:solidFill>
-              </a:rPr>
-              <a:t> od </a:t>
-            </a:r>
-            <a:r>
-              <a:rPr lang="en-US" sz="1600" dirty="0" err="1">
-                <a:solidFill>
-                  <a:schemeClr val="bg1"/>
-                </a:solidFill>
-              </a:rPr>
-              <a:t>zlonamjernih</a:t>
-            </a:r>
-            <a:r>
-              <a:rPr lang="en-US" sz="1600" dirty="0">
-                <a:solidFill>
-                  <a:schemeClr val="bg1"/>
-                </a:solidFill>
-              </a:rPr>
-              <a:t> </a:t>
-            </a:r>
-            <a:r>
-              <a:rPr lang="en-US" sz="1600" dirty="0" err="1">
-                <a:solidFill>
-                  <a:schemeClr val="bg1"/>
-                </a:solidFill>
-              </a:rPr>
-              <a:t>programa</a:t>
-            </a:r>
-            <a:endParaRPr lang="en-US" sz="1600" dirty="0">
-              <a:solidFill>
-                <a:schemeClr val="bg1"/>
-              </a:solidFill>
-            </a:endParaRPr>
+              <a:t>- računala, mobitela i tableta od zlonamjernih programa</a:t>
+            </a:r>
           </a:p>
           <a:p>
             <a:pPr marL="342900" indent="-342900">
@@ -9779,227 +11526,132 @@
               <a:buChar char="•"/>
             </a:pPr>
             <a:r>
-              <a:rPr lang="en-US" sz="1600" b="1" dirty="0" err="1">
+              <a:rPr lang="hr-HR" b="1" noProof="0" dirty="0">
                 <a:solidFill>
                   <a:srgbClr val="FF9999"/>
                 </a:solidFill>
               </a:rPr>
-              <a:t>Zaštita</a:t>
-            </a:r>
-            <a:r>
-              <a:rPr lang="en-US" sz="1600" b="1" dirty="0">
-                <a:solidFill>
-                  <a:srgbClr val="FF9999"/>
-                </a:solidFill>
-              </a:rPr>
-              <a:t> </a:t>
-            </a:r>
-            <a:r>
-              <a:rPr lang="en-US" sz="1600" b="1" dirty="0" err="1">
-                <a:solidFill>
-                  <a:srgbClr val="FF9999"/>
-                </a:solidFill>
-              </a:rPr>
-              <a:t>identiteta</a:t>
-            </a:r>
-            <a:r>
-              <a:rPr lang="en-US" sz="1600" b="1" dirty="0">
-                <a:solidFill>
-                  <a:srgbClr val="FF9999"/>
-                </a:solidFill>
-              </a:rPr>
-              <a:t> </a:t>
-            </a:r>
-            <a:r>
-              <a:rPr lang="en-US" sz="1600" dirty="0">
+              <a:t>Zaštita identiteta </a:t>
+            </a:r>
+            <a:r>
+              <a:rPr lang="hr-HR" noProof="0" dirty="0">
                 <a:solidFill>
                   <a:schemeClr val="bg1"/>
                 </a:solidFill>
               </a:rPr>
-              <a:t>- </a:t>
-            </a:r>
-            <a:r>
-              <a:rPr lang="en-US" sz="1600" dirty="0" err="1">
-                <a:solidFill>
-                  <a:schemeClr val="bg1"/>
-                </a:solidFill>
-              </a:rPr>
-              <a:t>sprječavanje</a:t>
-            </a:r>
-            <a:r>
-              <a:rPr lang="en-US" sz="1600" dirty="0">
-                <a:solidFill>
-                  <a:schemeClr val="bg1"/>
-                </a:solidFill>
-              </a:rPr>
-              <a:t> da </a:t>
-            </a:r>
-            <a:r>
-              <a:rPr lang="en-US" sz="1600" dirty="0" err="1">
-                <a:solidFill>
-                  <a:schemeClr val="bg1"/>
-                </a:solidFill>
-              </a:rPr>
-              <a:t>netko</a:t>
-            </a:r>
-            <a:r>
-              <a:rPr lang="en-US" sz="1600" dirty="0">
-                <a:solidFill>
-                  <a:schemeClr val="bg1"/>
-                </a:solidFill>
-              </a:rPr>
-              <a:t> </a:t>
-            </a:r>
-            <a:r>
-              <a:rPr lang="en-US" sz="1600" dirty="0" err="1">
-                <a:solidFill>
-                  <a:schemeClr val="bg1"/>
-                </a:solidFill>
-              </a:rPr>
-              <a:t>preuzme</a:t>
-            </a:r>
-            <a:r>
-              <a:rPr lang="en-US" sz="1600" dirty="0">
-                <a:solidFill>
-                  <a:schemeClr val="bg1"/>
-                </a:solidFill>
-              </a:rPr>
-              <a:t> </a:t>
-            </a:r>
-            <a:r>
-              <a:rPr lang="en-US" sz="1600" dirty="0" err="1">
-                <a:solidFill>
-                  <a:schemeClr val="bg1"/>
-                </a:solidFill>
-              </a:rPr>
-              <a:t>naš</a:t>
-            </a:r>
-            <a:r>
-              <a:rPr lang="en-US" sz="1600" dirty="0">
-                <a:solidFill>
-                  <a:schemeClr val="bg1"/>
-                </a:solidFill>
-              </a:rPr>
-              <a:t> </a:t>
-            </a:r>
-            <a:r>
-              <a:rPr lang="en-US" sz="1600" dirty="0" err="1">
-                <a:solidFill>
-                  <a:schemeClr val="bg1"/>
-                </a:solidFill>
-              </a:rPr>
-              <a:t>digitalni</a:t>
-            </a:r>
-            <a:r>
-              <a:rPr lang="en-US" sz="1600" dirty="0">
-                <a:solidFill>
-                  <a:schemeClr val="bg1"/>
-                </a:solidFill>
-              </a:rPr>
-              <a:t> </a:t>
-            </a:r>
-            <a:r>
-              <a:rPr lang="en-US" sz="1600" dirty="0" err="1">
-                <a:solidFill>
-                  <a:schemeClr val="bg1"/>
-                </a:solidFill>
-              </a:rPr>
-              <a:t>identitet</a:t>
-            </a:r>
-            <a:r>
-              <a:rPr lang="en-US" sz="1600" dirty="0">
-                <a:solidFill>
-                  <a:schemeClr val="bg1"/>
-                </a:solidFill>
-              </a:rPr>
-              <a:t> </a:t>
-            </a:r>
-            <a:r>
-              <a:rPr lang="en-US" sz="1600" dirty="0" err="1">
-                <a:solidFill>
-                  <a:schemeClr val="bg1"/>
-                </a:solidFill>
-              </a:rPr>
-              <a:t>i</a:t>
-            </a:r>
-            <a:r>
-              <a:rPr lang="en-US" sz="1600" dirty="0">
-                <a:solidFill>
-                  <a:schemeClr val="bg1"/>
-                </a:solidFill>
-              </a:rPr>
-              <a:t> </a:t>
-            </a:r>
-            <a:r>
-              <a:rPr lang="en-US" sz="1600" dirty="0" err="1">
-                <a:solidFill>
-                  <a:schemeClr val="bg1"/>
-                </a:solidFill>
-              </a:rPr>
-              <a:t>zloupotrijebi</a:t>
-            </a:r>
-            <a:r>
-              <a:rPr lang="en-US" sz="1600" dirty="0">
-                <a:solidFill>
-                  <a:schemeClr val="bg1"/>
-                </a:solidFill>
-              </a:rPr>
-              <a:t> ga</a:t>
-            </a:r>
-          </a:p>
-        </p:txBody>
-      </p:sp>
-      <p:sp>
-        <p:nvSpPr>
-          <p:cNvPr id="12" name="TextBox 11">
+              <a:t>- sprječavanje preuzimanja i zloupotrebe identiteta</a:t>
+            </a:r>
+          </a:p>
+        </p:txBody>
+      </p:sp>
+      <p:pic>
+        <p:nvPicPr>
+          <p:cNvPr id="6" name="Graphic 5" descr="Folder Search with solid fill">
             <a:extLst>
               <a:ext uri="{FF2B5EF4-FFF2-40B4-BE49-F238E27FC236}">
-                <a16:creationId xmlns:a16="http://schemas.microsoft.com/office/drawing/2014/main" id="{FFE39474-BCBF-A575-EC57-6048F54F2025}"/>
+                <a16:creationId xmlns:a16="http://schemas.microsoft.com/office/drawing/2014/main" id="{622A19C5-2552-48A5-F7B3-DCB81923434B}"/>
               </a:ext>
             </a:extLst>
           </p:cNvPr>
-          <p:cNvSpPr txBox="1"/>
-          <p:nvPr/>
-        </p:nvSpPr>
-        <p:spPr>
-          <a:xfrm>
-            <a:off x="320040" y="2585315"/>
-            <a:ext cx="2217723" cy="400110"/>
-          </a:xfrm>
-          <a:prstGeom prst="rect">
-            <a:avLst/>
-          </a:prstGeom>
-          <a:noFill/>
-        </p:spPr>
-        <p:txBody>
-          <a:bodyPr wrap="none" rtlCol="0">
-            <a:spAutoFit/>
-          </a:bodyPr>
-          <a:lstStyle/>
-          <a:p>
-            <a:r>
-              <a:rPr lang="en-US" sz="2000" b="1" u="sng" dirty="0">
-                <a:solidFill>
-                  <a:srgbClr val="444444"/>
-                </a:solidFill>
-              </a:rPr>
-              <a:t>TEMELJNI</a:t>
-            </a:r>
-            <a:r>
-              <a:rPr lang="en-US" sz="2000" b="1" u="sng" dirty="0"/>
-              <a:t> </a:t>
-            </a:r>
-            <a:r>
-              <a:rPr lang="en-US" sz="2000" b="1" u="sng" dirty="0">
-                <a:solidFill>
-                  <a:srgbClr val="444444"/>
-                </a:solidFill>
-              </a:rPr>
-              <a:t>STUPOVI</a:t>
-            </a:r>
-          </a:p>
-        </p:txBody>
-      </p:sp>
+          <p:cNvPicPr>
+            <a:picLocks noChangeAspect="1"/>
+          </p:cNvPicPr>
+          <p:nvPr/>
+        </p:nvPicPr>
+        <p:blipFill>
+          <a:blip>
+            <a:extLst>
+              <a:ext uri="{96DAC541-7B7A-43D3-8B79-37D633B846F1}">
+                <asvg:svgBlip xmlns:asvg="http://schemas.microsoft.com/office/drawing/2016/SVG/main" r:embed="rId3"/>
+              </a:ext>
+            </a:extLst>
+          </a:blip>
+          <a:stretch>
+            <a:fillRect/>
+          </a:stretch>
+        </p:blipFill>
+        <p:spPr>
+          <a:xfrm>
+            <a:off x="1426191" y="3839001"/>
+            <a:ext cx="914400" cy="914400"/>
+          </a:xfrm>
+          <a:prstGeom prst="rect">
+            <a:avLst/>
+          </a:prstGeom>
+        </p:spPr>
+      </p:pic>
+      <p:pic>
+        <p:nvPicPr>
+          <p:cNvPr id="9" name="Graphic 8" descr="Smart Phone with solid fill">
+            <a:extLst>
+              <a:ext uri="{FF2B5EF4-FFF2-40B4-BE49-F238E27FC236}">
+                <a16:creationId xmlns:a16="http://schemas.microsoft.com/office/drawing/2014/main" id="{4D041FCB-D7F1-15D8-209A-58FCE3105AE6}"/>
+              </a:ext>
+            </a:extLst>
+          </p:cNvPr>
+          <p:cNvPicPr>
+            <a:picLocks noChangeAspect="1"/>
+          </p:cNvPicPr>
+          <p:nvPr/>
+        </p:nvPicPr>
+        <p:blipFill>
+          <a:blip>
+            <a:extLst>
+              <a:ext uri="{96DAC541-7B7A-43D3-8B79-37D633B846F1}">
+                <asvg:svgBlip xmlns:asvg="http://schemas.microsoft.com/office/drawing/2016/SVG/main" r:embed="rId4"/>
+              </a:ext>
+            </a:extLst>
+          </a:blip>
+          <a:stretch>
+            <a:fillRect/>
+          </a:stretch>
+        </p:blipFill>
+        <p:spPr>
+          <a:xfrm>
+            <a:off x="3863913" y="3839001"/>
+            <a:ext cx="914400" cy="914400"/>
+          </a:xfrm>
+          <a:prstGeom prst="rect">
+            <a:avLst/>
+          </a:prstGeom>
+        </p:spPr>
+      </p:pic>
+      <p:pic>
+        <p:nvPicPr>
+          <p:cNvPr id="11" name="Graphic 10" descr="Eye Scan with solid fill">
+            <a:extLst>
+              <a:ext uri="{FF2B5EF4-FFF2-40B4-BE49-F238E27FC236}">
+                <a16:creationId xmlns:a16="http://schemas.microsoft.com/office/drawing/2014/main" id="{773215C1-20C3-7CC6-5A3C-16AADCCEB620}"/>
+              </a:ext>
+            </a:extLst>
+          </p:cNvPr>
+          <p:cNvPicPr>
+            <a:picLocks noChangeAspect="1"/>
+          </p:cNvPicPr>
+          <p:nvPr/>
+        </p:nvPicPr>
+        <p:blipFill>
+          <a:blip>
+            <a:extLst>
+              <a:ext uri="{96DAC541-7B7A-43D3-8B79-37D633B846F1}">
+                <asvg:svgBlip xmlns:asvg="http://schemas.microsoft.com/office/drawing/2016/SVG/main" r:embed="rId5"/>
+              </a:ext>
+            </a:extLst>
+          </a:blip>
+          <a:stretch>
+            <a:fillRect/>
+          </a:stretch>
+        </p:blipFill>
+        <p:spPr>
+          <a:xfrm>
+            <a:off x="6301635" y="3839001"/>
+            <a:ext cx="914400" cy="914400"/>
+          </a:xfrm>
+          <a:prstGeom prst="rect">
+            <a:avLst/>
+          </a:prstGeom>
+        </p:spPr>
+      </p:pic>
     </p:spTree>
     <p:extLst>
       <p:ext uri="{BB962C8B-B14F-4D97-AF65-F5344CB8AC3E}">
@@ -10066,7 +11718,7 @@
           <a:bodyPr/>
           <a:lstStyle/>
           <a:p>
-            <a:endParaRPr lang="en-US"/>
+            <a:endParaRPr lang="hr-HR" noProof="0" dirty="0"/>
           </a:p>
         </p:txBody>
       </p:sp>
@@ -10095,14 +11747,14 @@
               <a:buNone/>
             </a:pPr>
             <a:r>
-              <a:rPr lang="en-US" sz="2000" b="1" dirty="0">
+              <a:rPr lang="hr-HR" sz="2000" b="1" noProof="0" dirty="0">
                 <a:solidFill>
                   <a:srgbClr val="FFFFFF"/>
                 </a:solidFill>
               </a:rPr>
               <a:t>Pojmovnik: što ove riječi zapravo znače?</a:t>
             </a:r>
-            <a:endParaRPr lang="en-US" sz="2000" dirty="0"/>
+            <a:endParaRPr lang="hr-HR" sz="2000" noProof="0" dirty="0"/>
           </a:p>
         </p:txBody>
       </p:sp>
@@ -10115,7 +11767,7 @@
           <p:nvPr>
             <p:extLst>
               <p:ext uri="{D42A27DB-BD31-4B8C-83A1-F6EECF244321}">
-                <p14:modId xmlns:p14="http://schemas.microsoft.com/office/powerpoint/2010/main" val="4201530273"/>
+                <p14:modId xmlns:p14="http://schemas.microsoft.com/office/powerpoint/2010/main" val="999324154"/>
               </p:ext>
             </p:extLst>
           </p:nvPr>
@@ -10154,14 +11806,14 @@
                         <a:buNone/>
                       </a:pPr>
                       <a:r>
-                        <a:rPr lang="en-US" sz="1300" b="1" dirty="0">
+                        <a:rPr lang="hr-HR" sz="1300" b="1" noProof="0" dirty="0">
                           <a:solidFill>
                             <a:srgbClr val="FFFFFF"/>
                           </a:solidFill>
                         </a:rPr>
                         <a:t>Pojam</a:t>
                       </a:r>
-                      <a:endParaRPr lang="en-US" sz="1300" dirty="0"/>
+                      <a:endParaRPr lang="hr-HR" sz="1300" noProof="0" dirty="0"/>
                     </a:p>
                   </a:txBody>
                   <a:tcPr>
@@ -10215,14 +11867,14 @@
                         <a:buNone/>
                       </a:pPr>
                       <a:r>
-                        <a:rPr lang="en-US" sz="1300" b="1" dirty="0">
+                        <a:rPr lang="hr-HR" sz="1300" b="1" noProof="0" dirty="0">
                           <a:solidFill>
                             <a:srgbClr val="FFFFFF"/>
                           </a:solidFill>
                         </a:rPr>
                         <a:t>Što zapravo znači</a:t>
                       </a:r>
-                      <a:endParaRPr lang="en-US" sz="1300" dirty="0"/>
+                      <a:endParaRPr lang="hr-HR" sz="1300" noProof="0" dirty="0"/>
                     </a:p>
                   </a:txBody>
                   <a:tcPr>
@@ -10283,14 +11935,14 @@
                         <a:buNone/>
                       </a:pPr>
                       <a:r>
-                        <a:rPr lang="en-US" sz="1200" dirty="0">
+                        <a:rPr lang="hr-HR" sz="1200" noProof="0" dirty="0">
                           <a:solidFill>
                             <a:srgbClr val="444444"/>
                           </a:solidFill>
                         </a:rPr>
                         <a:t>Phishing</a:t>
                       </a:r>
-                      <a:endParaRPr lang="en-US" sz="1200" dirty="0"/>
+                      <a:endParaRPr lang="hr-HR" sz="1200" noProof="0" dirty="0"/>
                     </a:p>
                   </a:txBody>
                   <a:tcPr>
@@ -10344,14 +11996,14 @@
                         <a:buNone/>
                       </a:pPr>
                       <a:r>
-                        <a:rPr lang="en-US" sz="1200" dirty="0">
+                        <a:rPr lang="hr-HR" sz="1200" noProof="0" dirty="0">
                           <a:solidFill>
                             <a:srgbClr val="444444"/>
                           </a:solidFill>
                         </a:rPr>
                         <a:t>Lažna poruka ili stranica kojom vas tjeraju da upišete lozinku ili podatke kartice</a:t>
                       </a:r>
-                      <a:endParaRPr lang="en-US" sz="1200" dirty="0"/>
+                      <a:endParaRPr lang="hr-HR" sz="1200" noProof="0" dirty="0"/>
                     </a:p>
                   </a:txBody>
                   <a:tcPr>
@@ -10412,14 +12064,14 @@
                         <a:buNone/>
                       </a:pPr>
                       <a:r>
-                        <a:rPr lang="en-US" sz="1200" dirty="0">
+                        <a:rPr lang="hr-HR" sz="1200" noProof="0" dirty="0">
                           <a:solidFill>
                             <a:srgbClr val="444444"/>
                           </a:solidFill>
                         </a:rPr>
                         <a:t>Malware / virus</a:t>
                       </a:r>
-                      <a:endParaRPr lang="en-US" sz="1200" dirty="0"/>
+                      <a:endParaRPr lang="hr-HR" sz="1200" noProof="0" dirty="0"/>
                     </a:p>
                   </a:txBody>
                   <a:tcPr>
@@ -10473,14 +12125,14 @@
                         <a:buNone/>
                       </a:pPr>
                       <a:r>
-                        <a:rPr lang="en-US" sz="1200" dirty="0">
+                        <a:rPr lang="hr-HR" sz="1200" noProof="0" dirty="0">
                           <a:solidFill>
                             <a:srgbClr val="444444"/>
                           </a:solidFill>
                         </a:rPr>
                         <a:t>Zlonamjerni program koji se instalira na vaš uređaj bez vašeg znanja</a:t>
                       </a:r>
-                      <a:endParaRPr lang="en-US" sz="1200" dirty="0"/>
+                      <a:endParaRPr lang="hr-HR" sz="1200" noProof="0" dirty="0"/>
                     </a:p>
                   </a:txBody>
                   <a:tcPr>
@@ -10541,14 +12193,14 @@
                         <a:buNone/>
                       </a:pPr>
                       <a:r>
-                        <a:rPr lang="en-US" sz="1200" dirty="0">
+                        <a:rPr lang="hr-HR" sz="1200" noProof="0" dirty="0">
                           <a:solidFill>
                             <a:srgbClr val="444444"/>
                           </a:solidFill>
                         </a:rPr>
                         <a:t>Ransomware</a:t>
                       </a:r>
-                      <a:endParaRPr lang="en-US" sz="1200" dirty="0"/>
+                      <a:endParaRPr lang="hr-HR" sz="1200" noProof="0" dirty="0"/>
                     </a:p>
                   </a:txBody>
                   <a:tcPr>
@@ -10602,14 +12254,14 @@
                         <a:buNone/>
                       </a:pPr>
                       <a:r>
-                        <a:rPr lang="en-US" sz="1200" dirty="0">
+                        <a:rPr lang="hr-HR" sz="1200" noProof="0" dirty="0">
                           <a:solidFill>
                             <a:srgbClr val="444444"/>
                           </a:solidFill>
                         </a:rPr>
                         <a:t>Virus koji zaključa vaše datoteke i traži otkupninu za otključavanje</a:t>
                       </a:r>
-                      <a:endParaRPr lang="en-US" sz="1200" dirty="0"/>
+                      <a:endParaRPr lang="hr-HR" sz="1200" noProof="0" dirty="0"/>
                     </a:p>
                   </a:txBody>
                   <a:tcPr>
@@ -10670,14 +12322,14 @@
                         <a:buNone/>
                       </a:pPr>
                       <a:r>
-                        <a:rPr lang="en-US" sz="1200" dirty="0">
+                        <a:rPr lang="hr-HR" sz="1200" noProof="0" dirty="0">
                           <a:solidFill>
                             <a:srgbClr val="444444"/>
                           </a:solidFill>
                         </a:rPr>
                         <a:t>Krađa identiteta</a:t>
                       </a:r>
-                      <a:endParaRPr lang="en-US" sz="1200" dirty="0"/>
+                      <a:endParaRPr lang="hr-HR" sz="1200" noProof="0" dirty="0"/>
                     </a:p>
                   </a:txBody>
                   <a:tcPr>
@@ -10731,14 +12383,14 @@
                         <a:buNone/>
                       </a:pPr>
                       <a:r>
-                        <a:rPr lang="en-US" sz="1200" dirty="0">
+                        <a:rPr lang="hr-HR" sz="1200" noProof="0" dirty="0">
                           <a:solidFill>
                             <a:srgbClr val="444444"/>
                           </a:solidFill>
                         </a:rPr>
                         <a:t>Preuzimanje vaših osobnih podataka radi otvaranja kredita ili prijevara u vaše ime</a:t>
                       </a:r>
-                      <a:endParaRPr lang="en-US" sz="1200" dirty="0"/>
+                      <a:endParaRPr lang="hr-HR" sz="1200" noProof="0" dirty="0"/>
                     </a:p>
                   </a:txBody>
                   <a:tcPr>
@@ -10799,14 +12451,14 @@
                         <a:buNone/>
                       </a:pPr>
                       <a:r>
-                        <a:rPr lang="en-US" sz="1200" dirty="0">
+                        <a:rPr lang="hr-HR" sz="1200" noProof="0" dirty="0">
                           <a:solidFill>
                             <a:srgbClr val="444444"/>
                           </a:solidFill>
                         </a:rPr>
                         <a:t>Vishing</a:t>
                       </a:r>
-                      <a:endParaRPr lang="en-US" sz="1200" dirty="0"/>
+                      <a:endParaRPr lang="hr-HR" sz="1200" noProof="0" dirty="0"/>
                     </a:p>
                   </a:txBody>
                   <a:tcPr>
@@ -10860,14 +12512,14 @@
                         <a:buNone/>
                       </a:pPr>
                       <a:r>
-                        <a:rPr lang="en-US" sz="1200" dirty="0">
+                        <a:rPr lang="hr-HR" sz="1200" noProof="0" dirty="0">
                           <a:solidFill>
                             <a:srgbClr val="444444"/>
                           </a:solidFill>
                         </a:rPr>
                         <a:t>Telefonska prijevara: netko vam zove i pretvara se da je banka ili policija</a:t>
                       </a:r>
-                      <a:endParaRPr lang="en-US" sz="1200" dirty="0"/>
+                      <a:endParaRPr lang="hr-HR" sz="1200" noProof="0" dirty="0"/>
                     </a:p>
                   </a:txBody>
                   <a:tcPr>
@@ -10928,14 +12580,14 @@
                         <a:buNone/>
                       </a:pPr>
                       <a:r>
-                        <a:rPr lang="en-US" sz="1200" dirty="0">
+                        <a:rPr lang="hr-HR" sz="1200" noProof="0" dirty="0">
                           <a:solidFill>
                             <a:srgbClr val="444444"/>
                           </a:solidFill>
                         </a:rPr>
                         <a:t>Smishing</a:t>
                       </a:r>
-                      <a:endParaRPr lang="en-US" sz="1200" dirty="0"/>
+                      <a:endParaRPr lang="hr-HR" sz="1200" noProof="0" dirty="0"/>
                     </a:p>
                   </a:txBody>
                   <a:tcPr>
@@ -10989,14 +12641,14 @@
                         <a:buNone/>
                       </a:pPr>
                       <a:r>
-                        <a:rPr lang="en-US" sz="1200" dirty="0">
+                        <a:rPr lang="hr-HR" sz="1200" noProof="0" dirty="0">
                           <a:solidFill>
                             <a:srgbClr val="444444"/>
                           </a:solidFill>
                         </a:rPr>
                         <a:t>SMS prijevara: lažna tekstualna poruka s poveznicom prevaranta</a:t>
                       </a:r>
-                      <a:endParaRPr lang="en-US" sz="1200" dirty="0"/>
+                      <a:endParaRPr lang="hr-HR" sz="1200" noProof="0" dirty="0"/>
                     </a:p>
                   </a:txBody>
                   <a:tcPr>
@@ -11057,14 +12709,14 @@
                         <a:buNone/>
                       </a:pPr>
                       <a:r>
-                        <a:rPr lang="en-US" sz="1200" dirty="0">
+                        <a:rPr lang="hr-HR" sz="1200" noProof="0" dirty="0">
                           <a:solidFill>
                             <a:srgbClr val="444444"/>
                           </a:solidFill>
                         </a:rPr>
                         <a:t>Dvofaktorna autentikacija (2FA)</a:t>
                       </a:r>
-                      <a:endParaRPr lang="en-US" sz="1200" dirty="0"/>
+                      <a:endParaRPr lang="hr-HR" sz="1200" noProof="0" dirty="0"/>
                     </a:p>
                   </a:txBody>
                   <a:tcPr>
@@ -11118,14 +12770,14 @@
                         <a:buNone/>
                       </a:pPr>
                       <a:r>
-                        <a:rPr lang="en-US" sz="1200" dirty="0">
+                        <a:rPr lang="hr-HR" sz="1200" noProof="0" dirty="0">
                           <a:solidFill>
                             <a:srgbClr val="444444"/>
                           </a:solidFill>
                         </a:rPr>
                         <a:t>Dvostruka provjera identiteta — uz lozinku, i SMS kod ili aplikacija</a:t>
                       </a:r>
-                      <a:endParaRPr lang="en-US" sz="1200" dirty="0"/>
+                      <a:endParaRPr lang="hr-HR" sz="1200" noProof="0" dirty="0"/>
                     </a:p>
                   </a:txBody>
                   <a:tcPr>
@@ -11424,7 +13076,7 @@
           <a:lstStyle/>
           <a:p>
             <a:r>
-              <a:rPr lang="en-US" sz="1600" b="1" dirty="0"/>
+              <a:rPr lang="hr-HR" sz="1600" b="1" noProof="0" dirty="0"/>
               <a:t>998-226</a:t>
             </a:r>
           </a:p>
@@ -11491,7 +13143,7 @@
           <a:bodyPr/>
           <a:lstStyle/>
           <a:p>
-            <a:endParaRPr lang="en-US"/>
+            <a:endParaRPr lang="hr-HR" noProof="0" dirty="0"/>
           </a:p>
         </p:txBody>
       </p:sp>
@@ -11520,14 +13172,14 @@
               <a:buNone/>
             </a:pPr>
             <a:r>
-              <a:rPr lang="en-US" sz="2000" b="1" dirty="0">
+              <a:rPr lang="hr-HR" sz="2000" b="1" noProof="0" dirty="0">
                 <a:solidFill>
                   <a:srgbClr val="FFFFFF"/>
                 </a:solidFill>
               </a:rPr>
               <a:t>Phishing: lažne poruke i stranice</a:t>
             </a:r>
-            <a:endParaRPr lang="en-US" sz="2000" dirty="0"/>
+            <a:endParaRPr lang="hr-HR" sz="2000" noProof="0" dirty="0"/>
           </a:p>
         </p:txBody>
       </p:sp>
@@ -11561,7 +13213,7 @@
           <a:bodyPr/>
           <a:lstStyle/>
           <a:p>
-            <a:endParaRPr lang="en-US"/>
+            <a:endParaRPr lang="hr-HR" noProof="0" dirty="0"/>
           </a:p>
         </p:txBody>
       </p:sp>
@@ -11593,7 +13245,7 @@
           <a:bodyPr/>
           <a:lstStyle/>
           <a:p>
-            <a:endParaRPr lang="en-US"/>
+            <a:endParaRPr lang="hr-HR" noProof="0" dirty="0"/>
           </a:p>
         </p:txBody>
       </p:sp>
@@ -11622,14 +13274,14 @@
               <a:buNone/>
             </a:pPr>
             <a:r>
-              <a:rPr lang="en-US" sz="1300" b="1" dirty="0">
+              <a:rPr lang="hr-HR" sz="1300" b="1" noProof="0" dirty="0">
                 <a:solidFill>
                   <a:srgbClr val="FFFFFF"/>
                 </a:solidFill>
               </a:rPr>
               <a:t>Kako prepoznati phishing?</a:t>
             </a:r>
-            <a:endParaRPr lang="en-US" sz="1300" dirty="0"/>
+            <a:endParaRPr lang="hr-HR" sz="1300" noProof="0" dirty="0"/>
           </a:p>
         </p:txBody>
       </p:sp>
@@ -11663,7 +13315,7 @@
           <a:bodyPr/>
           <a:lstStyle/>
           <a:p>
-            <a:endParaRPr lang="en-US"/>
+            <a:endParaRPr lang="hr-HR" noProof="0" dirty="0"/>
           </a:p>
         </p:txBody>
       </p:sp>
@@ -11695,7 +13347,7 @@
           <a:bodyPr/>
           <a:lstStyle/>
           <a:p>
-            <a:endParaRPr lang="en-US"/>
+            <a:endParaRPr lang="hr-HR" noProof="0" dirty="0"/>
           </a:p>
         </p:txBody>
       </p:sp>
@@ -11724,14 +13376,14 @@
               <a:buNone/>
             </a:pPr>
             <a:r>
-              <a:rPr lang="en-US" sz="1300" b="1" dirty="0">
+              <a:rPr lang="hr-HR" sz="1300" b="1" noProof="0" dirty="0">
                 <a:solidFill>
                   <a:srgbClr val="FFFFFF"/>
                 </a:solidFill>
               </a:rPr>
               <a:t>Stvarni slučaj — Split 2024.</a:t>
             </a:r>
-            <a:endParaRPr lang="en-US" sz="1300" dirty="0"/>
+            <a:endParaRPr lang="hr-HR" sz="1300" noProof="0" dirty="0"/>
           </a:p>
         </p:txBody>
       </p:sp>
@@ -11760,7 +13412,7 @@
               <a:buNone/>
             </a:pPr>
             <a:r>
-              <a:rPr lang="en-US" sz="1300" dirty="0">
+              <a:rPr lang="hr-HR" sz="1300" noProof="0" dirty="0">
                 <a:solidFill>
                   <a:srgbClr val="CCCCCC"/>
                 </a:solidFill>
@@ -11768,21 +13420,21 @@
               <a:t>Umirovljenica je primila SMS navodno od banke da joj račun treba hitnu provjeru. Link je izgledao </a:t>
             </a:r>
             <a:r>
-              <a:rPr lang="en-US" sz="1300" b="1" dirty="0">
+              <a:rPr lang="hr-HR" sz="1300" b="1" noProof="0" dirty="0">
                 <a:solidFill>
                   <a:srgbClr val="FF9999"/>
                 </a:solidFill>
               </a:rPr>
               <a:t>identično kao prava stranica banke.</a:t>
             </a:r>
-            <a:endParaRPr lang="en-US" sz="1300" dirty="0"/>
+            <a:endParaRPr lang="hr-HR" sz="1300" noProof="0" dirty="0"/>
           </a:p>
           <a:p>
             <a:pPr marL="0" indent="0">
               <a:buNone/>
             </a:pPr>
             <a:r>
-              <a:rPr lang="en-US" sz="1300" dirty="0">
+              <a:rPr lang="hr-HR" sz="1300" noProof="0" dirty="0">
                 <a:solidFill>
                   <a:srgbClr val="CCCCCC"/>
                 </a:solidFill>
@@ -11792,40 +13444,40 @@
 Napadač je unutar sat vremena podignuo </a:t>
             </a:r>
             <a:r>
-              <a:rPr lang="en-US" sz="1400" b="1" dirty="0">
+              <a:rPr lang="hr-HR" sz="1400" b="1" noProof="0" dirty="0">
                 <a:solidFill>
                   <a:srgbClr val="FFFFFF"/>
                 </a:solidFill>
               </a:rPr>
               <a:t>8.000 € ušteđevine.</a:t>
             </a:r>
-            <a:endParaRPr lang="en-US" sz="1300" dirty="0"/>
+            <a:endParaRPr lang="hr-HR" sz="1300" noProof="0" dirty="0"/>
           </a:p>
           <a:p>
             <a:pPr marL="0" indent="0">
               <a:buNone/>
             </a:pPr>
-            <a:endParaRPr lang="en-US" sz="1300" dirty="0"/>
+            <a:endParaRPr lang="hr-HR" sz="1300" noProof="0" dirty="0"/>
           </a:p>
           <a:p>
             <a:pPr marL="0" indent="0">
               <a:buNone/>
             </a:pPr>
-            <a:endParaRPr lang="en-US" sz="1300" dirty="0"/>
+            <a:endParaRPr lang="hr-HR" sz="1300" noProof="0" dirty="0"/>
           </a:p>
           <a:p>
             <a:pPr marL="0" indent="0">
               <a:buNone/>
             </a:pPr>
             <a:r>
-              <a:rPr lang="en-US" sz="1200" i="1" dirty="0">
+              <a:rPr lang="hr-HR" sz="1200" i="1" noProof="0" dirty="0">
                 <a:solidFill>
                   <a:srgbClr val="FF9999"/>
                 </a:solidFill>
               </a:rPr>
               <a:t>→ Nikad ne klikajte na linkove u porukama banke — sami upišite adresu!</a:t>
             </a:r>
-            <a:endParaRPr lang="en-US" sz="1300" dirty="0"/>
+            <a:endParaRPr lang="hr-HR" sz="1300" noProof="0" dirty="0"/>
           </a:p>
         </p:txBody>
       </p:sp>
@@ -11858,14 +13510,14 @@
               <a:buChar char="•"/>
             </a:pPr>
             <a:r>
-              <a:rPr lang="en-US" sz="1300" dirty="0">
+              <a:rPr lang="hr-HR" sz="1300" noProof="0" dirty="0">
                 <a:solidFill>
                   <a:srgbClr val="444444"/>
                 </a:solidFill>
               </a:rPr>
               <a:t>Hitnost i strah: 'Vaš račun će biti zatvoren za 24h!'</a:t>
             </a:r>
-            <a:endParaRPr lang="en-US" sz="1300" dirty="0"/>
+            <a:endParaRPr lang="hr-HR" sz="1300" noProof="0" dirty="0"/>
           </a:p>
           <a:p>
             <a:pPr marL="342900" indent="-342900">
@@ -11876,14 +13528,14 @@
               <a:buChar char="•"/>
             </a:pPr>
             <a:r>
-              <a:rPr lang="en-US" sz="1300" dirty="0">
+              <a:rPr lang="hr-HR" sz="1300" noProof="0" dirty="0">
                 <a:solidFill>
                   <a:srgbClr val="444444"/>
                 </a:solidFill>
               </a:rPr>
               <a:t>Nepoznati pošiljatelj: adresa ne odgovara instituciji (npr. banka@gmail.com)</a:t>
             </a:r>
-            <a:endParaRPr lang="en-US" sz="1300" dirty="0"/>
+            <a:endParaRPr lang="hr-HR" sz="1300" noProof="0" dirty="0"/>
           </a:p>
           <a:p>
             <a:pPr marL="342900" indent="-342900">
@@ -11894,14 +13546,14 @@
               <a:buChar char="•"/>
             </a:pPr>
             <a:r>
-              <a:rPr lang="en-US" sz="1300" dirty="0">
+              <a:rPr lang="hr-HR" sz="1300" noProof="0" dirty="0">
                 <a:solidFill>
                   <a:srgbClr val="444444"/>
                 </a:solidFill>
               </a:rPr>
               <a:t>Sumnjiv link: adresa slična pravoj, ali nije ista (npr. hpb-banka.com umjesto hpb.hr)</a:t>
             </a:r>
-            <a:endParaRPr lang="en-US" sz="1300" dirty="0"/>
+            <a:endParaRPr lang="hr-HR" sz="1300" noProof="0" dirty="0"/>
           </a:p>
           <a:p>
             <a:pPr marL="342900" indent="-342900">
@@ -11912,14 +13564,14 @@
               <a:buChar char="•"/>
             </a:pPr>
             <a:r>
-              <a:rPr lang="en-US" sz="1300" dirty="0">
+              <a:rPr lang="hr-HR" sz="1300" noProof="0" dirty="0">
                 <a:solidFill>
                   <a:srgbClr val="444444"/>
                 </a:solidFill>
               </a:rPr>
               <a:t>Traži osjetljive podatke: prava banka NIKADA ne traži PIN putem e-maila</a:t>
             </a:r>
-            <a:endParaRPr lang="en-US" sz="1300" dirty="0"/>
+            <a:endParaRPr lang="hr-HR" sz="1300" noProof="0" dirty="0"/>
           </a:p>
           <a:p>
             <a:pPr marL="342900" indent="-342900">
@@ -11930,14 +13582,14 @@
               <a:buChar char="•"/>
             </a:pPr>
             <a:r>
-              <a:rPr lang="en-US" sz="1300" dirty="0">
+              <a:rPr lang="hr-HR" sz="1300" noProof="0" dirty="0">
                 <a:solidFill>
                   <a:srgbClr val="444444"/>
                 </a:solidFill>
               </a:rPr>
               <a:t>Gramatičke greške: neobična formulacija ili pogreške u pravopisu</a:t>
             </a:r>
-            <a:endParaRPr lang="en-US" sz="1300" dirty="0"/>
+            <a:endParaRPr lang="hr-HR" sz="1300" noProof="0" dirty="0"/>
           </a:p>
         </p:txBody>
       </p:sp>
@@ -12001,7 +13653,7 @@
           <a:p>
             <a:pPr algn="ctr"/>
             <a:r>
-              <a:rPr lang="en-US" sz="5400" b="1" cap="none" spc="0" dirty="0">
+              <a:rPr lang="hr-HR" sz="5400" b="1" cap="none" spc="0" noProof="0" dirty="0">
                 <a:ln w="6600">
                   <a:solidFill>
                     <a:schemeClr val="accent2"/>
@@ -12083,7 +13735,7 @@
           <a:bodyPr/>
           <a:lstStyle/>
           <a:p>
-            <a:endParaRPr lang="en-US"/>
+            <a:endParaRPr lang="hr-HR" noProof="0" dirty="0"/>
           </a:p>
         </p:txBody>
       </p:sp>
@@ -12112,14 +13764,14 @@
               <a:buNone/>
             </a:pPr>
             <a:r>
-              <a:rPr lang="en-US" sz="2000" b="1" dirty="0">
+              <a:rPr lang="hr-HR" sz="2000" b="1" noProof="0" dirty="0">
                 <a:solidFill>
                   <a:srgbClr val="FFFFFF"/>
                 </a:solidFill>
               </a:rPr>
               <a:t>Virusi, ransomware i krađa identiteta</a:t>
             </a:r>
-            <a:endParaRPr lang="en-US" sz="2000" dirty="0"/>
+            <a:endParaRPr lang="hr-HR" sz="2000" noProof="0" dirty="0"/>
           </a:p>
         </p:txBody>
       </p:sp>
@@ -12153,7 +13805,7 @@
           <a:bodyPr/>
           <a:lstStyle/>
           <a:p>
-            <a:endParaRPr lang="en-US" dirty="0"/>
+            <a:endParaRPr lang="hr-HR" noProof="0" dirty="0"/>
           </a:p>
         </p:txBody>
       </p:sp>
@@ -12185,7 +13837,7 @@
           <a:bodyPr/>
           <a:lstStyle/>
           <a:p>
-            <a:endParaRPr lang="en-US"/>
+            <a:endParaRPr lang="hr-HR" noProof="0" dirty="0"/>
           </a:p>
         </p:txBody>
       </p:sp>
@@ -12214,14 +13866,14 @@
               <a:buNone/>
             </a:pPr>
             <a:r>
-              <a:rPr lang="en-US" sz="1300" b="1" dirty="0">
+              <a:rPr lang="hr-HR" sz="1300" b="1" noProof="0" dirty="0">
                 <a:solidFill>
                   <a:srgbClr val="FFFFFF"/>
                 </a:solidFill>
               </a:rPr>
               <a:t>Kako se virus instalira?</a:t>
             </a:r>
-            <a:endParaRPr lang="en-US" sz="1300" dirty="0"/>
+            <a:endParaRPr lang="hr-HR" sz="1300" noProof="0" dirty="0"/>
           </a:p>
         </p:txBody>
       </p:sp>
@@ -12254,14 +13906,14 @@
               <a:buChar char="•"/>
             </a:pPr>
             <a:r>
-              <a:rPr lang="en-US" sz="1300" dirty="0">
+              <a:rPr lang="hr-HR" sz="1300" noProof="0" dirty="0">
                 <a:solidFill>
                   <a:srgbClr val="444444"/>
                 </a:solidFill>
               </a:rPr>
               <a:t>Klikom na priloženu datoteku (.exe, .zip) u e-mailu od nepoznatog</a:t>
             </a:r>
-            <a:endParaRPr lang="en-US" sz="1300" dirty="0"/>
+            <a:endParaRPr lang="hr-HR" sz="1300" noProof="0" dirty="0"/>
           </a:p>
           <a:p>
             <a:pPr marL="342900" indent="-342900">
@@ -12272,14 +13924,14 @@
               <a:buChar char="•"/>
             </a:pPr>
             <a:r>
-              <a:rPr lang="en-US" sz="1300" dirty="0">
+              <a:rPr lang="hr-HR" sz="1300" noProof="0" dirty="0">
                 <a:solidFill>
                   <a:srgbClr val="444444"/>
                 </a:solidFill>
               </a:rPr>
               <a:t>Klikom na lažni gumb 'Preuzmite ažuriranje' na sumnjivoj stranici</a:t>
             </a:r>
-            <a:endParaRPr lang="en-US" sz="1300" dirty="0"/>
+            <a:endParaRPr lang="hr-HR" sz="1300" noProof="0" dirty="0"/>
           </a:p>
           <a:p>
             <a:pPr marL="342900" indent="-342900">
@@ -12290,14 +13942,14 @@
               <a:buChar char="•"/>
             </a:pPr>
             <a:r>
-              <a:rPr lang="en-US" sz="1300" dirty="0">
+              <a:rPr lang="hr-HR" sz="1300" noProof="0" dirty="0">
                 <a:solidFill>
                   <a:srgbClr val="444444"/>
                 </a:solidFill>
               </a:rPr>
               <a:t>Preuzimanjem softvera s neslužbenih stranica</a:t>
             </a:r>
-            <a:endParaRPr lang="en-US" sz="1300" dirty="0"/>
+            <a:endParaRPr lang="hr-HR" sz="1300" noProof="0" dirty="0"/>
           </a:p>
           <a:p>
             <a:pPr marL="342900" indent="-342900">
@@ -12308,14 +13960,14 @@
               <a:buChar char="•"/>
             </a:pPr>
             <a:r>
-              <a:rPr lang="en-US" sz="1300" dirty="0">
+              <a:rPr lang="hr-HR" sz="1300" noProof="0" dirty="0">
                 <a:solidFill>
                   <a:srgbClr val="444444"/>
                 </a:solidFill>
               </a:rPr>
               <a:t>Priključivanjem zaraženog USB sticka</a:t>
             </a:r>
-            <a:endParaRPr lang="en-US" sz="1300" dirty="0"/>
+            <a:endParaRPr lang="hr-HR" sz="1300" noProof="0" dirty="0"/>
           </a:p>
           <a:p>
             <a:pPr marL="342900" indent="-342900">
@@ -12326,14 +13978,14 @@
               <a:buChar char="•"/>
             </a:pPr>
             <a:r>
-              <a:rPr lang="en-US" sz="1300" dirty="0">
+              <a:rPr lang="hr-HR" sz="1300" noProof="0" dirty="0">
                 <a:solidFill>
                   <a:srgbClr val="444444"/>
                 </a:solidFill>
               </a:rPr>
               <a:t>Ransomware: zaključa sve vaše datoteke i traži otkupninu — KBC Zagreb i Hrvatke vode 2024. bile na meti istih napada!</a:t>
             </a:r>
-            <a:endParaRPr lang="en-US" sz="1300" dirty="0"/>
+            <a:endParaRPr lang="hr-HR" sz="1300" noProof="0" dirty="0"/>
           </a:p>
         </p:txBody>
       </p:sp>
@@ -12367,7 +14019,7 @@
           <a:bodyPr/>
           <a:lstStyle/>
           <a:p>
-            <a:endParaRPr lang="en-US"/>
+            <a:endParaRPr lang="hr-HR" noProof="0" dirty="0"/>
           </a:p>
         </p:txBody>
       </p:sp>
@@ -12399,7 +14051,7 @@
           <a:bodyPr/>
           <a:lstStyle/>
           <a:p>
-            <a:endParaRPr lang="en-US"/>
+            <a:endParaRPr lang="hr-HR" noProof="0" dirty="0"/>
           </a:p>
         </p:txBody>
       </p:sp>
@@ -12428,14 +14080,14 @@
               <a:buNone/>
             </a:pPr>
             <a:r>
-              <a:rPr lang="en-US" sz="1300" b="1" dirty="0">
+              <a:rPr lang="hr-HR" sz="1300" b="1" noProof="0" dirty="0">
                 <a:solidFill>
                   <a:srgbClr val="FFFFFF"/>
                 </a:solidFill>
               </a:rPr>
               <a:t>Krađa identiteta: znakovi i zaštita</a:t>
             </a:r>
-            <a:endParaRPr lang="en-US" sz="1300" dirty="0"/>
+            <a:endParaRPr lang="hr-HR" sz="1300" noProof="0" dirty="0"/>
           </a:p>
         </p:txBody>
       </p:sp>
@@ -12468,14 +14120,14 @@
               <a:buChar char="•"/>
             </a:pPr>
             <a:r>
-              <a:rPr lang="en-US" sz="1300" dirty="0">
+              <a:rPr lang="hr-HR" sz="1300" noProof="0" dirty="0">
                 <a:solidFill>
                   <a:srgbClr val="444444"/>
                 </a:solidFill>
               </a:rPr>
               <a:t>NIKADA ne dijelite: OIB, broj kartice, podatke putovnice, fotografije dokumenata</a:t>
             </a:r>
-            <a:endParaRPr lang="en-US" sz="1300" dirty="0"/>
+            <a:endParaRPr lang="hr-HR" sz="1300" noProof="0" dirty="0"/>
           </a:p>
           <a:p>
             <a:pPr marL="342900" indent="-342900">
@@ -12486,14 +14138,14 @@
               <a:buChar char="•"/>
             </a:pPr>
             <a:r>
-              <a:rPr lang="en-US" sz="1300" dirty="0">
+              <a:rPr lang="hr-HR" sz="1300" noProof="0" dirty="0">
                 <a:solidFill>
                   <a:srgbClr val="444444"/>
                 </a:solidFill>
               </a:rPr>
               <a:t>Znakovi krađe: kredit koji niste tražili, transakcije koje niste napravili, promijenjena lozinka</a:t>
             </a:r>
-            <a:endParaRPr lang="en-US" sz="1300" dirty="0"/>
+            <a:endParaRPr lang="hr-HR" sz="1300" noProof="0" dirty="0"/>
           </a:p>
           <a:p>
             <a:pPr marL="342900" indent="-342900">
@@ -12504,14 +14156,14 @@
               <a:buChar char="•"/>
             </a:pPr>
             <a:r>
-              <a:rPr lang="en-US" sz="1300" dirty="0">
+              <a:rPr lang="hr-HR" sz="1300" noProof="0" dirty="0">
                 <a:solidFill>
                   <a:srgbClr val="444444"/>
                 </a:solidFill>
               </a:rPr>
               <a:t>Što napraviti: odmah kontaktirajte banku, prijavite policiji (policija.gov.hr)</a:t>
             </a:r>
-            <a:endParaRPr lang="en-US" sz="1300" dirty="0"/>
+            <a:endParaRPr lang="hr-HR" sz="1300" noProof="0" dirty="0"/>
           </a:p>
           <a:p>
             <a:pPr marL="342900" indent="-342900">
@@ -12522,14 +14174,14 @@
               <a:buChar char="•"/>
             </a:pPr>
             <a:r>
-              <a:rPr lang="en-US" sz="1300" dirty="0">
+              <a:rPr lang="hr-HR" sz="1300" noProof="0" dirty="0">
                 <a:solidFill>
                   <a:srgbClr val="444444"/>
                 </a:solidFill>
               </a:rPr>
               <a:t>Zaštita: koristite Windows Defender (besplatan), redovito ažurirajte sustav, napravite sigurnosnu kopiju!</a:t>
             </a:r>
-            <a:endParaRPr lang="en-US" sz="1300" dirty="0"/>
+            <a:endParaRPr lang="hr-HR" sz="1300" noProof="0" dirty="0"/>
           </a:p>
         </p:txBody>
       </p:sp>
@@ -12547,7 +14199,7 @@
         </p:nvSpPr>
         <p:spPr>
           <a:xfrm>
-            <a:off x="2522777" y="4087548"/>
+            <a:off x="1343582" y="4068308"/>
             <a:ext cx="1322547" cy="408623"/>
           </a:xfrm>
           <a:prstGeom prst="roundRect">
@@ -12579,7 +14231,7 @@
           <a:p>
             <a:pPr algn="ctr"/>
             <a:r>
-              <a:rPr lang="en-US" dirty="0">
+              <a:rPr lang="hr-HR" noProof="0" dirty="0">
                 <a:solidFill>
                   <a:schemeClr val="bg1"/>
                 </a:solidFill>
@@ -12589,6 +14241,53 @@
           </a:p>
         </p:txBody>
       </p:sp>
+      <p:pic>
+        <p:nvPicPr>
+          <p:cNvPr id="1026" name="Picture 2" descr="Pop-up ads">
+            <a:extLst>
+              <a:ext uri="{FF2B5EF4-FFF2-40B4-BE49-F238E27FC236}">
+                <a16:creationId xmlns:a16="http://schemas.microsoft.com/office/drawing/2014/main" id="{5510ADB7-150E-54BE-EEF8-F8693C17B72F}"/>
+              </a:ext>
+            </a:extLst>
+          </p:cNvPr>
+          <p:cNvPicPr>
+            <a:picLocks noChangeAspect="1" noChangeArrowheads="1"/>
+          </p:cNvPicPr>
+          <p:nvPr/>
+        </p:nvPicPr>
+        <p:blipFill>
+          <a:blip r:embed="rId3">
+            <a:extLst>
+              <a:ext uri="{28A0092B-C50C-407E-A947-70E740481C1C}">
+                <a14:useLocalDpi xmlns:a14="http://schemas.microsoft.com/office/drawing/2010/main" val="0"/>
+              </a:ext>
+            </a:extLst>
+          </a:blip>
+          <a:srcRect/>
+          <a:stretch>
+            <a:fillRect/>
+          </a:stretch>
+        </p:blipFill>
+        <p:spPr bwMode="auto">
+          <a:xfrm>
+            <a:off x="3601722" y="3625768"/>
+            <a:ext cx="1940556" cy="1293704"/>
+          </a:xfrm>
+          <a:prstGeom prst="rect">
+            <a:avLst/>
+          </a:prstGeom>
+          <a:noFill/>
+          <a:extLst>
+            <a:ext uri="{909E8E84-426E-40DD-AFC4-6F175D3DCCD1}">
+              <a14:hiddenFill xmlns:a14="http://schemas.microsoft.com/office/drawing/2010/main">
+                <a:solidFill>
+                  <a:srgbClr val="FFFFFF"/>
+                </a:solidFill>
+              </a14:hiddenFill>
+            </a:ext>
+          </a:extLst>
+        </p:spPr>
+      </p:pic>
     </p:spTree>
   </p:cSld>
   <p:clrMapOvr>
@@ -12650,7 +14349,7 @@
           <a:bodyPr/>
           <a:lstStyle/>
           <a:p>
-            <a:endParaRPr lang="en-US"/>
+            <a:endParaRPr lang="hr-HR" noProof="0" dirty="0"/>
           </a:p>
         </p:txBody>
       </p:sp>
@@ -12679,14 +14378,14 @@
               <a:buNone/>
             </a:pPr>
             <a:r>
-              <a:rPr lang="en-US" sz="2000" b="1" dirty="0">
+              <a:rPr lang="hr-HR" sz="2000" b="1" noProof="0" dirty="0">
                 <a:solidFill>
                   <a:srgbClr val="FFFFFF"/>
                 </a:solidFill>
               </a:rPr>
               <a:t>Lažne vijesti i romantične / investicijske prijevare</a:t>
             </a:r>
-            <a:endParaRPr lang="en-US" sz="2000" dirty="0"/>
+            <a:endParaRPr lang="hr-HR" sz="2000" noProof="0" dirty="0"/>
           </a:p>
         </p:txBody>
       </p:sp>
@@ -12720,7 +14419,7 @@
           <a:bodyPr/>
           <a:lstStyle/>
           <a:p>
-            <a:endParaRPr lang="en-US"/>
+            <a:endParaRPr lang="hr-HR" noProof="0" dirty="0"/>
           </a:p>
         </p:txBody>
       </p:sp>
@@ -12752,7 +14451,7 @@
           <a:bodyPr/>
           <a:lstStyle/>
           <a:p>
-            <a:endParaRPr lang="en-US"/>
+            <a:endParaRPr lang="hr-HR" noProof="0" dirty="0"/>
           </a:p>
         </p:txBody>
       </p:sp>
@@ -12781,14 +14480,14 @@
               <a:buNone/>
             </a:pPr>
             <a:r>
-              <a:rPr lang="en-US" sz="1300" b="1" dirty="0">
+              <a:rPr lang="hr-HR" sz="1300" b="1" noProof="0" dirty="0">
                 <a:solidFill>
                   <a:srgbClr val="FFFFFF"/>
                 </a:solidFill>
               </a:rPr>
               <a:t>Kako prepoznati lažnu vijest?</a:t>
             </a:r>
-            <a:endParaRPr lang="en-US" sz="1300" dirty="0"/>
+            <a:endParaRPr lang="hr-HR" sz="1300" noProof="0" dirty="0"/>
           </a:p>
         </p:txBody>
       </p:sp>
@@ -12821,14 +14520,14 @@
               <a:buChar char="•"/>
             </a:pPr>
             <a:r>
-              <a:rPr lang="en-US" sz="1300" dirty="0">
+              <a:rPr lang="hr-HR" sz="1300" noProof="0" dirty="0">
                 <a:solidFill>
                   <a:srgbClr val="444444"/>
                 </a:solidFill>
               </a:rPr>
               <a:t>Naslov je šokantan i provocira emocije</a:t>
             </a:r>
-            <a:endParaRPr lang="en-US" sz="1300" dirty="0"/>
+            <a:endParaRPr lang="hr-HR" sz="1300" noProof="0" dirty="0"/>
           </a:p>
           <a:p>
             <a:pPr marL="342900" indent="-342900">
@@ -12839,42 +14538,13 @@
               <a:buChar char="•"/>
             </a:pPr>
             <a:r>
-              <a:rPr lang="en-US" sz="1300" dirty="0">
-                <a:solidFill>
-                  <a:srgbClr val="444444"/>
-                </a:solidFill>
-              </a:rPr>
-              <a:t>Nema izvora ili autora — legitimni medij uvijek </a:t>
-            </a:r>
-            <a:r>
-              <a:rPr lang="en-US" sz="1300" dirty="0" err="1">
-                <a:solidFill>
-                  <a:srgbClr val="444444"/>
-                </a:solidFill>
-              </a:rPr>
-              <a:t>potpisuje</a:t>
-            </a:r>
-            <a:r>
-              <a:rPr lang="en-US" sz="1300" dirty="0">
-                <a:solidFill>
-                  <a:srgbClr val="444444"/>
-                </a:solidFill>
-              </a:rPr>
-              <a:t> </a:t>
-            </a:r>
-            <a:r>
-              <a:rPr lang="en-US" sz="1300" dirty="0" err="1">
-                <a:solidFill>
-                  <a:srgbClr val="444444"/>
-                </a:solidFill>
-              </a:rPr>
-              <a:t>tekst</a:t>
-            </a:r>
-            <a:endParaRPr lang="en-US" sz="1300" dirty="0">
-              <a:solidFill>
-                <a:srgbClr val="444444"/>
-              </a:solidFill>
-            </a:endParaRPr>
+              <a:rPr lang="hr-HR" sz="1300" noProof="0" dirty="0">
+                <a:solidFill>
+                  <a:srgbClr val="444444"/>
+                </a:solidFill>
+              </a:rPr>
+              <a:t>Nema izvora ili autora — legitimni medij uvijek potpisuje tekst</a:t>
+            </a:r>
           </a:p>
           <a:p>
             <a:pPr marL="342900" indent="-342900">
@@ -12885,134 +14555,13 @@
               <a:buChar char="•"/>
             </a:pPr>
             <a:r>
-              <a:rPr lang="en-US" sz="1300" dirty="0" err="1">
-                <a:solidFill>
-                  <a:srgbClr val="444444"/>
-                </a:solidFill>
-              </a:rPr>
-              <a:t>Lažni</a:t>
-            </a:r>
-            <a:r>
-              <a:rPr lang="en-US" sz="1300" dirty="0">
-                <a:solidFill>
-                  <a:srgbClr val="444444"/>
-                </a:solidFill>
-              </a:rPr>
-              <a:t> </a:t>
-            </a:r>
-            <a:r>
-              <a:rPr lang="en-US" sz="1300" dirty="0" err="1">
-                <a:solidFill>
-                  <a:srgbClr val="444444"/>
-                </a:solidFill>
-              </a:rPr>
-              <a:t>logotipovi</a:t>
-            </a:r>
-            <a:r>
-              <a:rPr lang="en-US" sz="1300" dirty="0">
-                <a:solidFill>
-                  <a:srgbClr val="444444"/>
-                </a:solidFill>
-              </a:rPr>
-              <a:t> – </a:t>
-            </a:r>
-            <a:r>
-              <a:rPr lang="en-US" sz="1300" dirty="0" err="1">
-                <a:solidFill>
-                  <a:srgbClr val="444444"/>
-                </a:solidFill>
-              </a:rPr>
-              <a:t>uvijek</a:t>
-            </a:r>
-            <a:r>
-              <a:rPr lang="en-US" sz="1300" dirty="0">
-                <a:solidFill>
-                  <a:srgbClr val="444444"/>
-                </a:solidFill>
-              </a:rPr>
-              <a:t> </a:t>
-            </a:r>
-            <a:r>
-              <a:rPr lang="en-US" sz="1300" dirty="0" err="1">
-                <a:solidFill>
-                  <a:srgbClr val="444444"/>
-                </a:solidFill>
-              </a:rPr>
-              <a:t>provjeriti</a:t>
-            </a:r>
-            <a:r>
-              <a:rPr lang="en-US" sz="1300" dirty="0">
-                <a:solidFill>
-                  <a:srgbClr val="444444"/>
-                </a:solidFill>
-              </a:rPr>
-              <a:t> </a:t>
-            </a:r>
-            <a:r>
-              <a:rPr lang="en-US" sz="1300" dirty="0" err="1">
-                <a:solidFill>
-                  <a:srgbClr val="444444"/>
-                </a:solidFill>
-              </a:rPr>
-              <a:t>adresu</a:t>
-            </a:r>
-            <a:r>
-              <a:rPr lang="en-US" sz="1300" dirty="0">
-                <a:solidFill>
-                  <a:srgbClr val="444444"/>
-                </a:solidFill>
-              </a:rPr>
-              <a:t> u </a:t>
-            </a:r>
-            <a:r>
-              <a:rPr lang="en-US" sz="1300" dirty="0" err="1">
-                <a:solidFill>
-                  <a:srgbClr val="444444"/>
-                </a:solidFill>
-              </a:rPr>
-              <a:t>pregledniku</a:t>
-            </a:r>
-            <a:r>
-              <a:rPr lang="en-US" sz="1300" dirty="0">
-                <a:solidFill>
-                  <a:srgbClr val="444444"/>
-                </a:solidFill>
-              </a:rPr>
-              <a:t> (da </a:t>
-            </a:r>
-            <a:r>
-              <a:rPr lang="en-US" sz="1300" dirty="0" err="1">
-                <a:solidFill>
-                  <a:srgbClr val="444444"/>
-                </a:solidFill>
-              </a:rPr>
-              <a:t>nije</a:t>
-            </a:r>
-            <a:r>
-              <a:rPr lang="en-US" sz="1300" dirty="0">
-                <a:solidFill>
-                  <a:srgbClr val="444444"/>
-                </a:solidFill>
-              </a:rPr>
-              <a:t> </a:t>
-            </a:r>
-            <a:r>
-              <a:rPr lang="en-US" sz="1300" dirty="0" err="1">
-                <a:solidFill>
-                  <a:srgbClr val="444444"/>
-                </a:solidFill>
-              </a:rPr>
-              <a:t>npr</a:t>
-            </a:r>
-            <a:r>
-              <a:rPr lang="en-US" sz="1300" dirty="0">
-                <a:solidFill>
-                  <a:srgbClr val="444444"/>
-                </a:solidFill>
-              </a:rPr>
-              <a:t>. n12.hr)</a:t>
-            </a:r>
-            <a:endParaRPr lang="en-US" sz="1300" dirty="0"/>
+              <a:rPr lang="hr-HR" sz="1300" noProof="0" dirty="0">
+                <a:solidFill>
+                  <a:srgbClr val="444444"/>
+                </a:solidFill>
+              </a:rPr>
+              <a:t>Lažni logotipovi – uvijek provjeriti adresu u pregledniku za nepravilnosti</a:t>
+            </a:r>
           </a:p>
           <a:p>
             <a:pPr marL="342900" indent="-342900">
@@ -13023,14 +14572,14 @@
               <a:buChar char="•"/>
             </a:pPr>
             <a:r>
-              <a:rPr lang="en-US" sz="1300" dirty="0">
+              <a:rPr lang="hr-HR" sz="1300" noProof="0" dirty="0">
                 <a:solidFill>
                   <a:srgbClr val="444444"/>
                 </a:solidFill>
               </a:rPr>
               <a:t>Svi vam šalju istu poruku — viralni sadržaj traži dvostruku provjeru</a:t>
             </a:r>
-            <a:endParaRPr lang="en-US" sz="1300" dirty="0"/>
+            <a:endParaRPr lang="hr-HR" sz="1300" noProof="0" dirty="0"/>
           </a:p>
           <a:p>
             <a:pPr marL="342900" indent="-342900">
@@ -13041,14 +14590,14 @@
               <a:buChar char="•"/>
             </a:pPr>
             <a:r>
-              <a:rPr lang="en-US" sz="1300" dirty="0">
+              <a:rPr lang="hr-HR" sz="1300" noProof="0" dirty="0">
                 <a:solidFill>
                   <a:srgbClr val="444444"/>
                 </a:solidFill>
               </a:rPr>
               <a:t>Provjerite na Faktograf.hr — jedini hrvatski fact-checking portal</a:t>
             </a:r>
-            <a:endParaRPr lang="en-US" sz="1300" dirty="0"/>
+            <a:endParaRPr lang="hr-HR" sz="1300" noProof="0" dirty="0"/>
           </a:p>
           <a:p>
             <a:pPr marL="342900" indent="-342900">
@@ -13059,28 +14608,12 @@
               <a:buChar char="•"/>
             </a:pPr>
             <a:r>
-              <a:rPr lang="en-US" sz="1300" dirty="0">
-                <a:solidFill>
-                  <a:srgbClr val="444444"/>
-                </a:solidFill>
-              </a:rPr>
-              <a:t>Ako niste </a:t>
-            </a:r>
-            <a:r>
-              <a:rPr lang="en-US" sz="1300" dirty="0" err="1">
-                <a:solidFill>
-                  <a:srgbClr val="444444"/>
-                </a:solidFill>
-              </a:rPr>
-              <a:t>sigurni</a:t>
-            </a:r>
-            <a:r>
-              <a:rPr lang="en-US" sz="1300" dirty="0">
-                <a:solidFill>
-                  <a:srgbClr val="444444"/>
-                </a:solidFill>
-              </a:rPr>
-              <a:t> </a:t>
+              <a:rPr lang="hr-HR" sz="1300" noProof="0" dirty="0">
+                <a:solidFill>
+                  <a:srgbClr val="444444"/>
+                </a:solidFill>
+              </a:rPr>
+              <a:t>Ako niste sigurni </a:t>
             </a:r>
           </a:p>
           <a:p>
@@ -13091,14 +14624,14 @@
               <a:buSzPct val="100000"/>
             </a:pPr>
             <a:r>
-              <a:rPr lang="en-US" sz="1300" dirty="0">
+              <a:rPr lang="hr-HR" sz="1300" noProof="0" dirty="0">
                 <a:solidFill>
                   <a:srgbClr val="444444"/>
                 </a:solidFill>
               </a:rPr>
               <a:t> NE DIJELITE dalje!</a:t>
             </a:r>
-            <a:endParaRPr lang="en-US" sz="1300" dirty="0"/>
+            <a:endParaRPr lang="hr-HR" sz="1300" noProof="0" dirty="0"/>
           </a:p>
         </p:txBody>
       </p:sp>
@@ -13132,7 +14665,7 @@
           <a:bodyPr/>
           <a:lstStyle/>
           <a:p>
-            <a:endParaRPr lang="en-US"/>
+            <a:endParaRPr lang="hr-HR" noProof="0" dirty="0"/>
           </a:p>
         </p:txBody>
       </p:sp>
@@ -13164,7 +14697,7 @@
           <a:bodyPr/>
           <a:lstStyle/>
           <a:p>
-            <a:endParaRPr lang="en-US"/>
+            <a:endParaRPr lang="hr-HR" noProof="0" dirty="0"/>
           </a:p>
         </p:txBody>
       </p:sp>
@@ -13193,14 +14726,14 @@
               <a:buNone/>
             </a:pPr>
             <a:r>
-              <a:rPr lang="en-US" sz="1300" b="1" dirty="0">
+              <a:rPr lang="hr-HR" sz="1300" b="1" noProof="0" dirty="0">
                 <a:solidFill>
                   <a:srgbClr val="FFFFFF"/>
                 </a:solidFill>
               </a:rPr>
               <a:t>⚠  Romantična prijevara (romance scam)</a:t>
             </a:r>
-            <a:endParaRPr lang="en-US" sz="1300" dirty="0"/>
+            <a:endParaRPr lang="hr-HR" sz="1300" noProof="0" dirty="0"/>
           </a:p>
         </p:txBody>
       </p:sp>
@@ -13229,7 +14762,7 @@
               <a:buNone/>
             </a:pPr>
             <a:r>
-              <a:rPr lang="en-US" sz="1300" b="1" dirty="0">
+              <a:rPr lang="hr-HR" sz="1300" b="1" noProof="0" dirty="0">
                 <a:solidFill>
                   <a:srgbClr val="FFFFFF"/>
                 </a:solidFill>
@@ -13238,7 +14771,7 @@
 </a:t>
             </a:r>
             <a:r>
-              <a:rPr lang="en-US" sz="1300" dirty="0">
+              <a:rPr lang="hr-HR" sz="1300" noProof="0" dirty="0">
                 <a:solidFill>
                   <a:srgbClr val="FFAAAA"/>
                 </a:solidFill>
@@ -13247,7 +14780,7 @@
 </a:t>
             </a:r>
             <a:r>
-              <a:rPr lang="en-US" sz="1300" dirty="0">
+              <a:rPr lang="hr-HR" sz="1300" noProof="0" dirty="0">
                 <a:solidFill>
                   <a:srgbClr val="CCCCCC"/>
                 </a:solidFill>
@@ -13256,7 +14789,7 @@
 </a:t>
             </a:r>
             <a:r>
-              <a:rPr lang="en-US" sz="1300" dirty="0">
+              <a:rPr lang="hr-HR" sz="1300" noProof="0" dirty="0">
                 <a:solidFill>
                   <a:srgbClr val="FFAAAA"/>
                 </a:solidFill>
@@ -13265,7 +14798,7 @@
 </a:t>
             </a:r>
             <a:r>
-              <a:rPr lang="en-US" sz="1300" dirty="0">
+              <a:rPr lang="hr-HR" sz="1300" noProof="0" dirty="0">
                 <a:solidFill>
                   <a:srgbClr val="CCCCCC"/>
                 </a:solidFill>
@@ -13275,14 +14808,14 @@
 </a:t>
             </a:r>
             <a:r>
-              <a:rPr lang="en-US" sz="1200" i="1" dirty="0">
+              <a:rPr lang="hr-HR" sz="1200" i="1" noProof="0" dirty="0">
                 <a:solidFill>
                   <a:srgbClr val="FF9999"/>
                 </a:solidFill>
               </a:rPr>
               <a:t>MUP upozorava: ovo je financijski najrazornija vrsta prijevare!</a:t>
             </a:r>
-            <a:endParaRPr lang="en-US" sz="1300" dirty="0"/>
+            <a:endParaRPr lang="hr-HR" sz="1300" noProof="0" dirty="0"/>
           </a:p>
         </p:txBody>
       </p:sp>
@@ -13394,7 +14927,7 @@
           <a:bodyPr/>
           <a:lstStyle/>
           <a:p>
-            <a:endParaRPr lang="en-US"/>
+            <a:endParaRPr lang="hr-HR" noProof="0" dirty="0"/>
           </a:p>
         </p:txBody>
       </p:sp>
@@ -13423,14 +14956,14 @@
               <a:buNone/>
             </a:pPr>
             <a:r>
-              <a:rPr lang="en-US" sz="2000" b="1" dirty="0">
+              <a:rPr lang="hr-HR" sz="2000" b="1" noProof="0" dirty="0">
                 <a:solidFill>
                   <a:srgbClr val="FFFFFF"/>
                 </a:solidFill>
               </a:rPr>
               <a:t>Opasnosti na društvenim mrežama i WhatsApp/Viber prijevare</a:t>
             </a:r>
-            <a:endParaRPr lang="en-US" sz="2000" dirty="0"/>
+            <a:endParaRPr lang="hr-HR" sz="2000" noProof="0" dirty="0"/>
           </a:p>
         </p:txBody>
       </p:sp>
@@ -13464,7 +14997,7 @@
           <a:bodyPr/>
           <a:lstStyle/>
           <a:p>
-            <a:endParaRPr lang="en-US"/>
+            <a:endParaRPr lang="hr-HR" noProof="0" dirty="0"/>
           </a:p>
         </p:txBody>
       </p:sp>
@@ -13496,7 +15029,7 @@
           <a:bodyPr/>
           <a:lstStyle/>
           <a:p>
-            <a:endParaRPr lang="en-US"/>
+            <a:endParaRPr lang="hr-HR" noProof="0" dirty="0"/>
           </a:p>
         </p:txBody>
       </p:sp>
@@ -13525,14 +15058,14 @@
               <a:buNone/>
             </a:pPr>
             <a:r>
-              <a:rPr lang="en-US" sz="1300" b="1" dirty="0">
+              <a:rPr lang="hr-HR" sz="1300" b="1" noProof="0" dirty="0">
                 <a:solidFill>
                   <a:srgbClr val="FFFFFF"/>
                 </a:solidFill>
               </a:rPr>
               <a:t>Pravila privatnosti na Facebooku</a:t>
             </a:r>
-            <a:endParaRPr lang="en-US" sz="1300" dirty="0"/>
+            <a:endParaRPr lang="hr-HR" sz="1300" noProof="0" dirty="0"/>
           </a:p>
         </p:txBody>
       </p:sp>
@@ -13565,14 +15098,14 @@
               <a:buChar char="•"/>
             </a:pPr>
             <a:r>
-              <a:rPr lang="en-US" sz="1300" dirty="0">
+              <a:rPr lang="hr-HR" sz="1300" noProof="0" dirty="0">
                 <a:solidFill>
                   <a:srgbClr val="444444"/>
                 </a:solidFill>
               </a:rPr>
               <a:t>Postavite profil na 'Samo prijatelji'</a:t>
             </a:r>
-            <a:endParaRPr lang="en-US" sz="1300" dirty="0"/>
+            <a:endParaRPr lang="hr-HR" sz="1300" noProof="0" dirty="0"/>
           </a:p>
           <a:p>
             <a:pPr marL="342900" indent="-342900">
@@ -13583,14 +15116,14 @@
               <a:buChar char="•"/>
             </a:pPr>
             <a:r>
-              <a:rPr lang="en-US" sz="1300" dirty="0">
+              <a:rPr lang="hr-HR" sz="1300" noProof="0" dirty="0">
                 <a:solidFill>
                   <a:srgbClr val="444444"/>
                 </a:solidFill>
               </a:rPr>
               <a:t>Ne prihvaćajte zahtjeve nepoznatih osoba</a:t>
             </a:r>
-            <a:endParaRPr lang="en-US" sz="1300" dirty="0"/>
+            <a:endParaRPr lang="hr-HR" sz="1300" noProof="0" dirty="0"/>
           </a:p>
           <a:p>
             <a:pPr marL="342900" indent="-342900">
@@ -13601,14 +15134,14 @@
               <a:buChar char="•"/>
             </a:pPr>
             <a:r>
-              <a:rPr lang="en-US" sz="1300" dirty="0">
+              <a:rPr lang="hr-HR" sz="1300" noProof="0" dirty="0">
                 <a:solidFill>
                   <a:srgbClr val="444444"/>
                 </a:solidFill>
               </a:rPr>
               <a:t>Ne objavljujte adresu, broj telefona ni osobne dokumente</a:t>
             </a:r>
-            <a:endParaRPr lang="en-US" sz="1300" dirty="0"/>
+            <a:endParaRPr lang="hr-HR" sz="1300" noProof="0" dirty="0"/>
           </a:p>
           <a:p>
             <a:pPr marL="342900" indent="-342900">
@@ -13619,14 +15152,14 @@
               <a:buChar char="•"/>
             </a:pPr>
             <a:r>
-              <a:rPr lang="en-US" sz="1300" dirty="0">
+              <a:rPr lang="hr-HR" sz="1300" noProof="0" dirty="0">
                 <a:solidFill>
                   <a:srgbClr val="444444"/>
                 </a:solidFill>
               </a:rPr>
               <a:t>Ne objavljujte da ste na odmoru dok ste na odmoru — pozivnica za provalu!</a:t>
             </a:r>
-            <a:endParaRPr lang="en-US" sz="1300" dirty="0"/>
+            <a:endParaRPr lang="hr-HR" sz="1300" noProof="0" dirty="0"/>
           </a:p>
           <a:p>
             <a:pPr marL="342900" indent="-342900">
@@ -13637,14 +15170,14 @@
               <a:buChar char="•"/>
             </a:pPr>
             <a:r>
-              <a:rPr lang="en-US" sz="1300" dirty="0">
+              <a:rPr lang="hr-HR" sz="1300" noProof="0" dirty="0">
                 <a:solidFill>
                   <a:srgbClr val="444444"/>
                 </a:solidFill>
               </a:rPr>
               <a:t>Redovito provjeravajte koje aplikacije imaju pristup profilu</a:t>
             </a:r>
-            <a:endParaRPr lang="en-US" sz="1300" dirty="0"/>
+            <a:endParaRPr lang="hr-HR" sz="1300" noProof="0" dirty="0"/>
           </a:p>
         </p:txBody>
       </p:sp>
@@ -13678,7 +15211,7 @@
           <a:bodyPr/>
           <a:lstStyle/>
           <a:p>
-            <a:endParaRPr lang="en-US" dirty="0"/>
+            <a:endParaRPr lang="hr-HR" noProof="0" dirty="0"/>
           </a:p>
         </p:txBody>
       </p:sp>
@@ -13710,7 +15243,7 @@
           <a:bodyPr/>
           <a:lstStyle/>
           <a:p>
-            <a:endParaRPr lang="en-US"/>
+            <a:endParaRPr lang="hr-HR" noProof="0" dirty="0"/>
           </a:p>
         </p:txBody>
       </p:sp>
@@ -13739,14 +15272,14 @@
               <a:buNone/>
             </a:pPr>
             <a:r>
-              <a:rPr lang="en-US" sz="1300" b="1" dirty="0">
+              <a:rPr lang="hr-HR" sz="1300" b="1" noProof="0" dirty="0">
                 <a:solidFill>
                   <a:srgbClr val="FFFFFF"/>
                 </a:solidFill>
               </a:rPr>
               <a:t>WhatsApp/Viber prijevare — upozorenja</a:t>
             </a:r>
-            <a:endParaRPr lang="en-US" sz="1300" dirty="0"/>
+            <a:endParaRPr lang="hr-HR" sz="1300" noProof="0" dirty="0"/>
           </a:p>
         </p:txBody>
       </p:sp>
@@ -13779,14 +15312,14 @@
               <a:buChar char="•"/>
             </a:pPr>
             <a:r>
-              <a:rPr lang="en-US" sz="1300" dirty="0">
+              <a:rPr lang="hr-HR" sz="1300" noProof="0" dirty="0">
                 <a:solidFill>
                   <a:srgbClr val="444444"/>
                 </a:solidFill>
               </a:rPr>
               <a:t>"Mama/Tata, ovo je moj novi broj, trebam hitno pomoć." → Uvijek nazovite provjeren stari broj!</a:t>
             </a:r>
-            <a:endParaRPr lang="en-US" sz="1300" dirty="0"/>
+            <a:endParaRPr lang="hr-HR" sz="1300" noProof="0" dirty="0"/>
           </a:p>
           <a:p>
             <a:pPr marL="342900" indent="-342900">
@@ -13797,14 +15330,14 @@
               <a:buChar char="•"/>
             </a:pPr>
             <a:r>
-              <a:rPr lang="en-US" sz="1300" dirty="0">
+              <a:rPr lang="hr-HR" sz="1300" noProof="0" dirty="0">
                 <a:solidFill>
                   <a:srgbClr val="444444"/>
                 </a:solidFill>
               </a:rPr>
               <a:t>Lažna nagradna igra: "Dobili ste nagradu, samo popunite formular..." → Ne postoji!</a:t>
             </a:r>
-            <a:endParaRPr lang="en-US" sz="1300" dirty="0"/>
+            <a:endParaRPr lang="hr-HR" sz="1300" noProof="0" dirty="0"/>
           </a:p>
           <a:p>
             <a:pPr marL="342900" indent="-342900">
@@ -13815,14 +15348,14 @@
               <a:buChar char="•"/>
             </a:pPr>
             <a:r>
-              <a:rPr lang="en-US" sz="1300" dirty="0">
+              <a:rPr lang="hr-HR" sz="1300" noProof="0" dirty="0">
                 <a:solidFill>
                   <a:srgbClr val="444444"/>
                 </a:solidFill>
               </a:rPr>
               <a:t>"Kaufland/Konzum poklon kartica za prvih 500 klikova" → Prijevara za krađu podataka</a:t>
             </a:r>
-            <a:endParaRPr lang="en-US" sz="1300" dirty="0"/>
+            <a:endParaRPr lang="hr-HR" sz="1300" noProof="0" dirty="0"/>
           </a:p>
           <a:p>
             <a:pPr marL="342900" indent="-342900">
@@ -13833,14 +15366,14 @@
               <a:buChar char="•"/>
             </a:pPr>
             <a:r>
-              <a:rPr lang="en-US" sz="1300" dirty="0">
+              <a:rPr lang="hr-HR" sz="1300" noProof="0" dirty="0">
                 <a:solidFill>
                   <a:srgbClr val="444444"/>
                 </a:solidFill>
               </a:rPr>
               <a:t>Poziv za glasanje: link zapravo krade vaše podatke ili instalira virus</a:t>
             </a:r>
-            <a:endParaRPr lang="en-US" sz="1300" dirty="0"/>
+            <a:endParaRPr lang="hr-HR" sz="1300" noProof="0" dirty="0"/>
           </a:p>
           <a:p>
             <a:pPr marL="342900" indent="-342900">
@@ -13851,14 +15384,14 @@
               <a:buChar char="•"/>
             </a:pPr>
             <a:r>
-              <a:rPr lang="en-US" sz="1300" dirty="0">
+              <a:rPr lang="hr-HR" sz="1300" noProof="0" dirty="0">
                 <a:solidFill>
                   <a:srgbClr val="444444"/>
                 </a:solidFill>
               </a:rPr>
               <a:t>Poruke koje traže prosljeđivanje — bez provjere nikad ne proslijedite!</a:t>
             </a:r>
-            <a:endParaRPr lang="en-US" sz="1300" dirty="0"/>
+            <a:endParaRPr lang="hr-HR" sz="1300" noProof="0" dirty="0"/>
           </a:p>
         </p:txBody>
       </p:sp>
@@ -13891,8 +15424,8 @@
         </p:blipFill>
         <p:spPr bwMode="auto">
           <a:xfrm>
-            <a:off x="394895" y="3451945"/>
-            <a:ext cx="2670435" cy="1513247"/>
+            <a:off x="1371155" y="3638009"/>
+            <a:ext cx="1829690" cy="1036825"/>
           </a:xfrm>
           <a:prstGeom prst="rect">
             <a:avLst/>
@@ -13909,42 +15442,12 @@
           </a:extLst>
         </p:spPr>
       </p:pic>
-      <p:pic>
-        <p:nvPicPr>
-          <p:cNvPr id="13" name="Picture 12">
+      <p:sp>
+        <p:nvSpPr>
+          <p:cNvPr id="17" name="TextBox 16">
             <a:extLst>
               <a:ext uri="{FF2B5EF4-FFF2-40B4-BE49-F238E27FC236}">
-                <a16:creationId xmlns:a16="http://schemas.microsoft.com/office/drawing/2014/main" id="{6E2F7F61-CB83-6F93-ECEC-1F0411370813}"/>
-              </a:ext>
-            </a:extLst>
-          </p:cNvPr>
-          <p:cNvPicPr>
-            <a:picLocks noChangeAspect="1"/>
-          </p:cNvPicPr>
-          <p:nvPr/>
-        </p:nvPicPr>
-        <p:blipFill>
-          <a:blip r:embed="rId4"/>
-          <a:stretch>
-            <a:fillRect/>
-          </a:stretch>
-        </p:blipFill>
-        <p:spPr>
-          <a:xfrm>
-            <a:off x="3469491" y="3350522"/>
-            <a:ext cx="1415227" cy="1614670"/>
-          </a:xfrm>
-          <a:prstGeom prst="rect">
-            <a:avLst/>
-          </a:prstGeom>
-        </p:spPr>
-      </p:pic>
-      <p:sp>
-        <p:nvSpPr>
-          <p:cNvPr id="14" name="TextBox 13">
-            <a:extLst>
-              <a:ext uri="{FF2B5EF4-FFF2-40B4-BE49-F238E27FC236}">
-                <a16:creationId xmlns:a16="http://schemas.microsoft.com/office/drawing/2014/main" id="{A22AEA94-E84F-DA9E-CB01-FC8AD0C358B1}"/>
+                <a16:creationId xmlns:a16="http://schemas.microsoft.com/office/drawing/2014/main" id="{95FB0933-4AD1-9F06-8472-3DACD24F73F3}"/>
               </a:ext>
             </a:extLst>
           </p:cNvPr>
@@ -13953,53 +15456,45 @@
         </p:nvSpPr>
         <p:spPr>
           <a:xfrm>
-            <a:off x="4979241" y="4154162"/>
-            <a:ext cx="3837910" cy="369332"/>
-          </a:xfrm>
-          <a:prstGeom prst="rect">
-            <a:avLst/>
-          </a:prstGeom>
-          <a:noFill/>
-        </p:spPr>
-        <p:txBody>
-          <a:bodyPr wrap="none" rtlCol="0">
+            <a:off x="5485698" y="4023220"/>
+            <a:ext cx="2816938" cy="408623"/>
+          </a:xfrm>
+          <a:prstGeom prst="roundRect">
+            <a:avLst/>
+          </a:prstGeom>
+          <a:solidFill>
+            <a:srgbClr val="C00000"/>
+          </a:solidFill>
+          <a:ln>
+            <a:solidFill>
+              <a:schemeClr val="bg1">
+                <a:lumMod val="95000"/>
+              </a:schemeClr>
+            </a:solidFill>
+          </a:ln>
+          <a:effectLst>
+            <a:outerShdw blurRad="50800" dist="38100" dir="13500000" algn="br" rotWithShape="0">
+              <a:prstClr val="black">
+                <a:alpha val="40000"/>
+              </a:prstClr>
+            </a:outerShdw>
+          </a:effectLst>
+        </p:spPr>
+        <p:txBody>
+          <a:bodyPr wrap="square" rtlCol="0">
             <a:spAutoFit/>
           </a:bodyPr>
           <a:lstStyle/>
           <a:p>
-            <a:r>
-              <a:rPr lang="en-US" dirty="0"/>
-              <a:t>&lt;- spam </a:t>
-            </a:r>
-            <a:r>
-              <a:rPr lang="en-US" dirty="0" err="1"/>
-              <a:t>poruke</a:t>
-            </a:r>
-            <a:r>
-              <a:rPr lang="en-US" dirty="0"/>
-              <a:t> </a:t>
-            </a:r>
-            <a:r>
-              <a:rPr lang="en-US" dirty="0" err="1"/>
-              <a:t>prijevare</a:t>
-            </a:r>
-            <a:r>
-              <a:rPr lang="en-US" dirty="0"/>
-              <a:t> </a:t>
-            </a:r>
-            <a:r>
-              <a:rPr lang="en-US" dirty="0" err="1"/>
-              <a:t>na</a:t>
-            </a:r>
-            <a:r>
-              <a:rPr lang="en-US" dirty="0"/>
-              <a:t> </a:t>
-            </a:r>
-            <a:r>
-              <a:rPr lang="en-US" dirty="0" err="1"/>
-              <a:t>facebooku</a:t>
-            </a:r>
-            <a:endParaRPr lang="en-US" dirty="0"/>
+            <a:pPr algn="ctr"/>
+            <a:r>
+              <a:rPr lang="hr-HR" noProof="0" dirty="0">
+                <a:solidFill>
+                  <a:schemeClr val="bg1"/>
+                </a:solidFill>
+              </a:rPr>
+              <a:t>POVEZNICE (LINKOVI)!!!</a:t>
+            </a:r>
           </a:p>
         </p:txBody>
       </p:sp>
@@ -14064,7 +15559,7 @@
           <a:bodyPr/>
           <a:lstStyle/>
           <a:p>
-            <a:endParaRPr lang="en-US"/>
+            <a:endParaRPr lang="hr-HR" noProof="0" dirty="0"/>
           </a:p>
         </p:txBody>
       </p:sp>
@@ -14093,14 +15588,14 @@
               <a:buNone/>
             </a:pPr>
             <a:r>
-              <a:rPr lang="en-US" sz="2000" b="1" dirty="0">
+              <a:rPr lang="hr-HR" sz="2000" b="1" noProof="0" dirty="0">
                 <a:solidFill>
                   <a:srgbClr val="FFFFFF"/>
                 </a:solidFill>
               </a:rPr>
               <a:t>Online bankarstvo: zlatna pravila sigurnosti</a:t>
             </a:r>
-            <a:endParaRPr lang="en-US" sz="2000" dirty="0"/>
+            <a:endParaRPr lang="hr-HR" sz="2000" noProof="0" dirty="0"/>
           </a:p>
         </p:txBody>
       </p:sp>
@@ -14133,14 +15628,14 @@
               <a:buChar char="•"/>
             </a:pPr>
             <a:r>
-              <a:rPr lang="en-US" sz="1400" dirty="0">
+              <a:rPr lang="hr-HR" sz="1400" noProof="0" dirty="0">
                 <a:solidFill>
                   <a:srgbClr val="444444"/>
                 </a:solidFill>
               </a:rPr>
               <a:t>Koristite samo službenu aplikaciju banke — preuzmite je iz App Storea ili Google Playa, NIKAD klikom na link u poruci</a:t>
             </a:r>
-            <a:endParaRPr lang="en-US" sz="1400" dirty="0"/>
+            <a:endParaRPr lang="hr-HR" sz="1400" noProof="0" dirty="0"/>
           </a:p>
           <a:p>
             <a:pPr marL="342900" indent="-342900">
@@ -14151,14 +15646,14 @@
               <a:buChar char="•"/>
             </a:pPr>
             <a:r>
-              <a:rPr lang="en-US" sz="1400" dirty="0">
+              <a:rPr lang="hr-HR" sz="1400" noProof="0" dirty="0">
                 <a:solidFill>
                   <a:srgbClr val="444444"/>
                 </a:solidFill>
               </a:rPr>
               <a:t>Nikad ne otvarajte internetsko bankarstvo na tuđem računalu ili javnom Wi-Fiju</a:t>
             </a:r>
-            <a:endParaRPr lang="en-US" sz="1400" dirty="0"/>
+            <a:endParaRPr lang="hr-HR" sz="1400" noProof="0" dirty="0"/>
           </a:p>
           <a:p>
             <a:pPr marL="342900" indent="-342900">
@@ -14169,14 +15664,14 @@
               <a:buChar char="•"/>
             </a:pPr>
             <a:r>
-              <a:rPr lang="en-US" sz="1400" dirty="0">
+              <a:rPr lang="hr-HR" sz="1400" noProof="0" dirty="0">
                 <a:solidFill>
                   <a:srgbClr val="444444"/>
                 </a:solidFill>
               </a:rPr>
               <a:t>Provjerite adresu stranice banke — mora biti https:// i točno ispravna (npr. hpb.hr, a ne hpb-online.net)</a:t>
             </a:r>
-            <a:endParaRPr lang="en-US" sz="1400" dirty="0"/>
+            <a:endParaRPr lang="hr-HR" sz="1400" noProof="0" dirty="0"/>
           </a:p>
           <a:p>
             <a:pPr marL="342900" indent="-342900">
@@ -14187,14 +15682,14 @@
               <a:buChar char="•"/>
             </a:pPr>
             <a:r>
-              <a:rPr lang="en-US" sz="1400" dirty="0">
+              <a:rPr lang="hr-HR" sz="1400" noProof="0" dirty="0">
                 <a:solidFill>
                   <a:srgbClr val="444444"/>
                 </a:solidFill>
               </a:rPr>
               <a:t>Banka NIKADA neće tražiti vaš PIN ni lozinku — ni telefonom, ni e-mailom, ni SMS-om</a:t>
             </a:r>
-            <a:endParaRPr lang="en-US" sz="1400" dirty="0"/>
+            <a:endParaRPr lang="hr-HR" sz="1400" noProof="0" dirty="0"/>
           </a:p>
           <a:p>
             <a:pPr marL="342900" indent="-342900">
@@ -14205,14 +15700,14 @@
               <a:buChar char="•"/>
             </a:pPr>
             <a:r>
-              <a:rPr lang="en-US" sz="1400" dirty="0">
+              <a:rPr lang="hr-HR" sz="1400" noProof="0" dirty="0">
                 <a:solidFill>
                   <a:srgbClr val="444444"/>
                 </a:solidFill>
               </a:rPr>
               <a:t>Postavite SMS obavijesti o transakcijama — svaka transakcija dolazi na vaš telefon</a:t>
             </a:r>
-            <a:endParaRPr lang="en-US" sz="1400" dirty="0"/>
+            <a:endParaRPr lang="hr-HR" sz="1400" noProof="0" dirty="0"/>
           </a:p>
           <a:p>
             <a:pPr marL="342900" indent="-342900">
@@ -14223,14 +15718,14 @@
               <a:buChar char="•"/>
             </a:pPr>
             <a:r>
-              <a:rPr lang="en-US" sz="1400" dirty="0">
+              <a:rPr lang="hr-HR" sz="1400" noProof="0" dirty="0">
                 <a:solidFill>
                   <a:srgbClr val="444444"/>
                 </a:solidFill>
               </a:rPr>
               <a:t>U slučaju sumnje odmah nazovite banku — na broj s poleđine kartice, NE na broj koji vam je netko poslao</a:t>
             </a:r>
-            <a:endParaRPr lang="en-US" sz="1400" dirty="0"/>
+            <a:endParaRPr lang="hr-HR" sz="1400" noProof="0" dirty="0"/>
           </a:p>
         </p:txBody>
       </p:sp>
@@ -14264,7 +15759,7 @@
           <a:bodyPr/>
           <a:lstStyle/>
           <a:p>
-            <a:endParaRPr lang="en-US"/>
+            <a:endParaRPr lang="hr-HR" noProof="0" dirty="0"/>
           </a:p>
         </p:txBody>
       </p:sp>
@@ -14296,7 +15791,7 @@
           <a:bodyPr/>
           <a:lstStyle/>
           <a:p>
-            <a:endParaRPr lang="en-US"/>
+            <a:endParaRPr lang="hr-HR" noProof="0" dirty="0"/>
           </a:p>
         </p:txBody>
       </p:sp>
@@ -14325,14 +15820,14 @@
               <a:buNone/>
             </a:pPr>
             <a:r>
-              <a:rPr lang="en-US" sz="1300" b="1" dirty="0">
+              <a:rPr lang="hr-HR" sz="1300" b="1" noProof="0" dirty="0">
                 <a:solidFill>
                   <a:srgbClr val="FFFFFF"/>
                 </a:solidFill>
               </a:rPr>
               <a:t>Sigurna stranica?</a:t>
             </a:r>
-            <a:endParaRPr lang="en-US" sz="1300" dirty="0"/>
+            <a:endParaRPr lang="hr-HR" sz="1300" noProof="0" dirty="0"/>
           </a:p>
         </p:txBody>
       </p:sp>
@@ -14361,7 +15856,7 @@
               <a:buNone/>
             </a:pPr>
             <a:r>
-              <a:rPr lang="en-US" sz="1400" dirty="0">
+              <a:rPr lang="hr-HR" sz="1400" noProof="0" dirty="0">
                 <a:solidFill>
                   <a:srgbClr val="66FF66"/>
                 </a:solidFill>
@@ -14369,7 +15864,7 @@
               <a:t>✓ </a:t>
             </a:r>
             <a:r>
-              <a:rPr lang="en-US" sz="1300" dirty="0">
+              <a:rPr lang="hr-HR" sz="1300" noProof="0" dirty="0">
                 <a:solidFill>
                   <a:srgbClr val="CCCCCC"/>
                 </a:solidFill>
@@ -14378,7 +15873,7 @@
 </a:t>
             </a:r>
             <a:r>
-              <a:rPr lang="en-US" sz="1400" dirty="0">
+              <a:rPr lang="hr-HR" sz="1400" noProof="0" dirty="0">
                 <a:solidFill>
                   <a:srgbClr val="66FF66"/>
                 </a:solidFill>
@@ -14386,7 +15881,7 @@
               <a:t>✓ </a:t>
             </a:r>
             <a:r>
-              <a:rPr lang="en-US" sz="1300" dirty="0">
+              <a:rPr lang="hr-HR" sz="1300" noProof="0" dirty="0">
                 <a:solidFill>
                   <a:srgbClr val="CCCCCC"/>
                 </a:solidFill>
@@ -14395,7 +15890,7 @@
 </a:t>
             </a:r>
             <a:r>
-              <a:rPr lang="en-US" sz="1400" dirty="0">
+              <a:rPr lang="hr-HR" sz="1400" noProof="0" dirty="0">
                 <a:solidFill>
                   <a:srgbClr val="66FF66"/>
                 </a:solidFill>
@@ -14403,7 +15898,7 @@
               <a:t>✓ </a:t>
             </a:r>
             <a:r>
-              <a:rPr lang="en-US" sz="1300" dirty="0">
+              <a:rPr lang="hr-HR" sz="1300" noProof="0" dirty="0">
                 <a:solidFill>
                   <a:srgbClr val="CCCCCC"/>
                 </a:solidFill>
@@ -14412,7 +15907,7 @@
 </a:t>
             </a:r>
             <a:r>
-              <a:rPr lang="en-US" sz="1300" b="1" dirty="0">
+              <a:rPr lang="hr-HR" sz="1300" b="1" noProof="0" dirty="0">
                 <a:solidFill>
                   <a:srgbClr val="66FF66"/>
                 </a:solidFill>
@@ -14421,7 +15916,7 @@
 </a:t>
             </a:r>
             <a:r>
-              <a:rPr lang="en-US" sz="1400" dirty="0">
+              <a:rPr lang="hr-HR" sz="1400" noProof="0" dirty="0">
                 <a:solidFill>
                   <a:srgbClr val="FF6666"/>
                 </a:solidFill>
@@ -14429,7 +15924,7 @@
               <a:t>✗ </a:t>
             </a:r>
             <a:r>
-              <a:rPr lang="en-US" sz="1300" dirty="0">
+              <a:rPr lang="hr-HR" sz="1300" noProof="0" dirty="0">
                 <a:solidFill>
                   <a:srgbClr val="FF9999"/>
                 </a:solidFill>
@@ -14438,7 +15933,7 @@
 </a:t>
             </a:r>
             <a:r>
-              <a:rPr lang="en-US" sz="1400" dirty="0">
+              <a:rPr lang="hr-HR" sz="1400" noProof="0" dirty="0">
                 <a:solidFill>
                   <a:srgbClr val="FF6666"/>
                 </a:solidFill>
@@ -14446,14 +15941,14 @@
               <a:t>✗ </a:t>
             </a:r>
             <a:r>
-              <a:rPr lang="en-US" sz="1300" dirty="0">
+              <a:rPr lang="hr-HR" sz="1300" noProof="0" dirty="0">
                 <a:solidFill>
                   <a:srgbClr val="FF9999"/>
                 </a:solidFill>
               </a:rPr>
               <a:t>NE: hpb.hr.support.net</a:t>
             </a:r>
-            <a:endParaRPr lang="en-US" sz="1400" dirty="0"/>
+            <a:endParaRPr lang="hr-HR" sz="1400" noProof="0" dirty="0"/>
           </a:p>
         </p:txBody>
       </p:sp>
